--- a/ufwl-timeline/UFWL_Presentation_AR.pptx
+++ b/ufwl-timeline/UFWL_Presentation_AR.pptx
@@ -8121,7 +8121,7 @@
         <p:spPr>
           <a:xfrm>
             <a:off x="6147511" y="1965960"/>
-            <a:ext cx="0" cy="3429000"/>
+            <a:ext cx="0" cy="3502152"/>
           </a:xfrm>
           <a:prstGeom prst="line">
             <a:avLst/>
@@ -8786,7 +8786,7 @@
         <p:spPr>
           <a:xfrm>
             <a:off x="5304339" y="1965960"/>
-            <a:ext cx="120453" cy="3429000"/>
+            <a:ext cx="120453" cy="3502152"/>
           </a:xfrm>
           <a:prstGeom prst="rect">
             <a:avLst/>
@@ -8922,7 +8922,7 @@
         <p:spPr>
           <a:xfrm>
             <a:off x="5304339" y="1965960"/>
-            <a:ext cx="0" cy="3429000"/>
+            <a:ext cx="0" cy="3502152"/>
           </a:xfrm>
           <a:prstGeom prst="line">
             <a:avLst/>
@@ -9587,7 +9587,7 @@
         <p:spPr>
           <a:xfrm>
             <a:off x="4461167" y="1965960"/>
-            <a:ext cx="120453" cy="3429000"/>
+            <a:ext cx="120453" cy="3502152"/>
           </a:xfrm>
           <a:prstGeom prst="rect">
             <a:avLst/>
@@ -9723,7 +9723,7 @@
         <p:spPr>
           <a:xfrm>
             <a:off x="4461167" y="1965960"/>
-            <a:ext cx="0" cy="3429000"/>
+            <a:ext cx="0" cy="3502152"/>
           </a:xfrm>
           <a:prstGeom prst="line">
             <a:avLst/>
@@ -10388,7 +10388,7 @@
         <p:spPr>
           <a:xfrm>
             <a:off x="3617995" y="1965960"/>
-            <a:ext cx="120453" cy="3429000"/>
+            <a:ext cx="120453" cy="3502152"/>
           </a:xfrm>
           <a:prstGeom prst="rect">
             <a:avLst/>
@@ -10524,7 +10524,7 @@
         <p:spPr>
           <a:xfrm>
             <a:off x="3617995" y="1965960"/>
-            <a:ext cx="0" cy="3429000"/>
+            <a:ext cx="0" cy="3502152"/>
           </a:xfrm>
           <a:prstGeom prst="line">
             <a:avLst/>
@@ -11189,7 +11189,7 @@
         <p:spPr>
           <a:xfrm>
             <a:off x="2774823" y="1965960"/>
-            <a:ext cx="120453" cy="3429000"/>
+            <a:ext cx="120453" cy="3502152"/>
           </a:xfrm>
           <a:prstGeom prst="rect">
             <a:avLst/>
@@ -11325,7 +11325,7 @@
         <p:spPr>
           <a:xfrm>
             <a:off x="2774823" y="1965960"/>
-            <a:ext cx="0" cy="3429000"/>
+            <a:ext cx="0" cy="3502152"/>
           </a:xfrm>
           <a:prstGeom prst="line">
             <a:avLst/>
@@ -11990,7 +11990,7 @@
         <p:spPr>
           <a:xfrm>
             <a:off x="1931651" y="1965960"/>
-            <a:ext cx="120453" cy="3429000"/>
+            <a:ext cx="120453" cy="3502152"/>
           </a:xfrm>
           <a:prstGeom prst="rect">
             <a:avLst/>
@@ -12126,7 +12126,7 @@
         <p:spPr>
           <a:xfrm>
             <a:off x="1931651" y="1965960"/>
-            <a:ext cx="0" cy="3429000"/>
+            <a:ext cx="0" cy="3502152"/>
           </a:xfrm>
           <a:prstGeom prst="line">
             <a:avLst/>
@@ -12791,7 +12791,7 @@
         <p:spPr>
           <a:xfrm>
             <a:off x="1088479" y="1965960"/>
-            <a:ext cx="120453" cy="3429000"/>
+            <a:ext cx="120453" cy="3502152"/>
           </a:xfrm>
           <a:prstGeom prst="rect">
             <a:avLst/>
@@ -12927,7 +12927,7 @@
         <p:spPr>
           <a:xfrm>
             <a:off x="1088479" y="1965960"/>
-            <a:ext cx="0" cy="3429000"/>
+            <a:ext cx="0" cy="3502152"/>
           </a:xfrm>
           <a:prstGeom prst="line">
             <a:avLst/>
@@ -13484,108 +13484,231 @@
         </p:nvSpPr>
         <p:spPr>
           <a:xfrm>
+            <a:off x="365760" y="1965960"/>
+            <a:ext cx="11460175" cy="274320"/>
+          </a:xfrm>
+          <a:prstGeom prst="rect">
+            <a:avLst/>
+          </a:prstGeom>
+          <a:solidFill>
+            <a:srgbClr val="FFFFFF"/>
+          </a:solidFill>
+          <a:ln w="6350">
+            <a:solidFill>
+              <a:srgbClr val="DFE6EA"/>
+            </a:solidFill>
+            <a:prstDash val="solid"/>
+          </a:ln>
+        </p:spPr>
+      </p:sp>
+      <p:sp>
+        <p:nvSpPr>
+          <p:cNvPr id="198" name="Shape 196"/>
+          <p:cNvSpPr/>
+          <p:nvPr/>
+        </p:nvSpPr>
+        <p:spPr>
+          <a:xfrm>
+            <a:off x="11515039" y="1984248"/>
+            <a:ext cx="237744" cy="237744"/>
+          </a:xfrm>
+          <a:prstGeom prst="ellipse">
+            <a:avLst/>
+          </a:prstGeom>
+          <a:solidFill>
+            <a:srgbClr val="3D3935"/>
+          </a:solidFill>
+          <a:ln w="12700">
+            <a:solidFill>
+              <a:srgbClr val="3D3935"/>
+            </a:solidFill>
+            <a:prstDash val="solid"/>
+          </a:ln>
+        </p:spPr>
+      </p:sp>
+      <p:sp>
+        <p:nvSpPr>
+          <p:cNvPr id="199" name="Text 197"/>
+          <p:cNvSpPr/>
+          <p:nvPr/>
+        </p:nvSpPr>
+        <p:spPr>
+          <a:xfrm>
+            <a:off x="11441887" y="1965960"/>
+            <a:ext cx="384048" cy="274320"/>
+          </a:xfrm>
+          <a:prstGeom prst="rect">
+            <a:avLst/>
+          </a:prstGeom>
+          <a:noFill/>
+          <a:ln/>
+        </p:spPr>
+        <p:txBody>
+          <a:bodyPr wrap="square" lIns="0" tIns="0" rIns="0" bIns="0" rtlCol="0" anchor="ctr">
+            <a:normAutofit/>
+          </a:bodyPr>
+          <a:lstStyle/>
+          <a:p>
+            <a:pPr rtl="1" algn="ctr" indent="0" marL="0">
+              <a:buNone/>
+            </a:pPr>
+            <a:r>
+              <a:rPr lang="ar-SA" altLang="en-US" sz="900" b="1" dirty="0">
+                <a:solidFill>
+                  <a:srgbClr val="FFFFFF"/>
+                </a:solidFill>
+                <a:latin typeface="Arial" pitchFamily="34" charset="0"/>
+                <a:ea typeface="Arial" pitchFamily="34" charset="-122"/>
+                <a:cs typeface="Arial" pitchFamily="34" charset="-120"/>
+              </a:rPr>
+              <a:t>Σ</a:t>
+            </a:r>
+            <a:endParaRPr lang="ar-SA" sz="900" dirty="0"/>
+          </a:p>
+        </p:txBody>
+      </p:sp>
+      <p:sp>
+        <p:nvSpPr>
+          <p:cNvPr id="200" name="Text 198"/>
+          <p:cNvSpPr/>
+          <p:nvPr/>
+        </p:nvSpPr>
+        <p:spPr>
+          <a:xfrm>
+            <a:off x="8762695" y="1965960"/>
+            <a:ext cx="2606040" cy="274320"/>
+          </a:xfrm>
+          <a:prstGeom prst="rect">
+            <a:avLst/>
+          </a:prstGeom>
+          <a:noFill/>
+          <a:ln/>
+        </p:spPr>
+        <p:txBody>
+          <a:bodyPr wrap="square" lIns="0" tIns="0" rIns="0" bIns="0" rtlCol="0" anchor="ctr">
+            <a:normAutofit/>
+          </a:bodyPr>
+          <a:lstStyle/>
+          <a:p>
+            <a:pPr rtl="1" algn="r" indent="0" marL="0">
+              <a:buNone/>
+            </a:pPr>
+            <a:r>
+              <a:rPr lang="ar-SA" altLang="en-US" sz="1000" b="1" dirty="0">
+                <a:solidFill>
+                  <a:srgbClr val="3D3935"/>
+                </a:solidFill>
+                <a:latin typeface="Arial" pitchFamily="34" charset="0"/>
+                <a:ea typeface="Arial" pitchFamily="34" charset="-122"/>
+                <a:cs typeface="Arial" pitchFamily="34" charset="-120"/>
+              </a:rPr>
+              <a:t>المدة الإجمالية للمشروع</a:t>
+            </a:r>
+            <a:endParaRPr lang="ar-SA" sz="1000" dirty="0"/>
+          </a:p>
+        </p:txBody>
+      </p:sp>
+      <p:sp>
+        <p:nvSpPr>
+          <p:cNvPr id="201" name="Text 199"/>
+          <p:cNvSpPr/>
+          <p:nvPr/>
+        </p:nvSpPr>
+        <p:spPr>
+          <a:xfrm>
+            <a:off x="7464247" y="1965960"/>
+            <a:ext cx="502920" cy="274320"/>
+          </a:xfrm>
+          <a:prstGeom prst="rect">
+            <a:avLst/>
+          </a:prstGeom>
+          <a:noFill/>
+          <a:ln/>
+        </p:spPr>
+        <p:txBody>
+          <a:bodyPr wrap="square" lIns="0" tIns="0" rIns="0" bIns="0" rtlCol="0" anchor="ctr">
+            <a:normAutofit/>
+          </a:bodyPr>
+          <a:lstStyle/>
+          <a:p>
+            <a:pPr rtl="1" algn="ctr" indent="0" marL="0">
+              <a:buNone/>
+            </a:pPr>
+            <a:r>
+              <a:rPr lang="ar-SA" altLang="en-US" sz="1100" b="1" dirty="0">
+                <a:solidFill>
+                  <a:srgbClr val="222222"/>
+                </a:solidFill>
+                <a:latin typeface="Arial" pitchFamily="34" charset="0"/>
+                <a:ea typeface="Arial" pitchFamily="34" charset="-122"/>
+                <a:cs typeface="Arial" pitchFamily="34" charset="-120"/>
+              </a:rPr>
+              <a:t>37</a:t>
+            </a:r>
+            <a:endParaRPr lang="ar-SA" sz="1100" dirty="0"/>
+          </a:p>
+        </p:txBody>
+      </p:sp>
+      <p:sp>
+        <p:nvSpPr>
+          <p:cNvPr id="202" name="Text 200"/>
+          <p:cNvSpPr/>
+          <p:nvPr/>
+        </p:nvSpPr>
+        <p:spPr>
+          <a:xfrm>
+            <a:off x="6805879" y="1965960"/>
+            <a:ext cx="658368" cy="274320"/>
+          </a:xfrm>
+          <a:prstGeom prst="rect">
+            <a:avLst/>
+          </a:prstGeom>
+          <a:noFill/>
+          <a:ln/>
+        </p:spPr>
+        <p:txBody>
+          <a:bodyPr wrap="square" lIns="0" tIns="0" rIns="0" bIns="0" rtlCol="0" anchor="ctr">
+            <a:normAutofit/>
+          </a:bodyPr>
+          <a:lstStyle/>
+          <a:p>
+            <a:pPr rtl="1" algn="ctr" indent="0" marL="0">
+              <a:buNone/>
+            </a:pPr>
+            <a:r>
+              <a:rPr lang="ar-SA" altLang="en-US" sz="850" b="1" dirty="0">
+                <a:solidFill>
+                  <a:srgbClr val="222222"/>
+                </a:solidFill>
+                <a:latin typeface="Arial" pitchFamily="34" charset="0"/>
+                <a:ea typeface="Arial" pitchFamily="34" charset="-122"/>
+                <a:cs typeface="Arial" pitchFamily="34" charset="-120"/>
+              </a:rPr>
+              <a:t>13 أكتوبر</a:t>
+            </a:r>
+            <a:endParaRPr lang="ar-SA" sz="850" dirty="0"/>
+          </a:p>
+        </p:txBody>
+      </p:sp>
+      <p:sp>
+        <p:nvSpPr>
+          <p:cNvPr id="203" name="Text 201"/>
+          <p:cNvSpPr/>
+          <p:nvPr/>
+        </p:nvSpPr>
+        <p:spPr>
+          <a:xfrm>
             <a:off x="6147511" y="1965960"/>
-            <a:ext cx="5678424" cy="603504"/>
-          </a:xfrm>
-          <a:prstGeom prst="rect">
-            <a:avLst/>
-          </a:prstGeom>
-          <a:solidFill>
-            <a:srgbClr val="FBFDFD"/>
-          </a:solidFill>
-          <a:ln w="6350">
-            <a:solidFill>
-              <a:srgbClr val="DFE6EA"/>
-            </a:solidFill>
-            <a:prstDash val="solid"/>
-          </a:ln>
-        </p:spPr>
-      </p:sp>
-      <p:sp>
-        <p:nvSpPr>
-          <p:cNvPr id="198" name="Text 196"/>
-          <p:cNvSpPr/>
-          <p:nvPr/>
-        </p:nvSpPr>
-        <p:spPr>
-          <a:xfrm>
-            <a:off x="6238951" y="1965960"/>
-            <a:ext cx="5495544" cy="603504"/>
-          </a:xfrm>
-          <a:prstGeom prst="rect">
-            <a:avLst/>
-          </a:prstGeom>
-          <a:noFill/>
-          <a:ln/>
-        </p:spPr>
-        <p:txBody>
-          <a:bodyPr wrap="square" lIns="0" tIns="0" rIns="0" bIns="0" rtlCol="0" anchor="ctr">
-            <a:normAutofit/>
-          </a:bodyPr>
-          <a:lstStyle/>
-          <a:p>
-            <a:pPr rtl="1" algn="r" indent="0" marL="0">
-              <a:buNone/>
-            </a:pPr>
-            <a:r>
-              <a:rPr lang="ar-SA" altLang="en-US" sz="1000" b="1" dirty="0">
-                <a:solidFill>
-                  <a:srgbClr val="3D3935"/>
-                </a:solidFill>
-                <a:latin typeface="Arial" pitchFamily="34" charset="0"/>
-                <a:ea typeface="Arial" pitchFamily="34" charset="-122"/>
-                <a:cs typeface="Arial" pitchFamily="34" charset="-120"/>
-              </a:rPr>
-              <a:t>◆  ميل ستون</a:t>
-            </a:r>
-            <a:endParaRPr lang="ar-SA" sz="1000" dirty="0"/>
-          </a:p>
-        </p:txBody>
-      </p:sp>
-      <p:sp>
-        <p:nvSpPr>
-          <p:cNvPr id="199" name="Shape 197"/>
-          <p:cNvSpPr/>
-          <p:nvPr/>
-        </p:nvSpPr>
-        <p:spPr>
-          <a:xfrm>
-            <a:off x="5643629" y="2039112"/>
-            <a:ext cx="164592" cy="164592"/>
-          </a:xfrm>
-          <a:prstGeom prst="diamond">
-            <a:avLst/>
-          </a:prstGeom>
-          <a:solidFill>
-            <a:srgbClr val="3D3935"/>
-          </a:solidFill>
-          <a:ln w="19050">
-            <a:solidFill>
-              <a:srgbClr val="FFFFFF"/>
-            </a:solidFill>
-            <a:prstDash val="solid"/>
-          </a:ln>
-        </p:spPr>
-      </p:sp>
-      <p:sp>
-        <p:nvSpPr>
-          <p:cNvPr id="200" name="Text 198"/>
-          <p:cNvSpPr/>
-          <p:nvPr/>
-        </p:nvSpPr>
-        <p:spPr>
-          <a:xfrm>
-            <a:off x="5296157" y="2212848"/>
-            <a:ext cx="859536" cy="182880"/>
-          </a:xfrm>
-          <a:prstGeom prst="rect">
-            <a:avLst/>
-          </a:prstGeom>
-          <a:noFill/>
-          <a:ln/>
-        </p:spPr>
-        <p:txBody>
-          <a:bodyPr wrap="square" lIns="0" tIns="0" rIns="0" bIns="0" rtlCol="0" anchor="t">
+            <a:ext cx="658368" cy="274320"/>
+          </a:xfrm>
+          <a:prstGeom prst="rect">
+            <a:avLst/>
+          </a:prstGeom>
+          <a:noFill/>
+          <a:ln/>
+        </p:spPr>
+        <p:txBody>
+          <a:bodyPr wrap="square" lIns="0" tIns="0" rIns="0" bIns="0" rtlCol="0" anchor="ctr">
             <a:normAutofit/>
           </a:bodyPr>
           <a:lstStyle/>
@@ -13594,478 +13717,9 @@
               <a:buNone/>
             </a:pPr>
             <a:r>
-              <a:rPr lang="ar-SA" altLang="en-US" sz="550" dirty="0">
-                <a:solidFill>
-                  <a:srgbClr val="556070"/>
-                </a:solidFill>
-                <a:latin typeface="Arial" pitchFamily="34" charset="0"/>
-                <a:ea typeface="Arial" pitchFamily="34" charset="-122"/>
-                <a:cs typeface="Arial" pitchFamily="34" charset="-120"/>
-              </a:rPr>
-              <a:t>بدء الأعمال</a:t>
-            </a:r>
-            <a:endParaRPr lang="ar-SA" sz="550" dirty="0"/>
-          </a:p>
-        </p:txBody>
-      </p:sp>
-      <p:sp>
-        <p:nvSpPr>
-          <p:cNvPr id="201" name="Text 199"/>
-          <p:cNvSpPr/>
-          <p:nvPr/>
-        </p:nvSpPr>
-        <p:spPr>
-          <a:xfrm>
-            <a:off x="5158997" y="2368296"/>
-            <a:ext cx="1133856" cy="164592"/>
-          </a:xfrm>
-          <a:prstGeom prst="rect">
-            <a:avLst/>
-          </a:prstGeom>
-          <a:noFill/>
-          <a:ln/>
-        </p:spPr>
-        <p:txBody>
-          <a:bodyPr wrap="square" lIns="0" tIns="0" rIns="0" bIns="0" rtlCol="0" anchor="ctr">
-            <a:normAutofit/>
-          </a:bodyPr>
-          <a:lstStyle/>
-          <a:p>
-            <a:pPr rtl="1" algn="ctr" indent="0" marL="0">
-              <a:buNone/>
-            </a:pPr>
-            <a:r>
-              <a:rPr lang="ar-SA" altLang="en-US" sz="750" b="1" dirty="0">
-                <a:solidFill>
-                  <a:srgbClr val="3D3935"/>
-                </a:solidFill>
-                <a:latin typeface="Arial" pitchFamily="34" charset="0"/>
-                <a:ea typeface="Arial" pitchFamily="34" charset="-122"/>
-                <a:cs typeface="Arial" pitchFamily="34" charset="-120"/>
-              </a:rPr>
-              <a:t>13 أكتوبر</a:t>
-            </a:r>
-            <a:endParaRPr lang="ar-SA" sz="750" dirty="0"/>
-          </a:p>
-        </p:txBody>
-      </p:sp>
-      <p:sp>
-        <p:nvSpPr>
-          <p:cNvPr id="202" name="Shape 200"/>
-          <p:cNvSpPr/>
-          <p:nvPr/>
-        </p:nvSpPr>
-        <p:spPr>
-          <a:xfrm>
-            <a:off x="4920910" y="2039112"/>
-            <a:ext cx="164592" cy="164592"/>
-          </a:xfrm>
-          <a:prstGeom prst="diamond">
-            <a:avLst/>
-          </a:prstGeom>
-          <a:solidFill>
-            <a:srgbClr val="3D3935"/>
-          </a:solidFill>
-          <a:ln w="19050">
-            <a:solidFill>
-              <a:srgbClr val="FFFFFF"/>
-            </a:solidFill>
-            <a:prstDash val="solid"/>
-          </a:ln>
-        </p:spPr>
-      </p:sp>
-      <p:sp>
-        <p:nvSpPr>
-          <p:cNvPr id="203" name="Text 201"/>
-          <p:cNvSpPr/>
-          <p:nvPr/>
-        </p:nvSpPr>
-        <p:spPr>
-          <a:xfrm>
-            <a:off x="4573438" y="2212848"/>
-            <a:ext cx="859536" cy="182880"/>
-          </a:xfrm>
-          <a:prstGeom prst="rect">
-            <a:avLst/>
-          </a:prstGeom>
-          <a:noFill/>
-          <a:ln/>
-        </p:spPr>
-        <p:txBody>
-          <a:bodyPr wrap="square" lIns="0" tIns="0" rIns="0" bIns="0" rtlCol="0" anchor="t">
-            <a:normAutofit/>
-          </a:bodyPr>
-          <a:lstStyle/>
-          <a:p>
-            <a:pPr rtl="1" algn="ctr" indent="0" marL="0">
-              <a:buNone/>
-            </a:pPr>
-            <a:r>
-              <a:rPr lang="ar-SA" altLang="en-US" sz="550" dirty="0">
-                <a:solidFill>
-                  <a:srgbClr val="556070"/>
-                </a:solidFill>
-                <a:latin typeface="Arial" pitchFamily="34" charset="0"/>
-                <a:ea typeface="Arial" pitchFamily="34" charset="-122"/>
-                <a:cs typeface="Arial" pitchFamily="34" charset="-120"/>
-              </a:rPr>
-              <a:t>اكتمال تركيب نظام الدعم</a:t>
-            </a:r>
-            <a:endParaRPr lang="ar-SA" sz="550" dirty="0"/>
-          </a:p>
-        </p:txBody>
-      </p:sp>
-      <p:sp>
-        <p:nvSpPr>
-          <p:cNvPr id="204" name="Text 202"/>
-          <p:cNvSpPr/>
-          <p:nvPr/>
-        </p:nvSpPr>
-        <p:spPr>
-          <a:xfrm>
-            <a:off x="4436278" y="2368296"/>
-            <a:ext cx="1133856" cy="164592"/>
-          </a:xfrm>
-          <a:prstGeom prst="rect">
-            <a:avLst/>
-          </a:prstGeom>
-          <a:noFill/>
-          <a:ln/>
-        </p:spPr>
-        <p:txBody>
-          <a:bodyPr wrap="square" lIns="0" tIns="0" rIns="0" bIns="0" rtlCol="0" anchor="ctr">
-            <a:normAutofit/>
-          </a:bodyPr>
-          <a:lstStyle/>
-          <a:p>
-            <a:pPr rtl="1" algn="ctr" indent="0" marL="0">
-              <a:buNone/>
-            </a:pPr>
-            <a:r>
-              <a:rPr lang="ar-SA" altLang="en-US" sz="750" b="1" dirty="0">
-                <a:solidFill>
-                  <a:srgbClr val="3D3935"/>
-                </a:solidFill>
-                <a:latin typeface="Arial" pitchFamily="34" charset="0"/>
-                <a:ea typeface="Arial" pitchFamily="34" charset="-122"/>
-                <a:cs typeface="Arial" pitchFamily="34" charset="-120"/>
-              </a:rPr>
-              <a:t>19 أكتوبر</a:t>
-            </a:r>
-            <a:endParaRPr lang="ar-SA" sz="750" dirty="0"/>
-          </a:p>
-        </p:txBody>
-      </p:sp>
-      <p:sp>
-        <p:nvSpPr>
-          <p:cNvPr id="205" name="Shape 203"/>
-          <p:cNvSpPr/>
-          <p:nvPr/>
-        </p:nvSpPr>
-        <p:spPr>
-          <a:xfrm>
-            <a:off x="2150488" y="2039112"/>
-            <a:ext cx="164592" cy="164592"/>
-          </a:xfrm>
-          <a:prstGeom prst="diamond">
-            <a:avLst/>
-          </a:prstGeom>
-          <a:solidFill>
-            <a:srgbClr val="3D3935"/>
-          </a:solidFill>
-          <a:ln w="19050">
-            <a:solidFill>
-              <a:srgbClr val="FFFFFF"/>
-            </a:solidFill>
-            <a:prstDash val="solid"/>
-          </a:ln>
-        </p:spPr>
-      </p:sp>
-      <p:sp>
-        <p:nvSpPr>
-          <p:cNvPr id="206" name="Text 204"/>
-          <p:cNvSpPr/>
-          <p:nvPr/>
-        </p:nvSpPr>
-        <p:spPr>
-          <a:xfrm>
-            <a:off x="1803016" y="2212848"/>
-            <a:ext cx="859536" cy="182880"/>
-          </a:xfrm>
-          <a:prstGeom prst="rect">
-            <a:avLst/>
-          </a:prstGeom>
-          <a:noFill/>
-          <a:ln/>
-        </p:spPr>
-        <p:txBody>
-          <a:bodyPr wrap="square" lIns="0" tIns="0" rIns="0" bIns="0" rtlCol="0" anchor="t">
-            <a:normAutofit/>
-          </a:bodyPr>
-          <a:lstStyle/>
-          <a:p>
-            <a:pPr rtl="1" algn="ctr" indent="0" marL="0">
-              <a:buNone/>
-            </a:pPr>
-            <a:r>
-              <a:rPr lang="ar-SA" altLang="en-US" sz="550" dirty="0">
-                <a:solidFill>
-                  <a:srgbClr val="556070"/>
-                </a:solidFill>
-                <a:latin typeface="Arial" pitchFamily="34" charset="0"/>
-                <a:ea typeface="Arial" pitchFamily="34" charset="-122"/>
-                <a:cs typeface="Arial" pitchFamily="34" charset="-120"/>
-              </a:rPr>
-              <a:t>اكتمال أعمال الحفرة (جدار الحفرة)</a:t>
-            </a:r>
-            <a:endParaRPr lang="ar-SA" sz="550" dirty="0"/>
-          </a:p>
-        </p:txBody>
-      </p:sp>
-      <p:sp>
-        <p:nvSpPr>
-          <p:cNvPr id="207" name="Text 205"/>
-          <p:cNvSpPr/>
-          <p:nvPr/>
-        </p:nvSpPr>
-        <p:spPr>
-          <a:xfrm>
-            <a:off x="1665856" y="2368296"/>
-            <a:ext cx="1133856" cy="164592"/>
-          </a:xfrm>
-          <a:prstGeom prst="rect">
-            <a:avLst/>
-          </a:prstGeom>
-          <a:noFill/>
-          <a:ln/>
-        </p:spPr>
-        <p:txBody>
-          <a:bodyPr wrap="square" lIns="0" tIns="0" rIns="0" bIns="0" rtlCol="0" anchor="ctr">
-            <a:normAutofit/>
-          </a:bodyPr>
-          <a:lstStyle/>
-          <a:p>
-            <a:pPr rtl="1" algn="ctr" indent="0" marL="0">
-              <a:buNone/>
-            </a:pPr>
-            <a:r>
-              <a:rPr lang="ar-SA" altLang="en-US" sz="750" b="1" dirty="0">
-                <a:solidFill>
-                  <a:srgbClr val="3D3935"/>
-                </a:solidFill>
-                <a:latin typeface="Arial" pitchFamily="34" charset="0"/>
-                <a:ea typeface="Arial" pitchFamily="34" charset="-122"/>
-                <a:cs typeface="Arial" pitchFamily="34" charset="-120"/>
-              </a:rPr>
-              <a:t>11 نوفمبر</a:t>
-            </a:r>
-            <a:endParaRPr lang="ar-SA" sz="750" dirty="0"/>
-          </a:p>
-        </p:txBody>
-      </p:sp>
-      <p:sp>
-        <p:nvSpPr>
-          <p:cNvPr id="208" name="Shape 206"/>
-          <p:cNvSpPr/>
-          <p:nvPr/>
-        </p:nvSpPr>
-        <p:spPr>
-          <a:xfrm>
-            <a:off x="1307316" y="2039112"/>
-            <a:ext cx="164592" cy="164592"/>
-          </a:xfrm>
-          <a:prstGeom prst="diamond">
-            <a:avLst/>
-          </a:prstGeom>
-          <a:solidFill>
-            <a:srgbClr val="3D3935"/>
-          </a:solidFill>
-          <a:ln w="19050">
-            <a:solidFill>
-              <a:srgbClr val="FFFFFF"/>
-            </a:solidFill>
-            <a:prstDash val="solid"/>
-          </a:ln>
-        </p:spPr>
-      </p:sp>
-      <p:sp>
-        <p:nvSpPr>
-          <p:cNvPr id="209" name="Text 207"/>
-          <p:cNvSpPr/>
-          <p:nvPr/>
-        </p:nvSpPr>
-        <p:spPr>
-          <a:xfrm>
-            <a:off x="959844" y="2212848"/>
-            <a:ext cx="859536" cy="182880"/>
-          </a:xfrm>
-          <a:prstGeom prst="rect">
-            <a:avLst/>
-          </a:prstGeom>
-          <a:noFill/>
-          <a:ln/>
-        </p:spPr>
-        <p:txBody>
-          <a:bodyPr wrap="square" lIns="0" tIns="0" rIns="0" bIns="0" rtlCol="0" anchor="t">
-            <a:normAutofit/>
-          </a:bodyPr>
-          <a:lstStyle/>
-          <a:p>
-            <a:pPr rtl="1" algn="ctr" indent="0" marL="0">
-              <a:buNone/>
-            </a:pPr>
-            <a:r>
-              <a:rPr lang="ar-SA" altLang="en-US" sz="550" dirty="0">
-                <a:solidFill>
-                  <a:srgbClr val="556070"/>
-                </a:solidFill>
-                <a:latin typeface="Arial" pitchFamily="34" charset="0"/>
-                <a:ea typeface="Arial" pitchFamily="34" charset="-122"/>
-                <a:cs typeface="Arial" pitchFamily="34" charset="-120"/>
-              </a:rPr>
-              <a:t>اكتمال أساسات المبنى</a:t>
-            </a:r>
-            <a:endParaRPr lang="ar-SA" sz="550" dirty="0"/>
-          </a:p>
-        </p:txBody>
-      </p:sp>
-      <p:sp>
-        <p:nvSpPr>
-          <p:cNvPr id="210" name="Text 208"/>
-          <p:cNvSpPr/>
-          <p:nvPr/>
-        </p:nvSpPr>
-        <p:spPr>
-          <a:xfrm>
-            <a:off x="822684" y="2368296"/>
-            <a:ext cx="1133856" cy="164592"/>
-          </a:xfrm>
-          <a:prstGeom prst="rect">
-            <a:avLst/>
-          </a:prstGeom>
-          <a:noFill/>
-          <a:ln/>
-        </p:spPr>
-        <p:txBody>
-          <a:bodyPr wrap="square" lIns="0" tIns="0" rIns="0" bIns="0" rtlCol="0" anchor="ctr">
-            <a:normAutofit/>
-          </a:bodyPr>
-          <a:lstStyle/>
-          <a:p>
-            <a:pPr rtl="1" algn="ctr" indent="0" marL="0">
-              <a:buNone/>
-            </a:pPr>
-            <a:r>
-              <a:rPr lang="ar-SA" altLang="en-US" sz="750" b="1" dirty="0">
-                <a:solidFill>
-                  <a:srgbClr val="3D3935"/>
-                </a:solidFill>
-                <a:latin typeface="Arial" pitchFamily="34" charset="0"/>
-                <a:ea typeface="Arial" pitchFamily="34" charset="-122"/>
-                <a:cs typeface="Arial" pitchFamily="34" charset="-120"/>
-              </a:rPr>
-              <a:t>18 نوفمبر</a:t>
-            </a:r>
-            <a:endParaRPr lang="ar-SA" sz="750" dirty="0"/>
-          </a:p>
-        </p:txBody>
-      </p:sp>
-      <p:sp>
-        <p:nvSpPr>
-          <p:cNvPr id="211" name="Shape 209"/>
-          <p:cNvSpPr/>
-          <p:nvPr/>
-        </p:nvSpPr>
-        <p:spPr>
-          <a:xfrm>
-            <a:off x="584597" y="2039112"/>
-            <a:ext cx="164592" cy="164592"/>
-          </a:xfrm>
-          <a:prstGeom prst="diamond">
-            <a:avLst/>
-          </a:prstGeom>
-          <a:solidFill>
-            <a:srgbClr val="3D3935"/>
-          </a:solidFill>
-          <a:ln w="19050">
-            <a:solidFill>
-              <a:srgbClr val="FFFFFF"/>
-            </a:solidFill>
-            <a:prstDash val="solid"/>
-          </a:ln>
-        </p:spPr>
-      </p:sp>
-      <p:sp>
-        <p:nvSpPr>
-          <p:cNvPr id="212" name="Text 210"/>
-          <p:cNvSpPr/>
-          <p:nvPr/>
-        </p:nvSpPr>
-        <p:spPr>
-          <a:xfrm>
-            <a:off x="237125" y="2212848"/>
-            <a:ext cx="859536" cy="182880"/>
-          </a:xfrm>
-          <a:prstGeom prst="rect">
-            <a:avLst/>
-          </a:prstGeom>
-          <a:noFill/>
-          <a:ln/>
-        </p:spPr>
-        <p:txBody>
-          <a:bodyPr wrap="square" lIns="0" tIns="0" rIns="0" bIns="0" rtlCol="0" anchor="t">
-            <a:normAutofit/>
-          </a:bodyPr>
-          <a:lstStyle/>
-          <a:p>
-            <a:pPr rtl="1" algn="ctr" indent="0" marL="0">
-              <a:buNone/>
-            </a:pPr>
-            <a:r>
-              <a:rPr lang="ar-SA" altLang="en-US" sz="550" dirty="0">
-                <a:solidFill>
-                  <a:srgbClr val="556070"/>
-                </a:solidFill>
-                <a:latin typeface="Arial" pitchFamily="34" charset="0"/>
-                <a:ea typeface="Arial" pitchFamily="34" charset="-122"/>
-                <a:cs typeface="Arial" pitchFamily="34" charset="-120"/>
-              </a:rPr>
-              <a:t>الإنجاز الكلي</a:t>
-            </a:r>
-            <a:endParaRPr lang="ar-SA" sz="550" dirty="0"/>
-          </a:p>
-        </p:txBody>
-      </p:sp>
-      <p:sp>
-        <p:nvSpPr>
-          <p:cNvPr id="213" name="Text 211"/>
-          <p:cNvSpPr/>
-          <p:nvPr/>
-        </p:nvSpPr>
-        <p:spPr>
-          <a:xfrm>
-            <a:off x="99965" y="2368296"/>
-            <a:ext cx="1133856" cy="164592"/>
-          </a:xfrm>
-          <a:prstGeom prst="rect">
-            <a:avLst/>
-          </a:prstGeom>
-          <a:noFill/>
-          <a:ln/>
-        </p:spPr>
-        <p:txBody>
-          <a:bodyPr wrap="square" lIns="0" tIns="0" rIns="0" bIns="0" rtlCol="0" anchor="ctr">
-            <a:normAutofit/>
-          </a:bodyPr>
-          <a:lstStyle/>
-          <a:p>
-            <a:pPr rtl="1" algn="ctr" indent="0" marL="0">
-              <a:buNone/>
-            </a:pPr>
-            <a:r>
-              <a:rPr lang="ar-SA" altLang="en-US" sz="750" b="1" dirty="0">
-                <a:solidFill>
-                  <a:srgbClr val="3D3935"/>
+              <a:rPr lang="ar-SA" altLang="en-US" sz="850" b="1" dirty="0">
+                <a:solidFill>
+                  <a:srgbClr val="222222"/>
                 </a:solidFill>
                 <a:latin typeface="Arial" pitchFamily="34" charset="0"/>
                 <a:ea typeface="Arial" pitchFamily="34" charset="-122"/>
@@ -14073,326 +13727,1411 @@
               </a:rPr>
               <a:t>24 نوفمبر</a:t>
             </a:r>
-            <a:endParaRPr lang="ar-SA" sz="750" dirty="0"/>
-          </a:p>
-        </p:txBody>
-      </p:sp>
-      <p:sp>
-        <p:nvSpPr>
-          <p:cNvPr id="214" name="Shape 212"/>
-          <p:cNvSpPr/>
-          <p:nvPr/>
-        </p:nvSpPr>
-        <p:spPr>
-          <a:xfrm>
-            <a:off x="365760" y="2569464"/>
-            <a:ext cx="11460175" cy="403642"/>
-          </a:xfrm>
-          <a:prstGeom prst="rect">
-            <a:avLst/>
-          </a:prstGeom>
-          <a:solidFill>
-            <a:srgbClr val="FFFFFF"/>
-          </a:solidFill>
-          <a:ln w="6350">
-            <a:solidFill>
-              <a:srgbClr val="DFE6EA"/>
-            </a:solidFill>
-            <a:prstDash val="solid"/>
-          </a:ln>
-        </p:spPr>
-      </p:sp>
-      <p:sp>
-        <p:nvSpPr>
-          <p:cNvPr id="215" name="Shape 213"/>
-          <p:cNvSpPr/>
-          <p:nvPr/>
-        </p:nvSpPr>
-        <p:spPr>
-          <a:xfrm>
-            <a:off x="11496751" y="2634125"/>
-            <a:ext cx="274320" cy="274320"/>
-          </a:xfrm>
-          <a:prstGeom prst="ellipse">
-            <a:avLst/>
-          </a:prstGeom>
-          <a:solidFill>
-            <a:srgbClr val="C8503F"/>
-          </a:solidFill>
-          <a:ln w="25400">
-            <a:solidFill>
-              <a:srgbClr val="222222"/>
-            </a:solidFill>
-            <a:prstDash val="solid"/>
-          </a:ln>
-        </p:spPr>
-      </p:sp>
-      <p:sp>
-        <p:nvSpPr>
-          <p:cNvPr id="216" name="Text 214"/>
-          <p:cNvSpPr/>
-          <p:nvPr/>
-        </p:nvSpPr>
-        <p:spPr>
-          <a:xfrm>
-            <a:off x="11441887" y="2569464"/>
-            <a:ext cx="384048" cy="403642"/>
-          </a:xfrm>
-          <a:prstGeom prst="rect">
-            <a:avLst/>
-          </a:prstGeom>
-          <a:noFill/>
-          <a:ln/>
-        </p:spPr>
-        <p:txBody>
-          <a:bodyPr wrap="square" lIns="0" tIns="0" rIns="0" bIns="0" rtlCol="0" anchor="ctr">
-            <a:normAutofit/>
-          </a:bodyPr>
-          <a:lstStyle/>
-          <a:p>
-            <a:pPr rtl="1" algn="ctr" indent="0" marL="0">
-              <a:buNone/>
-            </a:pPr>
-            <a:r>
-              <a:rPr lang="ar-SA" altLang="en-US" sz="900" b="1" dirty="0">
-                <a:solidFill>
-                  <a:srgbClr val="FFFFFF"/>
-                </a:solidFill>
-                <a:latin typeface="Arial" pitchFamily="34" charset="0"/>
-                <a:ea typeface="Arial" pitchFamily="34" charset="-122"/>
-                <a:cs typeface="Arial" pitchFamily="34" charset="-120"/>
-              </a:rPr>
-              <a:t>A</a:t>
-            </a:r>
-            <a:endParaRPr lang="ar-SA" sz="900" dirty="0"/>
-          </a:p>
-        </p:txBody>
-      </p:sp>
-      <p:sp>
-        <p:nvSpPr>
-          <p:cNvPr id="217" name="Text 215"/>
-          <p:cNvSpPr/>
-          <p:nvPr/>
-        </p:nvSpPr>
-        <p:spPr>
-          <a:xfrm>
-            <a:off x="8762695" y="2569464"/>
-            <a:ext cx="2606040" cy="403642"/>
-          </a:xfrm>
-          <a:prstGeom prst="rect">
-            <a:avLst/>
-          </a:prstGeom>
-          <a:noFill/>
-          <a:ln/>
-        </p:spPr>
-        <p:txBody>
-          <a:bodyPr wrap="square" lIns="0" tIns="0" rIns="0" bIns="0" rtlCol="0" anchor="ctr">
-            <a:normAutofit/>
-          </a:bodyPr>
-          <a:lstStyle/>
-          <a:p>
-            <a:pPr rtl="1" algn="r" indent="0" marL="0">
-              <a:buNone/>
-            </a:pPr>
-            <a:r>
-              <a:rPr lang="ar-SA" altLang="en-US" sz="900" dirty="0">
-                <a:solidFill>
-                  <a:srgbClr val="222222"/>
-                </a:solidFill>
-                <a:latin typeface="Arial" pitchFamily="34" charset="0"/>
-                <a:ea typeface="Arial" pitchFamily="34" charset="-122"/>
-                <a:cs typeface="Arial" pitchFamily="34" charset="-120"/>
-              </a:rPr>
-              <a:t>تركيب نظام الدعم (Shoring)</a:t>
-            </a:r>
-            <a:endParaRPr lang="ar-SA" sz="900" dirty="0"/>
-          </a:p>
-        </p:txBody>
-      </p:sp>
-      <p:sp>
-        <p:nvSpPr>
-          <p:cNvPr id="218" name="Text 216"/>
-          <p:cNvSpPr/>
-          <p:nvPr/>
-        </p:nvSpPr>
-        <p:spPr>
-          <a:xfrm>
-            <a:off x="7967167" y="2569464"/>
-            <a:ext cx="777240" cy="403642"/>
-          </a:xfrm>
-          <a:prstGeom prst="rect">
-            <a:avLst/>
-          </a:prstGeom>
-          <a:noFill/>
-          <a:ln/>
-        </p:spPr>
-        <p:txBody>
-          <a:bodyPr wrap="square" lIns="0" tIns="0" rIns="0" bIns="0" rtlCol="0" anchor="ctr">
-            <a:normAutofit/>
-          </a:bodyPr>
-          <a:lstStyle/>
-          <a:p>
-            <a:pPr rtl="1" algn="ctr" indent="0" marL="0">
-              <a:buNone/>
-            </a:pPr>
-            <a:r>
-              <a:rPr lang="ar-SA" altLang="en-US" sz="850" dirty="0">
-                <a:solidFill>
-                  <a:srgbClr val="444444"/>
-                </a:solidFill>
-                <a:latin typeface="Arial" pitchFamily="34" charset="0"/>
-                <a:ea typeface="Arial" pitchFamily="34" charset="-122"/>
-                <a:cs typeface="Arial" pitchFamily="34" charset="-120"/>
-              </a:rPr>
-              <a:t>—</a:t>
-            </a:r>
             <a:endParaRPr lang="ar-SA" sz="850" dirty="0"/>
           </a:p>
         </p:txBody>
       </p:sp>
       <p:sp>
         <p:nvSpPr>
-          <p:cNvPr id="219" name="Text 217"/>
-          <p:cNvSpPr/>
-          <p:nvPr/>
-        </p:nvSpPr>
-        <p:spPr>
-          <a:xfrm>
-            <a:off x="7464247" y="2569464"/>
-            <a:ext cx="502920" cy="403642"/>
-          </a:xfrm>
-          <a:prstGeom prst="rect">
-            <a:avLst/>
-          </a:prstGeom>
-          <a:noFill/>
-          <a:ln/>
-        </p:spPr>
-        <p:txBody>
-          <a:bodyPr wrap="square" lIns="0" tIns="0" rIns="0" bIns="0" rtlCol="0" anchor="ctr">
-            <a:normAutofit/>
-          </a:bodyPr>
-          <a:lstStyle/>
-          <a:p>
-            <a:pPr rtl="1" algn="ctr" indent="0" marL="0">
-              <a:buNone/>
-            </a:pPr>
-            <a:r>
-              <a:rPr lang="ar-SA" altLang="en-US" sz="1100" b="1" dirty="0">
-                <a:solidFill>
-                  <a:srgbClr val="222222"/>
-                </a:solidFill>
-                <a:latin typeface="Arial" pitchFamily="34" charset="0"/>
-                <a:ea typeface="Arial" pitchFamily="34" charset="-122"/>
-                <a:cs typeface="Arial" pitchFamily="34" charset="-120"/>
-              </a:rPr>
-              <a:t>6</a:t>
-            </a:r>
-            <a:endParaRPr lang="ar-SA" sz="1100" dirty="0"/>
-          </a:p>
-        </p:txBody>
-      </p:sp>
-      <p:sp>
-        <p:nvSpPr>
-          <p:cNvPr id="220" name="Text 218"/>
-          <p:cNvSpPr/>
-          <p:nvPr/>
-        </p:nvSpPr>
-        <p:spPr>
-          <a:xfrm>
-            <a:off x="6805879" y="2569464"/>
-            <a:ext cx="658368" cy="403642"/>
-          </a:xfrm>
-          <a:prstGeom prst="rect">
-            <a:avLst/>
-          </a:prstGeom>
-          <a:noFill/>
-          <a:ln/>
-        </p:spPr>
-        <p:txBody>
-          <a:bodyPr wrap="square" lIns="0" tIns="0" rIns="0" bIns="0" rtlCol="0" anchor="ctr">
-            <a:normAutofit/>
-          </a:bodyPr>
-          <a:lstStyle/>
-          <a:p>
-            <a:pPr rtl="1" algn="ctr" indent="0" marL="0">
-              <a:buNone/>
-            </a:pPr>
-            <a:r>
-              <a:rPr lang="ar-SA" altLang="en-US" sz="850" b="1" dirty="0">
-                <a:solidFill>
-                  <a:srgbClr val="222222"/>
-                </a:solidFill>
-                <a:latin typeface="Arial" pitchFamily="34" charset="0"/>
-                <a:ea typeface="Arial" pitchFamily="34" charset="-122"/>
-                <a:cs typeface="Arial" pitchFamily="34" charset="-120"/>
-              </a:rPr>
-              <a:t>13 أكتوبر</a:t>
-            </a:r>
-            <a:endParaRPr lang="ar-SA" sz="850" dirty="0"/>
-          </a:p>
-        </p:txBody>
-      </p:sp>
-      <p:sp>
-        <p:nvSpPr>
-          <p:cNvPr id="221" name="Text 219"/>
-          <p:cNvSpPr/>
-          <p:nvPr/>
-        </p:nvSpPr>
-        <p:spPr>
-          <a:xfrm>
-            <a:off x="6147511" y="2569464"/>
-            <a:ext cx="658368" cy="403642"/>
-          </a:xfrm>
-          <a:prstGeom prst="rect">
-            <a:avLst/>
-          </a:prstGeom>
-          <a:noFill/>
-          <a:ln/>
-        </p:spPr>
-        <p:txBody>
-          <a:bodyPr wrap="square" lIns="0" tIns="0" rIns="0" bIns="0" rtlCol="0" anchor="ctr">
-            <a:normAutofit/>
-          </a:bodyPr>
-          <a:lstStyle/>
-          <a:p>
-            <a:pPr rtl="1" algn="ctr" indent="0" marL="0">
-              <a:buNone/>
-            </a:pPr>
-            <a:r>
-              <a:rPr lang="ar-SA" altLang="en-US" sz="850" b="1" dirty="0">
-                <a:solidFill>
-                  <a:srgbClr val="222222"/>
-                </a:solidFill>
-                <a:latin typeface="Arial" pitchFamily="34" charset="0"/>
-                <a:ea typeface="Arial" pitchFamily="34" charset="-122"/>
-                <a:cs typeface="Arial" pitchFamily="34" charset="-120"/>
-              </a:rPr>
-              <a:t>19 أكتوبر</a:t>
-            </a:r>
-            <a:endParaRPr lang="ar-SA" sz="850" dirty="0"/>
-          </a:p>
-        </p:txBody>
-      </p:sp>
-      <p:sp>
-        <p:nvSpPr>
-          <p:cNvPr id="222" name="Shape 220"/>
-          <p:cNvSpPr/>
-          <p:nvPr/>
-        </p:nvSpPr>
-        <p:spPr>
-          <a:xfrm>
-            <a:off x="4942980" y="2660284"/>
-            <a:ext cx="843172" cy="222003"/>
+          <p:cNvPr id="204" name="Shape 202"/>
+          <p:cNvSpPr/>
+          <p:nvPr/>
+        </p:nvSpPr>
+        <p:spPr>
+          <a:xfrm>
+            <a:off x="606666" y="2011680"/>
+            <a:ext cx="5179485" cy="182880"/>
           </a:xfrm>
           <a:prstGeom prst="roundRect">
             <a:avLst>
-              <a:gd name="adj" fmla="val 20594"/>
+              <a:gd name="adj" fmla="val 25000"/>
             </a:avLst>
           </a:prstGeom>
           <a:solidFill>
+            <a:srgbClr val="3D3935"/>
+          </a:solidFill>
+          <a:ln w="12700">
+            <a:solidFill>
+              <a:srgbClr val="3D3935"/>
+            </a:solidFill>
+            <a:prstDash val="solid"/>
+          </a:ln>
+        </p:spPr>
+      </p:sp>
+      <p:sp>
+        <p:nvSpPr>
+          <p:cNvPr id="205" name="Text 203"/>
+          <p:cNvSpPr/>
+          <p:nvPr/>
+        </p:nvSpPr>
+        <p:spPr>
+          <a:xfrm>
+            <a:off x="606666" y="2011680"/>
+            <a:ext cx="5179485" cy="182880"/>
+          </a:xfrm>
+          <a:prstGeom prst="rect">
+            <a:avLst/>
+          </a:prstGeom>
+          <a:noFill/>
+          <a:ln/>
+        </p:spPr>
+        <p:txBody>
+          <a:bodyPr wrap="square" lIns="0" tIns="0" rIns="0" bIns="0" rtlCol="0" anchor="ctr">
+            <a:normAutofit/>
+          </a:bodyPr>
+          <a:lstStyle/>
+          <a:p>
+            <a:pPr rtl="1" algn="ctr" indent="0" marL="0">
+              <a:buNone/>
+            </a:pPr>
+            <a:r>
+              <a:rPr lang="ar-SA" altLang="en-US" sz="850" b="1" dirty="0">
+                <a:solidFill>
+                  <a:srgbClr val="FFFFFF"/>
+                </a:solidFill>
+                <a:latin typeface="Arial" pitchFamily="34" charset="0"/>
+                <a:ea typeface="Arial" pitchFamily="34" charset="-122"/>
+                <a:cs typeface="Arial" pitchFamily="34" charset="-120"/>
+              </a:rPr>
+              <a:t>37 يوم عمل · 13 أكتوبر → 24 نوفمبر</a:t>
+            </a:r>
+            <a:endParaRPr lang="ar-SA" sz="850" dirty="0"/>
+          </a:p>
+        </p:txBody>
+      </p:sp>
+      <p:sp>
+        <p:nvSpPr>
+          <p:cNvPr id="206" name="Shape 204"/>
+          <p:cNvSpPr/>
+          <p:nvPr/>
+        </p:nvSpPr>
+        <p:spPr>
+          <a:xfrm>
+            <a:off x="6147511" y="2240280"/>
+            <a:ext cx="5678424" cy="640080"/>
+          </a:xfrm>
+          <a:prstGeom prst="rect">
+            <a:avLst/>
+          </a:prstGeom>
+          <a:solidFill>
+            <a:srgbClr val="FBFDFD"/>
+          </a:solidFill>
+          <a:ln w="6350">
+            <a:solidFill>
+              <a:srgbClr val="DFE6EA"/>
+            </a:solidFill>
+            <a:prstDash val="solid"/>
+          </a:ln>
+        </p:spPr>
+      </p:sp>
+      <p:sp>
+        <p:nvSpPr>
+          <p:cNvPr id="207" name="Text 205"/>
+          <p:cNvSpPr/>
+          <p:nvPr/>
+        </p:nvSpPr>
+        <p:spPr>
+          <a:xfrm>
+            <a:off x="6238951" y="2240280"/>
+            <a:ext cx="5495544" cy="640080"/>
+          </a:xfrm>
+          <a:prstGeom prst="rect">
+            <a:avLst/>
+          </a:prstGeom>
+          <a:noFill/>
+          <a:ln/>
+        </p:spPr>
+        <p:txBody>
+          <a:bodyPr wrap="square" lIns="0" tIns="0" rIns="0" bIns="0" rtlCol="0" anchor="ctr">
+            <a:normAutofit/>
+          </a:bodyPr>
+          <a:lstStyle/>
+          <a:p>
+            <a:pPr rtl="1" algn="r" indent="0" marL="0">
+              <a:buNone/>
+            </a:pPr>
+            <a:r>
+              <a:rPr lang="ar-SA" altLang="en-US" sz="1000" b="1" dirty="0">
+                <a:solidFill>
+                  <a:srgbClr val="3D3935"/>
+                </a:solidFill>
+                <a:latin typeface="Arial" pitchFamily="34" charset="0"/>
+                <a:ea typeface="Arial" pitchFamily="34" charset="-122"/>
+                <a:cs typeface="Arial" pitchFamily="34" charset="-120"/>
+              </a:rPr>
+              <a:t>◆  ميل ستون</a:t>
+            </a:r>
+            <a:endParaRPr lang="ar-SA" sz="1000" dirty="0"/>
+          </a:p>
+        </p:txBody>
+      </p:sp>
+      <p:sp>
+        <p:nvSpPr>
+          <p:cNvPr id="208" name="Shape 206"/>
+          <p:cNvSpPr/>
+          <p:nvPr/>
+        </p:nvSpPr>
+        <p:spPr>
+          <a:xfrm>
+            <a:off x="5643629" y="2313432"/>
+            <a:ext cx="164592" cy="164592"/>
+          </a:xfrm>
+          <a:prstGeom prst="diamond">
+            <a:avLst/>
+          </a:prstGeom>
+          <a:solidFill>
+            <a:srgbClr val="3D3935"/>
+          </a:solidFill>
+          <a:ln w="19050">
+            <a:solidFill>
+              <a:srgbClr val="FFFFFF"/>
+            </a:solidFill>
+            <a:prstDash val="solid"/>
+          </a:ln>
+        </p:spPr>
+      </p:sp>
+      <p:sp>
+        <p:nvSpPr>
+          <p:cNvPr id="209" name="Text 207"/>
+          <p:cNvSpPr/>
+          <p:nvPr/>
+        </p:nvSpPr>
+        <p:spPr>
+          <a:xfrm>
+            <a:off x="5296157" y="2487168"/>
+            <a:ext cx="859536" cy="201168"/>
+          </a:xfrm>
+          <a:prstGeom prst="rect">
+            <a:avLst/>
+          </a:prstGeom>
+          <a:noFill/>
+          <a:ln/>
+        </p:spPr>
+        <p:txBody>
+          <a:bodyPr wrap="square" lIns="0" tIns="0" rIns="0" bIns="0" rtlCol="0" anchor="t">
+            <a:normAutofit/>
+          </a:bodyPr>
+          <a:lstStyle/>
+          <a:p>
+            <a:pPr rtl="1" algn="ctr" indent="0" marL="0">
+              <a:buNone/>
+            </a:pPr>
+            <a:r>
+              <a:rPr lang="ar-SA" altLang="en-US" sz="550" dirty="0">
+                <a:solidFill>
+                  <a:srgbClr val="556070"/>
+                </a:solidFill>
+                <a:latin typeface="Arial" pitchFamily="34" charset="0"/>
+                <a:ea typeface="Arial" pitchFamily="34" charset="-122"/>
+                <a:cs typeface="Arial" pitchFamily="34" charset="-120"/>
+              </a:rPr>
+              <a:t>بدء الأعمال</a:t>
+            </a:r>
+            <a:endParaRPr lang="ar-SA" sz="550" dirty="0"/>
+          </a:p>
+        </p:txBody>
+      </p:sp>
+      <p:sp>
+        <p:nvSpPr>
+          <p:cNvPr id="210" name="Text 208"/>
+          <p:cNvSpPr/>
+          <p:nvPr/>
+        </p:nvSpPr>
+        <p:spPr>
+          <a:xfrm>
+            <a:off x="5158997" y="2697480"/>
+            <a:ext cx="1133856" cy="164592"/>
+          </a:xfrm>
+          <a:prstGeom prst="rect">
+            <a:avLst/>
+          </a:prstGeom>
+          <a:noFill/>
+          <a:ln/>
+        </p:spPr>
+        <p:txBody>
+          <a:bodyPr wrap="square" lIns="0" tIns="0" rIns="0" bIns="0" rtlCol="0" anchor="ctr">
+            <a:normAutofit/>
+          </a:bodyPr>
+          <a:lstStyle/>
+          <a:p>
+            <a:pPr rtl="1" algn="ctr" indent="0" marL="0">
+              <a:buNone/>
+            </a:pPr>
+            <a:r>
+              <a:rPr lang="ar-SA" altLang="en-US" sz="750" b="1" dirty="0">
+                <a:solidFill>
+                  <a:srgbClr val="3D3935"/>
+                </a:solidFill>
+                <a:latin typeface="Arial" pitchFamily="34" charset="0"/>
+                <a:ea typeface="Arial" pitchFamily="34" charset="-122"/>
+                <a:cs typeface="Arial" pitchFamily="34" charset="-120"/>
+              </a:rPr>
+              <a:t>13 أكتوبر</a:t>
+            </a:r>
+            <a:endParaRPr lang="ar-SA" sz="750" dirty="0"/>
+          </a:p>
+        </p:txBody>
+      </p:sp>
+      <p:sp>
+        <p:nvSpPr>
+          <p:cNvPr id="211" name="Shape 209"/>
+          <p:cNvSpPr/>
+          <p:nvPr/>
+        </p:nvSpPr>
+        <p:spPr>
+          <a:xfrm>
+            <a:off x="4920910" y="2313432"/>
+            <a:ext cx="164592" cy="164592"/>
+          </a:xfrm>
+          <a:prstGeom prst="diamond">
+            <a:avLst/>
+          </a:prstGeom>
+          <a:solidFill>
+            <a:srgbClr val="3D3935"/>
+          </a:solidFill>
+          <a:ln w="19050">
+            <a:solidFill>
+              <a:srgbClr val="FFFFFF"/>
+            </a:solidFill>
+            <a:prstDash val="solid"/>
+          </a:ln>
+        </p:spPr>
+      </p:sp>
+      <p:sp>
+        <p:nvSpPr>
+          <p:cNvPr id="212" name="Text 210"/>
+          <p:cNvSpPr/>
+          <p:nvPr/>
+        </p:nvSpPr>
+        <p:spPr>
+          <a:xfrm>
+            <a:off x="4573438" y="2487168"/>
+            <a:ext cx="859536" cy="201168"/>
+          </a:xfrm>
+          <a:prstGeom prst="rect">
+            <a:avLst/>
+          </a:prstGeom>
+          <a:noFill/>
+          <a:ln/>
+        </p:spPr>
+        <p:txBody>
+          <a:bodyPr wrap="square" lIns="0" tIns="0" rIns="0" bIns="0" rtlCol="0" anchor="t">
+            <a:normAutofit/>
+          </a:bodyPr>
+          <a:lstStyle/>
+          <a:p>
+            <a:pPr rtl="1" algn="ctr" indent="0" marL="0">
+              <a:buNone/>
+            </a:pPr>
+            <a:r>
+              <a:rPr lang="ar-SA" altLang="en-US" sz="550" dirty="0">
+                <a:solidFill>
+                  <a:srgbClr val="556070"/>
+                </a:solidFill>
+                <a:latin typeface="Arial" pitchFamily="34" charset="0"/>
+                <a:ea typeface="Arial" pitchFamily="34" charset="-122"/>
+                <a:cs typeface="Arial" pitchFamily="34" charset="-120"/>
+              </a:rPr>
+              <a:t>اكتمال تركيب نظام الدعم</a:t>
+            </a:r>
+            <a:endParaRPr lang="ar-SA" sz="550" dirty="0"/>
+          </a:p>
+        </p:txBody>
+      </p:sp>
+      <p:sp>
+        <p:nvSpPr>
+          <p:cNvPr id="213" name="Text 211"/>
+          <p:cNvSpPr/>
+          <p:nvPr/>
+        </p:nvSpPr>
+        <p:spPr>
+          <a:xfrm>
+            <a:off x="4436278" y="2697480"/>
+            <a:ext cx="1133856" cy="164592"/>
+          </a:xfrm>
+          <a:prstGeom prst="rect">
+            <a:avLst/>
+          </a:prstGeom>
+          <a:noFill/>
+          <a:ln/>
+        </p:spPr>
+        <p:txBody>
+          <a:bodyPr wrap="square" lIns="0" tIns="0" rIns="0" bIns="0" rtlCol="0" anchor="ctr">
+            <a:normAutofit/>
+          </a:bodyPr>
+          <a:lstStyle/>
+          <a:p>
+            <a:pPr rtl="1" algn="ctr" indent="0" marL="0">
+              <a:buNone/>
+            </a:pPr>
+            <a:r>
+              <a:rPr lang="ar-SA" altLang="en-US" sz="750" b="1" dirty="0">
+                <a:solidFill>
+                  <a:srgbClr val="3D3935"/>
+                </a:solidFill>
+                <a:latin typeface="Arial" pitchFamily="34" charset="0"/>
+                <a:ea typeface="Arial" pitchFamily="34" charset="-122"/>
+                <a:cs typeface="Arial" pitchFamily="34" charset="-120"/>
+              </a:rPr>
+              <a:t>19 أكتوبر</a:t>
+            </a:r>
+            <a:endParaRPr lang="ar-SA" sz="750" dirty="0"/>
+          </a:p>
+        </p:txBody>
+      </p:sp>
+      <p:sp>
+        <p:nvSpPr>
+          <p:cNvPr id="214" name="Shape 212"/>
+          <p:cNvSpPr/>
+          <p:nvPr/>
+        </p:nvSpPr>
+        <p:spPr>
+          <a:xfrm>
+            <a:off x="2150488" y="2313432"/>
+            <a:ext cx="164592" cy="164592"/>
+          </a:xfrm>
+          <a:prstGeom prst="diamond">
+            <a:avLst/>
+          </a:prstGeom>
+          <a:solidFill>
+            <a:srgbClr val="3D3935"/>
+          </a:solidFill>
+          <a:ln w="19050">
+            <a:solidFill>
+              <a:srgbClr val="FFFFFF"/>
+            </a:solidFill>
+            <a:prstDash val="solid"/>
+          </a:ln>
+        </p:spPr>
+      </p:sp>
+      <p:sp>
+        <p:nvSpPr>
+          <p:cNvPr id="215" name="Text 213"/>
+          <p:cNvSpPr/>
+          <p:nvPr/>
+        </p:nvSpPr>
+        <p:spPr>
+          <a:xfrm>
+            <a:off x="1803016" y="2487168"/>
+            <a:ext cx="859536" cy="201168"/>
+          </a:xfrm>
+          <a:prstGeom prst="rect">
+            <a:avLst/>
+          </a:prstGeom>
+          <a:noFill/>
+          <a:ln/>
+        </p:spPr>
+        <p:txBody>
+          <a:bodyPr wrap="square" lIns="0" tIns="0" rIns="0" bIns="0" rtlCol="0" anchor="t">
+            <a:normAutofit/>
+          </a:bodyPr>
+          <a:lstStyle/>
+          <a:p>
+            <a:pPr rtl="1" algn="ctr" indent="0" marL="0">
+              <a:buNone/>
+            </a:pPr>
+            <a:r>
+              <a:rPr lang="ar-SA" altLang="en-US" sz="550" dirty="0">
+                <a:solidFill>
+                  <a:srgbClr val="556070"/>
+                </a:solidFill>
+                <a:latin typeface="Arial" pitchFamily="34" charset="0"/>
+                <a:ea typeface="Arial" pitchFamily="34" charset="-122"/>
+                <a:cs typeface="Arial" pitchFamily="34" charset="-120"/>
+              </a:rPr>
+              <a:t>اكتمال أعمال الحفرة (جدار الحفرة)</a:t>
+            </a:r>
+            <a:endParaRPr lang="ar-SA" sz="550" dirty="0"/>
+          </a:p>
+        </p:txBody>
+      </p:sp>
+      <p:sp>
+        <p:nvSpPr>
+          <p:cNvPr id="216" name="Text 214"/>
+          <p:cNvSpPr/>
+          <p:nvPr/>
+        </p:nvSpPr>
+        <p:spPr>
+          <a:xfrm>
+            <a:off x="1665856" y="2697480"/>
+            <a:ext cx="1133856" cy="164592"/>
+          </a:xfrm>
+          <a:prstGeom prst="rect">
+            <a:avLst/>
+          </a:prstGeom>
+          <a:noFill/>
+          <a:ln/>
+        </p:spPr>
+        <p:txBody>
+          <a:bodyPr wrap="square" lIns="0" tIns="0" rIns="0" bIns="0" rtlCol="0" anchor="ctr">
+            <a:normAutofit/>
+          </a:bodyPr>
+          <a:lstStyle/>
+          <a:p>
+            <a:pPr rtl="1" algn="ctr" indent="0" marL="0">
+              <a:buNone/>
+            </a:pPr>
+            <a:r>
+              <a:rPr lang="ar-SA" altLang="en-US" sz="750" b="1" dirty="0">
+                <a:solidFill>
+                  <a:srgbClr val="3D3935"/>
+                </a:solidFill>
+                <a:latin typeface="Arial" pitchFamily="34" charset="0"/>
+                <a:ea typeface="Arial" pitchFamily="34" charset="-122"/>
+                <a:cs typeface="Arial" pitchFamily="34" charset="-120"/>
+              </a:rPr>
+              <a:t>11 نوفمبر</a:t>
+            </a:r>
+            <a:endParaRPr lang="ar-SA" sz="750" dirty="0"/>
+          </a:p>
+        </p:txBody>
+      </p:sp>
+      <p:sp>
+        <p:nvSpPr>
+          <p:cNvPr id="217" name="Shape 215"/>
+          <p:cNvSpPr/>
+          <p:nvPr/>
+        </p:nvSpPr>
+        <p:spPr>
+          <a:xfrm>
+            <a:off x="1307316" y="2313432"/>
+            <a:ext cx="164592" cy="164592"/>
+          </a:xfrm>
+          <a:prstGeom prst="diamond">
+            <a:avLst/>
+          </a:prstGeom>
+          <a:solidFill>
+            <a:srgbClr val="3D3935"/>
+          </a:solidFill>
+          <a:ln w="19050">
+            <a:solidFill>
+              <a:srgbClr val="FFFFFF"/>
+            </a:solidFill>
+            <a:prstDash val="solid"/>
+          </a:ln>
+        </p:spPr>
+      </p:sp>
+      <p:sp>
+        <p:nvSpPr>
+          <p:cNvPr id="218" name="Text 216"/>
+          <p:cNvSpPr/>
+          <p:nvPr/>
+        </p:nvSpPr>
+        <p:spPr>
+          <a:xfrm>
+            <a:off x="959844" y="2487168"/>
+            <a:ext cx="859536" cy="201168"/>
+          </a:xfrm>
+          <a:prstGeom prst="rect">
+            <a:avLst/>
+          </a:prstGeom>
+          <a:noFill/>
+          <a:ln/>
+        </p:spPr>
+        <p:txBody>
+          <a:bodyPr wrap="square" lIns="0" tIns="0" rIns="0" bIns="0" rtlCol="0" anchor="t">
+            <a:normAutofit/>
+          </a:bodyPr>
+          <a:lstStyle/>
+          <a:p>
+            <a:pPr rtl="1" algn="ctr" indent="0" marL="0">
+              <a:buNone/>
+            </a:pPr>
+            <a:r>
+              <a:rPr lang="ar-SA" altLang="en-US" sz="550" dirty="0">
+                <a:solidFill>
+                  <a:srgbClr val="556070"/>
+                </a:solidFill>
+                <a:latin typeface="Arial" pitchFamily="34" charset="0"/>
+                <a:ea typeface="Arial" pitchFamily="34" charset="-122"/>
+                <a:cs typeface="Arial" pitchFamily="34" charset="-120"/>
+              </a:rPr>
+              <a:t>اكتمال أساسات المبنى</a:t>
+            </a:r>
+            <a:endParaRPr lang="ar-SA" sz="550" dirty="0"/>
+          </a:p>
+        </p:txBody>
+      </p:sp>
+      <p:sp>
+        <p:nvSpPr>
+          <p:cNvPr id="219" name="Text 217"/>
+          <p:cNvSpPr/>
+          <p:nvPr/>
+        </p:nvSpPr>
+        <p:spPr>
+          <a:xfrm>
+            <a:off x="822684" y="2697480"/>
+            <a:ext cx="1133856" cy="164592"/>
+          </a:xfrm>
+          <a:prstGeom prst="rect">
+            <a:avLst/>
+          </a:prstGeom>
+          <a:noFill/>
+          <a:ln/>
+        </p:spPr>
+        <p:txBody>
+          <a:bodyPr wrap="square" lIns="0" tIns="0" rIns="0" bIns="0" rtlCol="0" anchor="ctr">
+            <a:normAutofit/>
+          </a:bodyPr>
+          <a:lstStyle/>
+          <a:p>
+            <a:pPr rtl="1" algn="ctr" indent="0" marL="0">
+              <a:buNone/>
+            </a:pPr>
+            <a:r>
+              <a:rPr lang="ar-SA" altLang="en-US" sz="750" b="1" dirty="0">
+                <a:solidFill>
+                  <a:srgbClr val="3D3935"/>
+                </a:solidFill>
+                <a:latin typeface="Arial" pitchFamily="34" charset="0"/>
+                <a:ea typeface="Arial" pitchFamily="34" charset="-122"/>
+                <a:cs typeface="Arial" pitchFamily="34" charset="-120"/>
+              </a:rPr>
+              <a:t>18 نوفمبر</a:t>
+            </a:r>
+            <a:endParaRPr lang="ar-SA" sz="750" dirty="0"/>
+          </a:p>
+        </p:txBody>
+      </p:sp>
+      <p:sp>
+        <p:nvSpPr>
+          <p:cNvPr id="220" name="Shape 218"/>
+          <p:cNvSpPr/>
+          <p:nvPr/>
+        </p:nvSpPr>
+        <p:spPr>
+          <a:xfrm>
+            <a:off x="584597" y="2313432"/>
+            <a:ext cx="164592" cy="164592"/>
+          </a:xfrm>
+          <a:prstGeom prst="diamond">
+            <a:avLst/>
+          </a:prstGeom>
+          <a:solidFill>
+            <a:srgbClr val="3D3935"/>
+          </a:solidFill>
+          <a:ln w="19050">
+            <a:solidFill>
+              <a:srgbClr val="FFFFFF"/>
+            </a:solidFill>
+            <a:prstDash val="solid"/>
+          </a:ln>
+        </p:spPr>
+      </p:sp>
+      <p:sp>
+        <p:nvSpPr>
+          <p:cNvPr id="221" name="Text 219"/>
+          <p:cNvSpPr/>
+          <p:nvPr/>
+        </p:nvSpPr>
+        <p:spPr>
+          <a:xfrm>
+            <a:off x="237125" y="2487168"/>
+            <a:ext cx="859536" cy="201168"/>
+          </a:xfrm>
+          <a:prstGeom prst="rect">
+            <a:avLst/>
+          </a:prstGeom>
+          <a:noFill/>
+          <a:ln/>
+        </p:spPr>
+        <p:txBody>
+          <a:bodyPr wrap="square" lIns="0" tIns="0" rIns="0" bIns="0" rtlCol="0" anchor="t">
+            <a:normAutofit/>
+          </a:bodyPr>
+          <a:lstStyle/>
+          <a:p>
+            <a:pPr rtl="1" algn="ctr" indent="0" marL="0">
+              <a:buNone/>
+            </a:pPr>
+            <a:r>
+              <a:rPr lang="ar-SA" altLang="en-US" sz="550" dirty="0">
+                <a:solidFill>
+                  <a:srgbClr val="556070"/>
+                </a:solidFill>
+                <a:latin typeface="Arial" pitchFamily="34" charset="0"/>
+                <a:ea typeface="Arial" pitchFamily="34" charset="-122"/>
+                <a:cs typeface="Arial" pitchFamily="34" charset="-120"/>
+              </a:rPr>
+              <a:t>الإنجاز الكلي</a:t>
+            </a:r>
+            <a:endParaRPr lang="ar-SA" sz="550" dirty="0"/>
+          </a:p>
+        </p:txBody>
+      </p:sp>
+      <p:sp>
+        <p:nvSpPr>
+          <p:cNvPr id="222" name="Text 220"/>
+          <p:cNvSpPr/>
+          <p:nvPr/>
+        </p:nvSpPr>
+        <p:spPr>
+          <a:xfrm>
+            <a:off x="99965" y="2697480"/>
+            <a:ext cx="1133856" cy="164592"/>
+          </a:xfrm>
+          <a:prstGeom prst="rect">
+            <a:avLst/>
+          </a:prstGeom>
+          <a:noFill/>
+          <a:ln/>
+        </p:spPr>
+        <p:txBody>
+          <a:bodyPr wrap="square" lIns="0" tIns="0" rIns="0" bIns="0" rtlCol="0" anchor="ctr">
+            <a:normAutofit/>
+          </a:bodyPr>
+          <a:lstStyle/>
+          <a:p>
+            <a:pPr rtl="1" algn="ctr" indent="0" marL="0">
+              <a:buNone/>
+            </a:pPr>
+            <a:r>
+              <a:rPr lang="ar-SA" altLang="en-US" sz="750" b="1" dirty="0">
+                <a:solidFill>
+                  <a:srgbClr val="3D3935"/>
+                </a:solidFill>
+                <a:latin typeface="Arial" pitchFamily="34" charset="0"/>
+                <a:ea typeface="Arial" pitchFamily="34" charset="-122"/>
+                <a:cs typeface="Arial" pitchFamily="34" charset="-120"/>
+              </a:rPr>
+              <a:t>24 نوفمبر</a:t>
+            </a:r>
+            <a:endParaRPr lang="ar-SA" sz="750" dirty="0"/>
+          </a:p>
+        </p:txBody>
+      </p:sp>
+      <p:sp>
+        <p:nvSpPr>
+          <p:cNvPr id="223" name="Shape 221"/>
+          <p:cNvSpPr/>
+          <p:nvPr/>
+        </p:nvSpPr>
+        <p:spPr>
+          <a:xfrm>
+            <a:off x="365760" y="2880360"/>
+            <a:ext cx="11460175" cy="215646"/>
+          </a:xfrm>
+          <a:prstGeom prst="rect">
+            <a:avLst/>
+          </a:prstGeom>
+          <a:solidFill>
+            <a:srgbClr val="FFFFFF"/>
+          </a:solidFill>
+          <a:ln w="6350">
+            <a:solidFill>
+              <a:srgbClr val="DFE6EA"/>
+            </a:solidFill>
+            <a:prstDash val="solid"/>
+          </a:ln>
+        </p:spPr>
+      </p:sp>
+      <p:sp>
+        <p:nvSpPr>
+          <p:cNvPr id="224" name="Shape 222"/>
+          <p:cNvSpPr/>
+          <p:nvPr/>
+        </p:nvSpPr>
+        <p:spPr>
+          <a:xfrm>
+            <a:off x="11515039" y="2869311"/>
+            <a:ext cx="237744" cy="237744"/>
+          </a:xfrm>
+          <a:prstGeom prst="ellipse">
+            <a:avLst>
+              <a:gd name="adj" fmla="val 32692"/>
+            </a:avLst>
+          </a:prstGeom>
+          <a:solidFill>
             <a:srgbClr val="C8503F"/>
           </a:solidFill>
-          <a:ln w="22225">
+          <a:ln w="19050">
+            <a:solidFill>
+              <a:srgbClr val="222222"/>
+            </a:solidFill>
+            <a:prstDash val="solid"/>
+          </a:ln>
+        </p:spPr>
+      </p:sp>
+      <p:sp>
+        <p:nvSpPr>
+          <p:cNvPr id="225" name="Text 223"/>
+          <p:cNvSpPr/>
+          <p:nvPr/>
+        </p:nvSpPr>
+        <p:spPr>
+          <a:xfrm>
+            <a:off x="11441887" y="2880360"/>
+            <a:ext cx="384048" cy="215646"/>
+          </a:xfrm>
+          <a:prstGeom prst="rect">
+            <a:avLst/>
+          </a:prstGeom>
+          <a:noFill/>
+          <a:ln/>
+        </p:spPr>
+        <p:txBody>
+          <a:bodyPr wrap="square" lIns="0" tIns="0" rIns="0" bIns="0" rtlCol="0" anchor="ctr">
+            <a:normAutofit/>
+          </a:bodyPr>
+          <a:lstStyle/>
+          <a:p>
+            <a:pPr rtl="1" algn="ctr" indent="0" marL="0">
+              <a:buNone/>
+            </a:pPr>
+            <a:r>
+              <a:rPr lang="ar-SA" altLang="en-US" sz="850" b="1" dirty="0">
+                <a:solidFill>
+                  <a:srgbClr val="FFFFFF"/>
+                </a:solidFill>
+                <a:latin typeface="Arial" pitchFamily="34" charset="0"/>
+                <a:ea typeface="Arial" pitchFamily="34" charset="-122"/>
+                <a:cs typeface="Arial" pitchFamily="34" charset="-120"/>
+              </a:rPr>
+              <a:t>A</a:t>
+            </a:r>
+            <a:endParaRPr lang="ar-SA" sz="850" dirty="0"/>
+          </a:p>
+        </p:txBody>
+      </p:sp>
+      <p:sp>
+        <p:nvSpPr>
+          <p:cNvPr id="226" name="Text 224"/>
+          <p:cNvSpPr/>
+          <p:nvPr/>
+        </p:nvSpPr>
+        <p:spPr>
+          <a:xfrm>
+            <a:off x="8762695" y="2880360"/>
+            <a:ext cx="2606040" cy="215646"/>
+          </a:xfrm>
+          <a:prstGeom prst="rect">
+            <a:avLst/>
+          </a:prstGeom>
+          <a:noFill/>
+          <a:ln/>
+        </p:spPr>
+        <p:txBody>
+          <a:bodyPr wrap="square" lIns="0" tIns="0" rIns="0" bIns="0" rtlCol="0" anchor="ctr">
+            <a:normAutofit/>
+          </a:bodyPr>
+          <a:lstStyle/>
+          <a:p>
+            <a:pPr rtl="1" algn="r" indent="0" marL="0">
+              <a:buNone/>
+            </a:pPr>
+            <a:r>
+              <a:rPr lang="ar-SA" altLang="en-US" sz="750" b="1" dirty="0">
+                <a:solidFill>
+                  <a:srgbClr val="222222"/>
+                </a:solidFill>
+                <a:latin typeface="Arial" pitchFamily="34" charset="0"/>
+                <a:ea typeface="Arial" pitchFamily="34" charset="-122"/>
+                <a:cs typeface="Arial" pitchFamily="34" charset="-120"/>
+              </a:rPr>
+              <a:t>تركيب نظام الدعم (Shoring)</a:t>
+            </a:r>
+            <a:endParaRPr lang="ar-SA" sz="750" dirty="0"/>
+          </a:p>
+        </p:txBody>
+      </p:sp>
+      <p:sp>
+        <p:nvSpPr>
+          <p:cNvPr id="227" name="Text 225"/>
+          <p:cNvSpPr/>
+          <p:nvPr/>
+        </p:nvSpPr>
+        <p:spPr>
+          <a:xfrm>
+            <a:off x="7967167" y="2880360"/>
+            <a:ext cx="777240" cy="215646"/>
+          </a:xfrm>
+          <a:prstGeom prst="rect">
+            <a:avLst/>
+          </a:prstGeom>
+          <a:noFill/>
+          <a:ln/>
+        </p:spPr>
+        <p:txBody>
+          <a:bodyPr wrap="square" lIns="0" tIns="0" rIns="0" bIns="0" rtlCol="0" anchor="ctr">
+            <a:normAutofit/>
+          </a:bodyPr>
+          <a:lstStyle/>
+          <a:p>
+            <a:pPr rtl="1" algn="ctr" indent="0" marL="0">
+              <a:buNone/>
+            </a:pPr>
+            <a:r>
+              <a:rPr lang="ar-SA" altLang="en-US" sz="700" dirty="0">
+                <a:solidFill>
+                  <a:srgbClr val="444444"/>
+                </a:solidFill>
+                <a:latin typeface="Arial" pitchFamily="34" charset="0"/>
+                <a:ea typeface="Arial" pitchFamily="34" charset="-122"/>
+                <a:cs typeface="Arial" pitchFamily="34" charset="-120"/>
+              </a:rPr>
+              <a:t>—</a:t>
+            </a:r>
+            <a:endParaRPr lang="ar-SA" sz="700" dirty="0"/>
+          </a:p>
+        </p:txBody>
+      </p:sp>
+      <p:sp>
+        <p:nvSpPr>
+          <p:cNvPr id="228" name="Text 226"/>
+          <p:cNvSpPr/>
+          <p:nvPr/>
+        </p:nvSpPr>
+        <p:spPr>
+          <a:xfrm>
+            <a:off x="7464247" y="2880360"/>
+            <a:ext cx="502920" cy="215646"/>
+          </a:xfrm>
+          <a:prstGeom prst="rect">
+            <a:avLst/>
+          </a:prstGeom>
+          <a:noFill/>
+          <a:ln/>
+        </p:spPr>
+        <p:txBody>
+          <a:bodyPr wrap="square" lIns="0" tIns="0" rIns="0" bIns="0" rtlCol="0" anchor="ctr">
+            <a:normAutofit/>
+          </a:bodyPr>
+          <a:lstStyle/>
+          <a:p>
+            <a:pPr rtl="1" algn="ctr" indent="0" marL="0">
+              <a:buNone/>
+            </a:pPr>
+            <a:r>
+              <a:rPr lang="ar-SA" altLang="en-US" sz="900" b="1" dirty="0">
+                <a:solidFill>
+                  <a:srgbClr val="222222"/>
+                </a:solidFill>
+                <a:latin typeface="Arial" pitchFamily="34" charset="0"/>
+                <a:ea typeface="Arial" pitchFamily="34" charset="-122"/>
+                <a:cs typeface="Arial" pitchFamily="34" charset="-120"/>
+              </a:rPr>
+              <a:t>6</a:t>
+            </a:r>
+            <a:endParaRPr lang="ar-SA" sz="900" dirty="0"/>
+          </a:p>
+        </p:txBody>
+      </p:sp>
+      <p:sp>
+        <p:nvSpPr>
+          <p:cNvPr id="229" name="Text 227"/>
+          <p:cNvSpPr/>
+          <p:nvPr/>
+        </p:nvSpPr>
+        <p:spPr>
+          <a:xfrm>
+            <a:off x="6805879" y="2880360"/>
+            <a:ext cx="658368" cy="215646"/>
+          </a:xfrm>
+          <a:prstGeom prst="rect">
+            <a:avLst/>
+          </a:prstGeom>
+          <a:noFill/>
+          <a:ln/>
+        </p:spPr>
+        <p:txBody>
+          <a:bodyPr wrap="square" lIns="0" tIns="0" rIns="0" bIns="0" rtlCol="0" anchor="ctr">
+            <a:normAutofit/>
+          </a:bodyPr>
+          <a:lstStyle/>
+          <a:p>
+            <a:pPr rtl="1" algn="ctr" indent="0" marL="0">
+              <a:buNone/>
+            </a:pPr>
+            <a:r>
+              <a:rPr lang="ar-SA" altLang="en-US" sz="700" b="1" dirty="0">
+                <a:solidFill>
+                  <a:srgbClr val="222222"/>
+                </a:solidFill>
+                <a:latin typeface="Arial" pitchFamily="34" charset="0"/>
+                <a:ea typeface="Arial" pitchFamily="34" charset="-122"/>
+                <a:cs typeface="Arial" pitchFamily="34" charset="-120"/>
+              </a:rPr>
+              <a:t>13 أكتوبر</a:t>
+            </a:r>
+            <a:endParaRPr lang="ar-SA" sz="700" dirty="0"/>
+          </a:p>
+        </p:txBody>
+      </p:sp>
+      <p:sp>
+        <p:nvSpPr>
+          <p:cNvPr id="230" name="Text 228"/>
+          <p:cNvSpPr/>
+          <p:nvPr/>
+        </p:nvSpPr>
+        <p:spPr>
+          <a:xfrm>
+            <a:off x="6147511" y="2880360"/>
+            <a:ext cx="658368" cy="215646"/>
+          </a:xfrm>
+          <a:prstGeom prst="rect">
+            <a:avLst/>
+          </a:prstGeom>
+          <a:noFill/>
+          <a:ln/>
+        </p:spPr>
+        <p:txBody>
+          <a:bodyPr wrap="square" lIns="0" tIns="0" rIns="0" bIns="0" rtlCol="0" anchor="ctr">
+            <a:normAutofit/>
+          </a:bodyPr>
+          <a:lstStyle/>
+          <a:p>
+            <a:pPr rtl="1" algn="ctr" indent="0" marL="0">
+              <a:buNone/>
+            </a:pPr>
+            <a:r>
+              <a:rPr lang="ar-SA" altLang="en-US" sz="700" b="1" dirty="0">
+                <a:solidFill>
+                  <a:srgbClr val="222222"/>
+                </a:solidFill>
+                <a:latin typeface="Arial" pitchFamily="34" charset="0"/>
+                <a:ea typeface="Arial" pitchFamily="34" charset="-122"/>
+                <a:cs typeface="Arial" pitchFamily="34" charset="-120"/>
+              </a:rPr>
+              <a:t>19 أكتوبر</a:t>
+            </a:r>
+            <a:endParaRPr lang="ar-SA" sz="700" dirty="0"/>
+          </a:p>
+        </p:txBody>
+      </p:sp>
+      <p:sp>
+        <p:nvSpPr>
+          <p:cNvPr id="231" name="Shape 229"/>
+          <p:cNvSpPr/>
+          <p:nvPr/>
+        </p:nvSpPr>
+        <p:spPr>
+          <a:xfrm>
+            <a:off x="4942980" y="2928747"/>
+            <a:ext cx="843172" cy="64008"/>
+          </a:xfrm>
+          <a:prstGeom prst="rect">
+            <a:avLst/>
+          </a:prstGeom>
+          <a:solidFill>
+            <a:srgbClr val="C8503F"/>
+          </a:solidFill>
+          <a:ln w="12700">
+            <a:solidFill>
+              <a:srgbClr val="C8503F"/>
+            </a:solidFill>
+            <a:prstDash val="solid"/>
+          </a:ln>
+        </p:spPr>
+      </p:sp>
+      <p:sp>
+        <p:nvSpPr>
+          <p:cNvPr id="232" name="Shape 230"/>
+          <p:cNvSpPr/>
+          <p:nvPr/>
+        </p:nvSpPr>
+        <p:spPr>
+          <a:xfrm flipV="1">
+            <a:off x="5722144" y="2992755"/>
+            <a:ext cx="64008" cy="54864"/>
+          </a:xfrm>
+          <a:prstGeom prst="triangle">
+            <a:avLst/>
+          </a:prstGeom>
+          <a:solidFill>
+            <a:srgbClr val="C8503F"/>
+          </a:solidFill>
+          <a:ln w="12700">
+            <a:solidFill>
+              <a:srgbClr val="C8503F"/>
+            </a:solidFill>
+            <a:prstDash val="solid"/>
+          </a:ln>
+        </p:spPr>
+      </p:sp>
+      <p:sp>
+        <p:nvSpPr>
+          <p:cNvPr id="233" name="Shape 231"/>
+          <p:cNvSpPr/>
+          <p:nvPr/>
+        </p:nvSpPr>
+        <p:spPr>
+          <a:xfrm flipV="1">
+            <a:off x="4942980" y="2992755"/>
+            <a:ext cx="64008" cy="54864"/>
+          </a:xfrm>
+          <a:prstGeom prst="triangle">
+            <a:avLst/>
+          </a:prstGeom>
+          <a:solidFill>
+            <a:srgbClr val="C8503F"/>
+          </a:solidFill>
+          <a:ln w="12700">
+            <a:solidFill>
+              <a:srgbClr val="C8503F"/>
+            </a:solidFill>
+            <a:prstDash val="solid"/>
+          </a:ln>
+        </p:spPr>
+      </p:sp>
+      <p:sp>
+        <p:nvSpPr>
+          <p:cNvPr id="234" name="Text 232"/>
+          <p:cNvSpPr/>
+          <p:nvPr/>
+        </p:nvSpPr>
+        <p:spPr>
+          <a:xfrm>
+            <a:off x="4348620" y="2880360"/>
+            <a:ext cx="548640" cy="215646"/>
+          </a:xfrm>
+          <a:prstGeom prst="rect">
+            <a:avLst/>
+          </a:prstGeom>
+          <a:noFill/>
+          <a:ln/>
+        </p:spPr>
+        <p:txBody>
+          <a:bodyPr wrap="square" lIns="0" tIns="0" rIns="0" bIns="0" rtlCol="0" anchor="ctr">
+            <a:normAutofit/>
+          </a:bodyPr>
+          <a:lstStyle/>
+          <a:p>
+            <a:pPr rtl="1" algn="r" indent="0" marL="0">
+              <a:buNone/>
+            </a:pPr>
+            <a:r>
+              <a:rPr lang="ar-SA" altLang="en-US" sz="750" b="1" dirty="0">
+                <a:solidFill>
+                  <a:srgbClr val="3D3935"/>
+                </a:solidFill>
+                <a:latin typeface="Arial" pitchFamily="34" charset="0"/>
+                <a:ea typeface="Arial" pitchFamily="34" charset="-122"/>
+                <a:cs typeface="Arial" pitchFamily="34" charset="-120"/>
+              </a:rPr>
+              <a:t>6 يوم</a:t>
+            </a:r>
+            <a:endParaRPr lang="ar-SA" sz="750" dirty="0"/>
+          </a:p>
+        </p:txBody>
+      </p:sp>
+      <p:sp>
+        <p:nvSpPr>
+          <p:cNvPr id="235" name="Shape 233"/>
+          <p:cNvSpPr/>
+          <p:nvPr/>
+        </p:nvSpPr>
+        <p:spPr>
+          <a:xfrm>
+            <a:off x="365760" y="3096006"/>
+            <a:ext cx="11460175" cy="215646"/>
+          </a:xfrm>
+          <a:prstGeom prst="rect">
+            <a:avLst/>
+          </a:prstGeom>
+          <a:solidFill>
+            <a:srgbClr val="F6F9FA"/>
+          </a:solidFill>
+          <a:ln w="6350">
+            <a:solidFill>
+              <a:srgbClr val="DFE6EA"/>
+            </a:solidFill>
+            <a:prstDash val="solid"/>
+          </a:ln>
+        </p:spPr>
+      </p:sp>
+      <p:sp>
+        <p:nvSpPr>
+          <p:cNvPr id="236" name="Shape 234"/>
+          <p:cNvSpPr/>
+          <p:nvPr/>
+        </p:nvSpPr>
+        <p:spPr>
+          <a:xfrm>
+            <a:off x="11441887" y="3126105"/>
+            <a:ext cx="329184" cy="155448"/>
+          </a:xfrm>
+          <a:prstGeom prst="roundRect">
+            <a:avLst>
+              <a:gd name="adj" fmla="val 50000"/>
+            </a:avLst>
+          </a:prstGeom>
+          <a:solidFill>
+            <a:srgbClr val="D9695A"/>
+          </a:solidFill>
+          <a:ln w="19050">
+            <a:solidFill>
+              <a:srgbClr val="222222"/>
+            </a:solidFill>
+            <a:prstDash val="solid"/>
+          </a:ln>
+        </p:spPr>
+      </p:sp>
+      <p:sp>
+        <p:nvSpPr>
+          <p:cNvPr id="237" name="Text 235"/>
+          <p:cNvSpPr/>
+          <p:nvPr/>
+        </p:nvSpPr>
+        <p:spPr>
+          <a:xfrm>
+            <a:off x="11414455" y="3096006"/>
+            <a:ext cx="384048" cy="215646"/>
+          </a:xfrm>
+          <a:prstGeom prst="rect">
+            <a:avLst/>
+          </a:prstGeom>
+          <a:noFill/>
+          <a:ln/>
+        </p:spPr>
+        <p:txBody>
+          <a:bodyPr wrap="square" lIns="0" tIns="0" rIns="0" bIns="0" rtlCol="0" anchor="ctr">
+            <a:normAutofit/>
+          </a:bodyPr>
+          <a:lstStyle/>
+          <a:p>
+            <a:pPr rtl="1" algn="ctr" indent="0" marL="0">
+              <a:buNone/>
+            </a:pPr>
+            <a:r>
+              <a:rPr lang="ar-SA" altLang="en-US" sz="650" b="1" dirty="0">
+                <a:solidFill>
+                  <a:srgbClr val="FFFFFF"/>
+                </a:solidFill>
+                <a:latin typeface="Arial" pitchFamily="34" charset="0"/>
+                <a:ea typeface="Arial" pitchFamily="34" charset="-122"/>
+                <a:cs typeface="Arial" pitchFamily="34" charset="-120"/>
+              </a:rPr>
+              <a:t>A.1</a:t>
+            </a:r>
+            <a:endParaRPr lang="ar-SA" sz="650" dirty="0"/>
+          </a:p>
+        </p:txBody>
+      </p:sp>
+      <p:sp>
+        <p:nvSpPr>
+          <p:cNvPr id="238" name="Text 236"/>
+          <p:cNvSpPr/>
+          <p:nvPr/>
+        </p:nvSpPr>
+        <p:spPr>
+          <a:xfrm>
+            <a:off x="8762695" y="3096006"/>
+            <a:ext cx="2441448" cy="215646"/>
+          </a:xfrm>
+          <a:prstGeom prst="rect">
+            <a:avLst/>
+          </a:prstGeom>
+          <a:noFill/>
+          <a:ln/>
+        </p:spPr>
+        <p:txBody>
+          <a:bodyPr wrap="square" lIns="0" tIns="0" rIns="0" bIns="0" rtlCol="0" anchor="ctr">
+            <a:normAutofit/>
+          </a:bodyPr>
+          <a:lstStyle/>
+          <a:p>
+            <a:pPr rtl="1" algn="r" indent="0" marL="0">
+              <a:buNone/>
+            </a:pPr>
+            <a:r>
+              <a:rPr lang="ar-SA" altLang="en-US" sz="700" dirty="0">
+                <a:solidFill>
+                  <a:srgbClr val="222222"/>
+                </a:solidFill>
+                <a:latin typeface="Arial" pitchFamily="34" charset="0"/>
+                <a:ea typeface="Arial" pitchFamily="34" charset="-122"/>
+                <a:cs typeface="Arial" pitchFamily="34" charset="-120"/>
+              </a:rPr>
+              <a:t>الحفر لأعمدة H-Beam</a:t>
+            </a:r>
+            <a:endParaRPr lang="ar-SA" sz="700" dirty="0"/>
+          </a:p>
+        </p:txBody>
+      </p:sp>
+      <p:sp>
+        <p:nvSpPr>
+          <p:cNvPr id="239" name="Text 237"/>
+          <p:cNvSpPr/>
+          <p:nvPr/>
+        </p:nvSpPr>
+        <p:spPr>
+          <a:xfrm>
+            <a:off x="7967167" y="3096006"/>
+            <a:ext cx="777240" cy="215646"/>
+          </a:xfrm>
+          <a:prstGeom prst="rect">
+            <a:avLst/>
+          </a:prstGeom>
+          <a:noFill/>
+          <a:ln/>
+        </p:spPr>
+        <p:txBody>
+          <a:bodyPr wrap="square" lIns="0" tIns="0" rIns="0" bIns="0" rtlCol="0" anchor="ctr">
+            <a:normAutofit/>
+          </a:bodyPr>
+          <a:lstStyle/>
+          <a:p>
+            <a:pPr rtl="1" algn="ctr" indent="0" marL="0">
+              <a:buNone/>
+            </a:pPr>
+            <a:r>
+              <a:rPr lang="ar-SA" altLang="en-US" sz="700" dirty="0">
+                <a:solidFill>
+                  <a:srgbClr val="444444"/>
+                </a:solidFill>
+                <a:latin typeface="Arial" pitchFamily="34" charset="0"/>
+                <a:ea typeface="Arial" pitchFamily="34" charset="-122"/>
+                <a:cs typeface="Arial" pitchFamily="34" charset="-120"/>
+              </a:rPr>
+              <a:t>—</a:t>
+            </a:r>
+            <a:endParaRPr lang="ar-SA" sz="700" dirty="0"/>
+          </a:p>
+        </p:txBody>
+      </p:sp>
+      <p:sp>
+        <p:nvSpPr>
+          <p:cNvPr id="240" name="Text 238"/>
+          <p:cNvSpPr/>
+          <p:nvPr/>
+        </p:nvSpPr>
+        <p:spPr>
+          <a:xfrm>
+            <a:off x="7464247" y="3096006"/>
+            <a:ext cx="502920" cy="215646"/>
+          </a:xfrm>
+          <a:prstGeom prst="rect">
+            <a:avLst/>
+          </a:prstGeom>
+          <a:noFill/>
+          <a:ln/>
+        </p:spPr>
+        <p:txBody>
+          <a:bodyPr wrap="square" lIns="0" tIns="0" rIns="0" bIns="0" rtlCol="0" anchor="ctr">
+            <a:normAutofit/>
+          </a:bodyPr>
+          <a:lstStyle/>
+          <a:p>
+            <a:pPr rtl="1" algn="ctr" indent="0" marL="0">
+              <a:buNone/>
+            </a:pPr>
+            <a:r>
+              <a:rPr lang="ar-SA" altLang="en-US" sz="900" b="1" dirty="0">
+                <a:solidFill>
+                  <a:srgbClr val="222222"/>
+                </a:solidFill>
+                <a:latin typeface="Arial" pitchFamily="34" charset="0"/>
+                <a:ea typeface="Arial" pitchFamily="34" charset="-122"/>
+                <a:cs typeface="Arial" pitchFamily="34" charset="-120"/>
+              </a:rPr>
+              <a:t>2</a:t>
+            </a:r>
+            <a:endParaRPr lang="ar-SA" sz="900" dirty="0"/>
+          </a:p>
+        </p:txBody>
+      </p:sp>
+      <p:sp>
+        <p:nvSpPr>
+          <p:cNvPr id="241" name="Text 239"/>
+          <p:cNvSpPr/>
+          <p:nvPr/>
+        </p:nvSpPr>
+        <p:spPr>
+          <a:xfrm>
+            <a:off x="6805879" y="3096006"/>
+            <a:ext cx="658368" cy="215646"/>
+          </a:xfrm>
+          <a:prstGeom prst="rect">
+            <a:avLst/>
+          </a:prstGeom>
+          <a:noFill/>
+          <a:ln/>
+        </p:spPr>
+        <p:txBody>
+          <a:bodyPr wrap="square" lIns="0" tIns="0" rIns="0" bIns="0" rtlCol="0" anchor="ctr">
+            <a:normAutofit/>
+          </a:bodyPr>
+          <a:lstStyle/>
+          <a:p>
+            <a:pPr rtl="1" algn="ctr" indent="0" marL="0">
+              <a:buNone/>
+            </a:pPr>
+            <a:r>
+              <a:rPr lang="ar-SA" altLang="en-US" sz="700" b="1" dirty="0">
+                <a:solidFill>
+                  <a:srgbClr val="222222"/>
+                </a:solidFill>
+                <a:latin typeface="Arial" pitchFamily="34" charset="0"/>
+                <a:ea typeface="Arial" pitchFamily="34" charset="-122"/>
+                <a:cs typeface="Arial" pitchFamily="34" charset="-120"/>
+              </a:rPr>
+              <a:t>13 أكتوبر</a:t>
+            </a:r>
+            <a:endParaRPr lang="ar-SA" sz="700" dirty="0"/>
+          </a:p>
+        </p:txBody>
+      </p:sp>
+      <p:sp>
+        <p:nvSpPr>
+          <p:cNvPr id="242" name="Text 240"/>
+          <p:cNvSpPr/>
+          <p:nvPr/>
+        </p:nvSpPr>
+        <p:spPr>
+          <a:xfrm>
+            <a:off x="6147511" y="3096006"/>
+            <a:ext cx="658368" cy="215646"/>
+          </a:xfrm>
+          <a:prstGeom prst="rect">
+            <a:avLst/>
+          </a:prstGeom>
+          <a:noFill/>
+          <a:ln/>
+        </p:spPr>
+        <p:txBody>
+          <a:bodyPr wrap="square" lIns="0" tIns="0" rIns="0" bIns="0" rtlCol="0" anchor="ctr">
+            <a:normAutofit/>
+          </a:bodyPr>
+          <a:lstStyle/>
+          <a:p>
+            <a:pPr rtl="1" algn="ctr" indent="0" marL="0">
+              <a:buNone/>
+            </a:pPr>
+            <a:r>
+              <a:rPr lang="ar-SA" altLang="en-US" sz="700" b="1" dirty="0">
+                <a:solidFill>
+                  <a:srgbClr val="222222"/>
+                </a:solidFill>
+                <a:latin typeface="Arial" pitchFamily="34" charset="0"/>
+                <a:ea typeface="Arial" pitchFamily="34" charset="-122"/>
+                <a:cs typeface="Arial" pitchFamily="34" charset="-120"/>
+              </a:rPr>
+              <a:t>14 أكتوبر</a:t>
+            </a:r>
+            <a:endParaRPr lang="ar-SA" sz="700" dirty="0"/>
+          </a:p>
+        </p:txBody>
+      </p:sp>
+      <p:sp>
+        <p:nvSpPr>
+          <p:cNvPr id="243" name="Shape 241"/>
+          <p:cNvSpPr/>
+          <p:nvPr/>
+        </p:nvSpPr>
+        <p:spPr>
+          <a:xfrm>
+            <a:off x="5545245" y="3141292"/>
+            <a:ext cx="240906" cy="125075"/>
+          </a:xfrm>
+          <a:prstGeom prst="roundRect">
+            <a:avLst>
+              <a:gd name="adj" fmla="val 29243"/>
+            </a:avLst>
+          </a:prstGeom>
+          <a:solidFill>
+            <a:srgbClr val="D9695A"/>
+          </a:solidFill>
+          <a:ln w="19050">
             <a:solidFill>
               <a:srgbClr val="222222"/>
             </a:solidFill>
@@ -14409,61 +15148,20 @@
       </p:sp>
       <p:sp>
         <p:nvSpPr>
-          <p:cNvPr id="223" name="Text 221"/>
-          <p:cNvSpPr/>
-          <p:nvPr/>
-        </p:nvSpPr>
-        <p:spPr>
-          <a:xfrm>
-            <a:off x="4942980" y="2660284"/>
-            <a:ext cx="843172" cy="222003"/>
-          </a:xfrm>
-          <a:prstGeom prst="rect">
-            <a:avLst/>
-          </a:prstGeom>
-          <a:noFill/>
-          <a:ln/>
-        </p:spPr>
-        <p:txBody>
-          <a:bodyPr wrap="square" lIns="0" tIns="0" rIns="0" bIns="0" rtlCol="0" anchor="ctr">
-            <a:normAutofit/>
-          </a:bodyPr>
-          <a:lstStyle/>
-          <a:p>
-            <a:pPr rtl="1" algn="ctr" indent="0" marL="0">
-              <a:buNone/>
-            </a:pPr>
-            <a:r>
-              <a:rPr lang="ar-SA" altLang="en-US" sz="800" b="1" dirty="0">
-                <a:solidFill>
-                  <a:srgbClr val="FFFFFF"/>
-                </a:solidFill>
-                <a:latin typeface="Arial" pitchFamily="34" charset="0"/>
-                <a:ea typeface="Arial" pitchFamily="34" charset="-122"/>
-                <a:cs typeface="Arial" pitchFamily="34" charset="-120"/>
-              </a:rPr>
-              <a:t>6 يوم</a:t>
-            </a:r>
-            <a:endParaRPr lang="ar-SA" sz="800" dirty="0"/>
-          </a:p>
-        </p:txBody>
-      </p:sp>
-      <p:sp>
-        <p:nvSpPr>
-          <p:cNvPr id="224" name="Shape 222"/>
-          <p:cNvSpPr/>
-          <p:nvPr/>
-        </p:nvSpPr>
-        <p:spPr>
-          <a:xfrm>
-            <a:off x="365760" y="2973106"/>
-            <a:ext cx="11460175" cy="403642"/>
-          </a:xfrm>
-          <a:prstGeom prst="rect">
-            <a:avLst/>
-          </a:prstGeom>
-          <a:solidFill>
-            <a:srgbClr val="F6F9FA"/>
+          <p:cNvPr id="244" name="Shape 242"/>
+          <p:cNvSpPr/>
+          <p:nvPr/>
+        </p:nvSpPr>
+        <p:spPr>
+          <a:xfrm>
+            <a:off x="365760" y="3311652"/>
+            <a:ext cx="11460175" cy="215646"/>
+          </a:xfrm>
+          <a:prstGeom prst="rect">
+            <a:avLst/>
+          </a:prstGeom>
+          <a:solidFill>
+            <a:srgbClr val="FFFFFF"/>
           </a:solidFill>
           <a:ln w="6350">
             <a:solidFill>
@@ -14475,297 +15173,299 @@
       </p:sp>
       <p:sp>
         <p:nvSpPr>
-          <p:cNvPr id="225" name="Shape 223"/>
-          <p:cNvSpPr/>
-          <p:nvPr/>
-        </p:nvSpPr>
-        <p:spPr>
-          <a:xfrm>
-            <a:off x="11496751" y="3037767"/>
-            <a:ext cx="274320" cy="274320"/>
-          </a:xfrm>
-          <a:prstGeom prst="ellipse">
-            <a:avLst/>
-          </a:prstGeom>
-          <a:solidFill>
-            <a:srgbClr val="00778B"/>
-          </a:solidFill>
-          <a:ln w="6350">
-            <a:solidFill>
-              <a:srgbClr val="00778B"/>
-            </a:solidFill>
-            <a:prstDash val="solid"/>
-          </a:ln>
-        </p:spPr>
-      </p:sp>
-      <p:sp>
-        <p:nvSpPr>
-          <p:cNvPr id="226" name="Text 224"/>
-          <p:cNvSpPr/>
-          <p:nvPr/>
-        </p:nvSpPr>
-        <p:spPr>
-          <a:xfrm>
-            <a:off x="11441887" y="2973106"/>
-            <a:ext cx="384048" cy="403642"/>
-          </a:xfrm>
-          <a:prstGeom prst="rect">
-            <a:avLst/>
-          </a:prstGeom>
-          <a:noFill/>
-          <a:ln/>
-        </p:spPr>
-        <p:txBody>
-          <a:bodyPr wrap="square" lIns="0" tIns="0" rIns="0" bIns="0" rtlCol="0" anchor="ctr">
-            <a:normAutofit/>
-          </a:bodyPr>
-          <a:lstStyle/>
-          <a:p>
-            <a:pPr rtl="1" algn="ctr" indent="0" marL="0">
-              <a:buNone/>
-            </a:pPr>
-            <a:r>
-              <a:rPr lang="ar-SA" altLang="en-US" sz="900" b="1" dirty="0">
-                <a:solidFill>
-                  <a:srgbClr val="FFFFFF"/>
-                </a:solidFill>
-                <a:latin typeface="Arial" pitchFamily="34" charset="0"/>
-                <a:ea typeface="Arial" pitchFamily="34" charset="-122"/>
-                <a:cs typeface="Arial" pitchFamily="34" charset="-120"/>
-              </a:rPr>
-              <a:t>B</a:t>
-            </a:r>
-            <a:endParaRPr lang="ar-SA" sz="900" dirty="0"/>
-          </a:p>
-        </p:txBody>
-      </p:sp>
-      <p:sp>
-        <p:nvSpPr>
-          <p:cNvPr id="227" name="Text 225"/>
-          <p:cNvSpPr/>
-          <p:nvPr/>
-        </p:nvSpPr>
-        <p:spPr>
-          <a:xfrm>
-            <a:off x="8762695" y="2973106"/>
-            <a:ext cx="2606040" cy="403642"/>
-          </a:xfrm>
-          <a:prstGeom prst="rect">
-            <a:avLst/>
-          </a:prstGeom>
-          <a:noFill/>
-          <a:ln/>
-        </p:spPr>
-        <p:txBody>
-          <a:bodyPr wrap="square" lIns="0" tIns="0" rIns="0" bIns="0" rtlCol="0" anchor="ctr">
-            <a:normAutofit/>
-          </a:bodyPr>
-          <a:lstStyle/>
-          <a:p>
-            <a:pPr rtl="1" algn="r" indent="0" marL="0">
-              <a:buNone/>
-            </a:pPr>
-            <a:r>
-              <a:rPr lang="ar-SA" altLang="en-US" sz="900" dirty="0">
-                <a:solidFill>
-                  <a:srgbClr val="222222"/>
-                </a:solidFill>
-                <a:latin typeface="Arial" pitchFamily="34" charset="0"/>
-                <a:ea typeface="Arial" pitchFamily="34" charset="-122"/>
-                <a:cs typeface="Arial" pitchFamily="34" charset="-120"/>
-              </a:rPr>
-              <a:t>الخرسانة العادية (Lean concrete)</a:t>
-            </a:r>
-            <a:endParaRPr lang="ar-SA" sz="900" dirty="0"/>
-          </a:p>
-        </p:txBody>
-      </p:sp>
-      <p:sp>
-        <p:nvSpPr>
-          <p:cNvPr id="228" name="Text 226"/>
-          <p:cNvSpPr/>
-          <p:nvPr/>
-        </p:nvSpPr>
-        <p:spPr>
-          <a:xfrm>
-            <a:off x="7967167" y="2973106"/>
-            <a:ext cx="777240" cy="403642"/>
-          </a:xfrm>
-          <a:prstGeom prst="rect">
-            <a:avLst/>
-          </a:prstGeom>
-          <a:noFill/>
-          <a:ln/>
-        </p:spPr>
-        <p:txBody>
-          <a:bodyPr wrap="square" lIns="0" tIns="0" rIns="0" bIns="0" rtlCol="0" anchor="ctr">
-            <a:normAutofit/>
-          </a:bodyPr>
-          <a:lstStyle/>
-          <a:p>
-            <a:pPr rtl="1" algn="ctr" indent="0" marL="0">
-              <a:buNone/>
-            </a:pPr>
-            <a:r>
-              <a:rPr lang="ar-SA" altLang="en-US" sz="850" dirty="0">
-                <a:solidFill>
-                  <a:srgbClr val="444444"/>
-                </a:solidFill>
-                <a:latin typeface="Arial" pitchFamily="34" charset="0"/>
-                <a:ea typeface="Arial" pitchFamily="34" charset="-122"/>
-                <a:cs typeface="Arial" pitchFamily="34" charset="-120"/>
-              </a:rPr>
-              <a:t>A · SS +6</a:t>
-            </a:r>
-            <a:endParaRPr lang="ar-SA" sz="850" dirty="0"/>
-          </a:p>
-        </p:txBody>
-      </p:sp>
-      <p:sp>
-        <p:nvSpPr>
-          <p:cNvPr id="229" name="Text 227"/>
-          <p:cNvSpPr/>
-          <p:nvPr/>
-        </p:nvSpPr>
-        <p:spPr>
-          <a:xfrm>
-            <a:off x="7464247" y="2973106"/>
-            <a:ext cx="502920" cy="403642"/>
-          </a:xfrm>
-          <a:prstGeom prst="rect">
-            <a:avLst/>
-          </a:prstGeom>
-          <a:noFill/>
-          <a:ln/>
-        </p:spPr>
-        <p:txBody>
-          <a:bodyPr wrap="square" lIns="0" tIns="0" rIns="0" bIns="0" rtlCol="0" anchor="ctr">
-            <a:normAutofit/>
-          </a:bodyPr>
-          <a:lstStyle/>
-          <a:p>
-            <a:pPr rtl="1" algn="ctr" indent="0" marL="0">
-              <a:buNone/>
-            </a:pPr>
-            <a:r>
-              <a:rPr lang="ar-SA" altLang="en-US" sz="1100" b="1" dirty="0">
-                <a:solidFill>
-                  <a:srgbClr val="222222"/>
-                </a:solidFill>
-                <a:latin typeface="Arial" pitchFamily="34" charset="0"/>
-                <a:ea typeface="Arial" pitchFamily="34" charset="-122"/>
-                <a:cs typeface="Arial" pitchFamily="34" charset="-120"/>
-              </a:rPr>
-              <a:t>2</a:t>
-            </a:r>
-            <a:endParaRPr lang="ar-SA" sz="1100" dirty="0"/>
-          </a:p>
-        </p:txBody>
-      </p:sp>
-      <p:sp>
-        <p:nvSpPr>
-          <p:cNvPr id="230" name="Text 228"/>
-          <p:cNvSpPr/>
-          <p:nvPr/>
-        </p:nvSpPr>
-        <p:spPr>
-          <a:xfrm>
-            <a:off x="6805879" y="2973106"/>
-            <a:ext cx="658368" cy="403642"/>
-          </a:xfrm>
-          <a:prstGeom prst="rect">
-            <a:avLst/>
-          </a:prstGeom>
-          <a:noFill/>
-          <a:ln/>
-        </p:spPr>
-        <p:txBody>
-          <a:bodyPr wrap="square" lIns="0" tIns="0" rIns="0" bIns="0" rtlCol="0" anchor="ctr">
-            <a:normAutofit/>
-          </a:bodyPr>
-          <a:lstStyle/>
-          <a:p>
-            <a:pPr rtl="1" algn="ctr" indent="0" marL="0">
-              <a:buNone/>
-            </a:pPr>
-            <a:r>
-              <a:rPr lang="ar-SA" altLang="en-US" sz="850" b="1" dirty="0">
-                <a:solidFill>
-                  <a:srgbClr val="222222"/>
-                </a:solidFill>
-                <a:latin typeface="Arial" pitchFamily="34" charset="0"/>
-                <a:ea typeface="Arial" pitchFamily="34" charset="-122"/>
-                <a:cs typeface="Arial" pitchFamily="34" charset="-120"/>
-              </a:rPr>
-              <a:t>20 أكتوبر</a:t>
-            </a:r>
-            <a:endParaRPr lang="ar-SA" sz="850" dirty="0"/>
-          </a:p>
-        </p:txBody>
-      </p:sp>
-      <p:sp>
-        <p:nvSpPr>
-          <p:cNvPr id="231" name="Text 229"/>
-          <p:cNvSpPr/>
-          <p:nvPr/>
-        </p:nvSpPr>
-        <p:spPr>
-          <a:xfrm>
-            <a:off x="6147511" y="2973106"/>
-            <a:ext cx="658368" cy="403642"/>
-          </a:xfrm>
-          <a:prstGeom prst="rect">
-            <a:avLst/>
-          </a:prstGeom>
-          <a:noFill/>
-          <a:ln/>
-        </p:spPr>
-        <p:txBody>
-          <a:bodyPr wrap="square" lIns="0" tIns="0" rIns="0" bIns="0" rtlCol="0" anchor="ctr">
-            <a:normAutofit/>
-          </a:bodyPr>
-          <a:lstStyle/>
-          <a:p>
-            <a:pPr rtl="1" algn="ctr" indent="0" marL="0">
-              <a:buNone/>
-            </a:pPr>
-            <a:r>
-              <a:rPr lang="ar-SA" altLang="en-US" sz="850" b="1" dirty="0">
-                <a:solidFill>
-                  <a:srgbClr val="222222"/>
-                </a:solidFill>
-                <a:latin typeface="Arial" pitchFamily="34" charset="0"/>
-                <a:ea typeface="Arial" pitchFamily="34" charset="-122"/>
-                <a:cs typeface="Arial" pitchFamily="34" charset="-120"/>
-              </a:rPr>
-              <a:t>21 أكتوبر</a:t>
-            </a:r>
-            <a:endParaRPr lang="ar-SA" sz="850" dirty="0"/>
-          </a:p>
-        </p:txBody>
-      </p:sp>
-      <p:sp>
-        <p:nvSpPr>
-          <p:cNvPr id="232" name="Shape 230"/>
-          <p:cNvSpPr/>
-          <p:nvPr/>
-        </p:nvSpPr>
-        <p:spPr>
-          <a:xfrm>
-            <a:off x="4702073" y="3063926"/>
-            <a:ext cx="240906" cy="222003"/>
+          <p:cNvPr id="245" name="Shape 243"/>
+          <p:cNvSpPr/>
+          <p:nvPr/>
+        </p:nvSpPr>
+        <p:spPr>
+          <a:xfrm>
+            <a:off x="11441887" y="3341751"/>
+            <a:ext cx="329184" cy="155448"/>
           </a:xfrm>
           <a:prstGeom prst="roundRect">
             <a:avLst>
-              <a:gd name="adj" fmla="val 20594"/>
+              <a:gd name="adj" fmla="val 50000"/>
             </a:avLst>
           </a:prstGeom>
           <a:solidFill>
-            <a:srgbClr val="00778B"/>
-          </a:solidFill>
-          <a:ln w="6350">
-            <a:solidFill>
-              <a:srgbClr val="00778B"/>
+            <a:srgbClr val="D9695A"/>
+          </a:solidFill>
+          <a:ln w="19050">
+            <a:solidFill>
+              <a:srgbClr val="222222"/>
+            </a:solidFill>
+            <a:prstDash val="solid"/>
+          </a:ln>
+        </p:spPr>
+      </p:sp>
+      <p:sp>
+        <p:nvSpPr>
+          <p:cNvPr id="246" name="Text 244"/>
+          <p:cNvSpPr/>
+          <p:nvPr/>
+        </p:nvSpPr>
+        <p:spPr>
+          <a:xfrm>
+            <a:off x="11414455" y="3311652"/>
+            <a:ext cx="384048" cy="215646"/>
+          </a:xfrm>
+          <a:prstGeom prst="rect">
+            <a:avLst/>
+          </a:prstGeom>
+          <a:noFill/>
+          <a:ln/>
+        </p:spPr>
+        <p:txBody>
+          <a:bodyPr wrap="square" lIns="0" tIns="0" rIns="0" bIns="0" rtlCol="0" anchor="ctr">
+            <a:normAutofit/>
+          </a:bodyPr>
+          <a:lstStyle/>
+          <a:p>
+            <a:pPr rtl="1" algn="ctr" indent="0" marL="0">
+              <a:buNone/>
+            </a:pPr>
+            <a:r>
+              <a:rPr lang="ar-SA" altLang="en-US" sz="650" b="1" dirty="0">
+                <a:solidFill>
+                  <a:srgbClr val="FFFFFF"/>
+                </a:solidFill>
+                <a:latin typeface="Arial" pitchFamily="34" charset="0"/>
+                <a:ea typeface="Arial" pitchFamily="34" charset="-122"/>
+                <a:cs typeface="Arial" pitchFamily="34" charset="-120"/>
+              </a:rPr>
+              <a:t>A.2</a:t>
+            </a:r>
+            <a:endParaRPr lang="ar-SA" sz="650" dirty="0"/>
+          </a:p>
+        </p:txBody>
+      </p:sp>
+      <p:sp>
+        <p:nvSpPr>
+          <p:cNvPr id="247" name="Text 245"/>
+          <p:cNvSpPr/>
+          <p:nvPr/>
+        </p:nvSpPr>
+        <p:spPr>
+          <a:xfrm>
+            <a:off x="8762695" y="3311652"/>
+            <a:ext cx="2441448" cy="215646"/>
+          </a:xfrm>
+          <a:prstGeom prst="rect">
+            <a:avLst/>
+          </a:prstGeom>
+          <a:noFill/>
+          <a:ln/>
+        </p:spPr>
+        <p:txBody>
+          <a:bodyPr wrap="square" lIns="0" tIns="0" rIns="0" bIns="0" rtlCol="0" anchor="ctr">
+            <a:normAutofit/>
+          </a:bodyPr>
+          <a:lstStyle/>
+          <a:p>
+            <a:pPr rtl="1" algn="r" indent="0" marL="0">
+              <a:buNone/>
+            </a:pPr>
+            <a:r>
+              <a:rPr lang="ar-SA" altLang="en-US" sz="700" dirty="0">
+                <a:solidFill>
+                  <a:srgbClr val="222222"/>
+                </a:solidFill>
+                <a:latin typeface="Arial" pitchFamily="34" charset="0"/>
+                <a:ea typeface="Arial" pitchFamily="34" charset="-122"/>
+                <a:cs typeface="Arial" pitchFamily="34" charset="-120"/>
+              </a:rPr>
+              <a:t>تركيب أعمدة H-Beam</a:t>
+            </a:r>
+            <a:endParaRPr lang="ar-SA" sz="700" dirty="0"/>
+          </a:p>
+        </p:txBody>
+      </p:sp>
+      <p:sp>
+        <p:nvSpPr>
+          <p:cNvPr id="248" name="Text 246"/>
+          <p:cNvSpPr/>
+          <p:nvPr/>
+        </p:nvSpPr>
+        <p:spPr>
+          <a:xfrm>
+            <a:off x="7967167" y="3311652"/>
+            <a:ext cx="777240" cy="215646"/>
+          </a:xfrm>
+          <a:prstGeom prst="rect">
+            <a:avLst/>
+          </a:prstGeom>
+          <a:noFill/>
+          <a:ln/>
+        </p:spPr>
+        <p:txBody>
+          <a:bodyPr wrap="square" lIns="0" tIns="0" rIns="0" bIns="0" rtlCol="0" anchor="ctr">
+            <a:normAutofit/>
+          </a:bodyPr>
+          <a:lstStyle/>
+          <a:p>
+            <a:pPr rtl="1" algn="ctr" indent="0" marL="0">
+              <a:buNone/>
+            </a:pPr>
+            <a:r>
+              <a:rPr lang="ar-SA" altLang="en-US" sz="700" dirty="0">
+                <a:solidFill>
+                  <a:srgbClr val="444444"/>
+                </a:solidFill>
+                <a:latin typeface="Arial" pitchFamily="34" charset="0"/>
+                <a:ea typeface="Arial" pitchFamily="34" charset="-122"/>
+                <a:cs typeface="Arial" pitchFamily="34" charset="-120"/>
+              </a:rPr>
+              <a:t>A1 · SS +1</a:t>
+            </a:r>
+            <a:endParaRPr lang="ar-SA" sz="700" dirty="0"/>
+          </a:p>
+        </p:txBody>
+      </p:sp>
+      <p:sp>
+        <p:nvSpPr>
+          <p:cNvPr id="249" name="Text 247"/>
+          <p:cNvSpPr/>
+          <p:nvPr/>
+        </p:nvSpPr>
+        <p:spPr>
+          <a:xfrm>
+            <a:off x="7464247" y="3311652"/>
+            <a:ext cx="502920" cy="215646"/>
+          </a:xfrm>
+          <a:prstGeom prst="rect">
+            <a:avLst/>
+          </a:prstGeom>
+          <a:noFill/>
+          <a:ln/>
+        </p:spPr>
+        <p:txBody>
+          <a:bodyPr wrap="square" lIns="0" tIns="0" rIns="0" bIns="0" rtlCol="0" anchor="ctr">
+            <a:normAutofit/>
+          </a:bodyPr>
+          <a:lstStyle/>
+          <a:p>
+            <a:pPr rtl="1" algn="ctr" indent="0" marL="0">
+              <a:buNone/>
+            </a:pPr>
+            <a:r>
+              <a:rPr lang="ar-SA" altLang="en-US" sz="900" b="1" dirty="0">
+                <a:solidFill>
+                  <a:srgbClr val="222222"/>
+                </a:solidFill>
+                <a:latin typeface="Arial" pitchFamily="34" charset="0"/>
+                <a:ea typeface="Arial" pitchFamily="34" charset="-122"/>
+                <a:cs typeface="Arial" pitchFamily="34" charset="-120"/>
+              </a:rPr>
+              <a:t>3</a:t>
+            </a:r>
+            <a:endParaRPr lang="ar-SA" sz="900" dirty="0"/>
+          </a:p>
+        </p:txBody>
+      </p:sp>
+      <p:sp>
+        <p:nvSpPr>
+          <p:cNvPr id="250" name="Text 248"/>
+          <p:cNvSpPr/>
+          <p:nvPr/>
+        </p:nvSpPr>
+        <p:spPr>
+          <a:xfrm>
+            <a:off x="6805879" y="3311652"/>
+            <a:ext cx="658368" cy="215646"/>
+          </a:xfrm>
+          <a:prstGeom prst="rect">
+            <a:avLst/>
+          </a:prstGeom>
+          <a:noFill/>
+          <a:ln/>
+        </p:spPr>
+        <p:txBody>
+          <a:bodyPr wrap="square" lIns="0" tIns="0" rIns="0" bIns="0" rtlCol="0" anchor="ctr">
+            <a:normAutofit/>
+          </a:bodyPr>
+          <a:lstStyle/>
+          <a:p>
+            <a:pPr rtl="1" algn="ctr" indent="0" marL="0">
+              <a:buNone/>
+            </a:pPr>
+            <a:r>
+              <a:rPr lang="ar-SA" altLang="en-US" sz="700" b="1" dirty="0">
+                <a:solidFill>
+                  <a:srgbClr val="222222"/>
+                </a:solidFill>
+                <a:latin typeface="Arial" pitchFamily="34" charset="0"/>
+                <a:ea typeface="Arial" pitchFamily="34" charset="-122"/>
+                <a:cs typeface="Arial" pitchFamily="34" charset="-120"/>
+              </a:rPr>
+              <a:t>14 أكتوبر</a:t>
+            </a:r>
+            <a:endParaRPr lang="ar-SA" sz="700" dirty="0"/>
+          </a:p>
+        </p:txBody>
+      </p:sp>
+      <p:sp>
+        <p:nvSpPr>
+          <p:cNvPr id="251" name="Text 249"/>
+          <p:cNvSpPr/>
+          <p:nvPr/>
+        </p:nvSpPr>
+        <p:spPr>
+          <a:xfrm>
+            <a:off x="6147511" y="3311652"/>
+            <a:ext cx="658368" cy="215646"/>
+          </a:xfrm>
+          <a:prstGeom prst="rect">
+            <a:avLst/>
+          </a:prstGeom>
+          <a:noFill/>
+          <a:ln/>
+        </p:spPr>
+        <p:txBody>
+          <a:bodyPr wrap="square" lIns="0" tIns="0" rIns="0" bIns="0" rtlCol="0" anchor="ctr">
+            <a:normAutofit/>
+          </a:bodyPr>
+          <a:lstStyle/>
+          <a:p>
+            <a:pPr rtl="1" algn="ctr" indent="0" marL="0">
+              <a:buNone/>
+            </a:pPr>
+            <a:r>
+              <a:rPr lang="ar-SA" altLang="en-US" sz="700" b="1" dirty="0">
+                <a:solidFill>
+                  <a:srgbClr val="222222"/>
+                </a:solidFill>
+                <a:latin typeface="Arial" pitchFamily="34" charset="0"/>
+                <a:ea typeface="Arial" pitchFamily="34" charset="-122"/>
+                <a:cs typeface="Arial" pitchFamily="34" charset="-120"/>
+              </a:rPr>
+              <a:t>17 أكتوبر</a:t>
+            </a:r>
+            <a:endParaRPr lang="ar-SA" sz="700" dirty="0"/>
+          </a:p>
+        </p:txBody>
+      </p:sp>
+      <p:sp>
+        <p:nvSpPr>
+          <p:cNvPr id="252" name="Shape 250"/>
+          <p:cNvSpPr/>
+          <p:nvPr/>
+        </p:nvSpPr>
+        <p:spPr>
+          <a:xfrm>
+            <a:off x="5183886" y="3356938"/>
+            <a:ext cx="481813" cy="125075"/>
+          </a:xfrm>
+          <a:prstGeom prst="roundRect">
+            <a:avLst>
+              <a:gd name="adj" fmla="val 29243"/>
+            </a:avLst>
+          </a:prstGeom>
+          <a:solidFill>
+            <a:srgbClr val="D9695A"/>
+          </a:solidFill>
+          <a:ln w="19050">
+            <a:solidFill>
+              <a:srgbClr val="222222"/>
             </a:solidFill>
             <a:prstDash val="solid"/>
           </a:ln>
@@ -14780,20 +15480,61 @@
       </p:sp>
       <p:sp>
         <p:nvSpPr>
-          <p:cNvPr id="233" name="Shape 231"/>
-          <p:cNvSpPr/>
-          <p:nvPr/>
-        </p:nvSpPr>
-        <p:spPr>
-          <a:xfrm>
-            <a:off x="365760" y="3376749"/>
-            <a:ext cx="11460175" cy="403642"/>
-          </a:xfrm>
-          <a:prstGeom prst="rect">
-            <a:avLst/>
-          </a:prstGeom>
-          <a:solidFill>
-            <a:srgbClr val="FFFFFF"/>
+          <p:cNvPr id="253" name="Text 251"/>
+          <p:cNvSpPr/>
+          <p:nvPr/>
+        </p:nvSpPr>
+        <p:spPr>
+          <a:xfrm>
+            <a:off x="5183886" y="3356938"/>
+            <a:ext cx="481813" cy="125075"/>
+          </a:xfrm>
+          <a:prstGeom prst="rect">
+            <a:avLst/>
+          </a:prstGeom>
+          <a:noFill/>
+          <a:ln/>
+        </p:spPr>
+        <p:txBody>
+          <a:bodyPr wrap="square" lIns="0" tIns="0" rIns="0" bIns="0" rtlCol="0" anchor="ctr">
+            <a:normAutofit/>
+          </a:bodyPr>
+          <a:lstStyle/>
+          <a:p>
+            <a:pPr rtl="1" algn="ctr" indent="0" marL="0">
+              <a:buNone/>
+            </a:pPr>
+            <a:r>
+              <a:rPr lang="ar-SA" altLang="en-US" sz="700" b="1" dirty="0">
+                <a:solidFill>
+                  <a:srgbClr val="FFFFFF"/>
+                </a:solidFill>
+                <a:latin typeface="Arial" pitchFamily="34" charset="0"/>
+                <a:ea typeface="Arial" pitchFamily="34" charset="-122"/>
+                <a:cs typeface="Arial" pitchFamily="34" charset="-120"/>
+              </a:rPr>
+              <a:t>3 يوم</a:t>
+            </a:r>
+            <a:endParaRPr lang="ar-SA" sz="700" dirty="0"/>
+          </a:p>
+        </p:txBody>
+      </p:sp>
+      <p:sp>
+        <p:nvSpPr>
+          <p:cNvPr id="254" name="Shape 252"/>
+          <p:cNvSpPr/>
+          <p:nvPr/>
+        </p:nvSpPr>
+        <p:spPr>
+          <a:xfrm>
+            <a:off x="365760" y="3527298"/>
+            <a:ext cx="11460175" cy="215646"/>
+          </a:xfrm>
+          <a:prstGeom prst="rect">
+            <a:avLst/>
+          </a:prstGeom>
+          <a:solidFill>
+            <a:srgbClr val="F6F9FA"/>
           </a:solidFill>
           <a:ln w="6350">
             <a:solidFill>
@@ -14805,295 +15546,297 @@
       </p:sp>
       <p:sp>
         <p:nvSpPr>
-          <p:cNvPr id="234" name="Shape 232"/>
-          <p:cNvSpPr/>
-          <p:nvPr/>
-        </p:nvSpPr>
-        <p:spPr>
-          <a:xfrm>
-            <a:off x="11496751" y="3441410"/>
-            <a:ext cx="274320" cy="274320"/>
-          </a:xfrm>
-          <a:prstGeom prst="ellipse">
-            <a:avLst/>
-          </a:prstGeom>
-          <a:solidFill>
-            <a:srgbClr val="00778B"/>
-          </a:solidFill>
-          <a:ln w="25400">
-            <a:solidFill>
-              <a:srgbClr val="222222"/>
-            </a:solidFill>
-            <a:prstDash val="solid"/>
-          </a:ln>
-        </p:spPr>
-      </p:sp>
-      <p:sp>
-        <p:nvSpPr>
-          <p:cNvPr id="235" name="Text 233"/>
-          <p:cNvSpPr/>
-          <p:nvPr/>
-        </p:nvSpPr>
-        <p:spPr>
-          <a:xfrm>
-            <a:off x="11441887" y="3376749"/>
-            <a:ext cx="384048" cy="403642"/>
-          </a:xfrm>
-          <a:prstGeom prst="rect">
-            <a:avLst/>
-          </a:prstGeom>
-          <a:noFill/>
-          <a:ln/>
-        </p:spPr>
-        <p:txBody>
-          <a:bodyPr wrap="square" lIns="0" tIns="0" rIns="0" bIns="0" rtlCol="0" anchor="ctr">
-            <a:normAutofit/>
-          </a:bodyPr>
-          <a:lstStyle/>
-          <a:p>
-            <a:pPr rtl="1" algn="ctr" indent="0" marL="0">
-              <a:buNone/>
-            </a:pPr>
-            <a:r>
-              <a:rPr lang="ar-SA" altLang="en-US" sz="900" b="1" dirty="0">
-                <a:solidFill>
-                  <a:srgbClr val="FFFFFF"/>
-                </a:solidFill>
-                <a:latin typeface="Arial" pitchFamily="34" charset="0"/>
-                <a:ea typeface="Arial" pitchFamily="34" charset="-122"/>
-                <a:cs typeface="Arial" pitchFamily="34" charset="-120"/>
-              </a:rPr>
-              <a:t>C</a:t>
-            </a:r>
-            <a:endParaRPr lang="ar-SA" sz="900" dirty="0"/>
-          </a:p>
-        </p:txBody>
-      </p:sp>
-      <p:sp>
-        <p:nvSpPr>
-          <p:cNvPr id="236" name="Text 234"/>
-          <p:cNvSpPr/>
-          <p:nvPr/>
-        </p:nvSpPr>
-        <p:spPr>
-          <a:xfrm>
-            <a:off x="8762695" y="3376749"/>
-            <a:ext cx="2606040" cy="403642"/>
-          </a:xfrm>
-          <a:prstGeom prst="rect">
-            <a:avLst/>
-          </a:prstGeom>
-          <a:noFill/>
-          <a:ln/>
-        </p:spPr>
-        <p:txBody>
-          <a:bodyPr wrap="square" lIns="0" tIns="0" rIns="0" bIns="0" rtlCol="0" anchor="ctr">
-            <a:normAutofit/>
-          </a:bodyPr>
-          <a:lstStyle/>
-          <a:p>
-            <a:pPr rtl="1" algn="r" indent="0" marL="0">
-              <a:buNone/>
-            </a:pPr>
-            <a:r>
-              <a:rPr lang="ar-SA" altLang="en-US" sz="900" dirty="0">
-                <a:solidFill>
-                  <a:srgbClr val="222222"/>
-                </a:solidFill>
-                <a:latin typeface="Arial" pitchFamily="34" charset="0"/>
-                <a:ea typeface="Arial" pitchFamily="34" charset="-122"/>
-                <a:cs typeface="Arial" pitchFamily="34" charset="-120"/>
-              </a:rPr>
-              <a:t>خندق الحفرة – حديد التسليح والشدات والخرسانة</a:t>
-            </a:r>
-            <a:endParaRPr lang="ar-SA" sz="900" dirty="0"/>
-          </a:p>
-        </p:txBody>
-      </p:sp>
-      <p:sp>
-        <p:nvSpPr>
-          <p:cNvPr id="237" name="Text 235"/>
-          <p:cNvSpPr/>
-          <p:nvPr/>
-        </p:nvSpPr>
-        <p:spPr>
-          <a:xfrm>
-            <a:off x="7967167" y="3376749"/>
-            <a:ext cx="777240" cy="403642"/>
-          </a:xfrm>
-          <a:prstGeom prst="rect">
-            <a:avLst/>
-          </a:prstGeom>
-          <a:noFill/>
-          <a:ln/>
-        </p:spPr>
-        <p:txBody>
-          <a:bodyPr wrap="square" lIns="0" tIns="0" rIns="0" bIns="0" rtlCol="0" anchor="ctr">
-            <a:normAutofit/>
-          </a:bodyPr>
-          <a:lstStyle/>
-          <a:p>
-            <a:pPr rtl="1" algn="ctr" indent="0" marL="0">
-              <a:buNone/>
-            </a:pPr>
-            <a:r>
-              <a:rPr lang="ar-SA" altLang="en-US" sz="850" dirty="0">
-                <a:solidFill>
-                  <a:srgbClr val="444444"/>
-                </a:solidFill>
-                <a:latin typeface="Arial" pitchFamily="34" charset="0"/>
-                <a:ea typeface="Arial" pitchFamily="34" charset="-122"/>
-                <a:cs typeface="Arial" pitchFamily="34" charset="-120"/>
-              </a:rPr>
-              <a:t>A · FS</a:t>
-            </a:r>
-            <a:endParaRPr lang="ar-SA" sz="850" dirty="0"/>
-          </a:p>
-        </p:txBody>
-      </p:sp>
-      <p:sp>
-        <p:nvSpPr>
-          <p:cNvPr id="238" name="Text 236"/>
-          <p:cNvSpPr/>
-          <p:nvPr/>
-        </p:nvSpPr>
-        <p:spPr>
-          <a:xfrm>
-            <a:off x="7464247" y="3376749"/>
-            <a:ext cx="502920" cy="403642"/>
-          </a:xfrm>
-          <a:prstGeom prst="rect">
-            <a:avLst/>
-          </a:prstGeom>
-          <a:noFill/>
-          <a:ln/>
-        </p:spPr>
-        <p:txBody>
-          <a:bodyPr wrap="square" lIns="0" tIns="0" rIns="0" bIns="0" rtlCol="0" anchor="ctr">
-            <a:normAutofit/>
-          </a:bodyPr>
-          <a:lstStyle/>
-          <a:p>
-            <a:pPr rtl="1" algn="ctr" indent="0" marL="0">
-              <a:buNone/>
-            </a:pPr>
-            <a:r>
-              <a:rPr lang="ar-SA" altLang="en-US" sz="1100" b="1" dirty="0">
-                <a:solidFill>
-                  <a:srgbClr val="222222"/>
-                </a:solidFill>
-                <a:latin typeface="Arial" pitchFamily="34" charset="0"/>
-                <a:ea typeface="Arial" pitchFamily="34" charset="-122"/>
-                <a:cs typeface="Arial" pitchFamily="34" charset="-120"/>
-              </a:rPr>
-              <a:t>4</a:t>
-            </a:r>
-            <a:endParaRPr lang="ar-SA" sz="1100" dirty="0"/>
-          </a:p>
-        </p:txBody>
-      </p:sp>
-      <p:sp>
-        <p:nvSpPr>
-          <p:cNvPr id="239" name="Text 237"/>
-          <p:cNvSpPr/>
-          <p:nvPr/>
-        </p:nvSpPr>
-        <p:spPr>
-          <a:xfrm>
-            <a:off x="6805879" y="3376749"/>
-            <a:ext cx="658368" cy="403642"/>
-          </a:xfrm>
-          <a:prstGeom prst="rect">
-            <a:avLst/>
-          </a:prstGeom>
-          <a:noFill/>
-          <a:ln/>
-        </p:spPr>
-        <p:txBody>
-          <a:bodyPr wrap="square" lIns="0" tIns="0" rIns="0" bIns="0" rtlCol="0" anchor="ctr">
-            <a:normAutofit/>
-          </a:bodyPr>
-          <a:lstStyle/>
-          <a:p>
-            <a:pPr rtl="1" algn="ctr" indent="0" marL="0">
-              <a:buNone/>
-            </a:pPr>
-            <a:r>
-              <a:rPr lang="ar-SA" altLang="en-US" sz="850" b="1" dirty="0">
-                <a:solidFill>
-                  <a:srgbClr val="222222"/>
-                </a:solidFill>
-                <a:latin typeface="Arial" pitchFamily="34" charset="0"/>
-                <a:ea typeface="Arial" pitchFamily="34" charset="-122"/>
-                <a:cs typeface="Arial" pitchFamily="34" charset="-120"/>
-              </a:rPr>
-              <a:t>20 أكتوبر</a:t>
-            </a:r>
-            <a:endParaRPr lang="ar-SA" sz="850" dirty="0"/>
-          </a:p>
-        </p:txBody>
-      </p:sp>
-      <p:sp>
-        <p:nvSpPr>
-          <p:cNvPr id="240" name="Text 238"/>
-          <p:cNvSpPr/>
-          <p:nvPr/>
-        </p:nvSpPr>
-        <p:spPr>
-          <a:xfrm>
-            <a:off x="6147511" y="3376749"/>
-            <a:ext cx="658368" cy="403642"/>
-          </a:xfrm>
-          <a:prstGeom prst="rect">
-            <a:avLst/>
-          </a:prstGeom>
-          <a:noFill/>
-          <a:ln/>
-        </p:spPr>
-        <p:txBody>
-          <a:bodyPr wrap="square" lIns="0" tIns="0" rIns="0" bIns="0" rtlCol="0" anchor="ctr">
-            <a:normAutofit/>
-          </a:bodyPr>
-          <a:lstStyle/>
-          <a:p>
-            <a:pPr rtl="1" algn="ctr" indent="0" marL="0">
-              <a:buNone/>
-            </a:pPr>
-            <a:r>
-              <a:rPr lang="ar-SA" altLang="en-US" sz="850" b="1" dirty="0">
-                <a:solidFill>
-                  <a:srgbClr val="222222"/>
-                </a:solidFill>
-                <a:latin typeface="Arial" pitchFamily="34" charset="0"/>
-                <a:ea typeface="Arial" pitchFamily="34" charset="-122"/>
-                <a:cs typeface="Arial" pitchFamily="34" charset="-120"/>
-              </a:rPr>
-              <a:t>24 أكتوبر</a:t>
-            </a:r>
-            <a:endParaRPr lang="ar-SA" sz="850" dirty="0"/>
-          </a:p>
-        </p:txBody>
-      </p:sp>
-      <p:sp>
-        <p:nvSpPr>
-          <p:cNvPr id="241" name="Shape 239"/>
-          <p:cNvSpPr/>
-          <p:nvPr/>
-        </p:nvSpPr>
-        <p:spPr>
-          <a:xfrm>
-            <a:off x="4340714" y="3467568"/>
-            <a:ext cx="602266" cy="222003"/>
+          <p:cNvPr id="255" name="Shape 253"/>
+          <p:cNvSpPr/>
+          <p:nvPr/>
+        </p:nvSpPr>
+        <p:spPr>
+          <a:xfrm>
+            <a:off x="11441887" y="3557397"/>
+            <a:ext cx="329184" cy="155448"/>
           </a:xfrm>
           <a:prstGeom prst="roundRect">
             <a:avLst>
-              <a:gd name="adj" fmla="val 20594"/>
+              <a:gd name="adj" fmla="val 50000"/>
             </a:avLst>
           </a:prstGeom>
           <a:solidFill>
-            <a:srgbClr val="00778B"/>
-          </a:solidFill>
-          <a:ln w="22225">
+            <a:srgbClr val="D9695A"/>
+          </a:solidFill>
+          <a:ln w="19050">
+            <a:solidFill>
+              <a:srgbClr val="222222"/>
+            </a:solidFill>
+            <a:prstDash val="solid"/>
+          </a:ln>
+        </p:spPr>
+      </p:sp>
+      <p:sp>
+        <p:nvSpPr>
+          <p:cNvPr id="256" name="Text 254"/>
+          <p:cNvSpPr/>
+          <p:nvPr/>
+        </p:nvSpPr>
+        <p:spPr>
+          <a:xfrm>
+            <a:off x="11414455" y="3527298"/>
+            <a:ext cx="384048" cy="215646"/>
+          </a:xfrm>
+          <a:prstGeom prst="rect">
+            <a:avLst/>
+          </a:prstGeom>
+          <a:noFill/>
+          <a:ln/>
+        </p:spPr>
+        <p:txBody>
+          <a:bodyPr wrap="square" lIns="0" tIns="0" rIns="0" bIns="0" rtlCol="0" anchor="ctr">
+            <a:normAutofit/>
+          </a:bodyPr>
+          <a:lstStyle/>
+          <a:p>
+            <a:pPr rtl="1" algn="ctr" indent="0" marL="0">
+              <a:buNone/>
+            </a:pPr>
+            <a:r>
+              <a:rPr lang="ar-SA" altLang="en-US" sz="650" b="1" dirty="0">
+                <a:solidFill>
+                  <a:srgbClr val="FFFFFF"/>
+                </a:solidFill>
+                <a:latin typeface="Arial" pitchFamily="34" charset="0"/>
+                <a:ea typeface="Arial" pitchFamily="34" charset="-122"/>
+                <a:cs typeface="Arial" pitchFamily="34" charset="-120"/>
+              </a:rPr>
+              <a:t>A.3</a:t>
+            </a:r>
+            <a:endParaRPr lang="ar-SA" sz="650" dirty="0"/>
+          </a:p>
+        </p:txBody>
+      </p:sp>
+      <p:sp>
+        <p:nvSpPr>
+          <p:cNvPr id="257" name="Text 255"/>
+          <p:cNvSpPr/>
+          <p:nvPr/>
+        </p:nvSpPr>
+        <p:spPr>
+          <a:xfrm>
+            <a:off x="8762695" y="3527298"/>
+            <a:ext cx="2441448" cy="215646"/>
+          </a:xfrm>
+          <a:prstGeom prst="rect">
+            <a:avLst/>
+          </a:prstGeom>
+          <a:noFill/>
+          <a:ln/>
+        </p:spPr>
+        <p:txBody>
+          <a:bodyPr wrap="square" lIns="0" tIns="0" rIns="0" bIns="0" rtlCol="0" anchor="ctr">
+            <a:normAutofit/>
+          </a:bodyPr>
+          <a:lstStyle/>
+          <a:p>
+            <a:pPr rtl="1" algn="r" indent="0" marL="0">
+              <a:buNone/>
+            </a:pPr>
+            <a:r>
+              <a:rPr lang="ar-SA" altLang="en-US" sz="700" dirty="0">
+                <a:solidFill>
+                  <a:srgbClr val="222222"/>
+                </a:solidFill>
+                <a:latin typeface="Arial" pitchFamily="34" charset="0"/>
+                <a:ea typeface="Arial" pitchFamily="34" charset="-122"/>
+                <a:cs typeface="Arial" pitchFamily="34" charset="-120"/>
+              </a:rPr>
+              <a:t>أعمال الخرسانة لأعمدة H-Beam</a:t>
+            </a:r>
+            <a:endParaRPr lang="ar-SA" sz="700" dirty="0"/>
+          </a:p>
+        </p:txBody>
+      </p:sp>
+      <p:sp>
+        <p:nvSpPr>
+          <p:cNvPr id="258" name="Text 256"/>
+          <p:cNvSpPr/>
+          <p:nvPr/>
+        </p:nvSpPr>
+        <p:spPr>
+          <a:xfrm>
+            <a:off x="7967167" y="3527298"/>
+            <a:ext cx="777240" cy="215646"/>
+          </a:xfrm>
+          <a:prstGeom prst="rect">
+            <a:avLst/>
+          </a:prstGeom>
+          <a:noFill/>
+          <a:ln/>
+        </p:spPr>
+        <p:txBody>
+          <a:bodyPr wrap="square" lIns="0" tIns="0" rIns="0" bIns="0" rtlCol="0" anchor="ctr">
+            <a:normAutofit/>
+          </a:bodyPr>
+          <a:lstStyle/>
+          <a:p>
+            <a:pPr rtl="1" algn="ctr" indent="0" marL="0">
+              <a:buNone/>
+            </a:pPr>
+            <a:r>
+              <a:rPr lang="ar-SA" altLang="en-US" sz="700" dirty="0">
+                <a:solidFill>
+                  <a:srgbClr val="444444"/>
+                </a:solidFill>
+                <a:latin typeface="Arial" pitchFamily="34" charset="0"/>
+                <a:ea typeface="Arial" pitchFamily="34" charset="-122"/>
+                <a:cs typeface="Arial" pitchFamily="34" charset="-120"/>
+              </a:rPr>
+              <a:t>A2 · SS +1</a:t>
+            </a:r>
+            <a:endParaRPr lang="ar-SA" sz="700" dirty="0"/>
+          </a:p>
+        </p:txBody>
+      </p:sp>
+      <p:sp>
+        <p:nvSpPr>
+          <p:cNvPr id="259" name="Text 257"/>
+          <p:cNvSpPr/>
+          <p:nvPr/>
+        </p:nvSpPr>
+        <p:spPr>
+          <a:xfrm>
+            <a:off x="7464247" y="3527298"/>
+            <a:ext cx="502920" cy="215646"/>
+          </a:xfrm>
+          <a:prstGeom prst="rect">
+            <a:avLst/>
+          </a:prstGeom>
+          <a:noFill/>
+          <a:ln/>
+        </p:spPr>
+        <p:txBody>
+          <a:bodyPr wrap="square" lIns="0" tIns="0" rIns="0" bIns="0" rtlCol="0" anchor="ctr">
+            <a:normAutofit/>
+          </a:bodyPr>
+          <a:lstStyle/>
+          <a:p>
+            <a:pPr rtl="1" algn="ctr" indent="0" marL="0">
+              <a:buNone/>
+            </a:pPr>
+            <a:r>
+              <a:rPr lang="ar-SA" altLang="en-US" sz="900" b="1" dirty="0">
+                <a:solidFill>
+                  <a:srgbClr val="222222"/>
+                </a:solidFill>
+                <a:latin typeface="Arial" pitchFamily="34" charset="0"/>
+                <a:ea typeface="Arial" pitchFamily="34" charset="-122"/>
+                <a:cs typeface="Arial" pitchFamily="34" charset="-120"/>
+              </a:rPr>
+              <a:t>3</a:t>
+            </a:r>
+            <a:endParaRPr lang="ar-SA" sz="900" dirty="0"/>
+          </a:p>
+        </p:txBody>
+      </p:sp>
+      <p:sp>
+        <p:nvSpPr>
+          <p:cNvPr id="260" name="Text 258"/>
+          <p:cNvSpPr/>
+          <p:nvPr/>
+        </p:nvSpPr>
+        <p:spPr>
+          <a:xfrm>
+            <a:off x="6805879" y="3527298"/>
+            <a:ext cx="658368" cy="215646"/>
+          </a:xfrm>
+          <a:prstGeom prst="rect">
+            <a:avLst/>
+          </a:prstGeom>
+          <a:noFill/>
+          <a:ln/>
+        </p:spPr>
+        <p:txBody>
+          <a:bodyPr wrap="square" lIns="0" tIns="0" rIns="0" bIns="0" rtlCol="0" anchor="ctr">
+            <a:normAutofit/>
+          </a:bodyPr>
+          <a:lstStyle/>
+          <a:p>
+            <a:pPr rtl="1" algn="ctr" indent="0" marL="0">
+              <a:buNone/>
+            </a:pPr>
+            <a:r>
+              <a:rPr lang="ar-SA" altLang="en-US" sz="700" b="1" dirty="0">
+                <a:solidFill>
+                  <a:srgbClr val="222222"/>
+                </a:solidFill>
+                <a:latin typeface="Arial" pitchFamily="34" charset="0"/>
+                <a:ea typeface="Arial" pitchFamily="34" charset="-122"/>
+                <a:cs typeface="Arial" pitchFamily="34" charset="-120"/>
+              </a:rPr>
+              <a:t>15 أكتوبر</a:t>
+            </a:r>
+            <a:endParaRPr lang="ar-SA" sz="700" dirty="0"/>
+          </a:p>
+        </p:txBody>
+      </p:sp>
+      <p:sp>
+        <p:nvSpPr>
+          <p:cNvPr id="261" name="Text 259"/>
+          <p:cNvSpPr/>
+          <p:nvPr/>
+        </p:nvSpPr>
+        <p:spPr>
+          <a:xfrm>
+            <a:off x="6147511" y="3527298"/>
+            <a:ext cx="658368" cy="215646"/>
+          </a:xfrm>
+          <a:prstGeom prst="rect">
+            <a:avLst/>
+          </a:prstGeom>
+          <a:noFill/>
+          <a:ln/>
+        </p:spPr>
+        <p:txBody>
+          <a:bodyPr wrap="square" lIns="0" tIns="0" rIns="0" bIns="0" rtlCol="0" anchor="ctr">
+            <a:normAutofit/>
+          </a:bodyPr>
+          <a:lstStyle/>
+          <a:p>
+            <a:pPr rtl="1" algn="ctr" indent="0" marL="0">
+              <a:buNone/>
+            </a:pPr>
+            <a:r>
+              <a:rPr lang="ar-SA" altLang="en-US" sz="700" b="1" dirty="0">
+                <a:solidFill>
+                  <a:srgbClr val="222222"/>
+                </a:solidFill>
+                <a:latin typeface="Arial" pitchFamily="34" charset="0"/>
+                <a:ea typeface="Arial" pitchFamily="34" charset="-122"/>
+                <a:cs typeface="Arial" pitchFamily="34" charset="-120"/>
+              </a:rPr>
+              <a:t>18 أكتوبر</a:t>
+            </a:r>
+            <a:endParaRPr lang="ar-SA" sz="700" dirty="0"/>
+          </a:p>
+        </p:txBody>
+      </p:sp>
+      <p:sp>
+        <p:nvSpPr>
+          <p:cNvPr id="262" name="Shape 260"/>
+          <p:cNvSpPr/>
+          <p:nvPr/>
+        </p:nvSpPr>
+        <p:spPr>
+          <a:xfrm>
+            <a:off x="5063433" y="3572584"/>
+            <a:ext cx="481813" cy="125075"/>
+          </a:xfrm>
+          <a:prstGeom prst="roundRect">
+            <a:avLst>
+              <a:gd name="adj" fmla="val 29243"/>
+            </a:avLst>
+          </a:prstGeom>
+          <a:solidFill>
+            <a:srgbClr val="D9695A"/>
+          </a:solidFill>
+          <a:ln w="19050">
             <a:solidFill>
               <a:srgbClr val="222222"/>
             </a:solidFill>
@@ -15110,14 +15853,14 @@
       </p:sp>
       <p:sp>
         <p:nvSpPr>
-          <p:cNvPr id="242" name="Text 240"/>
-          <p:cNvSpPr/>
-          <p:nvPr/>
-        </p:nvSpPr>
-        <p:spPr>
-          <a:xfrm>
-            <a:off x="4340714" y="3467568"/>
-            <a:ext cx="602266" cy="222003"/>
+          <p:cNvPr id="263" name="Text 261"/>
+          <p:cNvSpPr/>
+          <p:nvPr/>
+        </p:nvSpPr>
+        <p:spPr>
+          <a:xfrm>
+            <a:off x="5063433" y="3572584"/>
+            <a:ext cx="481813" cy="125075"/>
           </a:xfrm>
           <a:prstGeom prst="rect">
             <a:avLst/>
@@ -15135,7 +15878,7 @@
               <a:buNone/>
             </a:pPr>
             <a:r>
-              <a:rPr lang="ar-SA" altLang="en-US" sz="800" b="1" dirty="0">
+              <a:rPr lang="ar-SA" altLang="en-US" sz="700" b="1" dirty="0">
                 <a:solidFill>
                   <a:srgbClr val="FFFFFF"/>
                 </a:solidFill>
@@ -15143,28 +15886,28 @@
                 <a:ea typeface="Arial" pitchFamily="34" charset="-122"/>
                 <a:cs typeface="Arial" pitchFamily="34" charset="-120"/>
               </a:rPr>
-              <a:t>4 يوم</a:t>
-            </a:r>
-            <a:endParaRPr lang="ar-SA" sz="800" dirty="0"/>
-          </a:p>
-        </p:txBody>
-      </p:sp>
-      <p:sp>
-        <p:nvSpPr>
-          <p:cNvPr id="243" name="Shape 241"/>
-          <p:cNvSpPr/>
-          <p:nvPr/>
-        </p:nvSpPr>
-        <p:spPr>
-          <a:xfrm>
-            <a:off x="365760" y="3780391"/>
-            <a:ext cx="11460175" cy="403642"/>
-          </a:xfrm>
-          <a:prstGeom prst="rect">
-            <a:avLst/>
-          </a:prstGeom>
-          <a:solidFill>
-            <a:srgbClr val="F6F9FA"/>
+              <a:t>3 يوم</a:t>
+            </a:r>
+            <a:endParaRPr lang="ar-SA" sz="700" dirty="0"/>
+          </a:p>
+        </p:txBody>
+      </p:sp>
+      <p:sp>
+        <p:nvSpPr>
+          <p:cNvPr id="264" name="Shape 262"/>
+          <p:cNvSpPr/>
+          <p:nvPr/>
+        </p:nvSpPr>
+        <p:spPr>
+          <a:xfrm>
+            <a:off x="365760" y="3742944"/>
+            <a:ext cx="11460175" cy="215646"/>
+          </a:xfrm>
+          <a:prstGeom prst="rect">
+            <a:avLst/>
+          </a:prstGeom>
+          <a:solidFill>
+            <a:srgbClr val="FFFFFF"/>
           </a:solidFill>
           <a:ln w="6350">
             <a:solidFill>
@@ -15176,295 +15919,297 @@
       </p:sp>
       <p:sp>
         <p:nvSpPr>
-          <p:cNvPr id="244" name="Shape 242"/>
-          <p:cNvSpPr/>
-          <p:nvPr/>
-        </p:nvSpPr>
-        <p:spPr>
-          <a:xfrm>
-            <a:off x="11496751" y="3845052"/>
-            <a:ext cx="274320" cy="274320"/>
-          </a:xfrm>
-          <a:prstGeom prst="ellipse">
-            <a:avLst/>
-          </a:prstGeom>
-          <a:solidFill>
-            <a:srgbClr val="00778B"/>
-          </a:solidFill>
-          <a:ln w="25400">
-            <a:solidFill>
-              <a:srgbClr val="222222"/>
-            </a:solidFill>
-            <a:prstDash val="solid"/>
-          </a:ln>
-        </p:spPr>
-      </p:sp>
-      <p:sp>
-        <p:nvSpPr>
-          <p:cNvPr id="245" name="Text 243"/>
-          <p:cNvSpPr/>
-          <p:nvPr/>
-        </p:nvSpPr>
-        <p:spPr>
-          <a:xfrm>
-            <a:off x="11441887" y="3780391"/>
-            <a:ext cx="384048" cy="403642"/>
-          </a:xfrm>
-          <a:prstGeom prst="rect">
-            <a:avLst/>
-          </a:prstGeom>
-          <a:noFill/>
-          <a:ln/>
-        </p:spPr>
-        <p:txBody>
-          <a:bodyPr wrap="square" lIns="0" tIns="0" rIns="0" bIns="0" rtlCol="0" anchor="ctr">
-            <a:normAutofit/>
-          </a:bodyPr>
-          <a:lstStyle/>
-          <a:p>
-            <a:pPr rtl="1" algn="ctr" indent="0" marL="0">
-              <a:buNone/>
-            </a:pPr>
-            <a:r>
-              <a:rPr lang="ar-SA" altLang="en-US" sz="900" b="1" dirty="0">
-                <a:solidFill>
-                  <a:srgbClr val="FFFFFF"/>
-                </a:solidFill>
-                <a:latin typeface="Arial" pitchFamily="34" charset="0"/>
-                <a:ea typeface="Arial" pitchFamily="34" charset="-122"/>
-                <a:cs typeface="Arial" pitchFamily="34" charset="-120"/>
-              </a:rPr>
-              <a:t>D</a:t>
-            </a:r>
-            <a:endParaRPr lang="ar-SA" sz="900" dirty="0"/>
-          </a:p>
-        </p:txBody>
-      </p:sp>
-      <p:sp>
-        <p:nvSpPr>
-          <p:cNvPr id="246" name="Text 244"/>
-          <p:cNvSpPr/>
-          <p:nvPr/>
-        </p:nvSpPr>
-        <p:spPr>
-          <a:xfrm>
-            <a:off x="8762695" y="3780391"/>
-            <a:ext cx="2606040" cy="403642"/>
-          </a:xfrm>
-          <a:prstGeom prst="rect">
-            <a:avLst/>
-          </a:prstGeom>
-          <a:noFill/>
-          <a:ln/>
-        </p:spPr>
-        <p:txBody>
-          <a:bodyPr wrap="square" lIns="0" tIns="0" rIns="0" bIns="0" rtlCol="0" anchor="ctr">
-            <a:normAutofit/>
-          </a:bodyPr>
-          <a:lstStyle/>
-          <a:p>
-            <a:pPr rtl="1" algn="r" indent="0" marL="0">
-              <a:buNone/>
-            </a:pPr>
-            <a:r>
-              <a:rPr lang="ar-SA" altLang="en-US" sz="900" dirty="0">
-                <a:solidFill>
-                  <a:srgbClr val="222222"/>
-                </a:solidFill>
-                <a:latin typeface="Arial" pitchFamily="34" charset="0"/>
-                <a:ea typeface="Arial" pitchFamily="34" charset="-122"/>
-                <a:cs typeface="Arial" pitchFamily="34" charset="-120"/>
-              </a:rPr>
-              <a:t>بلاطة / لبشة الحفرة – حديد التسليح والشدات والخرسانة</a:t>
-            </a:r>
-            <a:endParaRPr lang="ar-SA" sz="900" dirty="0"/>
-          </a:p>
-        </p:txBody>
-      </p:sp>
-      <p:sp>
-        <p:nvSpPr>
-          <p:cNvPr id="247" name="Text 245"/>
-          <p:cNvSpPr/>
-          <p:nvPr/>
-        </p:nvSpPr>
-        <p:spPr>
-          <a:xfrm>
-            <a:off x="7967167" y="3780391"/>
-            <a:ext cx="777240" cy="403642"/>
-          </a:xfrm>
-          <a:prstGeom prst="rect">
-            <a:avLst/>
-          </a:prstGeom>
-          <a:noFill/>
-          <a:ln/>
-        </p:spPr>
-        <p:txBody>
-          <a:bodyPr wrap="square" lIns="0" tIns="0" rIns="0" bIns="0" rtlCol="0" anchor="ctr">
-            <a:normAutofit/>
-          </a:bodyPr>
-          <a:lstStyle/>
-          <a:p>
-            <a:pPr rtl="1" algn="ctr" indent="0" marL="0">
-              <a:buNone/>
-            </a:pPr>
-            <a:r>
-              <a:rPr lang="ar-SA" altLang="en-US" sz="850" dirty="0">
-                <a:solidFill>
-                  <a:srgbClr val="444444"/>
-                </a:solidFill>
-                <a:latin typeface="Arial" pitchFamily="34" charset="0"/>
-                <a:ea typeface="Arial" pitchFamily="34" charset="-122"/>
-                <a:cs typeface="Arial" pitchFamily="34" charset="-120"/>
-              </a:rPr>
-              <a:t>C · FS</a:t>
-            </a:r>
-            <a:endParaRPr lang="ar-SA" sz="850" dirty="0"/>
-          </a:p>
-        </p:txBody>
-      </p:sp>
-      <p:sp>
-        <p:nvSpPr>
-          <p:cNvPr id="248" name="Text 246"/>
-          <p:cNvSpPr/>
-          <p:nvPr/>
-        </p:nvSpPr>
-        <p:spPr>
-          <a:xfrm>
-            <a:off x="7464247" y="3780391"/>
-            <a:ext cx="502920" cy="403642"/>
-          </a:xfrm>
-          <a:prstGeom prst="rect">
-            <a:avLst/>
-          </a:prstGeom>
-          <a:noFill/>
-          <a:ln/>
-        </p:spPr>
-        <p:txBody>
-          <a:bodyPr wrap="square" lIns="0" tIns="0" rIns="0" bIns="0" rtlCol="0" anchor="ctr">
-            <a:normAutofit/>
-          </a:bodyPr>
-          <a:lstStyle/>
-          <a:p>
-            <a:pPr rtl="1" algn="ctr" indent="0" marL="0">
-              <a:buNone/>
-            </a:pPr>
-            <a:r>
-              <a:rPr lang="ar-SA" altLang="en-US" sz="1100" b="1" dirty="0">
-                <a:solidFill>
-                  <a:srgbClr val="222222"/>
-                </a:solidFill>
-                <a:latin typeface="Arial" pitchFamily="34" charset="0"/>
-                <a:ea typeface="Arial" pitchFamily="34" charset="-122"/>
-                <a:cs typeface="Arial" pitchFamily="34" charset="-120"/>
-              </a:rPr>
-              <a:t>10</a:t>
-            </a:r>
-            <a:endParaRPr lang="ar-SA" sz="1100" dirty="0"/>
-          </a:p>
-        </p:txBody>
-      </p:sp>
-      <p:sp>
-        <p:nvSpPr>
-          <p:cNvPr id="249" name="Text 247"/>
-          <p:cNvSpPr/>
-          <p:nvPr/>
-        </p:nvSpPr>
-        <p:spPr>
-          <a:xfrm>
-            <a:off x="6805879" y="3780391"/>
-            <a:ext cx="658368" cy="403642"/>
-          </a:xfrm>
-          <a:prstGeom prst="rect">
-            <a:avLst/>
-          </a:prstGeom>
-          <a:noFill/>
-          <a:ln/>
-        </p:spPr>
-        <p:txBody>
-          <a:bodyPr wrap="square" lIns="0" tIns="0" rIns="0" bIns="0" rtlCol="0" anchor="ctr">
-            <a:normAutofit/>
-          </a:bodyPr>
-          <a:lstStyle/>
-          <a:p>
-            <a:pPr rtl="1" algn="ctr" indent="0" marL="0">
-              <a:buNone/>
-            </a:pPr>
-            <a:r>
-              <a:rPr lang="ar-SA" altLang="en-US" sz="850" b="1" dirty="0">
-                <a:solidFill>
-                  <a:srgbClr val="222222"/>
-                </a:solidFill>
-                <a:latin typeface="Arial" pitchFamily="34" charset="0"/>
-                <a:ea typeface="Arial" pitchFamily="34" charset="-122"/>
-                <a:cs typeface="Arial" pitchFamily="34" charset="-120"/>
-              </a:rPr>
-              <a:t>25 أكتوبر</a:t>
-            </a:r>
-            <a:endParaRPr lang="ar-SA" sz="850" dirty="0"/>
-          </a:p>
-        </p:txBody>
-      </p:sp>
-      <p:sp>
-        <p:nvSpPr>
-          <p:cNvPr id="250" name="Text 248"/>
-          <p:cNvSpPr/>
-          <p:nvPr/>
-        </p:nvSpPr>
-        <p:spPr>
-          <a:xfrm>
-            <a:off x="6147511" y="3780391"/>
-            <a:ext cx="658368" cy="403642"/>
-          </a:xfrm>
-          <a:prstGeom prst="rect">
-            <a:avLst/>
-          </a:prstGeom>
-          <a:noFill/>
-          <a:ln/>
-        </p:spPr>
-        <p:txBody>
-          <a:bodyPr wrap="square" lIns="0" tIns="0" rIns="0" bIns="0" rtlCol="0" anchor="ctr">
-            <a:normAutofit/>
-          </a:bodyPr>
-          <a:lstStyle/>
-          <a:p>
-            <a:pPr rtl="1" algn="ctr" indent="0" marL="0">
-              <a:buNone/>
-            </a:pPr>
-            <a:r>
-              <a:rPr lang="ar-SA" altLang="en-US" sz="850" b="1" dirty="0">
-                <a:solidFill>
-                  <a:srgbClr val="222222"/>
-                </a:solidFill>
-                <a:latin typeface="Arial" pitchFamily="34" charset="0"/>
-                <a:ea typeface="Arial" pitchFamily="34" charset="-122"/>
-                <a:cs typeface="Arial" pitchFamily="34" charset="-120"/>
-              </a:rPr>
-              <a:t>4 نوفمبر</a:t>
-            </a:r>
-            <a:endParaRPr lang="ar-SA" sz="850" dirty="0"/>
-          </a:p>
-        </p:txBody>
-      </p:sp>
-      <p:sp>
-        <p:nvSpPr>
-          <p:cNvPr id="251" name="Shape 249"/>
-          <p:cNvSpPr/>
-          <p:nvPr/>
-        </p:nvSpPr>
-        <p:spPr>
-          <a:xfrm>
-            <a:off x="3015729" y="3871210"/>
-            <a:ext cx="1324985" cy="222003"/>
+          <p:cNvPr id="265" name="Shape 263"/>
+          <p:cNvSpPr/>
+          <p:nvPr/>
+        </p:nvSpPr>
+        <p:spPr>
+          <a:xfrm>
+            <a:off x="11441887" y="3773043"/>
+            <a:ext cx="329184" cy="155448"/>
           </a:xfrm>
           <a:prstGeom prst="roundRect">
             <a:avLst>
-              <a:gd name="adj" fmla="val 20594"/>
+              <a:gd name="adj" fmla="val 50000"/>
             </a:avLst>
           </a:prstGeom>
           <a:solidFill>
-            <a:srgbClr val="00778B"/>
-          </a:solidFill>
-          <a:ln w="22225">
+            <a:srgbClr val="D9695A"/>
+          </a:solidFill>
+          <a:ln w="19050">
+            <a:solidFill>
+              <a:srgbClr val="222222"/>
+            </a:solidFill>
+            <a:prstDash val="solid"/>
+          </a:ln>
+        </p:spPr>
+      </p:sp>
+      <p:sp>
+        <p:nvSpPr>
+          <p:cNvPr id="266" name="Text 264"/>
+          <p:cNvSpPr/>
+          <p:nvPr/>
+        </p:nvSpPr>
+        <p:spPr>
+          <a:xfrm>
+            <a:off x="11414455" y="3742944"/>
+            <a:ext cx="384048" cy="215646"/>
+          </a:xfrm>
+          <a:prstGeom prst="rect">
+            <a:avLst/>
+          </a:prstGeom>
+          <a:noFill/>
+          <a:ln/>
+        </p:spPr>
+        <p:txBody>
+          <a:bodyPr wrap="square" lIns="0" tIns="0" rIns="0" bIns="0" rtlCol="0" anchor="ctr">
+            <a:normAutofit/>
+          </a:bodyPr>
+          <a:lstStyle/>
+          <a:p>
+            <a:pPr rtl="1" algn="ctr" indent="0" marL="0">
+              <a:buNone/>
+            </a:pPr>
+            <a:r>
+              <a:rPr lang="ar-SA" altLang="en-US" sz="650" b="1" dirty="0">
+                <a:solidFill>
+                  <a:srgbClr val="FFFFFF"/>
+                </a:solidFill>
+                <a:latin typeface="Arial" pitchFamily="34" charset="0"/>
+                <a:ea typeface="Arial" pitchFamily="34" charset="-122"/>
+                <a:cs typeface="Arial" pitchFamily="34" charset="-120"/>
+              </a:rPr>
+              <a:t>A.4</a:t>
+            </a:r>
+            <a:endParaRPr lang="ar-SA" sz="650" dirty="0"/>
+          </a:p>
+        </p:txBody>
+      </p:sp>
+      <p:sp>
+        <p:nvSpPr>
+          <p:cNvPr id="267" name="Text 265"/>
+          <p:cNvSpPr/>
+          <p:nvPr/>
+        </p:nvSpPr>
+        <p:spPr>
+          <a:xfrm>
+            <a:off x="8762695" y="3742944"/>
+            <a:ext cx="2441448" cy="215646"/>
+          </a:xfrm>
+          <a:prstGeom prst="rect">
+            <a:avLst/>
+          </a:prstGeom>
+          <a:noFill/>
+          <a:ln/>
+        </p:spPr>
+        <p:txBody>
+          <a:bodyPr wrap="square" lIns="0" tIns="0" rIns="0" bIns="0" rtlCol="0" anchor="ctr">
+            <a:normAutofit/>
+          </a:bodyPr>
+          <a:lstStyle/>
+          <a:p>
+            <a:pPr rtl="1" algn="r" indent="0" marL="0">
+              <a:buNone/>
+            </a:pPr>
+            <a:r>
+              <a:rPr lang="ar-SA" altLang="en-US" sz="700" dirty="0">
+                <a:solidFill>
+                  <a:srgbClr val="222222"/>
+                </a:solidFill>
+                <a:latin typeface="Arial" pitchFamily="34" charset="0"/>
+                <a:ea typeface="Arial" pitchFamily="34" charset="-122"/>
+                <a:cs typeface="Arial" pitchFamily="34" charset="-120"/>
+              </a:rPr>
+              <a:t>التدعيم (Bracing) لنظام الدعم</a:t>
+            </a:r>
+            <a:endParaRPr lang="ar-SA" sz="700" dirty="0"/>
+          </a:p>
+        </p:txBody>
+      </p:sp>
+      <p:sp>
+        <p:nvSpPr>
+          <p:cNvPr id="268" name="Text 266"/>
+          <p:cNvSpPr/>
+          <p:nvPr/>
+        </p:nvSpPr>
+        <p:spPr>
+          <a:xfrm>
+            <a:off x="7967167" y="3742944"/>
+            <a:ext cx="777240" cy="215646"/>
+          </a:xfrm>
+          <a:prstGeom prst="rect">
+            <a:avLst/>
+          </a:prstGeom>
+          <a:noFill/>
+          <a:ln/>
+        </p:spPr>
+        <p:txBody>
+          <a:bodyPr wrap="square" lIns="0" tIns="0" rIns="0" bIns="0" rtlCol="0" anchor="ctr">
+            <a:normAutofit/>
+          </a:bodyPr>
+          <a:lstStyle/>
+          <a:p>
+            <a:pPr rtl="1" algn="ctr" indent="0" marL="0">
+              <a:buNone/>
+            </a:pPr>
+            <a:r>
+              <a:rPr lang="ar-SA" altLang="en-US" sz="700" dirty="0">
+                <a:solidFill>
+                  <a:srgbClr val="444444"/>
+                </a:solidFill>
+                <a:latin typeface="Arial" pitchFamily="34" charset="0"/>
+                <a:ea typeface="Arial" pitchFamily="34" charset="-122"/>
+                <a:cs typeface="Arial" pitchFamily="34" charset="-120"/>
+              </a:rPr>
+              <a:t>A3 · SS +1</a:t>
+            </a:r>
+            <a:endParaRPr lang="ar-SA" sz="700" dirty="0"/>
+          </a:p>
+        </p:txBody>
+      </p:sp>
+      <p:sp>
+        <p:nvSpPr>
+          <p:cNvPr id="269" name="Text 267"/>
+          <p:cNvSpPr/>
+          <p:nvPr/>
+        </p:nvSpPr>
+        <p:spPr>
+          <a:xfrm>
+            <a:off x="7464247" y="3742944"/>
+            <a:ext cx="502920" cy="215646"/>
+          </a:xfrm>
+          <a:prstGeom prst="rect">
+            <a:avLst/>
+          </a:prstGeom>
+          <a:noFill/>
+          <a:ln/>
+        </p:spPr>
+        <p:txBody>
+          <a:bodyPr wrap="square" lIns="0" tIns="0" rIns="0" bIns="0" rtlCol="0" anchor="ctr">
+            <a:normAutofit/>
+          </a:bodyPr>
+          <a:lstStyle/>
+          <a:p>
+            <a:pPr rtl="1" algn="ctr" indent="0" marL="0">
+              <a:buNone/>
+            </a:pPr>
+            <a:r>
+              <a:rPr lang="ar-SA" altLang="en-US" sz="900" b="1" dirty="0">
+                <a:solidFill>
+                  <a:srgbClr val="222222"/>
+                </a:solidFill>
+                <a:latin typeface="Arial" pitchFamily="34" charset="0"/>
+                <a:ea typeface="Arial" pitchFamily="34" charset="-122"/>
+                <a:cs typeface="Arial" pitchFamily="34" charset="-120"/>
+              </a:rPr>
+              <a:t>3</a:t>
+            </a:r>
+            <a:endParaRPr lang="ar-SA" sz="900" dirty="0"/>
+          </a:p>
+        </p:txBody>
+      </p:sp>
+      <p:sp>
+        <p:nvSpPr>
+          <p:cNvPr id="270" name="Text 268"/>
+          <p:cNvSpPr/>
+          <p:nvPr/>
+        </p:nvSpPr>
+        <p:spPr>
+          <a:xfrm>
+            <a:off x="6805879" y="3742944"/>
+            <a:ext cx="658368" cy="215646"/>
+          </a:xfrm>
+          <a:prstGeom prst="rect">
+            <a:avLst/>
+          </a:prstGeom>
+          <a:noFill/>
+          <a:ln/>
+        </p:spPr>
+        <p:txBody>
+          <a:bodyPr wrap="square" lIns="0" tIns="0" rIns="0" bIns="0" rtlCol="0" anchor="ctr">
+            <a:normAutofit/>
+          </a:bodyPr>
+          <a:lstStyle/>
+          <a:p>
+            <a:pPr rtl="1" algn="ctr" indent="0" marL="0">
+              <a:buNone/>
+            </a:pPr>
+            <a:r>
+              <a:rPr lang="ar-SA" altLang="en-US" sz="700" b="1" dirty="0">
+                <a:solidFill>
+                  <a:srgbClr val="222222"/>
+                </a:solidFill>
+                <a:latin typeface="Arial" pitchFamily="34" charset="0"/>
+                <a:ea typeface="Arial" pitchFamily="34" charset="-122"/>
+                <a:cs typeface="Arial" pitchFamily="34" charset="-120"/>
+              </a:rPr>
+              <a:t>17 أكتوبر</a:t>
+            </a:r>
+            <a:endParaRPr lang="ar-SA" sz="700" dirty="0"/>
+          </a:p>
+        </p:txBody>
+      </p:sp>
+      <p:sp>
+        <p:nvSpPr>
+          <p:cNvPr id="271" name="Text 269"/>
+          <p:cNvSpPr/>
+          <p:nvPr/>
+        </p:nvSpPr>
+        <p:spPr>
+          <a:xfrm>
+            <a:off x="6147511" y="3742944"/>
+            <a:ext cx="658368" cy="215646"/>
+          </a:xfrm>
+          <a:prstGeom prst="rect">
+            <a:avLst/>
+          </a:prstGeom>
+          <a:noFill/>
+          <a:ln/>
+        </p:spPr>
+        <p:txBody>
+          <a:bodyPr wrap="square" lIns="0" tIns="0" rIns="0" bIns="0" rtlCol="0" anchor="ctr">
+            <a:normAutofit/>
+          </a:bodyPr>
+          <a:lstStyle/>
+          <a:p>
+            <a:pPr rtl="1" algn="ctr" indent="0" marL="0">
+              <a:buNone/>
+            </a:pPr>
+            <a:r>
+              <a:rPr lang="ar-SA" altLang="en-US" sz="700" b="1" dirty="0">
+                <a:solidFill>
+                  <a:srgbClr val="222222"/>
+                </a:solidFill>
+                <a:latin typeface="Arial" pitchFamily="34" charset="0"/>
+                <a:ea typeface="Arial" pitchFamily="34" charset="-122"/>
+                <a:cs typeface="Arial" pitchFamily="34" charset="-120"/>
+              </a:rPr>
+              <a:t>19 أكتوبر</a:t>
+            </a:r>
+            <a:endParaRPr lang="ar-SA" sz="700" dirty="0"/>
+          </a:p>
+        </p:txBody>
+      </p:sp>
+      <p:sp>
+        <p:nvSpPr>
+          <p:cNvPr id="272" name="Shape 270"/>
+          <p:cNvSpPr/>
+          <p:nvPr/>
+        </p:nvSpPr>
+        <p:spPr>
+          <a:xfrm>
+            <a:off x="4942980" y="3788230"/>
+            <a:ext cx="361359" cy="125075"/>
+          </a:xfrm>
+          <a:prstGeom prst="roundRect">
+            <a:avLst>
+              <a:gd name="adj" fmla="val 29243"/>
+            </a:avLst>
+          </a:prstGeom>
+          <a:solidFill>
+            <a:srgbClr val="D9695A"/>
+          </a:solidFill>
+          <a:ln w="19050">
             <a:solidFill>
               <a:srgbClr val="222222"/>
             </a:solidFill>
@@ -15481,14 +16226,14 @@
       </p:sp>
       <p:sp>
         <p:nvSpPr>
-          <p:cNvPr id="252" name="Text 250"/>
-          <p:cNvSpPr/>
-          <p:nvPr/>
-        </p:nvSpPr>
-        <p:spPr>
-          <a:xfrm>
-            <a:off x="3015729" y="3871210"/>
-            <a:ext cx="1324985" cy="222003"/>
+          <p:cNvPr id="273" name="Text 271"/>
+          <p:cNvSpPr/>
+          <p:nvPr/>
+        </p:nvSpPr>
+        <p:spPr>
+          <a:xfrm>
+            <a:off x="4942980" y="3788230"/>
+            <a:ext cx="361359" cy="125075"/>
           </a:xfrm>
           <a:prstGeom prst="rect">
             <a:avLst/>
@@ -15506,7 +16251,7 @@
               <a:buNone/>
             </a:pPr>
             <a:r>
-              <a:rPr lang="ar-SA" altLang="en-US" sz="800" b="1" dirty="0">
+              <a:rPr lang="ar-SA" altLang="en-US" sz="700" b="1" dirty="0">
                 <a:solidFill>
                   <a:srgbClr val="FFFFFF"/>
                 </a:solidFill>
@@ -15514,28 +16259,28 @@
                 <a:ea typeface="Arial" pitchFamily="34" charset="-122"/>
                 <a:cs typeface="Arial" pitchFamily="34" charset="-120"/>
               </a:rPr>
-              <a:t>10 يوم</a:t>
-            </a:r>
-            <a:endParaRPr lang="ar-SA" sz="800" dirty="0"/>
-          </a:p>
-        </p:txBody>
-      </p:sp>
-      <p:sp>
-        <p:nvSpPr>
-          <p:cNvPr id="253" name="Shape 251"/>
-          <p:cNvSpPr/>
-          <p:nvPr/>
-        </p:nvSpPr>
-        <p:spPr>
-          <a:xfrm>
-            <a:off x="365760" y="4184033"/>
-            <a:ext cx="11460175" cy="403642"/>
-          </a:xfrm>
-          <a:prstGeom prst="rect">
-            <a:avLst/>
-          </a:prstGeom>
-          <a:solidFill>
-            <a:srgbClr val="FFFFFF"/>
+              <a:t>3 يوم</a:t>
+            </a:r>
+            <a:endParaRPr lang="ar-SA" sz="700" dirty="0"/>
+          </a:p>
+        </p:txBody>
+      </p:sp>
+      <p:sp>
+        <p:nvSpPr>
+          <p:cNvPr id="274" name="Shape 272"/>
+          <p:cNvSpPr/>
+          <p:nvPr/>
+        </p:nvSpPr>
+        <p:spPr>
+          <a:xfrm>
+            <a:off x="365760" y="3958590"/>
+            <a:ext cx="11460175" cy="215646"/>
+          </a:xfrm>
+          <a:prstGeom prst="rect">
+            <a:avLst/>
+          </a:prstGeom>
+          <a:solidFill>
+            <a:srgbClr val="F6F9FA"/>
           </a:solidFill>
           <a:ln w="6350">
             <a:solidFill>
@@ -15547,297 +16292,299 @@
       </p:sp>
       <p:sp>
         <p:nvSpPr>
-          <p:cNvPr id="254" name="Shape 252"/>
-          <p:cNvSpPr/>
-          <p:nvPr/>
-        </p:nvSpPr>
-        <p:spPr>
-          <a:xfrm>
-            <a:off x="11496751" y="4248694"/>
-            <a:ext cx="274320" cy="274320"/>
-          </a:xfrm>
-          <a:prstGeom prst="ellipse">
-            <a:avLst/>
-          </a:prstGeom>
-          <a:solidFill>
-            <a:srgbClr val="00778B"/>
-          </a:solidFill>
-          <a:ln w="6350">
-            <a:solidFill>
-              <a:srgbClr val="00778B"/>
-            </a:solidFill>
-            <a:prstDash val="solid"/>
-          </a:ln>
-        </p:spPr>
-      </p:sp>
-      <p:sp>
-        <p:nvSpPr>
-          <p:cNvPr id="255" name="Text 253"/>
-          <p:cNvSpPr/>
-          <p:nvPr/>
-        </p:nvSpPr>
-        <p:spPr>
-          <a:xfrm>
-            <a:off x="11441887" y="4184033"/>
-            <a:ext cx="384048" cy="403642"/>
-          </a:xfrm>
-          <a:prstGeom prst="rect">
-            <a:avLst/>
-          </a:prstGeom>
-          <a:noFill/>
-          <a:ln/>
-        </p:spPr>
-        <p:txBody>
-          <a:bodyPr wrap="square" lIns="0" tIns="0" rIns="0" bIns="0" rtlCol="0" anchor="ctr">
-            <a:normAutofit/>
-          </a:bodyPr>
-          <a:lstStyle/>
-          <a:p>
-            <a:pPr rtl="1" algn="ctr" indent="0" marL="0">
-              <a:buNone/>
-            </a:pPr>
-            <a:r>
-              <a:rPr lang="ar-SA" altLang="en-US" sz="900" b="1" dirty="0">
-                <a:solidFill>
-                  <a:srgbClr val="FFFFFF"/>
-                </a:solidFill>
-                <a:latin typeface="Arial" pitchFamily="34" charset="0"/>
-                <a:ea typeface="Arial" pitchFamily="34" charset="-122"/>
-                <a:cs typeface="Arial" pitchFamily="34" charset="-120"/>
-              </a:rPr>
-              <a:t>E</a:t>
-            </a:r>
-            <a:endParaRPr lang="ar-SA" sz="900" dirty="0"/>
-          </a:p>
-        </p:txBody>
-      </p:sp>
-      <p:sp>
-        <p:nvSpPr>
-          <p:cNvPr id="256" name="Text 254"/>
-          <p:cNvSpPr/>
-          <p:nvPr/>
-        </p:nvSpPr>
-        <p:spPr>
-          <a:xfrm>
-            <a:off x="8762695" y="4184033"/>
-            <a:ext cx="2606040" cy="403642"/>
-          </a:xfrm>
-          <a:prstGeom prst="rect">
-            <a:avLst/>
-          </a:prstGeom>
-          <a:noFill/>
-          <a:ln/>
-        </p:spPr>
-        <p:txBody>
-          <a:bodyPr wrap="square" lIns="0" tIns="0" rIns="0" bIns="0" rtlCol="0" anchor="ctr">
-            <a:normAutofit/>
-          </a:bodyPr>
-          <a:lstStyle/>
-          <a:p>
-            <a:pPr rtl="1" algn="r" indent="0" marL="0">
-              <a:buNone/>
-            </a:pPr>
-            <a:r>
-              <a:rPr lang="ar-SA" altLang="en-US" sz="900" dirty="0">
-                <a:solidFill>
-                  <a:srgbClr val="222222"/>
-                </a:solidFill>
-                <a:latin typeface="Arial" pitchFamily="34" charset="0"/>
-                <a:ea typeface="Arial" pitchFamily="34" charset="-122"/>
-                <a:cs typeface="Arial" pitchFamily="34" charset="-120"/>
-              </a:rPr>
-              <a:t>جدار الحفرة – حديد التسليح والشدات والخرسانة</a:t>
-            </a:r>
-            <a:endParaRPr lang="ar-SA" sz="900" dirty="0"/>
-          </a:p>
-        </p:txBody>
-      </p:sp>
-      <p:sp>
-        <p:nvSpPr>
-          <p:cNvPr id="257" name="Text 255"/>
-          <p:cNvSpPr/>
-          <p:nvPr/>
-        </p:nvSpPr>
-        <p:spPr>
-          <a:xfrm>
-            <a:off x="7967167" y="4184033"/>
-            <a:ext cx="777240" cy="403642"/>
-          </a:xfrm>
-          <a:prstGeom prst="rect">
-            <a:avLst/>
-          </a:prstGeom>
-          <a:noFill/>
-          <a:ln/>
-        </p:spPr>
-        <p:txBody>
-          <a:bodyPr wrap="square" lIns="0" tIns="0" rIns="0" bIns="0" rtlCol="0" anchor="ctr">
-            <a:normAutofit/>
-          </a:bodyPr>
-          <a:lstStyle/>
-          <a:p>
-            <a:pPr rtl="1" algn="ctr" indent="0" marL="0">
-              <a:buNone/>
-            </a:pPr>
-            <a:r>
-              <a:rPr lang="ar-SA" altLang="en-US" sz="850" dirty="0">
-                <a:solidFill>
-                  <a:srgbClr val="444444"/>
-                </a:solidFill>
-                <a:latin typeface="Arial" pitchFamily="34" charset="0"/>
-                <a:ea typeface="Arial" pitchFamily="34" charset="-122"/>
-                <a:cs typeface="Arial" pitchFamily="34" charset="-120"/>
-              </a:rPr>
-              <a:t>D · FS</a:t>
-            </a:r>
-            <a:endParaRPr lang="ar-SA" sz="850" dirty="0"/>
-          </a:p>
-        </p:txBody>
-      </p:sp>
-      <p:sp>
-        <p:nvSpPr>
-          <p:cNvPr id="258" name="Text 256"/>
-          <p:cNvSpPr/>
-          <p:nvPr/>
-        </p:nvSpPr>
-        <p:spPr>
-          <a:xfrm>
-            <a:off x="7464247" y="4184033"/>
-            <a:ext cx="502920" cy="403642"/>
-          </a:xfrm>
-          <a:prstGeom prst="rect">
-            <a:avLst/>
-          </a:prstGeom>
-          <a:noFill/>
-          <a:ln/>
-        </p:spPr>
-        <p:txBody>
-          <a:bodyPr wrap="square" lIns="0" tIns="0" rIns="0" bIns="0" rtlCol="0" anchor="ctr">
-            <a:normAutofit/>
-          </a:bodyPr>
-          <a:lstStyle/>
-          <a:p>
-            <a:pPr rtl="1" algn="ctr" indent="0" marL="0">
-              <a:buNone/>
-            </a:pPr>
-            <a:r>
-              <a:rPr lang="ar-SA" altLang="en-US" sz="1100" b="1" dirty="0">
-                <a:solidFill>
-                  <a:srgbClr val="222222"/>
-                </a:solidFill>
-                <a:latin typeface="Arial" pitchFamily="34" charset="0"/>
-                <a:ea typeface="Arial" pitchFamily="34" charset="-122"/>
-                <a:cs typeface="Arial" pitchFamily="34" charset="-120"/>
-              </a:rPr>
-              <a:t>6</a:t>
-            </a:r>
-            <a:endParaRPr lang="ar-SA" sz="1100" dirty="0"/>
-          </a:p>
-        </p:txBody>
-      </p:sp>
-      <p:sp>
-        <p:nvSpPr>
-          <p:cNvPr id="259" name="Text 257"/>
-          <p:cNvSpPr/>
-          <p:nvPr/>
-        </p:nvSpPr>
-        <p:spPr>
-          <a:xfrm>
-            <a:off x="6805879" y="4184033"/>
-            <a:ext cx="658368" cy="403642"/>
-          </a:xfrm>
-          <a:prstGeom prst="rect">
-            <a:avLst/>
-          </a:prstGeom>
-          <a:noFill/>
-          <a:ln/>
-        </p:spPr>
-        <p:txBody>
-          <a:bodyPr wrap="square" lIns="0" tIns="0" rIns="0" bIns="0" rtlCol="0" anchor="ctr">
-            <a:normAutofit/>
-          </a:bodyPr>
-          <a:lstStyle/>
-          <a:p>
-            <a:pPr rtl="1" algn="ctr" indent="0" marL="0">
-              <a:buNone/>
-            </a:pPr>
-            <a:r>
-              <a:rPr lang="ar-SA" altLang="en-US" sz="850" b="1" dirty="0">
-                <a:solidFill>
-                  <a:srgbClr val="222222"/>
-                </a:solidFill>
-                <a:latin typeface="Arial" pitchFamily="34" charset="0"/>
-                <a:ea typeface="Arial" pitchFamily="34" charset="-122"/>
-                <a:cs typeface="Arial" pitchFamily="34" charset="-120"/>
-              </a:rPr>
-              <a:t>5 نوفمبر</a:t>
-            </a:r>
-            <a:endParaRPr lang="ar-SA" sz="850" dirty="0"/>
-          </a:p>
-        </p:txBody>
-      </p:sp>
-      <p:sp>
-        <p:nvSpPr>
-          <p:cNvPr id="260" name="Text 258"/>
-          <p:cNvSpPr/>
-          <p:nvPr/>
-        </p:nvSpPr>
-        <p:spPr>
-          <a:xfrm>
-            <a:off x="6147511" y="4184033"/>
-            <a:ext cx="658368" cy="403642"/>
-          </a:xfrm>
-          <a:prstGeom prst="rect">
-            <a:avLst/>
-          </a:prstGeom>
-          <a:noFill/>
-          <a:ln/>
-        </p:spPr>
-        <p:txBody>
-          <a:bodyPr wrap="square" lIns="0" tIns="0" rIns="0" bIns="0" rtlCol="0" anchor="ctr">
-            <a:normAutofit/>
-          </a:bodyPr>
-          <a:lstStyle/>
-          <a:p>
-            <a:pPr rtl="1" algn="ctr" indent="0" marL="0">
-              <a:buNone/>
-            </a:pPr>
-            <a:r>
-              <a:rPr lang="ar-SA" altLang="en-US" sz="850" b="1" dirty="0">
-                <a:solidFill>
-                  <a:srgbClr val="222222"/>
-                </a:solidFill>
-                <a:latin typeface="Arial" pitchFamily="34" charset="0"/>
-                <a:ea typeface="Arial" pitchFamily="34" charset="-122"/>
-                <a:cs typeface="Arial" pitchFamily="34" charset="-120"/>
-              </a:rPr>
-              <a:t>11 نوفمبر</a:t>
-            </a:r>
-            <a:endParaRPr lang="ar-SA" sz="850" dirty="0"/>
-          </a:p>
-        </p:txBody>
-      </p:sp>
-      <p:sp>
-        <p:nvSpPr>
-          <p:cNvPr id="261" name="Shape 259"/>
-          <p:cNvSpPr/>
-          <p:nvPr/>
-        </p:nvSpPr>
-        <p:spPr>
-          <a:xfrm>
-            <a:off x="2172557" y="4274853"/>
-            <a:ext cx="843172" cy="222003"/>
+          <p:cNvPr id="275" name="Shape 273"/>
+          <p:cNvSpPr/>
+          <p:nvPr/>
+        </p:nvSpPr>
+        <p:spPr>
+          <a:xfrm>
+            <a:off x="11441887" y="3988689"/>
+            <a:ext cx="329184" cy="155448"/>
           </a:xfrm>
           <a:prstGeom prst="roundRect">
             <a:avLst>
-              <a:gd name="adj" fmla="val 20594"/>
+              <a:gd name="adj" fmla="val 50000"/>
             </a:avLst>
           </a:prstGeom>
           <a:solidFill>
-            <a:srgbClr val="00778B"/>
-          </a:solidFill>
-          <a:ln w="6350">
-            <a:solidFill>
-              <a:srgbClr val="00778B"/>
+            <a:srgbClr val="D9695A"/>
+          </a:solidFill>
+          <a:ln w="19050">
+            <a:solidFill>
+              <a:srgbClr val="222222"/>
+            </a:solidFill>
+            <a:prstDash val="solid"/>
+          </a:ln>
+        </p:spPr>
+      </p:sp>
+      <p:sp>
+        <p:nvSpPr>
+          <p:cNvPr id="276" name="Text 274"/>
+          <p:cNvSpPr/>
+          <p:nvPr/>
+        </p:nvSpPr>
+        <p:spPr>
+          <a:xfrm>
+            <a:off x="11414455" y="3958590"/>
+            <a:ext cx="384048" cy="215646"/>
+          </a:xfrm>
+          <a:prstGeom prst="rect">
+            <a:avLst/>
+          </a:prstGeom>
+          <a:noFill/>
+          <a:ln/>
+        </p:spPr>
+        <p:txBody>
+          <a:bodyPr wrap="square" lIns="0" tIns="0" rIns="0" bIns="0" rtlCol="0" anchor="ctr">
+            <a:normAutofit/>
+          </a:bodyPr>
+          <a:lstStyle/>
+          <a:p>
+            <a:pPr rtl="1" algn="ctr" indent="0" marL="0">
+              <a:buNone/>
+            </a:pPr>
+            <a:r>
+              <a:rPr lang="ar-SA" altLang="en-US" sz="650" b="1" dirty="0">
+                <a:solidFill>
+                  <a:srgbClr val="FFFFFF"/>
+                </a:solidFill>
+                <a:latin typeface="Arial" pitchFamily="34" charset="0"/>
+                <a:ea typeface="Arial" pitchFamily="34" charset="-122"/>
+                <a:cs typeface="Arial" pitchFamily="34" charset="-120"/>
+              </a:rPr>
+              <a:t>A.5</a:t>
+            </a:r>
+            <a:endParaRPr lang="ar-SA" sz="650" dirty="0"/>
+          </a:p>
+        </p:txBody>
+      </p:sp>
+      <p:sp>
+        <p:nvSpPr>
+          <p:cNvPr id="277" name="Text 275"/>
+          <p:cNvSpPr/>
+          <p:nvPr/>
+        </p:nvSpPr>
+        <p:spPr>
+          <a:xfrm>
+            <a:off x="8762695" y="3958590"/>
+            <a:ext cx="2441448" cy="215646"/>
+          </a:xfrm>
+          <a:prstGeom prst="rect">
+            <a:avLst/>
+          </a:prstGeom>
+          <a:noFill/>
+          <a:ln/>
+        </p:spPr>
+        <p:txBody>
+          <a:bodyPr wrap="square" lIns="0" tIns="0" rIns="0" bIns="0" rtlCol="0" anchor="ctr">
+            <a:normAutofit/>
+          </a:bodyPr>
+          <a:lstStyle/>
+          <a:p>
+            <a:pPr rtl="1" algn="r" indent="0" marL="0">
+              <a:buNone/>
+            </a:pPr>
+            <a:r>
+              <a:rPr lang="ar-SA" altLang="en-US" sz="700" dirty="0">
+                <a:solidFill>
+                  <a:srgbClr val="222222"/>
+                </a:solidFill>
+                <a:latin typeface="Arial" pitchFamily="34" charset="0"/>
+                <a:ea typeface="Arial" pitchFamily="34" charset="-122"/>
+                <a:cs typeface="Arial" pitchFamily="34" charset="-120"/>
+              </a:rPr>
+              <a:t>تركيب / إدخال الألواح المضلعة (Corrugated sheets)</a:t>
+            </a:r>
+            <a:endParaRPr lang="ar-SA" sz="700" dirty="0"/>
+          </a:p>
+        </p:txBody>
+      </p:sp>
+      <p:sp>
+        <p:nvSpPr>
+          <p:cNvPr id="278" name="Text 276"/>
+          <p:cNvSpPr/>
+          <p:nvPr/>
+        </p:nvSpPr>
+        <p:spPr>
+          <a:xfrm>
+            <a:off x="7967167" y="3958590"/>
+            <a:ext cx="777240" cy="215646"/>
+          </a:xfrm>
+          <a:prstGeom prst="rect">
+            <a:avLst/>
+          </a:prstGeom>
+          <a:noFill/>
+          <a:ln/>
+        </p:spPr>
+        <p:txBody>
+          <a:bodyPr wrap="square" lIns="0" tIns="0" rIns="0" bIns="0" rtlCol="0" anchor="ctr">
+            <a:normAutofit/>
+          </a:bodyPr>
+          <a:lstStyle/>
+          <a:p>
+            <a:pPr rtl="1" algn="ctr" indent="0" marL="0">
+              <a:buNone/>
+            </a:pPr>
+            <a:r>
+              <a:rPr lang="ar-SA" altLang="en-US" sz="700" dirty="0">
+                <a:solidFill>
+                  <a:srgbClr val="444444"/>
+                </a:solidFill>
+                <a:latin typeface="Arial" pitchFamily="34" charset="0"/>
+                <a:ea typeface="Arial" pitchFamily="34" charset="-122"/>
+                <a:cs typeface="Arial" pitchFamily="34" charset="-120"/>
+              </a:rPr>
+              <a:t>A4 · SS +1</a:t>
+            </a:r>
+            <a:endParaRPr lang="ar-SA" sz="700" dirty="0"/>
+          </a:p>
+        </p:txBody>
+      </p:sp>
+      <p:sp>
+        <p:nvSpPr>
+          <p:cNvPr id="279" name="Text 277"/>
+          <p:cNvSpPr/>
+          <p:nvPr/>
+        </p:nvSpPr>
+        <p:spPr>
+          <a:xfrm>
+            <a:off x="7464247" y="3958590"/>
+            <a:ext cx="502920" cy="215646"/>
+          </a:xfrm>
+          <a:prstGeom prst="rect">
+            <a:avLst/>
+          </a:prstGeom>
+          <a:noFill/>
+          <a:ln/>
+        </p:spPr>
+        <p:txBody>
+          <a:bodyPr wrap="square" lIns="0" tIns="0" rIns="0" bIns="0" rtlCol="0" anchor="ctr">
+            <a:normAutofit/>
+          </a:bodyPr>
+          <a:lstStyle/>
+          <a:p>
+            <a:pPr rtl="1" algn="ctr" indent="0" marL="0">
+              <a:buNone/>
+            </a:pPr>
+            <a:r>
+              <a:rPr lang="ar-SA" altLang="en-US" sz="900" b="1" dirty="0">
+                <a:solidFill>
+                  <a:srgbClr val="222222"/>
+                </a:solidFill>
+                <a:latin typeface="Arial" pitchFamily="34" charset="0"/>
+                <a:ea typeface="Arial" pitchFamily="34" charset="-122"/>
+                <a:cs typeface="Arial" pitchFamily="34" charset="-120"/>
+              </a:rPr>
+              <a:t>2</a:t>
+            </a:r>
+            <a:endParaRPr lang="ar-SA" sz="900" dirty="0"/>
+          </a:p>
+        </p:txBody>
+      </p:sp>
+      <p:sp>
+        <p:nvSpPr>
+          <p:cNvPr id="280" name="Text 278"/>
+          <p:cNvSpPr/>
+          <p:nvPr/>
+        </p:nvSpPr>
+        <p:spPr>
+          <a:xfrm>
+            <a:off x="6805879" y="3958590"/>
+            <a:ext cx="658368" cy="215646"/>
+          </a:xfrm>
+          <a:prstGeom prst="rect">
+            <a:avLst/>
+          </a:prstGeom>
+          <a:noFill/>
+          <a:ln/>
+        </p:spPr>
+        <p:txBody>
+          <a:bodyPr wrap="square" lIns="0" tIns="0" rIns="0" bIns="0" rtlCol="0" anchor="ctr">
+            <a:normAutofit/>
+          </a:bodyPr>
+          <a:lstStyle/>
+          <a:p>
+            <a:pPr rtl="1" algn="ctr" indent="0" marL="0">
+              <a:buNone/>
+            </a:pPr>
+            <a:r>
+              <a:rPr lang="ar-SA" altLang="en-US" sz="700" b="1" dirty="0">
+                <a:solidFill>
+                  <a:srgbClr val="222222"/>
+                </a:solidFill>
+                <a:latin typeface="Arial" pitchFamily="34" charset="0"/>
+                <a:ea typeface="Arial" pitchFamily="34" charset="-122"/>
+                <a:cs typeface="Arial" pitchFamily="34" charset="-120"/>
+              </a:rPr>
+              <a:t>18 أكتوبر</a:t>
+            </a:r>
+            <a:endParaRPr lang="ar-SA" sz="700" dirty="0"/>
+          </a:p>
+        </p:txBody>
+      </p:sp>
+      <p:sp>
+        <p:nvSpPr>
+          <p:cNvPr id="281" name="Text 279"/>
+          <p:cNvSpPr/>
+          <p:nvPr/>
+        </p:nvSpPr>
+        <p:spPr>
+          <a:xfrm>
+            <a:off x="6147511" y="3958590"/>
+            <a:ext cx="658368" cy="215646"/>
+          </a:xfrm>
+          <a:prstGeom prst="rect">
+            <a:avLst/>
+          </a:prstGeom>
+          <a:noFill/>
+          <a:ln/>
+        </p:spPr>
+        <p:txBody>
+          <a:bodyPr wrap="square" lIns="0" tIns="0" rIns="0" bIns="0" rtlCol="0" anchor="ctr">
+            <a:normAutofit/>
+          </a:bodyPr>
+          <a:lstStyle/>
+          <a:p>
+            <a:pPr rtl="1" algn="ctr" indent="0" marL="0">
+              <a:buNone/>
+            </a:pPr>
+            <a:r>
+              <a:rPr lang="ar-SA" altLang="en-US" sz="700" b="1" dirty="0">
+                <a:solidFill>
+                  <a:srgbClr val="222222"/>
+                </a:solidFill>
+                <a:latin typeface="Arial" pitchFamily="34" charset="0"/>
+                <a:ea typeface="Arial" pitchFamily="34" charset="-122"/>
+                <a:cs typeface="Arial" pitchFamily="34" charset="-120"/>
+              </a:rPr>
+              <a:t>19 أكتوبر</a:t>
+            </a:r>
+            <a:endParaRPr lang="ar-SA" sz="700" dirty="0"/>
+          </a:p>
+        </p:txBody>
+      </p:sp>
+      <p:sp>
+        <p:nvSpPr>
+          <p:cNvPr id="282" name="Shape 280"/>
+          <p:cNvSpPr/>
+          <p:nvPr/>
+        </p:nvSpPr>
+        <p:spPr>
+          <a:xfrm>
+            <a:off x="4942980" y="4003876"/>
+            <a:ext cx="240906" cy="125075"/>
+          </a:xfrm>
+          <a:prstGeom prst="roundRect">
+            <a:avLst>
+              <a:gd name="adj" fmla="val 29243"/>
+            </a:avLst>
+          </a:prstGeom>
+          <a:solidFill>
+            <a:srgbClr val="D9695A"/>
+          </a:solidFill>
+          <a:ln w="19050">
+            <a:solidFill>
+              <a:srgbClr val="222222"/>
             </a:solidFill>
             <a:prstDash val="solid"/>
           </a:ln>
@@ -15852,14 +16599,66 @@
       </p:sp>
       <p:sp>
         <p:nvSpPr>
-          <p:cNvPr id="262" name="Text 260"/>
-          <p:cNvSpPr/>
-          <p:nvPr/>
-        </p:nvSpPr>
-        <p:spPr>
-          <a:xfrm>
-            <a:off x="2172557" y="4274853"/>
-            <a:ext cx="843172" cy="222003"/>
+          <p:cNvPr id="283" name="Shape 281"/>
+          <p:cNvSpPr/>
+          <p:nvPr/>
+        </p:nvSpPr>
+        <p:spPr>
+          <a:xfrm>
+            <a:off x="365760" y="4174236"/>
+            <a:ext cx="11460175" cy="215646"/>
+          </a:xfrm>
+          <a:prstGeom prst="rect">
+            <a:avLst/>
+          </a:prstGeom>
+          <a:solidFill>
+            <a:srgbClr val="FFFFFF"/>
+          </a:solidFill>
+          <a:ln w="6350">
+            <a:solidFill>
+              <a:srgbClr val="DFE6EA"/>
+            </a:solidFill>
+            <a:prstDash val="solid"/>
+          </a:ln>
+        </p:spPr>
+      </p:sp>
+      <p:sp>
+        <p:nvSpPr>
+          <p:cNvPr id="284" name="Shape 282"/>
+          <p:cNvSpPr/>
+          <p:nvPr/>
+        </p:nvSpPr>
+        <p:spPr>
+          <a:xfrm>
+            <a:off x="11515039" y="4163187"/>
+            <a:ext cx="237744" cy="237744"/>
+          </a:xfrm>
+          <a:prstGeom prst="ellipse">
+            <a:avLst>
+              <a:gd name="adj" fmla="val 32692"/>
+            </a:avLst>
+          </a:prstGeom>
+          <a:solidFill>
+            <a:srgbClr val="00778B"/>
+          </a:solidFill>
+          <a:ln w="6350">
+            <a:solidFill>
+              <a:srgbClr val="00778B"/>
+            </a:solidFill>
+            <a:prstDash val="solid"/>
+          </a:ln>
+        </p:spPr>
+      </p:sp>
+      <p:sp>
+        <p:nvSpPr>
+          <p:cNvPr id="285" name="Text 283"/>
+          <p:cNvSpPr/>
+          <p:nvPr/>
+        </p:nvSpPr>
+        <p:spPr>
+          <a:xfrm>
+            <a:off x="11441887" y="4174236"/>
+            <a:ext cx="384048" cy="215646"/>
           </a:xfrm>
           <a:prstGeom prst="rect">
             <a:avLst/>
@@ -15877,7 +16676,7 @@
               <a:buNone/>
             </a:pPr>
             <a:r>
-              <a:rPr lang="ar-SA" altLang="en-US" sz="800" b="1" dirty="0">
+              <a:rPr lang="ar-SA" altLang="en-US" sz="850" b="1" dirty="0">
                 <a:solidFill>
                   <a:srgbClr val="FFFFFF"/>
                 </a:solidFill>
@@ -15885,72 +16684,63 @@
                 <a:ea typeface="Arial" pitchFamily="34" charset="-122"/>
                 <a:cs typeface="Arial" pitchFamily="34" charset="-120"/>
               </a:rPr>
-              <a:t>6 يوم</a:t>
-            </a:r>
-            <a:endParaRPr lang="ar-SA" sz="800" dirty="0"/>
-          </a:p>
-        </p:txBody>
-      </p:sp>
-      <p:sp>
-        <p:nvSpPr>
-          <p:cNvPr id="263" name="Shape 261"/>
-          <p:cNvSpPr/>
-          <p:nvPr/>
-        </p:nvSpPr>
-        <p:spPr>
-          <a:xfrm>
-            <a:off x="365760" y="4587675"/>
-            <a:ext cx="11460175" cy="403642"/>
-          </a:xfrm>
-          <a:prstGeom prst="rect">
-            <a:avLst/>
-          </a:prstGeom>
-          <a:solidFill>
-            <a:srgbClr val="F6F9FA"/>
-          </a:solidFill>
-          <a:ln w="6350">
-            <a:solidFill>
-              <a:srgbClr val="DFE6EA"/>
-            </a:solidFill>
-            <a:prstDash val="solid"/>
-          </a:ln>
-        </p:spPr>
-      </p:sp>
-      <p:sp>
-        <p:nvSpPr>
-          <p:cNvPr id="264" name="Shape 262"/>
-          <p:cNvSpPr/>
-          <p:nvPr/>
-        </p:nvSpPr>
-        <p:spPr>
-          <a:xfrm>
-            <a:off x="11496751" y="4652337"/>
-            <a:ext cx="274320" cy="274320"/>
-          </a:xfrm>
-          <a:prstGeom prst="ellipse">
-            <a:avLst/>
-          </a:prstGeom>
-          <a:solidFill>
-            <a:srgbClr val="2E9E6B"/>
-          </a:solidFill>
-          <a:ln w="25400">
-            <a:solidFill>
-              <a:srgbClr val="222222"/>
-            </a:solidFill>
-            <a:prstDash val="solid"/>
-          </a:ln>
-        </p:spPr>
-      </p:sp>
-      <p:sp>
-        <p:nvSpPr>
-          <p:cNvPr id="265" name="Text 263"/>
-          <p:cNvSpPr/>
-          <p:nvPr/>
-        </p:nvSpPr>
-        <p:spPr>
-          <a:xfrm>
-            <a:off x="11441887" y="4587675"/>
-            <a:ext cx="384048" cy="403642"/>
+              <a:t>B</a:t>
+            </a:r>
+            <a:endParaRPr lang="ar-SA" sz="850" dirty="0"/>
+          </a:p>
+        </p:txBody>
+      </p:sp>
+      <p:sp>
+        <p:nvSpPr>
+          <p:cNvPr id="286" name="Text 284"/>
+          <p:cNvSpPr/>
+          <p:nvPr/>
+        </p:nvSpPr>
+        <p:spPr>
+          <a:xfrm>
+            <a:off x="8762695" y="4174236"/>
+            <a:ext cx="2606040" cy="215646"/>
+          </a:xfrm>
+          <a:prstGeom prst="rect">
+            <a:avLst/>
+          </a:prstGeom>
+          <a:noFill/>
+          <a:ln/>
+        </p:spPr>
+        <p:txBody>
+          <a:bodyPr wrap="square" lIns="0" tIns="0" rIns="0" bIns="0" rtlCol="0" anchor="ctr">
+            <a:normAutofit/>
+          </a:bodyPr>
+          <a:lstStyle/>
+          <a:p>
+            <a:pPr rtl="1" algn="r" indent="0" marL="0">
+              <a:buNone/>
+            </a:pPr>
+            <a:r>
+              <a:rPr lang="ar-SA" altLang="en-US" sz="750" b="1" dirty="0">
+                <a:solidFill>
+                  <a:srgbClr val="222222"/>
+                </a:solidFill>
+                <a:latin typeface="Arial" pitchFamily="34" charset="0"/>
+                <a:ea typeface="Arial" pitchFamily="34" charset="-122"/>
+                <a:cs typeface="Arial" pitchFamily="34" charset="-120"/>
+              </a:rPr>
+              <a:t>الخرسانة العادية (Lean concrete)</a:t>
+            </a:r>
+            <a:endParaRPr lang="ar-SA" sz="750" dirty="0"/>
+          </a:p>
+        </p:txBody>
+      </p:sp>
+      <p:sp>
+        <p:nvSpPr>
+          <p:cNvPr id="287" name="Text 285"/>
+          <p:cNvSpPr/>
+          <p:nvPr/>
+        </p:nvSpPr>
+        <p:spPr>
+          <a:xfrm>
+            <a:off x="7967167" y="4174236"/>
+            <a:ext cx="777240" cy="215646"/>
           </a:xfrm>
           <a:prstGeom prst="rect">
             <a:avLst/>
@@ -15968,15 +16758,56 @@
               <a:buNone/>
             </a:pPr>
             <a:r>
+              <a:rPr lang="ar-SA" altLang="en-US" sz="700" dirty="0">
+                <a:solidFill>
+                  <a:srgbClr val="444444"/>
+                </a:solidFill>
+                <a:latin typeface="Arial" pitchFamily="34" charset="0"/>
+                <a:ea typeface="Arial" pitchFamily="34" charset="-122"/>
+                <a:cs typeface="Arial" pitchFamily="34" charset="-120"/>
+              </a:rPr>
+              <a:t>A · SS +6</a:t>
+            </a:r>
+            <a:endParaRPr lang="ar-SA" sz="700" dirty="0"/>
+          </a:p>
+        </p:txBody>
+      </p:sp>
+      <p:sp>
+        <p:nvSpPr>
+          <p:cNvPr id="288" name="Text 286"/>
+          <p:cNvSpPr/>
+          <p:nvPr/>
+        </p:nvSpPr>
+        <p:spPr>
+          <a:xfrm>
+            <a:off x="7464247" y="4174236"/>
+            <a:ext cx="502920" cy="215646"/>
+          </a:xfrm>
+          <a:prstGeom prst="rect">
+            <a:avLst/>
+          </a:prstGeom>
+          <a:noFill/>
+          <a:ln/>
+        </p:spPr>
+        <p:txBody>
+          <a:bodyPr wrap="square" lIns="0" tIns="0" rIns="0" bIns="0" rtlCol="0" anchor="ctr">
+            <a:normAutofit/>
+          </a:bodyPr>
+          <a:lstStyle/>
+          <a:p>
+            <a:pPr rtl="1" algn="ctr" indent="0" marL="0">
+              <a:buNone/>
+            </a:pPr>
+            <a:r>
               <a:rPr lang="ar-SA" altLang="en-US" sz="900" b="1" dirty="0">
                 <a:solidFill>
-                  <a:srgbClr val="FFFFFF"/>
-                </a:solidFill>
-                <a:latin typeface="Arial" pitchFamily="34" charset="0"/>
-                <a:ea typeface="Arial" pitchFamily="34" charset="-122"/>
-                <a:cs typeface="Arial" pitchFamily="34" charset="-120"/>
-              </a:rPr>
-              <a:t>F</a:t>
+                  <a:srgbClr val="222222"/>
+                </a:solidFill>
+                <a:latin typeface="Arial" pitchFamily="34" charset="0"/>
+                <a:ea typeface="Arial" pitchFamily="34" charset="-122"/>
+                <a:cs typeface="Arial" pitchFamily="34" charset="-120"/>
+              </a:rPr>
+              <a:t>2</a:t>
             </a:r>
             <a:endParaRPr lang="ar-SA" sz="900" dirty="0"/>
           </a:p>
@@ -15984,32 +16815,32 @@
       </p:sp>
       <p:sp>
         <p:nvSpPr>
-          <p:cNvPr id="266" name="Text 264"/>
-          <p:cNvSpPr/>
-          <p:nvPr/>
-        </p:nvSpPr>
-        <p:spPr>
-          <a:xfrm>
-            <a:off x="8762695" y="4587675"/>
-            <a:ext cx="2606040" cy="403642"/>
-          </a:xfrm>
-          <a:prstGeom prst="rect">
-            <a:avLst/>
-          </a:prstGeom>
-          <a:noFill/>
-          <a:ln/>
-        </p:spPr>
-        <p:txBody>
-          <a:bodyPr wrap="square" lIns="0" tIns="0" rIns="0" bIns="0" rtlCol="0" anchor="ctr">
-            <a:normAutofit/>
-          </a:bodyPr>
-          <a:lstStyle/>
-          <a:p>
-            <a:pPr rtl="1" algn="r" indent="0" marL="0">
-              <a:buNone/>
-            </a:pPr>
-            <a:r>
-              <a:rPr lang="ar-SA" altLang="en-US" sz="900" dirty="0">
+          <p:cNvPr id="289" name="Text 287"/>
+          <p:cNvSpPr/>
+          <p:nvPr/>
+        </p:nvSpPr>
+        <p:spPr>
+          <a:xfrm>
+            <a:off x="6805879" y="4174236"/>
+            <a:ext cx="658368" cy="215646"/>
+          </a:xfrm>
+          <a:prstGeom prst="rect">
+            <a:avLst/>
+          </a:prstGeom>
+          <a:noFill/>
+          <a:ln/>
+        </p:spPr>
+        <p:txBody>
+          <a:bodyPr wrap="square" lIns="0" tIns="0" rIns="0" bIns="0" rtlCol="0" anchor="ctr">
+            <a:normAutofit/>
+          </a:bodyPr>
+          <a:lstStyle/>
+          <a:p>
+            <a:pPr rtl="1" algn="ctr" indent="0" marL="0">
+              <a:buNone/>
+            </a:pPr>
+            <a:r>
+              <a:rPr lang="ar-SA" altLang="en-US" sz="700" b="1" dirty="0">
                 <a:solidFill>
                   <a:srgbClr val="222222"/>
                 </a:solidFill>
@@ -16017,22 +16848,22 @@
                 <a:ea typeface="Arial" pitchFamily="34" charset="-122"/>
                 <a:cs typeface="Arial" pitchFamily="34" charset="-120"/>
               </a:rPr>
-              <a:t>أساسات المبنى – حفر ودمك / اختبار وحديد تسليح وخرسانة</a:t>
-            </a:r>
-            <a:endParaRPr lang="ar-SA" sz="900" dirty="0"/>
-          </a:p>
-        </p:txBody>
-      </p:sp>
-      <p:sp>
-        <p:nvSpPr>
-          <p:cNvPr id="267" name="Text 265"/>
-          <p:cNvSpPr/>
-          <p:nvPr/>
-        </p:nvSpPr>
-        <p:spPr>
-          <a:xfrm>
-            <a:off x="7967167" y="4587675"/>
-            <a:ext cx="777240" cy="403642"/>
+              <a:t>20 أكتوبر</a:t>
+            </a:r>
+            <a:endParaRPr lang="ar-SA" sz="700" dirty="0"/>
+          </a:p>
+        </p:txBody>
+      </p:sp>
+      <p:sp>
+        <p:nvSpPr>
+          <p:cNvPr id="290" name="Text 288"/>
+          <p:cNvSpPr/>
+          <p:nvPr/>
+        </p:nvSpPr>
+        <p:spPr>
+          <a:xfrm>
+            <a:off x="6147511" y="4174236"/>
+            <a:ext cx="658368" cy="215646"/>
           </a:xfrm>
           <a:prstGeom prst="rect">
             <a:avLst/>
@@ -16050,48 +16881,7 @@
               <a:buNone/>
             </a:pPr>
             <a:r>
-              <a:rPr lang="ar-SA" altLang="en-US" sz="850" dirty="0">
-                <a:solidFill>
-                  <a:srgbClr val="444444"/>
-                </a:solidFill>
-                <a:latin typeface="Arial" pitchFamily="34" charset="0"/>
-                <a:ea typeface="Arial" pitchFamily="34" charset="-122"/>
-                <a:cs typeface="Arial" pitchFamily="34" charset="-120"/>
-              </a:rPr>
-              <a:t>D · FS</a:t>
-            </a:r>
-            <a:endParaRPr lang="ar-SA" sz="850" dirty="0"/>
-          </a:p>
-        </p:txBody>
-      </p:sp>
-      <p:sp>
-        <p:nvSpPr>
-          <p:cNvPr id="268" name="Text 266"/>
-          <p:cNvSpPr/>
-          <p:nvPr/>
-        </p:nvSpPr>
-        <p:spPr>
-          <a:xfrm>
-            <a:off x="7464247" y="4587675"/>
-            <a:ext cx="502920" cy="403642"/>
-          </a:xfrm>
-          <a:prstGeom prst="rect">
-            <a:avLst/>
-          </a:prstGeom>
-          <a:noFill/>
-          <a:ln/>
-        </p:spPr>
-        <p:txBody>
-          <a:bodyPr wrap="square" lIns="0" tIns="0" rIns="0" bIns="0" rtlCol="0" anchor="ctr">
-            <a:normAutofit/>
-          </a:bodyPr>
-          <a:lstStyle/>
-          <a:p>
-            <a:pPr rtl="1" algn="ctr" indent="0" marL="0">
-              <a:buNone/>
-            </a:pPr>
-            <a:r>
-              <a:rPr lang="ar-SA" altLang="en-US" sz="1100" b="1" dirty="0">
+              <a:rPr lang="ar-SA" altLang="en-US" sz="700" b="1" dirty="0">
                 <a:solidFill>
                   <a:srgbClr val="222222"/>
                 </a:solidFill>
@@ -16099,116 +16889,34 @@
                 <a:ea typeface="Arial" pitchFamily="34" charset="-122"/>
                 <a:cs typeface="Arial" pitchFamily="34" charset="-120"/>
               </a:rPr>
-              <a:t>12</a:t>
-            </a:r>
-            <a:endParaRPr lang="ar-SA" sz="1100" dirty="0"/>
-          </a:p>
-        </p:txBody>
-      </p:sp>
-      <p:sp>
-        <p:nvSpPr>
-          <p:cNvPr id="269" name="Text 267"/>
-          <p:cNvSpPr/>
-          <p:nvPr/>
-        </p:nvSpPr>
-        <p:spPr>
-          <a:xfrm>
-            <a:off x="6805879" y="4587675"/>
-            <a:ext cx="658368" cy="403642"/>
-          </a:xfrm>
-          <a:prstGeom prst="rect">
-            <a:avLst/>
-          </a:prstGeom>
-          <a:noFill/>
-          <a:ln/>
-        </p:spPr>
-        <p:txBody>
-          <a:bodyPr wrap="square" lIns="0" tIns="0" rIns="0" bIns="0" rtlCol="0" anchor="ctr">
-            <a:normAutofit/>
-          </a:bodyPr>
-          <a:lstStyle/>
-          <a:p>
-            <a:pPr rtl="1" algn="ctr" indent="0" marL="0">
-              <a:buNone/>
-            </a:pPr>
-            <a:r>
-              <a:rPr lang="ar-SA" altLang="en-US" sz="850" b="1" dirty="0">
-                <a:solidFill>
-                  <a:srgbClr val="222222"/>
-                </a:solidFill>
-                <a:latin typeface="Arial" pitchFamily="34" charset="0"/>
-                <a:ea typeface="Arial" pitchFamily="34" charset="-122"/>
-                <a:cs typeface="Arial" pitchFamily="34" charset="-120"/>
-              </a:rPr>
-              <a:t>5 نوفمبر</a:t>
-            </a:r>
-            <a:endParaRPr lang="ar-SA" sz="850" dirty="0"/>
-          </a:p>
-        </p:txBody>
-      </p:sp>
-      <p:sp>
-        <p:nvSpPr>
-          <p:cNvPr id="270" name="Text 268"/>
-          <p:cNvSpPr/>
-          <p:nvPr/>
-        </p:nvSpPr>
-        <p:spPr>
-          <a:xfrm>
-            <a:off x="6147511" y="4587675"/>
-            <a:ext cx="658368" cy="403642"/>
-          </a:xfrm>
-          <a:prstGeom prst="rect">
-            <a:avLst/>
-          </a:prstGeom>
-          <a:noFill/>
-          <a:ln/>
-        </p:spPr>
-        <p:txBody>
-          <a:bodyPr wrap="square" lIns="0" tIns="0" rIns="0" bIns="0" rtlCol="0" anchor="ctr">
-            <a:normAutofit/>
-          </a:bodyPr>
-          <a:lstStyle/>
-          <a:p>
-            <a:pPr rtl="1" algn="ctr" indent="0" marL="0">
-              <a:buNone/>
-            </a:pPr>
-            <a:r>
-              <a:rPr lang="ar-SA" altLang="en-US" sz="850" b="1" dirty="0">
-                <a:solidFill>
-                  <a:srgbClr val="222222"/>
-                </a:solidFill>
-                <a:latin typeface="Arial" pitchFamily="34" charset="0"/>
-                <a:ea typeface="Arial" pitchFamily="34" charset="-122"/>
-                <a:cs typeface="Arial" pitchFamily="34" charset="-120"/>
-              </a:rPr>
-              <a:t>18 نوفمبر</a:t>
-            </a:r>
-            <a:endParaRPr lang="ar-SA" sz="850" dirty="0"/>
-          </a:p>
-        </p:txBody>
-      </p:sp>
-      <p:sp>
-        <p:nvSpPr>
-          <p:cNvPr id="271" name="Shape 269"/>
-          <p:cNvSpPr/>
-          <p:nvPr/>
-        </p:nvSpPr>
-        <p:spPr>
-          <a:xfrm>
-            <a:off x="1329385" y="4678495"/>
-            <a:ext cx="1686344" cy="222003"/>
+              <a:t>21 أكتوبر</a:t>
+            </a:r>
+            <a:endParaRPr lang="ar-SA" sz="700" dirty="0"/>
+          </a:p>
+        </p:txBody>
+      </p:sp>
+      <p:sp>
+        <p:nvSpPr>
+          <p:cNvPr id="291" name="Shape 289"/>
+          <p:cNvSpPr/>
+          <p:nvPr/>
+        </p:nvSpPr>
+        <p:spPr>
+          <a:xfrm>
+            <a:off x="4702073" y="4219522"/>
+            <a:ext cx="240906" cy="125075"/>
           </a:xfrm>
           <a:prstGeom prst="roundRect">
             <a:avLst>
-              <a:gd name="adj" fmla="val 20594"/>
+              <a:gd name="adj" fmla="val 29243"/>
             </a:avLst>
           </a:prstGeom>
           <a:solidFill>
-            <a:srgbClr val="2E9E6B"/>
-          </a:solidFill>
-          <a:ln w="22225">
-            <a:solidFill>
-              <a:srgbClr val="222222"/>
+            <a:srgbClr val="00778B"/>
+          </a:solidFill>
+          <a:ln w="6350">
+            <a:solidFill>
+              <a:srgbClr val="00778B"/>
             </a:solidFill>
             <a:prstDash val="solid"/>
           </a:ln>
@@ -16223,14 +16931,66 @@
       </p:sp>
       <p:sp>
         <p:nvSpPr>
-          <p:cNvPr id="272" name="Text 270"/>
-          <p:cNvSpPr/>
-          <p:nvPr/>
-        </p:nvSpPr>
-        <p:spPr>
-          <a:xfrm>
-            <a:off x="1329385" y="4678495"/>
-            <a:ext cx="1686344" cy="222003"/>
+          <p:cNvPr id="292" name="Shape 290"/>
+          <p:cNvSpPr/>
+          <p:nvPr/>
+        </p:nvSpPr>
+        <p:spPr>
+          <a:xfrm>
+            <a:off x="365760" y="4389882"/>
+            <a:ext cx="11460175" cy="215646"/>
+          </a:xfrm>
+          <a:prstGeom prst="rect">
+            <a:avLst/>
+          </a:prstGeom>
+          <a:solidFill>
+            <a:srgbClr val="F6F9FA"/>
+          </a:solidFill>
+          <a:ln w="6350">
+            <a:solidFill>
+              <a:srgbClr val="DFE6EA"/>
+            </a:solidFill>
+            <a:prstDash val="solid"/>
+          </a:ln>
+        </p:spPr>
+      </p:sp>
+      <p:sp>
+        <p:nvSpPr>
+          <p:cNvPr id="293" name="Shape 291"/>
+          <p:cNvSpPr/>
+          <p:nvPr/>
+        </p:nvSpPr>
+        <p:spPr>
+          <a:xfrm>
+            <a:off x="11515039" y="4378833"/>
+            <a:ext cx="237744" cy="237744"/>
+          </a:xfrm>
+          <a:prstGeom prst="ellipse">
+            <a:avLst>
+              <a:gd name="adj" fmla="val 32692"/>
+            </a:avLst>
+          </a:prstGeom>
+          <a:solidFill>
+            <a:srgbClr val="00778B"/>
+          </a:solidFill>
+          <a:ln w="19050">
+            <a:solidFill>
+              <a:srgbClr val="222222"/>
+            </a:solidFill>
+            <a:prstDash val="solid"/>
+          </a:ln>
+        </p:spPr>
+      </p:sp>
+      <p:sp>
+        <p:nvSpPr>
+          <p:cNvPr id="294" name="Text 292"/>
+          <p:cNvSpPr/>
+          <p:nvPr/>
+        </p:nvSpPr>
+        <p:spPr>
+          <a:xfrm>
+            <a:off x="11441887" y="4389882"/>
+            <a:ext cx="384048" cy="215646"/>
           </a:xfrm>
           <a:prstGeom prst="rect">
             <a:avLst/>
@@ -16248,7 +17008,7 @@
               <a:buNone/>
             </a:pPr>
             <a:r>
-              <a:rPr lang="ar-SA" altLang="en-US" sz="800" b="1" dirty="0">
+              <a:rPr lang="ar-SA" altLang="en-US" sz="850" b="1" dirty="0">
                 <a:solidFill>
                   <a:srgbClr val="FFFFFF"/>
                 </a:solidFill>
@@ -16256,72 +17016,63 @@
                 <a:ea typeface="Arial" pitchFamily="34" charset="-122"/>
                 <a:cs typeface="Arial" pitchFamily="34" charset="-120"/>
               </a:rPr>
-              <a:t>12 يوم</a:t>
-            </a:r>
-            <a:endParaRPr lang="ar-SA" sz="800" dirty="0"/>
-          </a:p>
-        </p:txBody>
-      </p:sp>
-      <p:sp>
-        <p:nvSpPr>
-          <p:cNvPr id="273" name="Shape 271"/>
-          <p:cNvSpPr/>
-          <p:nvPr/>
-        </p:nvSpPr>
-        <p:spPr>
-          <a:xfrm>
-            <a:off x="365760" y="4991318"/>
-            <a:ext cx="11460175" cy="403642"/>
-          </a:xfrm>
-          <a:prstGeom prst="rect">
-            <a:avLst/>
-          </a:prstGeom>
-          <a:solidFill>
-            <a:srgbClr val="FFFFFF"/>
-          </a:solidFill>
-          <a:ln w="6350">
-            <a:solidFill>
-              <a:srgbClr val="DFE6EA"/>
-            </a:solidFill>
-            <a:prstDash val="solid"/>
-          </a:ln>
-        </p:spPr>
-      </p:sp>
-      <p:sp>
-        <p:nvSpPr>
-          <p:cNvPr id="274" name="Shape 272"/>
-          <p:cNvSpPr/>
-          <p:nvPr/>
-        </p:nvSpPr>
-        <p:spPr>
-          <a:xfrm>
-            <a:off x="11496751" y="5055979"/>
-            <a:ext cx="274320" cy="274320"/>
-          </a:xfrm>
-          <a:prstGeom prst="ellipse">
-            <a:avLst/>
-          </a:prstGeom>
-          <a:solidFill>
-            <a:srgbClr val="D68A00"/>
-          </a:solidFill>
-          <a:ln w="25400">
-            <a:solidFill>
-              <a:srgbClr val="222222"/>
-            </a:solidFill>
-            <a:prstDash val="solid"/>
-          </a:ln>
-        </p:spPr>
-      </p:sp>
-      <p:sp>
-        <p:nvSpPr>
-          <p:cNvPr id="275" name="Text 273"/>
-          <p:cNvSpPr/>
-          <p:nvPr/>
-        </p:nvSpPr>
-        <p:spPr>
-          <a:xfrm>
-            <a:off x="11441887" y="4991318"/>
-            <a:ext cx="384048" cy="403642"/>
+              <a:t>C</a:t>
+            </a:r>
+            <a:endParaRPr lang="ar-SA" sz="850" dirty="0"/>
+          </a:p>
+        </p:txBody>
+      </p:sp>
+      <p:sp>
+        <p:nvSpPr>
+          <p:cNvPr id="295" name="Text 293"/>
+          <p:cNvSpPr/>
+          <p:nvPr/>
+        </p:nvSpPr>
+        <p:spPr>
+          <a:xfrm>
+            <a:off x="8762695" y="4389882"/>
+            <a:ext cx="2606040" cy="215646"/>
+          </a:xfrm>
+          <a:prstGeom prst="rect">
+            <a:avLst/>
+          </a:prstGeom>
+          <a:noFill/>
+          <a:ln/>
+        </p:spPr>
+        <p:txBody>
+          <a:bodyPr wrap="square" lIns="0" tIns="0" rIns="0" bIns="0" rtlCol="0" anchor="ctr">
+            <a:normAutofit/>
+          </a:bodyPr>
+          <a:lstStyle/>
+          <a:p>
+            <a:pPr rtl="1" algn="r" indent="0" marL="0">
+              <a:buNone/>
+            </a:pPr>
+            <a:r>
+              <a:rPr lang="ar-SA" altLang="en-US" sz="750" b="1" dirty="0">
+                <a:solidFill>
+                  <a:srgbClr val="222222"/>
+                </a:solidFill>
+                <a:latin typeface="Arial" pitchFamily="34" charset="0"/>
+                <a:ea typeface="Arial" pitchFamily="34" charset="-122"/>
+                <a:cs typeface="Arial" pitchFamily="34" charset="-120"/>
+              </a:rPr>
+              <a:t>خندق الحفرة – حديد التسليح والشدات والخرسانة</a:t>
+            </a:r>
+            <a:endParaRPr lang="ar-SA" sz="750" dirty="0"/>
+          </a:p>
+        </p:txBody>
+      </p:sp>
+      <p:sp>
+        <p:nvSpPr>
+          <p:cNvPr id="296" name="Text 294"/>
+          <p:cNvSpPr/>
+          <p:nvPr/>
+        </p:nvSpPr>
+        <p:spPr>
+          <a:xfrm>
+            <a:off x="7967167" y="4389882"/>
+            <a:ext cx="777240" cy="215646"/>
           </a:xfrm>
           <a:prstGeom prst="rect">
             <a:avLst/>
@@ -16339,15 +17090,56 @@
               <a:buNone/>
             </a:pPr>
             <a:r>
+              <a:rPr lang="ar-SA" altLang="en-US" sz="700" dirty="0">
+                <a:solidFill>
+                  <a:srgbClr val="444444"/>
+                </a:solidFill>
+                <a:latin typeface="Arial" pitchFamily="34" charset="0"/>
+                <a:ea typeface="Arial" pitchFamily="34" charset="-122"/>
+                <a:cs typeface="Arial" pitchFamily="34" charset="-120"/>
+              </a:rPr>
+              <a:t>A · FS</a:t>
+            </a:r>
+            <a:endParaRPr lang="ar-SA" sz="700" dirty="0"/>
+          </a:p>
+        </p:txBody>
+      </p:sp>
+      <p:sp>
+        <p:nvSpPr>
+          <p:cNvPr id="297" name="Text 295"/>
+          <p:cNvSpPr/>
+          <p:nvPr/>
+        </p:nvSpPr>
+        <p:spPr>
+          <a:xfrm>
+            <a:off x="7464247" y="4389882"/>
+            <a:ext cx="502920" cy="215646"/>
+          </a:xfrm>
+          <a:prstGeom prst="rect">
+            <a:avLst/>
+          </a:prstGeom>
+          <a:noFill/>
+          <a:ln/>
+        </p:spPr>
+        <p:txBody>
+          <a:bodyPr wrap="square" lIns="0" tIns="0" rIns="0" bIns="0" rtlCol="0" anchor="ctr">
+            <a:normAutofit/>
+          </a:bodyPr>
+          <a:lstStyle/>
+          <a:p>
+            <a:pPr rtl="1" algn="ctr" indent="0" marL="0">
+              <a:buNone/>
+            </a:pPr>
+            <a:r>
               <a:rPr lang="ar-SA" altLang="en-US" sz="900" b="1" dirty="0">
                 <a:solidFill>
-                  <a:srgbClr val="FFFFFF"/>
-                </a:solidFill>
-                <a:latin typeface="Arial" pitchFamily="34" charset="0"/>
-                <a:ea typeface="Arial" pitchFamily="34" charset="-122"/>
-                <a:cs typeface="Arial" pitchFamily="34" charset="-120"/>
-              </a:rPr>
-              <a:t>G</a:t>
+                  <a:srgbClr val="222222"/>
+                </a:solidFill>
+                <a:latin typeface="Arial" pitchFamily="34" charset="0"/>
+                <a:ea typeface="Arial" pitchFamily="34" charset="-122"/>
+                <a:cs typeface="Arial" pitchFamily="34" charset="-120"/>
+              </a:rPr>
+              <a:t>4</a:t>
             </a:r>
             <a:endParaRPr lang="ar-SA" sz="900" dirty="0"/>
           </a:p>
@@ -16355,32 +17147,32 @@
       </p:sp>
       <p:sp>
         <p:nvSpPr>
-          <p:cNvPr id="276" name="Text 274"/>
-          <p:cNvSpPr/>
-          <p:nvPr/>
-        </p:nvSpPr>
-        <p:spPr>
-          <a:xfrm>
-            <a:off x="8762695" y="4991318"/>
-            <a:ext cx="2606040" cy="403642"/>
-          </a:xfrm>
-          <a:prstGeom prst="rect">
-            <a:avLst/>
-          </a:prstGeom>
-          <a:noFill/>
-          <a:ln/>
-        </p:spPr>
-        <p:txBody>
-          <a:bodyPr wrap="square" lIns="0" tIns="0" rIns="0" bIns="0" rtlCol="0" anchor="ctr">
-            <a:normAutofit/>
-          </a:bodyPr>
-          <a:lstStyle/>
-          <a:p>
-            <a:pPr rtl="1" algn="r" indent="0" marL="0">
-              <a:buNone/>
-            </a:pPr>
-            <a:r>
-              <a:rPr lang="ar-SA" altLang="en-US" sz="900" dirty="0">
+          <p:cNvPr id="298" name="Text 296"/>
+          <p:cNvSpPr/>
+          <p:nvPr/>
+        </p:nvSpPr>
+        <p:spPr>
+          <a:xfrm>
+            <a:off x="6805879" y="4389882"/>
+            <a:ext cx="658368" cy="215646"/>
+          </a:xfrm>
+          <a:prstGeom prst="rect">
+            <a:avLst/>
+          </a:prstGeom>
+          <a:noFill/>
+          <a:ln/>
+        </p:spPr>
+        <p:txBody>
+          <a:bodyPr wrap="square" lIns="0" tIns="0" rIns="0" bIns="0" rtlCol="0" anchor="ctr">
+            <a:normAutofit/>
+          </a:bodyPr>
+          <a:lstStyle/>
+          <a:p>
+            <a:pPr rtl="1" algn="ctr" indent="0" marL="0">
+              <a:buNone/>
+            </a:pPr>
+            <a:r>
+              <a:rPr lang="ar-SA" altLang="en-US" sz="700" b="1" dirty="0">
                 <a:solidFill>
                   <a:srgbClr val="222222"/>
                 </a:solidFill>
@@ -16388,22 +17180,22 @@
                 <a:ea typeface="Arial" pitchFamily="34" charset="-122"/>
                 <a:cs typeface="Arial" pitchFamily="34" charset="-120"/>
               </a:rPr>
-              <a:t>أعمال الردم للمبنى</a:t>
-            </a:r>
-            <a:endParaRPr lang="ar-SA" sz="900" dirty="0"/>
-          </a:p>
-        </p:txBody>
-      </p:sp>
-      <p:sp>
-        <p:nvSpPr>
-          <p:cNvPr id="277" name="Text 275"/>
-          <p:cNvSpPr/>
-          <p:nvPr/>
-        </p:nvSpPr>
-        <p:spPr>
-          <a:xfrm>
-            <a:off x="7967167" y="4991318"/>
-            <a:ext cx="777240" cy="403642"/>
+              <a:t>20 أكتوبر</a:t>
+            </a:r>
+            <a:endParaRPr lang="ar-SA" sz="700" dirty="0"/>
+          </a:p>
+        </p:txBody>
+      </p:sp>
+      <p:sp>
+        <p:nvSpPr>
+          <p:cNvPr id="299" name="Text 297"/>
+          <p:cNvSpPr/>
+          <p:nvPr/>
+        </p:nvSpPr>
+        <p:spPr>
+          <a:xfrm>
+            <a:off x="6147511" y="4389882"/>
+            <a:ext cx="658368" cy="215646"/>
           </a:xfrm>
           <a:prstGeom prst="rect">
             <a:avLst/>
@@ -16421,48 +17213,7 @@
               <a:buNone/>
             </a:pPr>
             <a:r>
-              <a:rPr lang="ar-SA" altLang="en-US" sz="850" dirty="0">
-                <a:solidFill>
-                  <a:srgbClr val="444444"/>
-                </a:solidFill>
-                <a:latin typeface="Arial" pitchFamily="34" charset="0"/>
-                <a:ea typeface="Arial" pitchFamily="34" charset="-122"/>
-                <a:cs typeface="Arial" pitchFamily="34" charset="-120"/>
-              </a:rPr>
-              <a:t>F · FS</a:t>
-            </a:r>
-            <a:endParaRPr lang="ar-SA" sz="850" dirty="0"/>
-          </a:p>
-        </p:txBody>
-      </p:sp>
-      <p:sp>
-        <p:nvSpPr>
-          <p:cNvPr id="278" name="Text 276"/>
-          <p:cNvSpPr/>
-          <p:nvPr/>
-        </p:nvSpPr>
-        <p:spPr>
-          <a:xfrm>
-            <a:off x="7464247" y="4991318"/>
-            <a:ext cx="502920" cy="403642"/>
-          </a:xfrm>
-          <a:prstGeom prst="rect">
-            <a:avLst/>
-          </a:prstGeom>
-          <a:noFill/>
-          <a:ln/>
-        </p:spPr>
-        <p:txBody>
-          <a:bodyPr wrap="square" lIns="0" tIns="0" rIns="0" bIns="0" rtlCol="0" anchor="ctr">
-            <a:normAutofit/>
-          </a:bodyPr>
-          <a:lstStyle/>
-          <a:p>
-            <a:pPr rtl="1" algn="ctr" indent="0" marL="0">
-              <a:buNone/>
-            </a:pPr>
-            <a:r>
-              <a:rPr lang="ar-SA" altLang="en-US" sz="1100" b="1" dirty="0">
+              <a:rPr lang="ar-SA" altLang="en-US" sz="700" b="1" dirty="0">
                 <a:solidFill>
                   <a:srgbClr val="222222"/>
                 </a:solidFill>
@@ -16470,114 +17221,32 @@
                 <a:ea typeface="Arial" pitchFamily="34" charset="-122"/>
                 <a:cs typeface="Arial" pitchFamily="34" charset="-120"/>
               </a:rPr>
-              <a:t>5</a:t>
-            </a:r>
-            <a:endParaRPr lang="ar-SA" sz="1100" dirty="0"/>
-          </a:p>
-        </p:txBody>
-      </p:sp>
-      <p:sp>
-        <p:nvSpPr>
-          <p:cNvPr id="279" name="Text 277"/>
-          <p:cNvSpPr/>
-          <p:nvPr/>
-        </p:nvSpPr>
-        <p:spPr>
-          <a:xfrm>
-            <a:off x="6805879" y="4991318"/>
-            <a:ext cx="658368" cy="403642"/>
-          </a:xfrm>
-          <a:prstGeom prst="rect">
-            <a:avLst/>
-          </a:prstGeom>
-          <a:noFill/>
-          <a:ln/>
-        </p:spPr>
-        <p:txBody>
-          <a:bodyPr wrap="square" lIns="0" tIns="0" rIns="0" bIns="0" rtlCol="0" anchor="ctr">
-            <a:normAutofit/>
-          </a:bodyPr>
-          <a:lstStyle/>
-          <a:p>
-            <a:pPr rtl="1" algn="ctr" indent="0" marL="0">
-              <a:buNone/>
-            </a:pPr>
-            <a:r>
-              <a:rPr lang="ar-SA" altLang="en-US" sz="850" b="1" dirty="0">
-                <a:solidFill>
-                  <a:srgbClr val="222222"/>
-                </a:solidFill>
-                <a:latin typeface="Arial" pitchFamily="34" charset="0"/>
-                <a:ea typeface="Arial" pitchFamily="34" charset="-122"/>
-                <a:cs typeface="Arial" pitchFamily="34" charset="-120"/>
-              </a:rPr>
-              <a:t>19 نوفمبر</a:t>
-            </a:r>
-            <a:endParaRPr lang="ar-SA" sz="850" dirty="0"/>
-          </a:p>
-        </p:txBody>
-      </p:sp>
-      <p:sp>
-        <p:nvSpPr>
-          <p:cNvPr id="280" name="Text 278"/>
-          <p:cNvSpPr/>
-          <p:nvPr/>
-        </p:nvSpPr>
-        <p:spPr>
-          <a:xfrm>
-            <a:off x="6147511" y="4991318"/>
-            <a:ext cx="658368" cy="403642"/>
-          </a:xfrm>
-          <a:prstGeom prst="rect">
-            <a:avLst/>
-          </a:prstGeom>
-          <a:noFill/>
-          <a:ln/>
-        </p:spPr>
-        <p:txBody>
-          <a:bodyPr wrap="square" lIns="0" tIns="0" rIns="0" bIns="0" rtlCol="0" anchor="ctr">
-            <a:normAutofit/>
-          </a:bodyPr>
-          <a:lstStyle/>
-          <a:p>
-            <a:pPr rtl="1" algn="ctr" indent="0" marL="0">
-              <a:buNone/>
-            </a:pPr>
-            <a:r>
-              <a:rPr lang="ar-SA" altLang="en-US" sz="850" b="1" dirty="0">
-                <a:solidFill>
-                  <a:srgbClr val="222222"/>
-                </a:solidFill>
-                <a:latin typeface="Arial" pitchFamily="34" charset="0"/>
-                <a:ea typeface="Arial" pitchFamily="34" charset="-122"/>
-                <a:cs typeface="Arial" pitchFamily="34" charset="-120"/>
-              </a:rPr>
-              <a:t>24 نوفمبر</a:t>
-            </a:r>
-            <a:endParaRPr lang="ar-SA" sz="850" dirty="0"/>
-          </a:p>
-        </p:txBody>
-      </p:sp>
-      <p:sp>
-        <p:nvSpPr>
-          <p:cNvPr id="281" name="Shape 279"/>
-          <p:cNvSpPr/>
-          <p:nvPr/>
-        </p:nvSpPr>
-        <p:spPr>
-          <a:xfrm>
-            <a:off x="606666" y="5082137"/>
-            <a:ext cx="722719" cy="222003"/>
+              <a:t>24 أكتوبر</a:t>
+            </a:r>
+            <a:endParaRPr lang="ar-SA" sz="700" dirty="0"/>
+          </a:p>
+        </p:txBody>
+      </p:sp>
+      <p:sp>
+        <p:nvSpPr>
+          <p:cNvPr id="300" name="Shape 298"/>
+          <p:cNvSpPr/>
+          <p:nvPr/>
+        </p:nvSpPr>
+        <p:spPr>
+          <a:xfrm>
+            <a:off x="4340714" y="4435168"/>
+            <a:ext cx="602266" cy="125075"/>
           </a:xfrm>
           <a:prstGeom prst="roundRect">
             <a:avLst>
-              <a:gd name="adj" fmla="val 20594"/>
+              <a:gd name="adj" fmla="val 29243"/>
             </a:avLst>
           </a:prstGeom>
           <a:solidFill>
-            <a:srgbClr val="D68A00"/>
-          </a:solidFill>
-          <a:ln w="22225">
+            <a:srgbClr val="00778B"/>
+          </a:solidFill>
+          <a:ln w="19050">
             <a:solidFill>
               <a:srgbClr val="222222"/>
             </a:solidFill>
@@ -16594,14 +17263,14 @@
       </p:sp>
       <p:sp>
         <p:nvSpPr>
-          <p:cNvPr id="282" name="Text 280"/>
-          <p:cNvSpPr/>
-          <p:nvPr/>
-        </p:nvSpPr>
-        <p:spPr>
-          <a:xfrm>
-            <a:off x="606666" y="5082137"/>
-            <a:ext cx="722719" cy="222003"/>
+          <p:cNvPr id="301" name="Text 299"/>
+          <p:cNvSpPr/>
+          <p:nvPr/>
+        </p:nvSpPr>
+        <p:spPr>
+          <a:xfrm>
+            <a:off x="4340714" y="4435168"/>
+            <a:ext cx="602266" cy="125075"/>
           </a:xfrm>
           <a:prstGeom prst="rect">
             <a:avLst/>
@@ -16619,7 +17288,7 @@
               <a:buNone/>
             </a:pPr>
             <a:r>
-              <a:rPr lang="ar-SA" altLang="en-US" sz="800" b="1" dirty="0">
+              <a:rPr lang="ar-SA" altLang="en-US" sz="700" b="1" dirty="0">
                 <a:solidFill>
                   <a:srgbClr val="FFFFFF"/>
                 </a:solidFill>
@@ -16627,22 +17296,1514 @@
                 <a:ea typeface="Arial" pitchFamily="34" charset="-122"/>
                 <a:cs typeface="Arial" pitchFamily="34" charset="-120"/>
               </a:rPr>
+              <a:t>4 يوم</a:t>
+            </a:r>
+            <a:endParaRPr lang="ar-SA" sz="700" dirty="0"/>
+          </a:p>
+        </p:txBody>
+      </p:sp>
+      <p:sp>
+        <p:nvSpPr>
+          <p:cNvPr id="302" name="Shape 300"/>
+          <p:cNvSpPr/>
+          <p:nvPr/>
+        </p:nvSpPr>
+        <p:spPr>
+          <a:xfrm>
+            <a:off x="365760" y="4605528"/>
+            <a:ext cx="11460175" cy="215646"/>
+          </a:xfrm>
+          <a:prstGeom prst="rect">
+            <a:avLst/>
+          </a:prstGeom>
+          <a:solidFill>
+            <a:srgbClr val="FFFFFF"/>
+          </a:solidFill>
+          <a:ln w="6350">
+            <a:solidFill>
+              <a:srgbClr val="DFE6EA"/>
+            </a:solidFill>
+            <a:prstDash val="solid"/>
+          </a:ln>
+        </p:spPr>
+      </p:sp>
+      <p:sp>
+        <p:nvSpPr>
+          <p:cNvPr id="303" name="Shape 301"/>
+          <p:cNvSpPr/>
+          <p:nvPr/>
+        </p:nvSpPr>
+        <p:spPr>
+          <a:xfrm>
+            <a:off x="11515039" y="4594479"/>
+            <a:ext cx="237744" cy="237744"/>
+          </a:xfrm>
+          <a:prstGeom prst="ellipse">
+            <a:avLst>
+              <a:gd name="adj" fmla="val 32692"/>
+            </a:avLst>
+          </a:prstGeom>
+          <a:solidFill>
+            <a:srgbClr val="00778B"/>
+          </a:solidFill>
+          <a:ln w="19050">
+            <a:solidFill>
+              <a:srgbClr val="222222"/>
+            </a:solidFill>
+            <a:prstDash val="solid"/>
+          </a:ln>
+        </p:spPr>
+      </p:sp>
+      <p:sp>
+        <p:nvSpPr>
+          <p:cNvPr id="304" name="Text 302"/>
+          <p:cNvSpPr/>
+          <p:nvPr/>
+        </p:nvSpPr>
+        <p:spPr>
+          <a:xfrm>
+            <a:off x="11441887" y="4605528"/>
+            <a:ext cx="384048" cy="215646"/>
+          </a:xfrm>
+          <a:prstGeom prst="rect">
+            <a:avLst/>
+          </a:prstGeom>
+          <a:noFill/>
+          <a:ln/>
+        </p:spPr>
+        <p:txBody>
+          <a:bodyPr wrap="square" lIns="0" tIns="0" rIns="0" bIns="0" rtlCol="0" anchor="ctr">
+            <a:normAutofit/>
+          </a:bodyPr>
+          <a:lstStyle/>
+          <a:p>
+            <a:pPr rtl="1" algn="ctr" indent="0" marL="0">
+              <a:buNone/>
+            </a:pPr>
+            <a:r>
+              <a:rPr lang="ar-SA" altLang="en-US" sz="850" b="1" dirty="0">
+                <a:solidFill>
+                  <a:srgbClr val="FFFFFF"/>
+                </a:solidFill>
+                <a:latin typeface="Arial" pitchFamily="34" charset="0"/>
+                <a:ea typeface="Arial" pitchFamily="34" charset="-122"/>
+                <a:cs typeface="Arial" pitchFamily="34" charset="-120"/>
+              </a:rPr>
+              <a:t>D</a:t>
+            </a:r>
+            <a:endParaRPr lang="ar-SA" sz="850" dirty="0"/>
+          </a:p>
+        </p:txBody>
+      </p:sp>
+      <p:sp>
+        <p:nvSpPr>
+          <p:cNvPr id="305" name="Text 303"/>
+          <p:cNvSpPr/>
+          <p:nvPr/>
+        </p:nvSpPr>
+        <p:spPr>
+          <a:xfrm>
+            <a:off x="8762695" y="4605528"/>
+            <a:ext cx="2606040" cy="215646"/>
+          </a:xfrm>
+          <a:prstGeom prst="rect">
+            <a:avLst/>
+          </a:prstGeom>
+          <a:noFill/>
+          <a:ln/>
+        </p:spPr>
+        <p:txBody>
+          <a:bodyPr wrap="square" lIns="0" tIns="0" rIns="0" bIns="0" rtlCol="0" anchor="ctr">
+            <a:normAutofit/>
+          </a:bodyPr>
+          <a:lstStyle/>
+          <a:p>
+            <a:pPr rtl="1" algn="r" indent="0" marL="0">
+              <a:buNone/>
+            </a:pPr>
+            <a:r>
+              <a:rPr lang="ar-SA" altLang="en-US" sz="750" b="1" dirty="0">
+                <a:solidFill>
+                  <a:srgbClr val="222222"/>
+                </a:solidFill>
+                <a:latin typeface="Arial" pitchFamily="34" charset="0"/>
+                <a:ea typeface="Arial" pitchFamily="34" charset="-122"/>
+                <a:cs typeface="Arial" pitchFamily="34" charset="-120"/>
+              </a:rPr>
+              <a:t>بلاطة / لبشة الحفرة – حديد التسليح والشدات والخرسانة</a:t>
+            </a:r>
+            <a:endParaRPr lang="ar-SA" sz="750" dirty="0"/>
+          </a:p>
+        </p:txBody>
+      </p:sp>
+      <p:sp>
+        <p:nvSpPr>
+          <p:cNvPr id="306" name="Text 304"/>
+          <p:cNvSpPr/>
+          <p:nvPr/>
+        </p:nvSpPr>
+        <p:spPr>
+          <a:xfrm>
+            <a:off x="7967167" y="4605528"/>
+            <a:ext cx="777240" cy="215646"/>
+          </a:xfrm>
+          <a:prstGeom prst="rect">
+            <a:avLst/>
+          </a:prstGeom>
+          <a:noFill/>
+          <a:ln/>
+        </p:spPr>
+        <p:txBody>
+          <a:bodyPr wrap="square" lIns="0" tIns="0" rIns="0" bIns="0" rtlCol="0" anchor="ctr">
+            <a:normAutofit/>
+          </a:bodyPr>
+          <a:lstStyle/>
+          <a:p>
+            <a:pPr rtl="1" algn="ctr" indent="0" marL="0">
+              <a:buNone/>
+            </a:pPr>
+            <a:r>
+              <a:rPr lang="ar-SA" altLang="en-US" sz="700" dirty="0">
+                <a:solidFill>
+                  <a:srgbClr val="444444"/>
+                </a:solidFill>
+                <a:latin typeface="Arial" pitchFamily="34" charset="0"/>
+                <a:ea typeface="Arial" pitchFamily="34" charset="-122"/>
+                <a:cs typeface="Arial" pitchFamily="34" charset="-120"/>
+              </a:rPr>
+              <a:t>C · FS</a:t>
+            </a:r>
+            <a:endParaRPr lang="ar-SA" sz="700" dirty="0"/>
+          </a:p>
+        </p:txBody>
+      </p:sp>
+      <p:sp>
+        <p:nvSpPr>
+          <p:cNvPr id="307" name="Text 305"/>
+          <p:cNvSpPr/>
+          <p:nvPr/>
+        </p:nvSpPr>
+        <p:spPr>
+          <a:xfrm>
+            <a:off x="7464247" y="4605528"/>
+            <a:ext cx="502920" cy="215646"/>
+          </a:xfrm>
+          <a:prstGeom prst="rect">
+            <a:avLst/>
+          </a:prstGeom>
+          <a:noFill/>
+          <a:ln/>
+        </p:spPr>
+        <p:txBody>
+          <a:bodyPr wrap="square" lIns="0" tIns="0" rIns="0" bIns="0" rtlCol="0" anchor="ctr">
+            <a:normAutofit/>
+          </a:bodyPr>
+          <a:lstStyle/>
+          <a:p>
+            <a:pPr rtl="1" algn="ctr" indent="0" marL="0">
+              <a:buNone/>
+            </a:pPr>
+            <a:r>
+              <a:rPr lang="ar-SA" altLang="en-US" sz="900" b="1" dirty="0">
+                <a:solidFill>
+                  <a:srgbClr val="222222"/>
+                </a:solidFill>
+                <a:latin typeface="Arial" pitchFamily="34" charset="0"/>
+                <a:ea typeface="Arial" pitchFamily="34" charset="-122"/>
+                <a:cs typeface="Arial" pitchFamily="34" charset="-120"/>
+              </a:rPr>
+              <a:t>10</a:t>
+            </a:r>
+            <a:endParaRPr lang="ar-SA" sz="900" dirty="0"/>
+          </a:p>
+        </p:txBody>
+      </p:sp>
+      <p:sp>
+        <p:nvSpPr>
+          <p:cNvPr id="308" name="Text 306"/>
+          <p:cNvSpPr/>
+          <p:nvPr/>
+        </p:nvSpPr>
+        <p:spPr>
+          <a:xfrm>
+            <a:off x="6805879" y="4605528"/>
+            <a:ext cx="658368" cy="215646"/>
+          </a:xfrm>
+          <a:prstGeom prst="rect">
+            <a:avLst/>
+          </a:prstGeom>
+          <a:noFill/>
+          <a:ln/>
+        </p:spPr>
+        <p:txBody>
+          <a:bodyPr wrap="square" lIns="0" tIns="0" rIns="0" bIns="0" rtlCol="0" anchor="ctr">
+            <a:normAutofit/>
+          </a:bodyPr>
+          <a:lstStyle/>
+          <a:p>
+            <a:pPr rtl="1" algn="ctr" indent="0" marL="0">
+              <a:buNone/>
+            </a:pPr>
+            <a:r>
+              <a:rPr lang="ar-SA" altLang="en-US" sz="700" b="1" dirty="0">
+                <a:solidFill>
+                  <a:srgbClr val="222222"/>
+                </a:solidFill>
+                <a:latin typeface="Arial" pitchFamily="34" charset="0"/>
+                <a:ea typeface="Arial" pitchFamily="34" charset="-122"/>
+                <a:cs typeface="Arial" pitchFamily="34" charset="-120"/>
+              </a:rPr>
+              <a:t>25 أكتوبر</a:t>
+            </a:r>
+            <a:endParaRPr lang="ar-SA" sz="700" dirty="0"/>
+          </a:p>
+        </p:txBody>
+      </p:sp>
+      <p:sp>
+        <p:nvSpPr>
+          <p:cNvPr id="309" name="Text 307"/>
+          <p:cNvSpPr/>
+          <p:nvPr/>
+        </p:nvSpPr>
+        <p:spPr>
+          <a:xfrm>
+            <a:off x="6147511" y="4605528"/>
+            <a:ext cx="658368" cy="215646"/>
+          </a:xfrm>
+          <a:prstGeom prst="rect">
+            <a:avLst/>
+          </a:prstGeom>
+          <a:noFill/>
+          <a:ln/>
+        </p:spPr>
+        <p:txBody>
+          <a:bodyPr wrap="square" lIns="0" tIns="0" rIns="0" bIns="0" rtlCol="0" anchor="ctr">
+            <a:normAutofit/>
+          </a:bodyPr>
+          <a:lstStyle/>
+          <a:p>
+            <a:pPr rtl="1" algn="ctr" indent="0" marL="0">
+              <a:buNone/>
+            </a:pPr>
+            <a:r>
+              <a:rPr lang="ar-SA" altLang="en-US" sz="700" b="1" dirty="0">
+                <a:solidFill>
+                  <a:srgbClr val="222222"/>
+                </a:solidFill>
+                <a:latin typeface="Arial" pitchFamily="34" charset="0"/>
+                <a:ea typeface="Arial" pitchFamily="34" charset="-122"/>
+                <a:cs typeface="Arial" pitchFamily="34" charset="-120"/>
+              </a:rPr>
+              <a:t>4 نوفمبر</a:t>
+            </a:r>
+            <a:endParaRPr lang="ar-SA" sz="700" dirty="0"/>
+          </a:p>
+        </p:txBody>
+      </p:sp>
+      <p:sp>
+        <p:nvSpPr>
+          <p:cNvPr id="310" name="Shape 308"/>
+          <p:cNvSpPr/>
+          <p:nvPr/>
+        </p:nvSpPr>
+        <p:spPr>
+          <a:xfrm>
+            <a:off x="3015729" y="4650814"/>
+            <a:ext cx="1324985" cy="125075"/>
+          </a:xfrm>
+          <a:prstGeom prst="roundRect">
+            <a:avLst>
+              <a:gd name="adj" fmla="val 29243"/>
+            </a:avLst>
+          </a:prstGeom>
+          <a:solidFill>
+            <a:srgbClr val="00778B"/>
+          </a:solidFill>
+          <a:ln w="19050">
+            <a:solidFill>
+              <a:srgbClr val="222222"/>
+            </a:solidFill>
+            <a:prstDash val="solid"/>
+          </a:ln>
+          <a:effectLst>
+            <a:outerShdw sx="100000" sy="100000" kx="0" ky="0" algn="bl" rotWithShape="0" blurRad="38100" dist="12700" dir="5400000">
+              <a:srgbClr val="000000">
+                <a:alpha val="20000"/>
+              </a:srgbClr>
+            </a:outerShdw>
+          </a:effectLst>
+        </p:spPr>
+      </p:sp>
+      <p:sp>
+        <p:nvSpPr>
+          <p:cNvPr id="311" name="Text 309"/>
+          <p:cNvSpPr/>
+          <p:nvPr/>
+        </p:nvSpPr>
+        <p:spPr>
+          <a:xfrm>
+            <a:off x="3015729" y="4650814"/>
+            <a:ext cx="1324985" cy="125075"/>
+          </a:xfrm>
+          <a:prstGeom prst="rect">
+            <a:avLst/>
+          </a:prstGeom>
+          <a:noFill/>
+          <a:ln/>
+        </p:spPr>
+        <p:txBody>
+          <a:bodyPr wrap="square" lIns="0" tIns="0" rIns="0" bIns="0" rtlCol="0" anchor="ctr">
+            <a:normAutofit/>
+          </a:bodyPr>
+          <a:lstStyle/>
+          <a:p>
+            <a:pPr rtl="1" algn="ctr" indent="0" marL="0">
+              <a:buNone/>
+            </a:pPr>
+            <a:r>
+              <a:rPr lang="ar-SA" altLang="en-US" sz="700" b="1" dirty="0">
+                <a:solidFill>
+                  <a:srgbClr val="FFFFFF"/>
+                </a:solidFill>
+                <a:latin typeface="Arial" pitchFamily="34" charset="0"/>
+                <a:ea typeface="Arial" pitchFamily="34" charset="-122"/>
+                <a:cs typeface="Arial" pitchFamily="34" charset="-120"/>
+              </a:rPr>
+              <a:t>10 يوم</a:t>
+            </a:r>
+            <a:endParaRPr lang="ar-SA" sz="700" dirty="0"/>
+          </a:p>
+        </p:txBody>
+      </p:sp>
+      <p:sp>
+        <p:nvSpPr>
+          <p:cNvPr id="312" name="Shape 310"/>
+          <p:cNvSpPr/>
+          <p:nvPr/>
+        </p:nvSpPr>
+        <p:spPr>
+          <a:xfrm>
+            <a:off x="365760" y="4821174"/>
+            <a:ext cx="11460175" cy="215646"/>
+          </a:xfrm>
+          <a:prstGeom prst="rect">
+            <a:avLst/>
+          </a:prstGeom>
+          <a:solidFill>
+            <a:srgbClr val="F6F9FA"/>
+          </a:solidFill>
+          <a:ln w="6350">
+            <a:solidFill>
+              <a:srgbClr val="DFE6EA"/>
+            </a:solidFill>
+            <a:prstDash val="solid"/>
+          </a:ln>
+        </p:spPr>
+      </p:sp>
+      <p:sp>
+        <p:nvSpPr>
+          <p:cNvPr id="313" name="Shape 311"/>
+          <p:cNvSpPr/>
+          <p:nvPr/>
+        </p:nvSpPr>
+        <p:spPr>
+          <a:xfrm>
+            <a:off x="11515039" y="4810125"/>
+            <a:ext cx="237744" cy="237744"/>
+          </a:xfrm>
+          <a:prstGeom prst="ellipse">
+            <a:avLst>
+              <a:gd name="adj" fmla="val 32692"/>
+            </a:avLst>
+          </a:prstGeom>
+          <a:solidFill>
+            <a:srgbClr val="00778B"/>
+          </a:solidFill>
+          <a:ln w="6350">
+            <a:solidFill>
+              <a:srgbClr val="00778B"/>
+            </a:solidFill>
+            <a:prstDash val="solid"/>
+          </a:ln>
+        </p:spPr>
+      </p:sp>
+      <p:sp>
+        <p:nvSpPr>
+          <p:cNvPr id="314" name="Text 312"/>
+          <p:cNvSpPr/>
+          <p:nvPr/>
+        </p:nvSpPr>
+        <p:spPr>
+          <a:xfrm>
+            <a:off x="11441887" y="4821174"/>
+            <a:ext cx="384048" cy="215646"/>
+          </a:xfrm>
+          <a:prstGeom prst="rect">
+            <a:avLst/>
+          </a:prstGeom>
+          <a:noFill/>
+          <a:ln/>
+        </p:spPr>
+        <p:txBody>
+          <a:bodyPr wrap="square" lIns="0" tIns="0" rIns="0" bIns="0" rtlCol="0" anchor="ctr">
+            <a:normAutofit/>
+          </a:bodyPr>
+          <a:lstStyle/>
+          <a:p>
+            <a:pPr rtl="1" algn="ctr" indent="0" marL="0">
+              <a:buNone/>
+            </a:pPr>
+            <a:r>
+              <a:rPr lang="ar-SA" altLang="en-US" sz="850" b="1" dirty="0">
+                <a:solidFill>
+                  <a:srgbClr val="FFFFFF"/>
+                </a:solidFill>
+                <a:latin typeface="Arial" pitchFamily="34" charset="0"/>
+                <a:ea typeface="Arial" pitchFamily="34" charset="-122"/>
+                <a:cs typeface="Arial" pitchFamily="34" charset="-120"/>
+              </a:rPr>
+              <a:t>E</a:t>
+            </a:r>
+            <a:endParaRPr lang="ar-SA" sz="850" dirty="0"/>
+          </a:p>
+        </p:txBody>
+      </p:sp>
+      <p:sp>
+        <p:nvSpPr>
+          <p:cNvPr id="315" name="Text 313"/>
+          <p:cNvSpPr/>
+          <p:nvPr/>
+        </p:nvSpPr>
+        <p:spPr>
+          <a:xfrm>
+            <a:off x="8762695" y="4821174"/>
+            <a:ext cx="2606040" cy="215646"/>
+          </a:xfrm>
+          <a:prstGeom prst="rect">
+            <a:avLst/>
+          </a:prstGeom>
+          <a:noFill/>
+          <a:ln/>
+        </p:spPr>
+        <p:txBody>
+          <a:bodyPr wrap="square" lIns="0" tIns="0" rIns="0" bIns="0" rtlCol="0" anchor="ctr">
+            <a:normAutofit/>
+          </a:bodyPr>
+          <a:lstStyle/>
+          <a:p>
+            <a:pPr rtl="1" algn="r" indent="0" marL="0">
+              <a:buNone/>
+            </a:pPr>
+            <a:r>
+              <a:rPr lang="ar-SA" altLang="en-US" sz="750" b="1" dirty="0">
+                <a:solidFill>
+                  <a:srgbClr val="222222"/>
+                </a:solidFill>
+                <a:latin typeface="Arial" pitchFamily="34" charset="0"/>
+                <a:ea typeface="Arial" pitchFamily="34" charset="-122"/>
+                <a:cs typeface="Arial" pitchFamily="34" charset="-120"/>
+              </a:rPr>
+              <a:t>جدار الحفرة – حديد التسليح والشدات والخرسانة</a:t>
+            </a:r>
+            <a:endParaRPr lang="ar-SA" sz="750" dirty="0"/>
+          </a:p>
+        </p:txBody>
+      </p:sp>
+      <p:sp>
+        <p:nvSpPr>
+          <p:cNvPr id="316" name="Text 314"/>
+          <p:cNvSpPr/>
+          <p:nvPr/>
+        </p:nvSpPr>
+        <p:spPr>
+          <a:xfrm>
+            <a:off x="7967167" y="4821174"/>
+            <a:ext cx="777240" cy="215646"/>
+          </a:xfrm>
+          <a:prstGeom prst="rect">
+            <a:avLst/>
+          </a:prstGeom>
+          <a:noFill/>
+          <a:ln/>
+        </p:spPr>
+        <p:txBody>
+          <a:bodyPr wrap="square" lIns="0" tIns="0" rIns="0" bIns="0" rtlCol="0" anchor="ctr">
+            <a:normAutofit/>
+          </a:bodyPr>
+          <a:lstStyle/>
+          <a:p>
+            <a:pPr rtl="1" algn="ctr" indent="0" marL="0">
+              <a:buNone/>
+            </a:pPr>
+            <a:r>
+              <a:rPr lang="ar-SA" altLang="en-US" sz="700" dirty="0">
+                <a:solidFill>
+                  <a:srgbClr val="444444"/>
+                </a:solidFill>
+                <a:latin typeface="Arial" pitchFamily="34" charset="0"/>
+                <a:ea typeface="Arial" pitchFamily="34" charset="-122"/>
+                <a:cs typeface="Arial" pitchFamily="34" charset="-120"/>
+              </a:rPr>
+              <a:t>D · FS</a:t>
+            </a:r>
+            <a:endParaRPr lang="ar-SA" sz="700" dirty="0"/>
+          </a:p>
+        </p:txBody>
+      </p:sp>
+      <p:sp>
+        <p:nvSpPr>
+          <p:cNvPr id="317" name="Text 315"/>
+          <p:cNvSpPr/>
+          <p:nvPr/>
+        </p:nvSpPr>
+        <p:spPr>
+          <a:xfrm>
+            <a:off x="7464247" y="4821174"/>
+            <a:ext cx="502920" cy="215646"/>
+          </a:xfrm>
+          <a:prstGeom prst="rect">
+            <a:avLst/>
+          </a:prstGeom>
+          <a:noFill/>
+          <a:ln/>
+        </p:spPr>
+        <p:txBody>
+          <a:bodyPr wrap="square" lIns="0" tIns="0" rIns="0" bIns="0" rtlCol="0" anchor="ctr">
+            <a:normAutofit/>
+          </a:bodyPr>
+          <a:lstStyle/>
+          <a:p>
+            <a:pPr rtl="1" algn="ctr" indent="0" marL="0">
+              <a:buNone/>
+            </a:pPr>
+            <a:r>
+              <a:rPr lang="ar-SA" altLang="en-US" sz="900" b="1" dirty="0">
+                <a:solidFill>
+                  <a:srgbClr val="222222"/>
+                </a:solidFill>
+                <a:latin typeface="Arial" pitchFamily="34" charset="0"/>
+                <a:ea typeface="Arial" pitchFamily="34" charset="-122"/>
+                <a:cs typeface="Arial" pitchFamily="34" charset="-120"/>
+              </a:rPr>
+              <a:t>6</a:t>
+            </a:r>
+            <a:endParaRPr lang="ar-SA" sz="900" dirty="0"/>
+          </a:p>
+        </p:txBody>
+      </p:sp>
+      <p:sp>
+        <p:nvSpPr>
+          <p:cNvPr id="318" name="Text 316"/>
+          <p:cNvSpPr/>
+          <p:nvPr/>
+        </p:nvSpPr>
+        <p:spPr>
+          <a:xfrm>
+            <a:off x="6805879" y="4821174"/>
+            <a:ext cx="658368" cy="215646"/>
+          </a:xfrm>
+          <a:prstGeom prst="rect">
+            <a:avLst/>
+          </a:prstGeom>
+          <a:noFill/>
+          <a:ln/>
+        </p:spPr>
+        <p:txBody>
+          <a:bodyPr wrap="square" lIns="0" tIns="0" rIns="0" bIns="0" rtlCol="0" anchor="ctr">
+            <a:normAutofit/>
+          </a:bodyPr>
+          <a:lstStyle/>
+          <a:p>
+            <a:pPr rtl="1" algn="ctr" indent="0" marL="0">
+              <a:buNone/>
+            </a:pPr>
+            <a:r>
+              <a:rPr lang="ar-SA" altLang="en-US" sz="700" b="1" dirty="0">
+                <a:solidFill>
+                  <a:srgbClr val="222222"/>
+                </a:solidFill>
+                <a:latin typeface="Arial" pitchFamily="34" charset="0"/>
+                <a:ea typeface="Arial" pitchFamily="34" charset="-122"/>
+                <a:cs typeface="Arial" pitchFamily="34" charset="-120"/>
+              </a:rPr>
+              <a:t>5 نوفمبر</a:t>
+            </a:r>
+            <a:endParaRPr lang="ar-SA" sz="700" dirty="0"/>
+          </a:p>
+        </p:txBody>
+      </p:sp>
+      <p:sp>
+        <p:nvSpPr>
+          <p:cNvPr id="319" name="Text 317"/>
+          <p:cNvSpPr/>
+          <p:nvPr/>
+        </p:nvSpPr>
+        <p:spPr>
+          <a:xfrm>
+            <a:off x="6147511" y="4821174"/>
+            <a:ext cx="658368" cy="215646"/>
+          </a:xfrm>
+          <a:prstGeom prst="rect">
+            <a:avLst/>
+          </a:prstGeom>
+          <a:noFill/>
+          <a:ln/>
+        </p:spPr>
+        <p:txBody>
+          <a:bodyPr wrap="square" lIns="0" tIns="0" rIns="0" bIns="0" rtlCol="0" anchor="ctr">
+            <a:normAutofit/>
+          </a:bodyPr>
+          <a:lstStyle/>
+          <a:p>
+            <a:pPr rtl="1" algn="ctr" indent="0" marL="0">
+              <a:buNone/>
+            </a:pPr>
+            <a:r>
+              <a:rPr lang="ar-SA" altLang="en-US" sz="700" b="1" dirty="0">
+                <a:solidFill>
+                  <a:srgbClr val="222222"/>
+                </a:solidFill>
+                <a:latin typeface="Arial" pitchFamily="34" charset="0"/>
+                <a:ea typeface="Arial" pitchFamily="34" charset="-122"/>
+                <a:cs typeface="Arial" pitchFamily="34" charset="-120"/>
+              </a:rPr>
+              <a:t>11 نوفمبر</a:t>
+            </a:r>
+            <a:endParaRPr lang="ar-SA" sz="700" dirty="0"/>
+          </a:p>
+        </p:txBody>
+      </p:sp>
+      <p:sp>
+        <p:nvSpPr>
+          <p:cNvPr id="320" name="Shape 318"/>
+          <p:cNvSpPr/>
+          <p:nvPr/>
+        </p:nvSpPr>
+        <p:spPr>
+          <a:xfrm>
+            <a:off x="2172557" y="4866460"/>
+            <a:ext cx="843172" cy="125075"/>
+          </a:xfrm>
+          <a:prstGeom prst="roundRect">
+            <a:avLst>
+              <a:gd name="adj" fmla="val 29243"/>
+            </a:avLst>
+          </a:prstGeom>
+          <a:solidFill>
+            <a:srgbClr val="00778B"/>
+          </a:solidFill>
+          <a:ln w="6350">
+            <a:solidFill>
+              <a:srgbClr val="00778B"/>
+            </a:solidFill>
+            <a:prstDash val="solid"/>
+          </a:ln>
+          <a:effectLst>
+            <a:outerShdw sx="100000" sy="100000" kx="0" ky="0" algn="bl" rotWithShape="0" blurRad="38100" dist="12700" dir="5400000">
+              <a:srgbClr val="000000">
+                <a:alpha val="20000"/>
+              </a:srgbClr>
+            </a:outerShdw>
+          </a:effectLst>
+        </p:spPr>
+      </p:sp>
+      <p:sp>
+        <p:nvSpPr>
+          <p:cNvPr id="321" name="Text 319"/>
+          <p:cNvSpPr/>
+          <p:nvPr/>
+        </p:nvSpPr>
+        <p:spPr>
+          <a:xfrm>
+            <a:off x="2172557" y="4866460"/>
+            <a:ext cx="843172" cy="125075"/>
+          </a:xfrm>
+          <a:prstGeom prst="rect">
+            <a:avLst/>
+          </a:prstGeom>
+          <a:noFill/>
+          <a:ln/>
+        </p:spPr>
+        <p:txBody>
+          <a:bodyPr wrap="square" lIns="0" tIns="0" rIns="0" bIns="0" rtlCol="0" anchor="ctr">
+            <a:normAutofit/>
+          </a:bodyPr>
+          <a:lstStyle/>
+          <a:p>
+            <a:pPr rtl="1" algn="ctr" indent="0" marL="0">
+              <a:buNone/>
+            </a:pPr>
+            <a:r>
+              <a:rPr lang="ar-SA" altLang="en-US" sz="700" b="1" dirty="0">
+                <a:solidFill>
+                  <a:srgbClr val="FFFFFF"/>
+                </a:solidFill>
+                <a:latin typeface="Arial" pitchFamily="34" charset="0"/>
+                <a:ea typeface="Arial" pitchFamily="34" charset="-122"/>
+                <a:cs typeface="Arial" pitchFamily="34" charset="-120"/>
+              </a:rPr>
+              <a:t>6 يوم</a:t>
+            </a:r>
+            <a:endParaRPr lang="ar-SA" sz="700" dirty="0"/>
+          </a:p>
+        </p:txBody>
+      </p:sp>
+      <p:sp>
+        <p:nvSpPr>
+          <p:cNvPr id="322" name="Shape 320"/>
+          <p:cNvSpPr/>
+          <p:nvPr/>
+        </p:nvSpPr>
+        <p:spPr>
+          <a:xfrm>
+            <a:off x="365760" y="5036820"/>
+            <a:ext cx="11460175" cy="215646"/>
+          </a:xfrm>
+          <a:prstGeom prst="rect">
+            <a:avLst/>
+          </a:prstGeom>
+          <a:solidFill>
+            <a:srgbClr val="FFFFFF"/>
+          </a:solidFill>
+          <a:ln w="6350">
+            <a:solidFill>
+              <a:srgbClr val="DFE6EA"/>
+            </a:solidFill>
+            <a:prstDash val="solid"/>
+          </a:ln>
+        </p:spPr>
+      </p:sp>
+      <p:sp>
+        <p:nvSpPr>
+          <p:cNvPr id="323" name="Shape 321"/>
+          <p:cNvSpPr/>
+          <p:nvPr/>
+        </p:nvSpPr>
+        <p:spPr>
+          <a:xfrm>
+            <a:off x="11515039" y="5025771"/>
+            <a:ext cx="237744" cy="237744"/>
+          </a:xfrm>
+          <a:prstGeom prst="ellipse">
+            <a:avLst>
+              <a:gd name="adj" fmla="val 32692"/>
+            </a:avLst>
+          </a:prstGeom>
+          <a:solidFill>
+            <a:srgbClr val="2E9E6B"/>
+          </a:solidFill>
+          <a:ln w="19050">
+            <a:solidFill>
+              <a:srgbClr val="222222"/>
+            </a:solidFill>
+            <a:prstDash val="solid"/>
+          </a:ln>
+        </p:spPr>
+      </p:sp>
+      <p:sp>
+        <p:nvSpPr>
+          <p:cNvPr id="324" name="Text 322"/>
+          <p:cNvSpPr/>
+          <p:nvPr/>
+        </p:nvSpPr>
+        <p:spPr>
+          <a:xfrm>
+            <a:off x="11441887" y="5036820"/>
+            <a:ext cx="384048" cy="215646"/>
+          </a:xfrm>
+          <a:prstGeom prst="rect">
+            <a:avLst/>
+          </a:prstGeom>
+          <a:noFill/>
+          <a:ln/>
+        </p:spPr>
+        <p:txBody>
+          <a:bodyPr wrap="square" lIns="0" tIns="0" rIns="0" bIns="0" rtlCol="0" anchor="ctr">
+            <a:normAutofit/>
+          </a:bodyPr>
+          <a:lstStyle/>
+          <a:p>
+            <a:pPr rtl="1" algn="ctr" indent="0" marL="0">
+              <a:buNone/>
+            </a:pPr>
+            <a:r>
+              <a:rPr lang="ar-SA" altLang="en-US" sz="850" b="1" dirty="0">
+                <a:solidFill>
+                  <a:srgbClr val="FFFFFF"/>
+                </a:solidFill>
+                <a:latin typeface="Arial" pitchFamily="34" charset="0"/>
+                <a:ea typeface="Arial" pitchFamily="34" charset="-122"/>
+                <a:cs typeface="Arial" pitchFamily="34" charset="-120"/>
+              </a:rPr>
+              <a:t>F</a:t>
+            </a:r>
+            <a:endParaRPr lang="ar-SA" sz="850" dirty="0"/>
+          </a:p>
+        </p:txBody>
+      </p:sp>
+      <p:sp>
+        <p:nvSpPr>
+          <p:cNvPr id="325" name="Text 323"/>
+          <p:cNvSpPr/>
+          <p:nvPr/>
+        </p:nvSpPr>
+        <p:spPr>
+          <a:xfrm>
+            <a:off x="8762695" y="5036820"/>
+            <a:ext cx="2606040" cy="215646"/>
+          </a:xfrm>
+          <a:prstGeom prst="rect">
+            <a:avLst/>
+          </a:prstGeom>
+          <a:noFill/>
+          <a:ln/>
+        </p:spPr>
+        <p:txBody>
+          <a:bodyPr wrap="square" lIns="0" tIns="0" rIns="0" bIns="0" rtlCol="0" anchor="ctr">
+            <a:normAutofit/>
+          </a:bodyPr>
+          <a:lstStyle/>
+          <a:p>
+            <a:pPr rtl="1" algn="r" indent="0" marL="0">
+              <a:buNone/>
+            </a:pPr>
+            <a:r>
+              <a:rPr lang="ar-SA" altLang="en-US" sz="750" b="1" dirty="0">
+                <a:solidFill>
+                  <a:srgbClr val="222222"/>
+                </a:solidFill>
+                <a:latin typeface="Arial" pitchFamily="34" charset="0"/>
+                <a:ea typeface="Arial" pitchFamily="34" charset="-122"/>
+                <a:cs typeface="Arial" pitchFamily="34" charset="-120"/>
+              </a:rPr>
+              <a:t>أساسات المبنى – حفر ودمك / اختبار وحديد تسليح وخرسانة</a:t>
+            </a:r>
+            <a:endParaRPr lang="ar-SA" sz="750" dirty="0"/>
+          </a:p>
+        </p:txBody>
+      </p:sp>
+      <p:sp>
+        <p:nvSpPr>
+          <p:cNvPr id="326" name="Text 324"/>
+          <p:cNvSpPr/>
+          <p:nvPr/>
+        </p:nvSpPr>
+        <p:spPr>
+          <a:xfrm>
+            <a:off x="7967167" y="5036820"/>
+            <a:ext cx="777240" cy="215646"/>
+          </a:xfrm>
+          <a:prstGeom prst="rect">
+            <a:avLst/>
+          </a:prstGeom>
+          <a:noFill/>
+          <a:ln/>
+        </p:spPr>
+        <p:txBody>
+          <a:bodyPr wrap="square" lIns="0" tIns="0" rIns="0" bIns="0" rtlCol="0" anchor="ctr">
+            <a:normAutofit/>
+          </a:bodyPr>
+          <a:lstStyle/>
+          <a:p>
+            <a:pPr rtl="1" algn="ctr" indent="0" marL="0">
+              <a:buNone/>
+            </a:pPr>
+            <a:r>
+              <a:rPr lang="ar-SA" altLang="en-US" sz="700" dirty="0">
+                <a:solidFill>
+                  <a:srgbClr val="444444"/>
+                </a:solidFill>
+                <a:latin typeface="Arial" pitchFamily="34" charset="0"/>
+                <a:ea typeface="Arial" pitchFamily="34" charset="-122"/>
+                <a:cs typeface="Arial" pitchFamily="34" charset="-120"/>
+              </a:rPr>
+              <a:t>D · FS</a:t>
+            </a:r>
+            <a:endParaRPr lang="ar-SA" sz="700" dirty="0"/>
+          </a:p>
+        </p:txBody>
+      </p:sp>
+      <p:sp>
+        <p:nvSpPr>
+          <p:cNvPr id="327" name="Text 325"/>
+          <p:cNvSpPr/>
+          <p:nvPr/>
+        </p:nvSpPr>
+        <p:spPr>
+          <a:xfrm>
+            <a:off x="7464247" y="5036820"/>
+            <a:ext cx="502920" cy="215646"/>
+          </a:xfrm>
+          <a:prstGeom prst="rect">
+            <a:avLst/>
+          </a:prstGeom>
+          <a:noFill/>
+          <a:ln/>
+        </p:spPr>
+        <p:txBody>
+          <a:bodyPr wrap="square" lIns="0" tIns="0" rIns="0" bIns="0" rtlCol="0" anchor="ctr">
+            <a:normAutofit/>
+          </a:bodyPr>
+          <a:lstStyle/>
+          <a:p>
+            <a:pPr rtl="1" algn="ctr" indent="0" marL="0">
+              <a:buNone/>
+            </a:pPr>
+            <a:r>
+              <a:rPr lang="ar-SA" altLang="en-US" sz="900" b="1" dirty="0">
+                <a:solidFill>
+                  <a:srgbClr val="222222"/>
+                </a:solidFill>
+                <a:latin typeface="Arial" pitchFamily="34" charset="0"/>
+                <a:ea typeface="Arial" pitchFamily="34" charset="-122"/>
+                <a:cs typeface="Arial" pitchFamily="34" charset="-120"/>
+              </a:rPr>
+              <a:t>12</a:t>
+            </a:r>
+            <a:endParaRPr lang="ar-SA" sz="900" dirty="0"/>
+          </a:p>
+        </p:txBody>
+      </p:sp>
+      <p:sp>
+        <p:nvSpPr>
+          <p:cNvPr id="328" name="Text 326"/>
+          <p:cNvSpPr/>
+          <p:nvPr/>
+        </p:nvSpPr>
+        <p:spPr>
+          <a:xfrm>
+            <a:off x="6805879" y="5036820"/>
+            <a:ext cx="658368" cy="215646"/>
+          </a:xfrm>
+          <a:prstGeom prst="rect">
+            <a:avLst/>
+          </a:prstGeom>
+          <a:noFill/>
+          <a:ln/>
+        </p:spPr>
+        <p:txBody>
+          <a:bodyPr wrap="square" lIns="0" tIns="0" rIns="0" bIns="0" rtlCol="0" anchor="ctr">
+            <a:normAutofit/>
+          </a:bodyPr>
+          <a:lstStyle/>
+          <a:p>
+            <a:pPr rtl="1" algn="ctr" indent="0" marL="0">
+              <a:buNone/>
+            </a:pPr>
+            <a:r>
+              <a:rPr lang="ar-SA" altLang="en-US" sz="700" b="1" dirty="0">
+                <a:solidFill>
+                  <a:srgbClr val="222222"/>
+                </a:solidFill>
+                <a:latin typeface="Arial" pitchFamily="34" charset="0"/>
+                <a:ea typeface="Arial" pitchFamily="34" charset="-122"/>
+                <a:cs typeface="Arial" pitchFamily="34" charset="-120"/>
+              </a:rPr>
+              <a:t>5 نوفمبر</a:t>
+            </a:r>
+            <a:endParaRPr lang="ar-SA" sz="700" dirty="0"/>
+          </a:p>
+        </p:txBody>
+      </p:sp>
+      <p:sp>
+        <p:nvSpPr>
+          <p:cNvPr id="329" name="Text 327"/>
+          <p:cNvSpPr/>
+          <p:nvPr/>
+        </p:nvSpPr>
+        <p:spPr>
+          <a:xfrm>
+            <a:off x="6147511" y="5036820"/>
+            <a:ext cx="658368" cy="215646"/>
+          </a:xfrm>
+          <a:prstGeom prst="rect">
+            <a:avLst/>
+          </a:prstGeom>
+          <a:noFill/>
+          <a:ln/>
+        </p:spPr>
+        <p:txBody>
+          <a:bodyPr wrap="square" lIns="0" tIns="0" rIns="0" bIns="0" rtlCol="0" anchor="ctr">
+            <a:normAutofit/>
+          </a:bodyPr>
+          <a:lstStyle/>
+          <a:p>
+            <a:pPr rtl="1" algn="ctr" indent="0" marL="0">
+              <a:buNone/>
+            </a:pPr>
+            <a:r>
+              <a:rPr lang="ar-SA" altLang="en-US" sz="700" b="1" dirty="0">
+                <a:solidFill>
+                  <a:srgbClr val="222222"/>
+                </a:solidFill>
+                <a:latin typeface="Arial" pitchFamily="34" charset="0"/>
+                <a:ea typeface="Arial" pitchFamily="34" charset="-122"/>
+                <a:cs typeface="Arial" pitchFamily="34" charset="-120"/>
+              </a:rPr>
+              <a:t>18 نوفمبر</a:t>
+            </a:r>
+            <a:endParaRPr lang="ar-SA" sz="700" dirty="0"/>
+          </a:p>
+        </p:txBody>
+      </p:sp>
+      <p:sp>
+        <p:nvSpPr>
+          <p:cNvPr id="330" name="Shape 328"/>
+          <p:cNvSpPr/>
+          <p:nvPr/>
+        </p:nvSpPr>
+        <p:spPr>
+          <a:xfrm>
+            <a:off x="1329385" y="5082106"/>
+            <a:ext cx="1686344" cy="125075"/>
+          </a:xfrm>
+          <a:prstGeom prst="roundRect">
+            <a:avLst>
+              <a:gd name="adj" fmla="val 29243"/>
+            </a:avLst>
+          </a:prstGeom>
+          <a:solidFill>
+            <a:srgbClr val="2E9E6B"/>
+          </a:solidFill>
+          <a:ln w="19050">
+            <a:solidFill>
+              <a:srgbClr val="222222"/>
+            </a:solidFill>
+            <a:prstDash val="solid"/>
+          </a:ln>
+          <a:effectLst>
+            <a:outerShdw sx="100000" sy="100000" kx="0" ky="0" algn="bl" rotWithShape="0" blurRad="38100" dist="12700" dir="5400000">
+              <a:srgbClr val="000000">
+                <a:alpha val="20000"/>
+              </a:srgbClr>
+            </a:outerShdw>
+          </a:effectLst>
+        </p:spPr>
+      </p:sp>
+      <p:sp>
+        <p:nvSpPr>
+          <p:cNvPr id="331" name="Text 329"/>
+          <p:cNvSpPr/>
+          <p:nvPr/>
+        </p:nvSpPr>
+        <p:spPr>
+          <a:xfrm>
+            <a:off x="1329385" y="5082106"/>
+            <a:ext cx="1686344" cy="125075"/>
+          </a:xfrm>
+          <a:prstGeom prst="rect">
+            <a:avLst/>
+          </a:prstGeom>
+          <a:noFill/>
+          <a:ln/>
+        </p:spPr>
+        <p:txBody>
+          <a:bodyPr wrap="square" lIns="0" tIns="0" rIns="0" bIns="0" rtlCol="0" anchor="ctr">
+            <a:normAutofit/>
+          </a:bodyPr>
+          <a:lstStyle/>
+          <a:p>
+            <a:pPr rtl="1" algn="ctr" indent="0" marL="0">
+              <a:buNone/>
+            </a:pPr>
+            <a:r>
+              <a:rPr lang="ar-SA" altLang="en-US" sz="700" b="1" dirty="0">
+                <a:solidFill>
+                  <a:srgbClr val="FFFFFF"/>
+                </a:solidFill>
+                <a:latin typeface="Arial" pitchFamily="34" charset="0"/>
+                <a:ea typeface="Arial" pitchFamily="34" charset="-122"/>
+                <a:cs typeface="Arial" pitchFamily="34" charset="-120"/>
+              </a:rPr>
+              <a:t>12 يوم</a:t>
+            </a:r>
+            <a:endParaRPr lang="ar-SA" sz="700" dirty="0"/>
+          </a:p>
+        </p:txBody>
+      </p:sp>
+      <p:sp>
+        <p:nvSpPr>
+          <p:cNvPr id="332" name="Shape 330"/>
+          <p:cNvSpPr/>
+          <p:nvPr/>
+        </p:nvSpPr>
+        <p:spPr>
+          <a:xfrm>
+            <a:off x="365760" y="5252466"/>
+            <a:ext cx="11460175" cy="215646"/>
+          </a:xfrm>
+          <a:prstGeom prst="rect">
+            <a:avLst/>
+          </a:prstGeom>
+          <a:solidFill>
+            <a:srgbClr val="F6F9FA"/>
+          </a:solidFill>
+          <a:ln w="6350">
+            <a:solidFill>
+              <a:srgbClr val="DFE6EA"/>
+            </a:solidFill>
+            <a:prstDash val="solid"/>
+          </a:ln>
+        </p:spPr>
+      </p:sp>
+      <p:sp>
+        <p:nvSpPr>
+          <p:cNvPr id="333" name="Shape 331"/>
+          <p:cNvSpPr/>
+          <p:nvPr/>
+        </p:nvSpPr>
+        <p:spPr>
+          <a:xfrm>
+            <a:off x="11515039" y="5241417"/>
+            <a:ext cx="237744" cy="237744"/>
+          </a:xfrm>
+          <a:prstGeom prst="ellipse">
+            <a:avLst>
+              <a:gd name="adj" fmla="val 32692"/>
+            </a:avLst>
+          </a:prstGeom>
+          <a:solidFill>
+            <a:srgbClr val="D68A00"/>
+          </a:solidFill>
+          <a:ln w="19050">
+            <a:solidFill>
+              <a:srgbClr val="222222"/>
+            </a:solidFill>
+            <a:prstDash val="solid"/>
+          </a:ln>
+        </p:spPr>
+      </p:sp>
+      <p:sp>
+        <p:nvSpPr>
+          <p:cNvPr id="334" name="Text 332"/>
+          <p:cNvSpPr/>
+          <p:nvPr/>
+        </p:nvSpPr>
+        <p:spPr>
+          <a:xfrm>
+            <a:off x="11441887" y="5252466"/>
+            <a:ext cx="384048" cy="215646"/>
+          </a:xfrm>
+          <a:prstGeom prst="rect">
+            <a:avLst/>
+          </a:prstGeom>
+          <a:noFill/>
+          <a:ln/>
+        </p:spPr>
+        <p:txBody>
+          <a:bodyPr wrap="square" lIns="0" tIns="0" rIns="0" bIns="0" rtlCol="0" anchor="ctr">
+            <a:normAutofit/>
+          </a:bodyPr>
+          <a:lstStyle/>
+          <a:p>
+            <a:pPr rtl="1" algn="ctr" indent="0" marL="0">
+              <a:buNone/>
+            </a:pPr>
+            <a:r>
+              <a:rPr lang="ar-SA" altLang="en-US" sz="850" b="1" dirty="0">
+                <a:solidFill>
+                  <a:srgbClr val="FFFFFF"/>
+                </a:solidFill>
+                <a:latin typeface="Arial" pitchFamily="34" charset="0"/>
+                <a:ea typeface="Arial" pitchFamily="34" charset="-122"/>
+                <a:cs typeface="Arial" pitchFamily="34" charset="-120"/>
+              </a:rPr>
+              <a:t>G</a:t>
+            </a:r>
+            <a:endParaRPr lang="ar-SA" sz="850" dirty="0"/>
+          </a:p>
+        </p:txBody>
+      </p:sp>
+      <p:sp>
+        <p:nvSpPr>
+          <p:cNvPr id="335" name="Text 333"/>
+          <p:cNvSpPr/>
+          <p:nvPr/>
+        </p:nvSpPr>
+        <p:spPr>
+          <a:xfrm>
+            <a:off x="8762695" y="5252466"/>
+            <a:ext cx="2606040" cy="215646"/>
+          </a:xfrm>
+          <a:prstGeom prst="rect">
+            <a:avLst/>
+          </a:prstGeom>
+          <a:noFill/>
+          <a:ln/>
+        </p:spPr>
+        <p:txBody>
+          <a:bodyPr wrap="square" lIns="0" tIns="0" rIns="0" bIns="0" rtlCol="0" anchor="ctr">
+            <a:normAutofit/>
+          </a:bodyPr>
+          <a:lstStyle/>
+          <a:p>
+            <a:pPr rtl="1" algn="r" indent="0" marL="0">
+              <a:buNone/>
+            </a:pPr>
+            <a:r>
+              <a:rPr lang="ar-SA" altLang="en-US" sz="750" b="1" dirty="0">
+                <a:solidFill>
+                  <a:srgbClr val="222222"/>
+                </a:solidFill>
+                <a:latin typeface="Arial" pitchFamily="34" charset="0"/>
+                <a:ea typeface="Arial" pitchFamily="34" charset="-122"/>
+                <a:cs typeface="Arial" pitchFamily="34" charset="-120"/>
+              </a:rPr>
+              <a:t>أعمال الردم للمبنى</a:t>
+            </a:r>
+            <a:endParaRPr lang="ar-SA" sz="750" dirty="0"/>
+          </a:p>
+        </p:txBody>
+      </p:sp>
+      <p:sp>
+        <p:nvSpPr>
+          <p:cNvPr id="336" name="Text 334"/>
+          <p:cNvSpPr/>
+          <p:nvPr/>
+        </p:nvSpPr>
+        <p:spPr>
+          <a:xfrm>
+            <a:off x="7967167" y="5252466"/>
+            <a:ext cx="777240" cy="215646"/>
+          </a:xfrm>
+          <a:prstGeom prst="rect">
+            <a:avLst/>
+          </a:prstGeom>
+          <a:noFill/>
+          <a:ln/>
+        </p:spPr>
+        <p:txBody>
+          <a:bodyPr wrap="square" lIns="0" tIns="0" rIns="0" bIns="0" rtlCol="0" anchor="ctr">
+            <a:normAutofit/>
+          </a:bodyPr>
+          <a:lstStyle/>
+          <a:p>
+            <a:pPr rtl="1" algn="ctr" indent="0" marL="0">
+              <a:buNone/>
+            </a:pPr>
+            <a:r>
+              <a:rPr lang="ar-SA" altLang="en-US" sz="700" dirty="0">
+                <a:solidFill>
+                  <a:srgbClr val="444444"/>
+                </a:solidFill>
+                <a:latin typeface="Arial" pitchFamily="34" charset="0"/>
+                <a:ea typeface="Arial" pitchFamily="34" charset="-122"/>
+                <a:cs typeface="Arial" pitchFamily="34" charset="-120"/>
+              </a:rPr>
+              <a:t>F · FS</a:t>
+            </a:r>
+            <a:endParaRPr lang="ar-SA" sz="700" dirty="0"/>
+          </a:p>
+        </p:txBody>
+      </p:sp>
+      <p:sp>
+        <p:nvSpPr>
+          <p:cNvPr id="337" name="Text 335"/>
+          <p:cNvSpPr/>
+          <p:nvPr/>
+        </p:nvSpPr>
+        <p:spPr>
+          <a:xfrm>
+            <a:off x="7464247" y="5252466"/>
+            <a:ext cx="502920" cy="215646"/>
+          </a:xfrm>
+          <a:prstGeom prst="rect">
+            <a:avLst/>
+          </a:prstGeom>
+          <a:noFill/>
+          <a:ln/>
+        </p:spPr>
+        <p:txBody>
+          <a:bodyPr wrap="square" lIns="0" tIns="0" rIns="0" bIns="0" rtlCol="0" anchor="ctr">
+            <a:normAutofit/>
+          </a:bodyPr>
+          <a:lstStyle/>
+          <a:p>
+            <a:pPr rtl="1" algn="ctr" indent="0" marL="0">
+              <a:buNone/>
+            </a:pPr>
+            <a:r>
+              <a:rPr lang="ar-SA" altLang="en-US" sz="900" b="1" dirty="0">
+                <a:solidFill>
+                  <a:srgbClr val="222222"/>
+                </a:solidFill>
+                <a:latin typeface="Arial" pitchFamily="34" charset="0"/>
+                <a:ea typeface="Arial" pitchFamily="34" charset="-122"/>
+                <a:cs typeface="Arial" pitchFamily="34" charset="-120"/>
+              </a:rPr>
+              <a:t>5</a:t>
+            </a:r>
+            <a:endParaRPr lang="ar-SA" sz="900" dirty="0"/>
+          </a:p>
+        </p:txBody>
+      </p:sp>
+      <p:sp>
+        <p:nvSpPr>
+          <p:cNvPr id="338" name="Text 336"/>
+          <p:cNvSpPr/>
+          <p:nvPr/>
+        </p:nvSpPr>
+        <p:spPr>
+          <a:xfrm>
+            <a:off x="6805879" y="5252466"/>
+            <a:ext cx="658368" cy="215646"/>
+          </a:xfrm>
+          <a:prstGeom prst="rect">
+            <a:avLst/>
+          </a:prstGeom>
+          <a:noFill/>
+          <a:ln/>
+        </p:spPr>
+        <p:txBody>
+          <a:bodyPr wrap="square" lIns="0" tIns="0" rIns="0" bIns="0" rtlCol="0" anchor="ctr">
+            <a:normAutofit/>
+          </a:bodyPr>
+          <a:lstStyle/>
+          <a:p>
+            <a:pPr rtl="1" algn="ctr" indent="0" marL="0">
+              <a:buNone/>
+            </a:pPr>
+            <a:r>
+              <a:rPr lang="ar-SA" altLang="en-US" sz="700" b="1" dirty="0">
+                <a:solidFill>
+                  <a:srgbClr val="222222"/>
+                </a:solidFill>
+                <a:latin typeface="Arial" pitchFamily="34" charset="0"/>
+                <a:ea typeface="Arial" pitchFamily="34" charset="-122"/>
+                <a:cs typeface="Arial" pitchFamily="34" charset="-120"/>
+              </a:rPr>
+              <a:t>19 نوفمبر</a:t>
+            </a:r>
+            <a:endParaRPr lang="ar-SA" sz="700" dirty="0"/>
+          </a:p>
+        </p:txBody>
+      </p:sp>
+      <p:sp>
+        <p:nvSpPr>
+          <p:cNvPr id="339" name="Text 337"/>
+          <p:cNvSpPr/>
+          <p:nvPr/>
+        </p:nvSpPr>
+        <p:spPr>
+          <a:xfrm>
+            <a:off x="6147511" y="5252466"/>
+            <a:ext cx="658368" cy="215646"/>
+          </a:xfrm>
+          <a:prstGeom prst="rect">
+            <a:avLst/>
+          </a:prstGeom>
+          <a:noFill/>
+          <a:ln/>
+        </p:spPr>
+        <p:txBody>
+          <a:bodyPr wrap="square" lIns="0" tIns="0" rIns="0" bIns="0" rtlCol="0" anchor="ctr">
+            <a:normAutofit/>
+          </a:bodyPr>
+          <a:lstStyle/>
+          <a:p>
+            <a:pPr rtl="1" algn="ctr" indent="0" marL="0">
+              <a:buNone/>
+            </a:pPr>
+            <a:r>
+              <a:rPr lang="ar-SA" altLang="en-US" sz="700" b="1" dirty="0">
+                <a:solidFill>
+                  <a:srgbClr val="222222"/>
+                </a:solidFill>
+                <a:latin typeface="Arial" pitchFamily="34" charset="0"/>
+                <a:ea typeface="Arial" pitchFamily="34" charset="-122"/>
+                <a:cs typeface="Arial" pitchFamily="34" charset="-120"/>
+              </a:rPr>
+              <a:t>24 نوفمبر</a:t>
+            </a:r>
+            <a:endParaRPr lang="ar-SA" sz="700" dirty="0"/>
+          </a:p>
+        </p:txBody>
+      </p:sp>
+      <p:sp>
+        <p:nvSpPr>
+          <p:cNvPr id="340" name="Shape 338"/>
+          <p:cNvSpPr/>
+          <p:nvPr/>
+        </p:nvSpPr>
+        <p:spPr>
+          <a:xfrm>
+            <a:off x="606666" y="5297752"/>
+            <a:ext cx="722719" cy="125075"/>
+          </a:xfrm>
+          <a:prstGeom prst="roundRect">
+            <a:avLst>
+              <a:gd name="adj" fmla="val 29243"/>
+            </a:avLst>
+          </a:prstGeom>
+          <a:solidFill>
+            <a:srgbClr val="D68A00"/>
+          </a:solidFill>
+          <a:ln w="19050">
+            <a:solidFill>
+              <a:srgbClr val="222222"/>
+            </a:solidFill>
+            <a:prstDash val="solid"/>
+          </a:ln>
+          <a:effectLst>
+            <a:outerShdw sx="100000" sy="100000" kx="0" ky="0" algn="bl" rotWithShape="0" blurRad="38100" dist="12700" dir="5400000">
+              <a:srgbClr val="000000">
+                <a:alpha val="20000"/>
+              </a:srgbClr>
+            </a:outerShdw>
+          </a:effectLst>
+        </p:spPr>
+      </p:sp>
+      <p:sp>
+        <p:nvSpPr>
+          <p:cNvPr id="341" name="Text 339"/>
+          <p:cNvSpPr/>
+          <p:nvPr/>
+        </p:nvSpPr>
+        <p:spPr>
+          <a:xfrm>
+            <a:off x="606666" y="5297752"/>
+            <a:ext cx="722719" cy="125075"/>
+          </a:xfrm>
+          <a:prstGeom prst="rect">
+            <a:avLst/>
+          </a:prstGeom>
+          <a:noFill/>
+          <a:ln/>
+        </p:spPr>
+        <p:txBody>
+          <a:bodyPr wrap="square" lIns="0" tIns="0" rIns="0" bIns="0" rtlCol="0" anchor="ctr">
+            <a:normAutofit/>
+          </a:bodyPr>
+          <a:lstStyle/>
+          <a:p>
+            <a:pPr rtl="1" algn="ctr" indent="0" marL="0">
+              <a:buNone/>
+            </a:pPr>
+            <a:r>
+              <a:rPr lang="ar-SA" altLang="en-US" sz="700" b="1" dirty="0">
+                <a:solidFill>
+                  <a:srgbClr val="FFFFFF"/>
+                </a:solidFill>
+                <a:latin typeface="Arial" pitchFamily="34" charset="0"/>
+                <a:ea typeface="Arial" pitchFamily="34" charset="-122"/>
+                <a:cs typeface="Arial" pitchFamily="34" charset="-120"/>
+              </a:rPr>
               <a:t>5 يوم</a:t>
             </a:r>
-            <a:endParaRPr lang="ar-SA" sz="800" dirty="0"/>
-          </a:p>
-        </p:txBody>
-      </p:sp>
-      <p:sp>
-        <p:nvSpPr>
-          <p:cNvPr id="283" name="Shape 281"/>
-          <p:cNvSpPr/>
-          <p:nvPr/>
-        </p:nvSpPr>
-        <p:spPr>
-          <a:xfrm>
-            <a:off x="5731288" y="2882287"/>
-            <a:ext cx="0" cy="292641"/>
+            <a:endParaRPr lang="ar-SA" sz="700" dirty="0"/>
+          </a:p>
+        </p:txBody>
+      </p:sp>
+      <p:sp>
+        <p:nvSpPr>
+          <p:cNvPr id="342" name="Shape 340"/>
+          <p:cNvSpPr/>
+          <p:nvPr/>
+        </p:nvSpPr>
+        <p:spPr>
+          <a:xfrm>
+            <a:off x="5731288" y="3266366"/>
+            <a:ext cx="0" cy="153109"/>
           </a:xfrm>
           <a:prstGeom prst="line">
             <a:avLst/>
@@ -16658,13 +18819,201 @@
       </p:sp>
       <p:sp>
         <p:nvSpPr>
-          <p:cNvPr id="284" name="Shape 282"/>
+          <p:cNvPr id="343" name="Shape 341"/>
           <p:cNvSpPr/>
           <p:nvPr/>
         </p:nvSpPr>
         <p:spPr>
           <a:xfrm flipH="1">
-            <a:off x="4952124" y="3174927"/>
+            <a:off x="5674843" y="3419475"/>
+            <a:ext cx="56445" cy="0"/>
+          </a:xfrm>
+          <a:prstGeom prst="line">
+            <a:avLst/>
+          </a:prstGeom>
+          <a:noFill/>
+          <a:ln w="13970">
+            <a:solidFill>
+              <a:srgbClr val="2D3338"/>
+            </a:solidFill>
+            <a:prstDash val="solid"/>
+            <a:tailEnd type="triangle"/>
+          </a:ln>
+        </p:spPr>
+      </p:sp>
+      <p:sp>
+        <p:nvSpPr>
+          <p:cNvPr id="344" name="Shape 342"/>
+          <p:cNvSpPr/>
+          <p:nvPr/>
+        </p:nvSpPr>
+        <p:spPr>
+          <a:xfrm>
+            <a:off x="5610835" y="3482012"/>
+            <a:ext cx="0" cy="153109"/>
+          </a:xfrm>
+          <a:prstGeom prst="line">
+            <a:avLst/>
+          </a:prstGeom>
+          <a:noFill/>
+          <a:ln w="13970">
+            <a:solidFill>
+              <a:srgbClr val="2D3338"/>
+            </a:solidFill>
+            <a:prstDash val="solid"/>
+          </a:ln>
+        </p:spPr>
+      </p:sp>
+      <p:sp>
+        <p:nvSpPr>
+          <p:cNvPr id="345" name="Shape 343"/>
+          <p:cNvSpPr/>
+          <p:nvPr/>
+        </p:nvSpPr>
+        <p:spPr>
+          <a:xfrm flipH="1">
+            <a:off x="5554389" y="3635121"/>
+            <a:ext cx="56445" cy="0"/>
+          </a:xfrm>
+          <a:prstGeom prst="line">
+            <a:avLst/>
+          </a:prstGeom>
+          <a:noFill/>
+          <a:ln w="13970">
+            <a:solidFill>
+              <a:srgbClr val="2D3338"/>
+            </a:solidFill>
+            <a:prstDash val="solid"/>
+            <a:tailEnd type="triangle"/>
+          </a:ln>
+        </p:spPr>
+      </p:sp>
+      <p:sp>
+        <p:nvSpPr>
+          <p:cNvPr id="346" name="Shape 344"/>
+          <p:cNvSpPr/>
+          <p:nvPr/>
+        </p:nvSpPr>
+        <p:spPr>
+          <a:xfrm>
+            <a:off x="5490381" y="3697658"/>
+            <a:ext cx="0" cy="153109"/>
+          </a:xfrm>
+          <a:prstGeom prst="line">
+            <a:avLst/>
+          </a:prstGeom>
+          <a:noFill/>
+          <a:ln w="13970">
+            <a:solidFill>
+              <a:srgbClr val="2D3338"/>
+            </a:solidFill>
+            <a:prstDash val="solid"/>
+          </a:ln>
+        </p:spPr>
+      </p:sp>
+      <p:sp>
+        <p:nvSpPr>
+          <p:cNvPr id="347" name="Shape 345"/>
+          <p:cNvSpPr/>
+          <p:nvPr/>
+        </p:nvSpPr>
+        <p:spPr>
+          <a:xfrm flipH="1">
+            <a:off x="5313483" y="3850767"/>
+            <a:ext cx="176898" cy="0"/>
+          </a:xfrm>
+          <a:prstGeom prst="line">
+            <a:avLst/>
+          </a:prstGeom>
+          <a:noFill/>
+          <a:ln w="13970">
+            <a:solidFill>
+              <a:srgbClr val="2D3338"/>
+            </a:solidFill>
+            <a:prstDash val="solid"/>
+            <a:tailEnd type="triangle"/>
+          </a:ln>
+        </p:spPr>
+      </p:sp>
+      <p:sp>
+        <p:nvSpPr>
+          <p:cNvPr id="348" name="Shape 346"/>
+          <p:cNvSpPr/>
+          <p:nvPr/>
+        </p:nvSpPr>
+        <p:spPr>
+          <a:xfrm>
+            <a:off x="5249475" y="3913304"/>
+            <a:ext cx="0" cy="153109"/>
+          </a:xfrm>
+          <a:prstGeom prst="line">
+            <a:avLst/>
+          </a:prstGeom>
+          <a:noFill/>
+          <a:ln w="13970">
+            <a:solidFill>
+              <a:srgbClr val="2D3338"/>
+            </a:solidFill>
+            <a:prstDash val="solid"/>
+          </a:ln>
+        </p:spPr>
+      </p:sp>
+      <p:sp>
+        <p:nvSpPr>
+          <p:cNvPr id="349" name="Shape 347"/>
+          <p:cNvSpPr/>
+          <p:nvPr/>
+        </p:nvSpPr>
+        <p:spPr>
+          <a:xfrm flipH="1">
+            <a:off x="5193030" y="4066413"/>
+            <a:ext cx="56445" cy="0"/>
+          </a:xfrm>
+          <a:prstGeom prst="line">
+            <a:avLst/>
+          </a:prstGeom>
+          <a:noFill/>
+          <a:ln w="13970">
+            <a:solidFill>
+              <a:srgbClr val="2D3338"/>
+            </a:solidFill>
+            <a:prstDash val="solid"/>
+            <a:tailEnd type="triangle"/>
+          </a:ln>
+        </p:spPr>
+      </p:sp>
+      <p:sp>
+        <p:nvSpPr>
+          <p:cNvPr id="350" name="Shape 348"/>
+          <p:cNvSpPr/>
+          <p:nvPr/>
+        </p:nvSpPr>
+        <p:spPr>
+          <a:xfrm>
+            <a:off x="5731288" y="3050720"/>
+            <a:ext cx="0" cy="1231339"/>
+          </a:xfrm>
+          <a:prstGeom prst="line">
+            <a:avLst/>
+          </a:prstGeom>
+          <a:noFill/>
+          <a:ln w="13970">
+            <a:solidFill>
+              <a:srgbClr val="2D3338"/>
+            </a:solidFill>
+            <a:prstDash val="solid"/>
+          </a:ln>
+        </p:spPr>
+      </p:sp>
+      <p:sp>
+        <p:nvSpPr>
+          <p:cNvPr id="351" name="Shape 349"/>
+          <p:cNvSpPr/>
+          <p:nvPr/>
+        </p:nvSpPr>
+        <p:spPr>
+          <a:xfrm flipH="1">
+            <a:off x="4952124" y="4282059"/>
             <a:ext cx="779164" cy="0"/>
           </a:xfrm>
           <a:prstGeom prst="line">
@@ -16682,13 +19031,13 @@
       </p:sp>
       <p:sp>
         <p:nvSpPr>
-          <p:cNvPr id="285" name="Shape 283"/>
-          <p:cNvSpPr/>
-          <p:nvPr/>
-        </p:nvSpPr>
-        <p:spPr>
-          <a:xfrm>
-            <a:off x="4942980" y="2771285"/>
+          <p:cNvPr id="352" name="Shape 350"/>
+          <p:cNvSpPr/>
+          <p:nvPr/>
+        </p:nvSpPr>
+        <p:spPr>
+          <a:xfrm>
+            <a:off x="4942980" y="2988183"/>
             <a:ext cx="45720" cy="0"/>
           </a:xfrm>
           <a:prstGeom prst="line">
@@ -16705,14 +19054,14 @@
       </p:sp>
       <p:sp>
         <p:nvSpPr>
-          <p:cNvPr id="286" name="Shape 284"/>
-          <p:cNvSpPr/>
-          <p:nvPr/>
-        </p:nvSpPr>
-        <p:spPr>
-          <a:xfrm>
-            <a:off x="4988700" y="2771285"/>
-            <a:ext cx="0" cy="807285"/>
+          <p:cNvPr id="353" name="Shape 351"/>
+          <p:cNvSpPr/>
+          <p:nvPr/>
+        </p:nvSpPr>
+        <p:spPr>
+          <a:xfrm>
+            <a:off x="4988700" y="2988183"/>
+            <a:ext cx="0" cy="1509522"/>
           </a:xfrm>
           <a:prstGeom prst="line">
             <a:avLst/>
@@ -16728,13 +19077,13 @@
       </p:sp>
       <p:sp>
         <p:nvSpPr>
-          <p:cNvPr id="287" name="Shape 285"/>
+          <p:cNvPr id="354" name="Shape 352"/>
           <p:cNvSpPr/>
           <p:nvPr/>
         </p:nvSpPr>
         <p:spPr>
           <a:xfrm flipH="1">
-            <a:off x="4952124" y="3578570"/>
+            <a:off x="4952124" y="4497705"/>
             <a:ext cx="36576" cy="0"/>
           </a:xfrm>
           <a:prstGeom prst="line">
@@ -16752,13 +19101,13 @@
       </p:sp>
       <p:sp>
         <p:nvSpPr>
-          <p:cNvPr id="288" name="Shape 286"/>
-          <p:cNvSpPr/>
-          <p:nvPr/>
-        </p:nvSpPr>
-        <p:spPr>
-          <a:xfrm>
-            <a:off x="4340714" y="3578570"/>
+          <p:cNvPr id="355" name="Shape 353"/>
+          <p:cNvSpPr/>
+          <p:nvPr/>
+        </p:nvSpPr>
+        <p:spPr>
+          <a:xfrm>
+            <a:off x="4340714" y="4497705"/>
             <a:ext cx="45720" cy="0"/>
           </a:xfrm>
           <a:prstGeom prst="line">
@@ -16775,14 +19124,14 @@
       </p:sp>
       <p:sp>
         <p:nvSpPr>
-          <p:cNvPr id="289" name="Shape 287"/>
-          <p:cNvSpPr/>
-          <p:nvPr/>
-        </p:nvSpPr>
-        <p:spPr>
-          <a:xfrm>
-            <a:off x="4386434" y="3578570"/>
-            <a:ext cx="0" cy="403642"/>
+          <p:cNvPr id="356" name="Shape 354"/>
+          <p:cNvSpPr/>
+          <p:nvPr/>
+        </p:nvSpPr>
+        <p:spPr>
+          <a:xfrm>
+            <a:off x="4386434" y="4497705"/>
+            <a:ext cx="0" cy="215646"/>
           </a:xfrm>
           <a:prstGeom prst="line">
             <a:avLst/>
@@ -16798,13 +19147,13 @@
       </p:sp>
       <p:sp>
         <p:nvSpPr>
-          <p:cNvPr id="290" name="Shape 288"/>
+          <p:cNvPr id="357" name="Shape 355"/>
           <p:cNvSpPr/>
           <p:nvPr/>
         </p:nvSpPr>
         <p:spPr>
           <a:xfrm flipH="1">
-            <a:off x="4349858" y="3982212"/>
+            <a:off x="4349858" y="4713351"/>
             <a:ext cx="36576" cy="0"/>
           </a:xfrm>
           <a:prstGeom prst="line">
@@ -16822,13 +19171,13 @@
       </p:sp>
       <p:sp>
         <p:nvSpPr>
-          <p:cNvPr id="291" name="Shape 289"/>
-          <p:cNvSpPr/>
-          <p:nvPr/>
-        </p:nvSpPr>
-        <p:spPr>
-          <a:xfrm>
-            <a:off x="3015729" y="3982212"/>
+          <p:cNvPr id="358" name="Shape 356"/>
+          <p:cNvSpPr/>
+          <p:nvPr/>
+        </p:nvSpPr>
+        <p:spPr>
+          <a:xfrm>
+            <a:off x="3015729" y="4713351"/>
             <a:ext cx="45720" cy="0"/>
           </a:xfrm>
           <a:prstGeom prst="line">
@@ -16845,14 +19194,14 @@
       </p:sp>
       <p:sp>
         <p:nvSpPr>
-          <p:cNvPr id="292" name="Shape 290"/>
-          <p:cNvSpPr/>
-          <p:nvPr/>
-        </p:nvSpPr>
-        <p:spPr>
-          <a:xfrm>
-            <a:off x="3061449" y="3982212"/>
-            <a:ext cx="0" cy="403642"/>
+          <p:cNvPr id="359" name="Shape 357"/>
+          <p:cNvSpPr/>
+          <p:nvPr/>
+        </p:nvSpPr>
+        <p:spPr>
+          <a:xfrm>
+            <a:off x="3061449" y="4713351"/>
+            <a:ext cx="0" cy="215646"/>
           </a:xfrm>
           <a:prstGeom prst="line">
             <a:avLst/>
@@ -16868,13 +19217,13 @@
       </p:sp>
       <p:sp>
         <p:nvSpPr>
-          <p:cNvPr id="293" name="Shape 291"/>
+          <p:cNvPr id="360" name="Shape 358"/>
           <p:cNvSpPr/>
           <p:nvPr/>
         </p:nvSpPr>
         <p:spPr>
           <a:xfrm flipH="1">
-            <a:off x="3024873" y="4385854"/>
+            <a:off x="3024873" y="4928997"/>
             <a:ext cx="36576" cy="0"/>
           </a:xfrm>
           <a:prstGeom prst="line">
@@ -16892,13 +19241,13 @@
       </p:sp>
       <p:sp>
         <p:nvSpPr>
-          <p:cNvPr id="294" name="Shape 292"/>
-          <p:cNvSpPr/>
-          <p:nvPr/>
-        </p:nvSpPr>
-        <p:spPr>
-          <a:xfrm>
-            <a:off x="3015729" y="3982212"/>
+          <p:cNvPr id="361" name="Shape 359"/>
+          <p:cNvSpPr/>
+          <p:nvPr/>
+        </p:nvSpPr>
+        <p:spPr>
+          <a:xfrm>
+            <a:off x="3015729" y="4713351"/>
             <a:ext cx="45720" cy="0"/>
           </a:xfrm>
           <a:prstGeom prst="line">
@@ -16915,14 +19264,14 @@
       </p:sp>
       <p:sp>
         <p:nvSpPr>
-          <p:cNvPr id="295" name="Shape 293"/>
-          <p:cNvSpPr/>
-          <p:nvPr/>
-        </p:nvSpPr>
-        <p:spPr>
-          <a:xfrm>
-            <a:off x="3061449" y="3982212"/>
-            <a:ext cx="0" cy="807285"/>
+          <p:cNvPr id="362" name="Shape 360"/>
+          <p:cNvSpPr/>
+          <p:nvPr/>
+        </p:nvSpPr>
+        <p:spPr>
+          <a:xfrm>
+            <a:off x="3061449" y="4713351"/>
+            <a:ext cx="0" cy="431292"/>
           </a:xfrm>
           <a:prstGeom prst="line">
             <a:avLst/>
@@ -16938,13 +19287,13 @@
       </p:sp>
       <p:sp>
         <p:nvSpPr>
-          <p:cNvPr id="296" name="Shape 294"/>
+          <p:cNvPr id="363" name="Shape 361"/>
           <p:cNvSpPr/>
           <p:nvPr/>
         </p:nvSpPr>
         <p:spPr>
           <a:xfrm flipH="1">
-            <a:off x="3024873" y="4789497"/>
+            <a:off x="3024873" y="5144643"/>
             <a:ext cx="36576" cy="0"/>
           </a:xfrm>
           <a:prstGeom prst="line">
@@ -16962,13 +19311,13 @@
       </p:sp>
       <p:sp>
         <p:nvSpPr>
-          <p:cNvPr id="297" name="Shape 295"/>
-          <p:cNvSpPr/>
-          <p:nvPr/>
-        </p:nvSpPr>
-        <p:spPr>
-          <a:xfrm>
-            <a:off x="1329385" y="4789497"/>
+          <p:cNvPr id="364" name="Shape 362"/>
+          <p:cNvSpPr/>
+          <p:nvPr/>
+        </p:nvSpPr>
+        <p:spPr>
+          <a:xfrm>
+            <a:off x="1329385" y="5144643"/>
             <a:ext cx="45720" cy="0"/>
           </a:xfrm>
           <a:prstGeom prst="line">
@@ -16985,14 +19334,14 @@
       </p:sp>
       <p:sp>
         <p:nvSpPr>
-          <p:cNvPr id="298" name="Shape 296"/>
-          <p:cNvSpPr/>
-          <p:nvPr/>
-        </p:nvSpPr>
-        <p:spPr>
-          <a:xfrm>
-            <a:off x="1375105" y="4789497"/>
-            <a:ext cx="0" cy="403642"/>
+          <p:cNvPr id="365" name="Shape 363"/>
+          <p:cNvSpPr/>
+          <p:nvPr/>
+        </p:nvSpPr>
+        <p:spPr>
+          <a:xfrm>
+            <a:off x="1375105" y="5144643"/>
+            <a:ext cx="0" cy="215646"/>
           </a:xfrm>
           <a:prstGeom prst="line">
             <a:avLst/>
@@ -17008,13 +19357,13 @@
       </p:sp>
       <p:sp>
         <p:nvSpPr>
-          <p:cNvPr id="299" name="Shape 297"/>
+          <p:cNvPr id="366" name="Shape 364"/>
           <p:cNvSpPr/>
           <p:nvPr/>
         </p:nvSpPr>
         <p:spPr>
           <a:xfrm flipH="1">
-            <a:off x="1338529" y="5193139"/>
+            <a:off x="1338529" y="5360289"/>
             <a:ext cx="36576" cy="0"/>
           </a:xfrm>
           <a:prstGeom prst="line">
@@ -17032,14 +19381,14 @@
       </p:sp>
       <p:sp>
         <p:nvSpPr>
-          <p:cNvPr id="300" name="Shape 298"/>
+          <p:cNvPr id="367" name="Shape 365"/>
           <p:cNvSpPr/>
           <p:nvPr/>
         </p:nvSpPr>
         <p:spPr>
           <a:xfrm>
             <a:off x="4762300" y="1947672"/>
-            <a:ext cx="0" cy="3447288"/>
+            <a:ext cx="0" cy="3520440"/>
           </a:xfrm>
           <a:prstGeom prst="line">
             <a:avLst/>
@@ -17055,13 +19404,13 @@
       </p:sp>
       <p:sp>
         <p:nvSpPr>
-          <p:cNvPr id="301" name="Shape 299"/>
-          <p:cNvSpPr/>
-          <p:nvPr/>
-        </p:nvSpPr>
-        <p:spPr>
-          <a:xfrm>
-            <a:off x="3665020" y="1956816"/>
+          <p:cNvPr id="368" name="Shape 366"/>
+          <p:cNvSpPr/>
+          <p:nvPr/>
+        </p:nvSpPr>
+        <p:spPr>
+          <a:xfrm>
+            <a:off x="3665020" y="2240280"/>
             <a:ext cx="1143000" cy="155448"/>
           </a:xfrm>
           <a:prstGeom prst="roundRect">
@@ -17082,13 +19431,13 @@
       </p:sp>
       <p:sp>
         <p:nvSpPr>
-          <p:cNvPr id="302" name="Text 300"/>
-          <p:cNvSpPr/>
-          <p:nvPr/>
-        </p:nvSpPr>
-        <p:spPr>
-          <a:xfrm>
-            <a:off x="3665020" y="1956816"/>
+          <p:cNvPr id="369" name="Text 367"/>
+          <p:cNvSpPr/>
+          <p:nvPr/>
+        </p:nvSpPr>
+        <p:spPr>
+          <a:xfrm>
+            <a:off x="3665020" y="2240280"/>
             <a:ext cx="1143000" cy="155448"/>
           </a:xfrm>
           <a:prstGeom prst="rect">
@@ -17123,14 +19472,14 @@
       </p:sp>
       <p:sp>
         <p:nvSpPr>
-          <p:cNvPr id="303" name="Shape 301"/>
+          <p:cNvPr id="370" name="Shape 368"/>
           <p:cNvSpPr/>
           <p:nvPr/>
         </p:nvSpPr>
         <p:spPr>
           <a:xfrm>
             <a:off x="365760" y="1325880"/>
-            <a:ext cx="11460175" cy="4069080"/>
+            <a:ext cx="11460175" cy="4142232"/>
           </a:xfrm>
           <a:prstGeom prst="rect">
             <a:avLst/>
@@ -17150,13 +19499,13 @@
       </p:sp>
       <p:sp>
         <p:nvSpPr>
-          <p:cNvPr id="304" name="Shape 302"/>
-          <p:cNvSpPr/>
-          <p:nvPr/>
-        </p:nvSpPr>
-        <p:spPr>
-          <a:xfrm>
-            <a:off x="9621683" y="5522976"/>
+          <p:cNvPr id="371" name="Shape 369"/>
+          <p:cNvSpPr/>
+          <p:nvPr/>
+        </p:nvSpPr>
+        <p:spPr>
+          <a:xfrm>
+            <a:off x="9621683" y="5577840"/>
             <a:ext cx="2204253" cy="822960"/>
           </a:xfrm>
           <a:prstGeom prst="roundRect">
@@ -17184,13 +19533,13 @@
       </p:sp>
       <p:sp>
         <p:nvSpPr>
-          <p:cNvPr id="305" name="Shape 303"/>
-          <p:cNvSpPr/>
-          <p:nvPr/>
-        </p:nvSpPr>
-        <p:spPr>
-          <a:xfrm>
-            <a:off x="9676547" y="5522976"/>
+          <p:cNvPr id="372" name="Shape 370"/>
+          <p:cNvSpPr/>
+          <p:nvPr/>
+        </p:nvSpPr>
+        <p:spPr>
+          <a:xfrm>
+            <a:off x="9676547" y="5577840"/>
             <a:ext cx="2094525" cy="54864"/>
           </a:xfrm>
           <a:prstGeom prst="rect">
@@ -17209,13 +19558,13 @@
       </p:sp>
       <p:sp>
         <p:nvSpPr>
-          <p:cNvPr id="306" name="Text 304"/>
-          <p:cNvSpPr/>
-          <p:nvPr/>
-        </p:nvSpPr>
-        <p:spPr>
-          <a:xfrm>
-            <a:off x="9731411" y="5614416"/>
+          <p:cNvPr id="373" name="Text 371"/>
+          <p:cNvSpPr/>
+          <p:nvPr/>
+        </p:nvSpPr>
+        <p:spPr>
+          <a:xfrm>
+            <a:off x="9731411" y="5669280"/>
             <a:ext cx="1984797" cy="201168"/>
           </a:xfrm>
           <a:prstGeom prst="rect">
@@ -17250,13 +19599,13 @@
       </p:sp>
       <p:sp>
         <p:nvSpPr>
-          <p:cNvPr id="307" name="Text 305"/>
-          <p:cNvSpPr/>
-          <p:nvPr/>
-        </p:nvSpPr>
-        <p:spPr>
-          <a:xfrm>
-            <a:off x="9731411" y="5815584"/>
+          <p:cNvPr id="374" name="Text 372"/>
+          <p:cNvSpPr/>
+          <p:nvPr/>
+        </p:nvSpPr>
+        <p:spPr>
+          <a:xfrm>
+            <a:off x="9731411" y="5870448"/>
             <a:ext cx="1984797" cy="292608"/>
           </a:xfrm>
           <a:prstGeom prst="rect">
@@ -17291,13 +19640,13 @@
       </p:sp>
       <p:sp>
         <p:nvSpPr>
-          <p:cNvPr id="308" name="Text 306"/>
-          <p:cNvSpPr/>
-          <p:nvPr/>
-        </p:nvSpPr>
-        <p:spPr>
-          <a:xfrm>
-            <a:off x="9731411" y="6108192"/>
+          <p:cNvPr id="375" name="Text 373"/>
+          <p:cNvSpPr/>
+          <p:nvPr/>
+        </p:nvSpPr>
+        <p:spPr>
+          <a:xfrm>
+            <a:off x="9731411" y="6163056"/>
             <a:ext cx="1984797" cy="182880"/>
           </a:xfrm>
           <a:prstGeom prst="rect">
@@ -17332,13 +19681,13 @@
       </p:sp>
       <p:sp>
         <p:nvSpPr>
-          <p:cNvPr id="309" name="Shape 307"/>
-          <p:cNvSpPr/>
-          <p:nvPr/>
-        </p:nvSpPr>
-        <p:spPr>
-          <a:xfrm>
-            <a:off x="7307702" y="5522976"/>
+          <p:cNvPr id="376" name="Shape 374"/>
+          <p:cNvSpPr/>
+          <p:nvPr/>
+        </p:nvSpPr>
+        <p:spPr>
+          <a:xfrm>
+            <a:off x="7307702" y="5577840"/>
             <a:ext cx="2204253" cy="822960"/>
           </a:xfrm>
           <a:prstGeom prst="roundRect">
@@ -17366,13 +19715,13 @@
       </p:sp>
       <p:sp>
         <p:nvSpPr>
-          <p:cNvPr id="310" name="Shape 308"/>
-          <p:cNvSpPr/>
-          <p:nvPr/>
-        </p:nvSpPr>
-        <p:spPr>
-          <a:xfrm>
-            <a:off x="7362566" y="5522976"/>
+          <p:cNvPr id="377" name="Shape 375"/>
+          <p:cNvSpPr/>
+          <p:nvPr/>
+        </p:nvSpPr>
+        <p:spPr>
+          <a:xfrm>
+            <a:off x="7362566" y="5577840"/>
             <a:ext cx="2094525" cy="54864"/>
           </a:xfrm>
           <a:prstGeom prst="rect">
@@ -17391,13 +19740,13 @@
       </p:sp>
       <p:sp>
         <p:nvSpPr>
-          <p:cNvPr id="311" name="Text 309"/>
-          <p:cNvSpPr/>
-          <p:nvPr/>
-        </p:nvSpPr>
-        <p:spPr>
-          <a:xfrm>
-            <a:off x="7417430" y="5614416"/>
+          <p:cNvPr id="378" name="Text 376"/>
+          <p:cNvSpPr/>
+          <p:nvPr/>
+        </p:nvSpPr>
+        <p:spPr>
+          <a:xfrm>
+            <a:off x="7417430" y="5669280"/>
             <a:ext cx="1984797" cy="201168"/>
           </a:xfrm>
           <a:prstGeom prst="rect">
@@ -17432,13 +19781,13 @@
       </p:sp>
       <p:sp>
         <p:nvSpPr>
-          <p:cNvPr id="312" name="Text 310"/>
-          <p:cNvSpPr/>
-          <p:nvPr/>
-        </p:nvSpPr>
-        <p:spPr>
-          <a:xfrm>
-            <a:off x="7417430" y="5815584"/>
+          <p:cNvPr id="379" name="Text 377"/>
+          <p:cNvSpPr/>
+          <p:nvPr/>
+        </p:nvSpPr>
+        <p:spPr>
+          <a:xfrm>
+            <a:off x="7417430" y="5870448"/>
             <a:ext cx="1984797" cy="292608"/>
           </a:xfrm>
           <a:prstGeom prst="rect">
@@ -17473,13 +19822,13 @@
       </p:sp>
       <p:sp>
         <p:nvSpPr>
-          <p:cNvPr id="313" name="Text 311"/>
-          <p:cNvSpPr/>
-          <p:nvPr/>
-        </p:nvSpPr>
-        <p:spPr>
-          <a:xfrm>
-            <a:off x="7417430" y="6108192"/>
+          <p:cNvPr id="380" name="Text 378"/>
+          <p:cNvSpPr/>
+          <p:nvPr/>
+        </p:nvSpPr>
+        <p:spPr>
+          <a:xfrm>
+            <a:off x="7417430" y="6163056"/>
             <a:ext cx="1984797" cy="182880"/>
           </a:xfrm>
           <a:prstGeom prst="rect">
@@ -17514,13 +19863,13 @@
       </p:sp>
       <p:sp>
         <p:nvSpPr>
-          <p:cNvPr id="314" name="Shape 312"/>
-          <p:cNvSpPr/>
-          <p:nvPr/>
-        </p:nvSpPr>
-        <p:spPr>
-          <a:xfrm>
-            <a:off x="4993721" y="5522976"/>
+          <p:cNvPr id="381" name="Shape 379"/>
+          <p:cNvSpPr/>
+          <p:nvPr/>
+        </p:nvSpPr>
+        <p:spPr>
+          <a:xfrm>
+            <a:off x="4993721" y="5577840"/>
             <a:ext cx="2204253" cy="822960"/>
           </a:xfrm>
           <a:prstGeom prst="roundRect">
@@ -17548,13 +19897,13 @@
       </p:sp>
       <p:sp>
         <p:nvSpPr>
-          <p:cNvPr id="315" name="Shape 313"/>
-          <p:cNvSpPr/>
-          <p:nvPr/>
-        </p:nvSpPr>
-        <p:spPr>
-          <a:xfrm>
-            <a:off x="5048585" y="5522976"/>
+          <p:cNvPr id="382" name="Shape 380"/>
+          <p:cNvSpPr/>
+          <p:nvPr/>
+        </p:nvSpPr>
+        <p:spPr>
+          <a:xfrm>
+            <a:off x="5048585" y="5577840"/>
             <a:ext cx="2094525" cy="54864"/>
           </a:xfrm>
           <a:prstGeom prst="rect">
@@ -17573,13 +19922,13 @@
       </p:sp>
       <p:sp>
         <p:nvSpPr>
-          <p:cNvPr id="316" name="Text 314"/>
-          <p:cNvSpPr/>
-          <p:nvPr/>
-        </p:nvSpPr>
-        <p:spPr>
-          <a:xfrm>
-            <a:off x="5103449" y="5614416"/>
+          <p:cNvPr id="383" name="Text 381"/>
+          <p:cNvSpPr/>
+          <p:nvPr/>
+        </p:nvSpPr>
+        <p:spPr>
+          <a:xfrm>
+            <a:off x="5103449" y="5669280"/>
             <a:ext cx="1984797" cy="201168"/>
           </a:xfrm>
           <a:prstGeom prst="rect">
@@ -17614,13 +19963,13 @@
       </p:sp>
       <p:sp>
         <p:nvSpPr>
-          <p:cNvPr id="317" name="Text 315"/>
-          <p:cNvSpPr/>
-          <p:nvPr/>
-        </p:nvSpPr>
-        <p:spPr>
-          <a:xfrm>
-            <a:off x="5103449" y="5815584"/>
+          <p:cNvPr id="384" name="Text 382"/>
+          <p:cNvSpPr/>
+          <p:nvPr/>
+        </p:nvSpPr>
+        <p:spPr>
+          <a:xfrm>
+            <a:off x="5103449" y="5870448"/>
             <a:ext cx="1984797" cy="292608"/>
           </a:xfrm>
           <a:prstGeom prst="rect">
@@ -17655,13 +20004,13 @@
       </p:sp>
       <p:sp>
         <p:nvSpPr>
-          <p:cNvPr id="318" name="Text 316"/>
-          <p:cNvSpPr/>
-          <p:nvPr/>
-        </p:nvSpPr>
-        <p:spPr>
-          <a:xfrm>
-            <a:off x="5103449" y="6108192"/>
+          <p:cNvPr id="385" name="Text 383"/>
+          <p:cNvSpPr/>
+          <p:nvPr/>
+        </p:nvSpPr>
+        <p:spPr>
+          <a:xfrm>
+            <a:off x="5103449" y="6163056"/>
             <a:ext cx="1984797" cy="182880"/>
           </a:xfrm>
           <a:prstGeom prst="rect">
@@ -17696,13 +20045,13 @@
       </p:sp>
       <p:sp>
         <p:nvSpPr>
-          <p:cNvPr id="319" name="Shape 317"/>
-          <p:cNvSpPr/>
-          <p:nvPr/>
-        </p:nvSpPr>
-        <p:spPr>
-          <a:xfrm>
-            <a:off x="2679741" y="5522976"/>
+          <p:cNvPr id="386" name="Shape 384"/>
+          <p:cNvSpPr/>
+          <p:nvPr/>
+        </p:nvSpPr>
+        <p:spPr>
+          <a:xfrm>
+            <a:off x="2679741" y="5577840"/>
             <a:ext cx="2204253" cy="822960"/>
           </a:xfrm>
           <a:prstGeom prst="roundRect">
@@ -17730,13 +20079,13 @@
       </p:sp>
       <p:sp>
         <p:nvSpPr>
-          <p:cNvPr id="320" name="Shape 318"/>
-          <p:cNvSpPr/>
-          <p:nvPr/>
-        </p:nvSpPr>
-        <p:spPr>
-          <a:xfrm>
-            <a:off x="2734605" y="5522976"/>
+          <p:cNvPr id="387" name="Shape 385"/>
+          <p:cNvSpPr/>
+          <p:nvPr/>
+        </p:nvSpPr>
+        <p:spPr>
+          <a:xfrm>
+            <a:off x="2734605" y="5577840"/>
             <a:ext cx="2094525" cy="54864"/>
           </a:xfrm>
           <a:prstGeom prst="rect">
@@ -17755,13 +20104,13 @@
       </p:sp>
       <p:sp>
         <p:nvSpPr>
-          <p:cNvPr id="321" name="Text 319"/>
-          <p:cNvSpPr/>
-          <p:nvPr/>
-        </p:nvSpPr>
-        <p:spPr>
-          <a:xfrm>
-            <a:off x="2789469" y="5614416"/>
+          <p:cNvPr id="388" name="Text 386"/>
+          <p:cNvSpPr/>
+          <p:nvPr/>
+        </p:nvSpPr>
+        <p:spPr>
+          <a:xfrm>
+            <a:off x="2789469" y="5669280"/>
             <a:ext cx="1984797" cy="201168"/>
           </a:xfrm>
           <a:prstGeom prst="rect">
@@ -17796,13 +20145,13 @@
       </p:sp>
       <p:sp>
         <p:nvSpPr>
-          <p:cNvPr id="322" name="Text 320"/>
-          <p:cNvSpPr/>
-          <p:nvPr/>
-        </p:nvSpPr>
-        <p:spPr>
-          <a:xfrm>
-            <a:off x="2789469" y="5815584"/>
+          <p:cNvPr id="389" name="Text 387"/>
+          <p:cNvSpPr/>
+          <p:nvPr/>
+        </p:nvSpPr>
+        <p:spPr>
+          <a:xfrm>
+            <a:off x="2789469" y="5870448"/>
             <a:ext cx="1984797" cy="292608"/>
           </a:xfrm>
           <a:prstGeom prst="rect">
@@ -17837,13 +20186,13 @@
       </p:sp>
       <p:sp>
         <p:nvSpPr>
-          <p:cNvPr id="323" name="Text 321"/>
-          <p:cNvSpPr/>
-          <p:nvPr/>
-        </p:nvSpPr>
-        <p:spPr>
-          <a:xfrm>
-            <a:off x="2789469" y="6108192"/>
+          <p:cNvPr id="390" name="Text 388"/>
+          <p:cNvSpPr/>
+          <p:nvPr/>
+        </p:nvSpPr>
+        <p:spPr>
+          <a:xfrm>
+            <a:off x="2789469" y="6163056"/>
             <a:ext cx="1984797" cy="182880"/>
           </a:xfrm>
           <a:prstGeom prst="rect">
@@ -17878,13 +20227,13 @@
       </p:sp>
       <p:sp>
         <p:nvSpPr>
-          <p:cNvPr id="324" name="Shape 322"/>
-          <p:cNvSpPr/>
-          <p:nvPr/>
-        </p:nvSpPr>
-        <p:spPr>
-          <a:xfrm>
-            <a:off x="365760" y="5522976"/>
+          <p:cNvPr id="391" name="Shape 389"/>
+          <p:cNvSpPr/>
+          <p:nvPr/>
+        </p:nvSpPr>
+        <p:spPr>
+          <a:xfrm>
+            <a:off x="365760" y="5577840"/>
             <a:ext cx="2204253" cy="822960"/>
           </a:xfrm>
           <a:prstGeom prst="roundRect">
@@ -17912,13 +20261,13 @@
       </p:sp>
       <p:sp>
         <p:nvSpPr>
-          <p:cNvPr id="325" name="Shape 323"/>
-          <p:cNvSpPr/>
-          <p:nvPr/>
-        </p:nvSpPr>
-        <p:spPr>
-          <a:xfrm>
-            <a:off x="420624" y="5522976"/>
+          <p:cNvPr id="392" name="Shape 390"/>
+          <p:cNvSpPr/>
+          <p:nvPr/>
+        </p:nvSpPr>
+        <p:spPr>
+          <a:xfrm>
+            <a:off x="420624" y="5577840"/>
             <a:ext cx="2094525" cy="54864"/>
           </a:xfrm>
           <a:prstGeom prst="rect">
@@ -17937,13 +20286,13 @@
       </p:sp>
       <p:sp>
         <p:nvSpPr>
-          <p:cNvPr id="326" name="Text 324"/>
-          <p:cNvSpPr/>
-          <p:nvPr/>
-        </p:nvSpPr>
-        <p:spPr>
-          <a:xfrm>
-            <a:off x="475488" y="5614416"/>
+          <p:cNvPr id="393" name="Text 391"/>
+          <p:cNvSpPr/>
+          <p:nvPr/>
+        </p:nvSpPr>
+        <p:spPr>
+          <a:xfrm>
+            <a:off x="475488" y="5669280"/>
             <a:ext cx="1984797" cy="201168"/>
           </a:xfrm>
           <a:prstGeom prst="rect">
@@ -17978,13 +20327,13 @@
       </p:sp>
       <p:sp>
         <p:nvSpPr>
-          <p:cNvPr id="327" name="Text 325"/>
-          <p:cNvSpPr/>
-          <p:nvPr/>
-        </p:nvSpPr>
-        <p:spPr>
-          <a:xfrm>
-            <a:off x="475488" y="5815584"/>
+          <p:cNvPr id="394" name="Text 392"/>
+          <p:cNvSpPr/>
+          <p:nvPr/>
+        </p:nvSpPr>
+        <p:spPr>
+          <a:xfrm>
+            <a:off x="475488" y="5870448"/>
             <a:ext cx="1984797" cy="292608"/>
           </a:xfrm>
           <a:prstGeom prst="rect">
@@ -18019,13 +20368,13 @@
       </p:sp>
       <p:sp>
         <p:nvSpPr>
-          <p:cNvPr id="328" name="Text 326"/>
-          <p:cNvSpPr/>
-          <p:nvPr/>
-        </p:nvSpPr>
-        <p:spPr>
-          <a:xfrm>
-            <a:off x="475488" y="6108192"/>
+          <p:cNvPr id="395" name="Text 393"/>
+          <p:cNvSpPr/>
+          <p:nvPr/>
+        </p:nvSpPr>
+        <p:spPr>
+          <a:xfrm>
+            <a:off x="475488" y="6163056"/>
             <a:ext cx="1984797" cy="182880"/>
           </a:xfrm>
           <a:prstGeom prst="rect">
@@ -18419,8 +20768,8 @@
         </p:nvSpPr>
         <p:spPr>
           <a:xfrm>
-            <a:off x="9835652" y="2176272"/>
-            <a:ext cx="1606235" cy="621792"/>
+            <a:off x="9835652" y="2157984"/>
+            <a:ext cx="1606235" cy="411480"/>
           </a:xfrm>
           <a:prstGeom prst="rect">
             <a:avLst/>
@@ -18454,7 +20803,48 @@
       </p:sp>
       <p:sp>
         <p:nvSpPr>
-          <p:cNvPr id="11" name="Shape 9"/>
+          <p:cNvPr id="11" name="Text 9"/>
+          <p:cNvSpPr/>
+          <p:nvPr/>
+        </p:nvSpPr>
+        <p:spPr>
+          <a:xfrm>
+            <a:off x="9835652" y="2542032"/>
+            <a:ext cx="1606235" cy="228600"/>
+          </a:xfrm>
+          <a:prstGeom prst="rect">
+            <a:avLst/>
+          </a:prstGeom>
+          <a:noFill/>
+          <a:ln/>
+        </p:spPr>
+        <p:txBody>
+          <a:bodyPr wrap="square" lIns="0" tIns="0" rIns="0" bIns="0" rtlCol="0" anchor="t">
+            <a:normAutofit/>
+          </a:bodyPr>
+          <a:lstStyle/>
+          <a:p>
+            <a:pPr rtl="1" algn="r" indent="0" marL="0">
+              <a:buNone/>
+            </a:pPr>
+            <a:r>
+              <a:rPr lang="ar-SA" altLang="en-US" sz="750" b="1" dirty="0">
+                <a:solidFill>
+                  <a:srgbClr val="7A3A30"/>
+                </a:solidFill>
+                <a:latin typeface="Arial" pitchFamily="34" charset="0"/>
+                <a:ea typeface="Arial" pitchFamily="34" charset="-122"/>
+                <a:cs typeface="Arial" pitchFamily="34" charset="-120"/>
+              </a:rPr>
+              <a:t>13 أكتوبر → 14 أكتوبر · 2 يوم</a:t>
+            </a:r>
+            <a:endParaRPr lang="ar-SA" sz="750" dirty="0"/>
+          </a:p>
+        </p:txBody>
+      </p:sp>
+      <p:sp>
+        <p:nvSpPr>
+          <p:cNvPr id="12" name="Shape 10"/>
           <p:cNvSpPr/>
           <p:nvPr/>
         </p:nvSpPr>
@@ -18479,7 +20869,7 @@
       </p:sp>
       <p:sp>
         <p:nvSpPr>
-          <p:cNvPr id="12" name="Shape 10"/>
+          <p:cNvPr id="13" name="Shape 11"/>
           <p:cNvSpPr/>
           <p:nvPr/>
         </p:nvSpPr>
@@ -18504,7 +20894,7 @@
       </p:sp>
       <p:sp>
         <p:nvSpPr>
-          <p:cNvPr id="13" name="Text 11"/>
+          <p:cNvPr id="14" name="Text 12"/>
           <p:cNvSpPr/>
           <p:nvPr/>
         </p:nvSpPr>
@@ -18545,14 +20935,14 @@
       </p:sp>
       <p:sp>
         <p:nvSpPr>
-          <p:cNvPr id="14" name="Text 12"/>
-          <p:cNvSpPr/>
-          <p:nvPr/>
-        </p:nvSpPr>
-        <p:spPr>
-          <a:xfrm>
-            <a:off x="7543617" y="2176272"/>
-            <a:ext cx="1606235" cy="621792"/>
+          <p:cNvPr id="15" name="Text 13"/>
+          <p:cNvSpPr/>
+          <p:nvPr/>
+        </p:nvSpPr>
+        <p:spPr>
+          <a:xfrm>
+            <a:off x="7543617" y="2157984"/>
+            <a:ext cx="1606235" cy="411480"/>
           </a:xfrm>
           <a:prstGeom prst="rect">
             <a:avLst/>
@@ -18586,7 +20976,48 @@
       </p:sp>
       <p:sp>
         <p:nvSpPr>
-          <p:cNvPr id="15" name="Shape 13"/>
+          <p:cNvPr id="16" name="Text 14"/>
+          <p:cNvSpPr/>
+          <p:nvPr/>
+        </p:nvSpPr>
+        <p:spPr>
+          <a:xfrm>
+            <a:off x="7543617" y="2542032"/>
+            <a:ext cx="1606235" cy="228600"/>
+          </a:xfrm>
+          <a:prstGeom prst="rect">
+            <a:avLst/>
+          </a:prstGeom>
+          <a:noFill/>
+          <a:ln/>
+        </p:spPr>
+        <p:txBody>
+          <a:bodyPr wrap="square" lIns="0" tIns="0" rIns="0" bIns="0" rtlCol="0" anchor="t">
+            <a:normAutofit/>
+          </a:bodyPr>
+          <a:lstStyle/>
+          <a:p>
+            <a:pPr rtl="1" algn="r" indent="0" marL="0">
+              <a:buNone/>
+            </a:pPr>
+            <a:r>
+              <a:rPr lang="ar-SA" altLang="en-US" sz="750" b="1" dirty="0">
+                <a:solidFill>
+                  <a:srgbClr val="7A3A30"/>
+                </a:solidFill>
+                <a:latin typeface="Arial" pitchFamily="34" charset="0"/>
+                <a:ea typeface="Arial" pitchFamily="34" charset="-122"/>
+                <a:cs typeface="Arial" pitchFamily="34" charset="-120"/>
+              </a:rPr>
+              <a:t>14 أكتوبر → 17 أكتوبر · 3 يوم · A1 SS +1</a:t>
+            </a:r>
+            <a:endParaRPr lang="ar-SA" sz="750" dirty="0"/>
+          </a:p>
+        </p:txBody>
+      </p:sp>
+      <p:sp>
+        <p:nvSpPr>
+          <p:cNvPr id="17" name="Shape 15"/>
           <p:cNvSpPr/>
           <p:nvPr/>
         </p:nvSpPr>
@@ -18611,7 +21042,7 @@
       </p:sp>
       <p:sp>
         <p:nvSpPr>
-          <p:cNvPr id="16" name="Shape 14"/>
+          <p:cNvPr id="18" name="Shape 16"/>
           <p:cNvSpPr/>
           <p:nvPr/>
         </p:nvSpPr>
@@ -18636,7 +21067,7 @@
       </p:sp>
       <p:sp>
         <p:nvSpPr>
-          <p:cNvPr id="17" name="Text 15"/>
+          <p:cNvPr id="19" name="Text 17"/>
           <p:cNvSpPr/>
           <p:nvPr/>
         </p:nvSpPr>
@@ -18677,14 +21108,14 @@
       </p:sp>
       <p:sp>
         <p:nvSpPr>
-          <p:cNvPr id="18" name="Text 16"/>
-          <p:cNvSpPr/>
-          <p:nvPr/>
-        </p:nvSpPr>
-        <p:spPr>
-          <a:xfrm>
-            <a:off x="5251582" y="2176272"/>
-            <a:ext cx="1606235" cy="621792"/>
+          <p:cNvPr id="20" name="Text 18"/>
+          <p:cNvSpPr/>
+          <p:nvPr/>
+        </p:nvSpPr>
+        <p:spPr>
+          <a:xfrm>
+            <a:off x="5251582" y="2157984"/>
+            <a:ext cx="1606235" cy="411480"/>
           </a:xfrm>
           <a:prstGeom prst="rect">
             <a:avLst/>
@@ -18718,7 +21149,48 @@
       </p:sp>
       <p:sp>
         <p:nvSpPr>
-          <p:cNvPr id="19" name="Shape 17"/>
+          <p:cNvPr id="21" name="Text 19"/>
+          <p:cNvSpPr/>
+          <p:nvPr/>
+        </p:nvSpPr>
+        <p:spPr>
+          <a:xfrm>
+            <a:off x="5251582" y="2542032"/>
+            <a:ext cx="1606235" cy="228600"/>
+          </a:xfrm>
+          <a:prstGeom prst="rect">
+            <a:avLst/>
+          </a:prstGeom>
+          <a:noFill/>
+          <a:ln/>
+        </p:spPr>
+        <p:txBody>
+          <a:bodyPr wrap="square" lIns="0" tIns="0" rIns="0" bIns="0" rtlCol="0" anchor="t">
+            <a:normAutofit/>
+          </a:bodyPr>
+          <a:lstStyle/>
+          <a:p>
+            <a:pPr rtl="1" algn="r" indent="0" marL="0">
+              <a:buNone/>
+            </a:pPr>
+            <a:r>
+              <a:rPr lang="ar-SA" altLang="en-US" sz="750" b="1" dirty="0">
+                <a:solidFill>
+                  <a:srgbClr val="7A3A30"/>
+                </a:solidFill>
+                <a:latin typeface="Arial" pitchFamily="34" charset="0"/>
+                <a:ea typeface="Arial" pitchFamily="34" charset="-122"/>
+                <a:cs typeface="Arial" pitchFamily="34" charset="-120"/>
+              </a:rPr>
+              <a:t>15 أكتوبر → 18 أكتوبر · 3 يوم · A2 SS +1</a:t>
+            </a:r>
+            <a:endParaRPr lang="ar-SA" sz="750" dirty="0"/>
+          </a:p>
+        </p:txBody>
+      </p:sp>
+      <p:sp>
+        <p:nvSpPr>
+          <p:cNvPr id="22" name="Shape 20"/>
           <p:cNvSpPr/>
           <p:nvPr/>
         </p:nvSpPr>
@@ -18743,7 +21215,7 @@
       </p:sp>
       <p:sp>
         <p:nvSpPr>
-          <p:cNvPr id="20" name="Shape 18"/>
+          <p:cNvPr id="23" name="Shape 21"/>
           <p:cNvSpPr/>
           <p:nvPr/>
         </p:nvSpPr>
@@ -18768,7 +21240,7 @@
       </p:sp>
       <p:sp>
         <p:nvSpPr>
-          <p:cNvPr id="21" name="Text 19"/>
+          <p:cNvPr id="24" name="Text 22"/>
           <p:cNvSpPr/>
           <p:nvPr/>
         </p:nvSpPr>
@@ -18809,14 +21281,14 @@
       </p:sp>
       <p:sp>
         <p:nvSpPr>
-          <p:cNvPr id="22" name="Text 20"/>
-          <p:cNvSpPr/>
-          <p:nvPr/>
-        </p:nvSpPr>
-        <p:spPr>
-          <a:xfrm>
-            <a:off x="2959547" y="2176272"/>
-            <a:ext cx="1606235" cy="621792"/>
+          <p:cNvPr id="25" name="Text 23"/>
+          <p:cNvSpPr/>
+          <p:nvPr/>
+        </p:nvSpPr>
+        <p:spPr>
+          <a:xfrm>
+            <a:off x="2959547" y="2157984"/>
+            <a:ext cx="1606235" cy="411480"/>
           </a:xfrm>
           <a:prstGeom prst="rect">
             <a:avLst/>
@@ -18850,7 +21322,48 @@
       </p:sp>
       <p:sp>
         <p:nvSpPr>
-          <p:cNvPr id="23" name="Shape 21"/>
+          <p:cNvPr id="26" name="Text 24"/>
+          <p:cNvSpPr/>
+          <p:nvPr/>
+        </p:nvSpPr>
+        <p:spPr>
+          <a:xfrm>
+            <a:off x="2959547" y="2542032"/>
+            <a:ext cx="1606235" cy="228600"/>
+          </a:xfrm>
+          <a:prstGeom prst="rect">
+            <a:avLst/>
+          </a:prstGeom>
+          <a:noFill/>
+          <a:ln/>
+        </p:spPr>
+        <p:txBody>
+          <a:bodyPr wrap="square" lIns="0" tIns="0" rIns="0" bIns="0" rtlCol="0" anchor="t">
+            <a:normAutofit/>
+          </a:bodyPr>
+          <a:lstStyle/>
+          <a:p>
+            <a:pPr rtl="1" algn="r" indent="0" marL="0">
+              <a:buNone/>
+            </a:pPr>
+            <a:r>
+              <a:rPr lang="ar-SA" altLang="en-US" sz="750" b="1" dirty="0">
+                <a:solidFill>
+                  <a:srgbClr val="7A3A30"/>
+                </a:solidFill>
+                <a:latin typeface="Arial" pitchFamily="34" charset="0"/>
+                <a:ea typeface="Arial" pitchFamily="34" charset="-122"/>
+                <a:cs typeface="Arial" pitchFamily="34" charset="-120"/>
+              </a:rPr>
+              <a:t>17 أكتوبر → 19 أكتوبر · 3 يوم · A3 SS +1</a:t>
+            </a:r>
+            <a:endParaRPr lang="ar-SA" sz="750" dirty="0"/>
+          </a:p>
+        </p:txBody>
+      </p:sp>
+      <p:sp>
+        <p:nvSpPr>
+          <p:cNvPr id="27" name="Shape 25"/>
           <p:cNvSpPr/>
           <p:nvPr/>
         </p:nvSpPr>
@@ -18875,7 +21388,7 @@
       </p:sp>
       <p:sp>
         <p:nvSpPr>
-          <p:cNvPr id="24" name="Shape 22"/>
+          <p:cNvPr id="28" name="Shape 26"/>
           <p:cNvSpPr/>
           <p:nvPr/>
         </p:nvSpPr>
@@ -18900,7 +21413,7 @@
       </p:sp>
       <p:sp>
         <p:nvSpPr>
-          <p:cNvPr id="25" name="Text 23"/>
+          <p:cNvPr id="29" name="Text 27"/>
           <p:cNvSpPr/>
           <p:nvPr/>
         </p:nvSpPr>
@@ -18941,14 +21454,14 @@
       </p:sp>
       <p:sp>
         <p:nvSpPr>
-          <p:cNvPr id="26" name="Text 24"/>
-          <p:cNvSpPr/>
-          <p:nvPr/>
-        </p:nvSpPr>
-        <p:spPr>
-          <a:xfrm>
-            <a:off x="667512" y="2176272"/>
-            <a:ext cx="1606235" cy="621792"/>
+          <p:cNvPr id="30" name="Text 28"/>
+          <p:cNvSpPr/>
+          <p:nvPr/>
+        </p:nvSpPr>
+        <p:spPr>
+          <a:xfrm>
+            <a:off x="667512" y="2157984"/>
+            <a:ext cx="1606235" cy="411480"/>
           </a:xfrm>
           <a:prstGeom prst="rect">
             <a:avLst/>
@@ -18982,7 +21495,89 @@
       </p:sp>
       <p:sp>
         <p:nvSpPr>
-          <p:cNvPr id="27" name="Shape 25"/>
+          <p:cNvPr id="31" name="Text 29"/>
+          <p:cNvSpPr/>
+          <p:nvPr/>
+        </p:nvSpPr>
+        <p:spPr>
+          <a:xfrm>
+            <a:off x="667512" y="2542032"/>
+            <a:ext cx="1606235" cy="228600"/>
+          </a:xfrm>
+          <a:prstGeom prst="rect">
+            <a:avLst/>
+          </a:prstGeom>
+          <a:noFill/>
+          <a:ln/>
+        </p:spPr>
+        <p:txBody>
+          <a:bodyPr wrap="square" lIns="0" tIns="0" rIns="0" bIns="0" rtlCol="0" anchor="t">
+            <a:normAutofit/>
+          </a:bodyPr>
+          <a:lstStyle/>
+          <a:p>
+            <a:pPr rtl="1" algn="r" indent="0" marL="0">
+              <a:buNone/>
+            </a:pPr>
+            <a:r>
+              <a:rPr lang="ar-SA" altLang="en-US" sz="750" b="1" dirty="0">
+                <a:solidFill>
+                  <a:srgbClr val="7A3A30"/>
+                </a:solidFill>
+                <a:latin typeface="Arial" pitchFamily="34" charset="0"/>
+                <a:ea typeface="Arial" pitchFamily="34" charset="-122"/>
+                <a:cs typeface="Arial" pitchFamily="34" charset="-120"/>
+              </a:rPr>
+              <a:t>18 أكتوبر → 19 أكتوبر · 2 يوم · A4 SS +1</a:t>
+            </a:r>
+            <a:endParaRPr lang="ar-SA" sz="750" dirty="0"/>
+          </a:p>
+        </p:txBody>
+      </p:sp>
+      <p:sp>
+        <p:nvSpPr>
+          <p:cNvPr id="32" name="Text 30"/>
+          <p:cNvSpPr/>
+          <p:nvPr/>
+        </p:nvSpPr>
+        <p:spPr>
+          <a:xfrm>
+            <a:off x="365760" y="2852928"/>
+            <a:ext cx="11460175" cy="182880"/>
+          </a:xfrm>
+          <a:prstGeom prst="rect">
+            <a:avLst/>
+          </a:prstGeom>
+          <a:noFill/>
+          <a:ln/>
+        </p:spPr>
+        <p:txBody>
+          <a:bodyPr wrap="square" lIns="0" tIns="0" rIns="0" bIns="0" rtlCol="0" anchor="ctr">
+            <a:normAutofit/>
+          </a:bodyPr>
+          <a:lstStyle/>
+          <a:p>
+            <a:pPr rtl="1" algn="r" indent="0" marL="0">
+              <a:buNone/>
+            </a:pPr>
+            <a:r>
+              <a:rPr lang="ar-SA" altLang="en-US" sz="750" dirty="0">
+                <a:solidFill>
+                  <a:srgbClr val="66707A"/>
+                </a:solidFill>
+                <a:latin typeface="Arial" pitchFamily="34" charset="0"/>
+                <a:ea typeface="Arial" pitchFamily="34" charset="-122"/>
+                <a:cs typeface="Arial" pitchFamily="34" charset="-120"/>
+              </a:rPr>
+              <a:t>مدد وعلاقات الأنشطة الخمسة الفرعية مقترحة لتقع ضمن 6 أيام عمل للنشاط A (قابلة للتعديل).</a:t>
+            </a:r>
+            <a:endParaRPr lang="ar-SA" sz="750" dirty="0"/>
+          </a:p>
+        </p:txBody>
+      </p:sp>
+      <p:sp>
+        <p:nvSpPr>
+          <p:cNvPr id="33" name="Shape 31"/>
           <p:cNvSpPr/>
           <p:nvPr/>
         </p:nvSpPr>
@@ -19007,7 +21602,7 @@
       </p:sp>
       <p:sp>
         <p:nvSpPr>
-          <p:cNvPr id="28" name="Text 26"/>
+          <p:cNvPr id="34" name="Text 32"/>
           <p:cNvSpPr/>
           <p:nvPr/>
         </p:nvSpPr>
@@ -19048,7 +21643,7 @@
       </p:sp>
       <p:sp>
         <p:nvSpPr>
-          <p:cNvPr id="29" name="Shape 27"/>
+          <p:cNvPr id="35" name="Shape 33"/>
           <p:cNvSpPr/>
           <p:nvPr/>
         </p:nvSpPr>
@@ -19073,7 +21668,7 @@
       </p:sp>
       <p:sp>
         <p:nvSpPr>
-          <p:cNvPr id="30" name="Text 28"/>
+          <p:cNvPr id="36" name="Text 34"/>
           <p:cNvSpPr/>
           <p:nvPr/>
         </p:nvSpPr>
@@ -19114,7 +21709,7 @@
       </p:sp>
       <p:sp>
         <p:nvSpPr>
-          <p:cNvPr id="31" name="Text 29"/>
+          <p:cNvPr id="37" name="Text 35"/>
           <p:cNvSpPr/>
           <p:nvPr/>
         </p:nvSpPr>
@@ -19155,7 +21750,7 @@
       </p:sp>
       <p:sp>
         <p:nvSpPr>
-          <p:cNvPr id="32" name="Shape 30"/>
+          <p:cNvPr id="38" name="Shape 36"/>
           <p:cNvSpPr/>
           <p:nvPr/>
         </p:nvSpPr>
@@ -19180,7 +21775,7 @@
       </p:sp>
       <p:sp>
         <p:nvSpPr>
-          <p:cNvPr id="33" name="Text 31"/>
+          <p:cNvPr id="39" name="Text 37"/>
           <p:cNvSpPr/>
           <p:nvPr/>
         </p:nvSpPr>
@@ -19221,7 +21816,7 @@
       </p:sp>
       <p:sp>
         <p:nvSpPr>
-          <p:cNvPr id="34" name="Text 32"/>
+          <p:cNvPr id="40" name="Text 38"/>
           <p:cNvSpPr/>
           <p:nvPr/>
         </p:nvSpPr>
@@ -19262,7 +21857,7 @@
       </p:sp>
       <p:sp>
         <p:nvSpPr>
-          <p:cNvPr id="35" name="Shape 33"/>
+          <p:cNvPr id="41" name="Shape 39"/>
           <p:cNvSpPr/>
           <p:nvPr/>
         </p:nvSpPr>
@@ -19287,7 +21882,7 @@
       </p:sp>
       <p:sp>
         <p:nvSpPr>
-          <p:cNvPr id="36" name="Text 34"/>
+          <p:cNvPr id="42" name="Text 40"/>
           <p:cNvSpPr/>
           <p:nvPr/>
         </p:nvSpPr>
@@ -19328,7 +21923,7 @@
       </p:sp>
       <p:sp>
         <p:nvSpPr>
-          <p:cNvPr id="37" name="Text 35"/>
+          <p:cNvPr id="43" name="Text 41"/>
           <p:cNvSpPr/>
           <p:nvPr/>
         </p:nvSpPr>
@@ -19369,7 +21964,7 @@
       </p:sp>
       <p:sp>
         <p:nvSpPr>
-          <p:cNvPr id="38" name="Shape 36"/>
+          <p:cNvPr id="44" name="Shape 42"/>
           <p:cNvSpPr/>
           <p:nvPr/>
         </p:nvSpPr>
@@ -19394,7 +21989,7 @@
       </p:sp>
       <p:sp>
         <p:nvSpPr>
-          <p:cNvPr id="39" name="Text 37"/>
+          <p:cNvPr id="45" name="Text 43"/>
           <p:cNvSpPr/>
           <p:nvPr/>
         </p:nvSpPr>
@@ -19435,7 +22030,7 @@
       </p:sp>
       <p:sp>
         <p:nvSpPr>
-          <p:cNvPr id="40" name="Text 38"/>
+          <p:cNvPr id="46" name="Text 44"/>
           <p:cNvSpPr/>
           <p:nvPr/>
         </p:nvSpPr>
@@ -19476,7 +22071,7 @@
       </p:sp>
       <p:sp>
         <p:nvSpPr>
-          <p:cNvPr id="41" name="Shape 39"/>
+          <p:cNvPr id="47" name="Shape 45"/>
           <p:cNvSpPr/>
           <p:nvPr/>
         </p:nvSpPr>
@@ -19501,7 +22096,7 @@
       </p:sp>
       <p:sp>
         <p:nvSpPr>
-          <p:cNvPr id="42" name="Text 40"/>
+          <p:cNvPr id="48" name="Text 46"/>
           <p:cNvSpPr/>
           <p:nvPr/>
         </p:nvSpPr>
@@ -19542,7 +22137,7 @@
       </p:sp>
       <p:sp>
         <p:nvSpPr>
-          <p:cNvPr id="43" name="Text 41"/>
+          <p:cNvPr id="49" name="Text 47"/>
           <p:cNvSpPr/>
           <p:nvPr/>
         </p:nvSpPr>
@@ -19583,7 +22178,7 @@
       </p:sp>
       <p:sp>
         <p:nvSpPr>
-          <p:cNvPr id="44" name="Shape 42"/>
+          <p:cNvPr id="50" name="Shape 48"/>
           <p:cNvSpPr/>
           <p:nvPr/>
         </p:nvSpPr>
@@ -19610,7 +22205,7 @@
       </p:sp>
       <p:sp>
         <p:nvSpPr>
-          <p:cNvPr id="45" name="Text 43"/>
+          <p:cNvPr id="51" name="Text 49"/>
           <p:cNvSpPr/>
           <p:nvPr/>
         </p:nvSpPr>
@@ -19651,7 +22246,7 @@
       </p:sp>
       <p:sp>
         <p:nvSpPr>
-          <p:cNvPr id="46" name="Text 44"/>
+          <p:cNvPr id="52" name="Text 50"/>
           <p:cNvSpPr/>
           <p:nvPr/>
         </p:nvSpPr>
@@ -19692,7 +22287,7 @@
       </p:sp>
       <p:sp>
         <p:nvSpPr>
-          <p:cNvPr id="47" name="Shape 45"/>
+          <p:cNvPr id="53" name="Shape 51"/>
           <p:cNvSpPr/>
           <p:nvPr/>
         </p:nvSpPr>
@@ -19717,7 +22312,7 @@
       </p:sp>
       <p:sp>
         <p:nvSpPr>
-          <p:cNvPr id="48" name="Text 46"/>
+          <p:cNvPr id="54" name="Text 52"/>
           <p:cNvSpPr/>
           <p:nvPr/>
         </p:nvSpPr>
@@ -19758,7 +22353,7 @@
       </p:sp>
       <p:sp>
         <p:nvSpPr>
-          <p:cNvPr id="49" name="Text 47"/>
+          <p:cNvPr id="55" name="Text 53"/>
           <p:cNvSpPr/>
           <p:nvPr/>
         </p:nvSpPr>
@@ -19870,7 +22465,7 @@
       </p:sp>
       <p:sp>
         <p:nvSpPr>
-          <p:cNvPr id="50" name="Text 48"/>
+          <p:cNvPr id="56" name="Text 54"/>
           <p:cNvSpPr/>
           <p:nvPr/>
         </p:nvSpPr>

--- a/ufwl-timeline/UFWL_Presentation_AR.pptx
+++ b/ufwl-timeline/UFWL_Presentation_AR.pptx
@@ -7,10 +7,9 @@
   <p:sldIdLst>
     <p:sldId id="256" r:id="rId2"/>
     <p:sldId id="257" r:id="rId3"/>
-    <p:sldId id="258" r:id="rId4"/>
   </p:sldIdLst>
   <p:notesMasterIdLst>
-    <p:notesMasterId r:id="rId5"/>
+    <p:notesMasterId r:id="rId4"/>
   </p:notesMasterIdLst>
   <p:sldSz cx="12192000" cy="6858000"/>
   <p:notesSz cx="6858000" cy="12192000"/>
@@ -634,94 +633,6 @@
 </p:notes>
 </file>
 
-<file path=ppt/notesSlides/notesSlide3.xml><?xml version="1.0" encoding="utf-8"?>
-<p:notes xmlns:a="http://schemas.openxmlformats.org/drawingml/2006/main" xmlns:r="http://schemas.openxmlformats.org/officeDocument/2006/relationships" xmlns:p="http://schemas.openxmlformats.org/presentationml/2006/main">
-  <p:cSld>
-    <p:spTree>
-      <p:nvGrpSpPr>
-        <p:cNvPr id="1" name=""/>
-        <p:cNvGrpSpPr/>
-        <p:nvPr/>
-      </p:nvGrpSpPr>
-      <p:grpSpPr>
-        <a:xfrm>
-          <a:off x="0" y="0"/>
-          <a:ext cx="0" cy="0"/>
-          <a:chOff x="0" y="0"/>
-          <a:chExt cx="0" cy="0"/>
-        </a:xfrm>
-      </p:grpSpPr>
-      <p:sp>
-        <p:nvSpPr>
-          <p:cNvPr id="2" name="Slide Image Placeholder 1"/>
-          <p:cNvSpPr>
-            <a:spLocks noGrp="1" noRot="1" noChangeAspect="1"/>
-          </p:cNvSpPr>
-          <p:nvPr>
-            <p:ph type="sldImg"/>
-          </p:nvPr>
-        </p:nvSpPr>
-        <p:spPr/>
-      </p:sp>
-      <p:sp>
-        <p:nvSpPr>
-          <p:cNvPr id="3" name="Notes Placeholder 2"/>
-          <p:cNvSpPr>
-            <a:spLocks noGrp="1"/>
-          </p:cNvSpPr>
-          <p:nvPr>
-            <p:ph type="body" idx="1"/>
-          </p:nvPr>
-        </p:nvSpPr>
-        <p:spPr/>
-        <p:txBody>
-          <a:bodyPr/>
-          <a:lstStyle/>
-          <a:p>
-            <a:r>
-              <a:rPr lang="en-US" dirty="0"/>
-              <a:t/>
-            </a:r>
-            <a:endParaRPr lang="en-US" dirty="0"/>
-          </a:p>
-        </p:txBody>
-      </p:sp>
-      <p:sp>
-        <p:nvSpPr>
-          <p:cNvPr id="4" name="Slide Number Placeholder 3"/>
-          <p:cNvSpPr>
-            <a:spLocks noGrp="1"/>
-          </p:cNvSpPr>
-          <p:nvPr>
-            <p:ph type="sldNum" sz="quarter" idx="10"/>
-          </p:nvPr>
-        </p:nvSpPr>
-        <p:spPr/>
-        <p:txBody>
-          <a:bodyPr/>
-          <a:lstStyle/>
-          <a:p>
-            <a:fld id="{F7021451-1387-4CA6-816F-3879F97B5CBC}" type="slidenum">
-              <a:rPr lang="en-US"/>
-              <a:t>3</a:t>
-            </a:fld>
-            <a:endParaRPr lang="en-US"/>
-          </a:p>
-        </p:txBody>
-      </p:sp>
-    </p:spTree>
-    <p:extLst>
-      <p:ext uri="{BB962C8B-B14F-4D97-AF65-F5344CB8AC3E}">
-        <p14:creationId xmlns:p14="http://schemas.microsoft.com/office/powerpoint/2010/main" val="1024086991"/>
-      </p:ext>
-    </p:extLst>
-  </p:cSld>
-  <p:clrMapOvr>
-    <a:masterClrMapping/>
-  </p:clrMapOvr>
-</p:notes>
-</file>
-
 <file path=ppt/slideLayouts/slideLayout1.xml><?xml version="1.0" encoding="utf-8"?>
 <p:sldLayout xmlns:a="http://schemas.openxmlformats.org/drawingml/2006/main" xmlns:r="http://schemas.openxmlformats.org/officeDocument/2006/relationships" xmlns:p="http://schemas.openxmlformats.org/presentationml/2006/main" preserve="1">
   <p:cSld name="DEFAULT">
@@ -20450,2103 +20361,6 @@
             <a:fld id="{F7021451-1387-4CA6-816F-3879F97B5CBC}" type="slidenum">
               <a:rPr b="0" lang="en-US"/>
               <a:t>2</a:t>
-            </a:fld>
-            <a:endParaRPr lang="en-US"/>
-          </a:p>
-        </p:txBody>
-      </p:sp>
-    </p:spTree>
-  </p:cSld>
-  <p:clrMapOvr>
-    <a:masterClrMapping/>
-  </p:clrMapOvr>
-</p:sld>
-</file>
-
-<file path=ppt/slides/slide3.xml><?xml version="1.0" encoding="utf-8"?>
-<p:sld xmlns:a="http://schemas.openxmlformats.org/drawingml/2006/main" xmlns:r="http://schemas.openxmlformats.org/officeDocument/2006/relationships" xmlns:p="http://schemas.openxmlformats.org/presentationml/2006/main">
-  <p:cSld name="Slide 3">
-    <p:spTree>
-      <p:nvGrpSpPr>
-        <p:cNvPr id="1" name=""/>
-        <p:cNvGrpSpPr/>
-        <p:nvPr/>
-      </p:nvGrpSpPr>
-      <p:grpSpPr>
-        <a:xfrm>
-          <a:off x="0" y="0"/>
-          <a:ext cx="0" cy="0"/>
-          <a:chOff x="0" y="0"/>
-          <a:chExt cx="0" cy="0"/>
-        </a:xfrm>
-      </p:grpSpPr>
-      <p:sp>
-        <p:nvSpPr>
-          <p:cNvPr id="2" name="Text 0"/>
-          <p:cNvSpPr/>
-          <p:nvPr/>
-        </p:nvSpPr>
-        <p:spPr>
-          <a:xfrm>
-            <a:off x="1691640" y="109728"/>
-            <a:ext cx="10134295" cy="457200"/>
-          </a:xfrm>
-          <a:prstGeom prst="rect">
-            <a:avLst/>
-          </a:prstGeom>
-          <a:noFill/>
-          <a:ln/>
-        </p:spPr>
-        <p:txBody>
-          <a:bodyPr wrap="square" lIns="0" tIns="0" rIns="0" bIns="0" rtlCol="0" anchor="ctr">
-            <a:normAutofit/>
-          </a:bodyPr>
-          <a:lstStyle/>
-          <a:p>
-            <a:pPr rtl="1" algn="r" indent="0" marL="0">
-              <a:buNone/>
-            </a:pPr>
-            <a:r>
-              <a:rPr lang="ar-SA" altLang="en-US" sz="2400" b="1" dirty="0">
-                <a:solidFill>
-                  <a:srgbClr val="3D3935"/>
-                </a:solidFill>
-                <a:latin typeface="Arial" pitchFamily="34" charset="0"/>
-                <a:ea typeface="Arial" pitchFamily="34" charset="-122"/>
-                <a:cs typeface="Arial" pitchFamily="34" charset="-120"/>
-              </a:rPr>
-              <a:t>أنشطة الدعم (Shoring) وأسس الجدول</a:t>
-            </a:r>
-            <a:endParaRPr lang="ar-SA" sz="2400" dirty="0"/>
-          </a:p>
-        </p:txBody>
-      </p:sp>
-      <p:sp>
-        <p:nvSpPr>
-          <p:cNvPr id="3" name="Text 1"/>
-          <p:cNvSpPr/>
-          <p:nvPr/>
-        </p:nvSpPr>
-        <p:spPr>
-          <a:xfrm>
-            <a:off x="1691640" y="548640"/>
-            <a:ext cx="10134295" cy="256032"/>
-          </a:xfrm>
-          <a:prstGeom prst="rect">
-            <a:avLst/>
-          </a:prstGeom>
-          <a:noFill/>
-          <a:ln/>
-        </p:spPr>
-        <p:txBody>
-          <a:bodyPr wrap="square" lIns="0" tIns="0" rIns="0" bIns="0" rtlCol="0" anchor="ctr">
-            <a:normAutofit/>
-          </a:bodyPr>
-          <a:lstStyle/>
-          <a:p>
-            <a:pPr rtl="1" algn="r" indent="0" marL="0">
-              <a:buNone/>
-            </a:pPr>
-            <a:r>
-              <a:rPr lang="ar-SA" altLang="en-US" sz="1200" dirty="0">
-                <a:solidFill>
-                  <a:srgbClr val="66707A"/>
-                </a:solidFill>
-                <a:latin typeface="Arial" pitchFamily="34" charset="0"/>
-                <a:ea typeface="Arial" pitchFamily="34" charset="-122"/>
-                <a:cs typeface="Arial" pitchFamily="34" charset="-120"/>
-              </a:rPr>
-              <a:t>تسلسل أعمال الدعم والتواريخ الرئيسية وشروط البرنامج المقترح</a:t>
-            </a:r>
-            <a:endParaRPr lang="ar-SA" sz="1200" dirty="0"/>
-          </a:p>
-        </p:txBody>
-      </p:sp>
-      <p:sp>
-        <p:nvSpPr>
-          <p:cNvPr id="4" name="Shape 2"/>
-          <p:cNvSpPr/>
-          <p:nvPr/>
-        </p:nvSpPr>
-        <p:spPr>
-          <a:xfrm>
-            <a:off x="11771071" y="1133856"/>
-            <a:ext cx="54864" cy="256032"/>
-          </a:xfrm>
-          <a:prstGeom prst="rect">
-            <a:avLst/>
-          </a:prstGeom>
-          <a:solidFill>
-            <a:srgbClr val="00778B"/>
-          </a:solidFill>
-          <a:ln w="12700">
-            <a:solidFill>
-              <a:srgbClr val="00778B"/>
-            </a:solidFill>
-            <a:prstDash val="solid"/>
-          </a:ln>
-        </p:spPr>
-      </p:sp>
-      <p:sp>
-        <p:nvSpPr>
-          <p:cNvPr id="5" name="Text 3"/>
-          <p:cNvSpPr/>
-          <p:nvPr/>
-        </p:nvSpPr>
-        <p:spPr>
-          <a:xfrm>
-            <a:off x="4364431" y="1097280"/>
-            <a:ext cx="7315200" cy="329184"/>
-          </a:xfrm>
-          <a:prstGeom prst="rect">
-            <a:avLst/>
-          </a:prstGeom>
-          <a:noFill/>
-          <a:ln/>
-        </p:spPr>
-        <p:txBody>
-          <a:bodyPr wrap="square" lIns="0" tIns="0" rIns="0" bIns="0" rtlCol="0" anchor="ctr">
-            <a:normAutofit/>
-          </a:bodyPr>
-          <a:lstStyle/>
-          <a:p>
-            <a:pPr rtl="1" algn="r" indent="0" marL="0">
-              <a:buNone/>
-            </a:pPr>
-            <a:r>
-              <a:rPr lang="ar-SA" altLang="en-US" sz="1500" b="1" dirty="0">
-                <a:solidFill>
-                  <a:srgbClr val="3D3935"/>
-                </a:solidFill>
-                <a:latin typeface="Arial" pitchFamily="34" charset="0"/>
-                <a:ea typeface="Arial" pitchFamily="34" charset="-122"/>
-                <a:cs typeface="Arial" pitchFamily="34" charset="-120"/>
-              </a:rPr>
-              <a:t>تسلسل أعمال الدعم (النشاط A)</a:t>
-            </a:r>
-            <a:endParaRPr lang="ar-SA" sz="1500" dirty="0"/>
-          </a:p>
-        </p:txBody>
-      </p:sp>
-      <p:sp>
-        <p:nvSpPr>
-          <p:cNvPr id="6" name="Text 4"/>
-          <p:cNvSpPr/>
-          <p:nvPr/>
-        </p:nvSpPr>
-        <p:spPr>
-          <a:xfrm>
-            <a:off x="3450031" y="1417320"/>
-            <a:ext cx="8229600" cy="256032"/>
-          </a:xfrm>
-          <a:prstGeom prst="rect">
-            <a:avLst/>
-          </a:prstGeom>
-          <a:noFill/>
-          <a:ln/>
-        </p:spPr>
-        <p:txBody>
-          <a:bodyPr wrap="square" lIns="0" tIns="0" rIns="0" bIns="0" rtlCol="0" anchor="ctr">
-            <a:normAutofit/>
-          </a:bodyPr>
-          <a:lstStyle/>
-          <a:p>
-            <a:pPr rtl="1" algn="r" indent="0" marL="0">
-              <a:buNone/>
-            </a:pPr>
-            <a:r>
-              <a:rPr lang="ar-SA" altLang="en-US" sz="1100" b="1" dirty="0">
-                <a:solidFill>
-                  <a:srgbClr val="C8503F"/>
-                </a:solidFill>
-                <a:latin typeface="Arial" pitchFamily="34" charset="0"/>
-                <a:ea typeface="Arial" pitchFamily="34" charset="-122"/>
-                <a:cs typeface="Arial" pitchFamily="34" charset="-120"/>
-              </a:rPr>
-              <a:t>13 أكتوبر 2026 → 19 أكتوبر 2026 · 6 يوم عمل</a:t>
-            </a:r>
-            <a:endParaRPr lang="ar-SA" sz="1100" dirty="0"/>
-          </a:p>
-        </p:txBody>
-      </p:sp>
-      <p:sp>
-        <p:nvSpPr>
-          <p:cNvPr id="7" name="Shape 5"/>
-          <p:cNvSpPr/>
-          <p:nvPr/>
-        </p:nvSpPr>
-        <p:spPr>
-          <a:xfrm flipH="1">
-            <a:off x="9460748" y="1783080"/>
-            <a:ext cx="2365187" cy="1051560"/>
-          </a:xfrm>
-          <a:prstGeom prst="chevron">
-            <a:avLst/>
-          </a:prstGeom>
-          <a:solidFill>
-            <a:srgbClr val="F4DAD6"/>
-          </a:solidFill>
-          <a:ln w="12700">
-            <a:solidFill>
-              <a:srgbClr val="F4DAD6"/>
-            </a:solidFill>
-            <a:prstDash val="solid"/>
-          </a:ln>
-        </p:spPr>
-      </p:sp>
-      <p:sp>
-        <p:nvSpPr>
-          <p:cNvPr id="8" name="Shape 6"/>
-          <p:cNvSpPr/>
-          <p:nvPr/>
-        </p:nvSpPr>
-        <p:spPr>
-          <a:xfrm>
-            <a:off x="11185855" y="1874520"/>
-            <a:ext cx="274320" cy="274320"/>
-          </a:xfrm>
-          <a:prstGeom prst="ellipse">
-            <a:avLst/>
-          </a:prstGeom>
-          <a:solidFill>
-            <a:srgbClr val="C8503F"/>
-          </a:solidFill>
-          <a:ln w="12700">
-            <a:solidFill>
-              <a:srgbClr val="C8503F"/>
-            </a:solidFill>
-            <a:prstDash val="solid"/>
-          </a:ln>
-        </p:spPr>
-      </p:sp>
-      <p:sp>
-        <p:nvSpPr>
-          <p:cNvPr id="9" name="Text 7"/>
-          <p:cNvSpPr/>
-          <p:nvPr/>
-        </p:nvSpPr>
-        <p:spPr>
-          <a:xfrm>
-            <a:off x="11185855" y="1874520"/>
-            <a:ext cx="274320" cy="274320"/>
-          </a:xfrm>
-          <a:prstGeom prst="rect">
-            <a:avLst/>
-          </a:prstGeom>
-          <a:noFill/>
-          <a:ln/>
-        </p:spPr>
-        <p:txBody>
-          <a:bodyPr wrap="square" lIns="0" tIns="0" rIns="0" bIns="0" rtlCol="0" anchor="ctr">
-            <a:normAutofit/>
-          </a:bodyPr>
-          <a:lstStyle/>
-          <a:p>
-            <a:pPr rtl="1" algn="ctr" indent="0" marL="0">
-              <a:buNone/>
-            </a:pPr>
-            <a:r>
-              <a:rPr lang="ar-SA" altLang="en-US" sz="1000" b="1" dirty="0">
-                <a:solidFill>
-                  <a:srgbClr val="FFFFFF"/>
-                </a:solidFill>
-                <a:latin typeface="Arial" pitchFamily="34" charset="0"/>
-                <a:ea typeface="Arial" pitchFamily="34" charset="-122"/>
-                <a:cs typeface="Arial" pitchFamily="34" charset="-120"/>
-              </a:rPr>
-              <a:t>1</a:t>
-            </a:r>
-            <a:endParaRPr lang="ar-SA" sz="1000" dirty="0"/>
-          </a:p>
-        </p:txBody>
-      </p:sp>
-      <p:sp>
-        <p:nvSpPr>
-          <p:cNvPr id="10" name="Text 8"/>
-          <p:cNvSpPr/>
-          <p:nvPr/>
-        </p:nvSpPr>
-        <p:spPr>
-          <a:xfrm>
-            <a:off x="9835652" y="2157984"/>
-            <a:ext cx="1606235" cy="411480"/>
-          </a:xfrm>
-          <a:prstGeom prst="rect">
-            <a:avLst/>
-          </a:prstGeom>
-          <a:noFill/>
-          <a:ln/>
-        </p:spPr>
-        <p:txBody>
-          <a:bodyPr wrap="square" lIns="0" tIns="0" rIns="0" bIns="0" rtlCol="0" anchor="t">
-            <a:normAutofit/>
-          </a:bodyPr>
-          <a:lstStyle/>
-          <a:p>
-            <a:pPr rtl="1" algn="r" indent="0" marL="0">
-              <a:buNone/>
-            </a:pPr>
-            <a:r>
-              <a:rPr lang="ar-SA" altLang="en-US" sz="1100" b="1" dirty="0">
-                <a:solidFill>
-                  <a:srgbClr val="3D3935"/>
-                </a:solidFill>
-                <a:latin typeface="Arial" pitchFamily="34" charset="0"/>
-                <a:ea typeface="Arial" pitchFamily="34" charset="-122"/>
-                <a:cs typeface="Arial" pitchFamily="34" charset="-120"/>
-              </a:rPr>
-              <a:t>الحفر لأعمدة H-Beam</a:t>
-            </a:r>
-            <a:endParaRPr lang="ar-SA" sz="1100" dirty="0"/>
-          </a:p>
-        </p:txBody>
-      </p:sp>
-      <p:sp>
-        <p:nvSpPr>
-          <p:cNvPr id="11" name="Text 9"/>
-          <p:cNvSpPr/>
-          <p:nvPr/>
-        </p:nvSpPr>
-        <p:spPr>
-          <a:xfrm>
-            <a:off x="9835652" y="2542032"/>
-            <a:ext cx="1606235" cy="228600"/>
-          </a:xfrm>
-          <a:prstGeom prst="rect">
-            <a:avLst/>
-          </a:prstGeom>
-          <a:noFill/>
-          <a:ln/>
-        </p:spPr>
-        <p:txBody>
-          <a:bodyPr wrap="square" lIns="0" tIns="0" rIns="0" bIns="0" rtlCol="0" anchor="t">
-            <a:normAutofit/>
-          </a:bodyPr>
-          <a:lstStyle/>
-          <a:p>
-            <a:pPr rtl="1" algn="r" indent="0" marL="0">
-              <a:buNone/>
-            </a:pPr>
-            <a:r>
-              <a:rPr lang="ar-SA" altLang="en-US" sz="750" b="1" dirty="0">
-                <a:solidFill>
-                  <a:srgbClr val="7A3A30"/>
-                </a:solidFill>
-                <a:latin typeface="Arial" pitchFamily="34" charset="0"/>
-                <a:ea typeface="Arial" pitchFamily="34" charset="-122"/>
-                <a:cs typeface="Arial" pitchFamily="34" charset="-120"/>
-              </a:rPr>
-              <a:t>13 أكتوبر → 14 أكتوبر · 2 يوم</a:t>
-            </a:r>
-            <a:endParaRPr lang="ar-SA" sz="750" dirty="0"/>
-          </a:p>
-        </p:txBody>
-      </p:sp>
-      <p:sp>
-        <p:nvSpPr>
-          <p:cNvPr id="12" name="Shape 10"/>
-          <p:cNvSpPr/>
-          <p:nvPr/>
-        </p:nvSpPr>
-        <p:spPr>
-          <a:xfrm flipH="1">
-            <a:off x="7168713" y="1783080"/>
-            <a:ext cx="2365187" cy="1051560"/>
-          </a:xfrm>
-          <a:prstGeom prst="chevron">
-            <a:avLst/>
-          </a:prstGeom>
-          <a:solidFill>
-            <a:srgbClr val="F4DAD6"/>
-          </a:solidFill>
-          <a:ln w="12700">
-            <a:solidFill>
-              <a:srgbClr val="F4DAD6"/>
-            </a:solidFill>
-            <a:prstDash val="solid"/>
-          </a:ln>
-        </p:spPr>
-      </p:sp>
-      <p:sp>
-        <p:nvSpPr>
-          <p:cNvPr id="13" name="Shape 11"/>
-          <p:cNvSpPr/>
-          <p:nvPr/>
-        </p:nvSpPr>
-        <p:spPr>
-          <a:xfrm>
-            <a:off x="8893820" y="1874520"/>
-            <a:ext cx="274320" cy="274320"/>
-          </a:xfrm>
-          <a:prstGeom prst="ellipse">
-            <a:avLst/>
-          </a:prstGeom>
-          <a:solidFill>
-            <a:srgbClr val="C8503F"/>
-          </a:solidFill>
-          <a:ln w="12700">
-            <a:solidFill>
-              <a:srgbClr val="C8503F"/>
-            </a:solidFill>
-            <a:prstDash val="solid"/>
-          </a:ln>
-        </p:spPr>
-      </p:sp>
-      <p:sp>
-        <p:nvSpPr>
-          <p:cNvPr id="14" name="Text 12"/>
-          <p:cNvSpPr/>
-          <p:nvPr/>
-        </p:nvSpPr>
-        <p:spPr>
-          <a:xfrm>
-            <a:off x="8893820" y="1874520"/>
-            <a:ext cx="274320" cy="274320"/>
-          </a:xfrm>
-          <a:prstGeom prst="rect">
-            <a:avLst/>
-          </a:prstGeom>
-          <a:noFill/>
-          <a:ln/>
-        </p:spPr>
-        <p:txBody>
-          <a:bodyPr wrap="square" lIns="0" tIns="0" rIns="0" bIns="0" rtlCol="0" anchor="ctr">
-            <a:normAutofit/>
-          </a:bodyPr>
-          <a:lstStyle/>
-          <a:p>
-            <a:pPr rtl="1" algn="ctr" indent="0" marL="0">
-              <a:buNone/>
-            </a:pPr>
-            <a:r>
-              <a:rPr lang="ar-SA" altLang="en-US" sz="1000" b="1" dirty="0">
-                <a:solidFill>
-                  <a:srgbClr val="FFFFFF"/>
-                </a:solidFill>
-                <a:latin typeface="Arial" pitchFamily="34" charset="0"/>
-                <a:ea typeface="Arial" pitchFamily="34" charset="-122"/>
-                <a:cs typeface="Arial" pitchFamily="34" charset="-120"/>
-              </a:rPr>
-              <a:t>2</a:t>
-            </a:r>
-            <a:endParaRPr lang="ar-SA" sz="1000" dirty="0"/>
-          </a:p>
-        </p:txBody>
-      </p:sp>
-      <p:sp>
-        <p:nvSpPr>
-          <p:cNvPr id="15" name="Text 13"/>
-          <p:cNvSpPr/>
-          <p:nvPr/>
-        </p:nvSpPr>
-        <p:spPr>
-          <a:xfrm>
-            <a:off x="7543617" y="2157984"/>
-            <a:ext cx="1606235" cy="411480"/>
-          </a:xfrm>
-          <a:prstGeom prst="rect">
-            <a:avLst/>
-          </a:prstGeom>
-          <a:noFill/>
-          <a:ln/>
-        </p:spPr>
-        <p:txBody>
-          <a:bodyPr wrap="square" lIns="0" tIns="0" rIns="0" bIns="0" rtlCol="0" anchor="t">
-            <a:normAutofit/>
-          </a:bodyPr>
-          <a:lstStyle/>
-          <a:p>
-            <a:pPr rtl="1" algn="r" indent="0" marL="0">
-              <a:buNone/>
-            </a:pPr>
-            <a:r>
-              <a:rPr lang="ar-SA" altLang="en-US" sz="1100" b="1" dirty="0">
-                <a:solidFill>
-                  <a:srgbClr val="3D3935"/>
-                </a:solidFill>
-                <a:latin typeface="Arial" pitchFamily="34" charset="0"/>
-                <a:ea typeface="Arial" pitchFamily="34" charset="-122"/>
-                <a:cs typeface="Arial" pitchFamily="34" charset="-120"/>
-              </a:rPr>
-              <a:t>تركيب أعمدة H-Beam</a:t>
-            </a:r>
-            <a:endParaRPr lang="ar-SA" sz="1100" dirty="0"/>
-          </a:p>
-        </p:txBody>
-      </p:sp>
-      <p:sp>
-        <p:nvSpPr>
-          <p:cNvPr id="16" name="Text 14"/>
-          <p:cNvSpPr/>
-          <p:nvPr/>
-        </p:nvSpPr>
-        <p:spPr>
-          <a:xfrm>
-            <a:off x="7543617" y="2542032"/>
-            <a:ext cx="1606235" cy="228600"/>
-          </a:xfrm>
-          <a:prstGeom prst="rect">
-            <a:avLst/>
-          </a:prstGeom>
-          <a:noFill/>
-          <a:ln/>
-        </p:spPr>
-        <p:txBody>
-          <a:bodyPr wrap="square" lIns="0" tIns="0" rIns="0" bIns="0" rtlCol="0" anchor="t">
-            <a:normAutofit/>
-          </a:bodyPr>
-          <a:lstStyle/>
-          <a:p>
-            <a:pPr rtl="1" algn="r" indent="0" marL="0">
-              <a:buNone/>
-            </a:pPr>
-            <a:r>
-              <a:rPr lang="ar-SA" altLang="en-US" sz="750" b="1" dirty="0">
-                <a:solidFill>
-                  <a:srgbClr val="7A3A30"/>
-                </a:solidFill>
-                <a:latin typeface="Arial" pitchFamily="34" charset="0"/>
-                <a:ea typeface="Arial" pitchFamily="34" charset="-122"/>
-                <a:cs typeface="Arial" pitchFamily="34" charset="-120"/>
-              </a:rPr>
-              <a:t>14 أكتوبر → 17 أكتوبر · 3 يوم · A1 SS +1</a:t>
-            </a:r>
-            <a:endParaRPr lang="ar-SA" sz="750" dirty="0"/>
-          </a:p>
-        </p:txBody>
-      </p:sp>
-      <p:sp>
-        <p:nvSpPr>
-          <p:cNvPr id="17" name="Shape 15"/>
-          <p:cNvSpPr/>
-          <p:nvPr/>
-        </p:nvSpPr>
-        <p:spPr>
-          <a:xfrm flipH="1">
-            <a:off x="4876678" y="1783080"/>
-            <a:ext cx="2365187" cy="1051560"/>
-          </a:xfrm>
-          <a:prstGeom prst="chevron">
-            <a:avLst/>
-          </a:prstGeom>
-          <a:solidFill>
-            <a:srgbClr val="F4DAD6"/>
-          </a:solidFill>
-          <a:ln w="12700">
-            <a:solidFill>
-              <a:srgbClr val="F4DAD6"/>
-            </a:solidFill>
-            <a:prstDash val="solid"/>
-          </a:ln>
-        </p:spPr>
-      </p:sp>
-      <p:sp>
-        <p:nvSpPr>
-          <p:cNvPr id="18" name="Shape 16"/>
-          <p:cNvSpPr/>
-          <p:nvPr/>
-        </p:nvSpPr>
-        <p:spPr>
-          <a:xfrm>
-            <a:off x="6601785" y="1874520"/>
-            <a:ext cx="274320" cy="274320"/>
-          </a:xfrm>
-          <a:prstGeom prst="ellipse">
-            <a:avLst/>
-          </a:prstGeom>
-          <a:solidFill>
-            <a:srgbClr val="C8503F"/>
-          </a:solidFill>
-          <a:ln w="12700">
-            <a:solidFill>
-              <a:srgbClr val="C8503F"/>
-            </a:solidFill>
-            <a:prstDash val="solid"/>
-          </a:ln>
-        </p:spPr>
-      </p:sp>
-      <p:sp>
-        <p:nvSpPr>
-          <p:cNvPr id="19" name="Text 17"/>
-          <p:cNvSpPr/>
-          <p:nvPr/>
-        </p:nvSpPr>
-        <p:spPr>
-          <a:xfrm>
-            <a:off x="6601785" y="1874520"/>
-            <a:ext cx="274320" cy="274320"/>
-          </a:xfrm>
-          <a:prstGeom prst="rect">
-            <a:avLst/>
-          </a:prstGeom>
-          <a:noFill/>
-          <a:ln/>
-        </p:spPr>
-        <p:txBody>
-          <a:bodyPr wrap="square" lIns="0" tIns="0" rIns="0" bIns="0" rtlCol="0" anchor="ctr">
-            <a:normAutofit/>
-          </a:bodyPr>
-          <a:lstStyle/>
-          <a:p>
-            <a:pPr rtl="1" algn="ctr" indent="0" marL="0">
-              <a:buNone/>
-            </a:pPr>
-            <a:r>
-              <a:rPr lang="ar-SA" altLang="en-US" sz="1000" b="1" dirty="0">
-                <a:solidFill>
-                  <a:srgbClr val="FFFFFF"/>
-                </a:solidFill>
-                <a:latin typeface="Arial" pitchFamily="34" charset="0"/>
-                <a:ea typeface="Arial" pitchFamily="34" charset="-122"/>
-                <a:cs typeface="Arial" pitchFamily="34" charset="-120"/>
-              </a:rPr>
-              <a:t>3</a:t>
-            </a:r>
-            <a:endParaRPr lang="ar-SA" sz="1000" dirty="0"/>
-          </a:p>
-        </p:txBody>
-      </p:sp>
-      <p:sp>
-        <p:nvSpPr>
-          <p:cNvPr id="20" name="Text 18"/>
-          <p:cNvSpPr/>
-          <p:nvPr/>
-        </p:nvSpPr>
-        <p:spPr>
-          <a:xfrm>
-            <a:off x="5251582" y="2157984"/>
-            <a:ext cx="1606235" cy="411480"/>
-          </a:xfrm>
-          <a:prstGeom prst="rect">
-            <a:avLst/>
-          </a:prstGeom>
-          <a:noFill/>
-          <a:ln/>
-        </p:spPr>
-        <p:txBody>
-          <a:bodyPr wrap="square" lIns="0" tIns="0" rIns="0" bIns="0" rtlCol="0" anchor="t">
-            <a:normAutofit/>
-          </a:bodyPr>
-          <a:lstStyle/>
-          <a:p>
-            <a:pPr rtl="1" algn="r" indent="0" marL="0">
-              <a:buNone/>
-            </a:pPr>
-            <a:r>
-              <a:rPr lang="ar-SA" altLang="en-US" sz="1100" b="1" dirty="0">
-                <a:solidFill>
-                  <a:srgbClr val="3D3935"/>
-                </a:solidFill>
-                <a:latin typeface="Arial" pitchFamily="34" charset="0"/>
-                <a:ea typeface="Arial" pitchFamily="34" charset="-122"/>
-                <a:cs typeface="Arial" pitchFamily="34" charset="-120"/>
-              </a:rPr>
-              <a:t>أعمال الخرسانة لأعمدة H-Beam</a:t>
-            </a:r>
-            <a:endParaRPr lang="ar-SA" sz="1100" dirty="0"/>
-          </a:p>
-        </p:txBody>
-      </p:sp>
-      <p:sp>
-        <p:nvSpPr>
-          <p:cNvPr id="21" name="Text 19"/>
-          <p:cNvSpPr/>
-          <p:nvPr/>
-        </p:nvSpPr>
-        <p:spPr>
-          <a:xfrm>
-            <a:off x="5251582" y="2542032"/>
-            <a:ext cx="1606235" cy="228600"/>
-          </a:xfrm>
-          <a:prstGeom prst="rect">
-            <a:avLst/>
-          </a:prstGeom>
-          <a:noFill/>
-          <a:ln/>
-        </p:spPr>
-        <p:txBody>
-          <a:bodyPr wrap="square" lIns="0" tIns="0" rIns="0" bIns="0" rtlCol="0" anchor="t">
-            <a:normAutofit/>
-          </a:bodyPr>
-          <a:lstStyle/>
-          <a:p>
-            <a:pPr rtl="1" algn="r" indent="0" marL="0">
-              <a:buNone/>
-            </a:pPr>
-            <a:r>
-              <a:rPr lang="ar-SA" altLang="en-US" sz="750" b="1" dirty="0">
-                <a:solidFill>
-                  <a:srgbClr val="7A3A30"/>
-                </a:solidFill>
-                <a:latin typeface="Arial" pitchFamily="34" charset="0"/>
-                <a:ea typeface="Arial" pitchFamily="34" charset="-122"/>
-                <a:cs typeface="Arial" pitchFamily="34" charset="-120"/>
-              </a:rPr>
-              <a:t>15 أكتوبر → 18 أكتوبر · 3 يوم · A2 SS +1</a:t>
-            </a:r>
-            <a:endParaRPr lang="ar-SA" sz="750" dirty="0"/>
-          </a:p>
-        </p:txBody>
-      </p:sp>
-      <p:sp>
-        <p:nvSpPr>
-          <p:cNvPr id="22" name="Shape 20"/>
-          <p:cNvSpPr/>
-          <p:nvPr/>
-        </p:nvSpPr>
-        <p:spPr>
-          <a:xfrm flipH="1">
-            <a:off x="2584643" y="1783080"/>
-            <a:ext cx="2365187" cy="1051560"/>
-          </a:xfrm>
-          <a:prstGeom prst="chevron">
-            <a:avLst/>
-          </a:prstGeom>
-          <a:solidFill>
-            <a:srgbClr val="F4DAD6"/>
-          </a:solidFill>
-          <a:ln w="12700">
-            <a:solidFill>
-              <a:srgbClr val="F4DAD6"/>
-            </a:solidFill>
-            <a:prstDash val="solid"/>
-          </a:ln>
-        </p:spPr>
-      </p:sp>
-      <p:sp>
-        <p:nvSpPr>
-          <p:cNvPr id="23" name="Shape 21"/>
-          <p:cNvSpPr/>
-          <p:nvPr/>
-        </p:nvSpPr>
-        <p:spPr>
-          <a:xfrm>
-            <a:off x="4309750" y="1874520"/>
-            <a:ext cx="274320" cy="274320"/>
-          </a:xfrm>
-          <a:prstGeom prst="ellipse">
-            <a:avLst/>
-          </a:prstGeom>
-          <a:solidFill>
-            <a:srgbClr val="C8503F"/>
-          </a:solidFill>
-          <a:ln w="12700">
-            <a:solidFill>
-              <a:srgbClr val="C8503F"/>
-            </a:solidFill>
-            <a:prstDash val="solid"/>
-          </a:ln>
-        </p:spPr>
-      </p:sp>
-      <p:sp>
-        <p:nvSpPr>
-          <p:cNvPr id="24" name="Text 22"/>
-          <p:cNvSpPr/>
-          <p:nvPr/>
-        </p:nvSpPr>
-        <p:spPr>
-          <a:xfrm>
-            <a:off x="4309750" y="1874520"/>
-            <a:ext cx="274320" cy="274320"/>
-          </a:xfrm>
-          <a:prstGeom prst="rect">
-            <a:avLst/>
-          </a:prstGeom>
-          <a:noFill/>
-          <a:ln/>
-        </p:spPr>
-        <p:txBody>
-          <a:bodyPr wrap="square" lIns="0" tIns="0" rIns="0" bIns="0" rtlCol="0" anchor="ctr">
-            <a:normAutofit/>
-          </a:bodyPr>
-          <a:lstStyle/>
-          <a:p>
-            <a:pPr rtl="1" algn="ctr" indent="0" marL="0">
-              <a:buNone/>
-            </a:pPr>
-            <a:r>
-              <a:rPr lang="ar-SA" altLang="en-US" sz="1000" b="1" dirty="0">
-                <a:solidFill>
-                  <a:srgbClr val="FFFFFF"/>
-                </a:solidFill>
-                <a:latin typeface="Arial" pitchFamily="34" charset="0"/>
-                <a:ea typeface="Arial" pitchFamily="34" charset="-122"/>
-                <a:cs typeface="Arial" pitchFamily="34" charset="-120"/>
-              </a:rPr>
-              <a:t>4</a:t>
-            </a:r>
-            <a:endParaRPr lang="ar-SA" sz="1000" dirty="0"/>
-          </a:p>
-        </p:txBody>
-      </p:sp>
-      <p:sp>
-        <p:nvSpPr>
-          <p:cNvPr id="25" name="Text 23"/>
-          <p:cNvSpPr/>
-          <p:nvPr/>
-        </p:nvSpPr>
-        <p:spPr>
-          <a:xfrm>
-            <a:off x="2959547" y="2157984"/>
-            <a:ext cx="1606235" cy="411480"/>
-          </a:xfrm>
-          <a:prstGeom prst="rect">
-            <a:avLst/>
-          </a:prstGeom>
-          <a:noFill/>
-          <a:ln/>
-        </p:spPr>
-        <p:txBody>
-          <a:bodyPr wrap="square" lIns="0" tIns="0" rIns="0" bIns="0" rtlCol="0" anchor="t">
-            <a:normAutofit/>
-          </a:bodyPr>
-          <a:lstStyle/>
-          <a:p>
-            <a:pPr rtl="1" algn="r" indent="0" marL="0">
-              <a:buNone/>
-            </a:pPr>
-            <a:r>
-              <a:rPr lang="ar-SA" altLang="en-US" sz="1100" b="1" dirty="0">
-                <a:solidFill>
-                  <a:srgbClr val="3D3935"/>
-                </a:solidFill>
-                <a:latin typeface="Arial" pitchFamily="34" charset="0"/>
-                <a:ea typeface="Arial" pitchFamily="34" charset="-122"/>
-                <a:cs typeface="Arial" pitchFamily="34" charset="-120"/>
-              </a:rPr>
-              <a:t>التدعيم (Bracing) لنظام الدعم</a:t>
-            </a:r>
-            <a:endParaRPr lang="ar-SA" sz="1100" dirty="0"/>
-          </a:p>
-        </p:txBody>
-      </p:sp>
-      <p:sp>
-        <p:nvSpPr>
-          <p:cNvPr id="26" name="Text 24"/>
-          <p:cNvSpPr/>
-          <p:nvPr/>
-        </p:nvSpPr>
-        <p:spPr>
-          <a:xfrm>
-            <a:off x="2959547" y="2542032"/>
-            <a:ext cx="1606235" cy="228600"/>
-          </a:xfrm>
-          <a:prstGeom prst="rect">
-            <a:avLst/>
-          </a:prstGeom>
-          <a:noFill/>
-          <a:ln/>
-        </p:spPr>
-        <p:txBody>
-          <a:bodyPr wrap="square" lIns="0" tIns="0" rIns="0" bIns="0" rtlCol="0" anchor="t">
-            <a:normAutofit/>
-          </a:bodyPr>
-          <a:lstStyle/>
-          <a:p>
-            <a:pPr rtl="1" algn="r" indent="0" marL="0">
-              <a:buNone/>
-            </a:pPr>
-            <a:r>
-              <a:rPr lang="ar-SA" altLang="en-US" sz="750" b="1" dirty="0">
-                <a:solidFill>
-                  <a:srgbClr val="7A3A30"/>
-                </a:solidFill>
-                <a:latin typeface="Arial" pitchFamily="34" charset="0"/>
-                <a:ea typeface="Arial" pitchFamily="34" charset="-122"/>
-                <a:cs typeface="Arial" pitchFamily="34" charset="-120"/>
-              </a:rPr>
-              <a:t>17 أكتوبر → 19 أكتوبر · 3 يوم · A3 SS +1</a:t>
-            </a:r>
-            <a:endParaRPr lang="ar-SA" sz="750" dirty="0"/>
-          </a:p>
-        </p:txBody>
-      </p:sp>
-      <p:sp>
-        <p:nvSpPr>
-          <p:cNvPr id="27" name="Shape 25"/>
-          <p:cNvSpPr/>
-          <p:nvPr/>
-        </p:nvSpPr>
-        <p:spPr>
-          <a:xfrm flipH="1">
-            <a:off x="292608" y="1783080"/>
-            <a:ext cx="2365187" cy="1051560"/>
-          </a:xfrm>
-          <a:prstGeom prst="chevron">
-            <a:avLst/>
-          </a:prstGeom>
-          <a:solidFill>
-            <a:srgbClr val="F4DAD6"/>
-          </a:solidFill>
-          <a:ln w="12700">
-            <a:solidFill>
-              <a:srgbClr val="F4DAD6"/>
-            </a:solidFill>
-            <a:prstDash val="solid"/>
-          </a:ln>
-        </p:spPr>
-      </p:sp>
-      <p:sp>
-        <p:nvSpPr>
-          <p:cNvPr id="28" name="Shape 26"/>
-          <p:cNvSpPr/>
-          <p:nvPr/>
-        </p:nvSpPr>
-        <p:spPr>
-          <a:xfrm>
-            <a:off x="2017715" y="1874520"/>
-            <a:ext cx="274320" cy="274320"/>
-          </a:xfrm>
-          <a:prstGeom prst="ellipse">
-            <a:avLst/>
-          </a:prstGeom>
-          <a:solidFill>
-            <a:srgbClr val="C8503F"/>
-          </a:solidFill>
-          <a:ln w="12700">
-            <a:solidFill>
-              <a:srgbClr val="C8503F"/>
-            </a:solidFill>
-            <a:prstDash val="solid"/>
-          </a:ln>
-        </p:spPr>
-      </p:sp>
-      <p:sp>
-        <p:nvSpPr>
-          <p:cNvPr id="29" name="Text 27"/>
-          <p:cNvSpPr/>
-          <p:nvPr/>
-        </p:nvSpPr>
-        <p:spPr>
-          <a:xfrm>
-            <a:off x="2017715" y="1874520"/>
-            <a:ext cx="274320" cy="274320"/>
-          </a:xfrm>
-          <a:prstGeom prst="rect">
-            <a:avLst/>
-          </a:prstGeom>
-          <a:noFill/>
-          <a:ln/>
-        </p:spPr>
-        <p:txBody>
-          <a:bodyPr wrap="square" lIns="0" tIns="0" rIns="0" bIns="0" rtlCol="0" anchor="ctr">
-            <a:normAutofit/>
-          </a:bodyPr>
-          <a:lstStyle/>
-          <a:p>
-            <a:pPr rtl="1" algn="ctr" indent="0" marL="0">
-              <a:buNone/>
-            </a:pPr>
-            <a:r>
-              <a:rPr lang="ar-SA" altLang="en-US" sz="1000" b="1" dirty="0">
-                <a:solidFill>
-                  <a:srgbClr val="FFFFFF"/>
-                </a:solidFill>
-                <a:latin typeface="Arial" pitchFamily="34" charset="0"/>
-                <a:ea typeface="Arial" pitchFamily="34" charset="-122"/>
-                <a:cs typeface="Arial" pitchFamily="34" charset="-120"/>
-              </a:rPr>
-              <a:t>5</a:t>
-            </a:r>
-            <a:endParaRPr lang="ar-SA" sz="1000" dirty="0"/>
-          </a:p>
-        </p:txBody>
-      </p:sp>
-      <p:sp>
-        <p:nvSpPr>
-          <p:cNvPr id="30" name="Text 28"/>
-          <p:cNvSpPr/>
-          <p:nvPr/>
-        </p:nvSpPr>
-        <p:spPr>
-          <a:xfrm>
-            <a:off x="667512" y="2157984"/>
-            <a:ext cx="1606235" cy="411480"/>
-          </a:xfrm>
-          <a:prstGeom prst="rect">
-            <a:avLst/>
-          </a:prstGeom>
-          <a:noFill/>
-          <a:ln/>
-        </p:spPr>
-        <p:txBody>
-          <a:bodyPr wrap="square" lIns="0" tIns="0" rIns="0" bIns="0" rtlCol="0" anchor="t">
-            <a:normAutofit/>
-          </a:bodyPr>
-          <a:lstStyle/>
-          <a:p>
-            <a:pPr rtl="1" algn="r" indent="0" marL="0">
-              <a:buNone/>
-            </a:pPr>
-            <a:r>
-              <a:rPr lang="ar-SA" altLang="en-US" sz="1100" b="1" dirty="0">
-                <a:solidFill>
-                  <a:srgbClr val="3D3935"/>
-                </a:solidFill>
-                <a:latin typeface="Arial" pitchFamily="34" charset="0"/>
-                <a:ea typeface="Arial" pitchFamily="34" charset="-122"/>
-                <a:cs typeface="Arial" pitchFamily="34" charset="-120"/>
-              </a:rPr>
-              <a:t>تركيب / إدخال الألواح المضلعة (Corrugated sheets)</a:t>
-            </a:r>
-            <a:endParaRPr lang="ar-SA" sz="1100" dirty="0"/>
-          </a:p>
-        </p:txBody>
-      </p:sp>
-      <p:sp>
-        <p:nvSpPr>
-          <p:cNvPr id="31" name="Text 29"/>
-          <p:cNvSpPr/>
-          <p:nvPr/>
-        </p:nvSpPr>
-        <p:spPr>
-          <a:xfrm>
-            <a:off x="667512" y="2542032"/>
-            <a:ext cx="1606235" cy="228600"/>
-          </a:xfrm>
-          <a:prstGeom prst="rect">
-            <a:avLst/>
-          </a:prstGeom>
-          <a:noFill/>
-          <a:ln/>
-        </p:spPr>
-        <p:txBody>
-          <a:bodyPr wrap="square" lIns="0" tIns="0" rIns="0" bIns="0" rtlCol="0" anchor="t">
-            <a:normAutofit/>
-          </a:bodyPr>
-          <a:lstStyle/>
-          <a:p>
-            <a:pPr rtl="1" algn="r" indent="0" marL="0">
-              <a:buNone/>
-            </a:pPr>
-            <a:r>
-              <a:rPr lang="ar-SA" altLang="en-US" sz="750" b="1" dirty="0">
-                <a:solidFill>
-                  <a:srgbClr val="7A3A30"/>
-                </a:solidFill>
-                <a:latin typeface="Arial" pitchFamily="34" charset="0"/>
-                <a:ea typeface="Arial" pitchFamily="34" charset="-122"/>
-                <a:cs typeface="Arial" pitchFamily="34" charset="-120"/>
-              </a:rPr>
-              <a:t>18 أكتوبر → 19 أكتوبر · 2 يوم · A4 SS +1</a:t>
-            </a:r>
-            <a:endParaRPr lang="ar-SA" sz="750" dirty="0"/>
-          </a:p>
-        </p:txBody>
-      </p:sp>
-      <p:sp>
-        <p:nvSpPr>
-          <p:cNvPr id="32" name="Text 30"/>
-          <p:cNvSpPr/>
-          <p:nvPr/>
-        </p:nvSpPr>
-        <p:spPr>
-          <a:xfrm>
-            <a:off x="365760" y="2852928"/>
-            <a:ext cx="11460175" cy="182880"/>
-          </a:xfrm>
-          <a:prstGeom prst="rect">
-            <a:avLst/>
-          </a:prstGeom>
-          <a:noFill/>
-          <a:ln/>
-        </p:spPr>
-        <p:txBody>
-          <a:bodyPr wrap="square" lIns="0" tIns="0" rIns="0" bIns="0" rtlCol="0" anchor="ctr">
-            <a:normAutofit/>
-          </a:bodyPr>
-          <a:lstStyle/>
-          <a:p>
-            <a:pPr rtl="1" algn="r" indent="0" marL="0">
-              <a:buNone/>
-            </a:pPr>
-            <a:r>
-              <a:rPr lang="ar-SA" altLang="en-US" sz="750" dirty="0">
-                <a:solidFill>
-                  <a:srgbClr val="66707A"/>
-                </a:solidFill>
-                <a:latin typeface="Arial" pitchFamily="34" charset="0"/>
-                <a:ea typeface="Arial" pitchFamily="34" charset="-122"/>
-                <a:cs typeface="Arial" pitchFamily="34" charset="-120"/>
-              </a:rPr>
-              <a:t>مدد وعلاقات الأنشطة الخمسة الفرعية مقترحة لتقع ضمن 6 أيام عمل للنشاط A (قابلة للتعديل).</a:t>
-            </a:r>
-            <a:endParaRPr lang="ar-SA" sz="750" dirty="0"/>
-          </a:p>
-        </p:txBody>
-      </p:sp>
-      <p:sp>
-        <p:nvSpPr>
-          <p:cNvPr id="33" name="Shape 31"/>
-          <p:cNvSpPr/>
-          <p:nvPr/>
-        </p:nvSpPr>
-        <p:spPr>
-          <a:xfrm>
-            <a:off x="11771071" y="3099816"/>
-            <a:ext cx="54864" cy="256032"/>
-          </a:xfrm>
-          <a:prstGeom prst="rect">
-            <a:avLst/>
-          </a:prstGeom>
-          <a:solidFill>
-            <a:srgbClr val="00778B"/>
-          </a:solidFill>
-          <a:ln w="12700">
-            <a:solidFill>
-              <a:srgbClr val="00778B"/>
-            </a:solidFill>
-            <a:prstDash val="solid"/>
-          </a:ln>
-        </p:spPr>
-      </p:sp>
-      <p:sp>
-        <p:nvSpPr>
-          <p:cNvPr id="34" name="Text 32"/>
-          <p:cNvSpPr/>
-          <p:nvPr/>
-        </p:nvSpPr>
-        <p:spPr>
-          <a:xfrm>
-            <a:off x="8022031" y="3063240"/>
-            <a:ext cx="3657600" cy="329184"/>
-          </a:xfrm>
-          <a:prstGeom prst="rect">
-            <a:avLst/>
-          </a:prstGeom>
-          <a:noFill/>
-          <a:ln/>
-        </p:spPr>
-        <p:txBody>
-          <a:bodyPr wrap="square" lIns="0" tIns="0" rIns="0" bIns="0" rtlCol="0" anchor="ctr">
-            <a:normAutofit/>
-          </a:bodyPr>
-          <a:lstStyle/>
-          <a:p>
-            <a:pPr rtl="1" algn="r" indent="0" marL="0">
-              <a:buNone/>
-            </a:pPr>
-            <a:r>
-              <a:rPr lang="ar-SA" altLang="en-US" sz="1500" b="1" dirty="0">
-                <a:solidFill>
-                  <a:srgbClr val="3D3935"/>
-                </a:solidFill>
-                <a:latin typeface="Arial" pitchFamily="34" charset="0"/>
-                <a:ea typeface="Arial" pitchFamily="34" charset="-122"/>
-                <a:cs typeface="Arial" pitchFamily="34" charset="-120"/>
-              </a:rPr>
-              <a:t>التواريخ الرئيسية (تلقائية)</a:t>
-            </a:r>
-            <a:endParaRPr lang="ar-SA" sz="1500" dirty="0"/>
-          </a:p>
-        </p:txBody>
-      </p:sp>
-      <p:sp>
-        <p:nvSpPr>
-          <p:cNvPr id="35" name="Shape 33"/>
-          <p:cNvSpPr/>
-          <p:nvPr/>
-        </p:nvSpPr>
-        <p:spPr>
-          <a:xfrm>
-            <a:off x="7619695" y="3493008"/>
-            <a:ext cx="4206240" cy="310896"/>
-          </a:xfrm>
-          <a:prstGeom prst="rect">
-            <a:avLst/>
-          </a:prstGeom>
-          <a:solidFill>
-            <a:srgbClr val="FFFFFF"/>
-          </a:solidFill>
-          <a:ln w="6350">
-            <a:solidFill>
-              <a:srgbClr val="DFE6EA"/>
-            </a:solidFill>
-            <a:prstDash val="solid"/>
-          </a:ln>
-        </p:spPr>
-      </p:sp>
-      <p:sp>
-        <p:nvSpPr>
-          <p:cNvPr id="36" name="Text 34"/>
-          <p:cNvSpPr/>
-          <p:nvPr/>
-        </p:nvSpPr>
-        <p:spPr>
-          <a:xfrm>
-            <a:off x="9448495" y="3493008"/>
-            <a:ext cx="2286000" cy="310896"/>
-          </a:xfrm>
-          <a:prstGeom prst="rect">
-            <a:avLst/>
-          </a:prstGeom>
-          <a:noFill/>
-          <a:ln/>
-        </p:spPr>
-        <p:txBody>
-          <a:bodyPr wrap="square" lIns="0" tIns="0" rIns="0" bIns="0" rtlCol="0" anchor="ctr">
-            <a:normAutofit/>
-          </a:bodyPr>
-          <a:lstStyle/>
-          <a:p>
-            <a:pPr rtl="1" algn="r" indent="0" marL="0">
-              <a:buNone/>
-            </a:pPr>
-            <a:r>
-              <a:rPr lang="ar-SA" altLang="en-US" sz="950" dirty="0">
-                <a:solidFill>
-                  <a:srgbClr val="4A555D"/>
-                </a:solidFill>
-                <a:latin typeface="Arial" pitchFamily="34" charset="0"/>
-                <a:ea typeface="Arial" pitchFamily="34" charset="-122"/>
-                <a:cs typeface="Arial" pitchFamily="34" charset="-120"/>
-              </a:rPr>
-              <a:t>بدء الأعمال</a:t>
-            </a:r>
-            <a:endParaRPr lang="ar-SA" sz="950" dirty="0"/>
-          </a:p>
-        </p:txBody>
-      </p:sp>
-      <p:sp>
-        <p:nvSpPr>
-          <p:cNvPr id="37" name="Text 35"/>
-          <p:cNvSpPr/>
-          <p:nvPr/>
-        </p:nvSpPr>
-        <p:spPr>
-          <a:xfrm>
-            <a:off x="7711135" y="3493008"/>
-            <a:ext cx="1828800" cy="310896"/>
-          </a:xfrm>
-          <a:prstGeom prst="rect">
-            <a:avLst/>
-          </a:prstGeom>
-          <a:noFill/>
-          <a:ln/>
-        </p:spPr>
-        <p:txBody>
-          <a:bodyPr wrap="square" lIns="0" tIns="0" rIns="0" bIns="0" rtlCol="0" anchor="ctr">
-            <a:normAutofit/>
-          </a:bodyPr>
-          <a:lstStyle/>
-          <a:p>
-            <a:pPr rtl="1" algn="l" indent="0" marL="0">
-              <a:buNone/>
-            </a:pPr>
-            <a:r>
-              <a:rPr lang="ar-SA" altLang="en-US" sz="950" b="1" dirty="0">
-                <a:solidFill>
-                  <a:srgbClr val="3D3935"/>
-                </a:solidFill>
-                <a:latin typeface="Arial" pitchFamily="34" charset="0"/>
-                <a:ea typeface="Arial" pitchFamily="34" charset="-122"/>
-                <a:cs typeface="Arial" pitchFamily="34" charset="-120"/>
-              </a:rPr>
-              <a:t>ثلاثاء 13 أكتوبر 2026</a:t>
-            </a:r>
-            <a:endParaRPr lang="ar-SA" sz="950" dirty="0"/>
-          </a:p>
-        </p:txBody>
-      </p:sp>
-      <p:sp>
-        <p:nvSpPr>
-          <p:cNvPr id="38" name="Shape 36"/>
-          <p:cNvSpPr/>
-          <p:nvPr/>
-        </p:nvSpPr>
-        <p:spPr>
-          <a:xfrm>
-            <a:off x="7619695" y="3803904"/>
-            <a:ext cx="4206240" cy="310896"/>
-          </a:xfrm>
-          <a:prstGeom prst="rect">
-            <a:avLst/>
-          </a:prstGeom>
-          <a:solidFill>
-            <a:srgbClr val="F6F9FA"/>
-          </a:solidFill>
-          <a:ln w="6350">
-            <a:solidFill>
-              <a:srgbClr val="DFE6EA"/>
-            </a:solidFill>
-            <a:prstDash val="solid"/>
-          </a:ln>
-        </p:spPr>
-      </p:sp>
-      <p:sp>
-        <p:nvSpPr>
-          <p:cNvPr id="39" name="Text 37"/>
-          <p:cNvSpPr/>
-          <p:nvPr/>
-        </p:nvSpPr>
-        <p:spPr>
-          <a:xfrm>
-            <a:off x="9448495" y="3803904"/>
-            <a:ext cx="2286000" cy="310896"/>
-          </a:xfrm>
-          <a:prstGeom prst="rect">
-            <a:avLst/>
-          </a:prstGeom>
-          <a:noFill/>
-          <a:ln/>
-        </p:spPr>
-        <p:txBody>
-          <a:bodyPr wrap="square" lIns="0" tIns="0" rIns="0" bIns="0" rtlCol="0" anchor="ctr">
-            <a:normAutofit/>
-          </a:bodyPr>
-          <a:lstStyle/>
-          <a:p>
-            <a:pPr rtl="1" algn="r" indent="0" marL="0">
-              <a:buNone/>
-            </a:pPr>
-            <a:r>
-              <a:rPr lang="ar-SA" altLang="en-US" sz="950" dirty="0">
-                <a:solidFill>
-                  <a:srgbClr val="4A555D"/>
-                </a:solidFill>
-                <a:latin typeface="Arial" pitchFamily="34" charset="0"/>
-                <a:ea typeface="Arial" pitchFamily="34" charset="-122"/>
-                <a:cs typeface="Arial" pitchFamily="34" charset="-120"/>
-              </a:rPr>
-              <a:t>اكتمال تركيب نظام الدعم</a:t>
-            </a:r>
-            <a:endParaRPr lang="ar-SA" sz="950" dirty="0"/>
-          </a:p>
-        </p:txBody>
-      </p:sp>
-      <p:sp>
-        <p:nvSpPr>
-          <p:cNvPr id="40" name="Text 38"/>
-          <p:cNvSpPr/>
-          <p:nvPr/>
-        </p:nvSpPr>
-        <p:spPr>
-          <a:xfrm>
-            <a:off x="7711135" y="3803904"/>
-            <a:ext cx="1828800" cy="310896"/>
-          </a:xfrm>
-          <a:prstGeom prst="rect">
-            <a:avLst/>
-          </a:prstGeom>
-          <a:noFill/>
-          <a:ln/>
-        </p:spPr>
-        <p:txBody>
-          <a:bodyPr wrap="square" lIns="0" tIns="0" rIns="0" bIns="0" rtlCol="0" anchor="ctr">
-            <a:normAutofit/>
-          </a:bodyPr>
-          <a:lstStyle/>
-          <a:p>
-            <a:pPr rtl="1" algn="l" indent="0" marL="0">
-              <a:buNone/>
-            </a:pPr>
-            <a:r>
-              <a:rPr lang="ar-SA" altLang="en-US" sz="950" b="1" dirty="0">
-                <a:solidFill>
-                  <a:srgbClr val="3D3935"/>
-                </a:solidFill>
-                <a:latin typeface="Arial" pitchFamily="34" charset="0"/>
-                <a:ea typeface="Arial" pitchFamily="34" charset="-122"/>
-                <a:cs typeface="Arial" pitchFamily="34" charset="-120"/>
-              </a:rPr>
-              <a:t>اثنين 19 أكتوبر 2026</a:t>
-            </a:r>
-            <a:endParaRPr lang="ar-SA" sz="950" dirty="0"/>
-          </a:p>
-        </p:txBody>
-      </p:sp>
-      <p:sp>
-        <p:nvSpPr>
-          <p:cNvPr id="41" name="Shape 39"/>
-          <p:cNvSpPr/>
-          <p:nvPr/>
-        </p:nvSpPr>
-        <p:spPr>
-          <a:xfrm>
-            <a:off x="7619695" y="4114800"/>
-            <a:ext cx="4206240" cy="310896"/>
-          </a:xfrm>
-          <a:prstGeom prst="rect">
-            <a:avLst/>
-          </a:prstGeom>
-          <a:solidFill>
-            <a:srgbClr val="FFFFFF"/>
-          </a:solidFill>
-          <a:ln w="6350">
-            <a:solidFill>
-              <a:srgbClr val="DFE6EA"/>
-            </a:solidFill>
-            <a:prstDash val="solid"/>
-          </a:ln>
-        </p:spPr>
-      </p:sp>
-      <p:sp>
-        <p:nvSpPr>
-          <p:cNvPr id="42" name="Text 40"/>
-          <p:cNvSpPr/>
-          <p:nvPr/>
-        </p:nvSpPr>
-        <p:spPr>
-          <a:xfrm>
-            <a:off x="9448495" y="4114800"/>
-            <a:ext cx="2286000" cy="310896"/>
-          </a:xfrm>
-          <a:prstGeom prst="rect">
-            <a:avLst/>
-          </a:prstGeom>
-          <a:noFill/>
-          <a:ln/>
-        </p:spPr>
-        <p:txBody>
-          <a:bodyPr wrap="square" lIns="0" tIns="0" rIns="0" bIns="0" rtlCol="0" anchor="ctr">
-            <a:normAutofit/>
-          </a:bodyPr>
-          <a:lstStyle/>
-          <a:p>
-            <a:pPr rtl="1" algn="r" indent="0" marL="0">
-              <a:buNone/>
-            </a:pPr>
-            <a:r>
-              <a:rPr lang="ar-SA" altLang="en-US" sz="950" dirty="0">
-                <a:solidFill>
-                  <a:srgbClr val="4A555D"/>
-                </a:solidFill>
-                <a:latin typeface="Arial" pitchFamily="34" charset="0"/>
-                <a:ea typeface="Arial" pitchFamily="34" charset="-122"/>
-                <a:cs typeface="Arial" pitchFamily="34" charset="-120"/>
-              </a:rPr>
-              <a:t>اكتمال أعمال الحفرة (جدار الحفرة)</a:t>
-            </a:r>
-            <a:endParaRPr lang="ar-SA" sz="950" dirty="0"/>
-          </a:p>
-        </p:txBody>
-      </p:sp>
-      <p:sp>
-        <p:nvSpPr>
-          <p:cNvPr id="43" name="Text 41"/>
-          <p:cNvSpPr/>
-          <p:nvPr/>
-        </p:nvSpPr>
-        <p:spPr>
-          <a:xfrm>
-            <a:off x="7711135" y="4114800"/>
-            <a:ext cx="1828800" cy="310896"/>
-          </a:xfrm>
-          <a:prstGeom prst="rect">
-            <a:avLst/>
-          </a:prstGeom>
-          <a:noFill/>
-          <a:ln/>
-        </p:spPr>
-        <p:txBody>
-          <a:bodyPr wrap="square" lIns="0" tIns="0" rIns="0" bIns="0" rtlCol="0" anchor="ctr">
-            <a:normAutofit/>
-          </a:bodyPr>
-          <a:lstStyle/>
-          <a:p>
-            <a:pPr rtl="1" algn="l" indent="0" marL="0">
-              <a:buNone/>
-            </a:pPr>
-            <a:r>
-              <a:rPr lang="ar-SA" altLang="en-US" sz="950" b="1" dirty="0">
-                <a:solidFill>
-                  <a:srgbClr val="3D3935"/>
-                </a:solidFill>
-                <a:latin typeface="Arial" pitchFamily="34" charset="0"/>
-                <a:ea typeface="Arial" pitchFamily="34" charset="-122"/>
-                <a:cs typeface="Arial" pitchFamily="34" charset="-120"/>
-              </a:rPr>
-              <a:t>أربعاء 11 نوفمبر 2026</a:t>
-            </a:r>
-            <a:endParaRPr lang="ar-SA" sz="950" dirty="0"/>
-          </a:p>
-        </p:txBody>
-      </p:sp>
-      <p:sp>
-        <p:nvSpPr>
-          <p:cNvPr id="44" name="Shape 42"/>
-          <p:cNvSpPr/>
-          <p:nvPr/>
-        </p:nvSpPr>
-        <p:spPr>
-          <a:xfrm>
-            <a:off x="7619695" y="4425696"/>
-            <a:ext cx="4206240" cy="310896"/>
-          </a:xfrm>
-          <a:prstGeom prst="rect">
-            <a:avLst/>
-          </a:prstGeom>
-          <a:solidFill>
-            <a:srgbClr val="F6F9FA"/>
-          </a:solidFill>
-          <a:ln w="6350">
-            <a:solidFill>
-              <a:srgbClr val="DFE6EA"/>
-            </a:solidFill>
-            <a:prstDash val="solid"/>
-          </a:ln>
-        </p:spPr>
-      </p:sp>
-      <p:sp>
-        <p:nvSpPr>
-          <p:cNvPr id="45" name="Text 43"/>
-          <p:cNvSpPr/>
-          <p:nvPr/>
-        </p:nvSpPr>
-        <p:spPr>
-          <a:xfrm>
-            <a:off x="9448495" y="4425696"/>
-            <a:ext cx="2286000" cy="310896"/>
-          </a:xfrm>
-          <a:prstGeom prst="rect">
-            <a:avLst/>
-          </a:prstGeom>
-          <a:noFill/>
-          <a:ln/>
-        </p:spPr>
-        <p:txBody>
-          <a:bodyPr wrap="square" lIns="0" tIns="0" rIns="0" bIns="0" rtlCol="0" anchor="ctr">
-            <a:normAutofit/>
-          </a:bodyPr>
-          <a:lstStyle/>
-          <a:p>
-            <a:pPr rtl="1" algn="r" indent="0" marL="0">
-              <a:buNone/>
-            </a:pPr>
-            <a:r>
-              <a:rPr lang="ar-SA" altLang="en-US" sz="950" dirty="0">
-                <a:solidFill>
-                  <a:srgbClr val="4A555D"/>
-                </a:solidFill>
-                <a:latin typeface="Arial" pitchFamily="34" charset="0"/>
-                <a:ea typeface="Arial" pitchFamily="34" charset="-122"/>
-                <a:cs typeface="Arial" pitchFamily="34" charset="-120"/>
-              </a:rPr>
-              <a:t>اكتمال أساسات المبنى</a:t>
-            </a:r>
-            <a:endParaRPr lang="ar-SA" sz="950" dirty="0"/>
-          </a:p>
-        </p:txBody>
-      </p:sp>
-      <p:sp>
-        <p:nvSpPr>
-          <p:cNvPr id="46" name="Text 44"/>
-          <p:cNvSpPr/>
-          <p:nvPr/>
-        </p:nvSpPr>
-        <p:spPr>
-          <a:xfrm>
-            <a:off x="7711135" y="4425696"/>
-            <a:ext cx="1828800" cy="310896"/>
-          </a:xfrm>
-          <a:prstGeom prst="rect">
-            <a:avLst/>
-          </a:prstGeom>
-          <a:noFill/>
-          <a:ln/>
-        </p:spPr>
-        <p:txBody>
-          <a:bodyPr wrap="square" lIns="0" tIns="0" rIns="0" bIns="0" rtlCol="0" anchor="ctr">
-            <a:normAutofit/>
-          </a:bodyPr>
-          <a:lstStyle/>
-          <a:p>
-            <a:pPr rtl="1" algn="l" indent="0" marL="0">
-              <a:buNone/>
-            </a:pPr>
-            <a:r>
-              <a:rPr lang="ar-SA" altLang="en-US" sz="950" b="1" dirty="0">
-                <a:solidFill>
-                  <a:srgbClr val="3D3935"/>
-                </a:solidFill>
-                <a:latin typeface="Arial" pitchFamily="34" charset="0"/>
-                <a:ea typeface="Arial" pitchFamily="34" charset="-122"/>
-                <a:cs typeface="Arial" pitchFamily="34" charset="-120"/>
-              </a:rPr>
-              <a:t>أربعاء 18 نوفمبر 2026</a:t>
-            </a:r>
-            <a:endParaRPr lang="ar-SA" sz="950" dirty="0"/>
-          </a:p>
-        </p:txBody>
-      </p:sp>
-      <p:sp>
-        <p:nvSpPr>
-          <p:cNvPr id="47" name="Shape 45"/>
-          <p:cNvSpPr/>
-          <p:nvPr/>
-        </p:nvSpPr>
-        <p:spPr>
-          <a:xfrm>
-            <a:off x="7619695" y="4736592"/>
-            <a:ext cx="4206240" cy="310896"/>
-          </a:xfrm>
-          <a:prstGeom prst="rect">
-            <a:avLst/>
-          </a:prstGeom>
-          <a:solidFill>
-            <a:srgbClr val="FFFFFF"/>
-          </a:solidFill>
-          <a:ln w="6350">
-            <a:solidFill>
-              <a:srgbClr val="DFE6EA"/>
-            </a:solidFill>
-            <a:prstDash val="solid"/>
-          </a:ln>
-        </p:spPr>
-      </p:sp>
-      <p:sp>
-        <p:nvSpPr>
-          <p:cNvPr id="48" name="Text 46"/>
-          <p:cNvSpPr/>
-          <p:nvPr/>
-        </p:nvSpPr>
-        <p:spPr>
-          <a:xfrm>
-            <a:off x="9448495" y="4736592"/>
-            <a:ext cx="2286000" cy="310896"/>
-          </a:xfrm>
-          <a:prstGeom prst="rect">
-            <a:avLst/>
-          </a:prstGeom>
-          <a:noFill/>
-          <a:ln/>
-        </p:spPr>
-        <p:txBody>
-          <a:bodyPr wrap="square" lIns="0" tIns="0" rIns="0" bIns="0" rtlCol="0" anchor="ctr">
-            <a:normAutofit/>
-          </a:bodyPr>
-          <a:lstStyle/>
-          <a:p>
-            <a:pPr rtl="1" algn="r" indent="0" marL="0">
-              <a:buNone/>
-            </a:pPr>
-            <a:r>
-              <a:rPr lang="ar-SA" altLang="en-US" sz="950" dirty="0">
-                <a:solidFill>
-                  <a:srgbClr val="4A555D"/>
-                </a:solidFill>
-                <a:latin typeface="Arial" pitchFamily="34" charset="0"/>
-                <a:ea typeface="Arial" pitchFamily="34" charset="-122"/>
-                <a:cs typeface="Arial" pitchFamily="34" charset="-120"/>
-              </a:rPr>
-              <a:t>الإنجاز الكلي</a:t>
-            </a:r>
-            <a:endParaRPr lang="ar-SA" sz="950" dirty="0"/>
-          </a:p>
-        </p:txBody>
-      </p:sp>
-      <p:sp>
-        <p:nvSpPr>
-          <p:cNvPr id="49" name="Text 47"/>
-          <p:cNvSpPr/>
-          <p:nvPr/>
-        </p:nvSpPr>
-        <p:spPr>
-          <a:xfrm>
-            <a:off x="7711135" y="4736592"/>
-            <a:ext cx="1828800" cy="310896"/>
-          </a:xfrm>
-          <a:prstGeom prst="rect">
-            <a:avLst/>
-          </a:prstGeom>
-          <a:noFill/>
-          <a:ln/>
-        </p:spPr>
-        <p:txBody>
-          <a:bodyPr wrap="square" lIns="0" tIns="0" rIns="0" bIns="0" rtlCol="0" anchor="ctr">
-            <a:normAutofit/>
-          </a:bodyPr>
-          <a:lstStyle/>
-          <a:p>
-            <a:pPr rtl="1" algn="l" indent="0" marL="0">
-              <a:buNone/>
-            </a:pPr>
-            <a:r>
-              <a:rPr lang="ar-SA" altLang="en-US" sz="950" b="1" dirty="0">
-                <a:solidFill>
-                  <a:srgbClr val="3D3935"/>
-                </a:solidFill>
-                <a:latin typeface="Arial" pitchFamily="34" charset="0"/>
-                <a:ea typeface="Arial" pitchFamily="34" charset="-122"/>
-                <a:cs typeface="Arial" pitchFamily="34" charset="-120"/>
-              </a:rPr>
-              <a:t>ثلاثاء 24 نوفمبر 2026</a:t>
-            </a:r>
-            <a:endParaRPr lang="ar-SA" sz="950" dirty="0"/>
-          </a:p>
-        </p:txBody>
-      </p:sp>
-      <p:sp>
-        <p:nvSpPr>
-          <p:cNvPr id="50" name="Shape 48"/>
-          <p:cNvSpPr/>
-          <p:nvPr/>
-        </p:nvSpPr>
-        <p:spPr>
-          <a:xfrm>
-            <a:off x="7619695" y="5166360"/>
-            <a:ext cx="4206240" cy="960120"/>
-          </a:xfrm>
-          <a:prstGeom prst="roundRect">
-            <a:avLst>
-              <a:gd name="adj" fmla="val 7619"/>
-            </a:avLst>
-          </a:prstGeom>
-          <a:solidFill>
-            <a:srgbClr val="FFF6E5"/>
-          </a:solidFill>
-          <a:ln w="12700">
-            <a:solidFill>
-              <a:srgbClr val="F0C36D"/>
-            </a:solidFill>
-            <a:prstDash val="solid"/>
-          </a:ln>
-        </p:spPr>
-      </p:sp>
-      <p:sp>
-        <p:nvSpPr>
-          <p:cNvPr id="51" name="Text 49"/>
-          <p:cNvSpPr/>
-          <p:nvPr/>
-        </p:nvSpPr>
-        <p:spPr>
-          <a:xfrm>
-            <a:off x="7756855" y="5212080"/>
-            <a:ext cx="3931920" cy="228600"/>
-          </a:xfrm>
-          <a:prstGeom prst="rect">
-            <a:avLst/>
-          </a:prstGeom>
-          <a:noFill/>
-          <a:ln/>
-        </p:spPr>
-        <p:txBody>
-          <a:bodyPr wrap="square" lIns="0" tIns="0" rIns="0" bIns="0" rtlCol="0" anchor="ctr">
-            <a:normAutofit/>
-          </a:bodyPr>
-          <a:lstStyle/>
-          <a:p>
-            <a:pPr rtl="1" algn="r" indent="0" marL="0">
-              <a:buNone/>
-            </a:pPr>
-            <a:r>
-              <a:rPr lang="ar-SA" altLang="en-US" sz="950" b="1" dirty="0">
-                <a:solidFill>
-                  <a:srgbClr val="9A6A00"/>
-                </a:solidFill>
-                <a:latin typeface="Arial" pitchFamily="34" charset="0"/>
-                <a:ea typeface="Arial" pitchFamily="34" charset="-122"/>
-                <a:cs typeface="Arial" pitchFamily="34" charset="-120"/>
-              </a:rPr>
-              <a:t>سيناريو افتراضي</a:t>
-            </a:r>
-            <a:endParaRPr lang="ar-SA" sz="950" dirty="0"/>
-          </a:p>
-        </p:txBody>
-      </p:sp>
-      <p:sp>
-        <p:nvSpPr>
-          <p:cNvPr id="52" name="Text 50"/>
-          <p:cNvSpPr/>
-          <p:nvPr/>
-        </p:nvSpPr>
-        <p:spPr>
-          <a:xfrm>
-            <a:off x="7756855" y="5440680"/>
-            <a:ext cx="3931920" cy="658368"/>
-          </a:xfrm>
-          <a:prstGeom prst="rect">
-            <a:avLst/>
-          </a:prstGeom>
-          <a:noFill/>
-          <a:ln/>
-        </p:spPr>
-        <p:txBody>
-          <a:bodyPr wrap="square" lIns="0" tIns="0" rIns="0" bIns="0" rtlCol="0" anchor="t">
-            <a:normAutofit/>
-          </a:bodyPr>
-          <a:lstStyle/>
-          <a:p>
-            <a:pPr rtl="1" algn="r" indent="0" marL="0">
-              <a:buNone/>
-            </a:pPr>
-            <a:r>
-              <a:rPr lang="ar-SA" altLang="en-US" sz="950" dirty="0">
-                <a:solidFill>
-                  <a:srgbClr val="3D3935"/>
-                </a:solidFill>
-                <a:latin typeface="Arial" pitchFamily="34" charset="0"/>
-                <a:ea typeface="Arial" pitchFamily="34" charset="-122"/>
-                <a:cs typeface="Arial" pitchFamily="34" charset="-120"/>
-              </a:rPr>
-              <a:t>إذا بدأت الأعمال في 21 أكتوبر 2026 (تاريخ جاهزية التصريح) → فسيكون الإنجاز الكلي 2 ديسمبر 2026 (+8 يوماً (تقويمياً) بعد المقترح).</a:t>
-            </a:r>
-            <a:endParaRPr lang="ar-SA" sz="950" dirty="0"/>
-          </a:p>
-        </p:txBody>
-      </p:sp>
-      <p:sp>
-        <p:nvSpPr>
-          <p:cNvPr id="53" name="Shape 51"/>
-          <p:cNvSpPr/>
-          <p:nvPr/>
-        </p:nvSpPr>
-        <p:spPr>
-          <a:xfrm>
-            <a:off x="7199071" y="3099816"/>
-            <a:ext cx="54864" cy="256032"/>
-          </a:xfrm>
-          <a:prstGeom prst="rect">
-            <a:avLst/>
-          </a:prstGeom>
-          <a:solidFill>
-            <a:srgbClr val="00778B"/>
-          </a:solidFill>
-          <a:ln w="12700">
-            <a:solidFill>
-              <a:srgbClr val="00778B"/>
-            </a:solidFill>
-            <a:prstDash val="solid"/>
-          </a:ln>
-        </p:spPr>
-      </p:sp>
-      <p:sp>
-        <p:nvSpPr>
-          <p:cNvPr id="54" name="Text 52"/>
-          <p:cNvSpPr/>
-          <p:nvPr/>
-        </p:nvSpPr>
-        <p:spPr>
-          <a:xfrm>
-            <a:off x="1621231" y="3063240"/>
-            <a:ext cx="5486400" cy="329184"/>
-          </a:xfrm>
-          <a:prstGeom prst="rect">
-            <a:avLst/>
-          </a:prstGeom>
-          <a:noFill/>
-          <a:ln/>
-        </p:spPr>
-        <p:txBody>
-          <a:bodyPr wrap="square" lIns="0" tIns="0" rIns="0" bIns="0" rtlCol="0" anchor="ctr">
-            <a:normAutofit/>
-          </a:bodyPr>
-          <a:lstStyle/>
-          <a:p>
-            <a:pPr rtl="1" algn="r" indent="0" marL="0">
-              <a:buNone/>
-            </a:pPr>
-            <a:r>
-              <a:rPr lang="ar-SA" altLang="en-US" sz="1500" b="1" dirty="0">
-                <a:solidFill>
-                  <a:srgbClr val="3D3935"/>
-                </a:solidFill>
-                <a:latin typeface="Arial" pitchFamily="34" charset="0"/>
-                <a:ea typeface="Arial" pitchFamily="34" charset="-122"/>
-                <a:cs typeface="Arial" pitchFamily="34" charset="-120"/>
-              </a:rPr>
-              <a:t>ملاحظات وشروط</a:t>
-            </a:r>
-            <a:endParaRPr lang="ar-SA" sz="1500" dirty="0"/>
-          </a:p>
-        </p:txBody>
-      </p:sp>
-      <p:sp>
-        <p:nvSpPr>
-          <p:cNvPr id="55" name="Text 53"/>
-          <p:cNvSpPr/>
-          <p:nvPr/>
-        </p:nvSpPr>
-        <p:spPr>
-          <a:xfrm>
-            <a:off x="395935" y="3474720"/>
-            <a:ext cx="6766560" cy="2697480"/>
-          </a:xfrm>
-          <a:prstGeom prst="rect">
-            <a:avLst/>
-          </a:prstGeom>
-          <a:noFill/>
-          <a:ln/>
-        </p:spPr>
-        <p:txBody>
-          <a:bodyPr wrap="square" lIns="0" tIns="0" rIns="0" bIns="0" rtlCol="0" anchor="t">
-            <a:normAutofit/>
-          </a:bodyPr>
-          <a:lstStyle/>
-          <a:p>
-            <a:pPr algn="r" marL="342900" indent="-342900">
-              <a:spcAft>
-                <a:spcPts val="600"/>
-              </a:spcAft>
-              <a:buSzPct val="100000"/>
-              <a:buFont typeface="+mj-lt"/>
-              <a:buAutoNum type="arabicPeriod" startAt="1"/>
-            </a:pPr>
-            <a:r>
-              <a:rPr lang="ar-SA" altLang="en-US" sz="1050" dirty="0">
-                <a:solidFill>
-                  <a:srgbClr val="333333"/>
-                </a:solidFill>
-                <a:latin typeface="Arial" pitchFamily="34" charset="0"/>
-                <a:ea typeface="Arial" pitchFamily="34" charset="-122"/>
-                <a:cs typeface="Arial" pitchFamily="34" charset="-120"/>
-              </a:rPr>
-              <a:t>بدء كل نشاط مشروط بإصدار تصريح العمل والموافقة في الوقت المناسب على طلبات فحص الأعمال (WIR) وطلبات فحص المواد (MIR). أي تأخير في إصدار التصريح أو اعتماد الطلبات يزيح النشاط المتأثر وكل الأنشطة اللاحقة له.</a:t>
-            </a:r>
-            <a:endParaRPr lang="ar-SA" sz="1050" dirty="0"/>
-          </a:p>
-          <a:p>
-            <a:pPr algn="r" marL="342900" indent="-342900">
-              <a:spcAft>
-                <a:spcPts val="600"/>
-              </a:spcAft>
-              <a:buSzPct val="100000"/>
-              <a:buFont typeface="+mj-lt"/>
-              <a:buAutoNum type="arabicPeriod" startAt="1"/>
-            </a:pPr>
-            <a:r>
-              <a:rPr lang="ar-SA" altLang="en-US" sz="1050" dirty="0">
-                <a:solidFill>
-                  <a:srgbClr val="333333"/>
-                </a:solidFill>
-                <a:latin typeface="Arial" pitchFamily="34" charset="0"/>
-                <a:ea typeface="Arial" pitchFamily="34" charset="-122"/>
-                <a:cs typeface="Arial" pitchFamily="34" charset="-120"/>
-              </a:rPr>
-              <a:t>أسبوع العمل من السبت إلى الخميس، والجمعة إجازة.</a:t>
-            </a:r>
-            <a:endParaRPr lang="ar-SA" sz="1050" dirty="0"/>
-          </a:p>
-          <a:p>
-            <a:pPr algn="r" marL="342900" indent="-342900">
-              <a:spcAft>
-                <a:spcPts val="600"/>
-              </a:spcAft>
-              <a:buSzPct val="100000"/>
-              <a:buFont typeface="+mj-lt"/>
-              <a:buAutoNum type="arabicPeriod" startAt="1"/>
-            </a:pPr>
-            <a:r>
-              <a:rPr lang="ar-SA" altLang="en-US" sz="1050" dirty="0">
-                <a:solidFill>
-                  <a:srgbClr val="333333"/>
-                </a:solidFill>
-                <a:latin typeface="Arial" pitchFamily="34" charset="0"/>
-                <a:ea typeface="Arial" pitchFamily="34" charset="-122"/>
-                <a:cs typeface="Arial" pitchFamily="34" charset="-120"/>
-              </a:rPr>
-              <a:t>الخرسانة العادية تسير بالتوازي مع الدعم (علاقة SS) وتُصب فقط في الأجزاء التي تم تركيب الدعم فيها.</a:t>
-            </a:r>
-            <a:endParaRPr lang="ar-SA" sz="1050" dirty="0"/>
-          </a:p>
-          <a:p>
-            <a:pPr algn="r" marL="342900" indent="-342900">
-              <a:spcAft>
-                <a:spcPts val="600"/>
-              </a:spcAft>
-              <a:buSzPct val="100000"/>
-              <a:buFont typeface="+mj-lt"/>
-              <a:buAutoNum type="arabicPeriod" startAt="1"/>
-            </a:pPr>
-            <a:r>
-              <a:rPr lang="ar-SA" altLang="en-US" sz="1050" dirty="0">
-                <a:solidFill>
-                  <a:srgbClr val="333333"/>
-                </a:solidFill>
-                <a:latin typeface="Arial" pitchFamily="34" charset="0"/>
-                <a:ea typeface="Arial" pitchFamily="34" charset="-122"/>
-                <a:cs typeface="Arial" pitchFamily="34" charset="-120"/>
-              </a:rPr>
-              <a:t>أساسات المبنى مرتبطة بإنجاز بلاطة / لبشة الحفرة (علاقة FS) وتسير بالتوازي مع جدار الحفرة. يمكن تغيير سابقها إلى E إذا لزم أن تلي جدار الحفرة.</a:t>
-            </a:r>
-            <a:endParaRPr lang="ar-SA" sz="1050" dirty="0"/>
-          </a:p>
-        </p:txBody>
-      </p:sp>
-      <p:sp>
-        <p:nvSpPr>
-          <p:cNvPr id="56" name="Text 54"/>
-          <p:cNvSpPr/>
-          <p:nvPr/>
-        </p:nvSpPr>
-        <p:spPr>
-          <a:xfrm>
-            <a:off x="365760" y="6199632"/>
-            <a:ext cx="11460175" cy="228600"/>
-          </a:xfrm>
-          <a:prstGeom prst="rect">
-            <a:avLst/>
-          </a:prstGeom>
-          <a:noFill/>
-          <a:ln/>
-        </p:spPr>
-        <p:txBody>
-          <a:bodyPr wrap="square" lIns="0" tIns="0" rIns="0" bIns="0" rtlCol="0" anchor="ctr">
-            <a:normAutofit/>
-          </a:bodyPr>
-          <a:lstStyle/>
-          <a:p>
-            <a:pPr rtl="1" algn="r" indent="0" marL="0">
-              <a:buNone/>
-            </a:pPr>
-            <a:r>
-              <a:rPr lang="ar-SA" altLang="en-US" sz="750" dirty="0">
-                <a:solidFill>
-                  <a:srgbClr val="66707A"/>
-                </a:solidFill>
-                <a:latin typeface="Arial" pitchFamily="34" charset="0"/>
-                <a:ea typeface="Arial" pitchFamily="34" charset="-122"/>
-                <a:cs typeface="Arial" pitchFamily="34" charset="-120"/>
-              </a:rPr>
-              <a:t>المصدر: برنامج شركة الخليج للتطوير للمقاولات – المراجعة 01 (12 أكتوبر 2026)، مُحال من مدير الإنشاءات في SAR</a:t>
-            </a:r>
-            <a:endParaRPr lang="ar-SA" sz="750" dirty="0"/>
-          </a:p>
-        </p:txBody>
-      </p:sp>
-      <p:sp>
-        <p:nvSpPr>
-          <p:cNvPr id="25" name="Slide Number Placeholder 0"/>
-          <p:cNvSpPr>
-            <a:spLocks noGrp="1"/>
-          </p:cNvSpPr>
-          <p:nvPr>
-            <p:ph type="sldNum" sz="quarter" idx="4294967295"/>
-          </p:nvPr>
-        </p:nvSpPr>
-        <p:spPr>
-          <a:xfrm>
-            <a:off x="320040" y="6519672"/>
-            <a:ext cx="548640" cy="310896"/>
-          </a:xfrm>
-          <a:prstGeom prst="rect">
-            <a:avLst/>
-          </a:prstGeom>
-          <a:extLst>
-            <a:ext uri="{C572A759-6A51-4108-AA02-DFA0A04FC94B}">
-              <ma14:wrappingTextBoxFlag xmlns:ma14="http://schemas.microsoft.com/office/mac/drawingml/2011/main" val="0"/>
-            </a:ext>
-          </a:extLst>
-        </p:spPr>
-        <p:txBody>
-          <a:bodyPr/>
-          <a:lstStyle>
-            <a:lvl1pPr>
-              <a:defRPr sz="1000">
-                <a:solidFill>
-                  <a:srgbClr val="FFFFFF"/>
-                </a:solidFill>
-                <a:latin typeface="Arial"/>
-                <a:ea typeface="Arial"/>
-                <a:cs typeface="Arial"/>
-              </a:defRPr>
-            </a:lvl1pPr>
-          </a:lstStyle>
-          <a:p>
-            <a:pPr algn="ctr"/>
-            <a:fld id="{F7021451-1387-4CA6-816F-3879F97B5CBC}" type="slidenum">
-              <a:rPr b="0" lang="en-US"/>
-              <a:t>3</a:t>
             </a:fld>
             <a:endParaRPr lang="en-US"/>
           </a:p>

--- a/ufwl-timeline/UFWL_Presentation_AR.pptx
+++ b/ufwl-timeline/UFWL_Presentation_AR.pptx
@@ -14348,9 +14348,7 @@
             <a:ext cx="237744" cy="237744"/>
           </a:xfrm>
           <a:prstGeom prst="ellipse">
-            <a:avLst>
-              <a:gd name="adj" fmla="val 32692"/>
-            </a:avLst>
+            <a:avLst/>
           </a:prstGeom>
           <a:solidFill>
             <a:srgbClr val="C8503F"/>
@@ -16545,9 +16543,7 @@
             <a:ext cx="237744" cy="237744"/>
           </a:xfrm>
           <a:prstGeom prst="ellipse">
-            <a:avLst>
-              <a:gd name="adj" fmla="val 32692"/>
-            </a:avLst>
+            <a:avLst/>
           </a:prstGeom>
           <a:solidFill>
             <a:srgbClr val="00778B"/>
@@ -16877,9 +16873,7 @@
             <a:ext cx="237744" cy="237744"/>
           </a:xfrm>
           <a:prstGeom prst="ellipse">
-            <a:avLst>
-              <a:gd name="adj" fmla="val 32692"/>
-            </a:avLst>
+            <a:avLst/>
           </a:prstGeom>
           <a:solidFill>
             <a:srgbClr val="00778B"/>
@@ -17250,9 +17244,7 @@
             <a:ext cx="237744" cy="237744"/>
           </a:xfrm>
           <a:prstGeom prst="ellipse">
-            <a:avLst>
-              <a:gd name="adj" fmla="val 32692"/>
-            </a:avLst>
+            <a:avLst/>
           </a:prstGeom>
           <a:solidFill>
             <a:srgbClr val="00778B"/>
@@ -17623,9 +17615,7 @@
             <a:ext cx="237744" cy="237744"/>
           </a:xfrm>
           <a:prstGeom prst="ellipse">
-            <a:avLst>
-              <a:gd name="adj" fmla="val 32692"/>
-            </a:avLst>
+            <a:avLst/>
           </a:prstGeom>
           <a:solidFill>
             <a:srgbClr val="00778B"/>
@@ -17996,9 +17986,7 @@
             <a:ext cx="237744" cy="237744"/>
           </a:xfrm>
           <a:prstGeom prst="ellipse">
-            <a:avLst>
-              <a:gd name="adj" fmla="val 32692"/>
-            </a:avLst>
+            <a:avLst/>
           </a:prstGeom>
           <a:solidFill>
             <a:srgbClr val="2E9E6B"/>
@@ -18369,9 +18357,7 @@
             <a:ext cx="237744" cy="237744"/>
           </a:xfrm>
           <a:prstGeom prst="ellipse">
-            <a:avLst>
-              <a:gd name="adj" fmla="val 32692"/>
-            </a:avLst>
+            <a:avLst/>
           </a:prstGeom>
           <a:solidFill>
             <a:srgbClr val="D68A00"/>

--- a/ufwl-timeline/UFWL_Presentation_AR.pptx
+++ b/ufwl-timeline/UFWL_Presentation_AR.pptx
@@ -7012,13 +7012,81 @@
       </p:sp>
       <p:sp>
         <p:nvSpPr>
-          <p:cNvPr id="14" name="Text 12"/>
-          <p:cNvSpPr/>
-          <p:nvPr/>
-        </p:nvSpPr>
-        <p:spPr>
-          <a:xfrm>
-            <a:off x="3274466" y="1005840"/>
+          <p:cNvPr id="14" name="Shape 12"/>
+          <p:cNvSpPr/>
+          <p:nvPr/>
+        </p:nvSpPr>
+        <p:spPr>
+          <a:xfrm>
+            <a:off x="4638751" y="1097280"/>
+            <a:ext cx="274320" cy="45720"/>
+          </a:xfrm>
+          <a:prstGeom prst="roundRect">
+            <a:avLst>
+              <a:gd name="adj" fmla="val 40000"/>
+            </a:avLst>
+          </a:prstGeom>
+          <a:solidFill>
+            <a:srgbClr val="8A959C"/>
+          </a:solidFill>
+          <a:ln w="12700">
+            <a:solidFill>
+              <a:srgbClr val="8A959C"/>
+            </a:solidFill>
+            <a:prstDash val="solid"/>
+          </a:ln>
+        </p:spPr>
+      </p:sp>
+      <p:sp>
+        <p:nvSpPr>
+          <p:cNvPr id="15" name="Text 13"/>
+          <p:cNvSpPr/>
+          <p:nvPr/>
+        </p:nvSpPr>
+        <p:spPr>
+          <a:xfrm>
+            <a:off x="2627071" y="1005840"/>
+            <a:ext cx="1956816" cy="237744"/>
+          </a:xfrm>
+          <a:prstGeom prst="rect">
+            <a:avLst/>
+          </a:prstGeom>
+          <a:noFill/>
+          <a:ln/>
+        </p:spPr>
+        <p:txBody>
+          <a:bodyPr wrap="square" lIns="0" tIns="0" rIns="0" bIns="0" rtlCol="0" anchor="ctr">
+            <a:normAutofit/>
+          </a:bodyPr>
+          <a:lstStyle/>
+          <a:p>
+            <a:pPr rtl="1" algn="r" indent="0" marL="0">
+              <a:buNone/>
+            </a:pPr>
+            <a:r>
+              <a:rPr lang="ar-SA" altLang="en-US" sz="900" dirty="0">
+                <a:solidFill>
+                  <a:srgbClr val="333333"/>
+                </a:solidFill>
+                <a:latin typeface="Arial" pitchFamily="34" charset="0"/>
+                <a:ea typeface="Arial" pitchFamily="34" charset="-122"/>
+                <a:cs typeface="Arial" pitchFamily="34" charset="-120"/>
+              </a:rPr>
+              <a:t>الأساس (برنامج المقاول Rev 01)</a:t>
+            </a:r>
+            <a:endParaRPr lang="ar-SA" sz="900" dirty="0"/>
+          </a:p>
+        </p:txBody>
+      </p:sp>
+      <p:sp>
+        <p:nvSpPr>
+          <p:cNvPr id="16" name="Text 14"/>
+          <p:cNvSpPr/>
+          <p:nvPr/>
+        </p:nvSpPr>
+        <p:spPr>
+          <a:xfrm>
+            <a:off x="1043330" y="1005840"/>
             <a:ext cx="1638605" cy="237744"/>
           </a:xfrm>
           <a:prstGeom prst="rect">
@@ -7053,7 +7121,7 @@
       </p:sp>
       <p:sp>
         <p:nvSpPr>
-          <p:cNvPr id="15" name="Shape 13"/>
+          <p:cNvPr id="17" name="Shape 15"/>
           <p:cNvSpPr/>
           <p:nvPr/>
         </p:nvSpPr>
@@ -7078,7 +7146,7 @@
       </p:sp>
       <p:sp>
         <p:nvSpPr>
-          <p:cNvPr id="16" name="Text 14"/>
+          <p:cNvPr id="18" name="Text 16"/>
           <p:cNvSpPr/>
           <p:nvPr/>
         </p:nvSpPr>
@@ -7119,7 +7187,7 @@
       </p:sp>
       <p:sp>
         <p:nvSpPr>
-          <p:cNvPr id="17" name="Text 15"/>
+          <p:cNvPr id="19" name="Text 17"/>
           <p:cNvSpPr/>
           <p:nvPr/>
         </p:nvSpPr>
@@ -7160,7 +7228,7 @@
       </p:sp>
       <p:sp>
         <p:nvSpPr>
-          <p:cNvPr id="18" name="Text 16"/>
+          <p:cNvPr id="20" name="Text 18"/>
           <p:cNvSpPr/>
           <p:nvPr/>
         </p:nvSpPr>
@@ -7201,7 +7269,7 @@
       </p:sp>
       <p:sp>
         <p:nvSpPr>
-          <p:cNvPr id="19" name="Text 17"/>
+          <p:cNvPr id="21" name="Text 19"/>
           <p:cNvSpPr/>
           <p:nvPr/>
         </p:nvSpPr>
@@ -7242,7 +7310,7 @@
       </p:sp>
       <p:sp>
         <p:nvSpPr>
-          <p:cNvPr id="20" name="Text 18"/>
+          <p:cNvPr id="22" name="Text 20"/>
           <p:cNvSpPr/>
           <p:nvPr/>
         </p:nvSpPr>
@@ -7283,7 +7351,7 @@
       </p:sp>
       <p:sp>
         <p:nvSpPr>
-          <p:cNvPr id="21" name="Text 19"/>
+          <p:cNvPr id="23" name="Text 21"/>
           <p:cNvSpPr/>
           <p:nvPr/>
         </p:nvSpPr>
@@ -7324,7 +7392,7 @@
       </p:sp>
       <p:sp>
         <p:nvSpPr>
-          <p:cNvPr id="22" name="Shape 20"/>
+          <p:cNvPr id="24" name="Shape 22"/>
           <p:cNvSpPr/>
           <p:nvPr/>
         </p:nvSpPr>
@@ -7349,7 +7417,7 @@
       </p:sp>
       <p:sp>
         <p:nvSpPr>
-          <p:cNvPr id="23" name="Text 21"/>
+          <p:cNvPr id="25" name="Text 23"/>
           <p:cNvSpPr/>
           <p:nvPr/>
         </p:nvSpPr>
@@ -7390,7 +7458,7 @@
       </p:sp>
       <p:sp>
         <p:nvSpPr>
-          <p:cNvPr id="24" name="Shape 22"/>
+          <p:cNvPr id="26" name="Shape 24"/>
           <p:cNvSpPr/>
           <p:nvPr/>
         </p:nvSpPr>
@@ -7415,7 +7483,7 @@
       </p:sp>
       <p:sp>
         <p:nvSpPr>
-          <p:cNvPr id="25" name="Text 23"/>
+          <p:cNvPr id="27" name="Text 25"/>
           <p:cNvSpPr/>
           <p:nvPr/>
         </p:nvSpPr>
@@ -7456,7 +7524,7 @@
       </p:sp>
       <p:sp>
         <p:nvSpPr>
-          <p:cNvPr id="26" name="Shape 24"/>
+          <p:cNvPr id="28" name="Shape 26"/>
           <p:cNvSpPr/>
           <p:nvPr/>
         </p:nvSpPr>
@@ -7481,7 +7549,7 @@
       </p:sp>
       <p:sp>
         <p:nvSpPr>
-          <p:cNvPr id="27" name="Text 25"/>
+          <p:cNvPr id="29" name="Text 27"/>
           <p:cNvSpPr/>
           <p:nvPr/>
         </p:nvSpPr>
@@ -7522,7 +7590,7 @@
       </p:sp>
       <p:sp>
         <p:nvSpPr>
-          <p:cNvPr id="28" name="Shape 26"/>
+          <p:cNvPr id="30" name="Shape 28"/>
           <p:cNvSpPr/>
           <p:nvPr/>
         </p:nvSpPr>
@@ -7547,7 +7615,7 @@
       </p:sp>
       <p:sp>
         <p:nvSpPr>
-          <p:cNvPr id="29" name="Text 27"/>
+          <p:cNvPr id="31" name="Text 29"/>
           <p:cNvSpPr/>
           <p:nvPr/>
         </p:nvSpPr>
@@ -7588,7 +7656,7 @@
       </p:sp>
       <p:sp>
         <p:nvSpPr>
-          <p:cNvPr id="30" name="Shape 28"/>
+          <p:cNvPr id="32" name="Shape 30"/>
           <p:cNvSpPr/>
           <p:nvPr/>
         </p:nvSpPr>
@@ -7613,7 +7681,7 @@
       </p:sp>
       <p:sp>
         <p:nvSpPr>
-          <p:cNvPr id="31" name="Text 29"/>
+          <p:cNvPr id="33" name="Text 31"/>
           <p:cNvSpPr/>
           <p:nvPr/>
         </p:nvSpPr>
@@ -7654,7 +7722,7 @@
       </p:sp>
       <p:sp>
         <p:nvSpPr>
-          <p:cNvPr id="32" name="Shape 30"/>
+          <p:cNvPr id="34" name="Shape 32"/>
           <p:cNvSpPr/>
           <p:nvPr/>
         </p:nvSpPr>
@@ -7679,7 +7747,7 @@
       </p:sp>
       <p:sp>
         <p:nvSpPr>
-          <p:cNvPr id="33" name="Text 31"/>
+          <p:cNvPr id="35" name="Text 33"/>
           <p:cNvSpPr/>
           <p:nvPr/>
         </p:nvSpPr>
@@ -7720,7 +7788,7 @@
       </p:sp>
       <p:sp>
         <p:nvSpPr>
-          <p:cNvPr id="34" name="Shape 32"/>
+          <p:cNvPr id="36" name="Shape 34"/>
           <p:cNvSpPr/>
           <p:nvPr/>
         </p:nvSpPr>
@@ -7745,7 +7813,7 @@
       </p:sp>
       <p:sp>
         <p:nvSpPr>
-          <p:cNvPr id="35" name="Text 33"/>
+          <p:cNvPr id="37" name="Text 35"/>
           <p:cNvSpPr/>
           <p:nvPr/>
         </p:nvSpPr>
@@ -7786,7 +7854,7 @@
       </p:sp>
       <p:sp>
         <p:nvSpPr>
-          <p:cNvPr id="36" name="Shape 34"/>
+          <p:cNvPr id="38" name="Shape 36"/>
           <p:cNvSpPr/>
           <p:nvPr/>
         </p:nvSpPr>
@@ -7811,7 +7879,7 @@
       </p:sp>
       <p:sp>
         <p:nvSpPr>
-          <p:cNvPr id="37" name="Text 35"/>
+          <p:cNvPr id="39" name="Text 37"/>
           <p:cNvSpPr/>
           <p:nvPr/>
         </p:nvSpPr>
@@ -7852,7 +7920,7 @@
       </p:sp>
       <p:sp>
         <p:nvSpPr>
-          <p:cNvPr id="38" name="Shape 36"/>
+          <p:cNvPr id="40" name="Shape 38"/>
           <p:cNvSpPr/>
           <p:nvPr/>
         </p:nvSpPr>
@@ -7877,7 +7945,7 @@
       </p:sp>
       <p:sp>
         <p:nvSpPr>
-          <p:cNvPr id="39" name="Text 37"/>
+          <p:cNvPr id="41" name="Text 39"/>
           <p:cNvSpPr/>
           <p:nvPr/>
         </p:nvSpPr>
@@ -7918,7 +7986,7 @@
       </p:sp>
       <p:sp>
         <p:nvSpPr>
-          <p:cNvPr id="40" name="Shape 38"/>
+          <p:cNvPr id="42" name="Shape 40"/>
           <p:cNvSpPr/>
           <p:nvPr/>
         </p:nvSpPr>
@@ -7943,7 +8011,7 @@
       </p:sp>
       <p:sp>
         <p:nvSpPr>
-          <p:cNvPr id="41" name="Text 39"/>
+          <p:cNvPr id="43" name="Text 41"/>
           <p:cNvSpPr/>
           <p:nvPr/>
         </p:nvSpPr>
@@ -7984,7 +8052,7 @@
       </p:sp>
       <p:sp>
         <p:nvSpPr>
-          <p:cNvPr id="42" name="Text 40"/>
+          <p:cNvPr id="44" name="Text 42"/>
           <p:cNvSpPr/>
           <p:nvPr/>
         </p:nvSpPr>
@@ -8025,7 +8093,7 @@
       </p:sp>
       <p:sp>
         <p:nvSpPr>
-          <p:cNvPr id="43" name="Shape 41"/>
+          <p:cNvPr id="45" name="Shape 43"/>
           <p:cNvSpPr/>
           <p:nvPr/>
         </p:nvSpPr>
@@ -8048,7 +8116,7 @@
       </p:sp>
       <p:sp>
         <p:nvSpPr>
-          <p:cNvPr id="44" name="Shape 42"/>
+          <p:cNvPr id="46" name="Shape 44"/>
           <p:cNvSpPr/>
           <p:nvPr/>
         </p:nvSpPr>
@@ -8073,7 +8141,7 @@
       </p:sp>
       <p:sp>
         <p:nvSpPr>
-          <p:cNvPr id="45" name="Text 43"/>
+          <p:cNvPr id="47" name="Text 45"/>
           <p:cNvSpPr/>
           <p:nvPr/>
         </p:nvSpPr>
@@ -8114,7 +8182,7 @@
       </p:sp>
       <p:sp>
         <p:nvSpPr>
-          <p:cNvPr id="46" name="Text 44"/>
+          <p:cNvPr id="48" name="Text 46"/>
           <p:cNvSpPr/>
           <p:nvPr/>
         </p:nvSpPr>
@@ -8155,7 +8223,7 @@
       </p:sp>
       <p:sp>
         <p:nvSpPr>
-          <p:cNvPr id="47" name="Shape 45"/>
+          <p:cNvPr id="49" name="Shape 47"/>
           <p:cNvSpPr/>
           <p:nvPr/>
         </p:nvSpPr>
@@ -8180,7 +8248,7 @@
       </p:sp>
       <p:sp>
         <p:nvSpPr>
-          <p:cNvPr id="48" name="Text 46"/>
+          <p:cNvPr id="50" name="Text 48"/>
           <p:cNvSpPr/>
           <p:nvPr/>
         </p:nvSpPr>
@@ -8221,7 +8289,7 @@
       </p:sp>
       <p:sp>
         <p:nvSpPr>
-          <p:cNvPr id="49" name="Text 47"/>
+          <p:cNvPr id="51" name="Text 49"/>
           <p:cNvSpPr/>
           <p:nvPr/>
         </p:nvSpPr>
@@ -8262,7 +8330,7 @@
       </p:sp>
       <p:sp>
         <p:nvSpPr>
-          <p:cNvPr id="50" name="Shape 48"/>
+          <p:cNvPr id="52" name="Shape 50"/>
           <p:cNvSpPr/>
           <p:nvPr/>
         </p:nvSpPr>
@@ -8287,7 +8355,7 @@
       </p:sp>
       <p:sp>
         <p:nvSpPr>
-          <p:cNvPr id="51" name="Text 49"/>
+          <p:cNvPr id="53" name="Text 51"/>
           <p:cNvSpPr/>
           <p:nvPr/>
         </p:nvSpPr>
@@ -8328,7 +8396,7 @@
       </p:sp>
       <p:sp>
         <p:nvSpPr>
-          <p:cNvPr id="52" name="Text 50"/>
+          <p:cNvPr id="54" name="Text 52"/>
           <p:cNvSpPr/>
           <p:nvPr/>
         </p:nvSpPr>
@@ -8369,7 +8437,7 @@
       </p:sp>
       <p:sp>
         <p:nvSpPr>
-          <p:cNvPr id="53" name="Shape 51"/>
+          <p:cNvPr id="55" name="Shape 53"/>
           <p:cNvSpPr/>
           <p:nvPr/>
         </p:nvSpPr>
@@ -8394,7 +8462,7 @@
       </p:sp>
       <p:sp>
         <p:nvSpPr>
-          <p:cNvPr id="54" name="Text 52"/>
+          <p:cNvPr id="56" name="Text 54"/>
           <p:cNvSpPr/>
           <p:nvPr/>
         </p:nvSpPr>
@@ -8435,7 +8503,7 @@
       </p:sp>
       <p:sp>
         <p:nvSpPr>
-          <p:cNvPr id="55" name="Text 53"/>
+          <p:cNvPr id="57" name="Text 55"/>
           <p:cNvSpPr/>
           <p:nvPr/>
         </p:nvSpPr>
@@ -8476,7 +8544,7 @@
       </p:sp>
       <p:sp>
         <p:nvSpPr>
-          <p:cNvPr id="56" name="Shape 54"/>
+          <p:cNvPr id="58" name="Shape 56"/>
           <p:cNvSpPr/>
           <p:nvPr/>
         </p:nvSpPr>
@@ -8501,7 +8569,7 @@
       </p:sp>
       <p:sp>
         <p:nvSpPr>
-          <p:cNvPr id="57" name="Text 55"/>
+          <p:cNvPr id="59" name="Text 57"/>
           <p:cNvSpPr/>
           <p:nvPr/>
         </p:nvSpPr>
@@ -8542,7 +8610,7 @@
       </p:sp>
       <p:sp>
         <p:nvSpPr>
-          <p:cNvPr id="58" name="Text 56"/>
+          <p:cNvPr id="60" name="Text 58"/>
           <p:cNvSpPr/>
           <p:nvPr/>
         </p:nvSpPr>
@@ -8583,7 +8651,7 @@
       </p:sp>
       <p:sp>
         <p:nvSpPr>
-          <p:cNvPr id="59" name="Shape 57"/>
+          <p:cNvPr id="61" name="Shape 59"/>
           <p:cNvSpPr/>
           <p:nvPr/>
         </p:nvSpPr>
@@ -8608,7 +8676,7 @@
       </p:sp>
       <p:sp>
         <p:nvSpPr>
-          <p:cNvPr id="60" name="Text 58"/>
+          <p:cNvPr id="62" name="Text 60"/>
           <p:cNvSpPr/>
           <p:nvPr/>
         </p:nvSpPr>
@@ -8649,7 +8717,7 @@
       </p:sp>
       <p:sp>
         <p:nvSpPr>
-          <p:cNvPr id="61" name="Text 59"/>
+          <p:cNvPr id="63" name="Text 61"/>
           <p:cNvSpPr/>
           <p:nvPr/>
         </p:nvSpPr>
@@ -8690,7 +8758,7 @@
       </p:sp>
       <p:sp>
         <p:nvSpPr>
-          <p:cNvPr id="62" name="Shape 60"/>
+          <p:cNvPr id="64" name="Shape 62"/>
           <p:cNvSpPr/>
           <p:nvPr/>
         </p:nvSpPr>
@@ -8719,7 +8787,7 @@
       </p:sp>
       <p:sp>
         <p:nvSpPr>
-          <p:cNvPr id="63" name="Shape 61"/>
+          <p:cNvPr id="65" name="Shape 63"/>
           <p:cNvSpPr/>
           <p:nvPr/>
         </p:nvSpPr>
@@ -8744,7 +8812,7 @@
       </p:sp>
       <p:sp>
         <p:nvSpPr>
-          <p:cNvPr id="64" name="Text 62"/>
+          <p:cNvPr id="66" name="Text 64"/>
           <p:cNvSpPr/>
           <p:nvPr/>
         </p:nvSpPr>
@@ -8785,7 +8853,7 @@
       </p:sp>
       <p:sp>
         <p:nvSpPr>
-          <p:cNvPr id="65" name="Text 63"/>
+          <p:cNvPr id="67" name="Text 65"/>
           <p:cNvSpPr/>
           <p:nvPr/>
         </p:nvSpPr>
@@ -8826,7 +8894,7 @@
       </p:sp>
       <p:sp>
         <p:nvSpPr>
-          <p:cNvPr id="66" name="Shape 64"/>
+          <p:cNvPr id="68" name="Shape 66"/>
           <p:cNvSpPr/>
           <p:nvPr/>
         </p:nvSpPr>
@@ -8849,7 +8917,7 @@
       </p:sp>
       <p:sp>
         <p:nvSpPr>
-          <p:cNvPr id="67" name="Shape 65"/>
+          <p:cNvPr id="69" name="Shape 67"/>
           <p:cNvSpPr/>
           <p:nvPr/>
         </p:nvSpPr>
@@ -8874,7 +8942,7 @@
       </p:sp>
       <p:sp>
         <p:nvSpPr>
-          <p:cNvPr id="68" name="Text 66"/>
+          <p:cNvPr id="70" name="Text 68"/>
           <p:cNvSpPr/>
           <p:nvPr/>
         </p:nvSpPr>
@@ -8915,7 +8983,7 @@
       </p:sp>
       <p:sp>
         <p:nvSpPr>
-          <p:cNvPr id="69" name="Text 67"/>
+          <p:cNvPr id="71" name="Text 69"/>
           <p:cNvSpPr/>
           <p:nvPr/>
         </p:nvSpPr>
@@ -8956,7 +9024,7 @@
       </p:sp>
       <p:sp>
         <p:nvSpPr>
-          <p:cNvPr id="70" name="Shape 68"/>
+          <p:cNvPr id="72" name="Shape 70"/>
           <p:cNvSpPr/>
           <p:nvPr/>
         </p:nvSpPr>
@@ -8981,7 +9049,7 @@
       </p:sp>
       <p:sp>
         <p:nvSpPr>
-          <p:cNvPr id="71" name="Text 69"/>
+          <p:cNvPr id="73" name="Text 71"/>
           <p:cNvSpPr/>
           <p:nvPr/>
         </p:nvSpPr>
@@ -9022,7 +9090,7 @@
       </p:sp>
       <p:sp>
         <p:nvSpPr>
-          <p:cNvPr id="72" name="Text 70"/>
+          <p:cNvPr id="74" name="Text 72"/>
           <p:cNvSpPr/>
           <p:nvPr/>
         </p:nvSpPr>
@@ -9063,7 +9131,7 @@
       </p:sp>
       <p:sp>
         <p:nvSpPr>
-          <p:cNvPr id="73" name="Shape 71"/>
+          <p:cNvPr id="75" name="Shape 73"/>
           <p:cNvSpPr/>
           <p:nvPr/>
         </p:nvSpPr>
@@ -9088,7 +9156,7 @@
       </p:sp>
       <p:sp>
         <p:nvSpPr>
-          <p:cNvPr id="74" name="Text 72"/>
+          <p:cNvPr id="76" name="Text 74"/>
           <p:cNvSpPr/>
           <p:nvPr/>
         </p:nvSpPr>
@@ -9129,7 +9197,7 @@
       </p:sp>
       <p:sp>
         <p:nvSpPr>
-          <p:cNvPr id="75" name="Text 73"/>
+          <p:cNvPr id="77" name="Text 75"/>
           <p:cNvSpPr/>
           <p:nvPr/>
         </p:nvSpPr>
@@ -9170,7 +9238,7 @@
       </p:sp>
       <p:sp>
         <p:nvSpPr>
-          <p:cNvPr id="76" name="Shape 74"/>
+          <p:cNvPr id="78" name="Shape 76"/>
           <p:cNvSpPr/>
           <p:nvPr/>
         </p:nvSpPr>
@@ -9195,7 +9263,7 @@
       </p:sp>
       <p:sp>
         <p:nvSpPr>
-          <p:cNvPr id="77" name="Text 75"/>
+          <p:cNvPr id="79" name="Text 77"/>
           <p:cNvSpPr/>
           <p:nvPr/>
         </p:nvSpPr>
@@ -9236,7 +9304,7 @@
       </p:sp>
       <p:sp>
         <p:nvSpPr>
-          <p:cNvPr id="78" name="Text 76"/>
+          <p:cNvPr id="80" name="Text 78"/>
           <p:cNvSpPr/>
           <p:nvPr/>
         </p:nvSpPr>
@@ -9277,7 +9345,7 @@
       </p:sp>
       <p:sp>
         <p:nvSpPr>
-          <p:cNvPr id="79" name="Shape 77"/>
+          <p:cNvPr id="81" name="Shape 79"/>
           <p:cNvSpPr/>
           <p:nvPr/>
         </p:nvSpPr>
@@ -9302,7 +9370,7 @@
       </p:sp>
       <p:sp>
         <p:nvSpPr>
-          <p:cNvPr id="80" name="Text 78"/>
+          <p:cNvPr id="82" name="Text 80"/>
           <p:cNvSpPr/>
           <p:nvPr/>
         </p:nvSpPr>
@@ -9343,7 +9411,7 @@
       </p:sp>
       <p:sp>
         <p:nvSpPr>
-          <p:cNvPr id="81" name="Text 79"/>
+          <p:cNvPr id="83" name="Text 81"/>
           <p:cNvSpPr/>
           <p:nvPr/>
         </p:nvSpPr>
@@ -9384,7 +9452,7 @@
       </p:sp>
       <p:sp>
         <p:nvSpPr>
-          <p:cNvPr id="82" name="Shape 80"/>
+          <p:cNvPr id="84" name="Shape 82"/>
           <p:cNvSpPr/>
           <p:nvPr/>
         </p:nvSpPr>
@@ -9409,7 +9477,7 @@
       </p:sp>
       <p:sp>
         <p:nvSpPr>
-          <p:cNvPr id="83" name="Text 81"/>
+          <p:cNvPr id="85" name="Text 83"/>
           <p:cNvSpPr/>
           <p:nvPr/>
         </p:nvSpPr>
@@ -9450,7 +9518,7 @@
       </p:sp>
       <p:sp>
         <p:nvSpPr>
-          <p:cNvPr id="84" name="Text 82"/>
+          <p:cNvPr id="86" name="Text 84"/>
           <p:cNvSpPr/>
           <p:nvPr/>
         </p:nvSpPr>
@@ -9491,7 +9559,7 @@
       </p:sp>
       <p:sp>
         <p:nvSpPr>
-          <p:cNvPr id="85" name="Shape 83"/>
+          <p:cNvPr id="87" name="Shape 85"/>
           <p:cNvSpPr/>
           <p:nvPr/>
         </p:nvSpPr>
@@ -9520,7 +9588,7 @@
       </p:sp>
       <p:sp>
         <p:nvSpPr>
-          <p:cNvPr id="86" name="Shape 84"/>
+          <p:cNvPr id="88" name="Shape 86"/>
           <p:cNvSpPr/>
           <p:nvPr/>
         </p:nvSpPr>
@@ -9545,7 +9613,7 @@
       </p:sp>
       <p:sp>
         <p:nvSpPr>
-          <p:cNvPr id="87" name="Text 85"/>
+          <p:cNvPr id="89" name="Text 87"/>
           <p:cNvSpPr/>
           <p:nvPr/>
         </p:nvSpPr>
@@ -9586,7 +9654,7 @@
       </p:sp>
       <p:sp>
         <p:nvSpPr>
-          <p:cNvPr id="88" name="Text 86"/>
+          <p:cNvPr id="90" name="Text 88"/>
           <p:cNvSpPr/>
           <p:nvPr/>
         </p:nvSpPr>
@@ -9627,7 +9695,7 @@
       </p:sp>
       <p:sp>
         <p:nvSpPr>
-          <p:cNvPr id="89" name="Shape 87"/>
+          <p:cNvPr id="91" name="Shape 89"/>
           <p:cNvSpPr/>
           <p:nvPr/>
         </p:nvSpPr>
@@ -9650,7 +9718,7 @@
       </p:sp>
       <p:sp>
         <p:nvSpPr>
-          <p:cNvPr id="90" name="Shape 88"/>
+          <p:cNvPr id="92" name="Shape 90"/>
           <p:cNvSpPr/>
           <p:nvPr/>
         </p:nvSpPr>
@@ -9675,7 +9743,7 @@
       </p:sp>
       <p:sp>
         <p:nvSpPr>
-          <p:cNvPr id="91" name="Text 89"/>
+          <p:cNvPr id="93" name="Text 91"/>
           <p:cNvSpPr/>
           <p:nvPr/>
         </p:nvSpPr>
@@ -9716,7 +9784,7 @@
       </p:sp>
       <p:sp>
         <p:nvSpPr>
-          <p:cNvPr id="92" name="Text 90"/>
+          <p:cNvPr id="94" name="Text 92"/>
           <p:cNvSpPr/>
           <p:nvPr/>
         </p:nvSpPr>
@@ -9757,7 +9825,7 @@
       </p:sp>
       <p:sp>
         <p:nvSpPr>
-          <p:cNvPr id="93" name="Shape 91"/>
+          <p:cNvPr id="95" name="Shape 93"/>
           <p:cNvSpPr/>
           <p:nvPr/>
         </p:nvSpPr>
@@ -9782,7 +9850,7 @@
       </p:sp>
       <p:sp>
         <p:nvSpPr>
-          <p:cNvPr id="94" name="Text 92"/>
+          <p:cNvPr id="96" name="Text 94"/>
           <p:cNvSpPr/>
           <p:nvPr/>
         </p:nvSpPr>
@@ -9823,7 +9891,7 @@
       </p:sp>
       <p:sp>
         <p:nvSpPr>
-          <p:cNvPr id="95" name="Text 93"/>
+          <p:cNvPr id="97" name="Text 95"/>
           <p:cNvSpPr/>
           <p:nvPr/>
         </p:nvSpPr>
@@ -9864,7 +9932,7 @@
       </p:sp>
       <p:sp>
         <p:nvSpPr>
-          <p:cNvPr id="96" name="Shape 94"/>
+          <p:cNvPr id="98" name="Shape 96"/>
           <p:cNvSpPr/>
           <p:nvPr/>
         </p:nvSpPr>
@@ -9889,7 +9957,7 @@
       </p:sp>
       <p:sp>
         <p:nvSpPr>
-          <p:cNvPr id="97" name="Text 95"/>
+          <p:cNvPr id="99" name="Text 97"/>
           <p:cNvSpPr/>
           <p:nvPr/>
         </p:nvSpPr>
@@ -9930,7 +9998,7 @@
       </p:sp>
       <p:sp>
         <p:nvSpPr>
-          <p:cNvPr id="98" name="Text 96"/>
+          <p:cNvPr id="100" name="Text 98"/>
           <p:cNvSpPr/>
           <p:nvPr/>
         </p:nvSpPr>
@@ -9971,7 +10039,7 @@
       </p:sp>
       <p:sp>
         <p:nvSpPr>
-          <p:cNvPr id="99" name="Shape 97"/>
+          <p:cNvPr id="101" name="Shape 99"/>
           <p:cNvSpPr/>
           <p:nvPr/>
         </p:nvSpPr>
@@ -9996,7 +10064,7 @@
       </p:sp>
       <p:sp>
         <p:nvSpPr>
-          <p:cNvPr id="100" name="Text 98"/>
+          <p:cNvPr id="102" name="Text 100"/>
           <p:cNvSpPr/>
           <p:nvPr/>
         </p:nvSpPr>
@@ -10037,7 +10105,7 @@
       </p:sp>
       <p:sp>
         <p:nvSpPr>
-          <p:cNvPr id="101" name="Text 99"/>
+          <p:cNvPr id="103" name="Text 101"/>
           <p:cNvSpPr/>
           <p:nvPr/>
         </p:nvSpPr>
@@ -10078,7 +10146,7 @@
       </p:sp>
       <p:sp>
         <p:nvSpPr>
-          <p:cNvPr id="102" name="Shape 100"/>
+          <p:cNvPr id="104" name="Shape 102"/>
           <p:cNvSpPr/>
           <p:nvPr/>
         </p:nvSpPr>
@@ -10103,7 +10171,7 @@
       </p:sp>
       <p:sp>
         <p:nvSpPr>
-          <p:cNvPr id="103" name="Text 101"/>
+          <p:cNvPr id="105" name="Text 103"/>
           <p:cNvSpPr/>
           <p:nvPr/>
         </p:nvSpPr>
@@ -10144,7 +10212,7 @@
       </p:sp>
       <p:sp>
         <p:nvSpPr>
-          <p:cNvPr id="104" name="Text 102"/>
+          <p:cNvPr id="106" name="Text 104"/>
           <p:cNvSpPr/>
           <p:nvPr/>
         </p:nvSpPr>
@@ -10185,7 +10253,7 @@
       </p:sp>
       <p:sp>
         <p:nvSpPr>
-          <p:cNvPr id="105" name="Shape 103"/>
+          <p:cNvPr id="107" name="Shape 105"/>
           <p:cNvSpPr/>
           <p:nvPr/>
         </p:nvSpPr>
@@ -10210,7 +10278,7 @@
       </p:sp>
       <p:sp>
         <p:nvSpPr>
-          <p:cNvPr id="106" name="Text 104"/>
+          <p:cNvPr id="108" name="Text 106"/>
           <p:cNvSpPr/>
           <p:nvPr/>
         </p:nvSpPr>
@@ -10251,7 +10319,7 @@
       </p:sp>
       <p:sp>
         <p:nvSpPr>
-          <p:cNvPr id="107" name="Text 105"/>
+          <p:cNvPr id="109" name="Text 107"/>
           <p:cNvSpPr/>
           <p:nvPr/>
         </p:nvSpPr>
@@ -10292,7 +10360,7 @@
       </p:sp>
       <p:sp>
         <p:nvSpPr>
-          <p:cNvPr id="108" name="Shape 106"/>
+          <p:cNvPr id="110" name="Shape 108"/>
           <p:cNvSpPr/>
           <p:nvPr/>
         </p:nvSpPr>
@@ -10321,7 +10389,7 @@
       </p:sp>
       <p:sp>
         <p:nvSpPr>
-          <p:cNvPr id="109" name="Shape 107"/>
+          <p:cNvPr id="111" name="Shape 109"/>
           <p:cNvSpPr/>
           <p:nvPr/>
         </p:nvSpPr>
@@ -10346,7 +10414,7 @@
       </p:sp>
       <p:sp>
         <p:nvSpPr>
-          <p:cNvPr id="110" name="Text 108"/>
+          <p:cNvPr id="112" name="Text 110"/>
           <p:cNvSpPr/>
           <p:nvPr/>
         </p:nvSpPr>
@@ -10387,7 +10455,7 @@
       </p:sp>
       <p:sp>
         <p:nvSpPr>
-          <p:cNvPr id="111" name="Text 109"/>
+          <p:cNvPr id="113" name="Text 111"/>
           <p:cNvSpPr/>
           <p:nvPr/>
         </p:nvSpPr>
@@ -10428,7 +10496,7 @@
       </p:sp>
       <p:sp>
         <p:nvSpPr>
-          <p:cNvPr id="112" name="Shape 110"/>
+          <p:cNvPr id="114" name="Shape 112"/>
           <p:cNvSpPr/>
           <p:nvPr/>
         </p:nvSpPr>
@@ -10451,7 +10519,7 @@
       </p:sp>
       <p:sp>
         <p:nvSpPr>
-          <p:cNvPr id="113" name="Shape 111"/>
+          <p:cNvPr id="115" name="Shape 113"/>
           <p:cNvSpPr/>
           <p:nvPr/>
         </p:nvSpPr>
@@ -10476,7 +10544,7 @@
       </p:sp>
       <p:sp>
         <p:nvSpPr>
-          <p:cNvPr id="114" name="Text 112"/>
+          <p:cNvPr id="116" name="Text 114"/>
           <p:cNvSpPr/>
           <p:nvPr/>
         </p:nvSpPr>
@@ -10517,7 +10585,7 @@
       </p:sp>
       <p:sp>
         <p:nvSpPr>
-          <p:cNvPr id="115" name="Text 113"/>
+          <p:cNvPr id="117" name="Text 115"/>
           <p:cNvSpPr/>
           <p:nvPr/>
         </p:nvSpPr>
@@ -10558,7 +10626,7 @@
       </p:sp>
       <p:sp>
         <p:nvSpPr>
-          <p:cNvPr id="116" name="Shape 114"/>
+          <p:cNvPr id="118" name="Shape 116"/>
           <p:cNvSpPr/>
           <p:nvPr/>
         </p:nvSpPr>
@@ -10583,7 +10651,7 @@
       </p:sp>
       <p:sp>
         <p:nvSpPr>
-          <p:cNvPr id="117" name="Text 115"/>
+          <p:cNvPr id="119" name="Text 117"/>
           <p:cNvSpPr/>
           <p:nvPr/>
         </p:nvSpPr>
@@ -10624,7 +10692,7 @@
       </p:sp>
       <p:sp>
         <p:nvSpPr>
-          <p:cNvPr id="118" name="Text 116"/>
+          <p:cNvPr id="120" name="Text 118"/>
           <p:cNvSpPr/>
           <p:nvPr/>
         </p:nvSpPr>
@@ -10665,7 +10733,7 @@
       </p:sp>
       <p:sp>
         <p:nvSpPr>
-          <p:cNvPr id="119" name="Shape 117"/>
+          <p:cNvPr id="121" name="Shape 119"/>
           <p:cNvSpPr/>
           <p:nvPr/>
         </p:nvSpPr>
@@ -10690,7 +10758,7 @@
       </p:sp>
       <p:sp>
         <p:nvSpPr>
-          <p:cNvPr id="120" name="Text 118"/>
+          <p:cNvPr id="122" name="Text 120"/>
           <p:cNvSpPr/>
           <p:nvPr/>
         </p:nvSpPr>
@@ -10731,7 +10799,7 @@
       </p:sp>
       <p:sp>
         <p:nvSpPr>
-          <p:cNvPr id="121" name="Text 119"/>
+          <p:cNvPr id="123" name="Text 121"/>
           <p:cNvSpPr/>
           <p:nvPr/>
         </p:nvSpPr>
@@ -10772,7 +10840,7 @@
       </p:sp>
       <p:sp>
         <p:nvSpPr>
-          <p:cNvPr id="122" name="Shape 120"/>
+          <p:cNvPr id="124" name="Shape 122"/>
           <p:cNvSpPr/>
           <p:nvPr/>
         </p:nvSpPr>
@@ -10797,7 +10865,7 @@
       </p:sp>
       <p:sp>
         <p:nvSpPr>
-          <p:cNvPr id="123" name="Text 121"/>
+          <p:cNvPr id="125" name="Text 123"/>
           <p:cNvSpPr/>
           <p:nvPr/>
         </p:nvSpPr>
@@ -10838,7 +10906,7 @@
       </p:sp>
       <p:sp>
         <p:nvSpPr>
-          <p:cNvPr id="124" name="Text 122"/>
+          <p:cNvPr id="126" name="Text 124"/>
           <p:cNvSpPr/>
           <p:nvPr/>
         </p:nvSpPr>
@@ -10879,7 +10947,7 @@
       </p:sp>
       <p:sp>
         <p:nvSpPr>
-          <p:cNvPr id="125" name="Shape 123"/>
+          <p:cNvPr id="127" name="Shape 125"/>
           <p:cNvSpPr/>
           <p:nvPr/>
         </p:nvSpPr>
@@ -10904,7 +10972,7 @@
       </p:sp>
       <p:sp>
         <p:nvSpPr>
-          <p:cNvPr id="126" name="Text 124"/>
+          <p:cNvPr id="128" name="Text 126"/>
           <p:cNvSpPr/>
           <p:nvPr/>
         </p:nvSpPr>
@@ -10945,7 +11013,7 @@
       </p:sp>
       <p:sp>
         <p:nvSpPr>
-          <p:cNvPr id="127" name="Text 125"/>
+          <p:cNvPr id="129" name="Text 127"/>
           <p:cNvSpPr/>
           <p:nvPr/>
         </p:nvSpPr>
@@ -10986,7 +11054,7 @@
       </p:sp>
       <p:sp>
         <p:nvSpPr>
-          <p:cNvPr id="128" name="Shape 126"/>
+          <p:cNvPr id="130" name="Shape 128"/>
           <p:cNvSpPr/>
           <p:nvPr/>
         </p:nvSpPr>
@@ -11011,7 +11079,7 @@
       </p:sp>
       <p:sp>
         <p:nvSpPr>
-          <p:cNvPr id="129" name="Text 127"/>
+          <p:cNvPr id="131" name="Text 129"/>
           <p:cNvSpPr/>
           <p:nvPr/>
         </p:nvSpPr>
@@ -11052,7 +11120,7 @@
       </p:sp>
       <p:sp>
         <p:nvSpPr>
-          <p:cNvPr id="130" name="Text 128"/>
+          <p:cNvPr id="132" name="Text 130"/>
           <p:cNvSpPr/>
           <p:nvPr/>
         </p:nvSpPr>
@@ -11093,7 +11161,7 @@
       </p:sp>
       <p:sp>
         <p:nvSpPr>
-          <p:cNvPr id="131" name="Shape 129"/>
+          <p:cNvPr id="133" name="Shape 131"/>
           <p:cNvSpPr/>
           <p:nvPr/>
         </p:nvSpPr>
@@ -11122,7 +11190,7 @@
       </p:sp>
       <p:sp>
         <p:nvSpPr>
-          <p:cNvPr id="132" name="Shape 130"/>
+          <p:cNvPr id="134" name="Shape 132"/>
           <p:cNvSpPr/>
           <p:nvPr/>
         </p:nvSpPr>
@@ -11147,7 +11215,7 @@
       </p:sp>
       <p:sp>
         <p:nvSpPr>
-          <p:cNvPr id="133" name="Text 131"/>
+          <p:cNvPr id="135" name="Text 133"/>
           <p:cNvSpPr/>
           <p:nvPr/>
         </p:nvSpPr>
@@ -11188,7 +11256,7 @@
       </p:sp>
       <p:sp>
         <p:nvSpPr>
-          <p:cNvPr id="134" name="Text 132"/>
+          <p:cNvPr id="136" name="Text 134"/>
           <p:cNvSpPr/>
           <p:nvPr/>
         </p:nvSpPr>
@@ -11229,7 +11297,7 @@
       </p:sp>
       <p:sp>
         <p:nvSpPr>
-          <p:cNvPr id="135" name="Shape 133"/>
+          <p:cNvPr id="137" name="Shape 135"/>
           <p:cNvSpPr/>
           <p:nvPr/>
         </p:nvSpPr>
@@ -11252,7 +11320,7 @@
       </p:sp>
       <p:sp>
         <p:nvSpPr>
-          <p:cNvPr id="136" name="Shape 134"/>
+          <p:cNvPr id="138" name="Shape 136"/>
           <p:cNvSpPr/>
           <p:nvPr/>
         </p:nvSpPr>
@@ -11277,7 +11345,7 @@
       </p:sp>
       <p:sp>
         <p:nvSpPr>
-          <p:cNvPr id="137" name="Text 135"/>
+          <p:cNvPr id="139" name="Text 137"/>
           <p:cNvSpPr/>
           <p:nvPr/>
         </p:nvSpPr>
@@ -11318,7 +11386,7 @@
       </p:sp>
       <p:sp>
         <p:nvSpPr>
-          <p:cNvPr id="138" name="Text 136"/>
+          <p:cNvPr id="140" name="Text 138"/>
           <p:cNvSpPr/>
           <p:nvPr/>
         </p:nvSpPr>
@@ -11359,7 +11427,7 @@
       </p:sp>
       <p:sp>
         <p:nvSpPr>
-          <p:cNvPr id="139" name="Shape 137"/>
+          <p:cNvPr id="141" name="Shape 139"/>
           <p:cNvSpPr/>
           <p:nvPr/>
         </p:nvSpPr>
@@ -11384,7 +11452,7 @@
       </p:sp>
       <p:sp>
         <p:nvSpPr>
-          <p:cNvPr id="140" name="Text 138"/>
+          <p:cNvPr id="142" name="Text 140"/>
           <p:cNvSpPr/>
           <p:nvPr/>
         </p:nvSpPr>
@@ -11425,7 +11493,7 @@
       </p:sp>
       <p:sp>
         <p:nvSpPr>
-          <p:cNvPr id="141" name="Text 139"/>
+          <p:cNvPr id="143" name="Text 141"/>
           <p:cNvSpPr/>
           <p:nvPr/>
         </p:nvSpPr>
@@ -11466,7 +11534,7 @@
       </p:sp>
       <p:sp>
         <p:nvSpPr>
-          <p:cNvPr id="142" name="Shape 140"/>
+          <p:cNvPr id="144" name="Shape 142"/>
           <p:cNvSpPr/>
           <p:nvPr/>
         </p:nvSpPr>
@@ -11491,7 +11559,7 @@
       </p:sp>
       <p:sp>
         <p:nvSpPr>
-          <p:cNvPr id="143" name="Text 141"/>
+          <p:cNvPr id="145" name="Text 143"/>
           <p:cNvSpPr/>
           <p:nvPr/>
         </p:nvSpPr>
@@ -11532,7 +11600,7 @@
       </p:sp>
       <p:sp>
         <p:nvSpPr>
-          <p:cNvPr id="144" name="Text 142"/>
+          <p:cNvPr id="146" name="Text 144"/>
           <p:cNvSpPr/>
           <p:nvPr/>
         </p:nvSpPr>
@@ -11573,7 +11641,7 @@
       </p:sp>
       <p:sp>
         <p:nvSpPr>
-          <p:cNvPr id="145" name="Shape 143"/>
+          <p:cNvPr id="147" name="Shape 145"/>
           <p:cNvSpPr/>
           <p:nvPr/>
         </p:nvSpPr>
@@ -11598,7 +11666,7 @@
       </p:sp>
       <p:sp>
         <p:nvSpPr>
-          <p:cNvPr id="146" name="Text 144"/>
+          <p:cNvPr id="148" name="Text 146"/>
           <p:cNvSpPr/>
           <p:nvPr/>
         </p:nvSpPr>
@@ -11639,7 +11707,7 @@
       </p:sp>
       <p:sp>
         <p:nvSpPr>
-          <p:cNvPr id="147" name="Text 145"/>
+          <p:cNvPr id="149" name="Text 147"/>
           <p:cNvSpPr/>
           <p:nvPr/>
         </p:nvSpPr>
@@ -11680,7 +11748,7 @@
       </p:sp>
       <p:sp>
         <p:nvSpPr>
-          <p:cNvPr id="148" name="Shape 146"/>
+          <p:cNvPr id="150" name="Shape 148"/>
           <p:cNvSpPr/>
           <p:nvPr/>
         </p:nvSpPr>
@@ -11705,7 +11773,7 @@
       </p:sp>
       <p:sp>
         <p:nvSpPr>
-          <p:cNvPr id="149" name="Text 147"/>
+          <p:cNvPr id="151" name="Text 149"/>
           <p:cNvSpPr/>
           <p:nvPr/>
         </p:nvSpPr>
@@ -11746,7 +11814,7 @@
       </p:sp>
       <p:sp>
         <p:nvSpPr>
-          <p:cNvPr id="150" name="Text 148"/>
+          <p:cNvPr id="152" name="Text 150"/>
           <p:cNvSpPr/>
           <p:nvPr/>
         </p:nvSpPr>
@@ -11787,7 +11855,7 @@
       </p:sp>
       <p:sp>
         <p:nvSpPr>
-          <p:cNvPr id="151" name="Shape 149"/>
+          <p:cNvPr id="153" name="Shape 151"/>
           <p:cNvSpPr/>
           <p:nvPr/>
         </p:nvSpPr>
@@ -11812,7 +11880,7 @@
       </p:sp>
       <p:sp>
         <p:nvSpPr>
-          <p:cNvPr id="152" name="Text 150"/>
+          <p:cNvPr id="154" name="Text 152"/>
           <p:cNvSpPr/>
           <p:nvPr/>
         </p:nvSpPr>
@@ -11853,7 +11921,7 @@
       </p:sp>
       <p:sp>
         <p:nvSpPr>
-          <p:cNvPr id="153" name="Text 151"/>
+          <p:cNvPr id="155" name="Text 153"/>
           <p:cNvSpPr/>
           <p:nvPr/>
         </p:nvSpPr>
@@ -11894,7 +11962,7 @@
       </p:sp>
       <p:sp>
         <p:nvSpPr>
-          <p:cNvPr id="154" name="Shape 152"/>
+          <p:cNvPr id="156" name="Shape 154"/>
           <p:cNvSpPr/>
           <p:nvPr/>
         </p:nvSpPr>
@@ -11923,7 +11991,7 @@
       </p:sp>
       <p:sp>
         <p:nvSpPr>
-          <p:cNvPr id="155" name="Shape 153"/>
+          <p:cNvPr id="157" name="Shape 155"/>
           <p:cNvSpPr/>
           <p:nvPr/>
         </p:nvSpPr>
@@ -11948,7 +12016,7 @@
       </p:sp>
       <p:sp>
         <p:nvSpPr>
-          <p:cNvPr id="156" name="Text 154"/>
+          <p:cNvPr id="158" name="Text 156"/>
           <p:cNvSpPr/>
           <p:nvPr/>
         </p:nvSpPr>
@@ -11989,7 +12057,7 @@
       </p:sp>
       <p:sp>
         <p:nvSpPr>
-          <p:cNvPr id="157" name="Text 155"/>
+          <p:cNvPr id="159" name="Text 157"/>
           <p:cNvSpPr/>
           <p:nvPr/>
         </p:nvSpPr>
@@ -12030,7 +12098,7 @@
       </p:sp>
       <p:sp>
         <p:nvSpPr>
-          <p:cNvPr id="158" name="Shape 156"/>
+          <p:cNvPr id="160" name="Shape 158"/>
           <p:cNvSpPr/>
           <p:nvPr/>
         </p:nvSpPr>
@@ -12053,7 +12121,7 @@
       </p:sp>
       <p:sp>
         <p:nvSpPr>
-          <p:cNvPr id="159" name="Shape 157"/>
+          <p:cNvPr id="161" name="Shape 159"/>
           <p:cNvSpPr/>
           <p:nvPr/>
         </p:nvSpPr>
@@ -12078,7 +12146,7 @@
       </p:sp>
       <p:sp>
         <p:nvSpPr>
-          <p:cNvPr id="160" name="Text 158"/>
+          <p:cNvPr id="162" name="Text 160"/>
           <p:cNvSpPr/>
           <p:nvPr/>
         </p:nvSpPr>
@@ -12119,7 +12187,7 @@
       </p:sp>
       <p:sp>
         <p:nvSpPr>
-          <p:cNvPr id="161" name="Text 159"/>
+          <p:cNvPr id="163" name="Text 161"/>
           <p:cNvSpPr/>
           <p:nvPr/>
         </p:nvSpPr>
@@ -12160,7 +12228,7 @@
       </p:sp>
       <p:sp>
         <p:nvSpPr>
-          <p:cNvPr id="162" name="Shape 160"/>
+          <p:cNvPr id="164" name="Shape 162"/>
           <p:cNvSpPr/>
           <p:nvPr/>
         </p:nvSpPr>
@@ -12185,7 +12253,7 @@
       </p:sp>
       <p:sp>
         <p:nvSpPr>
-          <p:cNvPr id="163" name="Text 161"/>
+          <p:cNvPr id="165" name="Text 163"/>
           <p:cNvSpPr/>
           <p:nvPr/>
         </p:nvSpPr>
@@ -12226,7 +12294,7 @@
       </p:sp>
       <p:sp>
         <p:nvSpPr>
-          <p:cNvPr id="164" name="Text 162"/>
+          <p:cNvPr id="166" name="Text 164"/>
           <p:cNvSpPr/>
           <p:nvPr/>
         </p:nvSpPr>
@@ -12267,7 +12335,7 @@
       </p:sp>
       <p:sp>
         <p:nvSpPr>
-          <p:cNvPr id="165" name="Shape 163"/>
+          <p:cNvPr id="167" name="Shape 165"/>
           <p:cNvSpPr/>
           <p:nvPr/>
         </p:nvSpPr>
@@ -12292,7 +12360,7 @@
       </p:sp>
       <p:sp>
         <p:nvSpPr>
-          <p:cNvPr id="166" name="Text 164"/>
+          <p:cNvPr id="168" name="Text 166"/>
           <p:cNvSpPr/>
           <p:nvPr/>
         </p:nvSpPr>
@@ -12333,7 +12401,7 @@
       </p:sp>
       <p:sp>
         <p:nvSpPr>
-          <p:cNvPr id="167" name="Text 165"/>
+          <p:cNvPr id="169" name="Text 167"/>
           <p:cNvSpPr/>
           <p:nvPr/>
         </p:nvSpPr>
@@ -12374,7 +12442,7 @@
       </p:sp>
       <p:sp>
         <p:nvSpPr>
-          <p:cNvPr id="168" name="Shape 166"/>
+          <p:cNvPr id="170" name="Shape 168"/>
           <p:cNvSpPr/>
           <p:nvPr/>
         </p:nvSpPr>
@@ -12399,7 +12467,7 @@
       </p:sp>
       <p:sp>
         <p:nvSpPr>
-          <p:cNvPr id="169" name="Text 167"/>
+          <p:cNvPr id="171" name="Text 169"/>
           <p:cNvSpPr/>
           <p:nvPr/>
         </p:nvSpPr>
@@ -12440,7 +12508,7 @@
       </p:sp>
       <p:sp>
         <p:nvSpPr>
-          <p:cNvPr id="170" name="Text 168"/>
+          <p:cNvPr id="172" name="Text 170"/>
           <p:cNvSpPr/>
           <p:nvPr/>
         </p:nvSpPr>
@@ -12481,7 +12549,7 @@
       </p:sp>
       <p:sp>
         <p:nvSpPr>
-          <p:cNvPr id="171" name="Shape 169"/>
+          <p:cNvPr id="173" name="Shape 171"/>
           <p:cNvSpPr/>
           <p:nvPr/>
         </p:nvSpPr>
@@ -12506,7 +12574,7 @@
       </p:sp>
       <p:sp>
         <p:nvSpPr>
-          <p:cNvPr id="172" name="Text 170"/>
+          <p:cNvPr id="174" name="Text 172"/>
           <p:cNvSpPr/>
           <p:nvPr/>
         </p:nvSpPr>
@@ -12547,7 +12615,7 @@
       </p:sp>
       <p:sp>
         <p:nvSpPr>
-          <p:cNvPr id="173" name="Text 171"/>
+          <p:cNvPr id="175" name="Text 173"/>
           <p:cNvSpPr/>
           <p:nvPr/>
         </p:nvSpPr>
@@ -12588,7 +12656,7 @@
       </p:sp>
       <p:sp>
         <p:nvSpPr>
-          <p:cNvPr id="174" name="Shape 172"/>
+          <p:cNvPr id="176" name="Shape 174"/>
           <p:cNvSpPr/>
           <p:nvPr/>
         </p:nvSpPr>
@@ -12613,7 +12681,7 @@
       </p:sp>
       <p:sp>
         <p:nvSpPr>
-          <p:cNvPr id="175" name="Text 173"/>
+          <p:cNvPr id="177" name="Text 175"/>
           <p:cNvSpPr/>
           <p:nvPr/>
         </p:nvSpPr>
@@ -12654,7 +12722,7 @@
       </p:sp>
       <p:sp>
         <p:nvSpPr>
-          <p:cNvPr id="176" name="Text 174"/>
+          <p:cNvPr id="178" name="Text 176"/>
           <p:cNvSpPr/>
           <p:nvPr/>
         </p:nvSpPr>
@@ -12695,7 +12763,7 @@
       </p:sp>
       <p:sp>
         <p:nvSpPr>
-          <p:cNvPr id="177" name="Shape 175"/>
+          <p:cNvPr id="179" name="Shape 177"/>
           <p:cNvSpPr/>
           <p:nvPr/>
         </p:nvSpPr>
@@ -12724,7 +12792,7 @@
       </p:sp>
       <p:sp>
         <p:nvSpPr>
-          <p:cNvPr id="178" name="Shape 176"/>
+          <p:cNvPr id="180" name="Shape 178"/>
           <p:cNvSpPr/>
           <p:nvPr/>
         </p:nvSpPr>
@@ -12749,7 +12817,7 @@
       </p:sp>
       <p:sp>
         <p:nvSpPr>
-          <p:cNvPr id="179" name="Text 177"/>
+          <p:cNvPr id="181" name="Text 179"/>
           <p:cNvSpPr/>
           <p:nvPr/>
         </p:nvSpPr>
@@ -12790,7 +12858,7 @@
       </p:sp>
       <p:sp>
         <p:nvSpPr>
-          <p:cNvPr id="180" name="Text 178"/>
+          <p:cNvPr id="182" name="Text 180"/>
           <p:cNvSpPr/>
           <p:nvPr/>
         </p:nvSpPr>
@@ -12831,7 +12899,7 @@
       </p:sp>
       <p:sp>
         <p:nvSpPr>
-          <p:cNvPr id="181" name="Shape 179"/>
+          <p:cNvPr id="183" name="Shape 181"/>
           <p:cNvSpPr/>
           <p:nvPr/>
         </p:nvSpPr>
@@ -12854,7 +12922,7 @@
       </p:sp>
       <p:sp>
         <p:nvSpPr>
-          <p:cNvPr id="182" name="Shape 180"/>
+          <p:cNvPr id="184" name="Shape 182"/>
           <p:cNvSpPr/>
           <p:nvPr/>
         </p:nvSpPr>
@@ -12879,7 +12947,7 @@
       </p:sp>
       <p:sp>
         <p:nvSpPr>
-          <p:cNvPr id="183" name="Text 181"/>
+          <p:cNvPr id="185" name="Text 183"/>
           <p:cNvSpPr/>
           <p:nvPr/>
         </p:nvSpPr>
@@ -12920,7 +12988,7 @@
       </p:sp>
       <p:sp>
         <p:nvSpPr>
-          <p:cNvPr id="184" name="Text 182"/>
+          <p:cNvPr id="186" name="Text 184"/>
           <p:cNvSpPr/>
           <p:nvPr/>
         </p:nvSpPr>
@@ -12961,7 +13029,7 @@
       </p:sp>
       <p:sp>
         <p:nvSpPr>
-          <p:cNvPr id="185" name="Shape 183"/>
+          <p:cNvPr id="187" name="Shape 185"/>
           <p:cNvSpPr/>
           <p:nvPr/>
         </p:nvSpPr>
@@ -12986,7 +13054,7 @@
       </p:sp>
       <p:sp>
         <p:nvSpPr>
-          <p:cNvPr id="186" name="Text 184"/>
+          <p:cNvPr id="188" name="Text 186"/>
           <p:cNvSpPr/>
           <p:nvPr/>
         </p:nvSpPr>
@@ -13027,7 +13095,7 @@
       </p:sp>
       <p:sp>
         <p:nvSpPr>
-          <p:cNvPr id="187" name="Text 185"/>
+          <p:cNvPr id="189" name="Text 187"/>
           <p:cNvSpPr/>
           <p:nvPr/>
         </p:nvSpPr>
@@ -13068,7 +13136,7 @@
       </p:sp>
       <p:sp>
         <p:nvSpPr>
-          <p:cNvPr id="188" name="Shape 186"/>
+          <p:cNvPr id="190" name="Shape 188"/>
           <p:cNvSpPr/>
           <p:nvPr/>
         </p:nvSpPr>
@@ -13093,7 +13161,7 @@
       </p:sp>
       <p:sp>
         <p:nvSpPr>
-          <p:cNvPr id="189" name="Text 187"/>
+          <p:cNvPr id="191" name="Text 189"/>
           <p:cNvSpPr/>
           <p:nvPr/>
         </p:nvSpPr>
@@ -13134,7 +13202,7 @@
       </p:sp>
       <p:sp>
         <p:nvSpPr>
-          <p:cNvPr id="190" name="Text 188"/>
+          <p:cNvPr id="192" name="Text 190"/>
           <p:cNvSpPr/>
           <p:nvPr/>
         </p:nvSpPr>
@@ -13175,7 +13243,7 @@
       </p:sp>
       <p:sp>
         <p:nvSpPr>
-          <p:cNvPr id="191" name="Shape 189"/>
+          <p:cNvPr id="193" name="Shape 191"/>
           <p:cNvSpPr/>
           <p:nvPr/>
         </p:nvSpPr>
@@ -13200,7 +13268,7 @@
       </p:sp>
       <p:sp>
         <p:nvSpPr>
-          <p:cNvPr id="192" name="Text 190"/>
+          <p:cNvPr id="194" name="Text 192"/>
           <p:cNvSpPr/>
           <p:nvPr/>
         </p:nvSpPr>
@@ -13241,7 +13309,7 @@
       </p:sp>
       <p:sp>
         <p:nvSpPr>
-          <p:cNvPr id="193" name="Text 191"/>
+          <p:cNvPr id="195" name="Text 193"/>
           <p:cNvSpPr/>
           <p:nvPr/>
         </p:nvSpPr>
@@ -13282,7 +13350,7 @@
       </p:sp>
       <p:sp>
         <p:nvSpPr>
-          <p:cNvPr id="194" name="Shape 192"/>
+          <p:cNvPr id="196" name="Shape 194"/>
           <p:cNvSpPr/>
           <p:nvPr/>
         </p:nvSpPr>
@@ -13307,7 +13375,7 @@
       </p:sp>
       <p:sp>
         <p:nvSpPr>
-          <p:cNvPr id="195" name="Text 193"/>
+          <p:cNvPr id="197" name="Text 195"/>
           <p:cNvSpPr/>
           <p:nvPr/>
         </p:nvSpPr>
@@ -13348,7 +13416,7 @@
       </p:sp>
       <p:sp>
         <p:nvSpPr>
-          <p:cNvPr id="196" name="Text 194"/>
+          <p:cNvPr id="198" name="Text 196"/>
           <p:cNvSpPr/>
           <p:nvPr/>
         </p:nvSpPr>
@@ -13389,7 +13457,7 @@
       </p:sp>
       <p:sp>
         <p:nvSpPr>
-          <p:cNvPr id="197" name="Shape 195"/>
+          <p:cNvPr id="199" name="Shape 197"/>
           <p:cNvSpPr/>
           <p:nvPr/>
         </p:nvSpPr>
@@ -13414,7 +13482,7 @@
       </p:sp>
       <p:sp>
         <p:nvSpPr>
-          <p:cNvPr id="198" name="Shape 196"/>
+          <p:cNvPr id="200" name="Shape 198"/>
           <p:cNvSpPr/>
           <p:nvPr/>
         </p:nvSpPr>
@@ -13439,7 +13507,7 @@
       </p:sp>
       <p:sp>
         <p:nvSpPr>
-          <p:cNvPr id="199" name="Text 197"/>
+          <p:cNvPr id="201" name="Text 199"/>
           <p:cNvSpPr/>
           <p:nvPr/>
         </p:nvSpPr>
@@ -13480,7 +13548,7 @@
       </p:sp>
       <p:sp>
         <p:nvSpPr>
-          <p:cNvPr id="200" name="Text 198"/>
+          <p:cNvPr id="202" name="Text 200"/>
           <p:cNvSpPr/>
           <p:nvPr/>
         </p:nvSpPr>
@@ -13521,7 +13589,7 @@
       </p:sp>
       <p:sp>
         <p:nvSpPr>
-          <p:cNvPr id="201" name="Text 199"/>
+          <p:cNvPr id="203" name="Text 201"/>
           <p:cNvSpPr/>
           <p:nvPr/>
         </p:nvSpPr>
@@ -13554,7 +13622,7 @@
                 <a:ea typeface="Arial" pitchFamily="34" charset="-122"/>
                 <a:cs typeface="Arial" pitchFamily="34" charset="-120"/>
               </a:rPr>
-              <a:t>37</a:t>
+              <a:t>33</a:t>
             </a:r>
             <a:endParaRPr lang="ar-SA" sz="1100" dirty="0"/>
           </a:p>
@@ -13562,7 +13630,7 @@
       </p:sp>
       <p:sp>
         <p:nvSpPr>
-          <p:cNvPr id="202" name="Text 200"/>
+          <p:cNvPr id="204" name="Text 202"/>
           <p:cNvSpPr/>
           <p:nvPr/>
         </p:nvSpPr>
@@ -13603,7 +13671,7 @@
       </p:sp>
       <p:sp>
         <p:nvSpPr>
-          <p:cNvPr id="203" name="Text 201"/>
+          <p:cNvPr id="205" name="Text 203"/>
           <p:cNvSpPr/>
           <p:nvPr/>
         </p:nvSpPr>
@@ -13636,7 +13704,7 @@
                 <a:ea typeface="Arial" pitchFamily="34" charset="-122"/>
                 <a:cs typeface="Arial" pitchFamily="34" charset="-120"/>
               </a:rPr>
-              <a:t>24 نوفمبر</a:t>
+              <a:t>19 نوفمبر</a:t>
             </a:r>
             <a:endParaRPr lang="ar-SA" sz="850" dirty="0"/>
           </a:p>
@@ -13644,14 +13712,14 @@
       </p:sp>
       <p:sp>
         <p:nvSpPr>
-          <p:cNvPr id="204" name="Shape 202"/>
-          <p:cNvSpPr/>
-          <p:nvPr/>
-        </p:nvSpPr>
-        <p:spPr>
-          <a:xfrm>
-            <a:off x="606666" y="2011680"/>
-            <a:ext cx="5179485" cy="182880"/>
+          <p:cNvPr id="206" name="Shape 204"/>
+          <p:cNvSpPr/>
+          <p:nvPr/>
+        </p:nvSpPr>
+        <p:spPr>
+          <a:xfrm>
+            <a:off x="1208932" y="2011680"/>
+            <a:ext cx="4577220" cy="182880"/>
           </a:xfrm>
           <a:prstGeom prst="roundRect">
             <a:avLst>
@@ -13671,14 +13739,14 @@
       </p:sp>
       <p:sp>
         <p:nvSpPr>
-          <p:cNvPr id="205" name="Text 203"/>
-          <p:cNvSpPr/>
-          <p:nvPr/>
-        </p:nvSpPr>
-        <p:spPr>
-          <a:xfrm>
-            <a:off x="606666" y="2011680"/>
-            <a:ext cx="5179485" cy="182880"/>
+          <p:cNvPr id="207" name="Text 205"/>
+          <p:cNvSpPr/>
+          <p:nvPr/>
+        </p:nvSpPr>
+        <p:spPr>
+          <a:xfrm>
+            <a:off x="1208932" y="2011680"/>
+            <a:ext cx="4577220" cy="182880"/>
           </a:xfrm>
           <a:prstGeom prst="rect">
             <a:avLst/>
@@ -13704,7 +13772,7 @@
                 <a:ea typeface="Arial" pitchFamily="34" charset="-122"/>
                 <a:cs typeface="Arial" pitchFamily="34" charset="-120"/>
               </a:rPr>
-              <a:t>37 يوم عمل · 13 أكتوبر → 24 نوفمبر</a:t>
+              <a:t>33 يوم عمل · 13 أكتوبر → 19 نوفمبر · الأساس 37 (−4)</a:t>
             </a:r>
             <a:endParaRPr lang="ar-SA" sz="850" dirty="0"/>
           </a:p>
@@ -13712,7 +13780,7 @@
       </p:sp>
       <p:sp>
         <p:nvSpPr>
-          <p:cNvPr id="206" name="Shape 204"/>
+          <p:cNvPr id="208" name="Shape 206"/>
           <p:cNvSpPr/>
           <p:nvPr/>
         </p:nvSpPr>
@@ -13737,7 +13805,7 @@
       </p:sp>
       <p:sp>
         <p:nvSpPr>
-          <p:cNvPr id="207" name="Text 205"/>
+          <p:cNvPr id="209" name="Text 207"/>
           <p:cNvSpPr/>
           <p:nvPr/>
         </p:nvSpPr>
@@ -13778,13 +13846,13 @@
       </p:sp>
       <p:sp>
         <p:nvSpPr>
-          <p:cNvPr id="208" name="Shape 206"/>
-          <p:cNvSpPr/>
-          <p:nvPr/>
-        </p:nvSpPr>
-        <p:spPr>
-          <a:xfrm>
-            <a:off x="5643629" y="2313432"/>
+          <p:cNvPr id="210" name="Shape 208"/>
+          <p:cNvSpPr/>
+          <p:nvPr/>
+        </p:nvSpPr>
+        <p:spPr>
+          <a:xfrm>
+            <a:off x="5643629" y="2478024"/>
             <a:ext cx="164592" cy="164592"/>
           </a:xfrm>
           <a:prstGeom prst="diamond">
@@ -13803,14 +13871,14 @@
       </p:sp>
       <p:sp>
         <p:nvSpPr>
-          <p:cNvPr id="209" name="Text 207"/>
-          <p:cNvSpPr/>
-          <p:nvPr/>
-        </p:nvSpPr>
-        <p:spPr>
-          <a:xfrm>
-            <a:off x="5296157" y="2487168"/>
-            <a:ext cx="859536" cy="201168"/>
+          <p:cNvPr id="211" name="Text 209"/>
+          <p:cNvSpPr/>
+          <p:nvPr/>
+        </p:nvSpPr>
+        <p:spPr>
+          <a:xfrm>
+            <a:off x="4902965" y="2651760"/>
+            <a:ext cx="1645920" cy="100584"/>
           </a:xfrm>
           <a:prstGeom prst="rect">
             <a:avLst/>
@@ -13844,14 +13912,14 @@
       </p:sp>
       <p:sp>
         <p:nvSpPr>
-          <p:cNvPr id="210" name="Text 208"/>
-          <p:cNvSpPr/>
-          <p:nvPr/>
-        </p:nvSpPr>
-        <p:spPr>
-          <a:xfrm>
-            <a:off x="5158997" y="2697480"/>
-            <a:ext cx="1133856" cy="164592"/>
+          <p:cNvPr id="212" name="Text 210"/>
+          <p:cNvSpPr/>
+          <p:nvPr/>
+        </p:nvSpPr>
+        <p:spPr>
+          <a:xfrm>
+            <a:off x="4902965" y="2743200"/>
+            <a:ext cx="1645920" cy="128016"/>
           </a:xfrm>
           <a:prstGeom prst="rect">
             <a:avLst/>
@@ -13885,13 +13953,13 @@
       </p:sp>
       <p:sp>
         <p:nvSpPr>
-          <p:cNvPr id="211" name="Shape 209"/>
-          <p:cNvSpPr/>
-          <p:nvPr/>
-        </p:nvSpPr>
-        <p:spPr>
-          <a:xfrm>
-            <a:off x="4920910" y="2313432"/>
+          <p:cNvPr id="213" name="Shape 211"/>
+          <p:cNvSpPr/>
+          <p:nvPr/>
+        </p:nvSpPr>
+        <p:spPr>
+          <a:xfrm>
+            <a:off x="5161817" y="2478024"/>
             <a:ext cx="164592" cy="164592"/>
           </a:xfrm>
           <a:prstGeom prst="diamond">
@@ -13910,14 +13978,121 @@
       </p:sp>
       <p:sp>
         <p:nvSpPr>
-          <p:cNvPr id="212" name="Text 210"/>
-          <p:cNvSpPr/>
-          <p:nvPr/>
-        </p:nvSpPr>
-        <p:spPr>
-          <a:xfrm>
-            <a:off x="4573438" y="2487168"/>
-            <a:ext cx="859536" cy="201168"/>
+          <p:cNvPr id="214" name="Text 212"/>
+          <p:cNvSpPr/>
+          <p:nvPr/>
+        </p:nvSpPr>
+        <p:spPr>
+          <a:xfrm>
+            <a:off x="4421153" y="2240280"/>
+            <a:ext cx="1645920" cy="109728"/>
+          </a:xfrm>
+          <a:prstGeom prst="rect">
+            <a:avLst/>
+          </a:prstGeom>
+          <a:noFill/>
+          <a:ln/>
+        </p:spPr>
+        <p:txBody>
+          <a:bodyPr wrap="square" lIns="0" tIns="0" rIns="0" bIns="0" rtlCol="0" anchor="b">
+            <a:normAutofit/>
+          </a:bodyPr>
+          <a:lstStyle/>
+          <a:p>
+            <a:pPr rtl="1" algn="ctr" indent="0" marL="0">
+              <a:buNone/>
+            </a:pPr>
+            <a:r>
+              <a:rPr lang="ar-SA" altLang="en-US" sz="550" dirty="0">
+                <a:solidFill>
+                  <a:srgbClr val="556070"/>
+                </a:solidFill>
+                <a:latin typeface="Arial" pitchFamily="34" charset="0"/>
+                <a:ea typeface="Arial" pitchFamily="34" charset="-122"/>
+                <a:cs typeface="Arial" pitchFamily="34" charset="-120"/>
+              </a:rPr>
+              <a:t>اكتمال تركيب نظام الدعم</a:t>
+            </a:r>
+            <a:endParaRPr lang="ar-SA" sz="550" dirty="0"/>
+          </a:p>
+        </p:txBody>
+      </p:sp>
+      <p:sp>
+        <p:nvSpPr>
+          <p:cNvPr id="215" name="Text 213"/>
+          <p:cNvSpPr/>
+          <p:nvPr/>
+        </p:nvSpPr>
+        <p:spPr>
+          <a:xfrm>
+            <a:off x="4421153" y="2350008"/>
+            <a:ext cx="1645920" cy="118872"/>
+          </a:xfrm>
+          <a:prstGeom prst="rect">
+            <a:avLst/>
+          </a:prstGeom>
+          <a:noFill/>
+          <a:ln/>
+        </p:spPr>
+        <p:txBody>
+          <a:bodyPr wrap="square" lIns="0" tIns="0" rIns="0" bIns="0" rtlCol="0" anchor="ctr">
+            <a:normAutofit/>
+          </a:bodyPr>
+          <a:lstStyle/>
+          <a:p>
+            <a:pPr rtl="1" algn="ctr" indent="0" marL="0">
+              <a:buNone/>
+            </a:pPr>
+            <a:r>
+              <a:rPr lang="ar-SA" altLang="en-US" sz="750" b="1" dirty="0">
+                <a:solidFill>
+                  <a:srgbClr val="3D3935"/>
+                </a:solidFill>
+                <a:latin typeface="Arial" pitchFamily="34" charset="0"/>
+                <a:ea typeface="Arial" pitchFamily="34" charset="-122"/>
+                <a:cs typeface="Arial" pitchFamily="34" charset="-120"/>
+              </a:rPr>
+              <a:t>17 أكتوبر</a:t>
+            </a:r>
+            <a:endParaRPr lang="ar-SA" sz="750" dirty="0"/>
+          </a:p>
+        </p:txBody>
+      </p:sp>
+      <p:sp>
+        <p:nvSpPr>
+          <p:cNvPr id="216" name="Shape 214"/>
+          <p:cNvSpPr/>
+          <p:nvPr/>
+        </p:nvSpPr>
+        <p:spPr>
+          <a:xfrm>
+            <a:off x="2873207" y="2478024"/>
+            <a:ext cx="164592" cy="164592"/>
+          </a:xfrm>
+          <a:prstGeom prst="diamond">
+            <a:avLst/>
+          </a:prstGeom>
+          <a:solidFill>
+            <a:srgbClr val="3D3935"/>
+          </a:solidFill>
+          <a:ln w="19050">
+            <a:solidFill>
+              <a:srgbClr val="FFFFFF"/>
+            </a:solidFill>
+            <a:prstDash val="solid"/>
+          </a:ln>
+        </p:spPr>
+      </p:sp>
+      <p:sp>
+        <p:nvSpPr>
+          <p:cNvPr id="217" name="Text 215"/>
+          <p:cNvSpPr/>
+          <p:nvPr/>
+        </p:nvSpPr>
+        <p:spPr>
+          <a:xfrm>
+            <a:off x="2132543" y="2651760"/>
+            <a:ext cx="1645920" cy="100584"/>
           </a:xfrm>
           <a:prstGeom prst="rect">
             <a:avLst/>
@@ -13943,7 +14118,7 @@
                 <a:ea typeface="Arial" pitchFamily="34" charset="-122"/>
                 <a:cs typeface="Arial" pitchFamily="34" charset="-120"/>
               </a:rPr>
-              <a:t>اكتمال تركيب نظام الدعم</a:t>
+              <a:t>اكتمال أعمال الحفرة (جدار الحفرة)</a:t>
             </a:r>
             <a:endParaRPr lang="ar-SA" sz="550" dirty="0"/>
           </a:p>
@@ -13951,14 +14126,14 @@
       </p:sp>
       <p:sp>
         <p:nvSpPr>
-          <p:cNvPr id="213" name="Text 211"/>
-          <p:cNvSpPr/>
-          <p:nvPr/>
-        </p:nvSpPr>
-        <p:spPr>
-          <a:xfrm>
-            <a:off x="4436278" y="2697480"/>
-            <a:ext cx="1133856" cy="164592"/>
+          <p:cNvPr id="218" name="Text 216"/>
+          <p:cNvSpPr/>
+          <p:nvPr/>
+        </p:nvSpPr>
+        <p:spPr>
+          <a:xfrm>
+            <a:off x="2132543" y="2743200"/>
+            <a:ext cx="1645920" cy="128016"/>
           </a:xfrm>
           <a:prstGeom prst="rect">
             <a:avLst/>
@@ -13984,7 +14159,7 @@
                 <a:ea typeface="Arial" pitchFamily="34" charset="-122"/>
                 <a:cs typeface="Arial" pitchFamily="34" charset="-120"/>
               </a:rPr>
-              <a:t>19 أكتوبر</a:t>
+              <a:t>5 نوفمبر</a:t>
             </a:r>
             <a:endParaRPr lang="ar-SA" sz="750" dirty="0"/>
           </a:p>
@@ -13992,13 +14167,13 @@
       </p:sp>
       <p:sp>
         <p:nvSpPr>
-          <p:cNvPr id="214" name="Shape 212"/>
-          <p:cNvSpPr/>
-          <p:nvPr/>
-        </p:nvSpPr>
-        <p:spPr>
-          <a:xfrm>
-            <a:off x="2150488" y="2313432"/>
+          <p:cNvPr id="219" name="Shape 217"/>
+          <p:cNvSpPr/>
+          <p:nvPr/>
+        </p:nvSpPr>
+        <p:spPr>
+          <a:xfrm>
+            <a:off x="1789128" y="2478024"/>
             <a:ext cx="164592" cy="164592"/>
           </a:xfrm>
           <a:prstGeom prst="diamond">
@@ -14017,14 +14192,121 @@
       </p:sp>
       <p:sp>
         <p:nvSpPr>
-          <p:cNvPr id="215" name="Text 213"/>
-          <p:cNvSpPr/>
-          <p:nvPr/>
-        </p:nvSpPr>
-        <p:spPr>
-          <a:xfrm>
-            <a:off x="1803016" y="2487168"/>
-            <a:ext cx="859536" cy="201168"/>
+          <p:cNvPr id="220" name="Text 218"/>
+          <p:cNvSpPr/>
+          <p:nvPr/>
+        </p:nvSpPr>
+        <p:spPr>
+          <a:xfrm>
+            <a:off x="1048464" y="2240280"/>
+            <a:ext cx="1645920" cy="109728"/>
+          </a:xfrm>
+          <a:prstGeom prst="rect">
+            <a:avLst/>
+          </a:prstGeom>
+          <a:noFill/>
+          <a:ln/>
+        </p:spPr>
+        <p:txBody>
+          <a:bodyPr wrap="square" lIns="0" tIns="0" rIns="0" bIns="0" rtlCol="0" anchor="b">
+            <a:normAutofit/>
+          </a:bodyPr>
+          <a:lstStyle/>
+          <a:p>
+            <a:pPr rtl="1" algn="ctr" indent="0" marL="0">
+              <a:buNone/>
+            </a:pPr>
+            <a:r>
+              <a:rPr lang="ar-SA" altLang="en-US" sz="550" dirty="0">
+                <a:solidFill>
+                  <a:srgbClr val="556070"/>
+                </a:solidFill>
+                <a:latin typeface="Arial" pitchFamily="34" charset="0"/>
+                <a:ea typeface="Arial" pitchFamily="34" charset="-122"/>
+                <a:cs typeface="Arial" pitchFamily="34" charset="-120"/>
+              </a:rPr>
+              <a:t>اكتمال أساسات المبنى</a:t>
+            </a:r>
+            <a:endParaRPr lang="ar-SA" sz="550" dirty="0"/>
+          </a:p>
+        </p:txBody>
+      </p:sp>
+      <p:sp>
+        <p:nvSpPr>
+          <p:cNvPr id="221" name="Text 219"/>
+          <p:cNvSpPr/>
+          <p:nvPr/>
+        </p:nvSpPr>
+        <p:spPr>
+          <a:xfrm>
+            <a:off x="1048464" y="2350008"/>
+            <a:ext cx="1645920" cy="118872"/>
+          </a:xfrm>
+          <a:prstGeom prst="rect">
+            <a:avLst/>
+          </a:prstGeom>
+          <a:noFill/>
+          <a:ln/>
+        </p:spPr>
+        <p:txBody>
+          <a:bodyPr wrap="square" lIns="0" tIns="0" rIns="0" bIns="0" rtlCol="0" anchor="ctr">
+            <a:normAutofit/>
+          </a:bodyPr>
+          <a:lstStyle/>
+          <a:p>
+            <a:pPr rtl="1" algn="ctr" indent="0" marL="0">
+              <a:buNone/>
+            </a:pPr>
+            <a:r>
+              <a:rPr lang="ar-SA" altLang="en-US" sz="750" b="1" dirty="0">
+                <a:solidFill>
+                  <a:srgbClr val="3D3935"/>
+                </a:solidFill>
+                <a:latin typeface="Arial" pitchFamily="34" charset="0"/>
+                <a:ea typeface="Arial" pitchFamily="34" charset="-122"/>
+                <a:cs typeface="Arial" pitchFamily="34" charset="-120"/>
+              </a:rPr>
+              <a:t>14 نوفمبر</a:t>
+            </a:r>
+            <a:endParaRPr lang="ar-SA" sz="750" dirty="0"/>
+          </a:p>
+        </p:txBody>
+      </p:sp>
+      <p:sp>
+        <p:nvSpPr>
+          <p:cNvPr id="222" name="Shape 220"/>
+          <p:cNvSpPr/>
+          <p:nvPr/>
+        </p:nvSpPr>
+        <p:spPr>
+          <a:xfrm>
+            <a:off x="1186863" y="2478024"/>
+            <a:ext cx="164592" cy="164592"/>
+          </a:xfrm>
+          <a:prstGeom prst="diamond">
+            <a:avLst/>
+          </a:prstGeom>
+          <a:solidFill>
+            <a:srgbClr val="3D3935"/>
+          </a:solidFill>
+          <a:ln w="19050">
+            <a:solidFill>
+              <a:srgbClr val="FFFFFF"/>
+            </a:solidFill>
+            <a:prstDash val="solid"/>
+          </a:ln>
+        </p:spPr>
+      </p:sp>
+      <p:sp>
+        <p:nvSpPr>
+          <p:cNvPr id="223" name="Text 221"/>
+          <p:cNvSpPr/>
+          <p:nvPr/>
+        </p:nvSpPr>
+        <p:spPr>
+          <a:xfrm>
+            <a:off x="446199" y="2651760"/>
+            <a:ext cx="1645920" cy="100584"/>
           </a:xfrm>
           <a:prstGeom prst="rect">
             <a:avLst/>
@@ -14050,7 +14332,7 @@
                 <a:ea typeface="Arial" pitchFamily="34" charset="-122"/>
                 <a:cs typeface="Arial" pitchFamily="34" charset="-120"/>
               </a:rPr>
-              <a:t>اكتمال أعمال الحفرة (جدار الحفرة)</a:t>
+              <a:t>الإنجاز الكلي</a:t>
             </a:r>
             <a:endParaRPr lang="ar-SA" sz="550" dirty="0"/>
           </a:p>
@@ -14058,14 +14340,14 @@
       </p:sp>
       <p:sp>
         <p:nvSpPr>
-          <p:cNvPr id="216" name="Text 214"/>
-          <p:cNvSpPr/>
-          <p:nvPr/>
-        </p:nvSpPr>
-        <p:spPr>
-          <a:xfrm>
-            <a:off x="1665856" y="2697480"/>
-            <a:ext cx="1133856" cy="164592"/>
+          <p:cNvPr id="224" name="Text 222"/>
+          <p:cNvSpPr/>
+          <p:nvPr/>
+        </p:nvSpPr>
+        <p:spPr>
+          <a:xfrm>
+            <a:off x="446199" y="2743200"/>
+            <a:ext cx="1645920" cy="128016"/>
           </a:xfrm>
           <a:prstGeom prst="rect">
             <a:avLst/>
@@ -14091,7 +14373,7 @@
                 <a:ea typeface="Arial" pitchFamily="34" charset="-122"/>
                 <a:cs typeface="Arial" pitchFamily="34" charset="-120"/>
               </a:rPr>
-              <a:t>11 نوفمبر</a:t>
+              <a:t>19 نوفمبر</a:t>
             </a:r>
             <a:endParaRPr lang="ar-SA" sz="750" dirty="0"/>
           </a:p>
@@ -14099,221 +14381,7 @@
       </p:sp>
       <p:sp>
         <p:nvSpPr>
-          <p:cNvPr id="217" name="Shape 215"/>
-          <p:cNvSpPr/>
-          <p:nvPr/>
-        </p:nvSpPr>
-        <p:spPr>
-          <a:xfrm>
-            <a:off x="1307316" y="2313432"/>
-            <a:ext cx="164592" cy="164592"/>
-          </a:xfrm>
-          <a:prstGeom prst="diamond">
-            <a:avLst/>
-          </a:prstGeom>
-          <a:solidFill>
-            <a:srgbClr val="3D3935"/>
-          </a:solidFill>
-          <a:ln w="19050">
-            <a:solidFill>
-              <a:srgbClr val="FFFFFF"/>
-            </a:solidFill>
-            <a:prstDash val="solid"/>
-          </a:ln>
-        </p:spPr>
-      </p:sp>
-      <p:sp>
-        <p:nvSpPr>
-          <p:cNvPr id="218" name="Text 216"/>
-          <p:cNvSpPr/>
-          <p:nvPr/>
-        </p:nvSpPr>
-        <p:spPr>
-          <a:xfrm>
-            <a:off x="959844" y="2487168"/>
-            <a:ext cx="859536" cy="201168"/>
-          </a:xfrm>
-          <a:prstGeom prst="rect">
-            <a:avLst/>
-          </a:prstGeom>
-          <a:noFill/>
-          <a:ln/>
-        </p:spPr>
-        <p:txBody>
-          <a:bodyPr wrap="square" lIns="0" tIns="0" rIns="0" bIns="0" rtlCol="0" anchor="t">
-            <a:normAutofit/>
-          </a:bodyPr>
-          <a:lstStyle/>
-          <a:p>
-            <a:pPr rtl="1" algn="ctr" indent="0" marL="0">
-              <a:buNone/>
-            </a:pPr>
-            <a:r>
-              <a:rPr lang="ar-SA" altLang="en-US" sz="550" dirty="0">
-                <a:solidFill>
-                  <a:srgbClr val="556070"/>
-                </a:solidFill>
-                <a:latin typeface="Arial" pitchFamily="34" charset="0"/>
-                <a:ea typeface="Arial" pitchFamily="34" charset="-122"/>
-                <a:cs typeface="Arial" pitchFamily="34" charset="-120"/>
-              </a:rPr>
-              <a:t>اكتمال أساسات المبنى</a:t>
-            </a:r>
-            <a:endParaRPr lang="ar-SA" sz="550" dirty="0"/>
-          </a:p>
-        </p:txBody>
-      </p:sp>
-      <p:sp>
-        <p:nvSpPr>
-          <p:cNvPr id="219" name="Text 217"/>
-          <p:cNvSpPr/>
-          <p:nvPr/>
-        </p:nvSpPr>
-        <p:spPr>
-          <a:xfrm>
-            <a:off x="822684" y="2697480"/>
-            <a:ext cx="1133856" cy="164592"/>
-          </a:xfrm>
-          <a:prstGeom prst="rect">
-            <a:avLst/>
-          </a:prstGeom>
-          <a:noFill/>
-          <a:ln/>
-        </p:spPr>
-        <p:txBody>
-          <a:bodyPr wrap="square" lIns="0" tIns="0" rIns="0" bIns="0" rtlCol="0" anchor="ctr">
-            <a:normAutofit/>
-          </a:bodyPr>
-          <a:lstStyle/>
-          <a:p>
-            <a:pPr rtl="1" algn="ctr" indent="0" marL="0">
-              <a:buNone/>
-            </a:pPr>
-            <a:r>
-              <a:rPr lang="ar-SA" altLang="en-US" sz="750" b="1" dirty="0">
-                <a:solidFill>
-                  <a:srgbClr val="3D3935"/>
-                </a:solidFill>
-                <a:latin typeface="Arial" pitchFamily="34" charset="0"/>
-                <a:ea typeface="Arial" pitchFamily="34" charset="-122"/>
-                <a:cs typeface="Arial" pitchFamily="34" charset="-120"/>
-              </a:rPr>
-              <a:t>18 نوفمبر</a:t>
-            </a:r>
-            <a:endParaRPr lang="ar-SA" sz="750" dirty="0"/>
-          </a:p>
-        </p:txBody>
-      </p:sp>
-      <p:sp>
-        <p:nvSpPr>
-          <p:cNvPr id="220" name="Shape 218"/>
-          <p:cNvSpPr/>
-          <p:nvPr/>
-        </p:nvSpPr>
-        <p:spPr>
-          <a:xfrm>
-            <a:off x="584597" y="2313432"/>
-            <a:ext cx="164592" cy="164592"/>
-          </a:xfrm>
-          <a:prstGeom prst="diamond">
-            <a:avLst/>
-          </a:prstGeom>
-          <a:solidFill>
-            <a:srgbClr val="3D3935"/>
-          </a:solidFill>
-          <a:ln w="19050">
-            <a:solidFill>
-              <a:srgbClr val="FFFFFF"/>
-            </a:solidFill>
-            <a:prstDash val="solid"/>
-          </a:ln>
-        </p:spPr>
-      </p:sp>
-      <p:sp>
-        <p:nvSpPr>
-          <p:cNvPr id="221" name="Text 219"/>
-          <p:cNvSpPr/>
-          <p:nvPr/>
-        </p:nvSpPr>
-        <p:spPr>
-          <a:xfrm>
-            <a:off x="237125" y="2487168"/>
-            <a:ext cx="859536" cy="201168"/>
-          </a:xfrm>
-          <a:prstGeom prst="rect">
-            <a:avLst/>
-          </a:prstGeom>
-          <a:noFill/>
-          <a:ln/>
-        </p:spPr>
-        <p:txBody>
-          <a:bodyPr wrap="square" lIns="0" tIns="0" rIns="0" bIns="0" rtlCol="0" anchor="t">
-            <a:normAutofit/>
-          </a:bodyPr>
-          <a:lstStyle/>
-          <a:p>
-            <a:pPr rtl="1" algn="ctr" indent="0" marL="0">
-              <a:buNone/>
-            </a:pPr>
-            <a:r>
-              <a:rPr lang="ar-SA" altLang="en-US" sz="550" dirty="0">
-                <a:solidFill>
-                  <a:srgbClr val="556070"/>
-                </a:solidFill>
-                <a:latin typeface="Arial" pitchFamily="34" charset="0"/>
-                <a:ea typeface="Arial" pitchFamily="34" charset="-122"/>
-                <a:cs typeface="Arial" pitchFamily="34" charset="-120"/>
-              </a:rPr>
-              <a:t>الإنجاز الكلي</a:t>
-            </a:r>
-            <a:endParaRPr lang="ar-SA" sz="550" dirty="0"/>
-          </a:p>
-        </p:txBody>
-      </p:sp>
-      <p:sp>
-        <p:nvSpPr>
-          <p:cNvPr id="222" name="Text 220"/>
-          <p:cNvSpPr/>
-          <p:nvPr/>
-        </p:nvSpPr>
-        <p:spPr>
-          <a:xfrm>
-            <a:off x="99965" y="2697480"/>
-            <a:ext cx="1133856" cy="164592"/>
-          </a:xfrm>
-          <a:prstGeom prst="rect">
-            <a:avLst/>
-          </a:prstGeom>
-          <a:noFill/>
-          <a:ln/>
-        </p:spPr>
-        <p:txBody>
-          <a:bodyPr wrap="square" lIns="0" tIns="0" rIns="0" bIns="0" rtlCol="0" anchor="ctr">
-            <a:normAutofit/>
-          </a:bodyPr>
-          <a:lstStyle/>
-          <a:p>
-            <a:pPr rtl="1" algn="ctr" indent="0" marL="0">
-              <a:buNone/>
-            </a:pPr>
-            <a:r>
-              <a:rPr lang="ar-SA" altLang="en-US" sz="750" b="1" dirty="0">
-                <a:solidFill>
-                  <a:srgbClr val="3D3935"/>
-                </a:solidFill>
-                <a:latin typeface="Arial" pitchFamily="34" charset="0"/>
-                <a:ea typeface="Arial" pitchFamily="34" charset="-122"/>
-                <a:cs typeface="Arial" pitchFamily="34" charset="-120"/>
-              </a:rPr>
-              <a:t>24 نوفمبر</a:t>
-            </a:r>
-            <a:endParaRPr lang="ar-SA" sz="750" dirty="0"/>
-          </a:p>
-        </p:txBody>
-      </p:sp>
-      <p:sp>
-        <p:nvSpPr>
-          <p:cNvPr id="223" name="Shape 221"/>
+          <p:cNvPr id="225" name="Shape 223"/>
           <p:cNvSpPr/>
           <p:nvPr/>
         </p:nvSpPr>
@@ -14338,7 +14406,7 @@
       </p:sp>
       <p:sp>
         <p:nvSpPr>
-          <p:cNvPr id="224" name="Shape 222"/>
+          <p:cNvPr id="226" name="Shape 224"/>
           <p:cNvSpPr/>
           <p:nvPr/>
         </p:nvSpPr>
@@ -14363,7 +14431,7 @@
       </p:sp>
       <p:sp>
         <p:nvSpPr>
-          <p:cNvPr id="225" name="Text 223"/>
+          <p:cNvPr id="227" name="Text 225"/>
           <p:cNvSpPr/>
           <p:nvPr/>
         </p:nvSpPr>
@@ -14404,7 +14472,7 @@
       </p:sp>
       <p:sp>
         <p:nvSpPr>
-          <p:cNvPr id="226" name="Text 224"/>
+          <p:cNvPr id="228" name="Text 226"/>
           <p:cNvSpPr/>
           <p:nvPr/>
         </p:nvSpPr>
@@ -14445,7 +14513,7 @@
       </p:sp>
       <p:sp>
         <p:nvSpPr>
-          <p:cNvPr id="227" name="Text 225"/>
+          <p:cNvPr id="229" name="Text 227"/>
           <p:cNvSpPr/>
           <p:nvPr/>
         </p:nvSpPr>
@@ -14486,7 +14554,7 @@
       </p:sp>
       <p:sp>
         <p:nvSpPr>
-          <p:cNvPr id="228" name="Text 226"/>
+          <p:cNvPr id="230" name="Text 228"/>
           <p:cNvSpPr/>
           <p:nvPr/>
         </p:nvSpPr>
@@ -14519,7 +14587,7 @@
                 <a:ea typeface="Arial" pitchFamily="34" charset="-122"/>
                 <a:cs typeface="Arial" pitchFamily="34" charset="-120"/>
               </a:rPr>
-              <a:t>6</a:t>
+              <a:t>4</a:t>
             </a:r>
             <a:endParaRPr lang="ar-SA" sz="900" dirty="0"/>
           </a:p>
@@ -14527,7 +14595,7 @@
       </p:sp>
       <p:sp>
         <p:nvSpPr>
-          <p:cNvPr id="229" name="Text 227"/>
+          <p:cNvPr id="231" name="Text 229"/>
           <p:cNvSpPr/>
           <p:nvPr/>
         </p:nvSpPr>
@@ -14568,7 +14636,7 @@
       </p:sp>
       <p:sp>
         <p:nvSpPr>
-          <p:cNvPr id="230" name="Text 228"/>
+          <p:cNvPr id="232" name="Text 230"/>
           <p:cNvSpPr/>
           <p:nvPr/>
         </p:nvSpPr>
@@ -14601,7 +14669,7 @@
                 <a:ea typeface="Arial" pitchFamily="34" charset="-122"/>
                 <a:cs typeface="Arial" pitchFamily="34" charset="-120"/>
               </a:rPr>
-              <a:t>19 أكتوبر</a:t>
+              <a:t>17 أكتوبر</a:t>
             </a:r>
             <a:endParaRPr lang="ar-SA" sz="700" dirty="0"/>
           </a:p>
@@ -14609,14 +14677,41 @@
       </p:sp>
       <p:sp>
         <p:nvSpPr>
-          <p:cNvPr id="231" name="Shape 229"/>
-          <p:cNvSpPr/>
-          <p:nvPr/>
-        </p:nvSpPr>
-        <p:spPr>
-          <a:xfrm>
-            <a:off x="4942980" y="2928747"/>
-            <a:ext cx="843172" cy="64008"/>
+          <p:cNvPr id="233" name="Shape 231"/>
+          <p:cNvSpPr/>
+          <p:nvPr/>
+        </p:nvSpPr>
+        <p:spPr>
+          <a:xfrm>
+            <a:off x="4942980" y="3041142"/>
+            <a:ext cx="843172" cy="32004"/>
+          </a:xfrm>
+          <a:prstGeom prst="roundRect">
+            <a:avLst>
+              <a:gd name="adj" fmla="val 42857"/>
+            </a:avLst>
+          </a:prstGeom>
+          <a:solidFill>
+            <a:srgbClr val="8A959C"/>
+          </a:solidFill>
+          <a:ln w="12700">
+            <a:solidFill>
+              <a:srgbClr val="8A959C"/>
+            </a:solidFill>
+            <a:prstDash val="solid"/>
+          </a:ln>
+        </p:spPr>
+      </p:sp>
+      <p:sp>
+        <p:nvSpPr>
+          <p:cNvPr id="234" name="Shape 232"/>
+          <p:cNvSpPr/>
+          <p:nvPr/>
+        </p:nvSpPr>
+        <p:spPr>
+          <a:xfrm>
+            <a:off x="5183886" y="2928747"/>
+            <a:ext cx="602266" cy="64008"/>
           </a:xfrm>
           <a:prstGeom prst="rect">
             <a:avLst/>
@@ -14634,7 +14729,7 @@
       </p:sp>
       <p:sp>
         <p:nvSpPr>
-          <p:cNvPr id="232" name="Shape 230"/>
+          <p:cNvPr id="235" name="Shape 233"/>
           <p:cNvSpPr/>
           <p:nvPr/>
         </p:nvSpPr>
@@ -14659,13 +14754,13 @@
       </p:sp>
       <p:sp>
         <p:nvSpPr>
-          <p:cNvPr id="233" name="Shape 231"/>
+          <p:cNvPr id="236" name="Shape 234"/>
           <p:cNvSpPr/>
           <p:nvPr/>
         </p:nvSpPr>
         <p:spPr>
           <a:xfrm flipV="1">
-            <a:off x="4942980" y="2992755"/>
+            <a:off x="5183886" y="2992755"/>
             <a:ext cx="64008" cy="54864"/>
           </a:xfrm>
           <a:prstGeom prst="triangle">
@@ -14684,13 +14779,13 @@
       </p:sp>
       <p:sp>
         <p:nvSpPr>
-          <p:cNvPr id="234" name="Text 232"/>
-          <p:cNvSpPr/>
-          <p:nvPr/>
-        </p:nvSpPr>
-        <p:spPr>
-          <a:xfrm>
-            <a:off x="4348620" y="2880360"/>
+          <p:cNvPr id="237" name="Text 235"/>
+          <p:cNvSpPr/>
+          <p:nvPr/>
+        </p:nvSpPr>
+        <p:spPr>
+          <a:xfrm>
+            <a:off x="4589526" y="2880360"/>
             <a:ext cx="548640" cy="215646"/>
           </a:xfrm>
           <a:prstGeom prst="rect">
@@ -14717,7 +14812,7 @@
                 <a:ea typeface="Arial" pitchFamily="34" charset="-122"/>
                 <a:cs typeface="Arial" pitchFamily="34" charset="-120"/>
               </a:rPr>
-              <a:t>6 يوم</a:t>
+              <a:t>4 يوم</a:t>
             </a:r>
             <a:endParaRPr lang="ar-SA" sz="750" dirty="0"/>
           </a:p>
@@ -14725,7 +14820,7 @@
       </p:sp>
       <p:sp>
         <p:nvSpPr>
-          <p:cNvPr id="235" name="Shape 233"/>
+          <p:cNvPr id="238" name="Shape 236"/>
           <p:cNvSpPr/>
           <p:nvPr/>
         </p:nvSpPr>
@@ -14750,7 +14845,7 @@
       </p:sp>
       <p:sp>
         <p:nvSpPr>
-          <p:cNvPr id="236" name="Shape 234"/>
+          <p:cNvPr id="239" name="Shape 237"/>
           <p:cNvSpPr/>
           <p:nvPr/>
         </p:nvSpPr>
@@ -14777,7 +14872,7 @@
       </p:sp>
       <p:sp>
         <p:nvSpPr>
-          <p:cNvPr id="237" name="Text 235"/>
+          <p:cNvPr id="240" name="Text 238"/>
           <p:cNvSpPr/>
           <p:nvPr/>
         </p:nvSpPr>
@@ -14818,7 +14913,7 @@
       </p:sp>
       <p:sp>
         <p:nvSpPr>
-          <p:cNvPr id="238" name="Text 236"/>
+          <p:cNvPr id="241" name="Text 239"/>
           <p:cNvSpPr/>
           <p:nvPr/>
         </p:nvSpPr>
@@ -14859,7 +14954,7 @@
       </p:sp>
       <p:sp>
         <p:nvSpPr>
-          <p:cNvPr id="239" name="Text 237"/>
+          <p:cNvPr id="242" name="Text 240"/>
           <p:cNvSpPr/>
           <p:nvPr/>
         </p:nvSpPr>
@@ -14900,7 +14995,7 @@
       </p:sp>
       <p:sp>
         <p:nvSpPr>
-          <p:cNvPr id="240" name="Text 238"/>
+          <p:cNvPr id="243" name="Text 241"/>
           <p:cNvSpPr/>
           <p:nvPr/>
         </p:nvSpPr>
@@ -14941,7 +15036,7 @@
       </p:sp>
       <p:sp>
         <p:nvSpPr>
-          <p:cNvPr id="241" name="Text 239"/>
+          <p:cNvPr id="244" name="Text 242"/>
           <p:cNvSpPr/>
           <p:nvPr/>
         </p:nvSpPr>
@@ -14982,7 +15077,7 @@
       </p:sp>
       <p:sp>
         <p:nvSpPr>
-          <p:cNvPr id="242" name="Text 240"/>
+          <p:cNvPr id="245" name="Text 243"/>
           <p:cNvSpPr/>
           <p:nvPr/>
         </p:nvSpPr>
@@ -15023,7 +15118,7 @@
       </p:sp>
       <p:sp>
         <p:nvSpPr>
-          <p:cNvPr id="243" name="Shape 241"/>
+          <p:cNvPr id="246" name="Shape 244"/>
           <p:cNvSpPr/>
           <p:nvPr/>
         </p:nvSpPr>
@@ -15057,7 +15152,7 @@
       </p:sp>
       <p:sp>
         <p:nvSpPr>
-          <p:cNvPr id="244" name="Shape 242"/>
+          <p:cNvPr id="247" name="Shape 245"/>
           <p:cNvSpPr/>
           <p:nvPr/>
         </p:nvSpPr>
@@ -15082,7 +15177,7 @@
       </p:sp>
       <p:sp>
         <p:nvSpPr>
-          <p:cNvPr id="245" name="Shape 243"/>
+          <p:cNvPr id="248" name="Shape 246"/>
           <p:cNvSpPr/>
           <p:nvPr/>
         </p:nvSpPr>
@@ -15109,7 +15204,7 @@
       </p:sp>
       <p:sp>
         <p:nvSpPr>
-          <p:cNvPr id="246" name="Text 244"/>
+          <p:cNvPr id="249" name="Text 247"/>
           <p:cNvSpPr/>
           <p:nvPr/>
         </p:nvSpPr>
@@ -15150,7 +15245,7 @@
       </p:sp>
       <p:sp>
         <p:nvSpPr>
-          <p:cNvPr id="247" name="Text 245"/>
+          <p:cNvPr id="250" name="Text 248"/>
           <p:cNvSpPr/>
           <p:nvPr/>
         </p:nvSpPr>
@@ -15191,7 +15286,7 @@
       </p:sp>
       <p:sp>
         <p:nvSpPr>
-          <p:cNvPr id="248" name="Text 246"/>
+          <p:cNvPr id="251" name="Text 249"/>
           <p:cNvSpPr/>
           <p:nvPr/>
         </p:nvSpPr>
@@ -15232,7 +15327,7 @@
       </p:sp>
       <p:sp>
         <p:nvSpPr>
-          <p:cNvPr id="249" name="Text 247"/>
+          <p:cNvPr id="252" name="Text 250"/>
           <p:cNvSpPr/>
           <p:nvPr/>
         </p:nvSpPr>
@@ -15265,7 +15360,7 @@
                 <a:ea typeface="Arial" pitchFamily="34" charset="-122"/>
                 <a:cs typeface="Arial" pitchFamily="34" charset="-120"/>
               </a:rPr>
-              <a:t>3</a:t>
+              <a:t>2</a:t>
             </a:r>
             <a:endParaRPr lang="ar-SA" sz="900" dirty="0"/>
           </a:p>
@@ -15273,7 +15368,7 @@
       </p:sp>
       <p:sp>
         <p:nvSpPr>
-          <p:cNvPr id="250" name="Text 248"/>
+          <p:cNvPr id="253" name="Text 251"/>
           <p:cNvSpPr/>
           <p:nvPr/>
         </p:nvSpPr>
@@ -15314,7 +15409,7 @@
       </p:sp>
       <p:sp>
         <p:nvSpPr>
-          <p:cNvPr id="251" name="Text 249"/>
+          <p:cNvPr id="254" name="Text 252"/>
           <p:cNvSpPr/>
           <p:nvPr/>
         </p:nvSpPr>
@@ -15347,7 +15442,7 @@
                 <a:ea typeface="Arial" pitchFamily="34" charset="-122"/>
                 <a:cs typeface="Arial" pitchFamily="34" charset="-120"/>
               </a:rPr>
-              <a:t>17 أكتوبر</a:t>
+              <a:t>15 أكتوبر</a:t>
             </a:r>
             <a:endParaRPr lang="ar-SA" sz="700" dirty="0"/>
           </a:p>
@@ -15355,14 +15450,41 @@
       </p:sp>
       <p:sp>
         <p:nvSpPr>
-          <p:cNvPr id="252" name="Shape 250"/>
-          <p:cNvSpPr/>
-          <p:nvPr/>
-        </p:nvSpPr>
-        <p:spPr>
-          <a:xfrm>
-            <a:off x="5183886" y="3356938"/>
-            <a:ext cx="481813" cy="125075"/>
+          <p:cNvPr id="255" name="Shape 253"/>
+          <p:cNvSpPr/>
+          <p:nvPr/>
+        </p:nvSpPr>
+        <p:spPr>
+          <a:xfrm>
+            <a:off x="5183886" y="3472434"/>
+            <a:ext cx="481813" cy="32004"/>
+          </a:xfrm>
+          <a:prstGeom prst="roundRect">
+            <a:avLst>
+              <a:gd name="adj" fmla="val 42857"/>
+            </a:avLst>
+          </a:prstGeom>
+          <a:solidFill>
+            <a:srgbClr val="8A959C"/>
+          </a:solidFill>
+          <a:ln w="12700">
+            <a:solidFill>
+              <a:srgbClr val="8A959C"/>
+            </a:solidFill>
+            <a:prstDash val="solid"/>
+          </a:ln>
+        </p:spPr>
+      </p:sp>
+      <p:sp>
+        <p:nvSpPr>
+          <p:cNvPr id="256" name="Shape 254"/>
+          <p:cNvSpPr/>
+          <p:nvPr/>
+        </p:nvSpPr>
+        <p:spPr>
+          <a:xfrm>
+            <a:off x="5424792" y="3356938"/>
+            <a:ext cx="240906" cy="125075"/>
           </a:xfrm>
           <a:prstGeom prst="roundRect">
             <a:avLst>
@@ -15389,48 +15511,7 @@
       </p:sp>
       <p:sp>
         <p:nvSpPr>
-          <p:cNvPr id="253" name="Text 251"/>
-          <p:cNvSpPr/>
-          <p:nvPr/>
-        </p:nvSpPr>
-        <p:spPr>
-          <a:xfrm>
-            <a:off x="5183886" y="3356938"/>
-            <a:ext cx="481813" cy="125075"/>
-          </a:xfrm>
-          <a:prstGeom prst="rect">
-            <a:avLst/>
-          </a:prstGeom>
-          <a:noFill/>
-          <a:ln/>
-        </p:spPr>
-        <p:txBody>
-          <a:bodyPr wrap="square" lIns="0" tIns="0" rIns="0" bIns="0" rtlCol="0" anchor="ctr">
-            <a:normAutofit/>
-          </a:bodyPr>
-          <a:lstStyle/>
-          <a:p>
-            <a:pPr rtl="1" algn="ctr" indent="0" marL="0">
-              <a:buNone/>
-            </a:pPr>
-            <a:r>
-              <a:rPr lang="ar-SA" altLang="en-US" sz="700" b="1" dirty="0">
-                <a:solidFill>
-                  <a:srgbClr val="FFFFFF"/>
-                </a:solidFill>
-                <a:latin typeface="Arial" pitchFamily="34" charset="0"/>
-                <a:ea typeface="Arial" pitchFamily="34" charset="-122"/>
-                <a:cs typeface="Arial" pitchFamily="34" charset="-120"/>
-              </a:rPr>
-              <a:t>3 يوم</a:t>
-            </a:r>
-            <a:endParaRPr lang="ar-SA" sz="700" dirty="0"/>
-          </a:p>
-        </p:txBody>
-      </p:sp>
-      <p:sp>
-        <p:nvSpPr>
-          <p:cNvPr id="254" name="Shape 252"/>
+          <p:cNvPr id="257" name="Shape 255"/>
           <p:cNvSpPr/>
           <p:nvPr/>
         </p:nvSpPr>
@@ -15455,7 +15536,7 @@
       </p:sp>
       <p:sp>
         <p:nvSpPr>
-          <p:cNvPr id="255" name="Shape 253"/>
+          <p:cNvPr id="258" name="Shape 256"/>
           <p:cNvSpPr/>
           <p:nvPr/>
         </p:nvSpPr>
@@ -15482,7 +15563,7 @@
       </p:sp>
       <p:sp>
         <p:nvSpPr>
-          <p:cNvPr id="256" name="Text 254"/>
+          <p:cNvPr id="259" name="Text 257"/>
           <p:cNvSpPr/>
           <p:nvPr/>
         </p:nvSpPr>
@@ -15523,7 +15604,7 @@
       </p:sp>
       <p:sp>
         <p:nvSpPr>
-          <p:cNvPr id="257" name="Text 255"/>
+          <p:cNvPr id="260" name="Text 258"/>
           <p:cNvSpPr/>
           <p:nvPr/>
         </p:nvSpPr>
@@ -15564,7 +15645,7 @@
       </p:sp>
       <p:sp>
         <p:nvSpPr>
-          <p:cNvPr id="258" name="Text 256"/>
+          <p:cNvPr id="261" name="Text 259"/>
           <p:cNvSpPr/>
           <p:nvPr/>
         </p:nvSpPr>
@@ -15605,7 +15686,7 @@
       </p:sp>
       <p:sp>
         <p:nvSpPr>
-          <p:cNvPr id="259" name="Text 257"/>
+          <p:cNvPr id="262" name="Text 260"/>
           <p:cNvSpPr/>
           <p:nvPr/>
         </p:nvSpPr>
@@ -15638,7 +15719,7 @@
                 <a:ea typeface="Arial" pitchFamily="34" charset="-122"/>
                 <a:cs typeface="Arial" pitchFamily="34" charset="-120"/>
               </a:rPr>
-              <a:t>3</a:t>
+              <a:t>2</a:t>
             </a:r>
             <a:endParaRPr lang="ar-SA" sz="900" dirty="0"/>
           </a:p>
@@ -15646,7 +15727,7 @@
       </p:sp>
       <p:sp>
         <p:nvSpPr>
-          <p:cNvPr id="260" name="Text 258"/>
+          <p:cNvPr id="263" name="Text 261"/>
           <p:cNvSpPr/>
           <p:nvPr/>
         </p:nvSpPr>
@@ -15687,7 +15768,7 @@
       </p:sp>
       <p:sp>
         <p:nvSpPr>
-          <p:cNvPr id="261" name="Text 259"/>
+          <p:cNvPr id="264" name="Text 262"/>
           <p:cNvSpPr/>
           <p:nvPr/>
         </p:nvSpPr>
@@ -15720,7 +15801,7 @@
                 <a:ea typeface="Arial" pitchFamily="34" charset="-122"/>
                 <a:cs typeface="Arial" pitchFamily="34" charset="-120"/>
               </a:rPr>
-              <a:t>18 أكتوبر</a:t>
+              <a:t>17 أكتوبر</a:t>
             </a:r>
             <a:endParaRPr lang="ar-SA" sz="700" dirty="0"/>
           </a:p>
@@ -15728,14 +15809,41 @@
       </p:sp>
       <p:sp>
         <p:nvSpPr>
-          <p:cNvPr id="262" name="Shape 260"/>
-          <p:cNvSpPr/>
-          <p:nvPr/>
-        </p:nvSpPr>
-        <p:spPr>
-          <a:xfrm>
-            <a:off x="5063433" y="3572584"/>
-            <a:ext cx="481813" cy="125075"/>
+          <p:cNvPr id="265" name="Shape 263"/>
+          <p:cNvSpPr/>
+          <p:nvPr/>
+        </p:nvSpPr>
+        <p:spPr>
+          <a:xfrm>
+            <a:off x="5063433" y="3688080"/>
+            <a:ext cx="481813" cy="32004"/>
+          </a:xfrm>
+          <a:prstGeom prst="roundRect">
+            <a:avLst>
+              <a:gd name="adj" fmla="val 42857"/>
+            </a:avLst>
+          </a:prstGeom>
+          <a:solidFill>
+            <a:srgbClr val="8A959C"/>
+          </a:solidFill>
+          <a:ln w="12700">
+            <a:solidFill>
+              <a:srgbClr val="8A959C"/>
+            </a:solidFill>
+            <a:prstDash val="solid"/>
+          </a:ln>
+        </p:spPr>
+      </p:sp>
+      <p:sp>
+        <p:nvSpPr>
+          <p:cNvPr id="266" name="Shape 264"/>
+          <p:cNvSpPr/>
+          <p:nvPr/>
+        </p:nvSpPr>
+        <p:spPr>
+          <a:xfrm>
+            <a:off x="5183886" y="3572584"/>
+            <a:ext cx="361359" cy="125075"/>
           </a:xfrm>
           <a:prstGeom prst="roundRect">
             <a:avLst>
@@ -15762,14 +15870,14 @@
       </p:sp>
       <p:sp>
         <p:nvSpPr>
-          <p:cNvPr id="263" name="Text 261"/>
-          <p:cNvSpPr/>
-          <p:nvPr/>
-        </p:nvSpPr>
-        <p:spPr>
-          <a:xfrm>
-            <a:off x="5063433" y="3572584"/>
-            <a:ext cx="481813" cy="125075"/>
+          <p:cNvPr id="267" name="Text 265"/>
+          <p:cNvSpPr/>
+          <p:nvPr/>
+        </p:nvSpPr>
+        <p:spPr>
+          <a:xfrm>
+            <a:off x="5183886" y="3572584"/>
+            <a:ext cx="361359" cy="125075"/>
           </a:xfrm>
           <a:prstGeom prst="rect">
             <a:avLst/>
@@ -15795,7 +15903,7 @@
                 <a:ea typeface="Arial" pitchFamily="34" charset="-122"/>
                 <a:cs typeface="Arial" pitchFamily="34" charset="-120"/>
               </a:rPr>
-              <a:t>3 يوم</a:t>
+              <a:t>2 يوم</a:t>
             </a:r>
             <a:endParaRPr lang="ar-SA" sz="700" dirty="0"/>
           </a:p>
@@ -15803,7 +15911,7 @@
       </p:sp>
       <p:sp>
         <p:nvSpPr>
-          <p:cNvPr id="264" name="Shape 262"/>
+          <p:cNvPr id="268" name="Shape 266"/>
           <p:cNvSpPr/>
           <p:nvPr/>
         </p:nvSpPr>
@@ -15828,7 +15936,7 @@
       </p:sp>
       <p:sp>
         <p:nvSpPr>
-          <p:cNvPr id="265" name="Shape 263"/>
+          <p:cNvPr id="269" name="Shape 267"/>
           <p:cNvSpPr/>
           <p:nvPr/>
         </p:nvSpPr>
@@ -15855,7 +15963,7 @@
       </p:sp>
       <p:sp>
         <p:nvSpPr>
-          <p:cNvPr id="266" name="Text 264"/>
+          <p:cNvPr id="270" name="Text 268"/>
           <p:cNvSpPr/>
           <p:nvPr/>
         </p:nvSpPr>
@@ -15896,7 +16004,7 @@
       </p:sp>
       <p:sp>
         <p:nvSpPr>
-          <p:cNvPr id="267" name="Text 265"/>
+          <p:cNvPr id="271" name="Text 269"/>
           <p:cNvSpPr/>
           <p:nvPr/>
         </p:nvSpPr>
@@ -15937,7 +16045,7 @@
       </p:sp>
       <p:sp>
         <p:nvSpPr>
-          <p:cNvPr id="268" name="Text 266"/>
+          <p:cNvPr id="272" name="Text 270"/>
           <p:cNvSpPr/>
           <p:nvPr/>
         </p:nvSpPr>
@@ -15978,7 +16086,7 @@
       </p:sp>
       <p:sp>
         <p:nvSpPr>
-          <p:cNvPr id="269" name="Text 267"/>
+          <p:cNvPr id="273" name="Text 271"/>
           <p:cNvSpPr/>
           <p:nvPr/>
         </p:nvSpPr>
@@ -16011,7 +16119,7 @@
                 <a:ea typeface="Arial" pitchFamily="34" charset="-122"/>
                 <a:cs typeface="Arial" pitchFamily="34" charset="-120"/>
               </a:rPr>
-              <a:t>3</a:t>
+              <a:t>1</a:t>
             </a:r>
             <a:endParaRPr lang="ar-SA" sz="900" dirty="0"/>
           </a:p>
@@ -16019,7 +16127,7 @@
       </p:sp>
       <p:sp>
         <p:nvSpPr>
-          <p:cNvPr id="270" name="Text 268"/>
+          <p:cNvPr id="274" name="Text 272"/>
           <p:cNvSpPr/>
           <p:nvPr/>
         </p:nvSpPr>
@@ -16060,7 +16168,7 @@
       </p:sp>
       <p:sp>
         <p:nvSpPr>
-          <p:cNvPr id="271" name="Text 269"/>
+          <p:cNvPr id="275" name="Text 273"/>
           <p:cNvSpPr/>
           <p:nvPr/>
         </p:nvSpPr>
@@ -16093,7 +16201,7 @@
                 <a:ea typeface="Arial" pitchFamily="34" charset="-122"/>
                 <a:cs typeface="Arial" pitchFamily="34" charset="-120"/>
               </a:rPr>
-              <a:t>19 أكتوبر</a:t>
+              <a:t>17 أكتوبر</a:t>
             </a:r>
             <a:endParaRPr lang="ar-SA" sz="700" dirty="0"/>
           </a:p>
@@ -16101,18 +16209,45 @@
       </p:sp>
       <p:sp>
         <p:nvSpPr>
-          <p:cNvPr id="272" name="Shape 270"/>
-          <p:cNvSpPr/>
-          <p:nvPr/>
-        </p:nvSpPr>
-        <p:spPr>
-          <a:xfrm>
-            <a:off x="4942980" y="3788230"/>
-            <a:ext cx="361359" cy="125075"/>
+          <p:cNvPr id="276" name="Shape 274"/>
+          <p:cNvSpPr/>
+          <p:nvPr/>
+        </p:nvSpPr>
+        <p:spPr>
+          <a:xfrm>
+            <a:off x="4942980" y="3903726"/>
+            <a:ext cx="361359" cy="32004"/>
           </a:xfrm>
           <a:prstGeom prst="roundRect">
             <a:avLst>
-              <a:gd name="adj" fmla="val 29243"/>
+              <a:gd name="adj" fmla="val 42857"/>
+            </a:avLst>
+          </a:prstGeom>
+          <a:solidFill>
+            <a:srgbClr val="8A959C"/>
+          </a:solidFill>
+          <a:ln w="12700">
+            <a:solidFill>
+              <a:srgbClr val="8A959C"/>
+            </a:solidFill>
+            <a:prstDash val="solid"/>
+          </a:ln>
+        </p:spPr>
+      </p:sp>
+      <p:sp>
+        <p:nvSpPr>
+          <p:cNvPr id="277" name="Shape 275"/>
+          <p:cNvSpPr/>
+          <p:nvPr/>
+        </p:nvSpPr>
+        <p:spPr>
+          <a:xfrm>
+            <a:off x="5183886" y="3788230"/>
+            <a:ext cx="120453" cy="125075"/>
+          </a:xfrm>
+          <a:prstGeom prst="roundRect">
+            <a:avLst>
+              <a:gd name="adj" fmla="val 30365"/>
             </a:avLst>
           </a:prstGeom>
           <a:solidFill>
@@ -16135,48 +16270,7 @@
       </p:sp>
       <p:sp>
         <p:nvSpPr>
-          <p:cNvPr id="273" name="Text 271"/>
-          <p:cNvSpPr/>
-          <p:nvPr/>
-        </p:nvSpPr>
-        <p:spPr>
-          <a:xfrm>
-            <a:off x="4942980" y="3788230"/>
-            <a:ext cx="361359" cy="125075"/>
-          </a:xfrm>
-          <a:prstGeom prst="rect">
-            <a:avLst/>
-          </a:prstGeom>
-          <a:noFill/>
-          <a:ln/>
-        </p:spPr>
-        <p:txBody>
-          <a:bodyPr wrap="square" lIns="0" tIns="0" rIns="0" bIns="0" rtlCol="0" anchor="ctr">
-            <a:normAutofit/>
-          </a:bodyPr>
-          <a:lstStyle/>
-          <a:p>
-            <a:pPr rtl="1" algn="ctr" indent="0" marL="0">
-              <a:buNone/>
-            </a:pPr>
-            <a:r>
-              <a:rPr lang="ar-SA" altLang="en-US" sz="700" b="1" dirty="0">
-                <a:solidFill>
-                  <a:srgbClr val="FFFFFF"/>
-                </a:solidFill>
-                <a:latin typeface="Arial" pitchFamily="34" charset="0"/>
-                <a:ea typeface="Arial" pitchFamily="34" charset="-122"/>
-                <a:cs typeface="Arial" pitchFamily="34" charset="-120"/>
-              </a:rPr>
-              <a:t>3 يوم</a:t>
-            </a:r>
-            <a:endParaRPr lang="ar-SA" sz="700" dirty="0"/>
-          </a:p>
-        </p:txBody>
-      </p:sp>
-      <p:sp>
-        <p:nvSpPr>
-          <p:cNvPr id="274" name="Shape 272"/>
+          <p:cNvPr id="278" name="Shape 276"/>
           <p:cNvSpPr/>
           <p:nvPr/>
         </p:nvSpPr>
@@ -16201,7 +16295,7 @@
       </p:sp>
       <p:sp>
         <p:nvSpPr>
-          <p:cNvPr id="275" name="Shape 273"/>
+          <p:cNvPr id="279" name="Shape 277"/>
           <p:cNvSpPr/>
           <p:nvPr/>
         </p:nvSpPr>
@@ -16228,7 +16322,7 @@
       </p:sp>
       <p:sp>
         <p:nvSpPr>
-          <p:cNvPr id="276" name="Text 274"/>
+          <p:cNvPr id="280" name="Text 278"/>
           <p:cNvSpPr/>
           <p:nvPr/>
         </p:nvSpPr>
@@ -16269,7 +16363,7 @@
       </p:sp>
       <p:sp>
         <p:nvSpPr>
-          <p:cNvPr id="277" name="Text 275"/>
+          <p:cNvPr id="281" name="Text 279"/>
           <p:cNvSpPr/>
           <p:nvPr/>
         </p:nvSpPr>
@@ -16310,7 +16404,7 @@
       </p:sp>
       <p:sp>
         <p:nvSpPr>
-          <p:cNvPr id="278" name="Text 276"/>
+          <p:cNvPr id="282" name="Text 280"/>
           <p:cNvSpPr/>
           <p:nvPr/>
         </p:nvSpPr>
@@ -16343,7 +16437,7 @@
                 <a:ea typeface="Arial" pitchFamily="34" charset="-122"/>
                 <a:cs typeface="Arial" pitchFamily="34" charset="-120"/>
               </a:rPr>
-              <a:t>A4 · SS +1</a:t>
+              <a:t>A4 · SS +0</a:t>
             </a:r>
             <a:endParaRPr lang="ar-SA" sz="700" dirty="0"/>
           </a:p>
@@ -16351,7 +16445,7 @@
       </p:sp>
       <p:sp>
         <p:nvSpPr>
-          <p:cNvPr id="279" name="Text 277"/>
+          <p:cNvPr id="283" name="Text 281"/>
           <p:cNvSpPr/>
           <p:nvPr/>
         </p:nvSpPr>
@@ -16384,7 +16478,7 @@
                 <a:ea typeface="Arial" pitchFamily="34" charset="-122"/>
                 <a:cs typeface="Arial" pitchFamily="34" charset="-120"/>
               </a:rPr>
-              <a:t>2</a:t>
+              <a:t>1</a:t>
             </a:r>
             <a:endParaRPr lang="ar-SA" sz="900" dirty="0"/>
           </a:p>
@@ -16392,7 +16486,7 @@
       </p:sp>
       <p:sp>
         <p:nvSpPr>
-          <p:cNvPr id="280" name="Text 278"/>
+          <p:cNvPr id="284" name="Text 282"/>
           <p:cNvSpPr/>
           <p:nvPr/>
         </p:nvSpPr>
@@ -16425,7 +16519,7 @@
                 <a:ea typeface="Arial" pitchFamily="34" charset="-122"/>
                 <a:cs typeface="Arial" pitchFamily="34" charset="-120"/>
               </a:rPr>
-              <a:t>18 أكتوبر</a:t>
+              <a:t>17 أكتوبر</a:t>
             </a:r>
             <a:endParaRPr lang="ar-SA" sz="700" dirty="0"/>
           </a:p>
@@ -16433,7 +16527,7 @@
       </p:sp>
       <p:sp>
         <p:nvSpPr>
-          <p:cNvPr id="281" name="Text 279"/>
+          <p:cNvPr id="285" name="Text 283"/>
           <p:cNvSpPr/>
           <p:nvPr/>
         </p:nvSpPr>
@@ -16466,7 +16560,7 @@
                 <a:ea typeface="Arial" pitchFamily="34" charset="-122"/>
                 <a:cs typeface="Arial" pitchFamily="34" charset="-120"/>
               </a:rPr>
-              <a:t>19 أكتوبر</a:t>
+              <a:t>17 أكتوبر</a:t>
             </a:r>
             <a:endParaRPr lang="ar-SA" sz="700" dirty="0"/>
           </a:p>
@@ -16474,18 +16568,45 @@
       </p:sp>
       <p:sp>
         <p:nvSpPr>
-          <p:cNvPr id="282" name="Shape 280"/>
-          <p:cNvSpPr/>
-          <p:nvPr/>
-        </p:nvSpPr>
-        <p:spPr>
-          <a:xfrm>
-            <a:off x="4942980" y="4003876"/>
-            <a:ext cx="240906" cy="125075"/>
+          <p:cNvPr id="286" name="Shape 284"/>
+          <p:cNvSpPr/>
+          <p:nvPr/>
+        </p:nvSpPr>
+        <p:spPr>
+          <a:xfrm>
+            <a:off x="4942980" y="4119372"/>
+            <a:ext cx="240906" cy="32004"/>
           </a:xfrm>
           <a:prstGeom prst="roundRect">
             <a:avLst>
-              <a:gd name="adj" fmla="val 29243"/>
+              <a:gd name="adj" fmla="val 42857"/>
+            </a:avLst>
+          </a:prstGeom>
+          <a:solidFill>
+            <a:srgbClr val="8A959C"/>
+          </a:solidFill>
+          <a:ln w="12700">
+            <a:solidFill>
+              <a:srgbClr val="8A959C"/>
+            </a:solidFill>
+            <a:prstDash val="solid"/>
+          </a:ln>
+        </p:spPr>
+      </p:sp>
+      <p:sp>
+        <p:nvSpPr>
+          <p:cNvPr id="287" name="Shape 285"/>
+          <p:cNvSpPr/>
+          <p:nvPr/>
+        </p:nvSpPr>
+        <p:spPr>
+          <a:xfrm>
+            <a:off x="5183886" y="4003876"/>
+            <a:ext cx="120453" cy="125075"/>
+          </a:xfrm>
+          <a:prstGeom prst="roundRect">
+            <a:avLst>
+              <a:gd name="adj" fmla="val 30365"/>
             </a:avLst>
           </a:prstGeom>
           <a:solidFill>
@@ -16508,7 +16629,7 @@
       </p:sp>
       <p:sp>
         <p:nvSpPr>
-          <p:cNvPr id="283" name="Shape 281"/>
+          <p:cNvPr id="288" name="Shape 286"/>
           <p:cNvSpPr/>
           <p:nvPr/>
         </p:nvSpPr>
@@ -16533,7 +16654,7 @@
       </p:sp>
       <p:sp>
         <p:nvSpPr>
-          <p:cNvPr id="284" name="Shape 282"/>
+          <p:cNvPr id="289" name="Shape 287"/>
           <p:cNvSpPr/>
           <p:nvPr/>
         </p:nvSpPr>
@@ -16558,7 +16679,7 @@
       </p:sp>
       <p:sp>
         <p:nvSpPr>
-          <p:cNvPr id="285" name="Text 283"/>
+          <p:cNvPr id="290" name="Text 288"/>
           <p:cNvSpPr/>
           <p:nvPr/>
         </p:nvSpPr>
@@ -16599,7 +16720,7 @@
       </p:sp>
       <p:sp>
         <p:nvSpPr>
-          <p:cNvPr id="286" name="Text 284"/>
+          <p:cNvPr id="291" name="Text 289"/>
           <p:cNvSpPr/>
           <p:nvPr/>
         </p:nvSpPr>
@@ -16640,7 +16761,7 @@
       </p:sp>
       <p:sp>
         <p:nvSpPr>
-          <p:cNvPr id="287" name="Text 285"/>
+          <p:cNvPr id="292" name="Text 290"/>
           <p:cNvSpPr/>
           <p:nvPr/>
         </p:nvSpPr>
@@ -16673,7 +16794,7 @@
                 <a:ea typeface="Arial" pitchFamily="34" charset="-122"/>
                 <a:cs typeface="Arial" pitchFamily="34" charset="-120"/>
               </a:rPr>
-              <a:t>A · SS +6</a:t>
+              <a:t>A · SS +4</a:t>
             </a:r>
             <a:endParaRPr lang="ar-SA" sz="700" dirty="0"/>
           </a:p>
@@ -16681,7 +16802,7 @@
       </p:sp>
       <p:sp>
         <p:nvSpPr>
-          <p:cNvPr id="288" name="Text 286"/>
+          <p:cNvPr id="293" name="Text 291"/>
           <p:cNvSpPr/>
           <p:nvPr/>
         </p:nvSpPr>
@@ -16714,7 +16835,7 @@
                 <a:ea typeface="Arial" pitchFamily="34" charset="-122"/>
                 <a:cs typeface="Arial" pitchFamily="34" charset="-120"/>
               </a:rPr>
-              <a:t>2</a:t>
+              <a:t>1</a:t>
             </a:r>
             <a:endParaRPr lang="ar-SA" sz="900" dirty="0"/>
           </a:p>
@@ -16722,7 +16843,7 @@
       </p:sp>
       <p:sp>
         <p:nvSpPr>
-          <p:cNvPr id="289" name="Text 287"/>
+          <p:cNvPr id="294" name="Text 292"/>
           <p:cNvSpPr/>
           <p:nvPr/>
         </p:nvSpPr>
@@ -16755,7 +16876,7 @@
                 <a:ea typeface="Arial" pitchFamily="34" charset="-122"/>
                 <a:cs typeface="Arial" pitchFamily="34" charset="-120"/>
               </a:rPr>
-              <a:t>20 أكتوبر</a:t>
+              <a:t>18 أكتوبر</a:t>
             </a:r>
             <a:endParaRPr lang="ar-SA" sz="700" dirty="0"/>
           </a:p>
@@ -16763,7 +16884,7 @@
       </p:sp>
       <p:sp>
         <p:nvSpPr>
-          <p:cNvPr id="290" name="Text 288"/>
+          <p:cNvPr id="295" name="Text 293"/>
           <p:cNvSpPr/>
           <p:nvPr/>
         </p:nvSpPr>
@@ -16796,7 +16917,7 @@
                 <a:ea typeface="Arial" pitchFamily="34" charset="-122"/>
                 <a:cs typeface="Arial" pitchFamily="34" charset="-120"/>
               </a:rPr>
-              <a:t>21 أكتوبر</a:t>
+              <a:t>18 أكتوبر</a:t>
             </a:r>
             <a:endParaRPr lang="ar-SA" sz="700" dirty="0"/>
           </a:p>
@@ -16804,18 +16925,45 @@
       </p:sp>
       <p:sp>
         <p:nvSpPr>
-          <p:cNvPr id="291" name="Shape 289"/>
-          <p:cNvSpPr/>
-          <p:nvPr/>
-        </p:nvSpPr>
-        <p:spPr>
-          <a:xfrm>
-            <a:off x="4702073" y="4219522"/>
-            <a:ext cx="240906" cy="125075"/>
+          <p:cNvPr id="296" name="Shape 294"/>
+          <p:cNvSpPr/>
+          <p:nvPr/>
+        </p:nvSpPr>
+        <p:spPr>
+          <a:xfrm>
+            <a:off x="4702073" y="4335018"/>
+            <a:ext cx="240906" cy="32004"/>
           </a:xfrm>
           <a:prstGeom prst="roundRect">
             <a:avLst>
-              <a:gd name="adj" fmla="val 29243"/>
+              <a:gd name="adj" fmla="val 42857"/>
+            </a:avLst>
+          </a:prstGeom>
+          <a:solidFill>
+            <a:srgbClr val="8A959C"/>
+          </a:solidFill>
+          <a:ln w="12700">
+            <a:solidFill>
+              <a:srgbClr val="8A959C"/>
+            </a:solidFill>
+            <a:prstDash val="solid"/>
+          </a:ln>
+        </p:spPr>
+      </p:sp>
+      <p:sp>
+        <p:nvSpPr>
+          <p:cNvPr id="297" name="Shape 295"/>
+          <p:cNvSpPr/>
+          <p:nvPr/>
+        </p:nvSpPr>
+        <p:spPr>
+          <a:xfrm>
+            <a:off x="5063433" y="4219522"/>
+            <a:ext cx="120453" cy="125075"/>
+          </a:xfrm>
+          <a:prstGeom prst="roundRect">
+            <a:avLst>
+              <a:gd name="adj" fmla="val 30365"/>
             </a:avLst>
           </a:prstGeom>
           <a:solidFill>
@@ -16838,7 +16986,7 @@
       </p:sp>
       <p:sp>
         <p:nvSpPr>
-          <p:cNvPr id="292" name="Shape 290"/>
+          <p:cNvPr id="298" name="Shape 296"/>
           <p:cNvSpPr/>
           <p:nvPr/>
         </p:nvSpPr>
@@ -16863,7 +17011,7 @@
       </p:sp>
       <p:sp>
         <p:nvSpPr>
-          <p:cNvPr id="293" name="Shape 291"/>
+          <p:cNvPr id="299" name="Shape 297"/>
           <p:cNvSpPr/>
           <p:nvPr/>
         </p:nvSpPr>
@@ -16888,7 +17036,7 @@
       </p:sp>
       <p:sp>
         <p:nvSpPr>
-          <p:cNvPr id="294" name="Text 292"/>
+          <p:cNvPr id="300" name="Text 298"/>
           <p:cNvSpPr/>
           <p:nvPr/>
         </p:nvSpPr>
@@ -16929,7 +17077,7 @@
       </p:sp>
       <p:sp>
         <p:nvSpPr>
-          <p:cNvPr id="295" name="Text 293"/>
+          <p:cNvPr id="301" name="Text 299"/>
           <p:cNvSpPr/>
           <p:nvPr/>
         </p:nvSpPr>
@@ -16970,7 +17118,7 @@
       </p:sp>
       <p:sp>
         <p:nvSpPr>
-          <p:cNvPr id="296" name="Text 294"/>
+          <p:cNvPr id="302" name="Text 300"/>
           <p:cNvSpPr/>
           <p:nvPr/>
         </p:nvSpPr>
@@ -17011,7 +17159,7 @@
       </p:sp>
       <p:sp>
         <p:nvSpPr>
-          <p:cNvPr id="297" name="Text 295"/>
+          <p:cNvPr id="303" name="Text 301"/>
           <p:cNvSpPr/>
           <p:nvPr/>
         </p:nvSpPr>
@@ -17044,7 +17192,7 @@
                 <a:ea typeface="Arial" pitchFamily="34" charset="-122"/>
                 <a:cs typeface="Arial" pitchFamily="34" charset="-120"/>
               </a:rPr>
-              <a:t>4</a:t>
+              <a:t>3</a:t>
             </a:r>
             <a:endParaRPr lang="ar-SA" sz="900" dirty="0"/>
           </a:p>
@@ -17052,7 +17200,7 @@
       </p:sp>
       <p:sp>
         <p:nvSpPr>
-          <p:cNvPr id="298" name="Text 296"/>
+          <p:cNvPr id="304" name="Text 302"/>
           <p:cNvSpPr/>
           <p:nvPr/>
         </p:nvSpPr>
@@ -17085,7 +17233,7 @@
                 <a:ea typeface="Arial" pitchFamily="34" charset="-122"/>
                 <a:cs typeface="Arial" pitchFamily="34" charset="-120"/>
               </a:rPr>
-              <a:t>20 أكتوبر</a:t>
+              <a:t>18 أكتوبر</a:t>
             </a:r>
             <a:endParaRPr lang="ar-SA" sz="700" dirty="0"/>
           </a:p>
@@ -17093,7 +17241,7 @@
       </p:sp>
       <p:sp>
         <p:nvSpPr>
-          <p:cNvPr id="299" name="Text 297"/>
+          <p:cNvPr id="305" name="Text 303"/>
           <p:cNvSpPr/>
           <p:nvPr/>
         </p:nvSpPr>
@@ -17126,7 +17274,7 @@
                 <a:ea typeface="Arial" pitchFamily="34" charset="-122"/>
                 <a:cs typeface="Arial" pitchFamily="34" charset="-120"/>
               </a:rPr>
-              <a:t>24 أكتوبر</a:t>
+              <a:t>20 أكتوبر</a:t>
             </a:r>
             <a:endParaRPr lang="ar-SA" sz="700" dirty="0"/>
           </a:p>
@@ -17134,14 +17282,41 @@
       </p:sp>
       <p:sp>
         <p:nvSpPr>
-          <p:cNvPr id="300" name="Shape 298"/>
-          <p:cNvSpPr/>
-          <p:nvPr/>
-        </p:nvSpPr>
-        <p:spPr>
-          <a:xfrm>
-            <a:off x="4340714" y="4435168"/>
-            <a:ext cx="602266" cy="125075"/>
+          <p:cNvPr id="306" name="Shape 304"/>
+          <p:cNvSpPr/>
+          <p:nvPr/>
+        </p:nvSpPr>
+        <p:spPr>
+          <a:xfrm>
+            <a:off x="4340714" y="4550664"/>
+            <a:ext cx="602266" cy="32004"/>
+          </a:xfrm>
+          <a:prstGeom prst="roundRect">
+            <a:avLst>
+              <a:gd name="adj" fmla="val 42857"/>
+            </a:avLst>
+          </a:prstGeom>
+          <a:solidFill>
+            <a:srgbClr val="8A959C"/>
+          </a:solidFill>
+          <a:ln w="12700">
+            <a:solidFill>
+              <a:srgbClr val="8A959C"/>
+            </a:solidFill>
+            <a:prstDash val="solid"/>
+          </a:ln>
+        </p:spPr>
+      </p:sp>
+      <p:sp>
+        <p:nvSpPr>
+          <p:cNvPr id="307" name="Shape 305"/>
+          <p:cNvSpPr/>
+          <p:nvPr/>
+        </p:nvSpPr>
+        <p:spPr>
+          <a:xfrm>
+            <a:off x="4822527" y="4435168"/>
+            <a:ext cx="361359" cy="125075"/>
           </a:xfrm>
           <a:prstGeom prst="roundRect">
             <a:avLst>
@@ -17168,14 +17343,14 @@
       </p:sp>
       <p:sp>
         <p:nvSpPr>
-          <p:cNvPr id="301" name="Text 299"/>
-          <p:cNvSpPr/>
-          <p:nvPr/>
-        </p:nvSpPr>
-        <p:spPr>
-          <a:xfrm>
-            <a:off x="4340714" y="4435168"/>
-            <a:ext cx="602266" cy="125075"/>
+          <p:cNvPr id="308" name="Text 306"/>
+          <p:cNvSpPr/>
+          <p:nvPr/>
+        </p:nvSpPr>
+        <p:spPr>
+          <a:xfrm>
+            <a:off x="4822527" y="4435168"/>
+            <a:ext cx="361359" cy="125075"/>
           </a:xfrm>
           <a:prstGeom prst="rect">
             <a:avLst/>
@@ -17201,7 +17376,7 @@
                 <a:ea typeface="Arial" pitchFamily="34" charset="-122"/>
                 <a:cs typeface="Arial" pitchFamily="34" charset="-120"/>
               </a:rPr>
-              <a:t>4 يوم</a:t>
+              <a:t>3 يوم</a:t>
             </a:r>
             <a:endParaRPr lang="ar-SA" sz="700" dirty="0"/>
           </a:p>
@@ -17209,7 +17384,7 @@
       </p:sp>
       <p:sp>
         <p:nvSpPr>
-          <p:cNvPr id="302" name="Shape 300"/>
+          <p:cNvPr id="309" name="Shape 307"/>
           <p:cNvSpPr/>
           <p:nvPr/>
         </p:nvSpPr>
@@ -17234,7 +17409,7 @@
       </p:sp>
       <p:sp>
         <p:nvSpPr>
-          <p:cNvPr id="303" name="Shape 301"/>
+          <p:cNvPr id="310" name="Shape 308"/>
           <p:cNvSpPr/>
           <p:nvPr/>
         </p:nvSpPr>
@@ -17259,7 +17434,7 @@
       </p:sp>
       <p:sp>
         <p:nvSpPr>
-          <p:cNvPr id="304" name="Text 302"/>
+          <p:cNvPr id="311" name="Text 309"/>
           <p:cNvSpPr/>
           <p:nvPr/>
         </p:nvSpPr>
@@ -17300,7 +17475,7 @@
       </p:sp>
       <p:sp>
         <p:nvSpPr>
-          <p:cNvPr id="305" name="Text 303"/>
+          <p:cNvPr id="312" name="Text 310"/>
           <p:cNvSpPr/>
           <p:nvPr/>
         </p:nvSpPr>
@@ -17341,7 +17516,7 @@
       </p:sp>
       <p:sp>
         <p:nvSpPr>
-          <p:cNvPr id="306" name="Text 304"/>
+          <p:cNvPr id="313" name="Text 311"/>
           <p:cNvSpPr/>
           <p:nvPr/>
         </p:nvSpPr>
@@ -17382,7 +17557,7 @@
       </p:sp>
       <p:sp>
         <p:nvSpPr>
-          <p:cNvPr id="307" name="Text 305"/>
+          <p:cNvPr id="314" name="Text 312"/>
           <p:cNvSpPr/>
           <p:nvPr/>
         </p:nvSpPr>
@@ -17415,7 +17590,7 @@
                 <a:ea typeface="Arial" pitchFamily="34" charset="-122"/>
                 <a:cs typeface="Arial" pitchFamily="34" charset="-120"/>
               </a:rPr>
-              <a:t>10</a:t>
+              <a:t>9</a:t>
             </a:r>
             <a:endParaRPr lang="ar-SA" sz="900" dirty="0"/>
           </a:p>
@@ -17423,7 +17598,7 @@
       </p:sp>
       <p:sp>
         <p:nvSpPr>
-          <p:cNvPr id="308" name="Text 306"/>
+          <p:cNvPr id="315" name="Text 313"/>
           <p:cNvSpPr/>
           <p:nvPr/>
         </p:nvSpPr>
@@ -17456,7 +17631,7 @@
                 <a:ea typeface="Arial" pitchFamily="34" charset="-122"/>
                 <a:cs typeface="Arial" pitchFamily="34" charset="-120"/>
               </a:rPr>
-              <a:t>25 أكتوبر</a:t>
+              <a:t>21 أكتوبر</a:t>
             </a:r>
             <a:endParaRPr lang="ar-SA" sz="700" dirty="0"/>
           </a:p>
@@ -17464,7 +17639,7 @@
       </p:sp>
       <p:sp>
         <p:nvSpPr>
-          <p:cNvPr id="309" name="Text 307"/>
+          <p:cNvPr id="316" name="Text 314"/>
           <p:cNvSpPr/>
           <p:nvPr/>
         </p:nvSpPr>
@@ -17497,7 +17672,7 @@
                 <a:ea typeface="Arial" pitchFamily="34" charset="-122"/>
                 <a:cs typeface="Arial" pitchFamily="34" charset="-120"/>
               </a:rPr>
-              <a:t>4 نوفمبر</a:t>
+              <a:t>31 أكتوبر</a:t>
             </a:r>
             <a:endParaRPr lang="ar-SA" sz="700" dirty="0"/>
           </a:p>
@@ -17505,13 +17680,40 @@
       </p:sp>
       <p:sp>
         <p:nvSpPr>
-          <p:cNvPr id="310" name="Shape 308"/>
-          <p:cNvSpPr/>
-          <p:nvPr/>
-        </p:nvSpPr>
-        <p:spPr>
-          <a:xfrm>
-            <a:off x="3015729" y="4650814"/>
+          <p:cNvPr id="317" name="Shape 315"/>
+          <p:cNvSpPr/>
+          <p:nvPr/>
+        </p:nvSpPr>
+        <p:spPr>
+          <a:xfrm>
+            <a:off x="3015729" y="4766310"/>
+            <a:ext cx="1324985" cy="32004"/>
+          </a:xfrm>
+          <a:prstGeom prst="roundRect">
+            <a:avLst>
+              <a:gd name="adj" fmla="val 42857"/>
+            </a:avLst>
+          </a:prstGeom>
+          <a:solidFill>
+            <a:srgbClr val="8A959C"/>
+          </a:solidFill>
+          <a:ln w="12700">
+            <a:solidFill>
+              <a:srgbClr val="8A959C"/>
+            </a:solidFill>
+            <a:prstDash val="solid"/>
+          </a:ln>
+        </p:spPr>
+      </p:sp>
+      <p:sp>
+        <p:nvSpPr>
+          <p:cNvPr id="318" name="Shape 316"/>
+          <p:cNvSpPr/>
+          <p:nvPr/>
+        </p:nvSpPr>
+        <p:spPr>
+          <a:xfrm>
+            <a:off x="3497542" y="4650814"/>
             <a:ext cx="1324985" cy="125075"/>
           </a:xfrm>
           <a:prstGeom prst="roundRect">
@@ -17539,13 +17741,13 @@
       </p:sp>
       <p:sp>
         <p:nvSpPr>
-          <p:cNvPr id="311" name="Text 309"/>
-          <p:cNvSpPr/>
-          <p:nvPr/>
-        </p:nvSpPr>
-        <p:spPr>
-          <a:xfrm>
-            <a:off x="3015729" y="4650814"/>
+          <p:cNvPr id="319" name="Text 317"/>
+          <p:cNvSpPr/>
+          <p:nvPr/>
+        </p:nvSpPr>
+        <p:spPr>
+          <a:xfrm>
+            <a:off x="3497542" y="4650814"/>
             <a:ext cx="1324985" cy="125075"/>
           </a:xfrm>
           <a:prstGeom prst="rect">
@@ -17572,7 +17774,7 @@
                 <a:ea typeface="Arial" pitchFamily="34" charset="-122"/>
                 <a:cs typeface="Arial" pitchFamily="34" charset="-120"/>
               </a:rPr>
-              <a:t>10 يوم</a:t>
+              <a:t>9 يوم</a:t>
             </a:r>
             <a:endParaRPr lang="ar-SA" sz="700" dirty="0"/>
           </a:p>
@@ -17580,7 +17782,7 @@
       </p:sp>
       <p:sp>
         <p:nvSpPr>
-          <p:cNvPr id="312" name="Shape 310"/>
+          <p:cNvPr id="320" name="Shape 318"/>
           <p:cNvSpPr/>
           <p:nvPr/>
         </p:nvSpPr>
@@ -17605,7 +17807,7 @@
       </p:sp>
       <p:sp>
         <p:nvSpPr>
-          <p:cNvPr id="313" name="Shape 311"/>
+          <p:cNvPr id="321" name="Shape 319"/>
           <p:cNvSpPr/>
           <p:nvPr/>
         </p:nvSpPr>
@@ -17630,7 +17832,7 @@
       </p:sp>
       <p:sp>
         <p:nvSpPr>
-          <p:cNvPr id="314" name="Text 312"/>
+          <p:cNvPr id="322" name="Text 320"/>
           <p:cNvSpPr/>
           <p:nvPr/>
         </p:nvSpPr>
@@ -17671,7 +17873,7 @@
       </p:sp>
       <p:sp>
         <p:nvSpPr>
-          <p:cNvPr id="315" name="Text 313"/>
+          <p:cNvPr id="323" name="Text 321"/>
           <p:cNvSpPr/>
           <p:nvPr/>
         </p:nvSpPr>
@@ -17712,7 +17914,7 @@
       </p:sp>
       <p:sp>
         <p:nvSpPr>
-          <p:cNvPr id="316" name="Text 314"/>
+          <p:cNvPr id="324" name="Text 322"/>
           <p:cNvSpPr/>
           <p:nvPr/>
         </p:nvSpPr>
@@ -17753,7 +17955,7 @@
       </p:sp>
       <p:sp>
         <p:nvSpPr>
-          <p:cNvPr id="317" name="Text 315"/>
+          <p:cNvPr id="325" name="Text 323"/>
           <p:cNvSpPr/>
           <p:nvPr/>
         </p:nvSpPr>
@@ -17786,7 +17988,7 @@
                 <a:ea typeface="Arial" pitchFamily="34" charset="-122"/>
                 <a:cs typeface="Arial" pitchFamily="34" charset="-120"/>
               </a:rPr>
-              <a:t>6</a:t>
+              <a:t>5</a:t>
             </a:r>
             <a:endParaRPr lang="ar-SA" sz="900" dirty="0"/>
           </a:p>
@@ -17794,7 +17996,7 @@
       </p:sp>
       <p:sp>
         <p:nvSpPr>
-          <p:cNvPr id="318" name="Text 316"/>
+          <p:cNvPr id="326" name="Text 324"/>
           <p:cNvSpPr/>
           <p:nvPr/>
         </p:nvSpPr>
@@ -17827,7 +18029,7 @@
                 <a:ea typeface="Arial" pitchFamily="34" charset="-122"/>
                 <a:cs typeface="Arial" pitchFamily="34" charset="-120"/>
               </a:rPr>
-              <a:t>5 نوفمبر</a:t>
+              <a:t>1 نوفمبر</a:t>
             </a:r>
             <a:endParaRPr lang="ar-SA" sz="700" dirty="0"/>
           </a:p>
@@ -17835,7 +18037,7 @@
       </p:sp>
       <p:sp>
         <p:nvSpPr>
-          <p:cNvPr id="319" name="Text 317"/>
+          <p:cNvPr id="327" name="Text 325"/>
           <p:cNvSpPr/>
           <p:nvPr/>
         </p:nvSpPr>
@@ -17868,7 +18070,7 @@
                 <a:ea typeface="Arial" pitchFamily="34" charset="-122"/>
                 <a:cs typeface="Arial" pitchFamily="34" charset="-120"/>
               </a:rPr>
-              <a:t>11 نوفمبر</a:t>
+              <a:t>5 نوفمبر</a:t>
             </a:r>
             <a:endParaRPr lang="ar-SA" sz="700" dirty="0"/>
           </a:p>
@@ -17876,14 +18078,41 @@
       </p:sp>
       <p:sp>
         <p:nvSpPr>
-          <p:cNvPr id="320" name="Shape 318"/>
-          <p:cNvSpPr/>
-          <p:nvPr/>
-        </p:nvSpPr>
-        <p:spPr>
-          <a:xfrm>
-            <a:off x="2172557" y="4866460"/>
-            <a:ext cx="843172" cy="125075"/>
+          <p:cNvPr id="328" name="Shape 326"/>
+          <p:cNvSpPr/>
+          <p:nvPr/>
+        </p:nvSpPr>
+        <p:spPr>
+          <a:xfrm>
+            <a:off x="2172557" y="4981956"/>
+            <a:ext cx="843172" cy="32004"/>
+          </a:xfrm>
+          <a:prstGeom prst="roundRect">
+            <a:avLst>
+              <a:gd name="adj" fmla="val 42857"/>
+            </a:avLst>
+          </a:prstGeom>
+          <a:solidFill>
+            <a:srgbClr val="8A959C"/>
+          </a:solidFill>
+          <a:ln w="12700">
+            <a:solidFill>
+              <a:srgbClr val="8A959C"/>
+            </a:solidFill>
+            <a:prstDash val="solid"/>
+          </a:ln>
+        </p:spPr>
+      </p:sp>
+      <p:sp>
+        <p:nvSpPr>
+          <p:cNvPr id="329" name="Shape 327"/>
+          <p:cNvSpPr/>
+          <p:nvPr/>
+        </p:nvSpPr>
+        <p:spPr>
+          <a:xfrm>
+            <a:off x="2895276" y="4866460"/>
+            <a:ext cx="602266" cy="125075"/>
           </a:xfrm>
           <a:prstGeom prst="roundRect">
             <a:avLst>
@@ -17910,14 +18139,14 @@
       </p:sp>
       <p:sp>
         <p:nvSpPr>
-          <p:cNvPr id="321" name="Text 319"/>
-          <p:cNvSpPr/>
-          <p:nvPr/>
-        </p:nvSpPr>
-        <p:spPr>
-          <a:xfrm>
-            <a:off x="2172557" y="4866460"/>
-            <a:ext cx="843172" cy="125075"/>
+          <p:cNvPr id="330" name="Text 328"/>
+          <p:cNvSpPr/>
+          <p:nvPr/>
+        </p:nvSpPr>
+        <p:spPr>
+          <a:xfrm>
+            <a:off x="2895276" y="4866460"/>
+            <a:ext cx="602266" cy="125075"/>
           </a:xfrm>
           <a:prstGeom prst="rect">
             <a:avLst/>
@@ -17943,7 +18172,7 @@
                 <a:ea typeface="Arial" pitchFamily="34" charset="-122"/>
                 <a:cs typeface="Arial" pitchFamily="34" charset="-120"/>
               </a:rPr>
-              <a:t>6 يوم</a:t>
+              <a:t>5 يوم</a:t>
             </a:r>
             <a:endParaRPr lang="ar-SA" sz="700" dirty="0"/>
           </a:p>
@@ -17951,7 +18180,7 @@
       </p:sp>
       <p:sp>
         <p:nvSpPr>
-          <p:cNvPr id="322" name="Shape 320"/>
+          <p:cNvPr id="331" name="Shape 329"/>
           <p:cNvSpPr/>
           <p:nvPr/>
         </p:nvSpPr>
@@ -17976,7 +18205,7 @@
       </p:sp>
       <p:sp>
         <p:nvSpPr>
-          <p:cNvPr id="323" name="Shape 321"/>
+          <p:cNvPr id="332" name="Shape 330"/>
           <p:cNvSpPr/>
           <p:nvPr/>
         </p:nvSpPr>
@@ -18001,7 +18230,7 @@
       </p:sp>
       <p:sp>
         <p:nvSpPr>
-          <p:cNvPr id="324" name="Text 322"/>
+          <p:cNvPr id="333" name="Text 331"/>
           <p:cNvSpPr/>
           <p:nvPr/>
         </p:nvSpPr>
@@ -18042,7 +18271,7 @@
       </p:sp>
       <p:sp>
         <p:nvSpPr>
-          <p:cNvPr id="325" name="Text 323"/>
+          <p:cNvPr id="334" name="Text 332"/>
           <p:cNvSpPr/>
           <p:nvPr/>
         </p:nvSpPr>
@@ -18083,7 +18312,7 @@
       </p:sp>
       <p:sp>
         <p:nvSpPr>
-          <p:cNvPr id="326" name="Text 324"/>
+          <p:cNvPr id="335" name="Text 333"/>
           <p:cNvSpPr/>
           <p:nvPr/>
         </p:nvSpPr>
@@ -18124,7 +18353,7 @@
       </p:sp>
       <p:sp>
         <p:nvSpPr>
-          <p:cNvPr id="327" name="Text 325"/>
+          <p:cNvPr id="336" name="Text 334"/>
           <p:cNvSpPr/>
           <p:nvPr/>
         </p:nvSpPr>
@@ -18165,7 +18394,7 @@
       </p:sp>
       <p:sp>
         <p:nvSpPr>
-          <p:cNvPr id="328" name="Text 326"/>
+          <p:cNvPr id="337" name="Text 335"/>
           <p:cNvSpPr/>
           <p:nvPr/>
         </p:nvSpPr>
@@ -18198,7 +18427,7 @@
                 <a:ea typeface="Arial" pitchFamily="34" charset="-122"/>
                 <a:cs typeface="Arial" pitchFamily="34" charset="-120"/>
               </a:rPr>
-              <a:t>5 نوفمبر</a:t>
+              <a:t>1 نوفمبر</a:t>
             </a:r>
             <a:endParaRPr lang="ar-SA" sz="700" dirty="0"/>
           </a:p>
@@ -18206,7 +18435,7 @@
       </p:sp>
       <p:sp>
         <p:nvSpPr>
-          <p:cNvPr id="329" name="Text 327"/>
+          <p:cNvPr id="338" name="Text 336"/>
           <p:cNvSpPr/>
           <p:nvPr/>
         </p:nvSpPr>
@@ -18239,7 +18468,7 @@
                 <a:ea typeface="Arial" pitchFamily="34" charset="-122"/>
                 <a:cs typeface="Arial" pitchFamily="34" charset="-120"/>
               </a:rPr>
-              <a:t>18 نوفمبر</a:t>
+              <a:t>14 نوفمبر</a:t>
             </a:r>
             <a:endParaRPr lang="ar-SA" sz="700" dirty="0"/>
           </a:p>
@@ -18247,13 +18476,40 @@
       </p:sp>
       <p:sp>
         <p:nvSpPr>
-          <p:cNvPr id="330" name="Shape 328"/>
-          <p:cNvSpPr/>
-          <p:nvPr/>
-        </p:nvSpPr>
-        <p:spPr>
-          <a:xfrm>
-            <a:off x="1329385" y="5082106"/>
+          <p:cNvPr id="339" name="Shape 337"/>
+          <p:cNvSpPr/>
+          <p:nvPr/>
+        </p:nvSpPr>
+        <p:spPr>
+          <a:xfrm>
+            <a:off x="1329385" y="5197602"/>
+            <a:ext cx="1686344" cy="32004"/>
+          </a:xfrm>
+          <a:prstGeom prst="roundRect">
+            <a:avLst>
+              <a:gd name="adj" fmla="val 42857"/>
+            </a:avLst>
+          </a:prstGeom>
+          <a:solidFill>
+            <a:srgbClr val="8A959C"/>
+          </a:solidFill>
+          <a:ln w="12700">
+            <a:solidFill>
+              <a:srgbClr val="8A959C"/>
+            </a:solidFill>
+            <a:prstDash val="solid"/>
+          </a:ln>
+        </p:spPr>
+      </p:sp>
+      <p:sp>
+        <p:nvSpPr>
+          <p:cNvPr id="340" name="Shape 338"/>
+          <p:cNvSpPr/>
+          <p:nvPr/>
+        </p:nvSpPr>
+        <p:spPr>
+          <a:xfrm>
+            <a:off x="1811198" y="5082106"/>
             <a:ext cx="1686344" cy="125075"/>
           </a:xfrm>
           <a:prstGeom prst="roundRect">
@@ -18281,13 +18537,13 @@
       </p:sp>
       <p:sp>
         <p:nvSpPr>
-          <p:cNvPr id="331" name="Text 329"/>
-          <p:cNvSpPr/>
-          <p:nvPr/>
-        </p:nvSpPr>
-        <p:spPr>
-          <a:xfrm>
-            <a:off x="1329385" y="5082106"/>
+          <p:cNvPr id="341" name="Text 339"/>
+          <p:cNvSpPr/>
+          <p:nvPr/>
+        </p:nvSpPr>
+        <p:spPr>
+          <a:xfrm>
+            <a:off x="1811198" y="5082106"/>
             <a:ext cx="1686344" cy="125075"/>
           </a:xfrm>
           <a:prstGeom prst="rect">
@@ -18322,7 +18578,7 @@
       </p:sp>
       <p:sp>
         <p:nvSpPr>
-          <p:cNvPr id="332" name="Shape 330"/>
+          <p:cNvPr id="342" name="Shape 340"/>
           <p:cNvSpPr/>
           <p:nvPr/>
         </p:nvSpPr>
@@ -18347,7 +18603,7 @@
       </p:sp>
       <p:sp>
         <p:nvSpPr>
-          <p:cNvPr id="333" name="Shape 331"/>
+          <p:cNvPr id="343" name="Shape 341"/>
           <p:cNvSpPr/>
           <p:nvPr/>
         </p:nvSpPr>
@@ -18372,7 +18628,7 @@
       </p:sp>
       <p:sp>
         <p:nvSpPr>
-          <p:cNvPr id="334" name="Text 332"/>
+          <p:cNvPr id="344" name="Text 342"/>
           <p:cNvSpPr/>
           <p:nvPr/>
         </p:nvSpPr>
@@ -18413,7 +18669,7 @@
       </p:sp>
       <p:sp>
         <p:nvSpPr>
-          <p:cNvPr id="335" name="Text 333"/>
+          <p:cNvPr id="345" name="Text 343"/>
           <p:cNvSpPr/>
           <p:nvPr/>
         </p:nvSpPr>
@@ -18454,7 +18710,7 @@
       </p:sp>
       <p:sp>
         <p:nvSpPr>
-          <p:cNvPr id="336" name="Text 334"/>
+          <p:cNvPr id="346" name="Text 344"/>
           <p:cNvSpPr/>
           <p:nvPr/>
         </p:nvSpPr>
@@ -18495,7 +18751,7 @@
       </p:sp>
       <p:sp>
         <p:nvSpPr>
-          <p:cNvPr id="337" name="Text 335"/>
+          <p:cNvPr id="347" name="Text 345"/>
           <p:cNvSpPr/>
           <p:nvPr/>
         </p:nvSpPr>
@@ -18536,7 +18792,7 @@
       </p:sp>
       <p:sp>
         <p:nvSpPr>
-          <p:cNvPr id="338" name="Text 336"/>
+          <p:cNvPr id="348" name="Text 346"/>
           <p:cNvSpPr/>
           <p:nvPr/>
         </p:nvSpPr>
@@ -18569,7 +18825,7 @@
                 <a:ea typeface="Arial" pitchFamily="34" charset="-122"/>
                 <a:cs typeface="Arial" pitchFamily="34" charset="-120"/>
               </a:rPr>
-              <a:t>19 نوفمبر</a:t>
+              <a:t>15 نوفمبر</a:t>
             </a:r>
             <a:endParaRPr lang="ar-SA" sz="700" dirty="0"/>
           </a:p>
@@ -18577,7 +18833,7 @@
       </p:sp>
       <p:sp>
         <p:nvSpPr>
-          <p:cNvPr id="339" name="Text 337"/>
+          <p:cNvPr id="349" name="Text 347"/>
           <p:cNvSpPr/>
           <p:nvPr/>
         </p:nvSpPr>
@@ -18610,7 +18866,7 @@
                 <a:ea typeface="Arial" pitchFamily="34" charset="-122"/>
                 <a:cs typeface="Arial" pitchFamily="34" charset="-120"/>
               </a:rPr>
-              <a:t>24 نوفمبر</a:t>
+              <a:t>19 نوفمبر</a:t>
             </a:r>
             <a:endParaRPr lang="ar-SA" sz="700" dirty="0"/>
           </a:p>
@@ -18618,14 +18874,41 @@
       </p:sp>
       <p:sp>
         <p:nvSpPr>
-          <p:cNvPr id="340" name="Shape 338"/>
-          <p:cNvSpPr/>
-          <p:nvPr/>
-        </p:nvSpPr>
-        <p:spPr>
-          <a:xfrm>
-            <a:off x="606666" y="5297752"/>
-            <a:ext cx="722719" cy="125075"/>
+          <p:cNvPr id="350" name="Shape 348"/>
+          <p:cNvSpPr/>
+          <p:nvPr/>
+        </p:nvSpPr>
+        <p:spPr>
+          <a:xfrm>
+            <a:off x="606666" y="5413248"/>
+            <a:ext cx="722719" cy="32004"/>
+          </a:xfrm>
+          <a:prstGeom prst="roundRect">
+            <a:avLst>
+              <a:gd name="adj" fmla="val 42857"/>
+            </a:avLst>
+          </a:prstGeom>
+          <a:solidFill>
+            <a:srgbClr val="8A959C"/>
+          </a:solidFill>
+          <a:ln w="12700">
+            <a:solidFill>
+              <a:srgbClr val="8A959C"/>
+            </a:solidFill>
+            <a:prstDash val="solid"/>
+          </a:ln>
+        </p:spPr>
+      </p:sp>
+      <p:sp>
+        <p:nvSpPr>
+          <p:cNvPr id="351" name="Shape 349"/>
+          <p:cNvSpPr/>
+          <p:nvPr/>
+        </p:nvSpPr>
+        <p:spPr>
+          <a:xfrm>
+            <a:off x="1208932" y="5297752"/>
+            <a:ext cx="602266" cy="125075"/>
           </a:xfrm>
           <a:prstGeom prst="roundRect">
             <a:avLst>
@@ -18652,14 +18935,14 @@
       </p:sp>
       <p:sp>
         <p:nvSpPr>
-          <p:cNvPr id="341" name="Text 339"/>
-          <p:cNvSpPr/>
-          <p:nvPr/>
-        </p:nvSpPr>
-        <p:spPr>
-          <a:xfrm>
-            <a:off x="606666" y="5297752"/>
-            <a:ext cx="722719" cy="125075"/>
+          <p:cNvPr id="352" name="Text 350"/>
+          <p:cNvSpPr/>
+          <p:nvPr/>
+        </p:nvSpPr>
+        <p:spPr>
+          <a:xfrm>
+            <a:off x="1208932" y="5297752"/>
+            <a:ext cx="602266" cy="125075"/>
           </a:xfrm>
           <a:prstGeom prst="rect">
             <a:avLst/>
@@ -18693,7 +18976,7 @@
       </p:sp>
       <p:sp>
         <p:nvSpPr>
-          <p:cNvPr id="342" name="Shape 340"/>
+          <p:cNvPr id="353" name="Shape 351"/>
           <p:cNvSpPr/>
           <p:nvPr/>
         </p:nvSpPr>
@@ -18716,7 +18999,7 @@
       </p:sp>
       <p:sp>
         <p:nvSpPr>
-          <p:cNvPr id="343" name="Shape 341"/>
+          <p:cNvPr id="354" name="Shape 352"/>
           <p:cNvSpPr/>
           <p:nvPr/>
         </p:nvSpPr>
@@ -18740,7 +19023,7 @@
       </p:sp>
       <p:sp>
         <p:nvSpPr>
-          <p:cNvPr id="344" name="Shape 342"/>
+          <p:cNvPr id="355" name="Shape 353"/>
           <p:cNvSpPr/>
           <p:nvPr/>
         </p:nvSpPr>
@@ -18763,7 +19046,7 @@
       </p:sp>
       <p:sp>
         <p:nvSpPr>
-          <p:cNvPr id="345" name="Shape 343"/>
+          <p:cNvPr id="356" name="Shape 354"/>
           <p:cNvSpPr/>
           <p:nvPr/>
         </p:nvSpPr>
@@ -18787,7 +19070,7 @@
       </p:sp>
       <p:sp>
         <p:nvSpPr>
-          <p:cNvPr id="346" name="Shape 344"/>
+          <p:cNvPr id="357" name="Shape 355"/>
           <p:cNvSpPr/>
           <p:nvPr/>
         </p:nvSpPr>
@@ -18810,7 +19093,7 @@
       </p:sp>
       <p:sp>
         <p:nvSpPr>
-          <p:cNvPr id="347" name="Shape 345"/>
+          <p:cNvPr id="358" name="Shape 356"/>
           <p:cNvSpPr/>
           <p:nvPr/>
         </p:nvSpPr>
@@ -18834,7 +19117,7 @@
       </p:sp>
       <p:sp>
         <p:nvSpPr>
-          <p:cNvPr id="348" name="Shape 346"/>
+          <p:cNvPr id="359" name="Shape 357"/>
           <p:cNvSpPr/>
           <p:nvPr/>
         </p:nvSpPr>
@@ -18857,14 +19140,14 @@
       </p:sp>
       <p:sp>
         <p:nvSpPr>
-          <p:cNvPr id="349" name="Shape 347"/>
+          <p:cNvPr id="360" name="Shape 358"/>
           <p:cNvSpPr/>
           <p:nvPr/>
         </p:nvSpPr>
         <p:spPr>
           <a:xfrm flipH="1">
-            <a:off x="5193030" y="4066413"/>
-            <a:ext cx="56445" cy="0"/>
+            <a:off x="5249475" y="4066413"/>
+            <a:ext cx="64008" cy="0"/>
           </a:xfrm>
           <a:prstGeom prst="line">
             <a:avLst/>
@@ -18881,7 +19164,7 @@
       </p:sp>
       <p:sp>
         <p:nvSpPr>
-          <p:cNvPr id="350" name="Shape 348"/>
+          <p:cNvPr id="361" name="Shape 359"/>
           <p:cNvSpPr/>
           <p:nvPr/>
         </p:nvSpPr>
@@ -18904,14 +19187,14 @@
       </p:sp>
       <p:sp>
         <p:nvSpPr>
-          <p:cNvPr id="351" name="Shape 349"/>
+          <p:cNvPr id="362" name="Shape 360"/>
           <p:cNvSpPr/>
           <p:nvPr/>
         </p:nvSpPr>
         <p:spPr>
           <a:xfrm flipH="1">
-            <a:off x="4952124" y="4282059"/>
-            <a:ext cx="779164" cy="0"/>
+            <a:off x="5193030" y="4282059"/>
+            <a:ext cx="538258" cy="0"/>
           </a:xfrm>
           <a:prstGeom prst="line">
             <a:avLst/>
@@ -18928,13 +19211,13 @@
       </p:sp>
       <p:sp>
         <p:nvSpPr>
-          <p:cNvPr id="352" name="Shape 350"/>
-          <p:cNvSpPr/>
-          <p:nvPr/>
-        </p:nvSpPr>
-        <p:spPr>
-          <a:xfrm>
-            <a:off x="4942980" y="2988183"/>
+          <p:cNvPr id="363" name="Shape 361"/>
+          <p:cNvSpPr/>
+          <p:nvPr/>
+        </p:nvSpPr>
+        <p:spPr>
+          <a:xfrm>
+            <a:off x="5183886" y="2988183"/>
             <a:ext cx="45720" cy="0"/>
           </a:xfrm>
           <a:prstGeom prst="line">
@@ -18951,13 +19234,13 @@
       </p:sp>
       <p:sp>
         <p:nvSpPr>
-          <p:cNvPr id="353" name="Shape 351"/>
-          <p:cNvSpPr/>
-          <p:nvPr/>
-        </p:nvSpPr>
-        <p:spPr>
-          <a:xfrm>
-            <a:off x="4988700" y="2988183"/>
+          <p:cNvPr id="364" name="Shape 362"/>
+          <p:cNvSpPr/>
+          <p:nvPr/>
+        </p:nvSpPr>
+        <p:spPr>
+          <a:xfrm>
+            <a:off x="5229606" y="2988183"/>
             <a:ext cx="0" cy="1509522"/>
           </a:xfrm>
           <a:prstGeom prst="line">
@@ -18974,13 +19257,13 @@
       </p:sp>
       <p:sp>
         <p:nvSpPr>
-          <p:cNvPr id="354" name="Shape 352"/>
+          <p:cNvPr id="365" name="Shape 363"/>
           <p:cNvSpPr/>
           <p:nvPr/>
         </p:nvSpPr>
         <p:spPr>
           <a:xfrm flipH="1">
-            <a:off x="4952124" y="4497705"/>
+            <a:off x="5193030" y="4497705"/>
             <a:ext cx="36576" cy="0"/>
           </a:xfrm>
           <a:prstGeom prst="line">
@@ -18998,13 +19281,13 @@
       </p:sp>
       <p:sp>
         <p:nvSpPr>
-          <p:cNvPr id="355" name="Shape 353"/>
-          <p:cNvSpPr/>
-          <p:nvPr/>
-        </p:nvSpPr>
-        <p:spPr>
-          <a:xfrm>
-            <a:off x="4340714" y="4497705"/>
+          <p:cNvPr id="366" name="Shape 364"/>
+          <p:cNvSpPr/>
+          <p:nvPr/>
+        </p:nvSpPr>
+        <p:spPr>
+          <a:xfrm>
+            <a:off x="4822527" y="4497705"/>
             <a:ext cx="45720" cy="0"/>
           </a:xfrm>
           <a:prstGeom prst="line">
@@ -19021,13 +19304,13 @@
       </p:sp>
       <p:sp>
         <p:nvSpPr>
-          <p:cNvPr id="356" name="Shape 354"/>
-          <p:cNvSpPr/>
-          <p:nvPr/>
-        </p:nvSpPr>
-        <p:spPr>
-          <a:xfrm>
-            <a:off x="4386434" y="4497705"/>
+          <p:cNvPr id="367" name="Shape 365"/>
+          <p:cNvSpPr/>
+          <p:nvPr/>
+        </p:nvSpPr>
+        <p:spPr>
+          <a:xfrm>
+            <a:off x="4868247" y="4497705"/>
             <a:ext cx="0" cy="215646"/>
           </a:xfrm>
           <a:prstGeom prst="line">
@@ -19044,13 +19327,13 @@
       </p:sp>
       <p:sp>
         <p:nvSpPr>
-          <p:cNvPr id="357" name="Shape 355"/>
+          <p:cNvPr id="368" name="Shape 366"/>
           <p:cNvSpPr/>
           <p:nvPr/>
         </p:nvSpPr>
         <p:spPr>
           <a:xfrm flipH="1">
-            <a:off x="4349858" y="4713351"/>
+            <a:off x="4831671" y="4713351"/>
             <a:ext cx="36576" cy="0"/>
           </a:xfrm>
           <a:prstGeom prst="line">
@@ -19068,13 +19351,13 @@
       </p:sp>
       <p:sp>
         <p:nvSpPr>
-          <p:cNvPr id="358" name="Shape 356"/>
-          <p:cNvSpPr/>
-          <p:nvPr/>
-        </p:nvSpPr>
-        <p:spPr>
-          <a:xfrm>
-            <a:off x="3015729" y="4713351"/>
+          <p:cNvPr id="369" name="Shape 367"/>
+          <p:cNvSpPr/>
+          <p:nvPr/>
+        </p:nvSpPr>
+        <p:spPr>
+          <a:xfrm>
+            <a:off x="3497542" y="4713351"/>
             <a:ext cx="45720" cy="0"/>
           </a:xfrm>
           <a:prstGeom prst="line">
@@ -19091,13 +19374,13 @@
       </p:sp>
       <p:sp>
         <p:nvSpPr>
-          <p:cNvPr id="359" name="Shape 357"/>
-          <p:cNvSpPr/>
-          <p:nvPr/>
-        </p:nvSpPr>
-        <p:spPr>
-          <a:xfrm>
-            <a:off x="3061449" y="4713351"/>
+          <p:cNvPr id="370" name="Shape 368"/>
+          <p:cNvSpPr/>
+          <p:nvPr/>
+        </p:nvSpPr>
+        <p:spPr>
+          <a:xfrm>
+            <a:off x="3543262" y="4713351"/>
             <a:ext cx="0" cy="215646"/>
           </a:xfrm>
           <a:prstGeom prst="line">
@@ -19114,13 +19397,13 @@
       </p:sp>
       <p:sp>
         <p:nvSpPr>
-          <p:cNvPr id="360" name="Shape 358"/>
+          <p:cNvPr id="371" name="Shape 369"/>
           <p:cNvSpPr/>
           <p:nvPr/>
         </p:nvSpPr>
         <p:spPr>
           <a:xfrm flipH="1">
-            <a:off x="3024873" y="4928997"/>
+            <a:off x="3506686" y="4928997"/>
             <a:ext cx="36576" cy="0"/>
           </a:xfrm>
           <a:prstGeom prst="line">
@@ -19138,13 +19421,13 @@
       </p:sp>
       <p:sp>
         <p:nvSpPr>
-          <p:cNvPr id="361" name="Shape 359"/>
-          <p:cNvSpPr/>
-          <p:nvPr/>
-        </p:nvSpPr>
-        <p:spPr>
-          <a:xfrm>
-            <a:off x="3015729" y="4713351"/>
+          <p:cNvPr id="372" name="Shape 370"/>
+          <p:cNvSpPr/>
+          <p:nvPr/>
+        </p:nvSpPr>
+        <p:spPr>
+          <a:xfrm>
+            <a:off x="3497542" y="4713351"/>
             <a:ext cx="45720" cy="0"/>
           </a:xfrm>
           <a:prstGeom prst="line">
@@ -19161,13 +19444,13 @@
       </p:sp>
       <p:sp>
         <p:nvSpPr>
-          <p:cNvPr id="362" name="Shape 360"/>
-          <p:cNvSpPr/>
-          <p:nvPr/>
-        </p:nvSpPr>
-        <p:spPr>
-          <a:xfrm>
-            <a:off x="3061449" y="4713351"/>
+          <p:cNvPr id="373" name="Shape 371"/>
+          <p:cNvSpPr/>
+          <p:nvPr/>
+        </p:nvSpPr>
+        <p:spPr>
+          <a:xfrm>
+            <a:off x="3543262" y="4713351"/>
             <a:ext cx="0" cy="431292"/>
           </a:xfrm>
           <a:prstGeom prst="line">
@@ -19184,13 +19467,13 @@
       </p:sp>
       <p:sp>
         <p:nvSpPr>
-          <p:cNvPr id="363" name="Shape 361"/>
+          <p:cNvPr id="374" name="Shape 372"/>
           <p:cNvSpPr/>
           <p:nvPr/>
         </p:nvSpPr>
         <p:spPr>
           <a:xfrm flipH="1">
-            <a:off x="3024873" y="5144643"/>
+            <a:off x="3506686" y="5144643"/>
             <a:ext cx="36576" cy="0"/>
           </a:xfrm>
           <a:prstGeom prst="line">
@@ -19208,13 +19491,13 @@
       </p:sp>
       <p:sp>
         <p:nvSpPr>
-          <p:cNvPr id="364" name="Shape 362"/>
-          <p:cNvSpPr/>
-          <p:nvPr/>
-        </p:nvSpPr>
-        <p:spPr>
-          <a:xfrm>
-            <a:off x="1329385" y="5144643"/>
+          <p:cNvPr id="375" name="Shape 373"/>
+          <p:cNvSpPr/>
+          <p:nvPr/>
+        </p:nvSpPr>
+        <p:spPr>
+          <a:xfrm>
+            <a:off x="1811198" y="5144643"/>
             <a:ext cx="45720" cy="0"/>
           </a:xfrm>
           <a:prstGeom prst="line">
@@ -19231,13 +19514,13 @@
       </p:sp>
       <p:sp>
         <p:nvSpPr>
-          <p:cNvPr id="365" name="Shape 363"/>
-          <p:cNvSpPr/>
-          <p:nvPr/>
-        </p:nvSpPr>
-        <p:spPr>
-          <a:xfrm>
-            <a:off x="1375105" y="5144643"/>
+          <p:cNvPr id="376" name="Shape 374"/>
+          <p:cNvSpPr/>
+          <p:nvPr/>
+        </p:nvSpPr>
+        <p:spPr>
+          <a:xfrm>
+            <a:off x="1856918" y="5144643"/>
             <a:ext cx="0" cy="215646"/>
           </a:xfrm>
           <a:prstGeom prst="line">
@@ -19254,13 +19537,13 @@
       </p:sp>
       <p:sp>
         <p:nvSpPr>
-          <p:cNvPr id="366" name="Shape 364"/>
+          <p:cNvPr id="377" name="Shape 375"/>
           <p:cNvSpPr/>
           <p:nvPr/>
         </p:nvSpPr>
         <p:spPr>
           <a:xfrm flipH="1">
-            <a:off x="1338529" y="5360289"/>
+            <a:off x="1820342" y="5360289"/>
             <a:ext cx="36576" cy="0"/>
           </a:xfrm>
           <a:prstGeom prst="line">
@@ -19278,7 +19561,7 @@
       </p:sp>
       <p:sp>
         <p:nvSpPr>
-          <p:cNvPr id="367" name="Shape 365"/>
+          <p:cNvPr id="378" name="Shape 376"/>
           <p:cNvSpPr/>
           <p:nvPr/>
         </p:nvSpPr>
@@ -19301,7 +19584,7 @@
       </p:sp>
       <p:sp>
         <p:nvSpPr>
-          <p:cNvPr id="368" name="Shape 366"/>
+          <p:cNvPr id="379" name="Shape 377"/>
           <p:cNvSpPr/>
           <p:nvPr/>
         </p:nvSpPr>
@@ -19328,7 +19611,7 @@
       </p:sp>
       <p:sp>
         <p:nvSpPr>
-          <p:cNvPr id="369" name="Text 367"/>
+          <p:cNvPr id="380" name="Text 378"/>
           <p:cNvSpPr/>
           <p:nvPr/>
         </p:nvSpPr>
@@ -19369,7 +19652,7 @@
       </p:sp>
       <p:sp>
         <p:nvSpPr>
-          <p:cNvPr id="370" name="Shape 368"/>
+          <p:cNvPr id="381" name="Shape 379"/>
           <p:cNvSpPr/>
           <p:nvPr/>
         </p:nvSpPr>
@@ -19396,7 +19679,7 @@
       </p:sp>
       <p:sp>
         <p:nvSpPr>
-          <p:cNvPr id="371" name="Shape 369"/>
+          <p:cNvPr id="382" name="Shape 380"/>
           <p:cNvSpPr/>
           <p:nvPr/>
         </p:nvSpPr>
@@ -19430,7 +19713,7 @@
       </p:sp>
       <p:sp>
         <p:nvSpPr>
-          <p:cNvPr id="372" name="Shape 370"/>
+          <p:cNvPr id="383" name="Shape 381"/>
           <p:cNvSpPr/>
           <p:nvPr/>
         </p:nvSpPr>
@@ -19455,7 +19738,7 @@
       </p:sp>
       <p:sp>
         <p:nvSpPr>
-          <p:cNvPr id="373" name="Text 371"/>
+          <p:cNvPr id="384" name="Text 382"/>
           <p:cNvSpPr/>
           <p:nvPr/>
         </p:nvSpPr>
@@ -19496,7 +19779,7 @@
       </p:sp>
       <p:sp>
         <p:nvSpPr>
-          <p:cNvPr id="374" name="Text 372"/>
+          <p:cNvPr id="385" name="Text 383"/>
           <p:cNvSpPr/>
           <p:nvPr/>
         </p:nvSpPr>
@@ -19537,7 +19820,7 @@
       </p:sp>
       <p:sp>
         <p:nvSpPr>
-          <p:cNvPr id="375" name="Text 373"/>
+          <p:cNvPr id="386" name="Text 384"/>
           <p:cNvSpPr/>
           <p:nvPr/>
         </p:nvSpPr>
@@ -19570,7 +19853,7 @@
                 <a:ea typeface="Arial" pitchFamily="34" charset="-122"/>
                 <a:cs typeface="Arial" pitchFamily="34" charset="-120"/>
               </a:rPr>
-              <a:t>يوم العمل 1 / 37</a:t>
+              <a:t>يوم العمل 1 / 33</a:t>
             </a:r>
             <a:endParaRPr lang="ar-SA" sz="750" dirty="0"/>
           </a:p>
@@ -19578,7 +19861,7 @@
       </p:sp>
       <p:sp>
         <p:nvSpPr>
-          <p:cNvPr id="376" name="Shape 374"/>
+          <p:cNvPr id="387" name="Shape 385"/>
           <p:cNvSpPr/>
           <p:nvPr/>
         </p:nvSpPr>
@@ -19612,7 +19895,7 @@
       </p:sp>
       <p:sp>
         <p:nvSpPr>
-          <p:cNvPr id="377" name="Shape 375"/>
+          <p:cNvPr id="388" name="Shape 386"/>
           <p:cNvSpPr/>
           <p:nvPr/>
         </p:nvSpPr>
@@ -19637,7 +19920,7 @@
       </p:sp>
       <p:sp>
         <p:nvSpPr>
-          <p:cNvPr id="378" name="Text 376"/>
+          <p:cNvPr id="389" name="Text 387"/>
           <p:cNvSpPr/>
           <p:nvPr/>
         </p:nvSpPr>
@@ -19678,7 +19961,7 @@
       </p:sp>
       <p:sp>
         <p:nvSpPr>
-          <p:cNvPr id="379" name="Text 377"/>
+          <p:cNvPr id="390" name="Text 388"/>
           <p:cNvSpPr/>
           <p:nvPr/>
         </p:nvSpPr>
@@ -19711,7 +19994,7 @@
                 <a:ea typeface="Arial" pitchFamily="34" charset="-122"/>
                 <a:cs typeface="Arial" pitchFamily="34" charset="-120"/>
               </a:rPr>
-              <a:t>اثنين 19 أكتوبر 2026</a:t>
+              <a:t>سبت 17 أكتوبر 2026</a:t>
             </a:r>
             <a:endParaRPr lang="ar-SA" sz="1300" dirty="0"/>
           </a:p>
@@ -19719,7 +20002,7 @@
       </p:sp>
       <p:sp>
         <p:nvSpPr>
-          <p:cNvPr id="380" name="Text 378"/>
+          <p:cNvPr id="391" name="Text 389"/>
           <p:cNvSpPr/>
           <p:nvPr/>
         </p:nvSpPr>
@@ -19752,7 +20035,7 @@
                 <a:ea typeface="Arial" pitchFamily="34" charset="-122"/>
                 <a:cs typeface="Arial" pitchFamily="34" charset="-120"/>
               </a:rPr>
-              <a:t>يوم العمل 6 / 37</a:t>
+              <a:t>يوم العمل 4 / 33</a:t>
             </a:r>
             <a:endParaRPr lang="ar-SA" sz="750" dirty="0"/>
           </a:p>
@@ -19760,7 +20043,7 @@
       </p:sp>
       <p:sp>
         <p:nvSpPr>
-          <p:cNvPr id="381" name="Shape 379"/>
+          <p:cNvPr id="392" name="Shape 390"/>
           <p:cNvSpPr/>
           <p:nvPr/>
         </p:nvSpPr>
@@ -19794,7 +20077,7 @@
       </p:sp>
       <p:sp>
         <p:nvSpPr>
-          <p:cNvPr id="382" name="Shape 380"/>
+          <p:cNvPr id="393" name="Shape 391"/>
           <p:cNvSpPr/>
           <p:nvPr/>
         </p:nvSpPr>
@@ -19819,7 +20102,7 @@
       </p:sp>
       <p:sp>
         <p:nvSpPr>
-          <p:cNvPr id="383" name="Text 381"/>
+          <p:cNvPr id="394" name="Text 392"/>
           <p:cNvSpPr/>
           <p:nvPr/>
         </p:nvSpPr>
@@ -19860,7 +20143,7 @@
       </p:sp>
       <p:sp>
         <p:nvSpPr>
-          <p:cNvPr id="384" name="Text 382"/>
+          <p:cNvPr id="395" name="Text 393"/>
           <p:cNvSpPr/>
           <p:nvPr/>
         </p:nvSpPr>
@@ -19893,7 +20176,7 @@
                 <a:ea typeface="Arial" pitchFamily="34" charset="-122"/>
                 <a:cs typeface="Arial" pitchFamily="34" charset="-120"/>
               </a:rPr>
-              <a:t>أربعاء 11 نوفمبر 2026</a:t>
+              <a:t>خميس 5 نوفمبر 2026</a:t>
             </a:r>
             <a:endParaRPr lang="ar-SA" sz="1300" dirty="0"/>
           </a:p>
@@ -19901,7 +20184,7 @@
       </p:sp>
       <p:sp>
         <p:nvSpPr>
-          <p:cNvPr id="385" name="Text 383"/>
+          <p:cNvPr id="396" name="Text 394"/>
           <p:cNvSpPr/>
           <p:nvPr/>
         </p:nvSpPr>
@@ -19934,7 +20217,7 @@
                 <a:ea typeface="Arial" pitchFamily="34" charset="-122"/>
                 <a:cs typeface="Arial" pitchFamily="34" charset="-120"/>
               </a:rPr>
-              <a:t>يوم العمل 26 / 37</a:t>
+              <a:t>يوم العمل 21 / 33</a:t>
             </a:r>
             <a:endParaRPr lang="ar-SA" sz="750" dirty="0"/>
           </a:p>
@@ -19942,7 +20225,7 @@
       </p:sp>
       <p:sp>
         <p:nvSpPr>
-          <p:cNvPr id="386" name="Shape 384"/>
+          <p:cNvPr id="397" name="Shape 395"/>
           <p:cNvSpPr/>
           <p:nvPr/>
         </p:nvSpPr>
@@ -19976,7 +20259,7 @@
       </p:sp>
       <p:sp>
         <p:nvSpPr>
-          <p:cNvPr id="387" name="Shape 385"/>
+          <p:cNvPr id="398" name="Shape 396"/>
           <p:cNvSpPr/>
           <p:nvPr/>
         </p:nvSpPr>
@@ -20001,7 +20284,7 @@
       </p:sp>
       <p:sp>
         <p:nvSpPr>
-          <p:cNvPr id="388" name="Text 386"/>
+          <p:cNvPr id="399" name="Text 397"/>
           <p:cNvSpPr/>
           <p:nvPr/>
         </p:nvSpPr>
@@ -20042,7 +20325,7 @@
       </p:sp>
       <p:sp>
         <p:nvSpPr>
-          <p:cNvPr id="389" name="Text 387"/>
+          <p:cNvPr id="400" name="Text 398"/>
           <p:cNvSpPr/>
           <p:nvPr/>
         </p:nvSpPr>
@@ -20075,7 +20358,7 @@
                 <a:ea typeface="Arial" pitchFamily="34" charset="-122"/>
                 <a:cs typeface="Arial" pitchFamily="34" charset="-120"/>
               </a:rPr>
-              <a:t>أربعاء 18 نوفمبر 2026</a:t>
+              <a:t>سبت 14 نوفمبر 2026</a:t>
             </a:r>
             <a:endParaRPr lang="ar-SA" sz="1300" dirty="0"/>
           </a:p>
@@ -20083,7 +20366,7 @@
       </p:sp>
       <p:sp>
         <p:nvSpPr>
-          <p:cNvPr id="390" name="Text 388"/>
+          <p:cNvPr id="401" name="Text 399"/>
           <p:cNvSpPr/>
           <p:nvPr/>
         </p:nvSpPr>
@@ -20116,7 +20399,7 @@
                 <a:ea typeface="Arial" pitchFamily="34" charset="-122"/>
                 <a:cs typeface="Arial" pitchFamily="34" charset="-120"/>
               </a:rPr>
-              <a:t>يوم العمل 32 / 37</a:t>
+              <a:t>يوم العمل 28 / 33</a:t>
             </a:r>
             <a:endParaRPr lang="ar-SA" sz="750" dirty="0"/>
           </a:p>
@@ -20124,7 +20407,7 @@
       </p:sp>
       <p:sp>
         <p:nvSpPr>
-          <p:cNvPr id="391" name="Shape 389"/>
+          <p:cNvPr id="402" name="Shape 400"/>
           <p:cNvSpPr/>
           <p:nvPr/>
         </p:nvSpPr>
@@ -20158,7 +20441,7 @@
       </p:sp>
       <p:sp>
         <p:nvSpPr>
-          <p:cNvPr id="392" name="Shape 390"/>
+          <p:cNvPr id="403" name="Shape 401"/>
           <p:cNvSpPr/>
           <p:nvPr/>
         </p:nvSpPr>
@@ -20183,7 +20466,7 @@
       </p:sp>
       <p:sp>
         <p:nvSpPr>
-          <p:cNvPr id="393" name="Text 391"/>
+          <p:cNvPr id="404" name="Text 402"/>
           <p:cNvSpPr/>
           <p:nvPr/>
         </p:nvSpPr>
@@ -20224,7 +20507,7 @@
       </p:sp>
       <p:sp>
         <p:nvSpPr>
-          <p:cNvPr id="394" name="Text 392"/>
+          <p:cNvPr id="405" name="Text 403"/>
           <p:cNvSpPr/>
           <p:nvPr/>
         </p:nvSpPr>
@@ -20257,7 +20540,7 @@
                 <a:ea typeface="Arial" pitchFamily="34" charset="-122"/>
                 <a:cs typeface="Arial" pitchFamily="34" charset="-120"/>
               </a:rPr>
-              <a:t>ثلاثاء 24 نوفمبر 2026</a:t>
+              <a:t>خميس 19 نوفمبر 2026</a:t>
             </a:r>
             <a:endParaRPr lang="ar-SA" sz="1300" dirty="0"/>
           </a:p>
@@ -20265,7 +20548,7 @@
       </p:sp>
       <p:sp>
         <p:nvSpPr>
-          <p:cNvPr id="395" name="Text 393"/>
+          <p:cNvPr id="406" name="Text 404"/>
           <p:cNvSpPr/>
           <p:nvPr/>
         </p:nvSpPr>
@@ -20298,7 +20581,7 @@
                 <a:ea typeface="Arial" pitchFamily="34" charset="-122"/>
                 <a:cs typeface="Arial" pitchFamily="34" charset="-120"/>
               </a:rPr>
-              <a:t>يوم العمل 37 / 37</a:t>
+              <a:t>يوم العمل 33 / 33</a:t>
             </a:r>
             <a:endParaRPr lang="ar-SA" sz="750" dirty="0"/>
           </a:p>

--- a/ufwl-timeline/UFWL_Presentation_AR.pptx
+++ b/ufwl-timeline/UFWL_Presentation_AR.pptx
@@ -12086,7 +12086,7 @@
             <a:avLst/>
           </a:prstGeom>
           <a:solidFill>
-            <a:srgbClr val="FAF8FF"/>
+            <a:srgbClr val="FFFFFF"/>
           </a:solidFill>
           <a:ln w="6350">
             <a:solidFill>
@@ -12111,11 +12111,11 @@
             <a:avLst/>
           </a:prstGeom>
           <a:solidFill>
-            <a:srgbClr val="6C4AB6"/>
+            <a:srgbClr val="C8503F"/>
           </a:solidFill>
           <a:ln w="12700">
             <a:solidFill>
-              <a:srgbClr val="6C4AB6"/>
+              <a:srgbClr val="C8503F"/>
             </a:solidFill>
             <a:prstDash val="solid"/>
           </a:ln>
@@ -12191,13 +12191,13 @@
             <a:r>
               <a:rPr lang="ar-SA" altLang="en-US" sz="850" b="1" dirty="0">
                 <a:solidFill>
-                  <a:srgbClr val="4A3A86"/>
-                </a:solidFill>
-                <a:latin typeface="Arial" pitchFamily="34" charset="0"/>
-                <a:ea typeface="Arial" pitchFamily="34" charset="-122"/>
-                <a:cs typeface="Arial" pitchFamily="34" charset="-120"/>
-              </a:rPr>
-              <a:t>أعمال الخرسانة حتى الردم – إجمالي الوقت المطلوب</a:t>
+                  <a:srgbClr val="C8503F"/>
+                </a:solidFill>
+                <a:latin typeface="Arial" pitchFamily="34" charset="0"/>
+                <a:ea typeface="Arial" pitchFamily="34" charset="-122"/>
+                <a:cs typeface="Arial" pitchFamily="34" charset="-120"/>
+              </a:rPr>
+              <a:t>أعمال الشورينج – إجمالي الوقت المطلوب</a:t>
             </a:r>
             <a:endParaRPr lang="ar-SA" sz="850" dirty="0"/>
           </a:p>
@@ -12238,7 +12238,7 @@
                 <a:ea typeface="Arial" pitchFamily="34" charset="-122"/>
                 <a:cs typeface="Arial" pitchFamily="34" charset="-120"/>
               </a:rPr>
-              <a:t>16</a:t>
+              <a:t>4</a:t>
             </a:r>
             <a:endParaRPr lang="ar-SA" sz="1100" dirty="0"/>
           </a:p>
@@ -12279,7 +12279,7 @@
                 <a:ea typeface="Arial" pitchFamily="34" charset="-122"/>
                 <a:cs typeface="Arial" pitchFamily="34" charset="-120"/>
               </a:rPr>
-              <a:t>27 أكتوبر</a:t>
+              <a:t>22 أكتوبر</a:t>
             </a:r>
             <a:endParaRPr lang="ar-SA" sz="850" dirty="0"/>
           </a:p>
@@ -12320,7 +12320,7 @@
                 <a:ea typeface="Arial" pitchFamily="34" charset="-122"/>
                 <a:cs typeface="Arial" pitchFamily="34" charset="-120"/>
               </a:rPr>
-              <a:t>14 نوفمبر</a:t>
+              <a:t>26 أكتوبر</a:t>
             </a:r>
             <a:endParaRPr lang="ar-SA" sz="850" dirty="0"/>
           </a:p>
@@ -12334,15 +12334,106 @@
         </p:nvSpPr>
         <p:spPr>
           <a:xfrm>
-            <a:off x="705863" y="2286000"/>
-            <a:ext cx="3230979" cy="182880"/>
+            <a:off x="3936842" y="2276856"/>
+            <a:ext cx="850258" cy="201168"/>
           </a:xfrm>
           <a:prstGeom prst="roundRect">
             <a:avLst>
-              <a:gd name="adj" fmla="val 20000"/>
+              <a:gd name="adj" fmla="val 18182"/>
             </a:avLst>
           </a:prstGeom>
           <a:solidFill>
+            <a:srgbClr val="C8503F"/>
+          </a:solidFill>
+          <a:ln w="12700">
+            <a:solidFill>
+              <a:srgbClr val="C8503F"/>
+            </a:solidFill>
+            <a:prstDash val="solid"/>
+          </a:ln>
+        </p:spPr>
+      </p:sp>
+      <p:sp>
+        <p:nvSpPr>
+          <p:cNvPr id="167" name="Text 165"/>
+          <p:cNvSpPr/>
+          <p:nvPr/>
+        </p:nvSpPr>
+        <p:spPr>
+          <a:xfrm>
+            <a:off x="3936842" y="2276856"/>
+            <a:ext cx="850258" cy="201168"/>
+          </a:xfrm>
+          <a:prstGeom prst="rect">
+            <a:avLst/>
+          </a:prstGeom>
+          <a:noFill/>
+          <a:ln/>
+        </p:spPr>
+        <p:txBody>
+          <a:bodyPr wrap="square" lIns="0" tIns="0" rIns="0" bIns="0" rtlCol="0" anchor="ctr">
+            <a:normAutofit/>
+          </a:bodyPr>
+          <a:lstStyle/>
+          <a:p>
+            <a:pPr rtl="1" algn="ctr" indent="0" marL="0">
+              <a:buNone/>
+            </a:pPr>
+            <a:r>
+              <a:rPr lang="ar-SA" altLang="en-US" sz="800" b="1" dirty="0">
+                <a:solidFill>
+                  <a:srgbClr val="FFFFFF"/>
+                </a:solidFill>
+                <a:latin typeface="Arial" pitchFamily="34" charset="0"/>
+                <a:ea typeface="Arial" pitchFamily="34" charset="-122"/>
+                <a:cs typeface="Arial" pitchFamily="34" charset="-120"/>
+              </a:rPr>
+              <a:t>4 يوم عمل</a:t>
+            </a:r>
+            <a:endParaRPr lang="ar-SA" sz="800" dirty="0"/>
+          </a:p>
+        </p:txBody>
+      </p:sp>
+      <p:sp>
+        <p:nvSpPr>
+          <p:cNvPr id="168" name="Shape 166"/>
+          <p:cNvSpPr/>
+          <p:nvPr/>
+        </p:nvSpPr>
+        <p:spPr>
+          <a:xfrm>
+            <a:off x="365760" y="2514600"/>
+            <a:ext cx="11460175" cy="274320"/>
+          </a:xfrm>
+          <a:prstGeom prst="rect">
+            <a:avLst/>
+          </a:prstGeom>
+          <a:solidFill>
+            <a:srgbClr val="FFFFFF"/>
+          </a:solidFill>
+          <a:ln w="6350">
+            <a:solidFill>
+              <a:srgbClr val="DFE6EA"/>
+            </a:solidFill>
+            <a:prstDash val="solid"/>
+          </a:ln>
+        </p:spPr>
+      </p:sp>
+      <p:sp>
+        <p:nvSpPr>
+          <p:cNvPr id="169" name="Shape 167"/>
+          <p:cNvSpPr/>
+          <p:nvPr/>
+        </p:nvSpPr>
+        <p:spPr>
+          <a:xfrm>
+            <a:off x="11515039" y="2532888"/>
+            <a:ext cx="237744" cy="237744"/>
+          </a:xfrm>
+          <a:prstGeom prst="ellipse">
+            <a:avLst/>
+          </a:prstGeom>
+          <a:solidFill>
             <a:srgbClr val="6C4AB6"/>
           </a:solidFill>
           <a:ln w="12700">
@@ -12355,14 +12446,14 @@
       </p:sp>
       <p:sp>
         <p:nvSpPr>
-          <p:cNvPr id="167" name="Text 165"/>
-          <p:cNvSpPr/>
-          <p:nvPr/>
-        </p:nvSpPr>
-        <p:spPr>
-          <a:xfrm>
-            <a:off x="705863" y="2286000"/>
-            <a:ext cx="3230979" cy="182880"/>
+          <p:cNvPr id="170" name="Text 168"/>
+          <p:cNvSpPr/>
+          <p:nvPr/>
+        </p:nvSpPr>
+        <p:spPr>
+          <a:xfrm>
+            <a:off x="11441887" y="2514600"/>
+            <a:ext cx="384048" cy="274320"/>
           </a:xfrm>
           <a:prstGeom prst="rect">
             <a:avLst/>
@@ -12380,6 +12471,238 @@
               <a:buNone/>
             </a:pPr>
             <a:r>
+              <a:rPr lang="ar-SA" altLang="en-US" sz="900" b="1" dirty="0">
+                <a:solidFill>
+                  <a:srgbClr val="FFFFFF"/>
+                </a:solidFill>
+                <a:latin typeface="Arial" pitchFamily="34" charset="0"/>
+                <a:ea typeface="Arial" pitchFamily="34" charset="-122"/>
+                <a:cs typeface="Arial" pitchFamily="34" charset="-120"/>
+              </a:rPr>
+              <a:t>⟷</a:t>
+            </a:r>
+            <a:endParaRPr lang="ar-SA" sz="900" dirty="0"/>
+          </a:p>
+        </p:txBody>
+      </p:sp>
+      <p:sp>
+        <p:nvSpPr>
+          <p:cNvPr id="171" name="Text 169"/>
+          <p:cNvSpPr/>
+          <p:nvPr/>
+        </p:nvSpPr>
+        <p:spPr>
+          <a:xfrm>
+            <a:off x="8762695" y="2514600"/>
+            <a:ext cx="2606040" cy="274320"/>
+          </a:xfrm>
+          <a:prstGeom prst="rect">
+            <a:avLst/>
+          </a:prstGeom>
+          <a:noFill/>
+          <a:ln/>
+        </p:spPr>
+        <p:txBody>
+          <a:bodyPr wrap="square" lIns="0" tIns="0" rIns="0" bIns="0" rtlCol="0" anchor="ctr">
+            <a:normAutofit/>
+          </a:bodyPr>
+          <a:lstStyle/>
+          <a:p>
+            <a:pPr rtl="1" algn="r" indent="0" marL="0">
+              <a:buNone/>
+            </a:pPr>
+            <a:r>
+              <a:rPr lang="ar-SA" altLang="en-US" sz="850" b="1" dirty="0">
+                <a:solidFill>
+                  <a:srgbClr val="6C4AB6"/>
+                </a:solidFill>
+                <a:latin typeface="Arial" pitchFamily="34" charset="0"/>
+                <a:ea typeface="Arial" pitchFamily="34" charset="-122"/>
+                <a:cs typeface="Arial" pitchFamily="34" charset="-120"/>
+              </a:rPr>
+              <a:t>أعمال الخرسانة حتى الردم – إجمالي الوقت المطلوب</a:t>
+            </a:r>
+            <a:endParaRPr lang="ar-SA" sz="850" dirty="0"/>
+          </a:p>
+        </p:txBody>
+      </p:sp>
+      <p:sp>
+        <p:nvSpPr>
+          <p:cNvPr id="172" name="Text 170"/>
+          <p:cNvSpPr/>
+          <p:nvPr/>
+        </p:nvSpPr>
+        <p:spPr>
+          <a:xfrm>
+            <a:off x="7464247" y="2514600"/>
+            <a:ext cx="502920" cy="274320"/>
+          </a:xfrm>
+          <a:prstGeom prst="rect">
+            <a:avLst/>
+          </a:prstGeom>
+          <a:noFill/>
+          <a:ln/>
+        </p:spPr>
+        <p:txBody>
+          <a:bodyPr wrap="square" lIns="0" tIns="0" rIns="0" bIns="0" rtlCol="0" anchor="ctr">
+            <a:normAutofit/>
+          </a:bodyPr>
+          <a:lstStyle/>
+          <a:p>
+            <a:pPr rtl="1" algn="ctr" indent="0" marL="0">
+              <a:buNone/>
+            </a:pPr>
+            <a:r>
+              <a:rPr lang="ar-SA" altLang="en-US" sz="1100" b="1" dirty="0">
+                <a:solidFill>
+                  <a:srgbClr val="222222"/>
+                </a:solidFill>
+                <a:latin typeface="Arial" pitchFamily="34" charset="0"/>
+                <a:ea typeface="Arial" pitchFamily="34" charset="-122"/>
+                <a:cs typeface="Arial" pitchFamily="34" charset="-120"/>
+              </a:rPr>
+              <a:t>16</a:t>
+            </a:r>
+            <a:endParaRPr lang="ar-SA" sz="1100" dirty="0"/>
+          </a:p>
+        </p:txBody>
+      </p:sp>
+      <p:sp>
+        <p:nvSpPr>
+          <p:cNvPr id="173" name="Text 171"/>
+          <p:cNvSpPr/>
+          <p:nvPr/>
+        </p:nvSpPr>
+        <p:spPr>
+          <a:xfrm>
+            <a:off x="6805879" y="2514600"/>
+            <a:ext cx="658368" cy="274320"/>
+          </a:xfrm>
+          <a:prstGeom prst="rect">
+            <a:avLst/>
+          </a:prstGeom>
+          <a:noFill/>
+          <a:ln/>
+        </p:spPr>
+        <p:txBody>
+          <a:bodyPr wrap="square" lIns="0" tIns="0" rIns="0" bIns="0" rtlCol="0" anchor="ctr">
+            <a:normAutofit/>
+          </a:bodyPr>
+          <a:lstStyle/>
+          <a:p>
+            <a:pPr rtl="1" algn="ctr" indent="0" marL="0">
+              <a:buNone/>
+            </a:pPr>
+            <a:r>
+              <a:rPr lang="ar-SA" altLang="en-US" sz="850" b="1" dirty="0">
+                <a:solidFill>
+                  <a:srgbClr val="222222"/>
+                </a:solidFill>
+                <a:latin typeface="Arial" pitchFamily="34" charset="0"/>
+                <a:ea typeface="Arial" pitchFamily="34" charset="-122"/>
+                <a:cs typeface="Arial" pitchFamily="34" charset="-120"/>
+              </a:rPr>
+              <a:t>27 أكتوبر</a:t>
+            </a:r>
+            <a:endParaRPr lang="ar-SA" sz="850" dirty="0"/>
+          </a:p>
+        </p:txBody>
+      </p:sp>
+      <p:sp>
+        <p:nvSpPr>
+          <p:cNvPr id="174" name="Text 172"/>
+          <p:cNvSpPr/>
+          <p:nvPr/>
+        </p:nvSpPr>
+        <p:spPr>
+          <a:xfrm>
+            <a:off x="6147511" y="2514600"/>
+            <a:ext cx="658368" cy="274320"/>
+          </a:xfrm>
+          <a:prstGeom prst="rect">
+            <a:avLst/>
+          </a:prstGeom>
+          <a:noFill/>
+          <a:ln/>
+        </p:spPr>
+        <p:txBody>
+          <a:bodyPr wrap="square" lIns="0" tIns="0" rIns="0" bIns="0" rtlCol="0" anchor="ctr">
+            <a:normAutofit/>
+          </a:bodyPr>
+          <a:lstStyle/>
+          <a:p>
+            <a:pPr rtl="1" algn="ctr" indent="0" marL="0">
+              <a:buNone/>
+            </a:pPr>
+            <a:r>
+              <a:rPr lang="ar-SA" altLang="en-US" sz="850" b="1" dirty="0">
+                <a:solidFill>
+                  <a:srgbClr val="222222"/>
+                </a:solidFill>
+                <a:latin typeface="Arial" pitchFamily="34" charset="0"/>
+                <a:ea typeface="Arial" pitchFamily="34" charset="-122"/>
+                <a:cs typeface="Arial" pitchFamily="34" charset="-120"/>
+              </a:rPr>
+              <a:t>14 نوفمبر</a:t>
+            </a:r>
+            <a:endParaRPr lang="ar-SA" sz="850" dirty="0"/>
+          </a:p>
+        </p:txBody>
+      </p:sp>
+      <p:sp>
+        <p:nvSpPr>
+          <p:cNvPr id="175" name="Shape 173"/>
+          <p:cNvSpPr/>
+          <p:nvPr/>
+        </p:nvSpPr>
+        <p:spPr>
+          <a:xfrm>
+            <a:off x="705863" y="2551176"/>
+            <a:ext cx="3230979" cy="201168"/>
+          </a:xfrm>
+          <a:prstGeom prst="roundRect">
+            <a:avLst>
+              <a:gd name="adj" fmla="val 18182"/>
+            </a:avLst>
+          </a:prstGeom>
+          <a:solidFill>
+            <a:srgbClr val="6C4AB6"/>
+          </a:solidFill>
+          <a:ln w="12700">
+            <a:solidFill>
+              <a:srgbClr val="6C4AB6"/>
+            </a:solidFill>
+            <a:prstDash val="solid"/>
+          </a:ln>
+        </p:spPr>
+      </p:sp>
+      <p:sp>
+        <p:nvSpPr>
+          <p:cNvPr id="176" name="Text 174"/>
+          <p:cNvSpPr/>
+          <p:nvPr/>
+        </p:nvSpPr>
+        <p:spPr>
+          <a:xfrm>
+            <a:off x="705863" y="2551176"/>
+            <a:ext cx="3230979" cy="201168"/>
+          </a:xfrm>
+          <a:prstGeom prst="rect">
+            <a:avLst/>
+          </a:prstGeom>
+          <a:noFill/>
+          <a:ln/>
+        </p:spPr>
+        <p:txBody>
+          <a:bodyPr wrap="square" lIns="0" tIns="0" rIns="0" bIns="0" rtlCol="0" anchor="ctr">
+            <a:normAutofit/>
+          </a:bodyPr>
+          <a:lstStyle/>
+          <a:p>
+            <a:pPr rtl="1" algn="ctr" indent="0" marL="0">
+              <a:buNone/>
+            </a:pPr>
+            <a:r>
               <a:rPr lang="ar-SA" altLang="en-US" sz="800" b="1" dirty="0">
                 <a:solidFill>
                   <a:srgbClr val="FFFFFF"/>
@@ -12396,20 +12719,20 @@
       </p:sp>
       <p:sp>
         <p:nvSpPr>
-          <p:cNvPr id="168" name="Shape 166"/>
-          <p:cNvSpPr/>
-          <p:nvPr/>
-        </p:nvSpPr>
-        <p:spPr>
-          <a:xfrm>
-            <a:off x="6147511" y="2514600"/>
-            <a:ext cx="5678424" cy="640080"/>
-          </a:xfrm>
-          <a:prstGeom prst="rect">
-            <a:avLst/>
-          </a:prstGeom>
-          <a:solidFill>
-            <a:srgbClr val="FBFDFD"/>
+          <p:cNvPr id="177" name="Shape 175"/>
+          <p:cNvSpPr/>
+          <p:nvPr/>
+        </p:nvSpPr>
+        <p:spPr>
+          <a:xfrm>
+            <a:off x="365760" y="2788920"/>
+            <a:ext cx="11460175" cy="223266"/>
+          </a:xfrm>
+          <a:prstGeom prst="rect">
+            <a:avLst/>
+          </a:prstGeom>
+          <a:solidFill>
+            <a:srgbClr val="FFFFFF"/>
           </a:solidFill>
           <a:ln w="6350">
             <a:solidFill>
@@ -12421,14 +12744,80 @@
       </p:sp>
       <p:sp>
         <p:nvSpPr>
-          <p:cNvPr id="169" name="Text 167"/>
-          <p:cNvSpPr/>
-          <p:nvPr/>
-        </p:nvSpPr>
-        <p:spPr>
-          <a:xfrm>
-            <a:off x="6238951" y="2514600"/>
-            <a:ext cx="5495544" cy="640080"/>
+          <p:cNvPr id="178" name="Shape 176"/>
+          <p:cNvSpPr/>
+          <p:nvPr/>
+        </p:nvSpPr>
+        <p:spPr>
+          <a:xfrm>
+            <a:off x="11515039" y="2781681"/>
+            <a:ext cx="237744" cy="237744"/>
+          </a:xfrm>
+          <a:prstGeom prst="ellipse">
+            <a:avLst/>
+          </a:prstGeom>
+          <a:solidFill>
+            <a:srgbClr val="C8503F"/>
+          </a:solidFill>
+          <a:ln w="19050">
+            <a:solidFill>
+              <a:srgbClr val="222222"/>
+            </a:solidFill>
+            <a:prstDash val="solid"/>
+          </a:ln>
+        </p:spPr>
+      </p:sp>
+      <p:sp>
+        <p:nvSpPr>
+          <p:cNvPr id="179" name="Text 177"/>
+          <p:cNvSpPr/>
+          <p:nvPr/>
+        </p:nvSpPr>
+        <p:spPr>
+          <a:xfrm>
+            <a:off x="11441887" y="2788920"/>
+            <a:ext cx="384048" cy="223266"/>
+          </a:xfrm>
+          <a:prstGeom prst="rect">
+            <a:avLst/>
+          </a:prstGeom>
+          <a:noFill/>
+          <a:ln/>
+        </p:spPr>
+        <p:txBody>
+          <a:bodyPr wrap="square" lIns="0" tIns="0" rIns="0" bIns="0" rtlCol="0" anchor="ctr">
+            <a:normAutofit/>
+          </a:bodyPr>
+          <a:lstStyle/>
+          <a:p>
+            <a:pPr rtl="1" algn="ctr" indent="0" marL="0">
+              <a:buNone/>
+            </a:pPr>
+            <a:r>
+              <a:rPr lang="ar-SA" altLang="en-US" sz="850" b="1" dirty="0">
+                <a:solidFill>
+                  <a:srgbClr val="FFFFFF"/>
+                </a:solidFill>
+                <a:latin typeface="Arial" pitchFamily="34" charset="0"/>
+                <a:ea typeface="Arial" pitchFamily="34" charset="-122"/>
+                <a:cs typeface="Arial" pitchFamily="34" charset="-120"/>
+              </a:rPr>
+              <a:t>A</a:t>
+            </a:r>
+            <a:endParaRPr lang="ar-SA" sz="850" dirty="0"/>
+          </a:p>
+        </p:txBody>
+      </p:sp>
+      <p:sp>
+        <p:nvSpPr>
+          <p:cNvPr id="180" name="Text 178"/>
+          <p:cNvSpPr/>
+          <p:nvPr/>
+        </p:nvSpPr>
+        <p:spPr>
+          <a:xfrm>
+            <a:off x="8762695" y="2788920"/>
+            <a:ext cx="2606040" cy="223266"/>
           </a:xfrm>
           <a:prstGeom prst="rect">
             <a:avLst/>
@@ -12446,7 +12835,287 @@
               <a:buNone/>
             </a:pPr>
             <a:r>
-              <a:rPr lang="ar-SA" altLang="en-US" sz="1000" b="1" dirty="0">
+              <a:rPr lang="ar-SA" altLang="en-US" sz="750" b="1" dirty="0">
+                <a:solidFill>
+                  <a:srgbClr val="222222"/>
+                </a:solidFill>
+                <a:latin typeface="Arial" pitchFamily="34" charset="0"/>
+                <a:ea typeface="Arial" pitchFamily="34" charset="-122"/>
+                <a:cs typeface="Arial" pitchFamily="34" charset="-120"/>
+              </a:rPr>
+              <a:t>تركيب نظام الدعم (Shoring)</a:t>
+            </a:r>
+            <a:endParaRPr lang="ar-SA" sz="750" dirty="0"/>
+          </a:p>
+        </p:txBody>
+      </p:sp>
+      <p:sp>
+        <p:nvSpPr>
+          <p:cNvPr id="181" name="Text 179"/>
+          <p:cNvSpPr/>
+          <p:nvPr/>
+        </p:nvSpPr>
+        <p:spPr>
+          <a:xfrm>
+            <a:off x="7967167" y="2788920"/>
+            <a:ext cx="777240" cy="223266"/>
+          </a:xfrm>
+          <a:prstGeom prst="rect">
+            <a:avLst/>
+          </a:prstGeom>
+          <a:noFill/>
+          <a:ln/>
+        </p:spPr>
+        <p:txBody>
+          <a:bodyPr wrap="square" lIns="0" tIns="0" rIns="0" bIns="0" rtlCol="0" anchor="ctr">
+            <a:normAutofit/>
+          </a:bodyPr>
+          <a:lstStyle/>
+          <a:p>
+            <a:pPr rtl="1" algn="ctr" indent="0" marL="0">
+              <a:buNone/>
+            </a:pPr>
+            <a:r>
+              <a:rPr lang="ar-SA" altLang="en-US" sz="700" dirty="0">
+                <a:solidFill>
+                  <a:srgbClr val="444444"/>
+                </a:solidFill>
+                <a:latin typeface="Arial" pitchFamily="34" charset="0"/>
+                <a:ea typeface="Arial" pitchFamily="34" charset="-122"/>
+                <a:cs typeface="Arial" pitchFamily="34" charset="-120"/>
+              </a:rPr>
+              <a:t>—</a:t>
+            </a:r>
+            <a:endParaRPr lang="ar-SA" sz="700" dirty="0"/>
+          </a:p>
+        </p:txBody>
+      </p:sp>
+      <p:sp>
+        <p:nvSpPr>
+          <p:cNvPr id="182" name="Text 180"/>
+          <p:cNvSpPr/>
+          <p:nvPr/>
+        </p:nvSpPr>
+        <p:spPr>
+          <a:xfrm>
+            <a:off x="7464247" y="2788920"/>
+            <a:ext cx="502920" cy="223266"/>
+          </a:xfrm>
+          <a:prstGeom prst="rect">
+            <a:avLst/>
+          </a:prstGeom>
+          <a:noFill/>
+          <a:ln/>
+        </p:spPr>
+        <p:txBody>
+          <a:bodyPr wrap="square" lIns="0" tIns="0" rIns="0" bIns="0" rtlCol="0" anchor="ctr">
+            <a:normAutofit/>
+          </a:bodyPr>
+          <a:lstStyle/>
+          <a:p>
+            <a:pPr rtl="1" algn="ctr" indent="0" marL="0">
+              <a:buNone/>
+            </a:pPr>
+            <a:r>
+              <a:rPr lang="ar-SA" altLang="en-US" sz="900" b="1" dirty="0">
+                <a:solidFill>
+                  <a:srgbClr val="222222"/>
+                </a:solidFill>
+                <a:latin typeface="Arial" pitchFamily="34" charset="0"/>
+                <a:ea typeface="Arial" pitchFamily="34" charset="-122"/>
+                <a:cs typeface="Arial" pitchFamily="34" charset="-120"/>
+              </a:rPr>
+              <a:t>4</a:t>
+            </a:r>
+            <a:endParaRPr lang="ar-SA" sz="900" dirty="0"/>
+          </a:p>
+        </p:txBody>
+      </p:sp>
+      <p:sp>
+        <p:nvSpPr>
+          <p:cNvPr id="183" name="Text 181"/>
+          <p:cNvSpPr/>
+          <p:nvPr/>
+        </p:nvSpPr>
+        <p:spPr>
+          <a:xfrm>
+            <a:off x="6805879" y="2788920"/>
+            <a:ext cx="658368" cy="223266"/>
+          </a:xfrm>
+          <a:prstGeom prst="rect">
+            <a:avLst/>
+          </a:prstGeom>
+          <a:noFill/>
+          <a:ln/>
+        </p:spPr>
+        <p:txBody>
+          <a:bodyPr wrap="square" lIns="0" tIns="0" rIns="0" bIns="0" rtlCol="0" anchor="ctr">
+            <a:normAutofit/>
+          </a:bodyPr>
+          <a:lstStyle/>
+          <a:p>
+            <a:pPr rtl="1" algn="ctr" indent="0" marL="0">
+              <a:buNone/>
+            </a:pPr>
+            <a:r>
+              <a:rPr lang="ar-SA" altLang="en-US" sz="700" b="1" dirty="0">
+                <a:solidFill>
+                  <a:srgbClr val="222222"/>
+                </a:solidFill>
+                <a:latin typeface="Arial" pitchFamily="34" charset="0"/>
+                <a:ea typeface="Arial" pitchFamily="34" charset="-122"/>
+                <a:cs typeface="Arial" pitchFamily="34" charset="-120"/>
+              </a:rPr>
+              <a:t>22 أكتوبر</a:t>
+            </a:r>
+            <a:endParaRPr lang="ar-SA" sz="700" dirty="0"/>
+          </a:p>
+        </p:txBody>
+      </p:sp>
+      <p:sp>
+        <p:nvSpPr>
+          <p:cNvPr id="184" name="Text 182"/>
+          <p:cNvSpPr/>
+          <p:nvPr/>
+        </p:nvSpPr>
+        <p:spPr>
+          <a:xfrm>
+            <a:off x="6147511" y="2788920"/>
+            <a:ext cx="658368" cy="223266"/>
+          </a:xfrm>
+          <a:prstGeom prst="rect">
+            <a:avLst/>
+          </a:prstGeom>
+          <a:noFill/>
+          <a:ln/>
+        </p:spPr>
+        <p:txBody>
+          <a:bodyPr wrap="square" lIns="0" tIns="0" rIns="0" bIns="0" rtlCol="0" anchor="ctr">
+            <a:normAutofit/>
+          </a:bodyPr>
+          <a:lstStyle/>
+          <a:p>
+            <a:pPr rtl="1" algn="ctr" indent="0" marL="0">
+              <a:buNone/>
+            </a:pPr>
+            <a:r>
+              <a:rPr lang="ar-SA" altLang="en-US" sz="700" b="1" dirty="0">
+                <a:solidFill>
+                  <a:srgbClr val="222222"/>
+                </a:solidFill>
+                <a:latin typeface="Arial" pitchFamily="34" charset="0"/>
+                <a:ea typeface="Arial" pitchFamily="34" charset="-122"/>
+                <a:cs typeface="Arial" pitchFamily="34" charset="-120"/>
+              </a:rPr>
+              <a:t>26 أكتوبر</a:t>
+            </a:r>
+            <a:endParaRPr lang="ar-SA" sz="700" dirty="0"/>
+          </a:p>
+        </p:txBody>
+      </p:sp>
+      <p:sp>
+        <p:nvSpPr>
+          <p:cNvPr id="185" name="Shape 183"/>
+          <p:cNvSpPr/>
+          <p:nvPr/>
+        </p:nvSpPr>
+        <p:spPr>
+          <a:xfrm>
+            <a:off x="3936842" y="2841117"/>
+            <a:ext cx="850258" cy="64008"/>
+          </a:xfrm>
+          <a:prstGeom prst="rect">
+            <a:avLst/>
+          </a:prstGeom>
+          <a:solidFill>
+            <a:srgbClr val="C8503F"/>
+          </a:solidFill>
+          <a:ln w="12700">
+            <a:solidFill>
+              <a:srgbClr val="C8503F"/>
+            </a:solidFill>
+            <a:prstDash val="solid"/>
+          </a:ln>
+        </p:spPr>
+      </p:sp>
+      <p:sp>
+        <p:nvSpPr>
+          <p:cNvPr id="186" name="Shape 184"/>
+          <p:cNvSpPr/>
+          <p:nvPr/>
+        </p:nvSpPr>
+        <p:spPr>
+          <a:xfrm flipV="1">
+            <a:off x="4723091" y="2905125"/>
+            <a:ext cx="64008" cy="54864"/>
+          </a:xfrm>
+          <a:prstGeom prst="triangle">
+            <a:avLst/>
+          </a:prstGeom>
+          <a:solidFill>
+            <a:srgbClr val="C8503F"/>
+          </a:solidFill>
+          <a:ln w="12700">
+            <a:solidFill>
+              <a:srgbClr val="C8503F"/>
+            </a:solidFill>
+            <a:prstDash val="solid"/>
+          </a:ln>
+        </p:spPr>
+      </p:sp>
+      <p:sp>
+        <p:nvSpPr>
+          <p:cNvPr id="187" name="Shape 185"/>
+          <p:cNvSpPr/>
+          <p:nvPr/>
+        </p:nvSpPr>
+        <p:spPr>
+          <a:xfrm flipV="1">
+            <a:off x="3936842" y="2905125"/>
+            <a:ext cx="64008" cy="54864"/>
+          </a:xfrm>
+          <a:prstGeom prst="triangle">
+            <a:avLst/>
+          </a:prstGeom>
+          <a:solidFill>
+            <a:srgbClr val="C8503F"/>
+          </a:solidFill>
+          <a:ln w="12700">
+            <a:solidFill>
+              <a:srgbClr val="C8503F"/>
+            </a:solidFill>
+            <a:prstDash val="solid"/>
+          </a:ln>
+        </p:spPr>
+      </p:sp>
+      <p:sp>
+        <p:nvSpPr>
+          <p:cNvPr id="188" name="Text 186"/>
+          <p:cNvSpPr/>
+          <p:nvPr/>
+        </p:nvSpPr>
+        <p:spPr>
+          <a:xfrm>
+            <a:off x="3342482" y="2788920"/>
+            <a:ext cx="548640" cy="223266"/>
+          </a:xfrm>
+          <a:prstGeom prst="rect">
+            <a:avLst/>
+          </a:prstGeom>
+          <a:noFill/>
+          <a:ln/>
+        </p:spPr>
+        <p:txBody>
+          <a:bodyPr wrap="square" lIns="0" tIns="0" rIns="0" bIns="0" rtlCol="0" anchor="ctr">
+            <a:normAutofit/>
+          </a:bodyPr>
+          <a:lstStyle/>
+          <a:p>
+            <a:pPr rtl="1" algn="r" indent="0" marL="0">
+              <a:buNone/>
+            </a:pPr>
+            <a:r>
+              <a:rPr lang="ar-SA" altLang="en-US" sz="750" b="1" dirty="0">
                 <a:solidFill>
                   <a:srgbClr val="3D3935"/>
                 </a:solidFill>
@@ -12454,114 +13123,7 @@
                 <a:ea typeface="Arial" pitchFamily="34" charset="-122"/>
                 <a:cs typeface="Arial" pitchFamily="34" charset="-120"/>
               </a:rPr>
-              <a:t>◆  ميل ستون</a:t>
-            </a:r>
-            <a:endParaRPr lang="ar-SA" sz="1000" dirty="0"/>
-          </a:p>
-        </p:txBody>
-      </p:sp>
-      <p:sp>
-        <p:nvSpPr>
-          <p:cNvPr id="170" name="Shape 168"/>
-          <p:cNvSpPr/>
-          <p:nvPr/>
-        </p:nvSpPr>
-        <p:spPr>
-          <a:xfrm>
-            <a:off x="4619777" y="2752344"/>
-            <a:ext cx="164592" cy="164592"/>
-          </a:xfrm>
-          <a:prstGeom prst="diamond">
-            <a:avLst/>
-          </a:prstGeom>
-          <a:solidFill>
-            <a:srgbClr val="3D3935"/>
-          </a:solidFill>
-          <a:ln w="19050">
-            <a:solidFill>
-              <a:srgbClr val="FFFFFF"/>
-            </a:solidFill>
-            <a:prstDash val="solid"/>
-          </a:ln>
-        </p:spPr>
-      </p:sp>
-      <p:sp>
-        <p:nvSpPr>
-          <p:cNvPr id="171" name="Text 169"/>
-          <p:cNvSpPr/>
-          <p:nvPr/>
-        </p:nvSpPr>
-        <p:spPr>
-          <a:xfrm>
-            <a:off x="3879113" y="2926080"/>
-            <a:ext cx="1645920" cy="100584"/>
-          </a:xfrm>
-          <a:prstGeom prst="rect">
-            <a:avLst/>
-          </a:prstGeom>
-          <a:noFill/>
-          <a:ln/>
-        </p:spPr>
-        <p:txBody>
-          <a:bodyPr wrap="square" lIns="0" tIns="0" rIns="0" bIns="0" rtlCol="0" anchor="t">
-            <a:normAutofit/>
-          </a:bodyPr>
-          <a:lstStyle/>
-          <a:p>
-            <a:pPr rtl="1" algn="ctr" indent="0" marL="0">
-              <a:buNone/>
-            </a:pPr>
-            <a:r>
-              <a:rPr lang="ar-SA" altLang="en-US" sz="550" dirty="0">
-                <a:solidFill>
-                  <a:srgbClr val="556070"/>
-                </a:solidFill>
-                <a:latin typeface="Arial" pitchFamily="34" charset="0"/>
-                <a:ea typeface="Arial" pitchFamily="34" charset="-122"/>
-                <a:cs typeface="Arial" pitchFamily="34" charset="-120"/>
-              </a:rPr>
-              <a:t>بدء الأعمال</a:t>
-            </a:r>
-            <a:endParaRPr lang="ar-SA" sz="550" dirty="0"/>
-          </a:p>
-        </p:txBody>
-      </p:sp>
-      <p:sp>
-        <p:nvSpPr>
-          <p:cNvPr id="172" name="Text 170"/>
-          <p:cNvSpPr/>
-          <p:nvPr/>
-        </p:nvSpPr>
-        <p:spPr>
-          <a:xfrm>
-            <a:off x="3879113" y="3017520"/>
-            <a:ext cx="1645920" cy="128016"/>
-          </a:xfrm>
-          <a:prstGeom prst="rect">
-            <a:avLst/>
-          </a:prstGeom>
-          <a:noFill/>
-          <a:ln/>
-        </p:spPr>
-        <p:txBody>
-          <a:bodyPr wrap="square" lIns="0" tIns="0" rIns="0" bIns="0" rtlCol="0" anchor="ctr">
-            <a:normAutofit/>
-          </a:bodyPr>
-          <a:lstStyle/>
-          <a:p>
-            <a:pPr rtl="1" algn="ctr" indent="0" marL="0">
-              <a:buNone/>
-            </a:pPr>
-            <a:r>
-              <a:rPr lang="ar-SA" altLang="en-US" sz="750" b="1" dirty="0">
-                <a:solidFill>
-                  <a:srgbClr val="3D3935"/>
-                </a:solidFill>
-                <a:latin typeface="Arial" pitchFamily="34" charset="0"/>
-                <a:ea typeface="Arial" pitchFamily="34" charset="-122"/>
-                <a:cs typeface="Arial" pitchFamily="34" charset="-120"/>
-              </a:rPr>
-              <a:t>22 أكتوبر</a:t>
+              <a:t>4 يوم</a:t>
             </a:r>
             <a:endParaRPr lang="ar-SA" sz="750" dirty="0"/>
           </a:p>
@@ -12569,448 +13131,20 @@
       </p:sp>
       <p:sp>
         <p:nvSpPr>
-          <p:cNvPr id="173" name="Shape 171"/>
-          <p:cNvSpPr/>
-          <p:nvPr/>
-        </p:nvSpPr>
-        <p:spPr>
-          <a:xfrm>
-            <a:off x="3939571" y="2752344"/>
-            <a:ext cx="164592" cy="164592"/>
-          </a:xfrm>
-          <a:prstGeom prst="diamond">
-            <a:avLst/>
-          </a:prstGeom>
-          <a:solidFill>
-            <a:srgbClr val="3D3935"/>
-          </a:solidFill>
-          <a:ln w="19050">
-            <a:solidFill>
-              <a:srgbClr val="FFFFFF"/>
-            </a:solidFill>
-            <a:prstDash val="solid"/>
-          </a:ln>
-        </p:spPr>
-      </p:sp>
-      <p:sp>
-        <p:nvSpPr>
-          <p:cNvPr id="174" name="Text 172"/>
-          <p:cNvSpPr/>
-          <p:nvPr/>
-        </p:nvSpPr>
-        <p:spPr>
-          <a:xfrm>
-            <a:off x="3198907" y="2514600"/>
-            <a:ext cx="1645920" cy="109728"/>
-          </a:xfrm>
-          <a:prstGeom prst="rect">
-            <a:avLst/>
-          </a:prstGeom>
-          <a:noFill/>
-          <a:ln/>
-        </p:spPr>
-        <p:txBody>
-          <a:bodyPr wrap="square" lIns="0" tIns="0" rIns="0" bIns="0" rtlCol="0" anchor="b">
-            <a:normAutofit/>
-          </a:bodyPr>
-          <a:lstStyle/>
-          <a:p>
-            <a:pPr rtl="1" algn="ctr" indent="0" marL="0">
-              <a:buNone/>
-            </a:pPr>
-            <a:r>
-              <a:rPr lang="ar-SA" altLang="en-US" sz="550" dirty="0">
-                <a:solidFill>
-                  <a:srgbClr val="556070"/>
-                </a:solidFill>
-                <a:latin typeface="Arial" pitchFamily="34" charset="0"/>
-                <a:ea typeface="Arial" pitchFamily="34" charset="-122"/>
-                <a:cs typeface="Arial" pitchFamily="34" charset="-120"/>
-              </a:rPr>
-              <a:t>اكتمال تركيب نظام الدعم</a:t>
-            </a:r>
-            <a:endParaRPr lang="ar-SA" sz="550" dirty="0"/>
-          </a:p>
-        </p:txBody>
-      </p:sp>
-      <p:sp>
-        <p:nvSpPr>
-          <p:cNvPr id="175" name="Text 173"/>
-          <p:cNvSpPr/>
-          <p:nvPr/>
-        </p:nvSpPr>
-        <p:spPr>
-          <a:xfrm>
-            <a:off x="3198907" y="2624328"/>
-            <a:ext cx="1645920" cy="118872"/>
-          </a:xfrm>
-          <a:prstGeom prst="rect">
-            <a:avLst/>
-          </a:prstGeom>
-          <a:noFill/>
-          <a:ln/>
-        </p:spPr>
-        <p:txBody>
-          <a:bodyPr wrap="square" lIns="0" tIns="0" rIns="0" bIns="0" rtlCol="0" anchor="ctr">
-            <a:normAutofit/>
-          </a:bodyPr>
-          <a:lstStyle/>
-          <a:p>
-            <a:pPr rtl="1" algn="ctr" indent="0" marL="0">
-              <a:buNone/>
-            </a:pPr>
-            <a:r>
-              <a:rPr lang="ar-SA" altLang="en-US" sz="750" b="1" dirty="0">
-                <a:solidFill>
-                  <a:srgbClr val="3D3935"/>
-                </a:solidFill>
-                <a:latin typeface="Arial" pitchFamily="34" charset="0"/>
-                <a:ea typeface="Arial" pitchFamily="34" charset="-122"/>
-                <a:cs typeface="Arial" pitchFamily="34" charset="-120"/>
-              </a:rPr>
-              <a:t>26 أكتوبر</a:t>
-            </a:r>
-            <a:endParaRPr lang="ar-SA" sz="750" dirty="0"/>
-          </a:p>
-        </p:txBody>
-      </p:sp>
-      <p:sp>
-        <p:nvSpPr>
-          <p:cNvPr id="176" name="Shape 174"/>
-          <p:cNvSpPr/>
-          <p:nvPr/>
-        </p:nvSpPr>
-        <p:spPr>
-          <a:xfrm>
-            <a:off x="1898953" y="2752344"/>
-            <a:ext cx="164592" cy="164592"/>
-          </a:xfrm>
-          <a:prstGeom prst="diamond">
-            <a:avLst/>
-          </a:prstGeom>
-          <a:solidFill>
-            <a:srgbClr val="3D3935"/>
-          </a:solidFill>
-          <a:ln w="19050">
-            <a:solidFill>
-              <a:srgbClr val="FFFFFF"/>
-            </a:solidFill>
-            <a:prstDash val="solid"/>
-          </a:ln>
-        </p:spPr>
-      </p:sp>
-      <p:sp>
-        <p:nvSpPr>
-          <p:cNvPr id="177" name="Text 175"/>
-          <p:cNvSpPr/>
-          <p:nvPr/>
-        </p:nvSpPr>
-        <p:spPr>
-          <a:xfrm>
-            <a:off x="1158289" y="2926080"/>
-            <a:ext cx="1645920" cy="100584"/>
-          </a:xfrm>
-          <a:prstGeom prst="rect">
-            <a:avLst/>
-          </a:prstGeom>
-          <a:noFill/>
-          <a:ln/>
-        </p:spPr>
-        <p:txBody>
-          <a:bodyPr wrap="square" lIns="0" tIns="0" rIns="0" bIns="0" rtlCol="0" anchor="t">
-            <a:normAutofit/>
-          </a:bodyPr>
-          <a:lstStyle/>
-          <a:p>
-            <a:pPr rtl="1" algn="ctr" indent="0" marL="0">
-              <a:buNone/>
-            </a:pPr>
-            <a:r>
-              <a:rPr lang="ar-SA" altLang="en-US" sz="550" dirty="0">
-                <a:solidFill>
-                  <a:srgbClr val="556070"/>
-                </a:solidFill>
-                <a:latin typeface="Arial" pitchFamily="34" charset="0"/>
-                <a:ea typeface="Arial" pitchFamily="34" charset="-122"/>
-                <a:cs typeface="Arial" pitchFamily="34" charset="-120"/>
-              </a:rPr>
-              <a:t>اكتمال أعمال الحفرة (جدار الحفرة)</a:t>
-            </a:r>
-            <a:endParaRPr lang="ar-SA" sz="550" dirty="0"/>
-          </a:p>
-        </p:txBody>
-      </p:sp>
-      <p:sp>
-        <p:nvSpPr>
-          <p:cNvPr id="178" name="Text 176"/>
-          <p:cNvSpPr/>
-          <p:nvPr/>
-        </p:nvSpPr>
-        <p:spPr>
-          <a:xfrm>
-            <a:off x="1158289" y="3017520"/>
-            <a:ext cx="1645920" cy="128016"/>
-          </a:xfrm>
-          <a:prstGeom prst="rect">
-            <a:avLst/>
-          </a:prstGeom>
-          <a:noFill/>
-          <a:ln/>
-        </p:spPr>
-        <p:txBody>
-          <a:bodyPr wrap="square" lIns="0" tIns="0" rIns="0" bIns="0" rtlCol="0" anchor="ctr">
-            <a:normAutofit/>
-          </a:bodyPr>
-          <a:lstStyle/>
-          <a:p>
-            <a:pPr rtl="1" algn="ctr" indent="0" marL="0">
-              <a:buNone/>
-            </a:pPr>
-            <a:r>
-              <a:rPr lang="ar-SA" altLang="en-US" sz="750" b="1" dirty="0">
-                <a:solidFill>
-                  <a:srgbClr val="3D3935"/>
-                </a:solidFill>
-                <a:latin typeface="Arial" pitchFamily="34" charset="0"/>
-                <a:ea typeface="Arial" pitchFamily="34" charset="-122"/>
-                <a:cs typeface="Arial" pitchFamily="34" charset="-120"/>
-              </a:rPr>
-              <a:t>7 نوفمبر</a:t>
-            </a:r>
-            <a:endParaRPr lang="ar-SA" sz="750" dirty="0"/>
-          </a:p>
-        </p:txBody>
-      </p:sp>
-      <p:sp>
-        <p:nvSpPr>
-          <p:cNvPr id="179" name="Shape 177"/>
-          <p:cNvSpPr/>
-          <p:nvPr/>
-        </p:nvSpPr>
-        <p:spPr>
-          <a:xfrm>
-            <a:off x="1388799" y="2752344"/>
-            <a:ext cx="164592" cy="164592"/>
-          </a:xfrm>
-          <a:prstGeom prst="diamond">
-            <a:avLst/>
-          </a:prstGeom>
-          <a:solidFill>
-            <a:srgbClr val="3D3935"/>
-          </a:solidFill>
-          <a:ln w="19050">
-            <a:solidFill>
-              <a:srgbClr val="FFFFFF"/>
-            </a:solidFill>
-            <a:prstDash val="solid"/>
-          </a:ln>
-        </p:spPr>
-      </p:sp>
-      <p:sp>
-        <p:nvSpPr>
-          <p:cNvPr id="180" name="Text 178"/>
-          <p:cNvSpPr/>
-          <p:nvPr/>
-        </p:nvSpPr>
-        <p:spPr>
-          <a:xfrm>
-            <a:off x="648135" y="2514600"/>
-            <a:ext cx="1645920" cy="109728"/>
-          </a:xfrm>
-          <a:prstGeom prst="rect">
-            <a:avLst/>
-          </a:prstGeom>
-          <a:noFill/>
-          <a:ln/>
-        </p:spPr>
-        <p:txBody>
-          <a:bodyPr wrap="square" lIns="0" tIns="0" rIns="0" bIns="0" rtlCol="0" anchor="b">
-            <a:normAutofit/>
-          </a:bodyPr>
-          <a:lstStyle/>
-          <a:p>
-            <a:pPr rtl="1" algn="ctr" indent="0" marL="0">
-              <a:buNone/>
-            </a:pPr>
-            <a:r>
-              <a:rPr lang="ar-SA" altLang="en-US" sz="550" dirty="0">
-                <a:solidFill>
-                  <a:srgbClr val="556070"/>
-                </a:solidFill>
-                <a:latin typeface="Arial" pitchFamily="34" charset="0"/>
-                <a:ea typeface="Arial" pitchFamily="34" charset="-122"/>
-                <a:cs typeface="Arial" pitchFamily="34" charset="-120"/>
-              </a:rPr>
-              <a:t>اكتمال أساسات المبنى</a:t>
-            </a:r>
-            <a:endParaRPr lang="ar-SA" sz="550" dirty="0"/>
-          </a:p>
-        </p:txBody>
-      </p:sp>
-      <p:sp>
-        <p:nvSpPr>
-          <p:cNvPr id="181" name="Text 179"/>
-          <p:cNvSpPr/>
-          <p:nvPr/>
-        </p:nvSpPr>
-        <p:spPr>
-          <a:xfrm>
-            <a:off x="648135" y="2624328"/>
-            <a:ext cx="1645920" cy="118872"/>
-          </a:xfrm>
-          <a:prstGeom prst="rect">
-            <a:avLst/>
-          </a:prstGeom>
-          <a:noFill/>
-          <a:ln/>
-        </p:spPr>
-        <p:txBody>
-          <a:bodyPr wrap="square" lIns="0" tIns="0" rIns="0" bIns="0" rtlCol="0" anchor="ctr">
-            <a:normAutofit/>
-          </a:bodyPr>
-          <a:lstStyle/>
-          <a:p>
-            <a:pPr rtl="1" algn="ctr" indent="0" marL="0">
-              <a:buNone/>
-            </a:pPr>
-            <a:r>
-              <a:rPr lang="ar-SA" altLang="en-US" sz="750" b="1" dirty="0">
-                <a:solidFill>
-                  <a:srgbClr val="3D3935"/>
-                </a:solidFill>
-                <a:latin typeface="Arial" pitchFamily="34" charset="0"/>
-                <a:ea typeface="Arial" pitchFamily="34" charset="-122"/>
-                <a:cs typeface="Arial" pitchFamily="34" charset="-120"/>
-              </a:rPr>
-              <a:t>10 نوفمبر</a:t>
-            </a:r>
-            <a:endParaRPr lang="ar-SA" sz="750" dirty="0"/>
-          </a:p>
-        </p:txBody>
-      </p:sp>
-      <p:sp>
-        <p:nvSpPr>
-          <p:cNvPr id="182" name="Shape 180"/>
-          <p:cNvSpPr/>
-          <p:nvPr/>
-        </p:nvSpPr>
-        <p:spPr>
-          <a:xfrm>
-            <a:off x="708593" y="2752344"/>
-            <a:ext cx="164592" cy="164592"/>
-          </a:xfrm>
-          <a:prstGeom prst="diamond">
-            <a:avLst/>
-          </a:prstGeom>
-          <a:solidFill>
-            <a:srgbClr val="3D3935"/>
-          </a:solidFill>
-          <a:ln w="19050">
-            <a:solidFill>
-              <a:srgbClr val="FFFFFF"/>
-            </a:solidFill>
-            <a:prstDash val="solid"/>
-          </a:ln>
-        </p:spPr>
-      </p:sp>
-      <p:sp>
-        <p:nvSpPr>
-          <p:cNvPr id="183" name="Text 181"/>
-          <p:cNvSpPr/>
-          <p:nvPr/>
-        </p:nvSpPr>
-        <p:spPr>
-          <a:xfrm>
-            <a:off x="-32071" y="2926080"/>
-            <a:ext cx="1645920" cy="100584"/>
-          </a:xfrm>
-          <a:prstGeom prst="rect">
-            <a:avLst/>
-          </a:prstGeom>
-          <a:noFill/>
-          <a:ln/>
-        </p:spPr>
-        <p:txBody>
-          <a:bodyPr wrap="square" lIns="0" tIns="0" rIns="0" bIns="0" rtlCol="0" anchor="t">
-            <a:normAutofit/>
-          </a:bodyPr>
-          <a:lstStyle/>
-          <a:p>
-            <a:pPr rtl="1" algn="ctr" indent="0" marL="0">
-              <a:buNone/>
-            </a:pPr>
-            <a:r>
-              <a:rPr lang="ar-SA" altLang="en-US" sz="550" dirty="0">
-                <a:solidFill>
-                  <a:srgbClr val="556070"/>
-                </a:solidFill>
-                <a:latin typeface="Arial" pitchFamily="34" charset="0"/>
-                <a:ea typeface="Arial" pitchFamily="34" charset="-122"/>
-                <a:cs typeface="Arial" pitchFamily="34" charset="-120"/>
-              </a:rPr>
-              <a:t>الإنجاز الكلي</a:t>
-            </a:r>
-            <a:endParaRPr lang="ar-SA" sz="550" dirty="0"/>
-          </a:p>
-        </p:txBody>
-      </p:sp>
-      <p:sp>
-        <p:nvSpPr>
-          <p:cNvPr id="184" name="Text 182"/>
-          <p:cNvSpPr/>
-          <p:nvPr/>
-        </p:nvSpPr>
-        <p:spPr>
-          <a:xfrm>
-            <a:off x="-32071" y="3017520"/>
-            <a:ext cx="1645920" cy="128016"/>
-          </a:xfrm>
-          <a:prstGeom prst="rect">
-            <a:avLst/>
-          </a:prstGeom>
-          <a:noFill/>
-          <a:ln/>
-        </p:spPr>
-        <p:txBody>
-          <a:bodyPr wrap="square" lIns="0" tIns="0" rIns="0" bIns="0" rtlCol="0" anchor="ctr">
-            <a:normAutofit/>
-          </a:bodyPr>
-          <a:lstStyle/>
-          <a:p>
-            <a:pPr rtl="1" algn="ctr" indent="0" marL="0">
-              <a:buNone/>
-            </a:pPr>
-            <a:r>
-              <a:rPr lang="ar-SA" altLang="en-US" sz="750" b="1" dirty="0">
-                <a:solidFill>
-                  <a:srgbClr val="3D3935"/>
-                </a:solidFill>
-                <a:latin typeface="Arial" pitchFamily="34" charset="0"/>
-                <a:ea typeface="Arial" pitchFamily="34" charset="-122"/>
-                <a:cs typeface="Arial" pitchFamily="34" charset="-120"/>
-              </a:rPr>
-              <a:t>14 نوفمبر</a:t>
-            </a:r>
-            <a:endParaRPr lang="ar-SA" sz="750" dirty="0"/>
-          </a:p>
-        </p:txBody>
-      </p:sp>
-      <p:sp>
-        <p:nvSpPr>
-          <p:cNvPr id="185" name="Shape 183"/>
-          <p:cNvSpPr/>
-          <p:nvPr/>
-        </p:nvSpPr>
-        <p:spPr>
-          <a:xfrm>
-            <a:off x="365760" y="3154680"/>
-            <a:ext cx="11460175" cy="192786"/>
-          </a:xfrm>
-          <a:prstGeom prst="rect">
-            <a:avLst/>
-          </a:prstGeom>
-          <a:solidFill>
-            <a:srgbClr val="FFFFFF"/>
+          <p:cNvPr id="189" name="Shape 187"/>
+          <p:cNvSpPr/>
+          <p:nvPr/>
+        </p:nvSpPr>
+        <p:spPr>
+          <a:xfrm>
+            <a:off x="365760" y="3012186"/>
+            <a:ext cx="11460175" cy="223266"/>
+          </a:xfrm>
+          <a:prstGeom prst="rect">
+            <a:avLst/>
+          </a:prstGeom>
+          <a:solidFill>
+            <a:srgbClr val="F6F9FA"/>
           </a:solidFill>
           <a:ln w="6350">
             <a:solidFill>
@@ -13022,425 +13156,13 @@
       </p:sp>
       <p:sp>
         <p:nvSpPr>
-          <p:cNvPr id="186" name="Shape 184"/>
-          <p:cNvSpPr/>
-          <p:nvPr/>
-        </p:nvSpPr>
-        <p:spPr>
-          <a:xfrm>
-            <a:off x="11515039" y="3132201"/>
-            <a:ext cx="237744" cy="237744"/>
-          </a:xfrm>
-          <a:prstGeom prst="ellipse">
-            <a:avLst/>
-          </a:prstGeom>
-          <a:solidFill>
-            <a:srgbClr val="C8503F"/>
-          </a:solidFill>
-          <a:ln w="19050">
-            <a:solidFill>
-              <a:srgbClr val="222222"/>
-            </a:solidFill>
-            <a:prstDash val="solid"/>
-          </a:ln>
-        </p:spPr>
-      </p:sp>
-      <p:sp>
-        <p:nvSpPr>
-          <p:cNvPr id="187" name="Text 185"/>
-          <p:cNvSpPr/>
-          <p:nvPr/>
-        </p:nvSpPr>
-        <p:spPr>
-          <a:xfrm>
-            <a:off x="11441887" y="3154680"/>
-            <a:ext cx="384048" cy="192786"/>
-          </a:xfrm>
-          <a:prstGeom prst="rect">
-            <a:avLst/>
-          </a:prstGeom>
-          <a:noFill/>
-          <a:ln/>
-        </p:spPr>
-        <p:txBody>
-          <a:bodyPr wrap="square" lIns="0" tIns="0" rIns="0" bIns="0" rtlCol="0" anchor="ctr">
-            <a:normAutofit/>
-          </a:bodyPr>
-          <a:lstStyle/>
-          <a:p>
-            <a:pPr rtl="1" algn="ctr" indent="0" marL="0">
-              <a:buNone/>
-            </a:pPr>
-            <a:r>
-              <a:rPr lang="ar-SA" altLang="en-US" sz="850" b="1" dirty="0">
-                <a:solidFill>
-                  <a:srgbClr val="FFFFFF"/>
-                </a:solidFill>
-                <a:latin typeface="Arial" pitchFamily="34" charset="0"/>
-                <a:ea typeface="Arial" pitchFamily="34" charset="-122"/>
-                <a:cs typeface="Arial" pitchFamily="34" charset="-120"/>
-              </a:rPr>
-              <a:t>A</a:t>
-            </a:r>
-            <a:endParaRPr lang="ar-SA" sz="850" dirty="0"/>
-          </a:p>
-        </p:txBody>
-      </p:sp>
-      <p:sp>
-        <p:nvSpPr>
-          <p:cNvPr id="188" name="Text 186"/>
-          <p:cNvSpPr/>
-          <p:nvPr/>
-        </p:nvSpPr>
-        <p:spPr>
-          <a:xfrm>
-            <a:off x="8762695" y="3154680"/>
-            <a:ext cx="2606040" cy="192786"/>
-          </a:xfrm>
-          <a:prstGeom prst="rect">
-            <a:avLst/>
-          </a:prstGeom>
-          <a:noFill/>
-          <a:ln/>
-        </p:spPr>
-        <p:txBody>
-          <a:bodyPr wrap="square" lIns="0" tIns="0" rIns="0" bIns="0" rtlCol="0" anchor="ctr">
-            <a:normAutofit/>
-          </a:bodyPr>
-          <a:lstStyle/>
-          <a:p>
-            <a:pPr rtl="1" algn="r" indent="0" marL="0">
-              <a:buNone/>
-            </a:pPr>
-            <a:r>
-              <a:rPr lang="ar-SA" altLang="en-US" sz="750" b="1" dirty="0">
-                <a:solidFill>
-                  <a:srgbClr val="222222"/>
-                </a:solidFill>
-                <a:latin typeface="Arial" pitchFamily="34" charset="0"/>
-                <a:ea typeface="Arial" pitchFamily="34" charset="-122"/>
-                <a:cs typeface="Arial" pitchFamily="34" charset="-120"/>
-              </a:rPr>
-              <a:t>تركيب نظام الدعم (Shoring)</a:t>
-            </a:r>
-            <a:endParaRPr lang="ar-SA" sz="750" dirty="0"/>
-          </a:p>
-        </p:txBody>
-      </p:sp>
-      <p:sp>
-        <p:nvSpPr>
-          <p:cNvPr id="189" name="Text 187"/>
-          <p:cNvSpPr/>
-          <p:nvPr/>
-        </p:nvSpPr>
-        <p:spPr>
-          <a:xfrm>
-            <a:off x="7967167" y="3154680"/>
-            <a:ext cx="777240" cy="192786"/>
-          </a:xfrm>
-          <a:prstGeom prst="rect">
-            <a:avLst/>
-          </a:prstGeom>
-          <a:noFill/>
-          <a:ln/>
-        </p:spPr>
-        <p:txBody>
-          <a:bodyPr wrap="square" lIns="0" tIns="0" rIns="0" bIns="0" rtlCol="0" anchor="ctr">
-            <a:normAutofit/>
-          </a:bodyPr>
-          <a:lstStyle/>
-          <a:p>
-            <a:pPr rtl="1" algn="ctr" indent="0" marL="0">
-              <a:buNone/>
-            </a:pPr>
-            <a:r>
-              <a:rPr lang="ar-SA" altLang="en-US" sz="700" dirty="0">
-                <a:solidFill>
-                  <a:srgbClr val="444444"/>
-                </a:solidFill>
-                <a:latin typeface="Arial" pitchFamily="34" charset="0"/>
-                <a:ea typeface="Arial" pitchFamily="34" charset="-122"/>
-                <a:cs typeface="Arial" pitchFamily="34" charset="-120"/>
-              </a:rPr>
-              <a:t>—</a:t>
-            </a:r>
-            <a:endParaRPr lang="ar-SA" sz="700" dirty="0"/>
-          </a:p>
-        </p:txBody>
-      </p:sp>
-      <p:sp>
-        <p:nvSpPr>
-          <p:cNvPr id="190" name="Text 188"/>
-          <p:cNvSpPr/>
-          <p:nvPr/>
-        </p:nvSpPr>
-        <p:spPr>
-          <a:xfrm>
-            <a:off x="7464247" y="3154680"/>
-            <a:ext cx="502920" cy="192786"/>
-          </a:xfrm>
-          <a:prstGeom prst="rect">
-            <a:avLst/>
-          </a:prstGeom>
-          <a:noFill/>
-          <a:ln/>
-        </p:spPr>
-        <p:txBody>
-          <a:bodyPr wrap="square" lIns="0" tIns="0" rIns="0" bIns="0" rtlCol="0" anchor="ctr">
-            <a:normAutofit/>
-          </a:bodyPr>
-          <a:lstStyle/>
-          <a:p>
-            <a:pPr rtl="1" algn="ctr" indent="0" marL="0">
-              <a:buNone/>
-            </a:pPr>
-            <a:r>
-              <a:rPr lang="ar-SA" altLang="en-US" sz="900" b="1" dirty="0">
-                <a:solidFill>
-                  <a:srgbClr val="222222"/>
-                </a:solidFill>
-                <a:latin typeface="Arial" pitchFamily="34" charset="0"/>
-                <a:ea typeface="Arial" pitchFamily="34" charset="-122"/>
-                <a:cs typeface="Arial" pitchFamily="34" charset="-120"/>
-              </a:rPr>
-              <a:t>4</a:t>
-            </a:r>
-            <a:endParaRPr lang="ar-SA" sz="900" dirty="0"/>
-          </a:p>
-        </p:txBody>
-      </p:sp>
-      <p:sp>
-        <p:nvSpPr>
-          <p:cNvPr id="191" name="Text 189"/>
-          <p:cNvSpPr/>
-          <p:nvPr/>
-        </p:nvSpPr>
-        <p:spPr>
-          <a:xfrm>
-            <a:off x="6805879" y="3154680"/>
-            <a:ext cx="658368" cy="192786"/>
-          </a:xfrm>
-          <a:prstGeom prst="rect">
-            <a:avLst/>
-          </a:prstGeom>
-          <a:noFill/>
-          <a:ln/>
-        </p:spPr>
-        <p:txBody>
-          <a:bodyPr wrap="square" lIns="0" tIns="0" rIns="0" bIns="0" rtlCol="0" anchor="ctr">
-            <a:normAutofit/>
-          </a:bodyPr>
-          <a:lstStyle/>
-          <a:p>
-            <a:pPr rtl="1" algn="ctr" indent="0" marL="0">
-              <a:buNone/>
-            </a:pPr>
-            <a:r>
-              <a:rPr lang="ar-SA" altLang="en-US" sz="700" b="1" dirty="0">
-                <a:solidFill>
-                  <a:srgbClr val="222222"/>
-                </a:solidFill>
-                <a:latin typeface="Arial" pitchFamily="34" charset="0"/>
-                <a:ea typeface="Arial" pitchFamily="34" charset="-122"/>
-                <a:cs typeface="Arial" pitchFamily="34" charset="-120"/>
-              </a:rPr>
-              <a:t>22 أكتوبر</a:t>
-            </a:r>
-            <a:endParaRPr lang="ar-SA" sz="700" dirty="0"/>
-          </a:p>
-        </p:txBody>
-      </p:sp>
-      <p:sp>
-        <p:nvSpPr>
-          <p:cNvPr id="192" name="Text 190"/>
-          <p:cNvSpPr/>
-          <p:nvPr/>
-        </p:nvSpPr>
-        <p:spPr>
-          <a:xfrm>
-            <a:off x="6147511" y="3154680"/>
-            <a:ext cx="658368" cy="192786"/>
-          </a:xfrm>
-          <a:prstGeom prst="rect">
-            <a:avLst/>
-          </a:prstGeom>
-          <a:noFill/>
-          <a:ln/>
-        </p:spPr>
-        <p:txBody>
-          <a:bodyPr wrap="square" lIns="0" tIns="0" rIns="0" bIns="0" rtlCol="0" anchor="ctr">
-            <a:normAutofit/>
-          </a:bodyPr>
-          <a:lstStyle/>
-          <a:p>
-            <a:pPr rtl="1" algn="ctr" indent="0" marL="0">
-              <a:buNone/>
-            </a:pPr>
-            <a:r>
-              <a:rPr lang="ar-SA" altLang="en-US" sz="700" b="1" dirty="0">
-                <a:solidFill>
-                  <a:srgbClr val="222222"/>
-                </a:solidFill>
-                <a:latin typeface="Arial" pitchFamily="34" charset="0"/>
-                <a:ea typeface="Arial" pitchFamily="34" charset="-122"/>
-                <a:cs typeface="Arial" pitchFamily="34" charset="-120"/>
-              </a:rPr>
-              <a:t>26 أكتوبر</a:t>
-            </a:r>
-            <a:endParaRPr lang="ar-SA" sz="700" dirty="0"/>
-          </a:p>
-        </p:txBody>
-      </p:sp>
-      <p:sp>
-        <p:nvSpPr>
-          <p:cNvPr id="193" name="Shape 191"/>
-          <p:cNvSpPr/>
-          <p:nvPr/>
-        </p:nvSpPr>
-        <p:spPr>
-          <a:xfrm>
-            <a:off x="3936842" y="3191637"/>
-            <a:ext cx="850258" cy="64008"/>
-          </a:xfrm>
-          <a:prstGeom prst="rect">
-            <a:avLst/>
-          </a:prstGeom>
-          <a:solidFill>
-            <a:srgbClr val="C8503F"/>
-          </a:solidFill>
-          <a:ln w="12700">
-            <a:solidFill>
-              <a:srgbClr val="C8503F"/>
-            </a:solidFill>
-            <a:prstDash val="solid"/>
-          </a:ln>
-        </p:spPr>
-      </p:sp>
-      <p:sp>
-        <p:nvSpPr>
-          <p:cNvPr id="194" name="Shape 192"/>
-          <p:cNvSpPr/>
-          <p:nvPr/>
-        </p:nvSpPr>
-        <p:spPr>
-          <a:xfrm flipV="1">
-            <a:off x="4723091" y="3255645"/>
-            <a:ext cx="64008" cy="54864"/>
-          </a:xfrm>
-          <a:prstGeom prst="triangle">
-            <a:avLst/>
-          </a:prstGeom>
-          <a:solidFill>
-            <a:srgbClr val="C8503F"/>
-          </a:solidFill>
-          <a:ln w="12700">
-            <a:solidFill>
-              <a:srgbClr val="C8503F"/>
-            </a:solidFill>
-            <a:prstDash val="solid"/>
-          </a:ln>
-        </p:spPr>
-      </p:sp>
-      <p:sp>
-        <p:nvSpPr>
-          <p:cNvPr id="195" name="Shape 193"/>
-          <p:cNvSpPr/>
-          <p:nvPr/>
-        </p:nvSpPr>
-        <p:spPr>
-          <a:xfrm flipV="1">
-            <a:off x="3936842" y="3255645"/>
-            <a:ext cx="64008" cy="54864"/>
-          </a:xfrm>
-          <a:prstGeom prst="triangle">
-            <a:avLst/>
-          </a:prstGeom>
-          <a:solidFill>
-            <a:srgbClr val="C8503F"/>
-          </a:solidFill>
-          <a:ln w="12700">
-            <a:solidFill>
-              <a:srgbClr val="C8503F"/>
-            </a:solidFill>
-            <a:prstDash val="solid"/>
-          </a:ln>
-        </p:spPr>
-      </p:sp>
-      <p:sp>
-        <p:nvSpPr>
-          <p:cNvPr id="196" name="Text 194"/>
-          <p:cNvSpPr/>
-          <p:nvPr/>
-        </p:nvSpPr>
-        <p:spPr>
-          <a:xfrm>
-            <a:off x="3342482" y="3154680"/>
-            <a:ext cx="548640" cy="192786"/>
-          </a:xfrm>
-          <a:prstGeom prst="rect">
-            <a:avLst/>
-          </a:prstGeom>
-          <a:noFill/>
-          <a:ln/>
-        </p:spPr>
-        <p:txBody>
-          <a:bodyPr wrap="square" lIns="0" tIns="0" rIns="0" bIns="0" rtlCol="0" anchor="ctr">
-            <a:normAutofit/>
-          </a:bodyPr>
-          <a:lstStyle/>
-          <a:p>
-            <a:pPr rtl="1" algn="r" indent="0" marL="0">
-              <a:buNone/>
-            </a:pPr>
-            <a:r>
-              <a:rPr lang="ar-SA" altLang="en-US" sz="750" b="1" dirty="0">
-                <a:solidFill>
-                  <a:srgbClr val="3D3935"/>
-                </a:solidFill>
-                <a:latin typeface="Arial" pitchFamily="34" charset="0"/>
-                <a:ea typeface="Arial" pitchFamily="34" charset="-122"/>
-                <a:cs typeface="Arial" pitchFamily="34" charset="-120"/>
-              </a:rPr>
-              <a:t>4 يوم</a:t>
-            </a:r>
-            <a:endParaRPr lang="ar-SA" sz="750" dirty="0"/>
-          </a:p>
-        </p:txBody>
-      </p:sp>
-      <p:sp>
-        <p:nvSpPr>
-          <p:cNvPr id="197" name="Shape 195"/>
-          <p:cNvSpPr/>
-          <p:nvPr/>
-        </p:nvSpPr>
-        <p:spPr>
-          <a:xfrm>
-            <a:off x="365760" y="3347466"/>
-            <a:ext cx="11460175" cy="192786"/>
-          </a:xfrm>
-          <a:prstGeom prst="rect">
-            <a:avLst/>
-          </a:prstGeom>
-          <a:solidFill>
-            <a:srgbClr val="F6F9FA"/>
-          </a:solidFill>
-          <a:ln w="6350">
-            <a:solidFill>
-              <a:srgbClr val="DFE6EA"/>
-            </a:solidFill>
-            <a:prstDash val="solid"/>
-          </a:ln>
-        </p:spPr>
-      </p:sp>
-      <p:sp>
-        <p:nvSpPr>
-          <p:cNvPr id="198" name="Shape 196"/>
-          <p:cNvSpPr/>
-          <p:nvPr/>
-        </p:nvSpPr>
-        <p:spPr>
-          <a:xfrm>
-            <a:off x="11441887" y="3366135"/>
+          <p:cNvPr id="190" name="Shape 188"/>
+          <p:cNvSpPr/>
+          <p:nvPr/>
+        </p:nvSpPr>
+        <p:spPr>
+          <a:xfrm>
+            <a:off x="11441887" y="3046095"/>
             <a:ext cx="329184" cy="155448"/>
           </a:xfrm>
           <a:prstGeom prst="roundRect">
@@ -13461,14 +13183,14 @@
       </p:sp>
       <p:sp>
         <p:nvSpPr>
-          <p:cNvPr id="199" name="Text 197"/>
-          <p:cNvSpPr/>
-          <p:nvPr/>
-        </p:nvSpPr>
-        <p:spPr>
-          <a:xfrm>
-            <a:off x="11414455" y="3347466"/>
-            <a:ext cx="384048" cy="192786"/>
+          <p:cNvPr id="191" name="Text 189"/>
+          <p:cNvSpPr/>
+          <p:nvPr/>
+        </p:nvSpPr>
+        <p:spPr>
+          <a:xfrm>
+            <a:off x="11414455" y="3012186"/>
+            <a:ext cx="384048" cy="223266"/>
           </a:xfrm>
           <a:prstGeom prst="rect">
             <a:avLst/>
@@ -13502,14 +13224,14 @@
       </p:sp>
       <p:sp>
         <p:nvSpPr>
-          <p:cNvPr id="200" name="Text 198"/>
-          <p:cNvSpPr/>
-          <p:nvPr/>
-        </p:nvSpPr>
-        <p:spPr>
-          <a:xfrm>
-            <a:off x="8762695" y="3347466"/>
-            <a:ext cx="2441448" cy="192786"/>
+          <p:cNvPr id="192" name="Text 190"/>
+          <p:cNvSpPr/>
+          <p:nvPr/>
+        </p:nvSpPr>
+        <p:spPr>
+          <a:xfrm>
+            <a:off x="8762695" y="3012186"/>
+            <a:ext cx="2441448" cy="223266"/>
           </a:xfrm>
           <a:prstGeom prst="rect">
             <a:avLst/>
@@ -13543,14 +13265,14 @@
       </p:sp>
       <p:sp>
         <p:nvSpPr>
-          <p:cNvPr id="201" name="Text 199"/>
-          <p:cNvSpPr/>
-          <p:nvPr/>
-        </p:nvSpPr>
-        <p:spPr>
-          <a:xfrm>
-            <a:off x="7967167" y="3347466"/>
-            <a:ext cx="777240" cy="192786"/>
+          <p:cNvPr id="193" name="Text 191"/>
+          <p:cNvSpPr/>
+          <p:nvPr/>
+        </p:nvSpPr>
+        <p:spPr>
+          <a:xfrm>
+            <a:off x="7967167" y="3012186"/>
+            <a:ext cx="777240" cy="223266"/>
           </a:xfrm>
           <a:prstGeom prst="rect">
             <a:avLst/>
@@ -13584,14 +13306,14 @@
       </p:sp>
       <p:sp>
         <p:nvSpPr>
-          <p:cNvPr id="202" name="Text 200"/>
-          <p:cNvSpPr/>
-          <p:nvPr/>
-        </p:nvSpPr>
-        <p:spPr>
-          <a:xfrm>
-            <a:off x="7464247" y="3347466"/>
-            <a:ext cx="502920" cy="192786"/>
+          <p:cNvPr id="194" name="Text 192"/>
+          <p:cNvSpPr/>
+          <p:nvPr/>
+        </p:nvSpPr>
+        <p:spPr>
+          <a:xfrm>
+            <a:off x="7464247" y="3012186"/>
+            <a:ext cx="502920" cy="223266"/>
           </a:xfrm>
           <a:prstGeom prst="rect">
             <a:avLst/>
@@ -13625,14 +13347,14 @@
       </p:sp>
       <p:sp>
         <p:nvSpPr>
-          <p:cNvPr id="203" name="Text 201"/>
-          <p:cNvSpPr/>
-          <p:nvPr/>
-        </p:nvSpPr>
-        <p:spPr>
-          <a:xfrm>
-            <a:off x="6805879" y="3347466"/>
-            <a:ext cx="658368" cy="192786"/>
+          <p:cNvPr id="195" name="Text 193"/>
+          <p:cNvSpPr/>
+          <p:nvPr/>
+        </p:nvSpPr>
+        <p:spPr>
+          <a:xfrm>
+            <a:off x="6805879" y="3012186"/>
+            <a:ext cx="658368" cy="223266"/>
           </a:xfrm>
           <a:prstGeom prst="rect">
             <a:avLst/>
@@ -13666,14 +13388,14 @@
       </p:sp>
       <p:sp>
         <p:nvSpPr>
-          <p:cNvPr id="204" name="Text 202"/>
-          <p:cNvSpPr/>
-          <p:nvPr/>
-        </p:nvSpPr>
-        <p:spPr>
-          <a:xfrm>
-            <a:off x="6147511" y="3347466"/>
-            <a:ext cx="658368" cy="192786"/>
+          <p:cNvPr id="196" name="Text 194"/>
+          <p:cNvSpPr/>
+          <p:nvPr/>
+        </p:nvSpPr>
+        <p:spPr>
+          <a:xfrm>
+            <a:off x="6147511" y="3012186"/>
+            <a:ext cx="658368" cy="223266"/>
           </a:xfrm>
           <a:prstGeom prst="rect">
             <a:avLst/>
@@ -13707,18 +13429,18 @@
       </p:sp>
       <p:sp>
         <p:nvSpPr>
-          <p:cNvPr id="205" name="Shape 203"/>
-          <p:cNvSpPr/>
-          <p:nvPr/>
-        </p:nvSpPr>
-        <p:spPr>
-          <a:xfrm>
-            <a:off x="4276945" y="3387951"/>
-            <a:ext cx="510155" cy="111816"/>
+          <p:cNvPr id="197" name="Shape 195"/>
+          <p:cNvSpPr/>
+          <p:nvPr/>
+        </p:nvSpPr>
+        <p:spPr>
+          <a:xfrm>
+            <a:off x="4276945" y="3059072"/>
+            <a:ext cx="510155" cy="129494"/>
           </a:xfrm>
           <a:prstGeom prst="roundRect">
             <a:avLst>
-              <a:gd name="adj" fmla="val 32711"/>
+              <a:gd name="adj" fmla="val 28245"/>
             </a:avLst>
           </a:prstGeom>
           <a:solidFill>
@@ -13741,14 +13463,14 @@
       </p:sp>
       <p:sp>
         <p:nvSpPr>
-          <p:cNvPr id="206" name="Text 204"/>
-          <p:cNvSpPr/>
-          <p:nvPr/>
-        </p:nvSpPr>
-        <p:spPr>
-          <a:xfrm>
-            <a:off x="4276945" y="3387951"/>
-            <a:ext cx="510155" cy="111816"/>
+          <p:cNvPr id="198" name="Text 196"/>
+          <p:cNvSpPr/>
+          <p:nvPr/>
+        </p:nvSpPr>
+        <p:spPr>
+          <a:xfrm>
+            <a:off x="4276945" y="3059072"/>
+            <a:ext cx="510155" cy="129494"/>
           </a:xfrm>
           <a:prstGeom prst="rect">
             <a:avLst/>
@@ -13782,14 +13504,14 @@
       </p:sp>
       <p:sp>
         <p:nvSpPr>
-          <p:cNvPr id="207" name="Shape 205"/>
-          <p:cNvSpPr/>
-          <p:nvPr/>
-        </p:nvSpPr>
-        <p:spPr>
-          <a:xfrm>
-            <a:off x="365760" y="3540252"/>
-            <a:ext cx="11460175" cy="192786"/>
+          <p:cNvPr id="199" name="Shape 197"/>
+          <p:cNvSpPr/>
+          <p:nvPr/>
+        </p:nvSpPr>
+        <p:spPr>
+          <a:xfrm>
+            <a:off x="365760" y="3235452"/>
+            <a:ext cx="11460175" cy="223266"/>
           </a:xfrm>
           <a:prstGeom prst="rect">
             <a:avLst/>
@@ -13807,13 +13529,13 @@
       </p:sp>
       <p:sp>
         <p:nvSpPr>
-          <p:cNvPr id="208" name="Shape 206"/>
-          <p:cNvSpPr/>
-          <p:nvPr/>
-        </p:nvSpPr>
-        <p:spPr>
-          <a:xfrm>
-            <a:off x="11441887" y="3558921"/>
+          <p:cNvPr id="200" name="Shape 198"/>
+          <p:cNvSpPr/>
+          <p:nvPr/>
+        </p:nvSpPr>
+        <p:spPr>
+          <a:xfrm>
+            <a:off x="11441887" y="3269361"/>
             <a:ext cx="329184" cy="155448"/>
           </a:xfrm>
           <a:prstGeom prst="roundRect">
@@ -13834,14 +13556,14 @@
       </p:sp>
       <p:sp>
         <p:nvSpPr>
-          <p:cNvPr id="209" name="Text 207"/>
-          <p:cNvSpPr/>
-          <p:nvPr/>
-        </p:nvSpPr>
-        <p:spPr>
-          <a:xfrm>
-            <a:off x="11414455" y="3540252"/>
-            <a:ext cx="384048" cy="192786"/>
+          <p:cNvPr id="201" name="Text 199"/>
+          <p:cNvSpPr/>
+          <p:nvPr/>
+        </p:nvSpPr>
+        <p:spPr>
+          <a:xfrm>
+            <a:off x="11414455" y="3235452"/>
+            <a:ext cx="384048" cy="223266"/>
           </a:xfrm>
           <a:prstGeom prst="rect">
             <a:avLst/>
@@ -13875,14 +13597,14 @@
       </p:sp>
       <p:sp>
         <p:nvSpPr>
-          <p:cNvPr id="210" name="Text 208"/>
-          <p:cNvSpPr/>
-          <p:nvPr/>
-        </p:nvSpPr>
-        <p:spPr>
-          <a:xfrm>
-            <a:off x="8762695" y="3540252"/>
-            <a:ext cx="2441448" cy="192786"/>
+          <p:cNvPr id="202" name="Text 200"/>
+          <p:cNvSpPr/>
+          <p:nvPr/>
+        </p:nvSpPr>
+        <p:spPr>
+          <a:xfrm>
+            <a:off x="8762695" y="3235452"/>
+            <a:ext cx="2441448" cy="223266"/>
           </a:xfrm>
           <a:prstGeom prst="rect">
             <a:avLst/>
@@ -13916,14 +13638,14 @@
       </p:sp>
       <p:sp>
         <p:nvSpPr>
-          <p:cNvPr id="211" name="Text 209"/>
-          <p:cNvSpPr/>
-          <p:nvPr/>
-        </p:nvSpPr>
-        <p:spPr>
-          <a:xfrm>
-            <a:off x="7967167" y="3540252"/>
-            <a:ext cx="777240" cy="192786"/>
+          <p:cNvPr id="203" name="Text 201"/>
+          <p:cNvSpPr/>
+          <p:nvPr/>
+        </p:nvSpPr>
+        <p:spPr>
+          <a:xfrm>
+            <a:off x="7967167" y="3235452"/>
+            <a:ext cx="777240" cy="223266"/>
           </a:xfrm>
           <a:prstGeom prst="rect">
             <a:avLst/>
@@ -13957,14 +13679,14 @@
       </p:sp>
       <p:sp>
         <p:nvSpPr>
-          <p:cNvPr id="212" name="Text 210"/>
-          <p:cNvSpPr/>
-          <p:nvPr/>
-        </p:nvSpPr>
-        <p:spPr>
-          <a:xfrm>
-            <a:off x="7464247" y="3540252"/>
-            <a:ext cx="502920" cy="192786"/>
+          <p:cNvPr id="204" name="Text 202"/>
+          <p:cNvSpPr/>
+          <p:nvPr/>
+        </p:nvSpPr>
+        <p:spPr>
+          <a:xfrm>
+            <a:off x="7464247" y="3235452"/>
+            <a:ext cx="502920" cy="223266"/>
           </a:xfrm>
           <a:prstGeom prst="rect">
             <a:avLst/>
@@ -13998,14 +13720,14 @@
       </p:sp>
       <p:sp>
         <p:nvSpPr>
-          <p:cNvPr id="213" name="Text 211"/>
-          <p:cNvSpPr/>
-          <p:nvPr/>
-        </p:nvSpPr>
-        <p:spPr>
-          <a:xfrm>
-            <a:off x="6805879" y="3540252"/>
-            <a:ext cx="658368" cy="192786"/>
+          <p:cNvPr id="205" name="Text 203"/>
+          <p:cNvSpPr/>
+          <p:nvPr/>
+        </p:nvSpPr>
+        <p:spPr>
+          <a:xfrm>
+            <a:off x="6805879" y="3235452"/>
+            <a:ext cx="658368" cy="223266"/>
           </a:xfrm>
           <a:prstGeom prst="rect">
             <a:avLst/>
@@ -14039,14 +13761,14 @@
       </p:sp>
       <p:sp>
         <p:nvSpPr>
-          <p:cNvPr id="214" name="Text 212"/>
-          <p:cNvSpPr/>
-          <p:nvPr/>
-        </p:nvSpPr>
-        <p:spPr>
-          <a:xfrm>
-            <a:off x="6147511" y="3540252"/>
-            <a:ext cx="658368" cy="192786"/>
+          <p:cNvPr id="206" name="Text 204"/>
+          <p:cNvSpPr/>
+          <p:nvPr/>
+        </p:nvSpPr>
+        <p:spPr>
+          <a:xfrm>
+            <a:off x="6147511" y="3235452"/>
+            <a:ext cx="658368" cy="223266"/>
           </a:xfrm>
           <a:prstGeom prst="rect">
             <a:avLst/>
@@ -14080,18 +13802,18 @@
       </p:sp>
       <p:sp>
         <p:nvSpPr>
-          <p:cNvPr id="215" name="Shape 213"/>
-          <p:cNvSpPr/>
-          <p:nvPr/>
-        </p:nvSpPr>
-        <p:spPr>
-          <a:xfrm>
-            <a:off x="4106893" y="3580737"/>
-            <a:ext cx="340103" cy="111816"/>
+          <p:cNvPr id="207" name="Shape 205"/>
+          <p:cNvSpPr/>
+          <p:nvPr/>
+        </p:nvSpPr>
+        <p:spPr>
+          <a:xfrm>
+            <a:off x="4106893" y="3282338"/>
+            <a:ext cx="340103" cy="129494"/>
           </a:xfrm>
           <a:prstGeom prst="roundRect">
             <a:avLst>
-              <a:gd name="adj" fmla="val 32711"/>
+              <a:gd name="adj" fmla="val 28245"/>
             </a:avLst>
           </a:prstGeom>
           <a:solidFill>
@@ -14114,14 +13836,14 @@
       </p:sp>
       <p:sp>
         <p:nvSpPr>
-          <p:cNvPr id="216" name="Text 214"/>
-          <p:cNvSpPr/>
-          <p:nvPr/>
-        </p:nvSpPr>
-        <p:spPr>
-          <a:xfrm>
-            <a:off x="4106893" y="3580737"/>
-            <a:ext cx="340103" cy="111816"/>
+          <p:cNvPr id="208" name="Text 206"/>
+          <p:cNvSpPr/>
+          <p:nvPr/>
+        </p:nvSpPr>
+        <p:spPr>
+          <a:xfrm>
+            <a:off x="4106893" y="3282338"/>
+            <a:ext cx="340103" cy="129494"/>
           </a:xfrm>
           <a:prstGeom prst="rect">
             <a:avLst/>
@@ -14155,14 +13877,14 @@
       </p:sp>
       <p:sp>
         <p:nvSpPr>
-          <p:cNvPr id="217" name="Shape 215"/>
-          <p:cNvSpPr/>
-          <p:nvPr/>
-        </p:nvSpPr>
-        <p:spPr>
-          <a:xfrm>
-            <a:off x="365760" y="3733038"/>
-            <a:ext cx="11460175" cy="192786"/>
+          <p:cNvPr id="209" name="Shape 207"/>
+          <p:cNvSpPr/>
+          <p:nvPr/>
+        </p:nvSpPr>
+        <p:spPr>
+          <a:xfrm>
+            <a:off x="365760" y="3458718"/>
+            <a:ext cx="11460175" cy="223266"/>
           </a:xfrm>
           <a:prstGeom prst="rect">
             <a:avLst/>
@@ -14180,13 +13902,13 @@
       </p:sp>
       <p:sp>
         <p:nvSpPr>
-          <p:cNvPr id="218" name="Shape 216"/>
-          <p:cNvSpPr/>
-          <p:nvPr/>
-        </p:nvSpPr>
-        <p:spPr>
-          <a:xfrm>
-            <a:off x="11441887" y="3751707"/>
+          <p:cNvPr id="210" name="Shape 208"/>
+          <p:cNvSpPr/>
+          <p:nvPr/>
+        </p:nvSpPr>
+        <p:spPr>
+          <a:xfrm>
+            <a:off x="11441887" y="3492627"/>
             <a:ext cx="329184" cy="155448"/>
           </a:xfrm>
           <a:prstGeom prst="roundRect">
@@ -14207,14 +13929,14 @@
       </p:sp>
       <p:sp>
         <p:nvSpPr>
-          <p:cNvPr id="219" name="Text 217"/>
-          <p:cNvSpPr/>
-          <p:nvPr/>
-        </p:nvSpPr>
-        <p:spPr>
-          <a:xfrm>
-            <a:off x="11414455" y="3733038"/>
-            <a:ext cx="384048" cy="192786"/>
+          <p:cNvPr id="211" name="Text 209"/>
+          <p:cNvSpPr/>
+          <p:nvPr/>
+        </p:nvSpPr>
+        <p:spPr>
+          <a:xfrm>
+            <a:off x="11414455" y="3458718"/>
+            <a:ext cx="384048" cy="223266"/>
           </a:xfrm>
           <a:prstGeom prst="rect">
             <a:avLst/>
@@ -14248,14 +13970,14 @@
       </p:sp>
       <p:sp>
         <p:nvSpPr>
-          <p:cNvPr id="220" name="Text 218"/>
-          <p:cNvSpPr/>
-          <p:nvPr/>
-        </p:nvSpPr>
-        <p:spPr>
-          <a:xfrm>
-            <a:off x="8762695" y="3733038"/>
-            <a:ext cx="2441448" cy="192786"/>
+          <p:cNvPr id="212" name="Text 210"/>
+          <p:cNvSpPr/>
+          <p:nvPr/>
+        </p:nvSpPr>
+        <p:spPr>
+          <a:xfrm>
+            <a:off x="8762695" y="3458718"/>
+            <a:ext cx="2441448" cy="223266"/>
           </a:xfrm>
           <a:prstGeom prst="rect">
             <a:avLst/>
@@ -14289,14 +14011,14 @@
       </p:sp>
       <p:sp>
         <p:nvSpPr>
-          <p:cNvPr id="221" name="Text 219"/>
-          <p:cNvSpPr/>
-          <p:nvPr/>
-        </p:nvSpPr>
-        <p:spPr>
-          <a:xfrm>
-            <a:off x="7967167" y="3733038"/>
-            <a:ext cx="777240" cy="192786"/>
+          <p:cNvPr id="213" name="Text 211"/>
+          <p:cNvSpPr/>
+          <p:nvPr/>
+        </p:nvSpPr>
+        <p:spPr>
+          <a:xfrm>
+            <a:off x="7967167" y="3458718"/>
+            <a:ext cx="777240" cy="223266"/>
           </a:xfrm>
           <a:prstGeom prst="rect">
             <a:avLst/>
@@ -14330,14 +14052,14 @@
       </p:sp>
       <p:sp>
         <p:nvSpPr>
-          <p:cNvPr id="222" name="Text 220"/>
-          <p:cNvSpPr/>
-          <p:nvPr/>
-        </p:nvSpPr>
-        <p:spPr>
-          <a:xfrm>
-            <a:off x="7464247" y="3733038"/>
-            <a:ext cx="502920" cy="192786"/>
+          <p:cNvPr id="214" name="Text 212"/>
+          <p:cNvSpPr/>
+          <p:nvPr/>
+        </p:nvSpPr>
+        <p:spPr>
+          <a:xfrm>
+            <a:off x="7464247" y="3458718"/>
+            <a:ext cx="502920" cy="223266"/>
           </a:xfrm>
           <a:prstGeom prst="rect">
             <a:avLst/>
@@ -14371,14 +14093,14 @@
       </p:sp>
       <p:sp>
         <p:nvSpPr>
-          <p:cNvPr id="223" name="Text 221"/>
-          <p:cNvSpPr/>
-          <p:nvPr/>
-        </p:nvSpPr>
-        <p:spPr>
-          <a:xfrm>
-            <a:off x="6805879" y="3733038"/>
-            <a:ext cx="658368" cy="192786"/>
+          <p:cNvPr id="215" name="Text 213"/>
+          <p:cNvSpPr/>
+          <p:nvPr/>
+        </p:nvSpPr>
+        <p:spPr>
+          <a:xfrm>
+            <a:off x="6805879" y="3458718"/>
+            <a:ext cx="658368" cy="223266"/>
           </a:xfrm>
           <a:prstGeom prst="rect">
             <a:avLst/>
@@ -14412,14 +14134,14 @@
       </p:sp>
       <p:sp>
         <p:nvSpPr>
-          <p:cNvPr id="224" name="Text 222"/>
-          <p:cNvSpPr/>
-          <p:nvPr/>
-        </p:nvSpPr>
-        <p:spPr>
-          <a:xfrm>
-            <a:off x="6147511" y="3733038"/>
-            <a:ext cx="658368" cy="192786"/>
+          <p:cNvPr id="216" name="Text 214"/>
+          <p:cNvSpPr/>
+          <p:nvPr/>
+        </p:nvSpPr>
+        <p:spPr>
+          <a:xfrm>
+            <a:off x="6147511" y="3458718"/>
+            <a:ext cx="658368" cy="223266"/>
           </a:xfrm>
           <a:prstGeom prst="rect">
             <a:avLst/>
@@ -14453,18 +14175,18 @@
       </p:sp>
       <p:sp>
         <p:nvSpPr>
-          <p:cNvPr id="225" name="Shape 223"/>
-          <p:cNvSpPr/>
-          <p:nvPr/>
-        </p:nvSpPr>
-        <p:spPr>
-          <a:xfrm>
-            <a:off x="3936842" y="3773523"/>
-            <a:ext cx="340103" cy="111816"/>
+          <p:cNvPr id="217" name="Shape 215"/>
+          <p:cNvSpPr/>
+          <p:nvPr/>
+        </p:nvSpPr>
+        <p:spPr>
+          <a:xfrm>
+            <a:off x="3936842" y="3505604"/>
+            <a:ext cx="340103" cy="129494"/>
           </a:xfrm>
           <a:prstGeom prst="roundRect">
             <a:avLst>
-              <a:gd name="adj" fmla="val 32711"/>
+              <a:gd name="adj" fmla="val 28245"/>
             </a:avLst>
           </a:prstGeom>
           <a:solidFill>
@@ -14487,14 +14209,14 @@
       </p:sp>
       <p:sp>
         <p:nvSpPr>
-          <p:cNvPr id="226" name="Text 224"/>
-          <p:cNvSpPr/>
-          <p:nvPr/>
-        </p:nvSpPr>
-        <p:spPr>
-          <a:xfrm>
-            <a:off x="3936842" y="3773523"/>
-            <a:ext cx="340103" cy="111816"/>
+          <p:cNvPr id="218" name="Text 216"/>
+          <p:cNvSpPr/>
+          <p:nvPr/>
+        </p:nvSpPr>
+        <p:spPr>
+          <a:xfrm>
+            <a:off x="3936842" y="3505604"/>
+            <a:ext cx="340103" cy="129494"/>
           </a:xfrm>
           <a:prstGeom prst="rect">
             <a:avLst/>
@@ -14528,14 +14250,14 @@
       </p:sp>
       <p:sp>
         <p:nvSpPr>
-          <p:cNvPr id="227" name="Shape 225"/>
-          <p:cNvSpPr/>
-          <p:nvPr/>
-        </p:nvSpPr>
-        <p:spPr>
-          <a:xfrm>
-            <a:off x="365760" y="3925824"/>
-            <a:ext cx="11460175" cy="192786"/>
+          <p:cNvPr id="219" name="Shape 217"/>
+          <p:cNvSpPr/>
+          <p:nvPr/>
+        </p:nvSpPr>
+        <p:spPr>
+          <a:xfrm>
+            <a:off x="365760" y="3681984"/>
+            <a:ext cx="11460175" cy="223266"/>
           </a:xfrm>
           <a:prstGeom prst="rect">
             <a:avLst/>
@@ -14553,13 +14275,13 @@
       </p:sp>
       <p:sp>
         <p:nvSpPr>
-          <p:cNvPr id="228" name="Shape 226"/>
-          <p:cNvSpPr/>
-          <p:nvPr/>
-        </p:nvSpPr>
-        <p:spPr>
-          <a:xfrm>
-            <a:off x="11441887" y="3944493"/>
+          <p:cNvPr id="220" name="Shape 218"/>
+          <p:cNvSpPr/>
+          <p:nvPr/>
+        </p:nvSpPr>
+        <p:spPr>
+          <a:xfrm>
+            <a:off x="11441887" y="3715893"/>
             <a:ext cx="329184" cy="155448"/>
           </a:xfrm>
           <a:prstGeom prst="roundRect">
@@ -14580,14 +14302,14 @@
       </p:sp>
       <p:sp>
         <p:nvSpPr>
-          <p:cNvPr id="229" name="Text 227"/>
-          <p:cNvSpPr/>
-          <p:nvPr/>
-        </p:nvSpPr>
-        <p:spPr>
-          <a:xfrm>
-            <a:off x="11414455" y="3925824"/>
-            <a:ext cx="384048" cy="192786"/>
+          <p:cNvPr id="221" name="Text 219"/>
+          <p:cNvSpPr/>
+          <p:nvPr/>
+        </p:nvSpPr>
+        <p:spPr>
+          <a:xfrm>
+            <a:off x="11414455" y="3681984"/>
+            <a:ext cx="384048" cy="223266"/>
           </a:xfrm>
           <a:prstGeom prst="rect">
             <a:avLst/>
@@ -14621,14 +14343,14 @@
       </p:sp>
       <p:sp>
         <p:nvSpPr>
-          <p:cNvPr id="230" name="Text 228"/>
-          <p:cNvSpPr/>
-          <p:nvPr/>
-        </p:nvSpPr>
-        <p:spPr>
-          <a:xfrm>
-            <a:off x="8762695" y="3925824"/>
-            <a:ext cx="2441448" cy="192786"/>
+          <p:cNvPr id="222" name="Text 220"/>
+          <p:cNvSpPr/>
+          <p:nvPr/>
+        </p:nvSpPr>
+        <p:spPr>
+          <a:xfrm>
+            <a:off x="8762695" y="3681984"/>
+            <a:ext cx="2441448" cy="223266"/>
           </a:xfrm>
           <a:prstGeom prst="rect">
             <a:avLst/>
@@ -14662,14 +14384,14 @@
       </p:sp>
       <p:sp>
         <p:nvSpPr>
-          <p:cNvPr id="231" name="Text 229"/>
-          <p:cNvSpPr/>
-          <p:nvPr/>
-        </p:nvSpPr>
-        <p:spPr>
-          <a:xfrm>
-            <a:off x="7967167" y="3925824"/>
-            <a:ext cx="777240" cy="192786"/>
+          <p:cNvPr id="223" name="Text 221"/>
+          <p:cNvSpPr/>
+          <p:nvPr/>
+        </p:nvSpPr>
+        <p:spPr>
+          <a:xfrm>
+            <a:off x="7967167" y="3681984"/>
+            <a:ext cx="777240" cy="223266"/>
           </a:xfrm>
           <a:prstGeom prst="rect">
             <a:avLst/>
@@ -14703,14 +14425,14 @@
       </p:sp>
       <p:sp>
         <p:nvSpPr>
-          <p:cNvPr id="232" name="Text 230"/>
-          <p:cNvSpPr/>
-          <p:nvPr/>
-        </p:nvSpPr>
-        <p:spPr>
-          <a:xfrm>
-            <a:off x="7464247" y="3925824"/>
-            <a:ext cx="502920" cy="192786"/>
+          <p:cNvPr id="224" name="Text 222"/>
+          <p:cNvSpPr/>
+          <p:nvPr/>
+        </p:nvSpPr>
+        <p:spPr>
+          <a:xfrm>
+            <a:off x="7464247" y="3681984"/>
+            <a:ext cx="502920" cy="223266"/>
           </a:xfrm>
           <a:prstGeom prst="rect">
             <a:avLst/>
@@ -14744,14 +14466,14 @@
       </p:sp>
       <p:sp>
         <p:nvSpPr>
-          <p:cNvPr id="233" name="Text 231"/>
-          <p:cNvSpPr/>
-          <p:nvPr/>
-        </p:nvSpPr>
-        <p:spPr>
-          <a:xfrm>
-            <a:off x="6805879" y="3925824"/>
-            <a:ext cx="658368" cy="192786"/>
+          <p:cNvPr id="225" name="Text 223"/>
+          <p:cNvSpPr/>
+          <p:nvPr/>
+        </p:nvSpPr>
+        <p:spPr>
+          <a:xfrm>
+            <a:off x="6805879" y="3681984"/>
+            <a:ext cx="658368" cy="223266"/>
           </a:xfrm>
           <a:prstGeom prst="rect">
             <a:avLst/>
@@ -14785,14 +14507,14 @@
       </p:sp>
       <p:sp>
         <p:nvSpPr>
-          <p:cNvPr id="234" name="Text 232"/>
-          <p:cNvSpPr/>
-          <p:nvPr/>
-        </p:nvSpPr>
-        <p:spPr>
-          <a:xfrm>
-            <a:off x="6147511" y="3925824"/>
-            <a:ext cx="658368" cy="192786"/>
+          <p:cNvPr id="226" name="Text 224"/>
+          <p:cNvSpPr/>
+          <p:nvPr/>
+        </p:nvSpPr>
+        <p:spPr>
+          <a:xfrm>
+            <a:off x="6147511" y="3681984"/>
+            <a:ext cx="658368" cy="223266"/>
           </a:xfrm>
           <a:prstGeom prst="rect">
             <a:avLst/>
@@ -14826,18 +14548,18 @@
       </p:sp>
       <p:sp>
         <p:nvSpPr>
-          <p:cNvPr id="235" name="Shape 233"/>
-          <p:cNvSpPr/>
-          <p:nvPr/>
-        </p:nvSpPr>
-        <p:spPr>
-          <a:xfrm>
-            <a:off x="3936842" y="3966309"/>
-            <a:ext cx="170052" cy="111816"/>
+          <p:cNvPr id="227" name="Shape 225"/>
+          <p:cNvSpPr/>
+          <p:nvPr/>
+        </p:nvSpPr>
+        <p:spPr>
+          <a:xfrm>
+            <a:off x="3936842" y="3728870"/>
+            <a:ext cx="170052" cy="129494"/>
           </a:xfrm>
           <a:prstGeom prst="roundRect">
             <a:avLst>
-              <a:gd name="adj" fmla="val 32711"/>
+              <a:gd name="adj" fmla="val 28245"/>
             </a:avLst>
           </a:prstGeom>
           <a:solidFill>
@@ -14860,14 +14582,14 @@
       </p:sp>
       <p:sp>
         <p:nvSpPr>
-          <p:cNvPr id="236" name="Shape 234"/>
-          <p:cNvSpPr/>
-          <p:nvPr/>
-        </p:nvSpPr>
-        <p:spPr>
-          <a:xfrm>
-            <a:off x="365760" y="4118610"/>
-            <a:ext cx="11460175" cy="192786"/>
+          <p:cNvPr id="228" name="Shape 226"/>
+          <p:cNvSpPr/>
+          <p:nvPr/>
+        </p:nvSpPr>
+        <p:spPr>
+          <a:xfrm>
+            <a:off x="365760" y="3905250"/>
+            <a:ext cx="11460175" cy="223266"/>
           </a:xfrm>
           <a:prstGeom prst="rect">
             <a:avLst/>
@@ -14885,13 +14607,13 @@
       </p:sp>
       <p:sp>
         <p:nvSpPr>
-          <p:cNvPr id="237" name="Shape 235"/>
-          <p:cNvSpPr/>
-          <p:nvPr/>
-        </p:nvSpPr>
-        <p:spPr>
-          <a:xfrm>
-            <a:off x="11441887" y="4137279"/>
+          <p:cNvPr id="229" name="Shape 227"/>
+          <p:cNvSpPr/>
+          <p:nvPr/>
+        </p:nvSpPr>
+        <p:spPr>
+          <a:xfrm>
+            <a:off x="11441887" y="3939159"/>
             <a:ext cx="329184" cy="155448"/>
           </a:xfrm>
           <a:prstGeom prst="roundRect">
@@ -14912,14 +14634,14 @@
       </p:sp>
       <p:sp>
         <p:nvSpPr>
-          <p:cNvPr id="238" name="Text 236"/>
-          <p:cNvSpPr/>
-          <p:nvPr/>
-        </p:nvSpPr>
-        <p:spPr>
-          <a:xfrm>
-            <a:off x="11414455" y="4118610"/>
-            <a:ext cx="384048" cy="192786"/>
+          <p:cNvPr id="230" name="Text 228"/>
+          <p:cNvSpPr/>
+          <p:nvPr/>
+        </p:nvSpPr>
+        <p:spPr>
+          <a:xfrm>
+            <a:off x="11414455" y="3905250"/>
+            <a:ext cx="384048" cy="223266"/>
           </a:xfrm>
           <a:prstGeom prst="rect">
             <a:avLst/>
@@ -14953,14 +14675,14 @@
       </p:sp>
       <p:sp>
         <p:nvSpPr>
-          <p:cNvPr id="239" name="Text 237"/>
-          <p:cNvSpPr/>
-          <p:nvPr/>
-        </p:nvSpPr>
-        <p:spPr>
-          <a:xfrm>
-            <a:off x="8762695" y="4118610"/>
-            <a:ext cx="2441448" cy="192786"/>
+          <p:cNvPr id="231" name="Text 229"/>
+          <p:cNvSpPr/>
+          <p:nvPr/>
+        </p:nvSpPr>
+        <p:spPr>
+          <a:xfrm>
+            <a:off x="8762695" y="3905250"/>
+            <a:ext cx="2441448" cy="223266"/>
           </a:xfrm>
           <a:prstGeom prst="rect">
             <a:avLst/>
@@ -14994,14 +14716,14 @@
       </p:sp>
       <p:sp>
         <p:nvSpPr>
-          <p:cNvPr id="240" name="Text 238"/>
-          <p:cNvSpPr/>
-          <p:nvPr/>
-        </p:nvSpPr>
-        <p:spPr>
-          <a:xfrm>
-            <a:off x="7967167" y="4118610"/>
-            <a:ext cx="777240" cy="192786"/>
+          <p:cNvPr id="232" name="Text 230"/>
+          <p:cNvSpPr/>
+          <p:nvPr/>
+        </p:nvSpPr>
+        <p:spPr>
+          <a:xfrm>
+            <a:off x="7967167" y="3905250"/>
+            <a:ext cx="777240" cy="223266"/>
           </a:xfrm>
           <a:prstGeom prst="rect">
             <a:avLst/>
@@ -15035,14 +14757,14 @@
       </p:sp>
       <p:sp>
         <p:nvSpPr>
-          <p:cNvPr id="241" name="Text 239"/>
-          <p:cNvSpPr/>
-          <p:nvPr/>
-        </p:nvSpPr>
-        <p:spPr>
-          <a:xfrm>
-            <a:off x="7464247" y="4118610"/>
-            <a:ext cx="502920" cy="192786"/>
+          <p:cNvPr id="233" name="Text 231"/>
+          <p:cNvSpPr/>
+          <p:nvPr/>
+        </p:nvSpPr>
+        <p:spPr>
+          <a:xfrm>
+            <a:off x="7464247" y="3905250"/>
+            <a:ext cx="502920" cy="223266"/>
           </a:xfrm>
           <a:prstGeom prst="rect">
             <a:avLst/>
@@ -15076,14 +14798,14 @@
       </p:sp>
       <p:sp>
         <p:nvSpPr>
-          <p:cNvPr id="242" name="Text 240"/>
-          <p:cNvSpPr/>
-          <p:nvPr/>
-        </p:nvSpPr>
-        <p:spPr>
-          <a:xfrm>
-            <a:off x="6805879" y="4118610"/>
-            <a:ext cx="658368" cy="192786"/>
+          <p:cNvPr id="234" name="Text 232"/>
+          <p:cNvSpPr/>
+          <p:nvPr/>
+        </p:nvSpPr>
+        <p:spPr>
+          <a:xfrm>
+            <a:off x="6805879" y="3905250"/>
+            <a:ext cx="658368" cy="223266"/>
           </a:xfrm>
           <a:prstGeom prst="rect">
             <a:avLst/>
@@ -15117,14 +14839,14 @@
       </p:sp>
       <p:sp>
         <p:nvSpPr>
-          <p:cNvPr id="243" name="Text 241"/>
-          <p:cNvSpPr/>
-          <p:nvPr/>
-        </p:nvSpPr>
-        <p:spPr>
-          <a:xfrm>
-            <a:off x="6147511" y="4118610"/>
-            <a:ext cx="658368" cy="192786"/>
+          <p:cNvPr id="235" name="Text 233"/>
+          <p:cNvSpPr/>
+          <p:nvPr/>
+        </p:nvSpPr>
+        <p:spPr>
+          <a:xfrm>
+            <a:off x="6147511" y="3905250"/>
+            <a:ext cx="658368" cy="223266"/>
           </a:xfrm>
           <a:prstGeom prst="rect">
             <a:avLst/>
@@ -15158,18 +14880,18 @@
       </p:sp>
       <p:sp>
         <p:nvSpPr>
-          <p:cNvPr id="244" name="Shape 242"/>
-          <p:cNvSpPr/>
-          <p:nvPr/>
-        </p:nvSpPr>
-        <p:spPr>
-          <a:xfrm>
-            <a:off x="3936842" y="4159095"/>
-            <a:ext cx="170052" cy="111816"/>
+          <p:cNvPr id="236" name="Shape 234"/>
+          <p:cNvSpPr/>
+          <p:nvPr/>
+        </p:nvSpPr>
+        <p:spPr>
+          <a:xfrm>
+            <a:off x="3936842" y="3952136"/>
+            <a:ext cx="170052" cy="129494"/>
           </a:xfrm>
           <a:prstGeom prst="roundRect">
             <a:avLst>
-              <a:gd name="adj" fmla="val 32711"/>
+              <a:gd name="adj" fmla="val 28245"/>
             </a:avLst>
           </a:prstGeom>
           <a:solidFill>
@@ -15192,314 +14914,314 @@
       </p:sp>
       <p:sp>
         <p:nvSpPr>
+          <p:cNvPr id="237" name="Shape 235"/>
+          <p:cNvSpPr/>
+          <p:nvPr/>
+        </p:nvSpPr>
+        <p:spPr>
+          <a:xfrm>
+            <a:off x="365760" y="4128516"/>
+            <a:ext cx="11460175" cy="223266"/>
+          </a:xfrm>
+          <a:prstGeom prst="rect">
+            <a:avLst/>
+          </a:prstGeom>
+          <a:solidFill>
+            <a:srgbClr val="FFFFFF"/>
+          </a:solidFill>
+          <a:ln w="6350">
+            <a:solidFill>
+              <a:srgbClr val="DFE6EA"/>
+            </a:solidFill>
+            <a:prstDash val="solid"/>
+          </a:ln>
+        </p:spPr>
+      </p:sp>
+      <p:sp>
+        <p:nvSpPr>
+          <p:cNvPr id="238" name="Shape 236"/>
+          <p:cNvSpPr/>
+          <p:nvPr/>
+        </p:nvSpPr>
+        <p:spPr>
+          <a:xfrm>
+            <a:off x="11515039" y="4121277"/>
+            <a:ext cx="237744" cy="237744"/>
+          </a:xfrm>
+          <a:prstGeom prst="ellipse">
+            <a:avLst/>
+          </a:prstGeom>
+          <a:solidFill>
+            <a:srgbClr val="00778B"/>
+          </a:solidFill>
+          <a:ln w="6350">
+            <a:solidFill>
+              <a:srgbClr val="00778B"/>
+            </a:solidFill>
+            <a:prstDash val="solid"/>
+          </a:ln>
+        </p:spPr>
+      </p:sp>
+      <p:sp>
+        <p:nvSpPr>
+          <p:cNvPr id="239" name="Text 237"/>
+          <p:cNvSpPr/>
+          <p:nvPr/>
+        </p:nvSpPr>
+        <p:spPr>
+          <a:xfrm>
+            <a:off x="11441887" y="4128516"/>
+            <a:ext cx="384048" cy="223266"/>
+          </a:xfrm>
+          <a:prstGeom prst="rect">
+            <a:avLst/>
+          </a:prstGeom>
+          <a:noFill/>
+          <a:ln/>
+        </p:spPr>
+        <p:txBody>
+          <a:bodyPr wrap="square" lIns="0" tIns="0" rIns="0" bIns="0" rtlCol="0" anchor="ctr">
+            <a:normAutofit/>
+          </a:bodyPr>
+          <a:lstStyle/>
+          <a:p>
+            <a:pPr rtl="1" algn="ctr" indent="0" marL="0">
+              <a:buNone/>
+            </a:pPr>
+            <a:r>
+              <a:rPr lang="ar-SA" altLang="en-US" sz="850" b="1" dirty="0">
+                <a:solidFill>
+                  <a:srgbClr val="FFFFFF"/>
+                </a:solidFill>
+                <a:latin typeface="Arial" pitchFamily="34" charset="0"/>
+                <a:ea typeface="Arial" pitchFamily="34" charset="-122"/>
+                <a:cs typeface="Arial" pitchFamily="34" charset="-120"/>
+              </a:rPr>
+              <a:t>B</a:t>
+            </a:r>
+            <a:endParaRPr lang="ar-SA" sz="850" dirty="0"/>
+          </a:p>
+        </p:txBody>
+      </p:sp>
+      <p:sp>
+        <p:nvSpPr>
+          <p:cNvPr id="240" name="Text 238"/>
+          <p:cNvSpPr/>
+          <p:nvPr/>
+        </p:nvSpPr>
+        <p:spPr>
+          <a:xfrm>
+            <a:off x="8762695" y="4128516"/>
+            <a:ext cx="2606040" cy="223266"/>
+          </a:xfrm>
+          <a:prstGeom prst="rect">
+            <a:avLst/>
+          </a:prstGeom>
+          <a:noFill/>
+          <a:ln/>
+        </p:spPr>
+        <p:txBody>
+          <a:bodyPr wrap="square" lIns="0" tIns="0" rIns="0" bIns="0" rtlCol="0" anchor="ctr">
+            <a:normAutofit/>
+          </a:bodyPr>
+          <a:lstStyle/>
+          <a:p>
+            <a:pPr rtl="1" algn="r" indent="0" marL="0">
+              <a:buNone/>
+            </a:pPr>
+            <a:r>
+              <a:rPr lang="ar-SA" altLang="en-US" sz="750" b="1" dirty="0">
+                <a:solidFill>
+                  <a:srgbClr val="222222"/>
+                </a:solidFill>
+                <a:latin typeface="Arial" pitchFamily="34" charset="0"/>
+                <a:ea typeface="Arial" pitchFamily="34" charset="-122"/>
+                <a:cs typeface="Arial" pitchFamily="34" charset="-120"/>
+              </a:rPr>
+              <a:t>الخرسانة العادية (Lean concrete)</a:t>
+            </a:r>
+            <a:endParaRPr lang="ar-SA" sz="750" dirty="0"/>
+          </a:p>
+        </p:txBody>
+      </p:sp>
+      <p:sp>
+        <p:nvSpPr>
+          <p:cNvPr id="241" name="Text 239"/>
+          <p:cNvSpPr/>
+          <p:nvPr/>
+        </p:nvSpPr>
+        <p:spPr>
+          <a:xfrm>
+            <a:off x="7967167" y="4128516"/>
+            <a:ext cx="777240" cy="223266"/>
+          </a:xfrm>
+          <a:prstGeom prst="rect">
+            <a:avLst/>
+          </a:prstGeom>
+          <a:noFill/>
+          <a:ln/>
+        </p:spPr>
+        <p:txBody>
+          <a:bodyPr wrap="square" lIns="0" tIns="0" rIns="0" bIns="0" rtlCol="0" anchor="ctr">
+            <a:normAutofit/>
+          </a:bodyPr>
+          <a:lstStyle/>
+          <a:p>
+            <a:pPr rtl="1" algn="ctr" indent="0" marL="0">
+              <a:buNone/>
+            </a:pPr>
+            <a:r>
+              <a:rPr lang="ar-SA" altLang="en-US" sz="700" dirty="0">
+                <a:solidFill>
+                  <a:srgbClr val="444444"/>
+                </a:solidFill>
+                <a:latin typeface="Arial" pitchFamily="34" charset="0"/>
+                <a:ea typeface="Arial" pitchFamily="34" charset="-122"/>
+                <a:cs typeface="Arial" pitchFamily="34" charset="-120"/>
+              </a:rPr>
+              <a:t>A · SS +4</a:t>
+            </a:r>
+            <a:endParaRPr lang="ar-SA" sz="700" dirty="0"/>
+          </a:p>
+        </p:txBody>
+      </p:sp>
+      <p:sp>
+        <p:nvSpPr>
+          <p:cNvPr id="242" name="Text 240"/>
+          <p:cNvSpPr/>
+          <p:nvPr/>
+        </p:nvSpPr>
+        <p:spPr>
+          <a:xfrm>
+            <a:off x="7464247" y="4128516"/>
+            <a:ext cx="502920" cy="223266"/>
+          </a:xfrm>
+          <a:prstGeom prst="rect">
+            <a:avLst/>
+          </a:prstGeom>
+          <a:noFill/>
+          <a:ln/>
+        </p:spPr>
+        <p:txBody>
+          <a:bodyPr wrap="square" lIns="0" tIns="0" rIns="0" bIns="0" rtlCol="0" anchor="ctr">
+            <a:normAutofit/>
+          </a:bodyPr>
+          <a:lstStyle/>
+          <a:p>
+            <a:pPr rtl="1" algn="ctr" indent="0" marL="0">
+              <a:buNone/>
+            </a:pPr>
+            <a:r>
+              <a:rPr lang="ar-SA" altLang="en-US" sz="900" b="1" dirty="0">
+                <a:solidFill>
+                  <a:srgbClr val="222222"/>
+                </a:solidFill>
+                <a:latin typeface="Arial" pitchFamily="34" charset="0"/>
+                <a:ea typeface="Arial" pitchFamily="34" charset="-122"/>
+                <a:cs typeface="Arial" pitchFamily="34" charset="-120"/>
+              </a:rPr>
+              <a:t>1</a:t>
+            </a:r>
+            <a:endParaRPr lang="ar-SA" sz="900" dirty="0"/>
+          </a:p>
+        </p:txBody>
+      </p:sp>
+      <p:sp>
+        <p:nvSpPr>
+          <p:cNvPr id="243" name="Text 241"/>
+          <p:cNvSpPr/>
+          <p:nvPr/>
+        </p:nvSpPr>
+        <p:spPr>
+          <a:xfrm>
+            <a:off x="6805879" y="4128516"/>
+            <a:ext cx="658368" cy="223266"/>
+          </a:xfrm>
+          <a:prstGeom prst="rect">
+            <a:avLst/>
+          </a:prstGeom>
+          <a:noFill/>
+          <a:ln/>
+        </p:spPr>
+        <p:txBody>
+          <a:bodyPr wrap="square" lIns="0" tIns="0" rIns="0" bIns="0" rtlCol="0" anchor="ctr">
+            <a:normAutofit/>
+          </a:bodyPr>
+          <a:lstStyle/>
+          <a:p>
+            <a:pPr rtl="1" algn="ctr" indent="0" marL="0">
+              <a:buNone/>
+            </a:pPr>
+            <a:r>
+              <a:rPr lang="ar-SA" altLang="en-US" sz="700" b="1" dirty="0">
+                <a:solidFill>
+                  <a:srgbClr val="222222"/>
+                </a:solidFill>
+                <a:latin typeface="Arial" pitchFamily="34" charset="0"/>
+                <a:ea typeface="Arial" pitchFamily="34" charset="-122"/>
+                <a:cs typeface="Arial" pitchFamily="34" charset="-120"/>
+              </a:rPr>
+              <a:t>27 أكتوبر</a:t>
+            </a:r>
+            <a:endParaRPr lang="ar-SA" sz="700" dirty="0"/>
+          </a:p>
+        </p:txBody>
+      </p:sp>
+      <p:sp>
+        <p:nvSpPr>
+          <p:cNvPr id="244" name="Text 242"/>
+          <p:cNvSpPr/>
+          <p:nvPr/>
+        </p:nvSpPr>
+        <p:spPr>
+          <a:xfrm>
+            <a:off x="6147511" y="4128516"/>
+            <a:ext cx="658368" cy="223266"/>
+          </a:xfrm>
+          <a:prstGeom prst="rect">
+            <a:avLst/>
+          </a:prstGeom>
+          <a:noFill/>
+          <a:ln/>
+        </p:spPr>
+        <p:txBody>
+          <a:bodyPr wrap="square" lIns="0" tIns="0" rIns="0" bIns="0" rtlCol="0" anchor="ctr">
+            <a:normAutofit/>
+          </a:bodyPr>
+          <a:lstStyle/>
+          <a:p>
+            <a:pPr rtl="1" algn="ctr" indent="0" marL="0">
+              <a:buNone/>
+            </a:pPr>
+            <a:r>
+              <a:rPr lang="ar-SA" altLang="en-US" sz="700" b="1" dirty="0">
+                <a:solidFill>
+                  <a:srgbClr val="222222"/>
+                </a:solidFill>
+                <a:latin typeface="Arial" pitchFamily="34" charset="0"/>
+                <a:ea typeface="Arial" pitchFamily="34" charset="-122"/>
+                <a:cs typeface="Arial" pitchFamily="34" charset="-120"/>
+              </a:rPr>
+              <a:t>27 أكتوبر</a:t>
+            </a:r>
+            <a:endParaRPr lang="ar-SA" sz="700" dirty="0"/>
+          </a:p>
+        </p:txBody>
+      </p:sp>
+      <p:sp>
+        <p:nvSpPr>
           <p:cNvPr id="245" name="Shape 243"/>
           <p:cNvSpPr/>
           <p:nvPr/>
         </p:nvSpPr>
         <p:spPr>
           <a:xfrm>
-            <a:off x="365760" y="4311396"/>
-            <a:ext cx="11460175" cy="192786"/>
-          </a:xfrm>
-          <a:prstGeom prst="rect">
-            <a:avLst/>
-          </a:prstGeom>
-          <a:solidFill>
-            <a:srgbClr val="FFFFFF"/>
-          </a:solidFill>
-          <a:ln w="6350">
-            <a:solidFill>
-              <a:srgbClr val="DFE6EA"/>
-            </a:solidFill>
-            <a:prstDash val="solid"/>
-          </a:ln>
-        </p:spPr>
-      </p:sp>
-      <p:sp>
-        <p:nvSpPr>
-          <p:cNvPr id="246" name="Shape 244"/>
-          <p:cNvSpPr/>
-          <p:nvPr/>
-        </p:nvSpPr>
-        <p:spPr>
-          <a:xfrm>
-            <a:off x="11515039" y="4288917"/>
-            <a:ext cx="237744" cy="237744"/>
-          </a:xfrm>
-          <a:prstGeom prst="ellipse">
-            <a:avLst/>
-          </a:prstGeom>
-          <a:solidFill>
-            <a:srgbClr val="00778B"/>
-          </a:solidFill>
-          <a:ln w="6350">
-            <a:solidFill>
-              <a:srgbClr val="00778B"/>
-            </a:solidFill>
-            <a:prstDash val="solid"/>
-          </a:ln>
-        </p:spPr>
-      </p:sp>
-      <p:sp>
-        <p:nvSpPr>
-          <p:cNvPr id="247" name="Text 245"/>
-          <p:cNvSpPr/>
-          <p:nvPr/>
-        </p:nvSpPr>
-        <p:spPr>
-          <a:xfrm>
-            <a:off x="11441887" y="4311396"/>
-            <a:ext cx="384048" cy="192786"/>
-          </a:xfrm>
-          <a:prstGeom prst="rect">
-            <a:avLst/>
-          </a:prstGeom>
-          <a:noFill/>
-          <a:ln/>
-        </p:spPr>
-        <p:txBody>
-          <a:bodyPr wrap="square" lIns="0" tIns="0" rIns="0" bIns="0" rtlCol="0" anchor="ctr">
-            <a:normAutofit/>
-          </a:bodyPr>
-          <a:lstStyle/>
-          <a:p>
-            <a:pPr rtl="1" algn="ctr" indent="0" marL="0">
-              <a:buNone/>
-            </a:pPr>
-            <a:r>
-              <a:rPr lang="ar-SA" altLang="en-US" sz="850" b="1" dirty="0">
-                <a:solidFill>
-                  <a:srgbClr val="FFFFFF"/>
-                </a:solidFill>
-                <a:latin typeface="Arial" pitchFamily="34" charset="0"/>
-                <a:ea typeface="Arial" pitchFamily="34" charset="-122"/>
-                <a:cs typeface="Arial" pitchFamily="34" charset="-120"/>
-              </a:rPr>
-              <a:t>B</a:t>
-            </a:r>
-            <a:endParaRPr lang="ar-SA" sz="850" dirty="0"/>
-          </a:p>
-        </p:txBody>
-      </p:sp>
-      <p:sp>
-        <p:nvSpPr>
-          <p:cNvPr id="248" name="Text 246"/>
-          <p:cNvSpPr/>
-          <p:nvPr/>
-        </p:nvSpPr>
-        <p:spPr>
-          <a:xfrm>
-            <a:off x="8762695" y="4311396"/>
-            <a:ext cx="2606040" cy="192786"/>
-          </a:xfrm>
-          <a:prstGeom prst="rect">
-            <a:avLst/>
-          </a:prstGeom>
-          <a:noFill/>
-          <a:ln/>
-        </p:spPr>
-        <p:txBody>
-          <a:bodyPr wrap="square" lIns="0" tIns="0" rIns="0" bIns="0" rtlCol="0" anchor="ctr">
-            <a:normAutofit/>
-          </a:bodyPr>
-          <a:lstStyle/>
-          <a:p>
-            <a:pPr rtl="1" algn="r" indent="0" marL="0">
-              <a:buNone/>
-            </a:pPr>
-            <a:r>
-              <a:rPr lang="ar-SA" altLang="en-US" sz="750" b="1" dirty="0">
-                <a:solidFill>
-                  <a:srgbClr val="222222"/>
-                </a:solidFill>
-                <a:latin typeface="Arial" pitchFamily="34" charset="0"/>
-                <a:ea typeface="Arial" pitchFamily="34" charset="-122"/>
-                <a:cs typeface="Arial" pitchFamily="34" charset="-120"/>
-              </a:rPr>
-              <a:t>الخرسانة العادية (Lean concrete)</a:t>
-            </a:r>
-            <a:endParaRPr lang="ar-SA" sz="750" dirty="0"/>
-          </a:p>
-        </p:txBody>
-      </p:sp>
-      <p:sp>
-        <p:nvSpPr>
-          <p:cNvPr id="249" name="Text 247"/>
-          <p:cNvSpPr/>
-          <p:nvPr/>
-        </p:nvSpPr>
-        <p:spPr>
-          <a:xfrm>
-            <a:off x="7967167" y="4311396"/>
-            <a:ext cx="777240" cy="192786"/>
-          </a:xfrm>
-          <a:prstGeom prst="rect">
-            <a:avLst/>
-          </a:prstGeom>
-          <a:noFill/>
-          <a:ln/>
-        </p:spPr>
-        <p:txBody>
-          <a:bodyPr wrap="square" lIns="0" tIns="0" rIns="0" bIns="0" rtlCol="0" anchor="ctr">
-            <a:normAutofit/>
-          </a:bodyPr>
-          <a:lstStyle/>
-          <a:p>
-            <a:pPr rtl="1" algn="ctr" indent="0" marL="0">
-              <a:buNone/>
-            </a:pPr>
-            <a:r>
-              <a:rPr lang="ar-SA" altLang="en-US" sz="700" dirty="0">
-                <a:solidFill>
-                  <a:srgbClr val="444444"/>
-                </a:solidFill>
-                <a:latin typeface="Arial" pitchFamily="34" charset="0"/>
-                <a:ea typeface="Arial" pitchFamily="34" charset="-122"/>
-                <a:cs typeface="Arial" pitchFamily="34" charset="-120"/>
-              </a:rPr>
-              <a:t>A · SS +4</a:t>
-            </a:r>
-            <a:endParaRPr lang="ar-SA" sz="700" dirty="0"/>
-          </a:p>
-        </p:txBody>
-      </p:sp>
-      <p:sp>
-        <p:nvSpPr>
-          <p:cNvPr id="250" name="Text 248"/>
-          <p:cNvSpPr/>
-          <p:nvPr/>
-        </p:nvSpPr>
-        <p:spPr>
-          <a:xfrm>
-            <a:off x="7464247" y="4311396"/>
-            <a:ext cx="502920" cy="192786"/>
-          </a:xfrm>
-          <a:prstGeom prst="rect">
-            <a:avLst/>
-          </a:prstGeom>
-          <a:noFill/>
-          <a:ln/>
-        </p:spPr>
-        <p:txBody>
-          <a:bodyPr wrap="square" lIns="0" tIns="0" rIns="0" bIns="0" rtlCol="0" anchor="ctr">
-            <a:normAutofit/>
-          </a:bodyPr>
-          <a:lstStyle/>
-          <a:p>
-            <a:pPr rtl="1" algn="ctr" indent="0" marL="0">
-              <a:buNone/>
-            </a:pPr>
-            <a:r>
-              <a:rPr lang="ar-SA" altLang="en-US" sz="900" b="1" dirty="0">
-                <a:solidFill>
-                  <a:srgbClr val="222222"/>
-                </a:solidFill>
-                <a:latin typeface="Arial" pitchFamily="34" charset="0"/>
-                <a:ea typeface="Arial" pitchFamily="34" charset="-122"/>
-                <a:cs typeface="Arial" pitchFamily="34" charset="-120"/>
-              </a:rPr>
-              <a:t>1</a:t>
-            </a:r>
-            <a:endParaRPr lang="ar-SA" sz="900" dirty="0"/>
-          </a:p>
-        </p:txBody>
-      </p:sp>
-      <p:sp>
-        <p:nvSpPr>
-          <p:cNvPr id="251" name="Text 249"/>
-          <p:cNvSpPr/>
-          <p:nvPr/>
-        </p:nvSpPr>
-        <p:spPr>
-          <a:xfrm>
-            <a:off x="6805879" y="4311396"/>
-            <a:ext cx="658368" cy="192786"/>
-          </a:xfrm>
-          <a:prstGeom prst="rect">
-            <a:avLst/>
-          </a:prstGeom>
-          <a:noFill/>
-          <a:ln/>
-        </p:spPr>
-        <p:txBody>
-          <a:bodyPr wrap="square" lIns="0" tIns="0" rIns="0" bIns="0" rtlCol="0" anchor="ctr">
-            <a:normAutofit/>
-          </a:bodyPr>
-          <a:lstStyle/>
-          <a:p>
-            <a:pPr rtl="1" algn="ctr" indent="0" marL="0">
-              <a:buNone/>
-            </a:pPr>
-            <a:r>
-              <a:rPr lang="ar-SA" altLang="en-US" sz="700" b="1" dirty="0">
-                <a:solidFill>
-                  <a:srgbClr val="222222"/>
-                </a:solidFill>
-                <a:latin typeface="Arial" pitchFamily="34" charset="0"/>
-                <a:ea typeface="Arial" pitchFamily="34" charset="-122"/>
-                <a:cs typeface="Arial" pitchFamily="34" charset="-120"/>
-              </a:rPr>
-              <a:t>27 أكتوبر</a:t>
-            </a:r>
-            <a:endParaRPr lang="ar-SA" sz="700" dirty="0"/>
-          </a:p>
-        </p:txBody>
-      </p:sp>
-      <p:sp>
-        <p:nvSpPr>
-          <p:cNvPr id="252" name="Text 250"/>
-          <p:cNvSpPr/>
-          <p:nvPr/>
-        </p:nvSpPr>
-        <p:spPr>
-          <a:xfrm>
-            <a:off x="6147511" y="4311396"/>
-            <a:ext cx="658368" cy="192786"/>
-          </a:xfrm>
-          <a:prstGeom prst="rect">
-            <a:avLst/>
-          </a:prstGeom>
-          <a:noFill/>
-          <a:ln/>
-        </p:spPr>
-        <p:txBody>
-          <a:bodyPr wrap="square" lIns="0" tIns="0" rIns="0" bIns="0" rtlCol="0" anchor="ctr">
-            <a:normAutofit/>
-          </a:bodyPr>
-          <a:lstStyle/>
-          <a:p>
-            <a:pPr rtl="1" algn="ctr" indent="0" marL="0">
-              <a:buNone/>
-            </a:pPr>
-            <a:r>
-              <a:rPr lang="ar-SA" altLang="en-US" sz="700" b="1" dirty="0">
-                <a:solidFill>
-                  <a:srgbClr val="222222"/>
-                </a:solidFill>
-                <a:latin typeface="Arial" pitchFamily="34" charset="0"/>
-                <a:ea typeface="Arial" pitchFamily="34" charset="-122"/>
-                <a:cs typeface="Arial" pitchFamily="34" charset="-120"/>
-              </a:rPr>
-              <a:t>27 أكتوبر</a:t>
-            </a:r>
-            <a:endParaRPr lang="ar-SA" sz="700" dirty="0"/>
-          </a:p>
-        </p:txBody>
-      </p:sp>
-      <p:sp>
-        <p:nvSpPr>
-          <p:cNvPr id="253" name="Shape 251"/>
-          <p:cNvSpPr/>
-          <p:nvPr/>
-        </p:nvSpPr>
-        <p:spPr>
-          <a:xfrm>
-            <a:off x="3766790" y="4351881"/>
-            <a:ext cx="170052" cy="111816"/>
+            <a:off x="3766790" y="4175402"/>
+            <a:ext cx="170052" cy="129494"/>
           </a:xfrm>
           <a:prstGeom prst="roundRect">
             <a:avLst>
-              <a:gd name="adj" fmla="val 32711"/>
+              <a:gd name="adj" fmla="val 28245"/>
             </a:avLst>
           </a:prstGeom>
           <a:solidFill>
@@ -15522,314 +15244,314 @@
       </p:sp>
       <p:sp>
         <p:nvSpPr>
+          <p:cNvPr id="246" name="Shape 244"/>
+          <p:cNvSpPr/>
+          <p:nvPr/>
+        </p:nvSpPr>
+        <p:spPr>
+          <a:xfrm>
+            <a:off x="365760" y="4351782"/>
+            <a:ext cx="11460175" cy="223266"/>
+          </a:xfrm>
+          <a:prstGeom prst="rect">
+            <a:avLst/>
+          </a:prstGeom>
+          <a:solidFill>
+            <a:srgbClr val="F6F9FA"/>
+          </a:solidFill>
+          <a:ln w="6350">
+            <a:solidFill>
+              <a:srgbClr val="DFE6EA"/>
+            </a:solidFill>
+            <a:prstDash val="solid"/>
+          </a:ln>
+        </p:spPr>
+      </p:sp>
+      <p:sp>
+        <p:nvSpPr>
+          <p:cNvPr id="247" name="Shape 245"/>
+          <p:cNvSpPr/>
+          <p:nvPr/>
+        </p:nvSpPr>
+        <p:spPr>
+          <a:xfrm>
+            <a:off x="11515039" y="4344543"/>
+            <a:ext cx="237744" cy="237744"/>
+          </a:xfrm>
+          <a:prstGeom prst="ellipse">
+            <a:avLst/>
+          </a:prstGeom>
+          <a:solidFill>
+            <a:srgbClr val="00778B"/>
+          </a:solidFill>
+          <a:ln w="19050">
+            <a:solidFill>
+              <a:srgbClr val="222222"/>
+            </a:solidFill>
+            <a:prstDash val="solid"/>
+          </a:ln>
+        </p:spPr>
+      </p:sp>
+      <p:sp>
+        <p:nvSpPr>
+          <p:cNvPr id="248" name="Text 246"/>
+          <p:cNvSpPr/>
+          <p:nvPr/>
+        </p:nvSpPr>
+        <p:spPr>
+          <a:xfrm>
+            <a:off x="11441887" y="4351782"/>
+            <a:ext cx="384048" cy="223266"/>
+          </a:xfrm>
+          <a:prstGeom prst="rect">
+            <a:avLst/>
+          </a:prstGeom>
+          <a:noFill/>
+          <a:ln/>
+        </p:spPr>
+        <p:txBody>
+          <a:bodyPr wrap="square" lIns="0" tIns="0" rIns="0" bIns="0" rtlCol="0" anchor="ctr">
+            <a:normAutofit/>
+          </a:bodyPr>
+          <a:lstStyle/>
+          <a:p>
+            <a:pPr rtl="1" algn="ctr" indent="0" marL="0">
+              <a:buNone/>
+            </a:pPr>
+            <a:r>
+              <a:rPr lang="ar-SA" altLang="en-US" sz="850" b="1" dirty="0">
+                <a:solidFill>
+                  <a:srgbClr val="FFFFFF"/>
+                </a:solidFill>
+                <a:latin typeface="Arial" pitchFamily="34" charset="0"/>
+                <a:ea typeface="Arial" pitchFamily="34" charset="-122"/>
+                <a:cs typeface="Arial" pitchFamily="34" charset="-120"/>
+              </a:rPr>
+              <a:t>C</a:t>
+            </a:r>
+            <a:endParaRPr lang="ar-SA" sz="850" dirty="0"/>
+          </a:p>
+        </p:txBody>
+      </p:sp>
+      <p:sp>
+        <p:nvSpPr>
+          <p:cNvPr id="249" name="Text 247"/>
+          <p:cNvSpPr/>
+          <p:nvPr/>
+        </p:nvSpPr>
+        <p:spPr>
+          <a:xfrm>
+            <a:off x="8762695" y="4351782"/>
+            <a:ext cx="2606040" cy="223266"/>
+          </a:xfrm>
+          <a:prstGeom prst="rect">
+            <a:avLst/>
+          </a:prstGeom>
+          <a:noFill/>
+          <a:ln/>
+        </p:spPr>
+        <p:txBody>
+          <a:bodyPr wrap="square" lIns="0" tIns="0" rIns="0" bIns="0" rtlCol="0" anchor="ctr">
+            <a:normAutofit/>
+          </a:bodyPr>
+          <a:lstStyle/>
+          <a:p>
+            <a:pPr rtl="1" algn="r" indent="0" marL="0">
+              <a:buNone/>
+            </a:pPr>
+            <a:r>
+              <a:rPr lang="ar-SA" altLang="en-US" sz="750" b="1" dirty="0">
+                <a:solidFill>
+                  <a:srgbClr val="222222"/>
+                </a:solidFill>
+                <a:latin typeface="Arial" pitchFamily="34" charset="0"/>
+                <a:ea typeface="Arial" pitchFamily="34" charset="-122"/>
+                <a:cs typeface="Arial" pitchFamily="34" charset="-120"/>
+              </a:rPr>
+              <a:t>خندق الحفرة – حديد التسليح والشدات والخرسانة</a:t>
+            </a:r>
+            <a:endParaRPr lang="ar-SA" sz="750" dirty="0"/>
+          </a:p>
+        </p:txBody>
+      </p:sp>
+      <p:sp>
+        <p:nvSpPr>
+          <p:cNvPr id="250" name="Text 248"/>
+          <p:cNvSpPr/>
+          <p:nvPr/>
+        </p:nvSpPr>
+        <p:spPr>
+          <a:xfrm>
+            <a:off x="7967167" y="4351782"/>
+            <a:ext cx="777240" cy="223266"/>
+          </a:xfrm>
+          <a:prstGeom prst="rect">
+            <a:avLst/>
+          </a:prstGeom>
+          <a:noFill/>
+          <a:ln/>
+        </p:spPr>
+        <p:txBody>
+          <a:bodyPr wrap="square" lIns="0" tIns="0" rIns="0" bIns="0" rtlCol="0" anchor="ctr">
+            <a:normAutofit/>
+          </a:bodyPr>
+          <a:lstStyle/>
+          <a:p>
+            <a:pPr rtl="1" algn="ctr" indent="0" marL="0">
+              <a:buNone/>
+            </a:pPr>
+            <a:r>
+              <a:rPr lang="ar-SA" altLang="en-US" sz="700" dirty="0">
+                <a:solidFill>
+                  <a:srgbClr val="444444"/>
+                </a:solidFill>
+                <a:latin typeface="Arial" pitchFamily="34" charset="0"/>
+                <a:ea typeface="Arial" pitchFamily="34" charset="-122"/>
+                <a:cs typeface="Arial" pitchFamily="34" charset="-120"/>
+              </a:rPr>
+              <a:t>A · FS</a:t>
+            </a:r>
+            <a:endParaRPr lang="ar-SA" sz="700" dirty="0"/>
+          </a:p>
+        </p:txBody>
+      </p:sp>
+      <p:sp>
+        <p:nvSpPr>
+          <p:cNvPr id="251" name="Text 249"/>
+          <p:cNvSpPr/>
+          <p:nvPr/>
+        </p:nvSpPr>
+        <p:spPr>
+          <a:xfrm>
+            <a:off x="7464247" y="4351782"/>
+            <a:ext cx="502920" cy="223266"/>
+          </a:xfrm>
+          <a:prstGeom prst="rect">
+            <a:avLst/>
+          </a:prstGeom>
+          <a:noFill/>
+          <a:ln/>
+        </p:spPr>
+        <p:txBody>
+          <a:bodyPr wrap="square" lIns="0" tIns="0" rIns="0" bIns="0" rtlCol="0" anchor="ctr">
+            <a:normAutofit/>
+          </a:bodyPr>
+          <a:lstStyle/>
+          <a:p>
+            <a:pPr rtl="1" algn="ctr" indent="0" marL="0">
+              <a:buNone/>
+            </a:pPr>
+            <a:r>
+              <a:rPr lang="ar-SA" altLang="en-US" sz="900" b="1" dirty="0">
+                <a:solidFill>
+                  <a:srgbClr val="222222"/>
+                </a:solidFill>
+                <a:latin typeface="Arial" pitchFamily="34" charset="0"/>
+                <a:ea typeface="Arial" pitchFamily="34" charset="-122"/>
+                <a:cs typeface="Arial" pitchFamily="34" charset="-120"/>
+              </a:rPr>
+              <a:t>2</a:t>
+            </a:r>
+            <a:endParaRPr lang="ar-SA" sz="900" dirty="0"/>
+          </a:p>
+        </p:txBody>
+      </p:sp>
+      <p:sp>
+        <p:nvSpPr>
+          <p:cNvPr id="252" name="Text 250"/>
+          <p:cNvSpPr/>
+          <p:nvPr/>
+        </p:nvSpPr>
+        <p:spPr>
+          <a:xfrm>
+            <a:off x="6805879" y="4351782"/>
+            <a:ext cx="658368" cy="223266"/>
+          </a:xfrm>
+          <a:prstGeom prst="rect">
+            <a:avLst/>
+          </a:prstGeom>
+          <a:noFill/>
+          <a:ln/>
+        </p:spPr>
+        <p:txBody>
+          <a:bodyPr wrap="square" lIns="0" tIns="0" rIns="0" bIns="0" rtlCol="0" anchor="ctr">
+            <a:normAutofit/>
+          </a:bodyPr>
+          <a:lstStyle/>
+          <a:p>
+            <a:pPr rtl="1" algn="ctr" indent="0" marL="0">
+              <a:buNone/>
+            </a:pPr>
+            <a:r>
+              <a:rPr lang="ar-SA" altLang="en-US" sz="700" b="1" dirty="0">
+                <a:solidFill>
+                  <a:srgbClr val="222222"/>
+                </a:solidFill>
+                <a:latin typeface="Arial" pitchFamily="34" charset="0"/>
+                <a:ea typeface="Arial" pitchFamily="34" charset="-122"/>
+                <a:cs typeface="Arial" pitchFamily="34" charset="-120"/>
+              </a:rPr>
+              <a:t>27 أكتوبر</a:t>
+            </a:r>
+            <a:endParaRPr lang="ar-SA" sz="700" dirty="0"/>
+          </a:p>
+        </p:txBody>
+      </p:sp>
+      <p:sp>
+        <p:nvSpPr>
+          <p:cNvPr id="253" name="Text 251"/>
+          <p:cNvSpPr/>
+          <p:nvPr/>
+        </p:nvSpPr>
+        <p:spPr>
+          <a:xfrm>
+            <a:off x="6147511" y="4351782"/>
+            <a:ext cx="658368" cy="223266"/>
+          </a:xfrm>
+          <a:prstGeom prst="rect">
+            <a:avLst/>
+          </a:prstGeom>
+          <a:noFill/>
+          <a:ln/>
+        </p:spPr>
+        <p:txBody>
+          <a:bodyPr wrap="square" lIns="0" tIns="0" rIns="0" bIns="0" rtlCol="0" anchor="ctr">
+            <a:normAutofit/>
+          </a:bodyPr>
+          <a:lstStyle/>
+          <a:p>
+            <a:pPr rtl="1" algn="ctr" indent="0" marL="0">
+              <a:buNone/>
+            </a:pPr>
+            <a:r>
+              <a:rPr lang="ar-SA" altLang="en-US" sz="700" b="1" dirty="0">
+                <a:solidFill>
+                  <a:srgbClr val="222222"/>
+                </a:solidFill>
+                <a:latin typeface="Arial" pitchFamily="34" charset="0"/>
+                <a:ea typeface="Arial" pitchFamily="34" charset="-122"/>
+                <a:cs typeface="Arial" pitchFamily="34" charset="-120"/>
+              </a:rPr>
+              <a:t>28 أكتوبر</a:t>
+            </a:r>
+            <a:endParaRPr lang="ar-SA" sz="700" dirty="0"/>
+          </a:p>
+        </p:txBody>
+      </p:sp>
+      <p:sp>
+        <p:nvSpPr>
           <p:cNvPr id="254" name="Shape 252"/>
           <p:cNvSpPr/>
           <p:nvPr/>
         </p:nvSpPr>
         <p:spPr>
           <a:xfrm>
-            <a:off x="365760" y="4504182"/>
-            <a:ext cx="11460175" cy="192786"/>
-          </a:xfrm>
-          <a:prstGeom prst="rect">
-            <a:avLst/>
-          </a:prstGeom>
-          <a:solidFill>
-            <a:srgbClr val="F6F9FA"/>
-          </a:solidFill>
-          <a:ln w="6350">
-            <a:solidFill>
-              <a:srgbClr val="DFE6EA"/>
-            </a:solidFill>
-            <a:prstDash val="solid"/>
-          </a:ln>
-        </p:spPr>
-      </p:sp>
-      <p:sp>
-        <p:nvSpPr>
-          <p:cNvPr id="255" name="Shape 253"/>
-          <p:cNvSpPr/>
-          <p:nvPr/>
-        </p:nvSpPr>
-        <p:spPr>
-          <a:xfrm>
-            <a:off x="11515039" y="4481703"/>
-            <a:ext cx="237744" cy="237744"/>
-          </a:xfrm>
-          <a:prstGeom prst="ellipse">
-            <a:avLst/>
-          </a:prstGeom>
-          <a:solidFill>
-            <a:srgbClr val="00778B"/>
-          </a:solidFill>
-          <a:ln w="19050">
-            <a:solidFill>
-              <a:srgbClr val="222222"/>
-            </a:solidFill>
-            <a:prstDash val="solid"/>
-          </a:ln>
-        </p:spPr>
-      </p:sp>
-      <p:sp>
-        <p:nvSpPr>
-          <p:cNvPr id="256" name="Text 254"/>
-          <p:cNvSpPr/>
-          <p:nvPr/>
-        </p:nvSpPr>
-        <p:spPr>
-          <a:xfrm>
-            <a:off x="11441887" y="4504182"/>
-            <a:ext cx="384048" cy="192786"/>
-          </a:xfrm>
-          <a:prstGeom prst="rect">
-            <a:avLst/>
-          </a:prstGeom>
-          <a:noFill/>
-          <a:ln/>
-        </p:spPr>
-        <p:txBody>
-          <a:bodyPr wrap="square" lIns="0" tIns="0" rIns="0" bIns="0" rtlCol="0" anchor="ctr">
-            <a:normAutofit/>
-          </a:bodyPr>
-          <a:lstStyle/>
-          <a:p>
-            <a:pPr rtl="1" algn="ctr" indent="0" marL="0">
-              <a:buNone/>
-            </a:pPr>
-            <a:r>
-              <a:rPr lang="ar-SA" altLang="en-US" sz="850" b="1" dirty="0">
-                <a:solidFill>
-                  <a:srgbClr val="FFFFFF"/>
-                </a:solidFill>
-                <a:latin typeface="Arial" pitchFamily="34" charset="0"/>
-                <a:ea typeface="Arial" pitchFamily="34" charset="-122"/>
-                <a:cs typeface="Arial" pitchFamily="34" charset="-120"/>
-              </a:rPr>
-              <a:t>C</a:t>
-            </a:r>
-            <a:endParaRPr lang="ar-SA" sz="850" dirty="0"/>
-          </a:p>
-        </p:txBody>
-      </p:sp>
-      <p:sp>
-        <p:nvSpPr>
-          <p:cNvPr id="257" name="Text 255"/>
-          <p:cNvSpPr/>
-          <p:nvPr/>
-        </p:nvSpPr>
-        <p:spPr>
-          <a:xfrm>
-            <a:off x="8762695" y="4504182"/>
-            <a:ext cx="2606040" cy="192786"/>
-          </a:xfrm>
-          <a:prstGeom prst="rect">
-            <a:avLst/>
-          </a:prstGeom>
-          <a:noFill/>
-          <a:ln/>
-        </p:spPr>
-        <p:txBody>
-          <a:bodyPr wrap="square" lIns="0" tIns="0" rIns="0" bIns="0" rtlCol="0" anchor="ctr">
-            <a:normAutofit/>
-          </a:bodyPr>
-          <a:lstStyle/>
-          <a:p>
-            <a:pPr rtl="1" algn="r" indent="0" marL="0">
-              <a:buNone/>
-            </a:pPr>
-            <a:r>
-              <a:rPr lang="ar-SA" altLang="en-US" sz="750" b="1" dirty="0">
-                <a:solidFill>
-                  <a:srgbClr val="222222"/>
-                </a:solidFill>
-                <a:latin typeface="Arial" pitchFamily="34" charset="0"/>
-                <a:ea typeface="Arial" pitchFamily="34" charset="-122"/>
-                <a:cs typeface="Arial" pitchFamily="34" charset="-120"/>
-              </a:rPr>
-              <a:t>خندق الحفرة – حديد التسليح والشدات والخرسانة</a:t>
-            </a:r>
-            <a:endParaRPr lang="ar-SA" sz="750" dirty="0"/>
-          </a:p>
-        </p:txBody>
-      </p:sp>
-      <p:sp>
-        <p:nvSpPr>
-          <p:cNvPr id="258" name="Text 256"/>
-          <p:cNvSpPr/>
-          <p:nvPr/>
-        </p:nvSpPr>
-        <p:spPr>
-          <a:xfrm>
-            <a:off x="7967167" y="4504182"/>
-            <a:ext cx="777240" cy="192786"/>
-          </a:xfrm>
-          <a:prstGeom prst="rect">
-            <a:avLst/>
-          </a:prstGeom>
-          <a:noFill/>
-          <a:ln/>
-        </p:spPr>
-        <p:txBody>
-          <a:bodyPr wrap="square" lIns="0" tIns="0" rIns="0" bIns="0" rtlCol="0" anchor="ctr">
-            <a:normAutofit/>
-          </a:bodyPr>
-          <a:lstStyle/>
-          <a:p>
-            <a:pPr rtl="1" algn="ctr" indent="0" marL="0">
-              <a:buNone/>
-            </a:pPr>
-            <a:r>
-              <a:rPr lang="ar-SA" altLang="en-US" sz="700" dirty="0">
-                <a:solidFill>
-                  <a:srgbClr val="444444"/>
-                </a:solidFill>
-                <a:latin typeface="Arial" pitchFamily="34" charset="0"/>
-                <a:ea typeface="Arial" pitchFamily="34" charset="-122"/>
-                <a:cs typeface="Arial" pitchFamily="34" charset="-120"/>
-              </a:rPr>
-              <a:t>A · FS</a:t>
-            </a:r>
-            <a:endParaRPr lang="ar-SA" sz="700" dirty="0"/>
-          </a:p>
-        </p:txBody>
-      </p:sp>
-      <p:sp>
-        <p:nvSpPr>
-          <p:cNvPr id="259" name="Text 257"/>
-          <p:cNvSpPr/>
-          <p:nvPr/>
-        </p:nvSpPr>
-        <p:spPr>
-          <a:xfrm>
-            <a:off x="7464247" y="4504182"/>
-            <a:ext cx="502920" cy="192786"/>
-          </a:xfrm>
-          <a:prstGeom prst="rect">
-            <a:avLst/>
-          </a:prstGeom>
-          <a:noFill/>
-          <a:ln/>
-        </p:spPr>
-        <p:txBody>
-          <a:bodyPr wrap="square" lIns="0" tIns="0" rIns="0" bIns="0" rtlCol="0" anchor="ctr">
-            <a:normAutofit/>
-          </a:bodyPr>
-          <a:lstStyle/>
-          <a:p>
-            <a:pPr rtl="1" algn="ctr" indent="0" marL="0">
-              <a:buNone/>
-            </a:pPr>
-            <a:r>
-              <a:rPr lang="ar-SA" altLang="en-US" sz="900" b="1" dirty="0">
-                <a:solidFill>
-                  <a:srgbClr val="222222"/>
-                </a:solidFill>
-                <a:latin typeface="Arial" pitchFamily="34" charset="0"/>
-                <a:ea typeface="Arial" pitchFamily="34" charset="-122"/>
-                <a:cs typeface="Arial" pitchFamily="34" charset="-120"/>
-              </a:rPr>
-              <a:t>2</a:t>
-            </a:r>
-            <a:endParaRPr lang="ar-SA" sz="900" dirty="0"/>
-          </a:p>
-        </p:txBody>
-      </p:sp>
-      <p:sp>
-        <p:nvSpPr>
-          <p:cNvPr id="260" name="Text 258"/>
-          <p:cNvSpPr/>
-          <p:nvPr/>
-        </p:nvSpPr>
-        <p:spPr>
-          <a:xfrm>
-            <a:off x="6805879" y="4504182"/>
-            <a:ext cx="658368" cy="192786"/>
-          </a:xfrm>
-          <a:prstGeom prst="rect">
-            <a:avLst/>
-          </a:prstGeom>
-          <a:noFill/>
-          <a:ln/>
-        </p:spPr>
-        <p:txBody>
-          <a:bodyPr wrap="square" lIns="0" tIns="0" rIns="0" bIns="0" rtlCol="0" anchor="ctr">
-            <a:normAutofit/>
-          </a:bodyPr>
-          <a:lstStyle/>
-          <a:p>
-            <a:pPr rtl="1" algn="ctr" indent="0" marL="0">
-              <a:buNone/>
-            </a:pPr>
-            <a:r>
-              <a:rPr lang="ar-SA" altLang="en-US" sz="700" b="1" dirty="0">
-                <a:solidFill>
-                  <a:srgbClr val="222222"/>
-                </a:solidFill>
-                <a:latin typeface="Arial" pitchFamily="34" charset="0"/>
-                <a:ea typeface="Arial" pitchFamily="34" charset="-122"/>
-                <a:cs typeface="Arial" pitchFamily="34" charset="-120"/>
-              </a:rPr>
-              <a:t>27 أكتوبر</a:t>
-            </a:r>
-            <a:endParaRPr lang="ar-SA" sz="700" dirty="0"/>
-          </a:p>
-        </p:txBody>
-      </p:sp>
-      <p:sp>
-        <p:nvSpPr>
-          <p:cNvPr id="261" name="Text 259"/>
-          <p:cNvSpPr/>
-          <p:nvPr/>
-        </p:nvSpPr>
-        <p:spPr>
-          <a:xfrm>
-            <a:off x="6147511" y="4504182"/>
-            <a:ext cx="658368" cy="192786"/>
-          </a:xfrm>
-          <a:prstGeom prst="rect">
-            <a:avLst/>
-          </a:prstGeom>
-          <a:noFill/>
-          <a:ln/>
-        </p:spPr>
-        <p:txBody>
-          <a:bodyPr wrap="square" lIns="0" tIns="0" rIns="0" bIns="0" rtlCol="0" anchor="ctr">
-            <a:normAutofit/>
-          </a:bodyPr>
-          <a:lstStyle/>
-          <a:p>
-            <a:pPr rtl="1" algn="ctr" indent="0" marL="0">
-              <a:buNone/>
-            </a:pPr>
-            <a:r>
-              <a:rPr lang="ar-SA" altLang="en-US" sz="700" b="1" dirty="0">
-                <a:solidFill>
-                  <a:srgbClr val="222222"/>
-                </a:solidFill>
-                <a:latin typeface="Arial" pitchFamily="34" charset="0"/>
-                <a:ea typeface="Arial" pitchFamily="34" charset="-122"/>
-                <a:cs typeface="Arial" pitchFamily="34" charset="-120"/>
-              </a:rPr>
-              <a:t>28 أكتوبر</a:t>
-            </a:r>
-            <a:endParaRPr lang="ar-SA" sz="700" dirty="0"/>
-          </a:p>
-        </p:txBody>
-      </p:sp>
-      <p:sp>
-        <p:nvSpPr>
-          <p:cNvPr id="262" name="Shape 260"/>
-          <p:cNvSpPr/>
-          <p:nvPr/>
-        </p:nvSpPr>
-        <p:spPr>
-          <a:xfrm>
-            <a:off x="3596739" y="4544667"/>
-            <a:ext cx="340103" cy="111816"/>
+            <a:off x="3596739" y="4398668"/>
+            <a:ext cx="340103" cy="129494"/>
           </a:xfrm>
           <a:prstGeom prst="roundRect">
             <a:avLst>
-              <a:gd name="adj" fmla="val 32711"/>
+              <a:gd name="adj" fmla="val 28245"/>
             </a:avLst>
           </a:prstGeom>
           <a:solidFill>
@@ -15852,14 +15574,310 @@
       </p:sp>
       <p:sp>
         <p:nvSpPr>
+          <p:cNvPr id="255" name="Text 253"/>
+          <p:cNvSpPr/>
+          <p:nvPr/>
+        </p:nvSpPr>
+        <p:spPr>
+          <a:xfrm>
+            <a:off x="3596739" y="4398668"/>
+            <a:ext cx="340103" cy="129494"/>
+          </a:xfrm>
+          <a:prstGeom prst="rect">
+            <a:avLst/>
+          </a:prstGeom>
+          <a:noFill/>
+          <a:ln/>
+        </p:spPr>
+        <p:txBody>
+          <a:bodyPr wrap="square" lIns="0" tIns="0" rIns="0" bIns="0" rtlCol="0" anchor="ctr">
+            <a:normAutofit/>
+          </a:bodyPr>
+          <a:lstStyle/>
+          <a:p>
+            <a:pPr rtl="1" algn="ctr" indent="0" marL="0">
+              <a:buNone/>
+            </a:pPr>
+            <a:r>
+              <a:rPr lang="ar-SA" altLang="en-US" sz="700" b="1" dirty="0">
+                <a:solidFill>
+                  <a:srgbClr val="FFFFFF"/>
+                </a:solidFill>
+                <a:latin typeface="Arial" pitchFamily="34" charset="0"/>
+                <a:ea typeface="Arial" pitchFamily="34" charset="-122"/>
+                <a:cs typeface="Arial" pitchFamily="34" charset="-120"/>
+              </a:rPr>
+              <a:t>2 يوم</a:t>
+            </a:r>
+            <a:endParaRPr lang="ar-SA" sz="700" dirty="0"/>
+          </a:p>
+        </p:txBody>
+      </p:sp>
+      <p:sp>
+        <p:nvSpPr>
+          <p:cNvPr id="256" name="Shape 254"/>
+          <p:cNvSpPr/>
+          <p:nvPr/>
+        </p:nvSpPr>
+        <p:spPr>
+          <a:xfrm>
+            <a:off x="365760" y="4575048"/>
+            <a:ext cx="11460175" cy="223266"/>
+          </a:xfrm>
+          <a:prstGeom prst="rect">
+            <a:avLst/>
+          </a:prstGeom>
+          <a:solidFill>
+            <a:srgbClr val="FFFFFF"/>
+          </a:solidFill>
+          <a:ln w="6350">
+            <a:solidFill>
+              <a:srgbClr val="DFE6EA"/>
+            </a:solidFill>
+            <a:prstDash val="solid"/>
+          </a:ln>
+        </p:spPr>
+      </p:sp>
+      <p:sp>
+        <p:nvSpPr>
+          <p:cNvPr id="257" name="Shape 255"/>
+          <p:cNvSpPr/>
+          <p:nvPr/>
+        </p:nvSpPr>
+        <p:spPr>
+          <a:xfrm>
+            <a:off x="11515039" y="4567809"/>
+            <a:ext cx="237744" cy="237744"/>
+          </a:xfrm>
+          <a:prstGeom prst="ellipse">
+            <a:avLst/>
+          </a:prstGeom>
+          <a:solidFill>
+            <a:srgbClr val="00778B"/>
+          </a:solidFill>
+          <a:ln w="19050">
+            <a:solidFill>
+              <a:srgbClr val="222222"/>
+            </a:solidFill>
+            <a:prstDash val="solid"/>
+          </a:ln>
+        </p:spPr>
+      </p:sp>
+      <p:sp>
+        <p:nvSpPr>
+          <p:cNvPr id="258" name="Text 256"/>
+          <p:cNvSpPr/>
+          <p:nvPr/>
+        </p:nvSpPr>
+        <p:spPr>
+          <a:xfrm>
+            <a:off x="11441887" y="4575048"/>
+            <a:ext cx="384048" cy="223266"/>
+          </a:xfrm>
+          <a:prstGeom prst="rect">
+            <a:avLst/>
+          </a:prstGeom>
+          <a:noFill/>
+          <a:ln/>
+        </p:spPr>
+        <p:txBody>
+          <a:bodyPr wrap="square" lIns="0" tIns="0" rIns="0" bIns="0" rtlCol="0" anchor="ctr">
+            <a:normAutofit/>
+          </a:bodyPr>
+          <a:lstStyle/>
+          <a:p>
+            <a:pPr rtl="1" algn="ctr" indent="0" marL="0">
+              <a:buNone/>
+            </a:pPr>
+            <a:r>
+              <a:rPr lang="ar-SA" altLang="en-US" sz="850" b="1" dirty="0">
+                <a:solidFill>
+                  <a:srgbClr val="FFFFFF"/>
+                </a:solidFill>
+                <a:latin typeface="Arial" pitchFamily="34" charset="0"/>
+                <a:ea typeface="Arial" pitchFamily="34" charset="-122"/>
+                <a:cs typeface="Arial" pitchFamily="34" charset="-120"/>
+              </a:rPr>
+              <a:t>D</a:t>
+            </a:r>
+            <a:endParaRPr lang="ar-SA" sz="850" dirty="0"/>
+          </a:p>
+        </p:txBody>
+      </p:sp>
+      <p:sp>
+        <p:nvSpPr>
+          <p:cNvPr id="259" name="Text 257"/>
+          <p:cNvSpPr/>
+          <p:nvPr/>
+        </p:nvSpPr>
+        <p:spPr>
+          <a:xfrm>
+            <a:off x="8762695" y="4575048"/>
+            <a:ext cx="2606040" cy="223266"/>
+          </a:xfrm>
+          <a:prstGeom prst="rect">
+            <a:avLst/>
+          </a:prstGeom>
+          <a:noFill/>
+          <a:ln/>
+        </p:spPr>
+        <p:txBody>
+          <a:bodyPr wrap="square" lIns="0" tIns="0" rIns="0" bIns="0" rtlCol="0" anchor="ctr">
+            <a:normAutofit/>
+          </a:bodyPr>
+          <a:lstStyle/>
+          <a:p>
+            <a:pPr rtl="1" algn="r" indent="0" marL="0">
+              <a:buNone/>
+            </a:pPr>
+            <a:r>
+              <a:rPr lang="ar-SA" altLang="en-US" sz="750" b="1" dirty="0">
+                <a:solidFill>
+                  <a:srgbClr val="222222"/>
+                </a:solidFill>
+                <a:latin typeface="Arial" pitchFamily="34" charset="0"/>
+                <a:ea typeface="Arial" pitchFamily="34" charset="-122"/>
+                <a:cs typeface="Arial" pitchFamily="34" charset="-120"/>
+              </a:rPr>
+              <a:t>بلاطة / لبشة الحفرة – حديد التسليح والشدات والخرسانة</a:t>
+            </a:r>
+            <a:endParaRPr lang="ar-SA" sz="750" dirty="0"/>
+          </a:p>
+        </p:txBody>
+      </p:sp>
+      <p:sp>
+        <p:nvSpPr>
+          <p:cNvPr id="260" name="Text 258"/>
+          <p:cNvSpPr/>
+          <p:nvPr/>
+        </p:nvSpPr>
+        <p:spPr>
+          <a:xfrm>
+            <a:off x="7967167" y="4575048"/>
+            <a:ext cx="777240" cy="223266"/>
+          </a:xfrm>
+          <a:prstGeom prst="rect">
+            <a:avLst/>
+          </a:prstGeom>
+          <a:noFill/>
+          <a:ln/>
+        </p:spPr>
+        <p:txBody>
+          <a:bodyPr wrap="square" lIns="0" tIns="0" rIns="0" bIns="0" rtlCol="0" anchor="ctr">
+            <a:normAutofit/>
+          </a:bodyPr>
+          <a:lstStyle/>
+          <a:p>
+            <a:pPr rtl="1" algn="ctr" indent="0" marL="0">
+              <a:buNone/>
+            </a:pPr>
+            <a:r>
+              <a:rPr lang="ar-SA" altLang="en-US" sz="700" dirty="0">
+                <a:solidFill>
+                  <a:srgbClr val="444444"/>
+                </a:solidFill>
+                <a:latin typeface="Arial" pitchFamily="34" charset="0"/>
+                <a:ea typeface="Arial" pitchFamily="34" charset="-122"/>
+                <a:cs typeface="Arial" pitchFamily="34" charset="-120"/>
+              </a:rPr>
+              <a:t>C · FS</a:t>
+            </a:r>
+            <a:endParaRPr lang="ar-SA" sz="700" dirty="0"/>
+          </a:p>
+        </p:txBody>
+      </p:sp>
+      <p:sp>
+        <p:nvSpPr>
+          <p:cNvPr id="261" name="Text 259"/>
+          <p:cNvSpPr/>
+          <p:nvPr/>
+        </p:nvSpPr>
+        <p:spPr>
+          <a:xfrm>
+            <a:off x="7464247" y="4575048"/>
+            <a:ext cx="502920" cy="223266"/>
+          </a:xfrm>
+          <a:prstGeom prst="rect">
+            <a:avLst/>
+          </a:prstGeom>
+          <a:noFill/>
+          <a:ln/>
+        </p:spPr>
+        <p:txBody>
+          <a:bodyPr wrap="square" lIns="0" tIns="0" rIns="0" bIns="0" rtlCol="0" anchor="ctr">
+            <a:normAutofit/>
+          </a:bodyPr>
+          <a:lstStyle/>
+          <a:p>
+            <a:pPr rtl="1" algn="ctr" indent="0" marL="0">
+              <a:buNone/>
+            </a:pPr>
+            <a:r>
+              <a:rPr lang="ar-SA" altLang="en-US" sz="900" b="1" dirty="0">
+                <a:solidFill>
+                  <a:srgbClr val="222222"/>
+                </a:solidFill>
+                <a:latin typeface="Arial" pitchFamily="34" charset="0"/>
+                <a:ea typeface="Arial" pitchFamily="34" charset="-122"/>
+                <a:cs typeface="Arial" pitchFamily="34" charset="-120"/>
+              </a:rPr>
+              <a:t>5</a:t>
+            </a:r>
+            <a:endParaRPr lang="ar-SA" sz="900" dirty="0"/>
+          </a:p>
+        </p:txBody>
+      </p:sp>
+      <p:sp>
+        <p:nvSpPr>
+          <p:cNvPr id="262" name="Text 260"/>
+          <p:cNvSpPr/>
+          <p:nvPr/>
+        </p:nvSpPr>
+        <p:spPr>
+          <a:xfrm>
+            <a:off x="6805879" y="4575048"/>
+            <a:ext cx="658368" cy="223266"/>
+          </a:xfrm>
+          <a:prstGeom prst="rect">
+            <a:avLst/>
+          </a:prstGeom>
+          <a:noFill/>
+          <a:ln/>
+        </p:spPr>
+        <p:txBody>
+          <a:bodyPr wrap="square" lIns="0" tIns="0" rIns="0" bIns="0" rtlCol="0" anchor="ctr">
+            <a:normAutofit/>
+          </a:bodyPr>
+          <a:lstStyle/>
+          <a:p>
+            <a:pPr rtl="1" algn="ctr" indent="0" marL="0">
+              <a:buNone/>
+            </a:pPr>
+            <a:r>
+              <a:rPr lang="ar-SA" altLang="en-US" sz="700" b="1" dirty="0">
+                <a:solidFill>
+                  <a:srgbClr val="222222"/>
+                </a:solidFill>
+                <a:latin typeface="Arial" pitchFamily="34" charset="0"/>
+                <a:ea typeface="Arial" pitchFamily="34" charset="-122"/>
+                <a:cs typeface="Arial" pitchFamily="34" charset="-120"/>
+              </a:rPr>
+              <a:t>29 أكتوبر</a:t>
+            </a:r>
+            <a:endParaRPr lang="ar-SA" sz="700" dirty="0"/>
+          </a:p>
+        </p:txBody>
+      </p:sp>
+      <p:sp>
+        <p:nvSpPr>
           <p:cNvPr id="263" name="Text 261"/>
           <p:cNvSpPr/>
           <p:nvPr/>
         </p:nvSpPr>
         <p:spPr>
           <a:xfrm>
-            <a:off x="3596739" y="4544667"/>
-            <a:ext cx="340103" cy="111816"/>
+            <a:off x="6147511" y="4575048"/>
+            <a:ext cx="658368" cy="223266"/>
           </a:xfrm>
           <a:prstGeom prst="rect">
             <a:avLst/>
@@ -15879,13 +15897,13 @@
             <a:r>
               <a:rPr lang="ar-SA" altLang="en-US" sz="700" b="1" dirty="0">
                 <a:solidFill>
-                  <a:srgbClr val="FFFFFF"/>
-                </a:solidFill>
-                <a:latin typeface="Arial" pitchFamily="34" charset="0"/>
-                <a:ea typeface="Arial" pitchFamily="34" charset="-122"/>
-                <a:cs typeface="Arial" pitchFamily="34" charset="-120"/>
-              </a:rPr>
-              <a:t>2 يوم</a:t>
+                  <a:srgbClr val="222222"/>
+                </a:solidFill>
+                <a:latin typeface="Arial" pitchFamily="34" charset="0"/>
+                <a:ea typeface="Arial" pitchFamily="34" charset="-122"/>
+                <a:cs typeface="Arial" pitchFamily="34" charset="-120"/>
+              </a:rPr>
+              <a:t>3 نوفمبر</a:t>
             </a:r>
             <a:endParaRPr lang="ar-SA" sz="700" dirty="0"/>
           </a:p>
@@ -15899,308 +15917,12 @@
         </p:nvSpPr>
         <p:spPr>
           <a:xfrm>
-            <a:off x="365760" y="4696968"/>
-            <a:ext cx="11460175" cy="192786"/>
-          </a:xfrm>
-          <a:prstGeom prst="rect">
-            <a:avLst/>
-          </a:prstGeom>
-          <a:solidFill>
-            <a:srgbClr val="FFFFFF"/>
-          </a:solidFill>
-          <a:ln w="6350">
-            <a:solidFill>
-              <a:srgbClr val="DFE6EA"/>
-            </a:solidFill>
-            <a:prstDash val="solid"/>
-          </a:ln>
-        </p:spPr>
-      </p:sp>
-      <p:sp>
-        <p:nvSpPr>
-          <p:cNvPr id="265" name="Shape 263"/>
-          <p:cNvSpPr/>
-          <p:nvPr/>
-        </p:nvSpPr>
-        <p:spPr>
-          <a:xfrm>
-            <a:off x="11515039" y="4674489"/>
-            <a:ext cx="237744" cy="237744"/>
-          </a:xfrm>
-          <a:prstGeom prst="ellipse">
-            <a:avLst/>
-          </a:prstGeom>
-          <a:solidFill>
-            <a:srgbClr val="00778B"/>
-          </a:solidFill>
-          <a:ln w="19050">
-            <a:solidFill>
-              <a:srgbClr val="222222"/>
-            </a:solidFill>
-            <a:prstDash val="solid"/>
-          </a:ln>
-        </p:spPr>
-      </p:sp>
-      <p:sp>
-        <p:nvSpPr>
-          <p:cNvPr id="266" name="Text 264"/>
-          <p:cNvSpPr/>
-          <p:nvPr/>
-        </p:nvSpPr>
-        <p:spPr>
-          <a:xfrm>
-            <a:off x="11441887" y="4696968"/>
-            <a:ext cx="384048" cy="192786"/>
-          </a:xfrm>
-          <a:prstGeom prst="rect">
-            <a:avLst/>
-          </a:prstGeom>
-          <a:noFill/>
-          <a:ln/>
-        </p:spPr>
-        <p:txBody>
-          <a:bodyPr wrap="square" lIns="0" tIns="0" rIns="0" bIns="0" rtlCol="0" anchor="ctr">
-            <a:normAutofit/>
-          </a:bodyPr>
-          <a:lstStyle/>
-          <a:p>
-            <a:pPr rtl="1" algn="ctr" indent="0" marL="0">
-              <a:buNone/>
-            </a:pPr>
-            <a:r>
-              <a:rPr lang="ar-SA" altLang="en-US" sz="850" b="1" dirty="0">
-                <a:solidFill>
-                  <a:srgbClr val="FFFFFF"/>
-                </a:solidFill>
-                <a:latin typeface="Arial" pitchFamily="34" charset="0"/>
-                <a:ea typeface="Arial" pitchFamily="34" charset="-122"/>
-                <a:cs typeface="Arial" pitchFamily="34" charset="-120"/>
-              </a:rPr>
-              <a:t>D</a:t>
-            </a:r>
-            <a:endParaRPr lang="ar-SA" sz="850" dirty="0"/>
-          </a:p>
-        </p:txBody>
-      </p:sp>
-      <p:sp>
-        <p:nvSpPr>
-          <p:cNvPr id="267" name="Text 265"/>
-          <p:cNvSpPr/>
-          <p:nvPr/>
-        </p:nvSpPr>
-        <p:spPr>
-          <a:xfrm>
-            <a:off x="8762695" y="4696968"/>
-            <a:ext cx="2606040" cy="192786"/>
-          </a:xfrm>
-          <a:prstGeom prst="rect">
-            <a:avLst/>
-          </a:prstGeom>
-          <a:noFill/>
-          <a:ln/>
-        </p:spPr>
-        <p:txBody>
-          <a:bodyPr wrap="square" lIns="0" tIns="0" rIns="0" bIns="0" rtlCol="0" anchor="ctr">
-            <a:normAutofit/>
-          </a:bodyPr>
-          <a:lstStyle/>
-          <a:p>
-            <a:pPr rtl="1" algn="r" indent="0" marL="0">
-              <a:buNone/>
-            </a:pPr>
-            <a:r>
-              <a:rPr lang="ar-SA" altLang="en-US" sz="750" b="1" dirty="0">
-                <a:solidFill>
-                  <a:srgbClr val="222222"/>
-                </a:solidFill>
-                <a:latin typeface="Arial" pitchFamily="34" charset="0"/>
-                <a:ea typeface="Arial" pitchFamily="34" charset="-122"/>
-                <a:cs typeface="Arial" pitchFamily="34" charset="-120"/>
-              </a:rPr>
-              <a:t>بلاطة / لبشة الحفرة – حديد التسليح والشدات والخرسانة</a:t>
-            </a:r>
-            <a:endParaRPr lang="ar-SA" sz="750" dirty="0"/>
-          </a:p>
-        </p:txBody>
-      </p:sp>
-      <p:sp>
-        <p:nvSpPr>
-          <p:cNvPr id="268" name="Text 266"/>
-          <p:cNvSpPr/>
-          <p:nvPr/>
-        </p:nvSpPr>
-        <p:spPr>
-          <a:xfrm>
-            <a:off x="7967167" y="4696968"/>
-            <a:ext cx="777240" cy="192786"/>
-          </a:xfrm>
-          <a:prstGeom prst="rect">
-            <a:avLst/>
-          </a:prstGeom>
-          <a:noFill/>
-          <a:ln/>
-        </p:spPr>
-        <p:txBody>
-          <a:bodyPr wrap="square" lIns="0" tIns="0" rIns="0" bIns="0" rtlCol="0" anchor="ctr">
-            <a:normAutofit/>
-          </a:bodyPr>
-          <a:lstStyle/>
-          <a:p>
-            <a:pPr rtl="1" algn="ctr" indent="0" marL="0">
-              <a:buNone/>
-            </a:pPr>
-            <a:r>
-              <a:rPr lang="ar-SA" altLang="en-US" sz="700" dirty="0">
-                <a:solidFill>
-                  <a:srgbClr val="444444"/>
-                </a:solidFill>
-                <a:latin typeface="Arial" pitchFamily="34" charset="0"/>
-                <a:ea typeface="Arial" pitchFamily="34" charset="-122"/>
-                <a:cs typeface="Arial" pitchFamily="34" charset="-120"/>
-              </a:rPr>
-              <a:t>C · FS</a:t>
-            </a:r>
-            <a:endParaRPr lang="ar-SA" sz="700" dirty="0"/>
-          </a:p>
-        </p:txBody>
-      </p:sp>
-      <p:sp>
-        <p:nvSpPr>
-          <p:cNvPr id="269" name="Text 267"/>
-          <p:cNvSpPr/>
-          <p:nvPr/>
-        </p:nvSpPr>
-        <p:spPr>
-          <a:xfrm>
-            <a:off x="7464247" y="4696968"/>
-            <a:ext cx="502920" cy="192786"/>
-          </a:xfrm>
-          <a:prstGeom prst="rect">
-            <a:avLst/>
-          </a:prstGeom>
-          <a:noFill/>
-          <a:ln/>
-        </p:spPr>
-        <p:txBody>
-          <a:bodyPr wrap="square" lIns="0" tIns="0" rIns="0" bIns="0" rtlCol="0" anchor="ctr">
-            <a:normAutofit/>
-          </a:bodyPr>
-          <a:lstStyle/>
-          <a:p>
-            <a:pPr rtl="1" algn="ctr" indent="0" marL="0">
-              <a:buNone/>
-            </a:pPr>
-            <a:r>
-              <a:rPr lang="ar-SA" altLang="en-US" sz="900" b="1" dirty="0">
-                <a:solidFill>
-                  <a:srgbClr val="222222"/>
-                </a:solidFill>
-                <a:latin typeface="Arial" pitchFamily="34" charset="0"/>
-                <a:ea typeface="Arial" pitchFamily="34" charset="-122"/>
-                <a:cs typeface="Arial" pitchFamily="34" charset="-120"/>
-              </a:rPr>
-              <a:t>5</a:t>
-            </a:r>
-            <a:endParaRPr lang="ar-SA" sz="900" dirty="0"/>
-          </a:p>
-        </p:txBody>
-      </p:sp>
-      <p:sp>
-        <p:nvSpPr>
-          <p:cNvPr id="270" name="Text 268"/>
-          <p:cNvSpPr/>
-          <p:nvPr/>
-        </p:nvSpPr>
-        <p:spPr>
-          <a:xfrm>
-            <a:off x="6805879" y="4696968"/>
-            <a:ext cx="658368" cy="192786"/>
-          </a:xfrm>
-          <a:prstGeom prst="rect">
-            <a:avLst/>
-          </a:prstGeom>
-          <a:noFill/>
-          <a:ln/>
-        </p:spPr>
-        <p:txBody>
-          <a:bodyPr wrap="square" lIns="0" tIns="0" rIns="0" bIns="0" rtlCol="0" anchor="ctr">
-            <a:normAutofit/>
-          </a:bodyPr>
-          <a:lstStyle/>
-          <a:p>
-            <a:pPr rtl="1" algn="ctr" indent="0" marL="0">
-              <a:buNone/>
-            </a:pPr>
-            <a:r>
-              <a:rPr lang="ar-SA" altLang="en-US" sz="700" b="1" dirty="0">
-                <a:solidFill>
-                  <a:srgbClr val="222222"/>
-                </a:solidFill>
-                <a:latin typeface="Arial" pitchFamily="34" charset="0"/>
-                <a:ea typeface="Arial" pitchFamily="34" charset="-122"/>
-                <a:cs typeface="Arial" pitchFamily="34" charset="-120"/>
-              </a:rPr>
-              <a:t>29 أكتوبر</a:t>
-            </a:r>
-            <a:endParaRPr lang="ar-SA" sz="700" dirty="0"/>
-          </a:p>
-        </p:txBody>
-      </p:sp>
-      <p:sp>
-        <p:nvSpPr>
-          <p:cNvPr id="271" name="Text 269"/>
-          <p:cNvSpPr/>
-          <p:nvPr/>
-        </p:nvSpPr>
-        <p:spPr>
-          <a:xfrm>
-            <a:off x="6147511" y="4696968"/>
-            <a:ext cx="658368" cy="192786"/>
-          </a:xfrm>
-          <a:prstGeom prst="rect">
-            <a:avLst/>
-          </a:prstGeom>
-          <a:noFill/>
-          <a:ln/>
-        </p:spPr>
-        <p:txBody>
-          <a:bodyPr wrap="square" lIns="0" tIns="0" rIns="0" bIns="0" rtlCol="0" anchor="ctr">
-            <a:normAutofit/>
-          </a:bodyPr>
-          <a:lstStyle/>
-          <a:p>
-            <a:pPr rtl="1" algn="ctr" indent="0" marL="0">
-              <a:buNone/>
-            </a:pPr>
-            <a:r>
-              <a:rPr lang="ar-SA" altLang="en-US" sz="700" b="1" dirty="0">
-                <a:solidFill>
-                  <a:srgbClr val="222222"/>
-                </a:solidFill>
-                <a:latin typeface="Arial" pitchFamily="34" charset="0"/>
-                <a:ea typeface="Arial" pitchFamily="34" charset="-122"/>
-                <a:cs typeface="Arial" pitchFamily="34" charset="-120"/>
-              </a:rPr>
-              <a:t>3 نوفمبر</a:t>
-            </a:r>
-            <a:endParaRPr lang="ar-SA" sz="700" dirty="0"/>
-          </a:p>
-        </p:txBody>
-      </p:sp>
-      <p:sp>
-        <p:nvSpPr>
-          <p:cNvPr id="272" name="Shape 270"/>
-          <p:cNvSpPr/>
-          <p:nvPr/>
-        </p:nvSpPr>
-        <p:spPr>
-          <a:xfrm>
-            <a:off x="2576430" y="4737453"/>
-            <a:ext cx="1020309" cy="111816"/>
+            <a:off x="2576430" y="4621934"/>
+            <a:ext cx="1020309" cy="129494"/>
           </a:xfrm>
           <a:prstGeom prst="roundRect">
             <a:avLst>
-              <a:gd name="adj" fmla="val 32711"/>
+              <a:gd name="adj" fmla="val 28245"/>
             </a:avLst>
           </a:prstGeom>
           <a:solidFill>
@@ -16223,14 +15945,310 @@
       </p:sp>
       <p:sp>
         <p:nvSpPr>
+          <p:cNvPr id="265" name="Text 263"/>
+          <p:cNvSpPr/>
+          <p:nvPr/>
+        </p:nvSpPr>
+        <p:spPr>
+          <a:xfrm>
+            <a:off x="2576430" y="4621934"/>
+            <a:ext cx="1020309" cy="129494"/>
+          </a:xfrm>
+          <a:prstGeom prst="rect">
+            <a:avLst/>
+          </a:prstGeom>
+          <a:noFill/>
+          <a:ln/>
+        </p:spPr>
+        <p:txBody>
+          <a:bodyPr wrap="square" lIns="0" tIns="0" rIns="0" bIns="0" rtlCol="0" anchor="ctr">
+            <a:normAutofit/>
+          </a:bodyPr>
+          <a:lstStyle/>
+          <a:p>
+            <a:pPr rtl="1" algn="ctr" indent="0" marL="0">
+              <a:buNone/>
+            </a:pPr>
+            <a:r>
+              <a:rPr lang="ar-SA" altLang="en-US" sz="700" b="1" dirty="0">
+                <a:solidFill>
+                  <a:srgbClr val="FFFFFF"/>
+                </a:solidFill>
+                <a:latin typeface="Arial" pitchFamily="34" charset="0"/>
+                <a:ea typeface="Arial" pitchFamily="34" charset="-122"/>
+                <a:cs typeface="Arial" pitchFamily="34" charset="-120"/>
+              </a:rPr>
+              <a:t>5 يوم</a:t>
+            </a:r>
+            <a:endParaRPr lang="ar-SA" sz="700" dirty="0"/>
+          </a:p>
+        </p:txBody>
+      </p:sp>
+      <p:sp>
+        <p:nvSpPr>
+          <p:cNvPr id="266" name="Shape 264"/>
+          <p:cNvSpPr/>
+          <p:nvPr/>
+        </p:nvSpPr>
+        <p:spPr>
+          <a:xfrm>
+            <a:off x="365760" y="4798314"/>
+            <a:ext cx="11460175" cy="223266"/>
+          </a:xfrm>
+          <a:prstGeom prst="rect">
+            <a:avLst/>
+          </a:prstGeom>
+          <a:solidFill>
+            <a:srgbClr val="F6F9FA"/>
+          </a:solidFill>
+          <a:ln w="6350">
+            <a:solidFill>
+              <a:srgbClr val="DFE6EA"/>
+            </a:solidFill>
+            <a:prstDash val="solid"/>
+          </a:ln>
+        </p:spPr>
+      </p:sp>
+      <p:sp>
+        <p:nvSpPr>
+          <p:cNvPr id="267" name="Shape 265"/>
+          <p:cNvSpPr/>
+          <p:nvPr/>
+        </p:nvSpPr>
+        <p:spPr>
+          <a:xfrm>
+            <a:off x="11515039" y="4791075"/>
+            <a:ext cx="237744" cy="237744"/>
+          </a:xfrm>
+          <a:prstGeom prst="ellipse">
+            <a:avLst/>
+          </a:prstGeom>
+          <a:solidFill>
+            <a:srgbClr val="00778B"/>
+          </a:solidFill>
+          <a:ln w="6350">
+            <a:solidFill>
+              <a:srgbClr val="00778B"/>
+            </a:solidFill>
+            <a:prstDash val="solid"/>
+          </a:ln>
+        </p:spPr>
+      </p:sp>
+      <p:sp>
+        <p:nvSpPr>
+          <p:cNvPr id="268" name="Text 266"/>
+          <p:cNvSpPr/>
+          <p:nvPr/>
+        </p:nvSpPr>
+        <p:spPr>
+          <a:xfrm>
+            <a:off x="11441887" y="4798314"/>
+            <a:ext cx="384048" cy="223266"/>
+          </a:xfrm>
+          <a:prstGeom prst="rect">
+            <a:avLst/>
+          </a:prstGeom>
+          <a:noFill/>
+          <a:ln/>
+        </p:spPr>
+        <p:txBody>
+          <a:bodyPr wrap="square" lIns="0" tIns="0" rIns="0" bIns="0" rtlCol="0" anchor="ctr">
+            <a:normAutofit/>
+          </a:bodyPr>
+          <a:lstStyle/>
+          <a:p>
+            <a:pPr rtl="1" algn="ctr" indent="0" marL="0">
+              <a:buNone/>
+            </a:pPr>
+            <a:r>
+              <a:rPr lang="ar-SA" altLang="en-US" sz="850" b="1" dirty="0">
+                <a:solidFill>
+                  <a:srgbClr val="FFFFFF"/>
+                </a:solidFill>
+                <a:latin typeface="Arial" pitchFamily="34" charset="0"/>
+                <a:ea typeface="Arial" pitchFamily="34" charset="-122"/>
+                <a:cs typeface="Arial" pitchFamily="34" charset="-120"/>
+              </a:rPr>
+              <a:t>E</a:t>
+            </a:r>
+            <a:endParaRPr lang="ar-SA" sz="850" dirty="0"/>
+          </a:p>
+        </p:txBody>
+      </p:sp>
+      <p:sp>
+        <p:nvSpPr>
+          <p:cNvPr id="269" name="Text 267"/>
+          <p:cNvSpPr/>
+          <p:nvPr/>
+        </p:nvSpPr>
+        <p:spPr>
+          <a:xfrm>
+            <a:off x="8762695" y="4798314"/>
+            <a:ext cx="2606040" cy="223266"/>
+          </a:xfrm>
+          <a:prstGeom prst="rect">
+            <a:avLst/>
+          </a:prstGeom>
+          <a:noFill/>
+          <a:ln/>
+        </p:spPr>
+        <p:txBody>
+          <a:bodyPr wrap="square" lIns="0" tIns="0" rIns="0" bIns="0" rtlCol="0" anchor="ctr">
+            <a:normAutofit/>
+          </a:bodyPr>
+          <a:lstStyle/>
+          <a:p>
+            <a:pPr rtl="1" algn="r" indent="0" marL="0">
+              <a:buNone/>
+            </a:pPr>
+            <a:r>
+              <a:rPr lang="ar-SA" altLang="en-US" sz="750" b="1" dirty="0">
+                <a:solidFill>
+                  <a:srgbClr val="222222"/>
+                </a:solidFill>
+                <a:latin typeface="Arial" pitchFamily="34" charset="0"/>
+                <a:ea typeface="Arial" pitchFamily="34" charset="-122"/>
+                <a:cs typeface="Arial" pitchFamily="34" charset="-120"/>
+              </a:rPr>
+              <a:t>جدار الحفرة – حديد التسليح والشدات والخرسانة</a:t>
+            </a:r>
+            <a:endParaRPr lang="ar-SA" sz="750" dirty="0"/>
+          </a:p>
+        </p:txBody>
+      </p:sp>
+      <p:sp>
+        <p:nvSpPr>
+          <p:cNvPr id="270" name="Text 268"/>
+          <p:cNvSpPr/>
+          <p:nvPr/>
+        </p:nvSpPr>
+        <p:spPr>
+          <a:xfrm>
+            <a:off x="7967167" y="4798314"/>
+            <a:ext cx="777240" cy="223266"/>
+          </a:xfrm>
+          <a:prstGeom prst="rect">
+            <a:avLst/>
+          </a:prstGeom>
+          <a:noFill/>
+          <a:ln/>
+        </p:spPr>
+        <p:txBody>
+          <a:bodyPr wrap="square" lIns="0" tIns="0" rIns="0" bIns="0" rtlCol="0" anchor="ctr">
+            <a:normAutofit/>
+          </a:bodyPr>
+          <a:lstStyle/>
+          <a:p>
+            <a:pPr rtl="1" algn="ctr" indent="0" marL="0">
+              <a:buNone/>
+            </a:pPr>
+            <a:r>
+              <a:rPr lang="ar-SA" altLang="en-US" sz="700" dirty="0">
+                <a:solidFill>
+                  <a:srgbClr val="444444"/>
+                </a:solidFill>
+                <a:latin typeface="Arial" pitchFamily="34" charset="0"/>
+                <a:ea typeface="Arial" pitchFamily="34" charset="-122"/>
+                <a:cs typeface="Arial" pitchFamily="34" charset="-120"/>
+              </a:rPr>
+              <a:t>D · FS</a:t>
+            </a:r>
+            <a:endParaRPr lang="ar-SA" sz="700" dirty="0"/>
+          </a:p>
+        </p:txBody>
+      </p:sp>
+      <p:sp>
+        <p:nvSpPr>
+          <p:cNvPr id="271" name="Text 269"/>
+          <p:cNvSpPr/>
+          <p:nvPr/>
+        </p:nvSpPr>
+        <p:spPr>
+          <a:xfrm>
+            <a:off x="7464247" y="4798314"/>
+            <a:ext cx="502920" cy="223266"/>
+          </a:xfrm>
+          <a:prstGeom prst="rect">
+            <a:avLst/>
+          </a:prstGeom>
+          <a:noFill/>
+          <a:ln/>
+        </p:spPr>
+        <p:txBody>
+          <a:bodyPr wrap="square" lIns="0" tIns="0" rIns="0" bIns="0" rtlCol="0" anchor="ctr">
+            <a:normAutofit/>
+          </a:bodyPr>
+          <a:lstStyle/>
+          <a:p>
+            <a:pPr rtl="1" algn="ctr" indent="0" marL="0">
+              <a:buNone/>
+            </a:pPr>
+            <a:r>
+              <a:rPr lang="ar-SA" altLang="en-US" sz="900" b="1" dirty="0">
+                <a:solidFill>
+                  <a:srgbClr val="222222"/>
+                </a:solidFill>
+                <a:latin typeface="Arial" pitchFamily="34" charset="0"/>
+                <a:ea typeface="Arial" pitchFamily="34" charset="-122"/>
+                <a:cs typeface="Arial" pitchFamily="34" charset="-120"/>
+              </a:rPr>
+              <a:t>3</a:t>
+            </a:r>
+            <a:endParaRPr lang="ar-SA" sz="900" dirty="0"/>
+          </a:p>
+        </p:txBody>
+      </p:sp>
+      <p:sp>
+        <p:nvSpPr>
+          <p:cNvPr id="272" name="Text 270"/>
+          <p:cNvSpPr/>
+          <p:nvPr/>
+        </p:nvSpPr>
+        <p:spPr>
+          <a:xfrm>
+            <a:off x="6805879" y="4798314"/>
+            <a:ext cx="658368" cy="223266"/>
+          </a:xfrm>
+          <a:prstGeom prst="rect">
+            <a:avLst/>
+          </a:prstGeom>
+          <a:noFill/>
+          <a:ln/>
+        </p:spPr>
+        <p:txBody>
+          <a:bodyPr wrap="square" lIns="0" tIns="0" rIns="0" bIns="0" rtlCol="0" anchor="ctr">
+            <a:normAutofit/>
+          </a:bodyPr>
+          <a:lstStyle/>
+          <a:p>
+            <a:pPr rtl="1" algn="ctr" indent="0" marL="0">
+              <a:buNone/>
+            </a:pPr>
+            <a:r>
+              <a:rPr lang="ar-SA" altLang="en-US" sz="700" b="1" dirty="0">
+                <a:solidFill>
+                  <a:srgbClr val="222222"/>
+                </a:solidFill>
+                <a:latin typeface="Arial" pitchFamily="34" charset="0"/>
+                <a:ea typeface="Arial" pitchFamily="34" charset="-122"/>
+                <a:cs typeface="Arial" pitchFamily="34" charset="-120"/>
+              </a:rPr>
+              <a:t>4 نوفمبر</a:t>
+            </a:r>
+            <a:endParaRPr lang="ar-SA" sz="700" dirty="0"/>
+          </a:p>
+        </p:txBody>
+      </p:sp>
+      <p:sp>
+        <p:nvSpPr>
           <p:cNvPr id="273" name="Text 271"/>
           <p:cNvSpPr/>
           <p:nvPr/>
         </p:nvSpPr>
         <p:spPr>
           <a:xfrm>
-            <a:off x="2576430" y="4737453"/>
-            <a:ext cx="1020309" cy="111816"/>
+            <a:off x="6147511" y="4798314"/>
+            <a:ext cx="658368" cy="223266"/>
           </a:xfrm>
           <a:prstGeom prst="rect">
             <a:avLst/>
@@ -16250,13 +16268,13 @@
             <a:r>
               <a:rPr lang="ar-SA" altLang="en-US" sz="700" b="1" dirty="0">
                 <a:solidFill>
-                  <a:srgbClr val="FFFFFF"/>
-                </a:solidFill>
-                <a:latin typeface="Arial" pitchFamily="34" charset="0"/>
-                <a:ea typeface="Arial" pitchFamily="34" charset="-122"/>
-                <a:cs typeface="Arial" pitchFamily="34" charset="-120"/>
-              </a:rPr>
-              <a:t>5 يوم</a:t>
+                  <a:srgbClr val="222222"/>
+                </a:solidFill>
+                <a:latin typeface="Arial" pitchFamily="34" charset="0"/>
+                <a:ea typeface="Arial" pitchFamily="34" charset="-122"/>
+                <a:cs typeface="Arial" pitchFamily="34" charset="-120"/>
+              </a:rPr>
+              <a:t>7 نوفمبر</a:t>
             </a:r>
             <a:endParaRPr lang="ar-SA" sz="700" dirty="0"/>
           </a:p>
@@ -16270,308 +16288,12 @@
         </p:nvSpPr>
         <p:spPr>
           <a:xfrm>
-            <a:off x="365760" y="4889754"/>
-            <a:ext cx="11460175" cy="192786"/>
-          </a:xfrm>
-          <a:prstGeom prst="rect">
-            <a:avLst/>
-          </a:prstGeom>
-          <a:solidFill>
-            <a:srgbClr val="F6F9FA"/>
-          </a:solidFill>
-          <a:ln w="6350">
-            <a:solidFill>
-              <a:srgbClr val="DFE6EA"/>
-            </a:solidFill>
-            <a:prstDash val="solid"/>
-          </a:ln>
-        </p:spPr>
-      </p:sp>
-      <p:sp>
-        <p:nvSpPr>
-          <p:cNvPr id="275" name="Shape 273"/>
-          <p:cNvSpPr/>
-          <p:nvPr/>
-        </p:nvSpPr>
-        <p:spPr>
-          <a:xfrm>
-            <a:off x="11515039" y="4867275"/>
-            <a:ext cx="237744" cy="237744"/>
-          </a:xfrm>
-          <a:prstGeom prst="ellipse">
-            <a:avLst/>
-          </a:prstGeom>
-          <a:solidFill>
-            <a:srgbClr val="00778B"/>
-          </a:solidFill>
-          <a:ln w="6350">
-            <a:solidFill>
-              <a:srgbClr val="00778B"/>
-            </a:solidFill>
-            <a:prstDash val="solid"/>
-          </a:ln>
-        </p:spPr>
-      </p:sp>
-      <p:sp>
-        <p:nvSpPr>
-          <p:cNvPr id="276" name="Text 274"/>
-          <p:cNvSpPr/>
-          <p:nvPr/>
-        </p:nvSpPr>
-        <p:spPr>
-          <a:xfrm>
-            <a:off x="11441887" y="4889754"/>
-            <a:ext cx="384048" cy="192786"/>
-          </a:xfrm>
-          <a:prstGeom prst="rect">
-            <a:avLst/>
-          </a:prstGeom>
-          <a:noFill/>
-          <a:ln/>
-        </p:spPr>
-        <p:txBody>
-          <a:bodyPr wrap="square" lIns="0" tIns="0" rIns="0" bIns="0" rtlCol="0" anchor="ctr">
-            <a:normAutofit/>
-          </a:bodyPr>
-          <a:lstStyle/>
-          <a:p>
-            <a:pPr rtl="1" algn="ctr" indent="0" marL="0">
-              <a:buNone/>
-            </a:pPr>
-            <a:r>
-              <a:rPr lang="ar-SA" altLang="en-US" sz="850" b="1" dirty="0">
-                <a:solidFill>
-                  <a:srgbClr val="FFFFFF"/>
-                </a:solidFill>
-                <a:latin typeface="Arial" pitchFamily="34" charset="0"/>
-                <a:ea typeface="Arial" pitchFamily="34" charset="-122"/>
-                <a:cs typeface="Arial" pitchFamily="34" charset="-120"/>
-              </a:rPr>
-              <a:t>E</a:t>
-            </a:r>
-            <a:endParaRPr lang="ar-SA" sz="850" dirty="0"/>
-          </a:p>
-        </p:txBody>
-      </p:sp>
-      <p:sp>
-        <p:nvSpPr>
-          <p:cNvPr id="277" name="Text 275"/>
-          <p:cNvSpPr/>
-          <p:nvPr/>
-        </p:nvSpPr>
-        <p:spPr>
-          <a:xfrm>
-            <a:off x="8762695" y="4889754"/>
-            <a:ext cx="2606040" cy="192786"/>
-          </a:xfrm>
-          <a:prstGeom prst="rect">
-            <a:avLst/>
-          </a:prstGeom>
-          <a:noFill/>
-          <a:ln/>
-        </p:spPr>
-        <p:txBody>
-          <a:bodyPr wrap="square" lIns="0" tIns="0" rIns="0" bIns="0" rtlCol="0" anchor="ctr">
-            <a:normAutofit/>
-          </a:bodyPr>
-          <a:lstStyle/>
-          <a:p>
-            <a:pPr rtl="1" algn="r" indent="0" marL="0">
-              <a:buNone/>
-            </a:pPr>
-            <a:r>
-              <a:rPr lang="ar-SA" altLang="en-US" sz="750" b="1" dirty="0">
-                <a:solidFill>
-                  <a:srgbClr val="222222"/>
-                </a:solidFill>
-                <a:latin typeface="Arial" pitchFamily="34" charset="0"/>
-                <a:ea typeface="Arial" pitchFamily="34" charset="-122"/>
-                <a:cs typeface="Arial" pitchFamily="34" charset="-120"/>
-              </a:rPr>
-              <a:t>جدار الحفرة – حديد التسليح والشدات والخرسانة</a:t>
-            </a:r>
-            <a:endParaRPr lang="ar-SA" sz="750" dirty="0"/>
-          </a:p>
-        </p:txBody>
-      </p:sp>
-      <p:sp>
-        <p:nvSpPr>
-          <p:cNvPr id="278" name="Text 276"/>
-          <p:cNvSpPr/>
-          <p:nvPr/>
-        </p:nvSpPr>
-        <p:spPr>
-          <a:xfrm>
-            <a:off x="7967167" y="4889754"/>
-            <a:ext cx="777240" cy="192786"/>
-          </a:xfrm>
-          <a:prstGeom prst="rect">
-            <a:avLst/>
-          </a:prstGeom>
-          <a:noFill/>
-          <a:ln/>
-        </p:spPr>
-        <p:txBody>
-          <a:bodyPr wrap="square" lIns="0" tIns="0" rIns="0" bIns="0" rtlCol="0" anchor="ctr">
-            <a:normAutofit/>
-          </a:bodyPr>
-          <a:lstStyle/>
-          <a:p>
-            <a:pPr rtl="1" algn="ctr" indent="0" marL="0">
-              <a:buNone/>
-            </a:pPr>
-            <a:r>
-              <a:rPr lang="ar-SA" altLang="en-US" sz="700" dirty="0">
-                <a:solidFill>
-                  <a:srgbClr val="444444"/>
-                </a:solidFill>
-                <a:latin typeface="Arial" pitchFamily="34" charset="0"/>
-                <a:ea typeface="Arial" pitchFamily="34" charset="-122"/>
-                <a:cs typeface="Arial" pitchFamily="34" charset="-120"/>
-              </a:rPr>
-              <a:t>D · FS</a:t>
-            </a:r>
-            <a:endParaRPr lang="ar-SA" sz="700" dirty="0"/>
-          </a:p>
-        </p:txBody>
-      </p:sp>
-      <p:sp>
-        <p:nvSpPr>
-          <p:cNvPr id="279" name="Text 277"/>
-          <p:cNvSpPr/>
-          <p:nvPr/>
-        </p:nvSpPr>
-        <p:spPr>
-          <a:xfrm>
-            <a:off x="7464247" y="4889754"/>
-            <a:ext cx="502920" cy="192786"/>
-          </a:xfrm>
-          <a:prstGeom prst="rect">
-            <a:avLst/>
-          </a:prstGeom>
-          <a:noFill/>
-          <a:ln/>
-        </p:spPr>
-        <p:txBody>
-          <a:bodyPr wrap="square" lIns="0" tIns="0" rIns="0" bIns="0" rtlCol="0" anchor="ctr">
-            <a:normAutofit/>
-          </a:bodyPr>
-          <a:lstStyle/>
-          <a:p>
-            <a:pPr rtl="1" algn="ctr" indent="0" marL="0">
-              <a:buNone/>
-            </a:pPr>
-            <a:r>
-              <a:rPr lang="ar-SA" altLang="en-US" sz="900" b="1" dirty="0">
-                <a:solidFill>
-                  <a:srgbClr val="222222"/>
-                </a:solidFill>
-                <a:latin typeface="Arial" pitchFamily="34" charset="0"/>
-                <a:ea typeface="Arial" pitchFamily="34" charset="-122"/>
-                <a:cs typeface="Arial" pitchFamily="34" charset="-120"/>
-              </a:rPr>
-              <a:t>3</a:t>
-            </a:r>
-            <a:endParaRPr lang="ar-SA" sz="900" dirty="0"/>
-          </a:p>
-        </p:txBody>
-      </p:sp>
-      <p:sp>
-        <p:nvSpPr>
-          <p:cNvPr id="280" name="Text 278"/>
-          <p:cNvSpPr/>
-          <p:nvPr/>
-        </p:nvSpPr>
-        <p:spPr>
-          <a:xfrm>
-            <a:off x="6805879" y="4889754"/>
-            <a:ext cx="658368" cy="192786"/>
-          </a:xfrm>
-          <a:prstGeom prst="rect">
-            <a:avLst/>
-          </a:prstGeom>
-          <a:noFill/>
-          <a:ln/>
-        </p:spPr>
-        <p:txBody>
-          <a:bodyPr wrap="square" lIns="0" tIns="0" rIns="0" bIns="0" rtlCol="0" anchor="ctr">
-            <a:normAutofit/>
-          </a:bodyPr>
-          <a:lstStyle/>
-          <a:p>
-            <a:pPr rtl="1" algn="ctr" indent="0" marL="0">
-              <a:buNone/>
-            </a:pPr>
-            <a:r>
-              <a:rPr lang="ar-SA" altLang="en-US" sz="700" b="1" dirty="0">
-                <a:solidFill>
-                  <a:srgbClr val="222222"/>
-                </a:solidFill>
-                <a:latin typeface="Arial" pitchFamily="34" charset="0"/>
-                <a:ea typeface="Arial" pitchFamily="34" charset="-122"/>
-                <a:cs typeface="Arial" pitchFamily="34" charset="-120"/>
-              </a:rPr>
-              <a:t>4 نوفمبر</a:t>
-            </a:r>
-            <a:endParaRPr lang="ar-SA" sz="700" dirty="0"/>
-          </a:p>
-        </p:txBody>
-      </p:sp>
-      <p:sp>
-        <p:nvSpPr>
-          <p:cNvPr id="281" name="Text 279"/>
-          <p:cNvSpPr/>
-          <p:nvPr/>
-        </p:nvSpPr>
-        <p:spPr>
-          <a:xfrm>
-            <a:off x="6147511" y="4889754"/>
-            <a:ext cx="658368" cy="192786"/>
-          </a:xfrm>
-          <a:prstGeom prst="rect">
-            <a:avLst/>
-          </a:prstGeom>
-          <a:noFill/>
-          <a:ln/>
-        </p:spPr>
-        <p:txBody>
-          <a:bodyPr wrap="square" lIns="0" tIns="0" rIns="0" bIns="0" rtlCol="0" anchor="ctr">
-            <a:normAutofit/>
-          </a:bodyPr>
-          <a:lstStyle/>
-          <a:p>
-            <a:pPr rtl="1" algn="ctr" indent="0" marL="0">
-              <a:buNone/>
-            </a:pPr>
-            <a:r>
-              <a:rPr lang="ar-SA" altLang="en-US" sz="700" b="1" dirty="0">
-                <a:solidFill>
-                  <a:srgbClr val="222222"/>
-                </a:solidFill>
-                <a:latin typeface="Arial" pitchFamily="34" charset="0"/>
-                <a:ea typeface="Arial" pitchFamily="34" charset="-122"/>
-                <a:cs typeface="Arial" pitchFamily="34" charset="-120"/>
-              </a:rPr>
-              <a:t>7 نوفمبر</a:t>
-            </a:r>
-            <a:endParaRPr lang="ar-SA" sz="700" dirty="0"/>
-          </a:p>
-        </p:txBody>
-      </p:sp>
-      <p:sp>
-        <p:nvSpPr>
-          <p:cNvPr id="282" name="Shape 280"/>
-          <p:cNvSpPr/>
-          <p:nvPr/>
-        </p:nvSpPr>
-        <p:spPr>
-          <a:xfrm>
-            <a:off x="1896224" y="4930239"/>
-            <a:ext cx="680206" cy="111816"/>
+            <a:off x="1896224" y="4845200"/>
+            <a:ext cx="680206" cy="129494"/>
           </a:xfrm>
           <a:prstGeom prst="roundRect">
             <a:avLst>
-              <a:gd name="adj" fmla="val 32711"/>
+              <a:gd name="adj" fmla="val 28245"/>
             </a:avLst>
           </a:prstGeom>
           <a:solidFill>
@@ -16594,14 +16316,310 @@
       </p:sp>
       <p:sp>
         <p:nvSpPr>
+          <p:cNvPr id="275" name="Text 273"/>
+          <p:cNvSpPr/>
+          <p:nvPr/>
+        </p:nvSpPr>
+        <p:spPr>
+          <a:xfrm>
+            <a:off x="1896224" y="4845200"/>
+            <a:ext cx="680206" cy="129494"/>
+          </a:xfrm>
+          <a:prstGeom prst="rect">
+            <a:avLst/>
+          </a:prstGeom>
+          <a:noFill/>
+          <a:ln/>
+        </p:spPr>
+        <p:txBody>
+          <a:bodyPr wrap="square" lIns="0" tIns="0" rIns="0" bIns="0" rtlCol="0" anchor="ctr">
+            <a:normAutofit/>
+          </a:bodyPr>
+          <a:lstStyle/>
+          <a:p>
+            <a:pPr rtl="1" algn="ctr" indent="0" marL="0">
+              <a:buNone/>
+            </a:pPr>
+            <a:r>
+              <a:rPr lang="ar-SA" altLang="en-US" sz="700" b="1" dirty="0">
+                <a:solidFill>
+                  <a:srgbClr val="FFFFFF"/>
+                </a:solidFill>
+                <a:latin typeface="Arial" pitchFamily="34" charset="0"/>
+                <a:ea typeface="Arial" pitchFamily="34" charset="-122"/>
+                <a:cs typeface="Arial" pitchFamily="34" charset="-120"/>
+              </a:rPr>
+              <a:t>3 يوم</a:t>
+            </a:r>
+            <a:endParaRPr lang="ar-SA" sz="700" dirty="0"/>
+          </a:p>
+        </p:txBody>
+      </p:sp>
+      <p:sp>
+        <p:nvSpPr>
+          <p:cNvPr id="276" name="Shape 274"/>
+          <p:cNvSpPr/>
+          <p:nvPr/>
+        </p:nvSpPr>
+        <p:spPr>
+          <a:xfrm>
+            <a:off x="365760" y="5021580"/>
+            <a:ext cx="11460175" cy="223266"/>
+          </a:xfrm>
+          <a:prstGeom prst="rect">
+            <a:avLst/>
+          </a:prstGeom>
+          <a:solidFill>
+            <a:srgbClr val="FFFFFF"/>
+          </a:solidFill>
+          <a:ln w="6350">
+            <a:solidFill>
+              <a:srgbClr val="DFE6EA"/>
+            </a:solidFill>
+            <a:prstDash val="solid"/>
+          </a:ln>
+        </p:spPr>
+      </p:sp>
+      <p:sp>
+        <p:nvSpPr>
+          <p:cNvPr id="277" name="Shape 275"/>
+          <p:cNvSpPr/>
+          <p:nvPr/>
+        </p:nvSpPr>
+        <p:spPr>
+          <a:xfrm>
+            <a:off x="11515039" y="5014341"/>
+            <a:ext cx="237744" cy="237744"/>
+          </a:xfrm>
+          <a:prstGeom prst="ellipse">
+            <a:avLst/>
+          </a:prstGeom>
+          <a:solidFill>
+            <a:srgbClr val="2E9E6B"/>
+          </a:solidFill>
+          <a:ln w="19050">
+            <a:solidFill>
+              <a:srgbClr val="222222"/>
+            </a:solidFill>
+            <a:prstDash val="solid"/>
+          </a:ln>
+        </p:spPr>
+      </p:sp>
+      <p:sp>
+        <p:nvSpPr>
+          <p:cNvPr id="278" name="Text 276"/>
+          <p:cNvSpPr/>
+          <p:nvPr/>
+        </p:nvSpPr>
+        <p:spPr>
+          <a:xfrm>
+            <a:off x="11441887" y="5021580"/>
+            <a:ext cx="384048" cy="223266"/>
+          </a:xfrm>
+          <a:prstGeom prst="rect">
+            <a:avLst/>
+          </a:prstGeom>
+          <a:noFill/>
+          <a:ln/>
+        </p:spPr>
+        <p:txBody>
+          <a:bodyPr wrap="square" lIns="0" tIns="0" rIns="0" bIns="0" rtlCol="0" anchor="ctr">
+            <a:normAutofit/>
+          </a:bodyPr>
+          <a:lstStyle/>
+          <a:p>
+            <a:pPr rtl="1" algn="ctr" indent="0" marL="0">
+              <a:buNone/>
+            </a:pPr>
+            <a:r>
+              <a:rPr lang="ar-SA" altLang="en-US" sz="850" b="1" dirty="0">
+                <a:solidFill>
+                  <a:srgbClr val="FFFFFF"/>
+                </a:solidFill>
+                <a:latin typeface="Arial" pitchFamily="34" charset="0"/>
+                <a:ea typeface="Arial" pitchFamily="34" charset="-122"/>
+                <a:cs typeface="Arial" pitchFamily="34" charset="-120"/>
+              </a:rPr>
+              <a:t>F</a:t>
+            </a:r>
+            <a:endParaRPr lang="ar-SA" sz="850" dirty="0"/>
+          </a:p>
+        </p:txBody>
+      </p:sp>
+      <p:sp>
+        <p:nvSpPr>
+          <p:cNvPr id="279" name="Text 277"/>
+          <p:cNvSpPr/>
+          <p:nvPr/>
+        </p:nvSpPr>
+        <p:spPr>
+          <a:xfrm>
+            <a:off x="8762695" y="5021580"/>
+            <a:ext cx="2606040" cy="223266"/>
+          </a:xfrm>
+          <a:prstGeom prst="rect">
+            <a:avLst/>
+          </a:prstGeom>
+          <a:noFill/>
+          <a:ln/>
+        </p:spPr>
+        <p:txBody>
+          <a:bodyPr wrap="square" lIns="0" tIns="0" rIns="0" bIns="0" rtlCol="0" anchor="ctr">
+            <a:normAutofit/>
+          </a:bodyPr>
+          <a:lstStyle/>
+          <a:p>
+            <a:pPr rtl="1" algn="r" indent="0" marL="0">
+              <a:buNone/>
+            </a:pPr>
+            <a:r>
+              <a:rPr lang="ar-SA" altLang="en-US" sz="750" b="1" dirty="0">
+                <a:solidFill>
+                  <a:srgbClr val="222222"/>
+                </a:solidFill>
+                <a:latin typeface="Arial" pitchFamily="34" charset="0"/>
+                <a:ea typeface="Arial" pitchFamily="34" charset="-122"/>
+                <a:cs typeface="Arial" pitchFamily="34" charset="-120"/>
+              </a:rPr>
+              <a:t>أساسات المبنى – حفر ودمك / اختبار وحديد تسليح وخرسانة</a:t>
+            </a:r>
+            <a:endParaRPr lang="ar-SA" sz="750" dirty="0"/>
+          </a:p>
+        </p:txBody>
+      </p:sp>
+      <p:sp>
+        <p:nvSpPr>
+          <p:cNvPr id="280" name="Text 278"/>
+          <p:cNvSpPr/>
+          <p:nvPr/>
+        </p:nvSpPr>
+        <p:spPr>
+          <a:xfrm>
+            <a:off x="7967167" y="5021580"/>
+            <a:ext cx="777240" cy="223266"/>
+          </a:xfrm>
+          <a:prstGeom prst="rect">
+            <a:avLst/>
+          </a:prstGeom>
+          <a:noFill/>
+          <a:ln/>
+        </p:spPr>
+        <p:txBody>
+          <a:bodyPr wrap="square" lIns="0" tIns="0" rIns="0" bIns="0" rtlCol="0" anchor="ctr">
+            <a:normAutofit/>
+          </a:bodyPr>
+          <a:lstStyle/>
+          <a:p>
+            <a:pPr rtl="1" algn="ctr" indent="0" marL="0">
+              <a:buNone/>
+            </a:pPr>
+            <a:r>
+              <a:rPr lang="ar-SA" altLang="en-US" sz="700" dirty="0">
+                <a:solidFill>
+                  <a:srgbClr val="444444"/>
+                </a:solidFill>
+                <a:latin typeface="Arial" pitchFamily="34" charset="0"/>
+                <a:ea typeface="Arial" pitchFamily="34" charset="-122"/>
+                <a:cs typeface="Arial" pitchFamily="34" charset="-120"/>
+              </a:rPr>
+              <a:t>D · FS</a:t>
+            </a:r>
+            <a:endParaRPr lang="ar-SA" sz="700" dirty="0"/>
+          </a:p>
+        </p:txBody>
+      </p:sp>
+      <p:sp>
+        <p:nvSpPr>
+          <p:cNvPr id="281" name="Text 279"/>
+          <p:cNvSpPr/>
+          <p:nvPr/>
+        </p:nvSpPr>
+        <p:spPr>
+          <a:xfrm>
+            <a:off x="7464247" y="5021580"/>
+            <a:ext cx="502920" cy="223266"/>
+          </a:xfrm>
+          <a:prstGeom prst="rect">
+            <a:avLst/>
+          </a:prstGeom>
+          <a:noFill/>
+          <a:ln/>
+        </p:spPr>
+        <p:txBody>
+          <a:bodyPr wrap="square" lIns="0" tIns="0" rIns="0" bIns="0" rtlCol="0" anchor="ctr">
+            <a:normAutofit/>
+          </a:bodyPr>
+          <a:lstStyle/>
+          <a:p>
+            <a:pPr rtl="1" algn="ctr" indent="0" marL="0">
+              <a:buNone/>
+            </a:pPr>
+            <a:r>
+              <a:rPr lang="ar-SA" altLang="en-US" sz="900" b="1" dirty="0">
+                <a:solidFill>
+                  <a:srgbClr val="222222"/>
+                </a:solidFill>
+                <a:latin typeface="Arial" pitchFamily="34" charset="0"/>
+                <a:ea typeface="Arial" pitchFamily="34" charset="-122"/>
+                <a:cs typeface="Arial" pitchFamily="34" charset="-120"/>
+              </a:rPr>
+              <a:t>6</a:t>
+            </a:r>
+            <a:endParaRPr lang="ar-SA" sz="900" dirty="0"/>
+          </a:p>
+        </p:txBody>
+      </p:sp>
+      <p:sp>
+        <p:nvSpPr>
+          <p:cNvPr id="282" name="Text 280"/>
+          <p:cNvSpPr/>
+          <p:nvPr/>
+        </p:nvSpPr>
+        <p:spPr>
+          <a:xfrm>
+            <a:off x="6805879" y="5021580"/>
+            <a:ext cx="658368" cy="223266"/>
+          </a:xfrm>
+          <a:prstGeom prst="rect">
+            <a:avLst/>
+          </a:prstGeom>
+          <a:noFill/>
+          <a:ln/>
+        </p:spPr>
+        <p:txBody>
+          <a:bodyPr wrap="square" lIns="0" tIns="0" rIns="0" bIns="0" rtlCol="0" anchor="ctr">
+            <a:normAutofit/>
+          </a:bodyPr>
+          <a:lstStyle/>
+          <a:p>
+            <a:pPr rtl="1" algn="ctr" indent="0" marL="0">
+              <a:buNone/>
+            </a:pPr>
+            <a:r>
+              <a:rPr lang="ar-SA" altLang="en-US" sz="700" b="1" dirty="0">
+                <a:solidFill>
+                  <a:srgbClr val="222222"/>
+                </a:solidFill>
+                <a:latin typeface="Arial" pitchFamily="34" charset="0"/>
+                <a:ea typeface="Arial" pitchFamily="34" charset="-122"/>
+                <a:cs typeface="Arial" pitchFamily="34" charset="-120"/>
+              </a:rPr>
+              <a:t>4 نوفمبر</a:t>
+            </a:r>
+            <a:endParaRPr lang="ar-SA" sz="700" dirty="0"/>
+          </a:p>
+        </p:txBody>
+      </p:sp>
+      <p:sp>
+        <p:nvSpPr>
           <p:cNvPr id="283" name="Text 281"/>
           <p:cNvSpPr/>
           <p:nvPr/>
         </p:nvSpPr>
         <p:spPr>
           <a:xfrm>
-            <a:off x="1896224" y="4930239"/>
-            <a:ext cx="680206" cy="111816"/>
+            <a:off x="6147511" y="5021580"/>
+            <a:ext cx="658368" cy="223266"/>
           </a:xfrm>
           <a:prstGeom prst="rect">
             <a:avLst/>
@@ -16621,13 +16639,13 @@
             <a:r>
               <a:rPr lang="ar-SA" altLang="en-US" sz="700" b="1" dirty="0">
                 <a:solidFill>
-                  <a:srgbClr val="FFFFFF"/>
-                </a:solidFill>
-                <a:latin typeface="Arial" pitchFamily="34" charset="0"/>
-                <a:ea typeface="Arial" pitchFamily="34" charset="-122"/>
-                <a:cs typeface="Arial" pitchFamily="34" charset="-120"/>
-              </a:rPr>
-              <a:t>3 يوم</a:t>
+                  <a:srgbClr val="222222"/>
+                </a:solidFill>
+                <a:latin typeface="Arial" pitchFamily="34" charset="0"/>
+                <a:ea typeface="Arial" pitchFamily="34" charset="-122"/>
+                <a:cs typeface="Arial" pitchFamily="34" charset="-120"/>
+              </a:rPr>
+              <a:t>10 نوفمبر</a:t>
             </a:r>
             <a:endParaRPr lang="ar-SA" sz="700" dirty="0"/>
           </a:p>
@@ -16641,308 +16659,12 @@
         </p:nvSpPr>
         <p:spPr>
           <a:xfrm>
-            <a:off x="365760" y="5082540"/>
-            <a:ext cx="11460175" cy="192786"/>
-          </a:xfrm>
-          <a:prstGeom prst="rect">
-            <a:avLst/>
-          </a:prstGeom>
-          <a:solidFill>
-            <a:srgbClr val="FFFFFF"/>
-          </a:solidFill>
-          <a:ln w="6350">
-            <a:solidFill>
-              <a:srgbClr val="DFE6EA"/>
-            </a:solidFill>
-            <a:prstDash val="solid"/>
-          </a:ln>
-        </p:spPr>
-      </p:sp>
-      <p:sp>
-        <p:nvSpPr>
-          <p:cNvPr id="285" name="Shape 283"/>
-          <p:cNvSpPr/>
-          <p:nvPr/>
-        </p:nvSpPr>
-        <p:spPr>
-          <a:xfrm>
-            <a:off x="11515039" y="5060061"/>
-            <a:ext cx="237744" cy="237744"/>
-          </a:xfrm>
-          <a:prstGeom prst="ellipse">
-            <a:avLst/>
-          </a:prstGeom>
-          <a:solidFill>
-            <a:srgbClr val="2E9E6B"/>
-          </a:solidFill>
-          <a:ln w="19050">
-            <a:solidFill>
-              <a:srgbClr val="222222"/>
-            </a:solidFill>
-            <a:prstDash val="solid"/>
-          </a:ln>
-        </p:spPr>
-      </p:sp>
-      <p:sp>
-        <p:nvSpPr>
-          <p:cNvPr id="286" name="Text 284"/>
-          <p:cNvSpPr/>
-          <p:nvPr/>
-        </p:nvSpPr>
-        <p:spPr>
-          <a:xfrm>
-            <a:off x="11441887" y="5082540"/>
-            <a:ext cx="384048" cy="192786"/>
-          </a:xfrm>
-          <a:prstGeom prst="rect">
-            <a:avLst/>
-          </a:prstGeom>
-          <a:noFill/>
-          <a:ln/>
-        </p:spPr>
-        <p:txBody>
-          <a:bodyPr wrap="square" lIns="0" tIns="0" rIns="0" bIns="0" rtlCol="0" anchor="ctr">
-            <a:normAutofit/>
-          </a:bodyPr>
-          <a:lstStyle/>
-          <a:p>
-            <a:pPr rtl="1" algn="ctr" indent="0" marL="0">
-              <a:buNone/>
-            </a:pPr>
-            <a:r>
-              <a:rPr lang="ar-SA" altLang="en-US" sz="850" b="1" dirty="0">
-                <a:solidFill>
-                  <a:srgbClr val="FFFFFF"/>
-                </a:solidFill>
-                <a:latin typeface="Arial" pitchFamily="34" charset="0"/>
-                <a:ea typeface="Arial" pitchFamily="34" charset="-122"/>
-                <a:cs typeface="Arial" pitchFamily="34" charset="-120"/>
-              </a:rPr>
-              <a:t>F</a:t>
-            </a:r>
-            <a:endParaRPr lang="ar-SA" sz="850" dirty="0"/>
-          </a:p>
-        </p:txBody>
-      </p:sp>
-      <p:sp>
-        <p:nvSpPr>
-          <p:cNvPr id="287" name="Text 285"/>
-          <p:cNvSpPr/>
-          <p:nvPr/>
-        </p:nvSpPr>
-        <p:spPr>
-          <a:xfrm>
-            <a:off x="8762695" y="5082540"/>
-            <a:ext cx="2606040" cy="192786"/>
-          </a:xfrm>
-          <a:prstGeom prst="rect">
-            <a:avLst/>
-          </a:prstGeom>
-          <a:noFill/>
-          <a:ln/>
-        </p:spPr>
-        <p:txBody>
-          <a:bodyPr wrap="square" lIns="0" tIns="0" rIns="0" bIns="0" rtlCol="0" anchor="ctr">
-            <a:normAutofit/>
-          </a:bodyPr>
-          <a:lstStyle/>
-          <a:p>
-            <a:pPr rtl="1" algn="r" indent="0" marL="0">
-              <a:buNone/>
-            </a:pPr>
-            <a:r>
-              <a:rPr lang="ar-SA" altLang="en-US" sz="750" b="1" dirty="0">
-                <a:solidFill>
-                  <a:srgbClr val="222222"/>
-                </a:solidFill>
-                <a:latin typeface="Arial" pitchFamily="34" charset="0"/>
-                <a:ea typeface="Arial" pitchFamily="34" charset="-122"/>
-                <a:cs typeface="Arial" pitchFamily="34" charset="-120"/>
-              </a:rPr>
-              <a:t>أساسات المبنى – حفر ودمك / اختبار وحديد تسليح وخرسانة</a:t>
-            </a:r>
-            <a:endParaRPr lang="ar-SA" sz="750" dirty="0"/>
-          </a:p>
-        </p:txBody>
-      </p:sp>
-      <p:sp>
-        <p:nvSpPr>
-          <p:cNvPr id="288" name="Text 286"/>
-          <p:cNvSpPr/>
-          <p:nvPr/>
-        </p:nvSpPr>
-        <p:spPr>
-          <a:xfrm>
-            <a:off x="7967167" y="5082540"/>
-            <a:ext cx="777240" cy="192786"/>
-          </a:xfrm>
-          <a:prstGeom prst="rect">
-            <a:avLst/>
-          </a:prstGeom>
-          <a:noFill/>
-          <a:ln/>
-        </p:spPr>
-        <p:txBody>
-          <a:bodyPr wrap="square" lIns="0" tIns="0" rIns="0" bIns="0" rtlCol="0" anchor="ctr">
-            <a:normAutofit/>
-          </a:bodyPr>
-          <a:lstStyle/>
-          <a:p>
-            <a:pPr rtl="1" algn="ctr" indent="0" marL="0">
-              <a:buNone/>
-            </a:pPr>
-            <a:r>
-              <a:rPr lang="ar-SA" altLang="en-US" sz="700" dirty="0">
-                <a:solidFill>
-                  <a:srgbClr val="444444"/>
-                </a:solidFill>
-                <a:latin typeface="Arial" pitchFamily="34" charset="0"/>
-                <a:ea typeface="Arial" pitchFamily="34" charset="-122"/>
-                <a:cs typeface="Arial" pitchFamily="34" charset="-120"/>
-              </a:rPr>
-              <a:t>D · FS</a:t>
-            </a:r>
-            <a:endParaRPr lang="ar-SA" sz="700" dirty="0"/>
-          </a:p>
-        </p:txBody>
-      </p:sp>
-      <p:sp>
-        <p:nvSpPr>
-          <p:cNvPr id="289" name="Text 287"/>
-          <p:cNvSpPr/>
-          <p:nvPr/>
-        </p:nvSpPr>
-        <p:spPr>
-          <a:xfrm>
-            <a:off x="7464247" y="5082540"/>
-            <a:ext cx="502920" cy="192786"/>
-          </a:xfrm>
-          <a:prstGeom prst="rect">
-            <a:avLst/>
-          </a:prstGeom>
-          <a:noFill/>
-          <a:ln/>
-        </p:spPr>
-        <p:txBody>
-          <a:bodyPr wrap="square" lIns="0" tIns="0" rIns="0" bIns="0" rtlCol="0" anchor="ctr">
-            <a:normAutofit/>
-          </a:bodyPr>
-          <a:lstStyle/>
-          <a:p>
-            <a:pPr rtl="1" algn="ctr" indent="0" marL="0">
-              <a:buNone/>
-            </a:pPr>
-            <a:r>
-              <a:rPr lang="ar-SA" altLang="en-US" sz="900" b="1" dirty="0">
-                <a:solidFill>
-                  <a:srgbClr val="222222"/>
-                </a:solidFill>
-                <a:latin typeface="Arial" pitchFamily="34" charset="0"/>
-                <a:ea typeface="Arial" pitchFamily="34" charset="-122"/>
-                <a:cs typeface="Arial" pitchFamily="34" charset="-120"/>
-              </a:rPr>
-              <a:t>6</a:t>
-            </a:r>
-            <a:endParaRPr lang="ar-SA" sz="900" dirty="0"/>
-          </a:p>
-        </p:txBody>
-      </p:sp>
-      <p:sp>
-        <p:nvSpPr>
-          <p:cNvPr id="290" name="Text 288"/>
-          <p:cNvSpPr/>
-          <p:nvPr/>
-        </p:nvSpPr>
-        <p:spPr>
-          <a:xfrm>
-            <a:off x="6805879" y="5082540"/>
-            <a:ext cx="658368" cy="192786"/>
-          </a:xfrm>
-          <a:prstGeom prst="rect">
-            <a:avLst/>
-          </a:prstGeom>
-          <a:noFill/>
-          <a:ln/>
-        </p:spPr>
-        <p:txBody>
-          <a:bodyPr wrap="square" lIns="0" tIns="0" rIns="0" bIns="0" rtlCol="0" anchor="ctr">
-            <a:normAutofit/>
-          </a:bodyPr>
-          <a:lstStyle/>
-          <a:p>
-            <a:pPr rtl="1" algn="ctr" indent="0" marL="0">
-              <a:buNone/>
-            </a:pPr>
-            <a:r>
-              <a:rPr lang="ar-SA" altLang="en-US" sz="700" b="1" dirty="0">
-                <a:solidFill>
-                  <a:srgbClr val="222222"/>
-                </a:solidFill>
-                <a:latin typeface="Arial" pitchFamily="34" charset="0"/>
-                <a:ea typeface="Arial" pitchFamily="34" charset="-122"/>
-                <a:cs typeface="Arial" pitchFamily="34" charset="-120"/>
-              </a:rPr>
-              <a:t>4 نوفمبر</a:t>
-            </a:r>
-            <a:endParaRPr lang="ar-SA" sz="700" dirty="0"/>
-          </a:p>
-        </p:txBody>
-      </p:sp>
-      <p:sp>
-        <p:nvSpPr>
-          <p:cNvPr id="291" name="Text 289"/>
-          <p:cNvSpPr/>
-          <p:nvPr/>
-        </p:nvSpPr>
-        <p:spPr>
-          <a:xfrm>
-            <a:off x="6147511" y="5082540"/>
-            <a:ext cx="658368" cy="192786"/>
-          </a:xfrm>
-          <a:prstGeom prst="rect">
-            <a:avLst/>
-          </a:prstGeom>
-          <a:noFill/>
-          <a:ln/>
-        </p:spPr>
-        <p:txBody>
-          <a:bodyPr wrap="square" lIns="0" tIns="0" rIns="0" bIns="0" rtlCol="0" anchor="ctr">
-            <a:normAutofit/>
-          </a:bodyPr>
-          <a:lstStyle/>
-          <a:p>
-            <a:pPr rtl="1" algn="ctr" indent="0" marL="0">
-              <a:buNone/>
-            </a:pPr>
-            <a:r>
-              <a:rPr lang="ar-SA" altLang="en-US" sz="700" b="1" dirty="0">
-                <a:solidFill>
-                  <a:srgbClr val="222222"/>
-                </a:solidFill>
-                <a:latin typeface="Arial" pitchFamily="34" charset="0"/>
-                <a:ea typeface="Arial" pitchFamily="34" charset="-122"/>
-                <a:cs typeface="Arial" pitchFamily="34" charset="-120"/>
-              </a:rPr>
-              <a:t>10 نوفمبر</a:t>
-            </a:r>
-            <a:endParaRPr lang="ar-SA" sz="700" dirty="0"/>
-          </a:p>
-        </p:txBody>
-      </p:sp>
-      <p:sp>
-        <p:nvSpPr>
-          <p:cNvPr id="292" name="Shape 290"/>
-          <p:cNvSpPr/>
-          <p:nvPr/>
-        </p:nvSpPr>
-        <p:spPr>
-          <a:xfrm>
-            <a:off x="1386069" y="5123025"/>
-            <a:ext cx="1190361" cy="111816"/>
+            <a:off x="1386069" y="5068466"/>
+            <a:ext cx="1190361" cy="129494"/>
           </a:xfrm>
           <a:prstGeom prst="roundRect">
             <a:avLst>
-              <a:gd name="adj" fmla="val 32711"/>
+              <a:gd name="adj" fmla="val 28245"/>
             </a:avLst>
           </a:prstGeom>
           <a:solidFill>
@@ -16965,14 +16687,310 @@
       </p:sp>
       <p:sp>
         <p:nvSpPr>
+          <p:cNvPr id="285" name="Text 283"/>
+          <p:cNvSpPr/>
+          <p:nvPr/>
+        </p:nvSpPr>
+        <p:spPr>
+          <a:xfrm>
+            <a:off x="1386069" y="5068466"/>
+            <a:ext cx="1190361" cy="129494"/>
+          </a:xfrm>
+          <a:prstGeom prst="rect">
+            <a:avLst/>
+          </a:prstGeom>
+          <a:noFill/>
+          <a:ln/>
+        </p:spPr>
+        <p:txBody>
+          <a:bodyPr wrap="square" lIns="0" tIns="0" rIns="0" bIns="0" rtlCol="0" anchor="ctr">
+            <a:normAutofit/>
+          </a:bodyPr>
+          <a:lstStyle/>
+          <a:p>
+            <a:pPr rtl="1" algn="ctr" indent="0" marL="0">
+              <a:buNone/>
+            </a:pPr>
+            <a:r>
+              <a:rPr lang="ar-SA" altLang="en-US" sz="700" b="1" dirty="0">
+                <a:solidFill>
+                  <a:srgbClr val="FFFFFF"/>
+                </a:solidFill>
+                <a:latin typeface="Arial" pitchFamily="34" charset="0"/>
+                <a:ea typeface="Arial" pitchFamily="34" charset="-122"/>
+                <a:cs typeface="Arial" pitchFamily="34" charset="-120"/>
+              </a:rPr>
+              <a:t>6 يوم</a:t>
+            </a:r>
+            <a:endParaRPr lang="ar-SA" sz="700" dirty="0"/>
+          </a:p>
+        </p:txBody>
+      </p:sp>
+      <p:sp>
+        <p:nvSpPr>
+          <p:cNvPr id="286" name="Shape 284"/>
+          <p:cNvSpPr/>
+          <p:nvPr/>
+        </p:nvSpPr>
+        <p:spPr>
+          <a:xfrm>
+            <a:off x="365760" y="5244846"/>
+            <a:ext cx="11460175" cy="223266"/>
+          </a:xfrm>
+          <a:prstGeom prst="rect">
+            <a:avLst/>
+          </a:prstGeom>
+          <a:solidFill>
+            <a:srgbClr val="F6F9FA"/>
+          </a:solidFill>
+          <a:ln w="6350">
+            <a:solidFill>
+              <a:srgbClr val="DFE6EA"/>
+            </a:solidFill>
+            <a:prstDash val="solid"/>
+          </a:ln>
+        </p:spPr>
+      </p:sp>
+      <p:sp>
+        <p:nvSpPr>
+          <p:cNvPr id="287" name="Shape 285"/>
+          <p:cNvSpPr/>
+          <p:nvPr/>
+        </p:nvSpPr>
+        <p:spPr>
+          <a:xfrm>
+            <a:off x="11515039" y="5237607"/>
+            <a:ext cx="237744" cy="237744"/>
+          </a:xfrm>
+          <a:prstGeom prst="ellipse">
+            <a:avLst/>
+          </a:prstGeom>
+          <a:solidFill>
+            <a:srgbClr val="D68A00"/>
+          </a:solidFill>
+          <a:ln w="19050">
+            <a:solidFill>
+              <a:srgbClr val="222222"/>
+            </a:solidFill>
+            <a:prstDash val="solid"/>
+          </a:ln>
+        </p:spPr>
+      </p:sp>
+      <p:sp>
+        <p:nvSpPr>
+          <p:cNvPr id="288" name="Text 286"/>
+          <p:cNvSpPr/>
+          <p:nvPr/>
+        </p:nvSpPr>
+        <p:spPr>
+          <a:xfrm>
+            <a:off x="11441887" y="5244846"/>
+            <a:ext cx="384048" cy="223266"/>
+          </a:xfrm>
+          <a:prstGeom prst="rect">
+            <a:avLst/>
+          </a:prstGeom>
+          <a:noFill/>
+          <a:ln/>
+        </p:spPr>
+        <p:txBody>
+          <a:bodyPr wrap="square" lIns="0" tIns="0" rIns="0" bIns="0" rtlCol="0" anchor="ctr">
+            <a:normAutofit/>
+          </a:bodyPr>
+          <a:lstStyle/>
+          <a:p>
+            <a:pPr rtl="1" algn="ctr" indent="0" marL="0">
+              <a:buNone/>
+            </a:pPr>
+            <a:r>
+              <a:rPr lang="ar-SA" altLang="en-US" sz="850" b="1" dirty="0">
+                <a:solidFill>
+                  <a:srgbClr val="FFFFFF"/>
+                </a:solidFill>
+                <a:latin typeface="Arial" pitchFamily="34" charset="0"/>
+                <a:ea typeface="Arial" pitchFamily="34" charset="-122"/>
+                <a:cs typeface="Arial" pitchFamily="34" charset="-120"/>
+              </a:rPr>
+              <a:t>G</a:t>
+            </a:r>
+            <a:endParaRPr lang="ar-SA" sz="850" dirty="0"/>
+          </a:p>
+        </p:txBody>
+      </p:sp>
+      <p:sp>
+        <p:nvSpPr>
+          <p:cNvPr id="289" name="Text 287"/>
+          <p:cNvSpPr/>
+          <p:nvPr/>
+        </p:nvSpPr>
+        <p:spPr>
+          <a:xfrm>
+            <a:off x="8762695" y="5244846"/>
+            <a:ext cx="2606040" cy="223266"/>
+          </a:xfrm>
+          <a:prstGeom prst="rect">
+            <a:avLst/>
+          </a:prstGeom>
+          <a:noFill/>
+          <a:ln/>
+        </p:spPr>
+        <p:txBody>
+          <a:bodyPr wrap="square" lIns="0" tIns="0" rIns="0" bIns="0" rtlCol="0" anchor="ctr">
+            <a:normAutofit/>
+          </a:bodyPr>
+          <a:lstStyle/>
+          <a:p>
+            <a:pPr rtl="1" algn="r" indent="0" marL="0">
+              <a:buNone/>
+            </a:pPr>
+            <a:r>
+              <a:rPr lang="ar-SA" altLang="en-US" sz="750" b="1" dirty="0">
+                <a:solidFill>
+                  <a:srgbClr val="222222"/>
+                </a:solidFill>
+                <a:latin typeface="Arial" pitchFamily="34" charset="0"/>
+                <a:ea typeface="Arial" pitchFamily="34" charset="-122"/>
+                <a:cs typeface="Arial" pitchFamily="34" charset="-120"/>
+              </a:rPr>
+              <a:t>أعمال الردم للمبنى</a:t>
+            </a:r>
+            <a:endParaRPr lang="ar-SA" sz="750" dirty="0"/>
+          </a:p>
+        </p:txBody>
+      </p:sp>
+      <p:sp>
+        <p:nvSpPr>
+          <p:cNvPr id="290" name="Text 288"/>
+          <p:cNvSpPr/>
+          <p:nvPr/>
+        </p:nvSpPr>
+        <p:spPr>
+          <a:xfrm>
+            <a:off x="7967167" y="5244846"/>
+            <a:ext cx="777240" cy="223266"/>
+          </a:xfrm>
+          <a:prstGeom prst="rect">
+            <a:avLst/>
+          </a:prstGeom>
+          <a:noFill/>
+          <a:ln/>
+        </p:spPr>
+        <p:txBody>
+          <a:bodyPr wrap="square" lIns="0" tIns="0" rIns="0" bIns="0" rtlCol="0" anchor="ctr">
+            <a:normAutofit/>
+          </a:bodyPr>
+          <a:lstStyle/>
+          <a:p>
+            <a:pPr rtl="1" algn="ctr" indent="0" marL="0">
+              <a:buNone/>
+            </a:pPr>
+            <a:r>
+              <a:rPr lang="ar-SA" altLang="en-US" sz="700" dirty="0">
+                <a:solidFill>
+                  <a:srgbClr val="444444"/>
+                </a:solidFill>
+                <a:latin typeface="Arial" pitchFamily="34" charset="0"/>
+                <a:ea typeface="Arial" pitchFamily="34" charset="-122"/>
+                <a:cs typeface="Arial" pitchFamily="34" charset="-120"/>
+              </a:rPr>
+              <a:t>F · FS</a:t>
+            </a:r>
+            <a:endParaRPr lang="ar-SA" sz="700" dirty="0"/>
+          </a:p>
+        </p:txBody>
+      </p:sp>
+      <p:sp>
+        <p:nvSpPr>
+          <p:cNvPr id="291" name="Text 289"/>
+          <p:cNvSpPr/>
+          <p:nvPr/>
+        </p:nvSpPr>
+        <p:spPr>
+          <a:xfrm>
+            <a:off x="7464247" y="5244846"/>
+            <a:ext cx="502920" cy="223266"/>
+          </a:xfrm>
+          <a:prstGeom prst="rect">
+            <a:avLst/>
+          </a:prstGeom>
+          <a:noFill/>
+          <a:ln/>
+        </p:spPr>
+        <p:txBody>
+          <a:bodyPr wrap="square" lIns="0" tIns="0" rIns="0" bIns="0" rtlCol="0" anchor="ctr">
+            <a:normAutofit/>
+          </a:bodyPr>
+          <a:lstStyle/>
+          <a:p>
+            <a:pPr rtl="1" algn="ctr" indent="0" marL="0">
+              <a:buNone/>
+            </a:pPr>
+            <a:r>
+              <a:rPr lang="ar-SA" altLang="en-US" sz="900" b="1" dirty="0">
+                <a:solidFill>
+                  <a:srgbClr val="222222"/>
+                </a:solidFill>
+                <a:latin typeface="Arial" pitchFamily="34" charset="0"/>
+                <a:ea typeface="Arial" pitchFamily="34" charset="-122"/>
+                <a:cs typeface="Arial" pitchFamily="34" charset="-120"/>
+              </a:rPr>
+              <a:t>3</a:t>
+            </a:r>
+            <a:endParaRPr lang="ar-SA" sz="900" dirty="0"/>
+          </a:p>
+        </p:txBody>
+      </p:sp>
+      <p:sp>
+        <p:nvSpPr>
+          <p:cNvPr id="292" name="Text 290"/>
+          <p:cNvSpPr/>
+          <p:nvPr/>
+        </p:nvSpPr>
+        <p:spPr>
+          <a:xfrm>
+            <a:off x="6805879" y="5244846"/>
+            <a:ext cx="658368" cy="223266"/>
+          </a:xfrm>
+          <a:prstGeom prst="rect">
+            <a:avLst/>
+          </a:prstGeom>
+          <a:noFill/>
+          <a:ln/>
+        </p:spPr>
+        <p:txBody>
+          <a:bodyPr wrap="square" lIns="0" tIns="0" rIns="0" bIns="0" rtlCol="0" anchor="ctr">
+            <a:normAutofit/>
+          </a:bodyPr>
+          <a:lstStyle/>
+          <a:p>
+            <a:pPr rtl="1" algn="ctr" indent="0" marL="0">
+              <a:buNone/>
+            </a:pPr>
+            <a:r>
+              <a:rPr lang="ar-SA" altLang="en-US" sz="700" b="1" dirty="0">
+                <a:solidFill>
+                  <a:srgbClr val="222222"/>
+                </a:solidFill>
+                <a:latin typeface="Arial" pitchFamily="34" charset="0"/>
+                <a:ea typeface="Arial" pitchFamily="34" charset="-122"/>
+                <a:cs typeface="Arial" pitchFamily="34" charset="-120"/>
+              </a:rPr>
+              <a:t>11 نوفمبر</a:t>
+            </a:r>
+            <a:endParaRPr lang="ar-SA" sz="700" dirty="0"/>
+          </a:p>
+        </p:txBody>
+      </p:sp>
+      <p:sp>
+        <p:nvSpPr>
           <p:cNvPr id="293" name="Text 291"/>
           <p:cNvSpPr/>
           <p:nvPr/>
         </p:nvSpPr>
         <p:spPr>
           <a:xfrm>
-            <a:off x="1386069" y="5123025"/>
-            <a:ext cx="1190361" cy="111816"/>
+            <a:off x="6147511" y="5244846"/>
+            <a:ext cx="658368" cy="223266"/>
           </a:xfrm>
           <a:prstGeom prst="rect">
             <a:avLst/>
@@ -16992,13 +17010,13 @@
             <a:r>
               <a:rPr lang="ar-SA" altLang="en-US" sz="700" b="1" dirty="0">
                 <a:solidFill>
-                  <a:srgbClr val="FFFFFF"/>
-                </a:solidFill>
-                <a:latin typeface="Arial" pitchFamily="34" charset="0"/>
-                <a:ea typeface="Arial" pitchFamily="34" charset="-122"/>
-                <a:cs typeface="Arial" pitchFamily="34" charset="-120"/>
-              </a:rPr>
-              <a:t>6 يوم</a:t>
+                  <a:srgbClr val="222222"/>
+                </a:solidFill>
+                <a:latin typeface="Arial" pitchFamily="34" charset="0"/>
+                <a:ea typeface="Arial" pitchFamily="34" charset="-122"/>
+                <a:cs typeface="Arial" pitchFamily="34" charset="-120"/>
+              </a:rPr>
+              <a:t>14 نوفمبر</a:t>
             </a:r>
             <a:endParaRPr lang="ar-SA" sz="700" dirty="0"/>
           </a:p>
@@ -17012,308 +17030,12 @@
         </p:nvSpPr>
         <p:spPr>
           <a:xfrm>
-            <a:off x="365760" y="5275326"/>
-            <a:ext cx="11460175" cy="192786"/>
-          </a:xfrm>
-          <a:prstGeom prst="rect">
-            <a:avLst/>
-          </a:prstGeom>
-          <a:solidFill>
-            <a:srgbClr val="F6F9FA"/>
-          </a:solidFill>
-          <a:ln w="6350">
-            <a:solidFill>
-              <a:srgbClr val="DFE6EA"/>
-            </a:solidFill>
-            <a:prstDash val="solid"/>
-          </a:ln>
-        </p:spPr>
-      </p:sp>
-      <p:sp>
-        <p:nvSpPr>
-          <p:cNvPr id="295" name="Shape 293"/>
-          <p:cNvSpPr/>
-          <p:nvPr/>
-        </p:nvSpPr>
-        <p:spPr>
-          <a:xfrm>
-            <a:off x="11515039" y="5252847"/>
-            <a:ext cx="237744" cy="237744"/>
-          </a:xfrm>
-          <a:prstGeom prst="ellipse">
-            <a:avLst/>
-          </a:prstGeom>
-          <a:solidFill>
-            <a:srgbClr val="D68A00"/>
-          </a:solidFill>
-          <a:ln w="19050">
-            <a:solidFill>
-              <a:srgbClr val="222222"/>
-            </a:solidFill>
-            <a:prstDash val="solid"/>
-          </a:ln>
-        </p:spPr>
-      </p:sp>
-      <p:sp>
-        <p:nvSpPr>
-          <p:cNvPr id="296" name="Text 294"/>
-          <p:cNvSpPr/>
-          <p:nvPr/>
-        </p:nvSpPr>
-        <p:spPr>
-          <a:xfrm>
-            <a:off x="11441887" y="5275326"/>
-            <a:ext cx="384048" cy="192786"/>
-          </a:xfrm>
-          <a:prstGeom prst="rect">
-            <a:avLst/>
-          </a:prstGeom>
-          <a:noFill/>
-          <a:ln/>
-        </p:spPr>
-        <p:txBody>
-          <a:bodyPr wrap="square" lIns="0" tIns="0" rIns="0" bIns="0" rtlCol="0" anchor="ctr">
-            <a:normAutofit/>
-          </a:bodyPr>
-          <a:lstStyle/>
-          <a:p>
-            <a:pPr rtl="1" algn="ctr" indent="0" marL="0">
-              <a:buNone/>
-            </a:pPr>
-            <a:r>
-              <a:rPr lang="ar-SA" altLang="en-US" sz="850" b="1" dirty="0">
-                <a:solidFill>
-                  <a:srgbClr val="FFFFFF"/>
-                </a:solidFill>
-                <a:latin typeface="Arial" pitchFamily="34" charset="0"/>
-                <a:ea typeface="Arial" pitchFamily="34" charset="-122"/>
-                <a:cs typeface="Arial" pitchFamily="34" charset="-120"/>
-              </a:rPr>
-              <a:t>G</a:t>
-            </a:r>
-            <a:endParaRPr lang="ar-SA" sz="850" dirty="0"/>
-          </a:p>
-        </p:txBody>
-      </p:sp>
-      <p:sp>
-        <p:nvSpPr>
-          <p:cNvPr id="297" name="Text 295"/>
-          <p:cNvSpPr/>
-          <p:nvPr/>
-        </p:nvSpPr>
-        <p:spPr>
-          <a:xfrm>
-            <a:off x="8762695" y="5275326"/>
-            <a:ext cx="2606040" cy="192786"/>
-          </a:xfrm>
-          <a:prstGeom prst="rect">
-            <a:avLst/>
-          </a:prstGeom>
-          <a:noFill/>
-          <a:ln/>
-        </p:spPr>
-        <p:txBody>
-          <a:bodyPr wrap="square" lIns="0" tIns="0" rIns="0" bIns="0" rtlCol="0" anchor="ctr">
-            <a:normAutofit/>
-          </a:bodyPr>
-          <a:lstStyle/>
-          <a:p>
-            <a:pPr rtl="1" algn="r" indent="0" marL="0">
-              <a:buNone/>
-            </a:pPr>
-            <a:r>
-              <a:rPr lang="ar-SA" altLang="en-US" sz="750" b="1" dirty="0">
-                <a:solidFill>
-                  <a:srgbClr val="222222"/>
-                </a:solidFill>
-                <a:latin typeface="Arial" pitchFamily="34" charset="0"/>
-                <a:ea typeface="Arial" pitchFamily="34" charset="-122"/>
-                <a:cs typeface="Arial" pitchFamily="34" charset="-120"/>
-              </a:rPr>
-              <a:t>أعمال الردم للمبنى</a:t>
-            </a:r>
-            <a:endParaRPr lang="ar-SA" sz="750" dirty="0"/>
-          </a:p>
-        </p:txBody>
-      </p:sp>
-      <p:sp>
-        <p:nvSpPr>
-          <p:cNvPr id="298" name="Text 296"/>
-          <p:cNvSpPr/>
-          <p:nvPr/>
-        </p:nvSpPr>
-        <p:spPr>
-          <a:xfrm>
-            <a:off x="7967167" y="5275326"/>
-            <a:ext cx="777240" cy="192786"/>
-          </a:xfrm>
-          <a:prstGeom prst="rect">
-            <a:avLst/>
-          </a:prstGeom>
-          <a:noFill/>
-          <a:ln/>
-        </p:spPr>
-        <p:txBody>
-          <a:bodyPr wrap="square" lIns="0" tIns="0" rIns="0" bIns="0" rtlCol="0" anchor="ctr">
-            <a:normAutofit/>
-          </a:bodyPr>
-          <a:lstStyle/>
-          <a:p>
-            <a:pPr rtl="1" algn="ctr" indent="0" marL="0">
-              <a:buNone/>
-            </a:pPr>
-            <a:r>
-              <a:rPr lang="ar-SA" altLang="en-US" sz="700" dirty="0">
-                <a:solidFill>
-                  <a:srgbClr val="444444"/>
-                </a:solidFill>
-                <a:latin typeface="Arial" pitchFamily="34" charset="0"/>
-                <a:ea typeface="Arial" pitchFamily="34" charset="-122"/>
-                <a:cs typeface="Arial" pitchFamily="34" charset="-120"/>
-              </a:rPr>
-              <a:t>F · FS</a:t>
-            </a:r>
-            <a:endParaRPr lang="ar-SA" sz="700" dirty="0"/>
-          </a:p>
-        </p:txBody>
-      </p:sp>
-      <p:sp>
-        <p:nvSpPr>
-          <p:cNvPr id="299" name="Text 297"/>
-          <p:cNvSpPr/>
-          <p:nvPr/>
-        </p:nvSpPr>
-        <p:spPr>
-          <a:xfrm>
-            <a:off x="7464247" y="5275326"/>
-            <a:ext cx="502920" cy="192786"/>
-          </a:xfrm>
-          <a:prstGeom prst="rect">
-            <a:avLst/>
-          </a:prstGeom>
-          <a:noFill/>
-          <a:ln/>
-        </p:spPr>
-        <p:txBody>
-          <a:bodyPr wrap="square" lIns="0" tIns="0" rIns="0" bIns="0" rtlCol="0" anchor="ctr">
-            <a:normAutofit/>
-          </a:bodyPr>
-          <a:lstStyle/>
-          <a:p>
-            <a:pPr rtl="1" algn="ctr" indent="0" marL="0">
-              <a:buNone/>
-            </a:pPr>
-            <a:r>
-              <a:rPr lang="ar-SA" altLang="en-US" sz="900" b="1" dirty="0">
-                <a:solidFill>
-                  <a:srgbClr val="222222"/>
-                </a:solidFill>
-                <a:latin typeface="Arial" pitchFamily="34" charset="0"/>
-                <a:ea typeface="Arial" pitchFamily="34" charset="-122"/>
-                <a:cs typeface="Arial" pitchFamily="34" charset="-120"/>
-              </a:rPr>
-              <a:t>3</a:t>
-            </a:r>
-            <a:endParaRPr lang="ar-SA" sz="900" dirty="0"/>
-          </a:p>
-        </p:txBody>
-      </p:sp>
-      <p:sp>
-        <p:nvSpPr>
-          <p:cNvPr id="300" name="Text 298"/>
-          <p:cNvSpPr/>
-          <p:nvPr/>
-        </p:nvSpPr>
-        <p:spPr>
-          <a:xfrm>
-            <a:off x="6805879" y="5275326"/>
-            <a:ext cx="658368" cy="192786"/>
-          </a:xfrm>
-          <a:prstGeom prst="rect">
-            <a:avLst/>
-          </a:prstGeom>
-          <a:noFill/>
-          <a:ln/>
-        </p:spPr>
-        <p:txBody>
-          <a:bodyPr wrap="square" lIns="0" tIns="0" rIns="0" bIns="0" rtlCol="0" anchor="ctr">
-            <a:normAutofit/>
-          </a:bodyPr>
-          <a:lstStyle/>
-          <a:p>
-            <a:pPr rtl="1" algn="ctr" indent="0" marL="0">
-              <a:buNone/>
-            </a:pPr>
-            <a:r>
-              <a:rPr lang="ar-SA" altLang="en-US" sz="700" b="1" dirty="0">
-                <a:solidFill>
-                  <a:srgbClr val="222222"/>
-                </a:solidFill>
-                <a:latin typeface="Arial" pitchFamily="34" charset="0"/>
-                <a:ea typeface="Arial" pitchFamily="34" charset="-122"/>
-                <a:cs typeface="Arial" pitchFamily="34" charset="-120"/>
-              </a:rPr>
-              <a:t>11 نوفمبر</a:t>
-            </a:r>
-            <a:endParaRPr lang="ar-SA" sz="700" dirty="0"/>
-          </a:p>
-        </p:txBody>
-      </p:sp>
-      <p:sp>
-        <p:nvSpPr>
-          <p:cNvPr id="301" name="Text 299"/>
-          <p:cNvSpPr/>
-          <p:nvPr/>
-        </p:nvSpPr>
-        <p:spPr>
-          <a:xfrm>
-            <a:off x="6147511" y="5275326"/>
-            <a:ext cx="658368" cy="192786"/>
-          </a:xfrm>
-          <a:prstGeom prst="rect">
-            <a:avLst/>
-          </a:prstGeom>
-          <a:noFill/>
-          <a:ln/>
-        </p:spPr>
-        <p:txBody>
-          <a:bodyPr wrap="square" lIns="0" tIns="0" rIns="0" bIns="0" rtlCol="0" anchor="ctr">
-            <a:normAutofit/>
-          </a:bodyPr>
-          <a:lstStyle/>
-          <a:p>
-            <a:pPr rtl="1" algn="ctr" indent="0" marL="0">
-              <a:buNone/>
-            </a:pPr>
-            <a:r>
-              <a:rPr lang="ar-SA" altLang="en-US" sz="700" b="1" dirty="0">
-                <a:solidFill>
-                  <a:srgbClr val="222222"/>
-                </a:solidFill>
-                <a:latin typeface="Arial" pitchFamily="34" charset="0"/>
-                <a:ea typeface="Arial" pitchFamily="34" charset="-122"/>
-                <a:cs typeface="Arial" pitchFamily="34" charset="-120"/>
-              </a:rPr>
-              <a:t>14 نوفمبر</a:t>
-            </a:r>
-            <a:endParaRPr lang="ar-SA" sz="700" dirty="0"/>
-          </a:p>
-        </p:txBody>
-      </p:sp>
-      <p:sp>
-        <p:nvSpPr>
-          <p:cNvPr id="302" name="Shape 300"/>
-          <p:cNvSpPr/>
-          <p:nvPr/>
-        </p:nvSpPr>
-        <p:spPr>
-          <a:xfrm>
-            <a:off x="705863" y="5315811"/>
-            <a:ext cx="680206" cy="111816"/>
+            <a:off x="705863" y="5291732"/>
+            <a:ext cx="680206" cy="129494"/>
           </a:xfrm>
           <a:prstGeom prst="roundRect">
             <a:avLst>
-              <a:gd name="adj" fmla="val 32711"/>
+              <a:gd name="adj" fmla="val 28245"/>
             </a:avLst>
           </a:prstGeom>
           <a:solidFill>
@@ -17336,14 +17058,14 @@
       </p:sp>
       <p:sp>
         <p:nvSpPr>
-          <p:cNvPr id="303" name="Text 301"/>
-          <p:cNvSpPr/>
-          <p:nvPr/>
-        </p:nvSpPr>
-        <p:spPr>
-          <a:xfrm>
-            <a:off x="705863" y="5315811"/>
-            <a:ext cx="680206" cy="111816"/>
+          <p:cNvPr id="295" name="Text 293"/>
+          <p:cNvSpPr/>
+          <p:nvPr/>
+        </p:nvSpPr>
+        <p:spPr>
+          <a:xfrm>
+            <a:off x="705863" y="5291732"/>
+            <a:ext cx="680206" cy="129494"/>
           </a:xfrm>
           <a:prstGeom prst="rect">
             <a:avLst/>
@@ -17377,14 +17099,202 @@
       </p:sp>
       <p:sp>
         <p:nvSpPr>
+          <p:cNvPr id="296" name="Shape 294"/>
+          <p:cNvSpPr/>
+          <p:nvPr/>
+        </p:nvSpPr>
+        <p:spPr>
+          <a:xfrm>
+            <a:off x="4732235" y="3188566"/>
+            <a:ext cx="0" cy="158519"/>
+          </a:xfrm>
+          <a:prstGeom prst="line">
+            <a:avLst/>
+          </a:prstGeom>
+          <a:noFill/>
+          <a:ln w="13970">
+            <a:solidFill>
+              <a:srgbClr val="2D3338"/>
+            </a:solidFill>
+            <a:prstDash val="solid"/>
+          </a:ln>
+        </p:spPr>
+      </p:sp>
+      <p:sp>
+        <p:nvSpPr>
+          <p:cNvPr id="297" name="Shape 295"/>
+          <p:cNvSpPr/>
+          <p:nvPr/>
+        </p:nvSpPr>
+        <p:spPr>
+          <a:xfrm flipH="1">
+            <a:off x="4456140" y="3347085"/>
+            <a:ext cx="276095" cy="0"/>
+          </a:xfrm>
+          <a:prstGeom prst="line">
+            <a:avLst/>
+          </a:prstGeom>
+          <a:noFill/>
+          <a:ln w="13970">
+            <a:solidFill>
+              <a:srgbClr val="2D3338"/>
+            </a:solidFill>
+            <a:prstDash val="solid"/>
+            <a:tailEnd type="triangle"/>
+          </a:ln>
+        </p:spPr>
+      </p:sp>
+      <p:sp>
+        <p:nvSpPr>
+          <p:cNvPr id="298" name="Shape 296"/>
+          <p:cNvSpPr/>
+          <p:nvPr/>
+        </p:nvSpPr>
+        <p:spPr>
+          <a:xfrm>
+            <a:off x="4392132" y="3411832"/>
+            <a:ext cx="0" cy="158519"/>
+          </a:xfrm>
+          <a:prstGeom prst="line">
+            <a:avLst/>
+          </a:prstGeom>
+          <a:noFill/>
+          <a:ln w="13970">
+            <a:solidFill>
+              <a:srgbClr val="2D3338"/>
+            </a:solidFill>
+            <a:prstDash val="solid"/>
+          </a:ln>
+        </p:spPr>
+      </p:sp>
+      <p:sp>
+        <p:nvSpPr>
+          <p:cNvPr id="299" name="Shape 297"/>
+          <p:cNvSpPr/>
+          <p:nvPr/>
+        </p:nvSpPr>
+        <p:spPr>
+          <a:xfrm flipH="1">
+            <a:off x="4286089" y="3570351"/>
+            <a:ext cx="106044" cy="0"/>
+          </a:xfrm>
+          <a:prstGeom prst="line">
+            <a:avLst/>
+          </a:prstGeom>
+          <a:noFill/>
+          <a:ln w="13970">
+            <a:solidFill>
+              <a:srgbClr val="2D3338"/>
+            </a:solidFill>
+            <a:prstDash val="solid"/>
+            <a:tailEnd type="triangle"/>
+          </a:ln>
+        </p:spPr>
+      </p:sp>
+      <p:sp>
+        <p:nvSpPr>
+          <p:cNvPr id="300" name="Shape 298"/>
+          <p:cNvSpPr/>
+          <p:nvPr/>
+        </p:nvSpPr>
+        <p:spPr>
+          <a:xfrm>
+            <a:off x="4222081" y="3635098"/>
+            <a:ext cx="0" cy="158519"/>
+          </a:xfrm>
+          <a:prstGeom prst="line">
+            <a:avLst/>
+          </a:prstGeom>
+          <a:noFill/>
+          <a:ln w="13970">
+            <a:solidFill>
+              <a:srgbClr val="2D3338"/>
+            </a:solidFill>
+            <a:prstDash val="solid"/>
+          </a:ln>
+        </p:spPr>
+      </p:sp>
+      <p:sp>
+        <p:nvSpPr>
+          <p:cNvPr id="301" name="Shape 299"/>
+          <p:cNvSpPr/>
+          <p:nvPr/>
+        </p:nvSpPr>
+        <p:spPr>
+          <a:xfrm flipH="1">
+            <a:off x="4116037" y="3793617"/>
+            <a:ext cx="106044" cy="0"/>
+          </a:xfrm>
+          <a:prstGeom prst="line">
+            <a:avLst/>
+          </a:prstGeom>
+          <a:noFill/>
+          <a:ln w="13970">
+            <a:solidFill>
+              <a:srgbClr val="2D3338"/>
+            </a:solidFill>
+            <a:prstDash val="solid"/>
+            <a:tailEnd type="triangle"/>
+          </a:ln>
+        </p:spPr>
+      </p:sp>
+      <p:sp>
+        <p:nvSpPr>
+          <p:cNvPr id="302" name="Shape 300"/>
+          <p:cNvSpPr/>
+          <p:nvPr/>
+        </p:nvSpPr>
+        <p:spPr>
+          <a:xfrm>
+            <a:off x="4052029" y="3858364"/>
+            <a:ext cx="0" cy="158519"/>
+          </a:xfrm>
+          <a:prstGeom prst="line">
+            <a:avLst/>
+          </a:prstGeom>
+          <a:noFill/>
+          <a:ln w="13970">
+            <a:solidFill>
+              <a:srgbClr val="2D3338"/>
+            </a:solidFill>
+            <a:prstDash val="solid"/>
+          </a:ln>
+        </p:spPr>
+      </p:sp>
+      <p:sp>
+        <p:nvSpPr>
+          <p:cNvPr id="303" name="Shape 301"/>
+          <p:cNvSpPr/>
+          <p:nvPr/>
+        </p:nvSpPr>
+        <p:spPr>
+          <a:xfrm flipH="1">
+            <a:off x="4052029" y="4016883"/>
+            <a:ext cx="64008" cy="0"/>
+          </a:xfrm>
+          <a:prstGeom prst="line">
+            <a:avLst/>
+          </a:prstGeom>
+          <a:noFill/>
+          <a:ln w="13970">
+            <a:solidFill>
+              <a:srgbClr val="2D3338"/>
+            </a:solidFill>
+            <a:prstDash val="solid"/>
+            <a:tailEnd type="triangle"/>
+          </a:ln>
+        </p:spPr>
+      </p:sp>
+      <p:sp>
+        <p:nvSpPr>
           <p:cNvPr id="304" name="Shape 302"/>
           <p:cNvSpPr/>
           <p:nvPr/>
         </p:nvSpPr>
         <p:spPr>
           <a:xfrm>
-            <a:off x="4732235" y="3499767"/>
-            <a:ext cx="0" cy="136878"/>
+            <a:off x="4732235" y="2965300"/>
+            <a:ext cx="0" cy="1274849"/>
           </a:xfrm>
           <a:prstGeom prst="line">
             <a:avLst/>
@@ -17406,8 +17316,8 @@
         </p:nvSpPr>
         <p:spPr>
           <a:xfrm flipH="1">
-            <a:off x="4456140" y="3636645"/>
-            <a:ext cx="276095" cy="0"/>
+            <a:off x="3945986" y="4240149"/>
+            <a:ext cx="786250" cy="0"/>
           </a:xfrm>
           <a:prstGeom prst="line">
             <a:avLst/>
@@ -17430,8 +17340,8 @@
         </p:nvSpPr>
         <p:spPr>
           <a:xfrm>
-            <a:off x="4392132" y="3692553"/>
-            <a:ext cx="0" cy="136878"/>
+            <a:off x="3936842" y="2900553"/>
+            <a:ext cx="45720" cy="0"/>
           </a:xfrm>
           <a:prstGeom prst="line">
             <a:avLst/>
@@ -17452,9 +17362,32 @@
           <p:nvPr/>
         </p:nvSpPr>
         <p:spPr>
+          <a:xfrm>
+            <a:off x="3982562" y="2900553"/>
+            <a:ext cx="0" cy="1562862"/>
+          </a:xfrm>
+          <a:prstGeom prst="line">
+            <a:avLst/>
+          </a:prstGeom>
+          <a:noFill/>
+          <a:ln w="13970">
+            <a:solidFill>
+              <a:srgbClr val="2D3338"/>
+            </a:solidFill>
+            <a:prstDash val="solid"/>
+          </a:ln>
+        </p:spPr>
+      </p:sp>
+      <p:sp>
+        <p:nvSpPr>
+          <p:cNvPr id="308" name="Shape 306"/>
+          <p:cNvSpPr/>
+          <p:nvPr/>
+        </p:nvSpPr>
+        <p:spPr>
           <a:xfrm flipH="1">
-            <a:off x="4286089" y="3829431"/>
-            <a:ext cx="106044" cy="0"/>
+            <a:off x="3945986" y="4463415"/>
+            <a:ext cx="36576" cy="0"/>
           </a:xfrm>
           <a:prstGeom prst="line">
             <a:avLst/>
@@ -17471,14 +17404,14 @@
       </p:sp>
       <p:sp>
         <p:nvSpPr>
-          <p:cNvPr id="308" name="Shape 306"/>
-          <p:cNvSpPr/>
-          <p:nvPr/>
-        </p:nvSpPr>
-        <p:spPr>
-          <a:xfrm>
-            <a:off x="4222081" y="3885339"/>
-            <a:ext cx="0" cy="136878"/>
+          <p:cNvPr id="309" name="Shape 307"/>
+          <p:cNvSpPr/>
+          <p:nvPr/>
+        </p:nvSpPr>
+        <p:spPr>
+          <a:xfrm>
+            <a:off x="3596739" y="4463415"/>
+            <a:ext cx="45720" cy="0"/>
           </a:xfrm>
           <a:prstGeom prst="line">
             <a:avLst/>
@@ -17494,14 +17427,37 @@
       </p:sp>
       <p:sp>
         <p:nvSpPr>
-          <p:cNvPr id="309" name="Shape 307"/>
+          <p:cNvPr id="310" name="Shape 308"/>
+          <p:cNvSpPr/>
+          <p:nvPr/>
+        </p:nvSpPr>
+        <p:spPr>
+          <a:xfrm>
+            <a:off x="3642459" y="4463415"/>
+            <a:ext cx="0" cy="223266"/>
+          </a:xfrm>
+          <a:prstGeom prst="line">
+            <a:avLst/>
+          </a:prstGeom>
+          <a:noFill/>
+          <a:ln w="13970">
+            <a:solidFill>
+              <a:srgbClr val="2D3338"/>
+            </a:solidFill>
+            <a:prstDash val="solid"/>
+          </a:ln>
+        </p:spPr>
+      </p:sp>
+      <p:sp>
+        <p:nvSpPr>
+          <p:cNvPr id="311" name="Shape 309"/>
           <p:cNvSpPr/>
           <p:nvPr/>
         </p:nvSpPr>
         <p:spPr>
           <a:xfrm flipH="1">
-            <a:off x="4116037" y="4022217"/>
-            <a:ext cx="106044" cy="0"/>
+            <a:off x="3605883" y="4686681"/>
+            <a:ext cx="36576" cy="0"/>
           </a:xfrm>
           <a:prstGeom prst="line">
             <a:avLst/>
@@ -17518,14 +17474,14 @@
       </p:sp>
       <p:sp>
         <p:nvSpPr>
-          <p:cNvPr id="310" name="Shape 308"/>
-          <p:cNvSpPr/>
-          <p:nvPr/>
-        </p:nvSpPr>
-        <p:spPr>
-          <a:xfrm>
-            <a:off x="4052029" y="4078125"/>
-            <a:ext cx="0" cy="136878"/>
+          <p:cNvPr id="312" name="Shape 310"/>
+          <p:cNvSpPr/>
+          <p:nvPr/>
+        </p:nvSpPr>
+        <p:spPr>
+          <a:xfrm>
+            <a:off x="2576430" y="4686681"/>
+            <a:ext cx="45720" cy="0"/>
           </a:xfrm>
           <a:prstGeom prst="line">
             <a:avLst/>
@@ -17541,14 +17497,37 @@
       </p:sp>
       <p:sp>
         <p:nvSpPr>
-          <p:cNvPr id="311" name="Shape 309"/>
+          <p:cNvPr id="313" name="Shape 311"/>
+          <p:cNvSpPr/>
+          <p:nvPr/>
+        </p:nvSpPr>
+        <p:spPr>
+          <a:xfrm>
+            <a:off x="2622150" y="4686681"/>
+            <a:ext cx="0" cy="223266"/>
+          </a:xfrm>
+          <a:prstGeom prst="line">
+            <a:avLst/>
+          </a:prstGeom>
+          <a:noFill/>
+          <a:ln w="13970">
+            <a:solidFill>
+              <a:srgbClr val="2D3338"/>
+            </a:solidFill>
+            <a:prstDash val="solid"/>
+          </a:ln>
+        </p:spPr>
+      </p:sp>
+      <p:sp>
+        <p:nvSpPr>
+          <p:cNvPr id="314" name="Shape 312"/>
           <p:cNvSpPr/>
           <p:nvPr/>
         </p:nvSpPr>
         <p:spPr>
           <a:xfrm flipH="1">
-            <a:off x="4052029" y="4215003"/>
-            <a:ext cx="64008" cy="0"/>
+            <a:off x="2585574" y="4909947"/>
+            <a:ext cx="36576" cy="0"/>
           </a:xfrm>
           <a:prstGeom prst="line">
             <a:avLst/>
@@ -17565,14 +17544,14 @@
       </p:sp>
       <p:sp>
         <p:nvSpPr>
-          <p:cNvPr id="312" name="Shape 310"/>
-          <p:cNvSpPr/>
-          <p:nvPr/>
-        </p:nvSpPr>
-        <p:spPr>
-          <a:xfrm>
-            <a:off x="4732235" y="3306981"/>
-            <a:ext cx="0" cy="1100808"/>
+          <p:cNvPr id="315" name="Shape 313"/>
+          <p:cNvSpPr/>
+          <p:nvPr/>
+        </p:nvSpPr>
+        <p:spPr>
+          <a:xfrm>
+            <a:off x="2576430" y="4686681"/>
+            <a:ext cx="45720" cy="0"/>
           </a:xfrm>
           <a:prstGeom prst="line">
             <a:avLst/>
@@ -17588,14 +17567,37 @@
       </p:sp>
       <p:sp>
         <p:nvSpPr>
-          <p:cNvPr id="313" name="Shape 311"/>
+          <p:cNvPr id="316" name="Shape 314"/>
+          <p:cNvSpPr/>
+          <p:nvPr/>
+        </p:nvSpPr>
+        <p:spPr>
+          <a:xfrm>
+            <a:off x="2622150" y="4686681"/>
+            <a:ext cx="0" cy="446532"/>
+          </a:xfrm>
+          <a:prstGeom prst="line">
+            <a:avLst/>
+          </a:prstGeom>
+          <a:noFill/>
+          <a:ln w="13970">
+            <a:solidFill>
+              <a:srgbClr val="2D3338"/>
+            </a:solidFill>
+            <a:prstDash val="solid"/>
+          </a:ln>
+        </p:spPr>
+      </p:sp>
+      <p:sp>
+        <p:nvSpPr>
+          <p:cNvPr id="317" name="Shape 315"/>
           <p:cNvSpPr/>
           <p:nvPr/>
         </p:nvSpPr>
         <p:spPr>
           <a:xfrm flipH="1">
-            <a:off x="3945986" y="4407789"/>
-            <a:ext cx="786250" cy="0"/>
+            <a:off x="2585574" y="5133213"/>
+            <a:ext cx="36576" cy="0"/>
           </a:xfrm>
           <a:prstGeom prst="line">
             <a:avLst/>
@@ -17612,13 +17614,13 @@
       </p:sp>
       <p:sp>
         <p:nvSpPr>
-          <p:cNvPr id="314" name="Shape 312"/>
-          <p:cNvSpPr/>
-          <p:nvPr/>
-        </p:nvSpPr>
-        <p:spPr>
-          <a:xfrm>
-            <a:off x="3936842" y="3251073"/>
+          <p:cNvPr id="318" name="Shape 316"/>
+          <p:cNvSpPr/>
+          <p:nvPr/>
+        </p:nvSpPr>
+        <p:spPr>
+          <a:xfrm>
+            <a:off x="1386069" y="5133213"/>
             <a:ext cx="45720" cy="0"/>
           </a:xfrm>
           <a:prstGeom prst="line">
@@ -17635,14 +17637,14 @@
       </p:sp>
       <p:sp>
         <p:nvSpPr>
-          <p:cNvPr id="315" name="Shape 313"/>
-          <p:cNvSpPr/>
-          <p:nvPr/>
-        </p:nvSpPr>
-        <p:spPr>
-          <a:xfrm>
-            <a:off x="3982562" y="3251073"/>
-            <a:ext cx="0" cy="1349502"/>
+          <p:cNvPr id="319" name="Shape 317"/>
+          <p:cNvSpPr/>
+          <p:nvPr/>
+        </p:nvSpPr>
+        <p:spPr>
+          <a:xfrm>
+            <a:off x="1431789" y="5133213"/>
+            <a:ext cx="0" cy="223266"/>
           </a:xfrm>
           <a:prstGeom prst="line">
             <a:avLst/>
@@ -17658,13 +17660,13 @@
       </p:sp>
       <p:sp>
         <p:nvSpPr>
-          <p:cNvPr id="316" name="Shape 314"/>
+          <p:cNvPr id="320" name="Shape 318"/>
           <p:cNvSpPr/>
           <p:nvPr/>
         </p:nvSpPr>
         <p:spPr>
           <a:xfrm flipH="1">
-            <a:off x="3945986" y="4600575"/>
+            <a:off x="1395213" y="5356479"/>
             <a:ext cx="36576" cy="0"/>
           </a:xfrm>
           <a:prstGeom prst="line">
@@ -17682,287 +17684,7 @@
       </p:sp>
       <p:sp>
         <p:nvSpPr>
-          <p:cNvPr id="317" name="Shape 315"/>
-          <p:cNvSpPr/>
-          <p:nvPr/>
-        </p:nvSpPr>
-        <p:spPr>
-          <a:xfrm>
-            <a:off x="3596739" y="4600575"/>
-            <a:ext cx="45720" cy="0"/>
-          </a:xfrm>
-          <a:prstGeom prst="line">
-            <a:avLst/>
-          </a:prstGeom>
-          <a:noFill/>
-          <a:ln w="13970">
-            <a:solidFill>
-              <a:srgbClr val="2D3338"/>
-            </a:solidFill>
-            <a:prstDash val="solid"/>
-          </a:ln>
-        </p:spPr>
-      </p:sp>
-      <p:sp>
-        <p:nvSpPr>
-          <p:cNvPr id="318" name="Shape 316"/>
-          <p:cNvSpPr/>
-          <p:nvPr/>
-        </p:nvSpPr>
-        <p:spPr>
-          <a:xfrm>
-            <a:off x="3642459" y="4600575"/>
-            <a:ext cx="0" cy="192786"/>
-          </a:xfrm>
-          <a:prstGeom prst="line">
-            <a:avLst/>
-          </a:prstGeom>
-          <a:noFill/>
-          <a:ln w="13970">
-            <a:solidFill>
-              <a:srgbClr val="2D3338"/>
-            </a:solidFill>
-            <a:prstDash val="solid"/>
-          </a:ln>
-        </p:spPr>
-      </p:sp>
-      <p:sp>
-        <p:nvSpPr>
-          <p:cNvPr id="319" name="Shape 317"/>
-          <p:cNvSpPr/>
-          <p:nvPr/>
-        </p:nvSpPr>
-        <p:spPr>
-          <a:xfrm flipH="1">
-            <a:off x="3605883" y="4793361"/>
-            <a:ext cx="36576" cy="0"/>
-          </a:xfrm>
-          <a:prstGeom prst="line">
-            <a:avLst/>
-          </a:prstGeom>
-          <a:noFill/>
-          <a:ln w="13970">
-            <a:solidFill>
-              <a:srgbClr val="2D3338"/>
-            </a:solidFill>
-            <a:prstDash val="solid"/>
-            <a:tailEnd type="triangle"/>
-          </a:ln>
-        </p:spPr>
-      </p:sp>
-      <p:sp>
-        <p:nvSpPr>
-          <p:cNvPr id="320" name="Shape 318"/>
-          <p:cNvSpPr/>
-          <p:nvPr/>
-        </p:nvSpPr>
-        <p:spPr>
-          <a:xfrm>
-            <a:off x="2576430" y="4793361"/>
-            <a:ext cx="45720" cy="0"/>
-          </a:xfrm>
-          <a:prstGeom prst="line">
-            <a:avLst/>
-          </a:prstGeom>
-          <a:noFill/>
-          <a:ln w="13970">
-            <a:solidFill>
-              <a:srgbClr val="2D3338"/>
-            </a:solidFill>
-            <a:prstDash val="solid"/>
-          </a:ln>
-        </p:spPr>
-      </p:sp>
-      <p:sp>
-        <p:nvSpPr>
           <p:cNvPr id="321" name="Shape 319"/>
-          <p:cNvSpPr/>
-          <p:nvPr/>
-        </p:nvSpPr>
-        <p:spPr>
-          <a:xfrm>
-            <a:off x="2622150" y="4793361"/>
-            <a:ext cx="0" cy="192786"/>
-          </a:xfrm>
-          <a:prstGeom prst="line">
-            <a:avLst/>
-          </a:prstGeom>
-          <a:noFill/>
-          <a:ln w="13970">
-            <a:solidFill>
-              <a:srgbClr val="2D3338"/>
-            </a:solidFill>
-            <a:prstDash val="solid"/>
-          </a:ln>
-        </p:spPr>
-      </p:sp>
-      <p:sp>
-        <p:nvSpPr>
-          <p:cNvPr id="322" name="Shape 320"/>
-          <p:cNvSpPr/>
-          <p:nvPr/>
-        </p:nvSpPr>
-        <p:spPr>
-          <a:xfrm flipH="1">
-            <a:off x="2585574" y="4986147"/>
-            <a:ext cx="36576" cy="0"/>
-          </a:xfrm>
-          <a:prstGeom prst="line">
-            <a:avLst/>
-          </a:prstGeom>
-          <a:noFill/>
-          <a:ln w="13970">
-            <a:solidFill>
-              <a:srgbClr val="2D3338"/>
-            </a:solidFill>
-            <a:prstDash val="solid"/>
-            <a:tailEnd type="triangle"/>
-          </a:ln>
-        </p:spPr>
-      </p:sp>
-      <p:sp>
-        <p:nvSpPr>
-          <p:cNvPr id="323" name="Shape 321"/>
-          <p:cNvSpPr/>
-          <p:nvPr/>
-        </p:nvSpPr>
-        <p:spPr>
-          <a:xfrm>
-            <a:off x="2576430" y="4793361"/>
-            <a:ext cx="45720" cy="0"/>
-          </a:xfrm>
-          <a:prstGeom prst="line">
-            <a:avLst/>
-          </a:prstGeom>
-          <a:noFill/>
-          <a:ln w="13970">
-            <a:solidFill>
-              <a:srgbClr val="2D3338"/>
-            </a:solidFill>
-            <a:prstDash val="solid"/>
-          </a:ln>
-        </p:spPr>
-      </p:sp>
-      <p:sp>
-        <p:nvSpPr>
-          <p:cNvPr id="324" name="Shape 322"/>
-          <p:cNvSpPr/>
-          <p:nvPr/>
-        </p:nvSpPr>
-        <p:spPr>
-          <a:xfrm>
-            <a:off x="2622150" y="4793361"/>
-            <a:ext cx="0" cy="385572"/>
-          </a:xfrm>
-          <a:prstGeom prst="line">
-            <a:avLst/>
-          </a:prstGeom>
-          <a:noFill/>
-          <a:ln w="13970">
-            <a:solidFill>
-              <a:srgbClr val="2D3338"/>
-            </a:solidFill>
-            <a:prstDash val="solid"/>
-          </a:ln>
-        </p:spPr>
-      </p:sp>
-      <p:sp>
-        <p:nvSpPr>
-          <p:cNvPr id="325" name="Shape 323"/>
-          <p:cNvSpPr/>
-          <p:nvPr/>
-        </p:nvSpPr>
-        <p:spPr>
-          <a:xfrm flipH="1">
-            <a:off x="2585574" y="5178933"/>
-            <a:ext cx="36576" cy="0"/>
-          </a:xfrm>
-          <a:prstGeom prst="line">
-            <a:avLst/>
-          </a:prstGeom>
-          <a:noFill/>
-          <a:ln w="13970">
-            <a:solidFill>
-              <a:srgbClr val="2D3338"/>
-            </a:solidFill>
-            <a:prstDash val="solid"/>
-            <a:tailEnd type="triangle"/>
-          </a:ln>
-        </p:spPr>
-      </p:sp>
-      <p:sp>
-        <p:nvSpPr>
-          <p:cNvPr id="326" name="Shape 324"/>
-          <p:cNvSpPr/>
-          <p:nvPr/>
-        </p:nvSpPr>
-        <p:spPr>
-          <a:xfrm>
-            <a:off x="1386069" y="5178933"/>
-            <a:ext cx="45720" cy="0"/>
-          </a:xfrm>
-          <a:prstGeom prst="line">
-            <a:avLst/>
-          </a:prstGeom>
-          <a:noFill/>
-          <a:ln w="13970">
-            <a:solidFill>
-              <a:srgbClr val="2D3338"/>
-            </a:solidFill>
-            <a:prstDash val="solid"/>
-          </a:ln>
-        </p:spPr>
-      </p:sp>
-      <p:sp>
-        <p:nvSpPr>
-          <p:cNvPr id="327" name="Shape 325"/>
-          <p:cNvSpPr/>
-          <p:nvPr/>
-        </p:nvSpPr>
-        <p:spPr>
-          <a:xfrm>
-            <a:off x="1431789" y="5178933"/>
-            <a:ext cx="0" cy="192786"/>
-          </a:xfrm>
-          <a:prstGeom prst="line">
-            <a:avLst/>
-          </a:prstGeom>
-          <a:noFill/>
-          <a:ln w="13970">
-            <a:solidFill>
-              <a:srgbClr val="2D3338"/>
-            </a:solidFill>
-            <a:prstDash val="solid"/>
-          </a:ln>
-        </p:spPr>
-      </p:sp>
-      <p:sp>
-        <p:nvSpPr>
-          <p:cNvPr id="328" name="Shape 326"/>
-          <p:cNvSpPr/>
-          <p:nvPr/>
-        </p:nvSpPr>
-        <p:spPr>
-          <a:xfrm flipH="1">
-            <a:off x="1395213" y="5371719"/>
-            <a:ext cx="36576" cy="0"/>
-          </a:xfrm>
-          <a:prstGeom prst="line">
-            <a:avLst/>
-          </a:prstGeom>
-          <a:noFill/>
-          <a:ln w="13970">
-            <a:solidFill>
-              <a:srgbClr val="2D3338"/>
-            </a:solidFill>
-            <a:prstDash val="solid"/>
-            <a:tailEnd type="triangle"/>
-          </a:ln>
-        </p:spPr>
-      </p:sp>
-      <p:sp>
-        <p:nvSpPr>
-          <p:cNvPr id="329" name="Shape 327"/>
           <p:cNvSpPr/>
           <p:nvPr/>
         </p:nvSpPr>
@@ -17985,7 +17707,7 @@
       </p:sp>
       <p:sp>
         <p:nvSpPr>
-          <p:cNvPr id="330" name="Shape 328"/>
+          <p:cNvPr id="322" name="Shape 320"/>
           <p:cNvSpPr/>
           <p:nvPr/>
         </p:nvSpPr>
@@ -18012,7 +17734,7 @@
       </p:sp>
       <p:sp>
         <p:nvSpPr>
-          <p:cNvPr id="331" name="Text 329"/>
+          <p:cNvPr id="323" name="Text 321"/>
           <p:cNvSpPr/>
           <p:nvPr/>
         </p:nvSpPr>
@@ -18053,7 +17775,7 @@
       </p:sp>
       <p:sp>
         <p:nvSpPr>
-          <p:cNvPr id="332" name="Shape 330"/>
+          <p:cNvPr id="324" name="Shape 322"/>
           <p:cNvSpPr/>
           <p:nvPr/>
         </p:nvSpPr>
@@ -18080,7 +17802,7 @@
       </p:sp>
       <p:sp>
         <p:nvSpPr>
-          <p:cNvPr id="333" name="Shape 331"/>
+          <p:cNvPr id="325" name="Shape 323"/>
           <p:cNvSpPr/>
           <p:nvPr/>
         </p:nvSpPr>
@@ -18114,7 +17836,7 @@
       </p:sp>
       <p:sp>
         <p:nvSpPr>
-          <p:cNvPr id="334" name="Shape 332"/>
+          <p:cNvPr id="326" name="Shape 324"/>
           <p:cNvSpPr/>
           <p:nvPr/>
         </p:nvSpPr>
@@ -18139,7 +17861,7 @@
       </p:sp>
       <p:sp>
         <p:nvSpPr>
-          <p:cNvPr id="335" name="Text 333"/>
+          <p:cNvPr id="327" name="Text 325"/>
           <p:cNvSpPr/>
           <p:nvPr/>
         </p:nvSpPr>
@@ -18180,7 +17902,7 @@
       </p:sp>
       <p:sp>
         <p:nvSpPr>
-          <p:cNvPr id="336" name="Text 334"/>
+          <p:cNvPr id="328" name="Text 326"/>
           <p:cNvSpPr/>
           <p:nvPr/>
         </p:nvSpPr>
@@ -18221,7 +17943,7 @@
       </p:sp>
       <p:sp>
         <p:nvSpPr>
-          <p:cNvPr id="337" name="Text 335"/>
+          <p:cNvPr id="329" name="Text 327"/>
           <p:cNvSpPr/>
           <p:nvPr/>
         </p:nvSpPr>
@@ -18262,7 +17984,7 @@
       </p:sp>
       <p:sp>
         <p:nvSpPr>
-          <p:cNvPr id="338" name="Shape 336"/>
+          <p:cNvPr id="330" name="Shape 328"/>
           <p:cNvSpPr/>
           <p:nvPr/>
         </p:nvSpPr>
@@ -18296,7 +18018,7 @@
       </p:sp>
       <p:sp>
         <p:nvSpPr>
-          <p:cNvPr id="339" name="Shape 337"/>
+          <p:cNvPr id="331" name="Shape 329"/>
           <p:cNvSpPr/>
           <p:nvPr/>
         </p:nvSpPr>
@@ -18321,7 +18043,7 @@
       </p:sp>
       <p:sp>
         <p:nvSpPr>
-          <p:cNvPr id="340" name="Text 338"/>
+          <p:cNvPr id="332" name="Text 330"/>
           <p:cNvSpPr/>
           <p:nvPr/>
         </p:nvSpPr>
@@ -18362,7 +18084,7 @@
       </p:sp>
       <p:sp>
         <p:nvSpPr>
-          <p:cNvPr id="341" name="Text 339"/>
+          <p:cNvPr id="333" name="Text 331"/>
           <p:cNvSpPr/>
           <p:nvPr/>
         </p:nvSpPr>
@@ -18403,7 +18125,7 @@
       </p:sp>
       <p:sp>
         <p:nvSpPr>
-          <p:cNvPr id="342" name="Text 340"/>
+          <p:cNvPr id="334" name="Text 332"/>
           <p:cNvSpPr/>
           <p:nvPr/>
         </p:nvSpPr>
@@ -18444,7 +18166,7 @@
       </p:sp>
       <p:sp>
         <p:nvSpPr>
-          <p:cNvPr id="343" name="Shape 341"/>
+          <p:cNvPr id="335" name="Shape 333"/>
           <p:cNvSpPr/>
           <p:nvPr/>
         </p:nvSpPr>
@@ -18478,7 +18200,7 @@
       </p:sp>
       <p:sp>
         <p:nvSpPr>
-          <p:cNvPr id="344" name="Shape 342"/>
+          <p:cNvPr id="336" name="Shape 334"/>
           <p:cNvSpPr/>
           <p:nvPr/>
         </p:nvSpPr>
@@ -18503,7 +18225,7 @@
       </p:sp>
       <p:sp>
         <p:nvSpPr>
-          <p:cNvPr id="345" name="Text 343"/>
+          <p:cNvPr id="337" name="Text 335"/>
           <p:cNvSpPr/>
           <p:nvPr/>
         </p:nvSpPr>
@@ -18544,7 +18266,7 @@
       </p:sp>
       <p:sp>
         <p:nvSpPr>
-          <p:cNvPr id="346" name="Text 344"/>
+          <p:cNvPr id="338" name="Text 336"/>
           <p:cNvSpPr/>
           <p:nvPr/>
         </p:nvSpPr>
@@ -18585,7 +18307,7 @@
       </p:sp>
       <p:sp>
         <p:nvSpPr>
-          <p:cNvPr id="347" name="Text 345"/>
+          <p:cNvPr id="339" name="Text 337"/>
           <p:cNvSpPr/>
           <p:nvPr/>
         </p:nvSpPr>
@@ -18626,7 +18348,7 @@
       </p:sp>
       <p:sp>
         <p:nvSpPr>
-          <p:cNvPr id="348" name="Shape 346"/>
+          <p:cNvPr id="340" name="Shape 338"/>
           <p:cNvSpPr/>
           <p:nvPr/>
         </p:nvSpPr>
@@ -18660,7 +18382,7 @@
       </p:sp>
       <p:sp>
         <p:nvSpPr>
-          <p:cNvPr id="349" name="Shape 347"/>
+          <p:cNvPr id="341" name="Shape 339"/>
           <p:cNvSpPr/>
           <p:nvPr/>
         </p:nvSpPr>
@@ -18685,7 +18407,7 @@
       </p:sp>
       <p:sp>
         <p:nvSpPr>
-          <p:cNvPr id="350" name="Text 348"/>
+          <p:cNvPr id="342" name="Text 340"/>
           <p:cNvSpPr/>
           <p:nvPr/>
         </p:nvSpPr>
@@ -18726,7 +18448,7 @@
       </p:sp>
       <p:sp>
         <p:nvSpPr>
-          <p:cNvPr id="351" name="Text 349"/>
+          <p:cNvPr id="343" name="Text 341"/>
           <p:cNvSpPr/>
           <p:nvPr/>
         </p:nvSpPr>
@@ -18767,7 +18489,7 @@
       </p:sp>
       <p:sp>
         <p:nvSpPr>
-          <p:cNvPr id="352" name="Text 350"/>
+          <p:cNvPr id="344" name="Text 342"/>
           <p:cNvSpPr/>
           <p:nvPr/>
         </p:nvSpPr>
@@ -18808,7 +18530,7 @@
       </p:sp>
       <p:sp>
         <p:nvSpPr>
-          <p:cNvPr id="353" name="Shape 351"/>
+          <p:cNvPr id="345" name="Shape 343"/>
           <p:cNvSpPr/>
           <p:nvPr/>
         </p:nvSpPr>
@@ -18842,7 +18564,7 @@
       </p:sp>
       <p:sp>
         <p:nvSpPr>
-          <p:cNvPr id="354" name="Shape 352"/>
+          <p:cNvPr id="346" name="Shape 344"/>
           <p:cNvSpPr/>
           <p:nvPr/>
         </p:nvSpPr>
@@ -18867,7 +18589,7 @@
       </p:sp>
       <p:sp>
         <p:nvSpPr>
-          <p:cNvPr id="355" name="Text 353"/>
+          <p:cNvPr id="347" name="Text 345"/>
           <p:cNvSpPr/>
           <p:nvPr/>
         </p:nvSpPr>
@@ -18908,7 +18630,7 @@
       </p:sp>
       <p:sp>
         <p:nvSpPr>
-          <p:cNvPr id="356" name="Text 354"/>
+          <p:cNvPr id="348" name="Text 346"/>
           <p:cNvSpPr/>
           <p:nvPr/>
         </p:nvSpPr>
@@ -18949,7 +18671,7 @@
       </p:sp>
       <p:sp>
         <p:nvSpPr>
-          <p:cNvPr id="357" name="Text 355"/>
+          <p:cNvPr id="349" name="Text 347"/>
           <p:cNvSpPr/>
           <p:nvPr/>
         </p:nvSpPr>

--- a/ufwl-timeline/UFWL_Presentation_AR.pptx
+++ b/ufwl-timeline/UFWL_Presentation_AR.pptx
@@ -12080,7 +12080,7 @@
         <p:spPr>
           <a:xfrm>
             <a:off x="365760" y="2240280"/>
-            <a:ext cx="11460175" cy="274320"/>
+            <a:ext cx="11460175" cy="268986"/>
           </a:xfrm>
           <a:prstGeom prst="rect">
             <a:avLst/>
@@ -12104,7 +12104,7 @@
         </p:nvSpPr>
         <p:spPr>
           <a:xfrm>
-            <a:off x="11515039" y="2258568"/>
+            <a:off x="11515039" y="2255901"/>
             <a:ext cx="237744" cy="237744"/>
           </a:xfrm>
           <a:prstGeom prst="ellipse">
@@ -12113,6 +12113,277 @@
           <a:solidFill>
             <a:srgbClr val="C8503F"/>
           </a:solidFill>
+          <a:ln w="19050">
+            <a:solidFill>
+              <a:srgbClr val="222222"/>
+            </a:solidFill>
+            <a:prstDash val="solid"/>
+          </a:ln>
+        </p:spPr>
+      </p:sp>
+      <p:sp>
+        <p:nvSpPr>
+          <p:cNvPr id="161" name="Text 159"/>
+          <p:cNvSpPr/>
+          <p:nvPr/>
+        </p:nvSpPr>
+        <p:spPr>
+          <a:xfrm>
+            <a:off x="11441887" y="2240280"/>
+            <a:ext cx="384048" cy="268986"/>
+          </a:xfrm>
+          <a:prstGeom prst="rect">
+            <a:avLst/>
+          </a:prstGeom>
+          <a:noFill/>
+          <a:ln/>
+        </p:spPr>
+        <p:txBody>
+          <a:bodyPr wrap="square" lIns="0" tIns="0" rIns="0" bIns="0" rtlCol="0" anchor="ctr">
+            <a:normAutofit/>
+          </a:bodyPr>
+          <a:lstStyle/>
+          <a:p>
+            <a:pPr rtl="1" algn="ctr" indent="0" marL="0">
+              <a:buNone/>
+            </a:pPr>
+            <a:r>
+              <a:rPr lang="ar-SA" altLang="en-US" sz="850" b="1" dirty="0">
+                <a:solidFill>
+                  <a:srgbClr val="FFFFFF"/>
+                </a:solidFill>
+                <a:latin typeface="Arial" pitchFamily="34" charset="0"/>
+                <a:ea typeface="Arial" pitchFamily="34" charset="-122"/>
+                <a:cs typeface="Arial" pitchFamily="34" charset="-120"/>
+              </a:rPr>
+              <a:t>A</a:t>
+            </a:r>
+            <a:endParaRPr lang="ar-SA" sz="850" dirty="0"/>
+          </a:p>
+        </p:txBody>
+      </p:sp>
+      <p:sp>
+        <p:nvSpPr>
+          <p:cNvPr id="162" name="Text 160"/>
+          <p:cNvSpPr/>
+          <p:nvPr/>
+        </p:nvSpPr>
+        <p:spPr>
+          <a:xfrm>
+            <a:off x="8762695" y="2240280"/>
+            <a:ext cx="2606040" cy="268986"/>
+          </a:xfrm>
+          <a:prstGeom prst="rect">
+            <a:avLst/>
+          </a:prstGeom>
+          <a:noFill/>
+          <a:ln/>
+        </p:spPr>
+        <p:txBody>
+          <a:bodyPr wrap="square" lIns="0" tIns="0" rIns="0" bIns="0" rtlCol="0" anchor="ctr">
+            <a:normAutofit/>
+          </a:bodyPr>
+          <a:lstStyle/>
+          <a:p>
+            <a:pPr rtl="1" algn="r" indent="0" marL="0">
+              <a:buNone/>
+            </a:pPr>
+            <a:r>
+              <a:rPr lang="ar-SA" altLang="en-US" sz="750" b="1" dirty="0">
+                <a:solidFill>
+                  <a:srgbClr val="222222"/>
+                </a:solidFill>
+                <a:latin typeface="Arial" pitchFamily="34" charset="0"/>
+                <a:ea typeface="Arial" pitchFamily="34" charset="-122"/>
+                <a:cs typeface="Arial" pitchFamily="34" charset="-120"/>
+              </a:rPr>
+              <a:t>تركيب نظام الدعم (Shoring)</a:t>
+            </a:r>
+            <a:endParaRPr lang="ar-SA" sz="750" dirty="0"/>
+          </a:p>
+        </p:txBody>
+      </p:sp>
+      <p:sp>
+        <p:nvSpPr>
+          <p:cNvPr id="163" name="Text 161"/>
+          <p:cNvSpPr/>
+          <p:nvPr/>
+        </p:nvSpPr>
+        <p:spPr>
+          <a:xfrm>
+            <a:off x="7967167" y="2240280"/>
+            <a:ext cx="777240" cy="268986"/>
+          </a:xfrm>
+          <a:prstGeom prst="rect">
+            <a:avLst/>
+          </a:prstGeom>
+          <a:noFill/>
+          <a:ln/>
+        </p:spPr>
+        <p:txBody>
+          <a:bodyPr wrap="square" lIns="0" tIns="0" rIns="0" bIns="0" rtlCol="0" anchor="ctr">
+            <a:normAutofit/>
+          </a:bodyPr>
+          <a:lstStyle/>
+          <a:p>
+            <a:pPr rtl="1" algn="ctr" indent="0" marL="0">
+              <a:buNone/>
+            </a:pPr>
+            <a:r>
+              <a:rPr lang="ar-SA" altLang="en-US" sz="700" dirty="0">
+                <a:solidFill>
+                  <a:srgbClr val="444444"/>
+                </a:solidFill>
+                <a:latin typeface="Arial" pitchFamily="34" charset="0"/>
+                <a:ea typeface="Arial" pitchFamily="34" charset="-122"/>
+                <a:cs typeface="Arial" pitchFamily="34" charset="-120"/>
+              </a:rPr>
+              <a:t>—</a:t>
+            </a:r>
+            <a:endParaRPr lang="ar-SA" sz="700" dirty="0"/>
+          </a:p>
+        </p:txBody>
+      </p:sp>
+      <p:sp>
+        <p:nvSpPr>
+          <p:cNvPr id="164" name="Text 162"/>
+          <p:cNvSpPr/>
+          <p:nvPr/>
+        </p:nvSpPr>
+        <p:spPr>
+          <a:xfrm>
+            <a:off x="7464247" y="2240280"/>
+            <a:ext cx="502920" cy="268986"/>
+          </a:xfrm>
+          <a:prstGeom prst="rect">
+            <a:avLst/>
+          </a:prstGeom>
+          <a:noFill/>
+          <a:ln/>
+        </p:spPr>
+        <p:txBody>
+          <a:bodyPr wrap="square" lIns="0" tIns="0" rIns="0" bIns="0" rtlCol="0" anchor="ctr">
+            <a:normAutofit/>
+          </a:bodyPr>
+          <a:lstStyle/>
+          <a:p>
+            <a:pPr rtl="1" algn="ctr" indent="0" marL="0">
+              <a:buNone/>
+            </a:pPr>
+            <a:r>
+              <a:rPr lang="ar-SA" altLang="en-US" sz="900" b="1" dirty="0">
+                <a:solidFill>
+                  <a:srgbClr val="222222"/>
+                </a:solidFill>
+                <a:latin typeface="Arial" pitchFamily="34" charset="0"/>
+                <a:ea typeface="Arial" pitchFamily="34" charset="-122"/>
+                <a:cs typeface="Arial" pitchFamily="34" charset="-120"/>
+              </a:rPr>
+              <a:t>4</a:t>
+            </a:r>
+            <a:endParaRPr lang="ar-SA" sz="900" dirty="0"/>
+          </a:p>
+        </p:txBody>
+      </p:sp>
+      <p:sp>
+        <p:nvSpPr>
+          <p:cNvPr id="165" name="Text 163"/>
+          <p:cNvSpPr/>
+          <p:nvPr/>
+        </p:nvSpPr>
+        <p:spPr>
+          <a:xfrm>
+            <a:off x="6805879" y="2240280"/>
+            <a:ext cx="658368" cy="268986"/>
+          </a:xfrm>
+          <a:prstGeom prst="rect">
+            <a:avLst/>
+          </a:prstGeom>
+          <a:noFill/>
+          <a:ln/>
+        </p:spPr>
+        <p:txBody>
+          <a:bodyPr wrap="square" lIns="0" tIns="0" rIns="0" bIns="0" rtlCol="0" anchor="ctr">
+            <a:normAutofit/>
+          </a:bodyPr>
+          <a:lstStyle/>
+          <a:p>
+            <a:pPr rtl="1" algn="ctr" indent="0" marL="0">
+              <a:buNone/>
+            </a:pPr>
+            <a:r>
+              <a:rPr lang="ar-SA" altLang="en-US" sz="700" b="1" dirty="0">
+                <a:solidFill>
+                  <a:srgbClr val="222222"/>
+                </a:solidFill>
+                <a:latin typeface="Arial" pitchFamily="34" charset="0"/>
+                <a:ea typeface="Arial" pitchFamily="34" charset="-122"/>
+                <a:cs typeface="Arial" pitchFamily="34" charset="-120"/>
+              </a:rPr>
+              <a:t>22 أكتوبر</a:t>
+            </a:r>
+            <a:endParaRPr lang="ar-SA" sz="700" dirty="0"/>
+          </a:p>
+        </p:txBody>
+      </p:sp>
+      <p:sp>
+        <p:nvSpPr>
+          <p:cNvPr id="166" name="Text 164"/>
+          <p:cNvSpPr/>
+          <p:nvPr/>
+        </p:nvSpPr>
+        <p:spPr>
+          <a:xfrm>
+            <a:off x="6147511" y="2240280"/>
+            <a:ext cx="658368" cy="268986"/>
+          </a:xfrm>
+          <a:prstGeom prst="rect">
+            <a:avLst/>
+          </a:prstGeom>
+          <a:noFill/>
+          <a:ln/>
+        </p:spPr>
+        <p:txBody>
+          <a:bodyPr wrap="square" lIns="0" tIns="0" rIns="0" bIns="0" rtlCol="0" anchor="ctr">
+            <a:normAutofit/>
+          </a:bodyPr>
+          <a:lstStyle/>
+          <a:p>
+            <a:pPr rtl="1" algn="ctr" indent="0" marL="0">
+              <a:buNone/>
+            </a:pPr>
+            <a:r>
+              <a:rPr lang="ar-SA" altLang="en-US" sz="700" b="1" dirty="0">
+                <a:solidFill>
+                  <a:srgbClr val="222222"/>
+                </a:solidFill>
+                <a:latin typeface="Arial" pitchFamily="34" charset="0"/>
+                <a:ea typeface="Arial" pitchFamily="34" charset="-122"/>
+                <a:cs typeface="Arial" pitchFamily="34" charset="-120"/>
+              </a:rPr>
+              <a:t>26 أكتوبر</a:t>
+            </a:r>
+            <a:endParaRPr lang="ar-SA" sz="700" dirty="0"/>
+          </a:p>
+        </p:txBody>
+      </p:sp>
+      <p:sp>
+        <p:nvSpPr>
+          <p:cNvPr id="167" name="Shape 165"/>
+          <p:cNvSpPr/>
+          <p:nvPr/>
+        </p:nvSpPr>
+        <p:spPr>
+          <a:xfrm>
+            <a:off x="3936842" y="2315337"/>
+            <a:ext cx="850258" cy="64008"/>
+          </a:xfrm>
+          <a:prstGeom prst="rect">
+            <a:avLst/>
+          </a:prstGeom>
+          <a:solidFill>
+            <a:srgbClr val="C8503F"/>
+          </a:solidFill>
           <a:ln w="12700">
             <a:solidFill>
               <a:srgbClr val="C8503F"/>
@@ -12123,55 +12394,64 @@
       </p:sp>
       <p:sp>
         <p:nvSpPr>
-          <p:cNvPr id="161" name="Text 159"/>
-          <p:cNvSpPr/>
-          <p:nvPr/>
-        </p:nvSpPr>
-        <p:spPr>
-          <a:xfrm>
-            <a:off x="11441887" y="2240280"/>
-            <a:ext cx="384048" cy="274320"/>
-          </a:xfrm>
-          <a:prstGeom prst="rect">
-            <a:avLst/>
-          </a:prstGeom>
-          <a:noFill/>
-          <a:ln/>
-        </p:spPr>
-        <p:txBody>
-          <a:bodyPr wrap="square" lIns="0" tIns="0" rIns="0" bIns="0" rtlCol="0" anchor="ctr">
-            <a:normAutofit/>
-          </a:bodyPr>
-          <a:lstStyle/>
-          <a:p>
-            <a:pPr rtl="1" algn="ctr" indent="0" marL="0">
-              <a:buNone/>
-            </a:pPr>
-            <a:r>
-              <a:rPr lang="ar-SA" altLang="en-US" sz="900" b="1" dirty="0">
-                <a:solidFill>
-                  <a:srgbClr val="FFFFFF"/>
-                </a:solidFill>
-                <a:latin typeface="Arial" pitchFamily="34" charset="0"/>
-                <a:ea typeface="Arial" pitchFamily="34" charset="-122"/>
-                <a:cs typeface="Arial" pitchFamily="34" charset="-120"/>
-              </a:rPr>
-              <a:t>⟷</a:t>
-            </a:r>
-            <a:endParaRPr lang="ar-SA" sz="900" dirty="0"/>
-          </a:p>
-        </p:txBody>
-      </p:sp>
-      <p:sp>
-        <p:nvSpPr>
-          <p:cNvPr id="162" name="Text 160"/>
-          <p:cNvSpPr/>
-          <p:nvPr/>
-        </p:nvSpPr>
-        <p:spPr>
-          <a:xfrm>
-            <a:off x="8762695" y="2240280"/>
-            <a:ext cx="2606040" cy="274320"/>
+          <p:cNvPr id="168" name="Shape 166"/>
+          <p:cNvSpPr/>
+          <p:nvPr/>
+        </p:nvSpPr>
+        <p:spPr>
+          <a:xfrm flipV="1">
+            <a:off x="4723091" y="2379345"/>
+            <a:ext cx="64008" cy="54864"/>
+          </a:xfrm>
+          <a:prstGeom prst="triangle">
+            <a:avLst/>
+          </a:prstGeom>
+          <a:solidFill>
+            <a:srgbClr val="C8503F"/>
+          </a:solidFill>
+          <a:ln w="12700">
+            <a:solidFill>
+              <a:srgbClr val="C8503F"/>
+            </a:solidFill>
+            <a:prstDash val="solid"/>
+          </a:ln>
+        </p:spPr>
+      </p:sp>
+      <p:sp>
+        <p:nvSpPr>
+          <p:cNvPr id="169" name="Shape 167"/>
+          <p:cNvSpPr/>
+          <p:nvPr/>
+        </p:nvSpPr>
+        <p:spPr>
+          <a:xfrm flipV="1">
+            <a:off x="3936842" y="2379345"/>
+            <a:ext cx="64008" cy="54864"/>
+          </a:xfrm>
+          <a:prstGeom prst="triangle">
+            <a:avLst/>
+          </a:prstGeom>
+          <a:solidFill>
+            <a:srgbClr val="C8503F"/>
+          </a:solidFill>
+          <a:ln w="12700">
+            <a:solidFill>
+              <a:srgbClr val="C8503F"/>
+            </a:solidFill>
+            <a:prstDash val="solid"/>
+          </a:ln>
+        </p:spPr>
+      </p:sp>
+      <p:sp>
+        <p:nvSpPr>
+          <p:cNvPr id="170" name="Text 168"/>
+          <p:cNvSpPr/>
+          <p:nvPr/>
+        </p:nvSpPr>
+        <p:spPr>
+          <a:xfrm>
+            <a:off x="3342482" y="2240280"/>
+            <a:ext cx="548640" cy="268986"/>
           </a:xfrm>
           <a:prstGeom prst="rect">
             <a:avLst/>
@@ -12189,227 +12469,36 @@
               <a:buNone/>
             </a:pPr>
             <a:r>
-              <a:rPr lang="ar-SA" altLang="en-US" sz="850" b="1" dirty="0">
-                <a:solidFill>
-                  <a:srgbClr val="C8503F"/>
-                </a:solidFill>
-                <a:latin typeface="Arial" pitchFamily="34" charset="0"/>
-                <a:ea typeface="Arial" pitchFamily="34" charset="-122"/>
-                <a:cs typeface="Arial" pitchFamily="34" charset="-120"/>
-              </a:rPr>
-              <a:t>أعمال الشورينج – إجمالي الوقت المطلوب</a:t>
-            </a:r>
-            <a:endParaRPr lang="ar-SA" sz="850" dirty="0"/>
-          </a:p>
-        </p:txBody>
-      </p:sp>
-      <p:sp>
-        <p:nvSpPr>
-          <p:cNvPr id="163" name="Text 161"/>
-          <p:cNvSpPr/>
-          <p:nvPr/>
-        </p:nvSpPr>
-        <p:spPr>
-          <a:xfrm>
-            <a:off x="7464247" y="2240280"/>
-            <a:ext cx="502920" cy="274320"/>
-          </a:xfrm>
-          <a:prstGeom prst="rect">
-            <a:avLst/>
-          </a:prstGeom>
-          <a:noFill/>
-          <a:ln/>
-        </p:spPr>
-        <p:txBody>
-          <a:bodyPr wrap="square" lIns="0" tIns="0" rIns="0" bIns="0" rtlCol="0" anchor="ctr">
-            <a:normAutofit/>
-          </a:bodyPr>
-          <a:lstStyle/>
-          <a:p>
-            <a:pPr rtl="1" algn="ctr" indent="0" marL="0">
-              <a:buNone/>
-            </a:pPr>
-            <a:r>
-              <a:rPr lang="ar-SA" altLang="en-US" sz="1100" b="1" dirty="0">
-                <a:solidFill>
-                  <a:srgbClr val="222222"/>
-                </a:solidFill>
-                <a:latin typeface="Arial" pitchFamily="34" charset="0"/>
-                <a:ea typeface="Arial" pitchFamily="34" charset="-122"/>
-                <a:cs typeface="Arial" pitchFamily="34" charset="-120"/>
-              </a:rPr>
-              <a:t>4</a:t>
-            </a:r>
-            <a:endParaRPr lang="ar-SA" sz="1100" dirty="0"/>
-          </a:p>
-        </p:txBody>
-      </p:sp>
-      <p:sp>
-        <p:nvSpPr>
-          <p:cNvPr id="164" name="Text 162"/>
-          <p:cNvSpPr/>
-          <p:nvPr/>
-        </p:nvSpPr>
-        <p:spPr>
-          <a:xfrm>
-            <a:off x="6805879" y="2240280"/>
-            <a:ext cx="658368" cy="274320"/>
-          </a:xfrm>
-          <a:prstGeom prst="rect">
-            <a:avLst/>
-          </a:prstGeom>
-          <a:noFill/>
-          <a:ln/>
-        </p:spPr>
-        <p:txBody>
-          <a:bodyPr wrap="square" lIns="0" tIns="0" rIns="0" bIns="0" rtlCol="0" anchor="ctr">
-            <a:normAutofit/>
-          </a:bodyPr>
-          <a:lstStyle/>
-          <a:p>
-            <a:pPr rtl="1" algn="ctr" indent="0" marL="0">
-              <a:buNone/>
-            </a:pPr>
-            <a:r>
-              <a:rPr lang="ar-SA" altLang="en-US" sz="850" b="1" dirty="0">
-                <a:solidFill>
-                  <a:srgbClr val="222222"/>
-                </a:solidFill>
-                <a:latin typeface="Arial" pitchFamily="34" charset="0"/>
-                <a:ea typeface="Arial" pitchFamily="34" charset="-122"/>
-                <a:cs typeface="Arial" pitchFamily="34" charset="-120"/>
-              </a:rPr>
-              <a:t>22 أكتوبر</a:t>
-            </a:r>
-            <a:endParaRPr lang="ar-SA" sz="850" dirty="0"/>
-          </a:p>
-        </p:txBody>
-      </p:sp>
-      <p:sp>
-        <p:nvSpPr>
-          <p:cNvPr id="165" name="Text 163"/>
-          <p:cNvSpPr/>
-          <p:nvPr/>
-        </p:nvSpPr>
-        <p:spPr>
-          <a:xfrm>
-            <a:off x="6147511" y="2240280"/>
-            <a:ext cx="658368" cy="274320"/>
-          </a:xfrm>
-          <a:prstGeom prst="rect">
-            <a:avLst/>
-          </a:prstGeom>
-          <a:noFill/>
-          <a:ln/>
-        </p:spPr>
-        <p:txBody>
-          <a:bodyPr wrap="square" lIns="0" tIns="0" rIns="0" bIns="0" rtlCol="0" anchor="ctr">
-            <a:normAutofit/>
-          </a:bodyPr>
-          <a:lstStyle/>
-          <a:p>
-            <a:pPr rtl="1" algn="ctr" indent="0" marL="0">
-              <a:buNone/>
-            </a:pPr>
-            <a:r>
-              <a:rPr lang="ar-SA" altLang="en-US" sz="850" b="1" dirty="0">
-                <a:solidFill>
-                  <a:srgbClr val="222222"/>
-                </a:solidFill>
-                <a:latin typeface="Arial" pitchFamily="34" charset="0"/>
-                <a:ea typeface="Arial" pitchFamily="34" charset="-122"/>
-                <a:cs typeface="Arial" pitchFamily="34" charset="-120"/>
-              </a:rPr>
-              <a:t>26 أكتوبر</a:t>
-            </a:r>
-            <a:endParaRPr lang="ar-SA" sz="850" dirty="0"/>
-          </a:p>
-        </p:txBody>
-      </p:sp>
-      <p:sp>
-        <p:nvSpPr>
-          <p:cNvPr id="166" name="Shape 164"/>
-          <p:cNvSpPr/>
-          <p:nvPr/>
-        </p:nvSpPr>
-        <p:spPr>
-          <a:xfrm>
-            <a:off x="3936842" y="2276856"/>
-            <a:ext cx="850258" cy="201168"/>
-          </a:xfrm>
-          <a:prstGeom prst="roundRect">
-            <a:avLst>
-              <a:gd name="adj" fmla="val 18182"/>
-            </a:avLst>
-          </a:prstGeom>
-          <a:solidFill>
-            <a:srgbClr val="C8503F"/>
-          </a:solidFill>
-          <a:ln w="12700">
-            <a:solidFill>
-              <a:srgbClr val="C8503F"/>
-            </a:solidFill>
-            <a:prstDash val="solid"/>
-          </a:ln>
-        </p:spPr>
-      </p:sp>
-      <p:sp>
-        <p:nvSpPr>
-          <p:cNvPr id="167" name="Text 165"/>
-          <p:cNvSpPr/>
-          <p:nvPr/>
-        </p:nvSpPr>
-        <p:spPr>
-          <a:xfrm>
-            <a:off x="3936842" y="2276856"/>
-            <a:ext cx="850258" cy="201168"/>
-          </a:xfrm>
-          <a:prstGeom prst="rect">
-            <a:avLst/>
-          </a:prstGeom>
-          <a:noFill/>
-          <a:ln/>
-        </p:spPr>
-        <p:txBody>
-          <a:bodyPr wrap="square" lIns="0" tIns="0" rIns="0" bIns="0" rtlCol="0" anchor="ctr">
-            <a:normAutofit/>
-          </a:bodyPr>
-          <a:lstStyle/>
-          <a:p>
-            <a:pPr rtl="1" algn="ctr" indent="0" marL="0">
-              <a:buNone/>
-            </a:pPr>
-            <a:r>
-              <a:rPr lang="ar-SA" altLang="en-US" sz="800" b="1" dirty="0">
-                <a:solidFill>
-                  <a:srgbClr val="FFFFFF"/>
-                </a:solidFill>
-                <a:latin typeface="Arial" pitchFamily="34" charset="0"/>
-                <a:ea typeface="Arial" pitchFamily="34" charset="-122"/>
-                <a:cs typeface="Arial" pitchFamily="34" charset="-120"/>
-              </a:rPr>
-              <a:t>4 يوم عمل</a:t>
-            </a:r>
-            <a:endParaRPr lang="ar-SA" sz="800" dirty="0"/>
-          </a:p>
-        </p:txBody>
-      </p:sp>
-      <p:sp>
-        <p:nvSpPr>
-          <p:cNvPr id="168" name="Shape 166"/>
-          <p:cNvSpPr/>
-          <p:nvPr/>
-        </p:nvSpPr>
-        <p:spPr>
-          <a:xfrm>
-            <a:off x="365760" y="2514600"/>
-            <a:ext cx="11460175" cy="274320"/>
-          </a:xfrm>
-          <a:prstGeom prst="rect">
-            <a:avLst/>
-          </a:prstGeom>
-          <a:solidFill>
-            <a:srgbClr val="FFFFFF"/>
+              <a:rPr lang="ar-SA" altLang="en-US" sz="750" b="1" dirty="0">
+                <a:solidFill>
+                  <a:srgbClr val="3D3935"/>
+                </a:solidFill>
+                <a:latin typeface="Arial" pitchFamily="34" charset="0"/>
+                <a:ea typeface="Arial" pitchFamily="34" charset="-122"/>
+                <a:cs typeface="Arial" pitchFamily="34" charset="-120"/>
+              </a:rPr>
+              <a:t>4 يوم</a:t>
+            </a:r>
+            <a:endParaRPr lang="ar-SA" sz="750" dirty="0"/>
+          </a:p>
+        </p:txBody>
+      </p:sp>
+      <p:sp>
+        <p:nvSpPr>
+          <p:cNvPr id="171" name="Shape 169"/>
+          <p:cNvSpPr/>
+          <p:nvPr/>
+        </p:nvSpPr>
+        <p:spPr>
+          <a:xfrm>
+            <a:off x="365760" y="2509266"/>
+            <a:ext cx="11460175" cy="268986"/>
+          </a:xfrm>
+          <a:prstGeom prst="rect">
+            <a:avLst/>
+          </a:prstGeom>
+          <a:solidFill>
+            <a:srgbClr val="F6F9FA"/>
           </a:solidFill>
           <a:ln w="6350">
             <a:solidFill>
@@ -12421,748 +12510,13 @@
       </p:sp>
       <p:sp>
         <p:nvSpPr>
-          <p:cNvPr id="169" name="Shape 167"/>
-          <p:cNvSpPr/>
-          <p:nvPr/>
-        </p:nvSpPr>
-        <p:spPr>
-          <a:xfrm>
-            <a:off x="11515039" y="2532888"/>
-            <a:ext cx="237744" cy="237744"/>
-          </a:xfrm>
-          <a:prstGeom prst="ellipse">
-            <a:avLst/>
-          </a:prstGeom>
-          <a:solidFill>
-            <a:srgbClr val="6C4AB6"/>
-          </a:solidFill>
-          <a:ln w="12700">
-            <a:solidFill>
-              <a:srgbClr val="6C4AB6"/>
-            </a:solidFill>
-            <a:prstDash val="solid"/>
-          </a:ln>
-        </p:spPr>
-      </p:sp>
-      <p:sp>
-        <p:nvSpPr>
-          <p:cNvPr id="170" name="Text 168"/>
-          <p:cNvSpPr/>
-          <p:nvPr/>
-        </p:nvSpPr>
-        <p:spPr>
-          <a:xfrm>
-            <a:off x="11441887" y="2514600"/>
-            <a:ext cx="384048" cy="274320"/>
-          </a:xfrm>
-          <a:prstGeom prst="rect">
-            <a:avLst/>
-          </a:prstGeom>
-          <a:noFill/>
-          <a:ln/>
-        </p:spPr>
-        <p:txBody>
-          <a:bodyPr wrap="square" lIns="0" tIns="0" rIns="0" bIns="0" rtlCol="0" anchor="ctr">
-            <a:normAutofit/>
-          </a:bodyPr>
-          <a:lstStyle/>
-          <a:p>
-            <a:pPr rtl="1" algn="ctr" indent="0" marL="0">
-              <a:buNone/>
-            </a:pPr>
-            <a:r>
-              <a:rPr lang="ar-SA" altLang="en-US" sz="900" b="1" dirty="0">
-                <a:solidFill>
-                  <a:srgbClr val="FFFFFF"/>
-                </a:solidFill>
-                <a:latin typeface="Arial" pitchFamily="34" charset="0"/>
-                <a:ea typeface="Arial" pitchFamily="34" charset="-122"/>
-                <a:cs typeface="Arial" pitchFamily="34" charset="-120"/>
-              </a:rPr>
-              <a:t>⟷</a:t>
-            </a:r>
-            <a:endParaRPr lang="ar-SA" sz="900" dirty="0"/>
-          </a:p>
-        </p:txBody>
-      </p:sp>
-      <p:sp>
-        <p:nvSpPr>
-          <p:cNvPr id="171" name="Text 169"/>
-          <p:cNvSpPr/>
-          <p:nvPr/>
-        </p:nvSpPr>
-        <p:spPr>
-          <a:xfrm>
-            <a:off x="8762695" y="2514600"/>
-            <a:ext cx="2606040" cy="274320"/>
-          </a:xfrm>
-          <a:prstGeom prst="rect">
-            <a:avLst/>
-          </a:prstGeom>
-          <a:noFill/>
-          <a:ln/>
-        </p:spPr>
-        <p:txBody>
-          <a:bodyPr wrap="square" lIns="0" tIns="0" rIns="0" bIns="0" rtlCol="0" anchor="ctr">
-            <a:normAutofit/>
-          </a:bodyPr>
-          <a:lstStyle/>
-          <a:p>
-            <a:pPr rtl="1" algn="r" indent="0" marL="0">
-              <a:buNone/>
-            </a:pPr>
-            <a:r>
-              <a:rPr lang="ar-SA" altLang="en-US" sz="850" b="1" dirty="0">
-                <a:solidFill>
-                  <a:srgbClr val="6C4AB6"/>
-                </a:solidFill>
-                <a:latin typeface="Arial" pitchFamily="34" charset="0"/>
-                <a:ea typeface="Arial" pitchFamily="34" charset="-122"/>
-                <a:cs typeface="Arial" pitchFamily="34" charset="-120"/>
-              </a:rPr>
-              <a:t>أعمال الخرسانة حتى الردم – إجمالي الوقت المطلوب</a:t>
-            </a:r>
-            <a:endParaRPr lang="ar-SA" sz="850" dirty="0"/>
-          </a:p>
-        </p:txBody>
-      </p:sp>
-      <p:sp>
-        <p:nvSpPr>
-          <p:cNvPr id="172" name="Text 170"/>
-          <p:cNvSpPr/>
-          <p:nvPr/>
-        </p:nvSpPr>
-        <p:spPr>
-          <a:xfrm>
-            <a:off x="7464247" y="2514600"/>
-            <a:ext cx="502920" cy="274320"/>
-          </a:xfrm>
-          <a:prstGeom prst="rect">
-            <a:avLst/>
-          </a:prstGeom>
-          <a:noFill/>
-          <a:ln/>
-        </p:spPr>
-        <p:txBody>
-          <a:bodyPr wrap="square" lIns="0" tIns="0" rIns="0" bIns="0" rtlCol="0" anchor="ctr">
-            <a:normAutofit/>
-          </a:bodyPr>
-          <a:lstStyle/>
-          <a:p>
-            <a:pPr rtl="1" algn="ctr" indent="0" marL="0">
-              <a:buNone/>
-            </a:pPr>
-            <a:r>
-              <a:rPr lang="ar-SA" altLang="en-US" sz="1100" b="1" dirty="0">
-                <a:solidFill>
-                  <a:srgbClr val="222222"/>
-                </a:solidFill>
-                <a:latin typeface="Arial" pitchFamily="34" charset="0"/>
-                <a:ea typeface="Arial" pitchFamily="34" charset="-122"/>
-                <a:cs typeface="Arial" pitchFamily="34" charset="-120"/>
-              </a:rPr>
-              <a:t>16</a:t>
-            </a:r>
-            <a:endParaRPr lang="ar-SA" sz="1100" dirty="0"/>
-          </a:p>
-        </p:txBody>
-      </p:sp>
-      <p:sp>
-        <p:nvSpPr>
-          <p:cNvPr id="173" name="Text 171"/>
-          <p:cNvSpPr/>
-          <p:nvPr/>
-        </p:nvSpPr>
-        <p:spPr>
-          <a:xfrm>
-            <a:off x="6805879" y="2514600"/>
-            <a:ext cx="658368" cy="274320"/>
-          </a:xfrm>
-          <a:prstGeom prst="rect">
-            <a:avLst/>
-          </a:prstGeom>
-          <a:noFill/>
-          <a:ln/>
-        </p:spPr>
-        <p:txBody>
-          <a:bodyPr wrap="square" lIns="0" tIns="0" rIns="0" bIns="0" rtlCol="0" anchor="ctr">
-            <a:normAutofit/>
-          </a:bodyPr>
-          <a:lstStyle/>
-          <a:p>
-            <a:pPr rtl="1" algn="ctr" indent="0" marL="0">
-              <a:buNone/>
-            </a:pPr>
-            <a:r>
-              <a:rPr lang="ar-SA" altLang="en-US" sz="850" b="1" dirty="0">
-                <a:solidFill>
-                  <a:srgbClr val="222222"/>
-                </a:solidFill>
-                <a:latin typeface="Arial" pitchFamily="34" charset="0"/>
-                <a:ea typeface="Arial" pitchFamily="34" charset="-122"/>
-                <a:cs typeface="Arial" pitchFamily="34" charset="-120"/>
-              </a:rPr>
-              <a:t>27 أكتوبر</a:t>
-            </a:r>
-            <a:endParaRPr lang="ar-SA" sz="850" dirty="0"/>
-          </a:p>
-        </p:txBody>
-      </p:sp>
-      <p:sp>
-        <p:nvSpPr>
-          <p:cNvPr id="174" name="Text 172"/>
-          <p:cNvSpPr/>
-          <p:nvPr/>
-        </p:nvSpPr>
-        <p:spPr>
-          <a:xfrm>
-            <a:off x="6147511" y="2514600"/>
-            <a:ext cx="658368" cy="274320"/>
-          </a:xfrm>
-          <a:prstGeom prst="rect">
-            <a:avLst/>
-          </a:prstGeom>
-          <a:noFill/>
-          <a:ln/>
-        </p:spPr>
-        <p:txBody>
-          <a:bodyPr wrap="square" lIns="0" tIns="0" rIns="0" bIns="0" rtlCol="0" anchor="ctr">
-            <a:normAutofit/>
-          </a:bodyPr>
-          <a:lstStyle/>
-          <a:p>
-            <a:pPr rtl="1" algn="ctr" indent="0" marL="0">
-              <a:buNone/>
-            </a:pPr>
-            <a:r>
-              <a:rPr lang="ar-SA" altLang="en-US" sz="850" b="1" dirty="0">
-                <a:solidFill>
-                  <a:srgbClr val="222222"/>
-                </a:solidFill>
-                <a:latin typeface="Arial" pitchFamily="34" charset="0"/>
-                <a:ea typeface="Arial" pitchFamily="34" charset="-122"/>
-                <a:cs typeface="Arial" pitchFamily="34" charset="-120"/>
-              </a:rPr>
-              <a:t>14 نوفمبر</a:t>
-            </a:r>
-            <a:endParaRPr lang="ar-SA" sz="850" dirty="0"/>
-          </a:p>
-        </p:txBody>
-      </p:sp>
-      <p:sp>
-        <p:nvSpPr>
-          <p:cNvPr id="175" name="Shape 173"/>
-          <p:cNvSpPr/>
-          <p:nvPr/>
-        </p:nvSpPr>
-        <p:spPr>
-          <a:xfrm>
-            <a:off x="705863" y="2551176"/>
-            <a:ext cx="3230979" cy="201168"/>
-          </a:xfrm>
-          <a:prstGeom prst="roundRect">
-            <a:avLst>
-              <a:gd name="adj" fmla="val 18182"/>
-            </a:avLst>
-          </a:prstGeom>
-          <a:solidFill>
-            <a:srgbClr val="6C4AB6"/>
-          </a:solidFill>
-          <a:ln w="12700">
-            <a:solidFill>
-              <a:srgbClr val="6C4AB6"/>
-            </a:solidFill>
-            <a:prstDash val="solid"/>
-          </a:ln>
-        </p:spPr>
-      </p:sp>
-      <p:sp>
-        <p:nvSpPr>
-          <p:cNvPr id="176" name="Text 174"/>
-          <p:cNvSpPr/>
-          <p:nvPr/>
-        </p:nvSpPr>
-        <p:spPr>
-          <a:xfrm>
-            <a:off x="705863" y="2551176"/>
-            <a:ext cx="3230979" cy="201168"/>
-          </a:xfrm>
-          <a:prstGeom prst="rect">
-            <a:avLst/>
-          </a:prstGeom>
-          <a:noFill/>
-          <a:ln/>
-        </p:spPr>
-        <p:txBody>
-          <a:bodyPr wrap="square" lIns="0" tIns="0" rIns="0" bIns="0" rtlCol="0" anchor="ctr">
-            <a:normAutofit/>
-          </a:bodyPr>
-          <a:lstStyle/>
-          <a:p>
-            <a:pPr rtl="1" algn="ctr" indent="0" marL="0">
-              <a:buNone/>
-            </a:pPr>
-            <a:r>
-              <a:rPr lang="ar-SA" altLang="en-US" sz="800" b="1" dirty="0">
-                <a:solidFill>
-                  <a:srgbClr val="FFFFFF"/>
-                </a:solidFill>
-                <a:latin typeface="Arial" pitchFamily="34" charset="0"/>
-                <a:ea typeface="Arial" pitchFamily="34" charset="-122"/>
-                <a:cs typeface="Arial" pitchFamily="34" charset="-120"/>
-              </a:rPr>
-              <a:t>16 يوم عمل</a:t>
-            </a:r>
-            <a:endParaRPr lang="ar-SA" sz="800" dirty="0"/>
-          </a:p>
-        </p:txBody>
-      </p:sp>
-      <p:sp>
-        <p:nvSpPr>
-          <p:cNvPr id="177" name="Shape 175"/>
-          <p:cNvSpPr/>
-          <p:nvPr/>
-        </p:nvSpPr>
-        <p:spPr>
-          <a:xfrm>
-            <a:off x="365760" y="2788920"/>
-            <a:ext cx="11460175" cy="223266"/>
-          </a:xfrm>
-          <a:prstGeom prst="rect">
-            <a:avLst/>
-          </a:prstGeom>
-          <a:solidFill>
-            <a:srgbClr val="FFFFFF"/>
-          </a:solidFill>
-          <a:ln w="6350">
-            <a:solidFill>
-              <a:srgbClr val="DFE6EA"/>
-            </a:solidFill>
-            <a:prstDash val="solid"/>
-          </a:ln>
-        </p:spPr>
-      </p:sp>
-      <p:sp>
-        <p:nvSpPr>
-          <p:cNvPr id="178" name="Shape 176"/>
-          <p:cNvSpPr/>
-          <p:nvPr/>
-        </p:nvSpPr>
-        <p:spPr>
-          <a:xfrm>
-            <a:off x="11515039" y="2781681"/>
-            <a:ext cx="237744" cy="237744"/>
-          </a:xfrm>
-          <a:prstGeom prst="ellipse">
-            <a:avLst/>
-          </a:prstGeom>
-          <a:solidFill>
-            <a:srgbClr val="C8503F"/>
-          </a:solidFill>
-          <a:ln w="19050">
-            <a:solidFill>
-              <a:srgbClr val="222222"/>
-            </a:solidFill>
-            <a:prstDash val="solid"/>
-          </a:ln>
-        </p:spPr>
-      </p:sp>
-      <p:sp>
-        <p:nvSpPr>
-          <p:cNvPr id="179" name="Text 177"/>
-          <p:cNvSpPr/>
-          <p:nvPr/>
-        </p:nvSpPr>
-        <p:spPr>
-          <a:xfrm>
-            <a:off x="11441887" y="2788920"/>
-            <a:ext cx="384048" cy="223266"/>
-          </a:xfrm>
-          <a:prstGeom prst="rect">
-            <a:avLst/>
-          </a:prstGeom>
-          <a:noFill/>
-          <a:ln/>
-        </p:spPr>
-        <p:txBody>
-          <a:bodyPr wrap="square" lIns="0" tIns="0" rIns="0" bIns="0" rtlCol="0" anchor="ctr">
-            <a:normAutofit/>
-          </a:bodyPr>
-          <a:lstStyle/>
-          <a:p>
-            <a:pPr rtl="1" algn="ctr" indent="0" marL="0">
-              <a:buNone/>
-            </a:pPr>
-            <a:r>
-              <a:rPr lang="ar-SA" altLang="en-US" sz="850" b="1" dirty="0">
-                <a:solidFill>
-                  <a:srgbClr val="FFFFFF"/>
-                </a:solidFill>
-                <a:latin typeface="Arial" pitchFamily="34" charset="0"/>
-                <a:ea typeface="Arial" pitchFamily="34" charset="-122"/>
-                <a:cs typeface="Arial" pitchFamily="34" charset="-120"/>
-              </a:rPr>
-              <a:t>A</a:t>
-            </a:r>
-            <a:endParaRPr lang="ar-SA" sz="850" dirty="0"/>
-          </a:p>
-        </p:txBody>
-      </p:sp>
-      <p:sp>
-        <p:nvSpPr>
-          <p:cNvPr id="180" name="Text 178"/>
-          <p:cNvSpPr/>
-          <p:nvPr/>
-        </p:nvSpPr>
-        <p:spPr>
-          <a:xfrm>
-            <a:off x="8762695" y="2788920"/>
-            <a:ext cx="2606040" cy="223266"/>
-          </a:xfrm>
-          <a:prstGeom prst="rect">
-            <a:avLst/>
-          </a:prstGeom>
-          <a:noFill/>
-          <a:ln/>
-        </p:spPr>
-        <p:txBody>
-          <a:bodyPr wrap="square" lIns="0" tIns="0" rIns="0" bIns="0" rtlCol="0" anchor="ctr">
-            <a:normAutofit/>
-          </a:bodyPr>
-          <a:lstStyle/>
-          <a:p>
-            <a:pPr rtl="1" algn="r" indent="0" marL="0">
-              <a:buNone/>
-            </a:pPr>
-            <a:r>
-              <a:rPr lang="ar-SA" altLang="en-US" sz="750" b="1" dirty="0">
-                <a:solidFill>
-                  <a:srgbClr val="222222"/>
-                </a:solidFill>
-                <a:latin typeface="Arial" pitchFamily="34" charset="0"/>
-                <a:ea typeface="Arial" pitchFamily="34" charset="-122"/>
-                <a:cs typeface="Arial" pitchFamily="34" charset="-120"/>
-              </a:rPr>
-              <a:t>تركيب نظام الدعم (Shoring)</a:t>
-            </a:r>
-            <a:endParaRPr lang="ar-SA" sz="750" dirty="0"/>
-          </a:p>
-        </p:txBody>
-      </p:sp>
-      <p:sp>
-        <p:nvSpPr>
-          <p:cNvPr id="181" name="Text 179"/>
-          <p:cNvSpPr/>
-          <p:nvPr/>
-        </p:nvSpPr>
-        <p:spPr>
-          <a:xfrm>
-            <a:off x="7967167" y="2788920"/>
-            <a:ext cx="777240" cy="223266"/>
-          </a:xfrm>
-          <a:prstGeom prst="rect">
-            <a:avLst/>
-          </a:prstGeom>
-          <a:noFill/>
-          <a:ln/>
-        </p:spPr>
-        <p:txBody>
-          <a:bodyPr wrap="square" lIns="0" tIns="0" rIns="0" bIns="0" rtlCol="0" anchor="ctr">
-            <a:normAutofit/>
-          </a:bodyPr>
-          <a:lstStyle/>
-          <a:p>
-            <a:pPr rtl="1" algn="ctr" indent="0" marL="0">
-              <a:buNone/>
-            </a:pPr>
-            <a:r>
-              <a:rPr lang="ar-SA" altLang="en-US" sz="700" dirty="0">
-                <a:solidFill>
-                  <a:srgbClr val="444444"/>
-                </a:solidFill>
-                <a:latin typeface="Arial" pitchFamily="34" charset="0"/>
-                <a:ea typeface="Arial" pitchFamily="34" charset="-122"/>
-                <a:cs typeface="Arial" pitchFamily="34" charset="-120"/>
-              </a:rPr>
-              <a:t>—</a:t>
-            </a:r>
-            <a:endParaRPr lang="ar-SA" sz="700" dirty="0"/>
-          </a:p>
-        </p:txBody>
-      </p:sp>
-      <p:sp>
-        <p:nvSpPr>
-          <p:cNvPr id="182" name="Text 180"/>
-          <p:cNvSpPr/>
-          <p:nvPr/>
-        </p:nvSpPr>
-        <p:spPr>
-          <a:xfrm>
-            <a:off x="7464247" y="2788920"/>
-            <a:ext cx="502920" cy="223266"/>
-          </a:xfrm>
-          <a:prstGeom prst="rect">
-            <a:avLst/>
-          </a:prstGeom>
-          <a:noFill/>
-          <a:ln/>
-        </p:spPr>
-        <p:txBody>
-          <a:bodyPr wrap="square" lIns="0" tIns="0" rIns="0" bIns="0" rtlCol="0" anchor="ctr">
-            <a:normAutofit/>
-          </a:bodyPr>
-          <a:lstStyle/>
-          <a:p>
-            <a:pPr rtl="1" algn="ctr" indent="0" marL="0">
-              <a:buNone/>
-            </a:pPr>
-            <a:r>
-              <a:rPr lang="ar-SA" altLang="en-US" sz="900" b="1" dirty="0">
-                <a:solidFill>
-                  <a:srgbClr val="222222"/>
-                </a:solidFill>
-                <a:latin typeface="Arial" pitchFamily="34" charset="0"/>
-                <a:ea typeface="Arial" pitchFamily="34" charset="-122"/>
-                <a:cs typeface="Arial" pitchFamily="34" charset="-120"/>
-              </a:rPr>
-              <a:t>4</a:t>
-            </a:r>
-            <a:endParaRPr lang="ar-SA" sz="900" dirty="0"/>
-          </a:p>
-        </p:txBody>
-      </p:sp>
-      <p:sp>
-        <p:nvSpPr>
-          <p:cNvPr id="183" name="Text 181"/>
-          <p:cNvSpPr/>
-          <p:nvPr/>
-        </p:nvSpPr>
-        <p:spPr>
-          <a:xfrm>
-            <a:off x="6805879" y="2788920"/>
-            <a:ext cx="658368" cy="223266"/>
-          </a:xfrm>
-          <a:prstGeom prst="rect">
-            <a:avLst/>
-          </a:prstGeom>
-          <a:noFill/>
-          <a:ln/>
-        </p:spPr>
-        <p:txBody>
-          <a:bodyPr wrap="square" lIns="0" tIns="0" rIns="0" bIns="0" rtlCol="0" anchor="ctr">
-            <a:normAutofit/>
-          </a:bodyPr>
-          <a:lstStyle/>
-          <a:p>
-            <a:pPr rtl="1" algn="ctr" indent="0" marL="0">
-              <a:buNone/>
-            </a:pPr>
-            <a:r>
-              <a:rPr lang="ar-SA" altLang="en-US" sz="700" b="1" dirty="0">
-                <a:solidFill>
-                  <a:srgbClr val="222222"/>
-                </a:solidFill>
-                <a:latin typeface="Arial" pitchFamily="34" charset="0"/>
-                <a:ea typeface="Arial" pitchFamily="34" charset="-122"/>
-                <a:cs typeface="Arial" pitchFamily="34" charset="-120"/>
-              </a:rPr>
-              <a:t>22 أكتوبر</a:t>
-            </a:r>
-            <a:endParaRPr lang="ar-SA" sz="700" dirty="0"/>
-          </a:p>
-        </p:txBody>
-      </p:sp>
-      <p:sp>
-        <p:nvSpPr>
-          <p:cNvPr id="184" name="Text 182"/>
-          <p:cNvSpPr/>
-          <p:nvPr/>
-        </p:nvSpPr>
-        <p:spPr>
-          <a:xfrm>
-            <a:off x="6147511" y="2788920"/>
-            <a:ext cx="658368" cy="223266"/>
-          </a:xfrm>
-          <a:prstGeom prst="rect">
-            <a:avLst/>
-          </a:prstGeom>
-          <a:noFill/>
-          <a:ln/>
-        </p:spPr>
-        <p:txBody>
-          <a:bodyPr wrap="square" lIns="0" tIns="0" rIns="0" bIns="0" rtlCol="0" anchor="ctr">
-            <a:normAutofit/>
-          </a:bodyPr>
-          <a:lstStyle/>
-          <a:p>
-            <a:pPr rtl="1" algn="ctr" indent="0" marL="0">
-              <a:buNone/>
-            </a:pPr>
-            <a:r>
-              <a:rPr lang="ar-SA" altLang="en-US" sz="700" b="1" dirty="0">
-                <a:solidFill>
-                  <a:srgbClr val="222222"/>
-                </a:solidFill>
-                <a:latin typeface="Arial" pitchFamily="34" charset="0"/>
-                <a:ea typeface="Arial" pitchFamily="34" charset="-122"/>
-                <a:cs typeface="Arial" pitchFamily="34" charset="-120"/>
-              </a:rPr>
-              <a:t>26 أكتوبر</a:t>
-            </a:r>
-            <a:endParaRPr lang="ar-SA" sz="700" dirty="0"/>
-          </a:p>
-        </p:txBody>
-      </p:sp>
-      <p:sp>
-        <p:nvSpPr>
-          <p:cNvPr id="185" name="Shape 183"/>
-          <p:cNvSpPr/>
-          <p:nvPr/>
-        </p:nvSpPr>
-        <p:spPr>
-          <a:xfrm>
-            <a:off x="3936842" y="2841117"/>
-            <a:ext cx="850258" cy="64008"/>
-          </a:xfrm>
-          <a:prstGeom prst="rect">
-            <a:avLst/>
-          </a:prstGeom>
-          <a:solidFill>
-            <a:srgbClr val="C8503F"/>
-          </a:solidFill>
-          <a:ln w="12700">
-            <a:solidFill>
-              <a:srgbClr val="C8503F"/>
-            </a:solidFill>
-            <a:prstDash val="solid"/>
-          </a:ln>
-        </p:spPr>
-      </p:sp>
-      <p:sp>
-        <p:nvSpPr>
-          <p:cNvPr id="186" name="Shape 184"/>
-          <p:cNvSpPr/>
-          <p:nvPr/>
-        </p:nvSpPr>
-        <p:spPr>
-          <a:xfrm flipV="1">
-            <a:off x="4723091" y="2905125"/>
-            <a:ext cx="64008" cy="54864"/>
-          </a:xfrm>
-          <a:prstGeom prst="triangle">
-            <a:avLst/>
-          </a:prstGeom>
-          <a:solidFill>
-            <a:srgbClr val="C8503F"/>
-          </a:solidFill>
-          <a:ln w="12700">
-            <a:solidFill>
-              <a:srgbClr val="C8503F"/>
-            </a:solidFill>
-            <a:prstDash val="solid"/>
-          </a:ln>
-        </p:spPr>
-      </p:sp>
-      <p:sp>
-        <p:nvSpPr>
-          <p:cNvPr id="187" name="Shape 185"/>
-          <p:cNvSpPr/>
-          <p:nvPr/>
-        </p:nvSpPr>
-        <p:spPr>
-          <a:xfrm flipV="1">
-            <a:off x="3936842" y="2905125"/>
-            <a:ext cx="64008" cy="54864"/>
-          </a:xfrm>
-          <a:prstGeom prst="triangle">
-            <a:avLst/>
-          </a:prstGeom>
-          <a:solidFill>
-            <a:srgbClr val="C8503F"/>
-          </a:solidFill>
-          <a:ln w="12700">
-            <a:solidFill>
-              <a:srgbClr val="C8503F"/>
-            </a:solidFill>
-            <a:prstDash val="solid"/>
-          </a:ln>
-        </p:spPr>
-      </p:sp>
-      <p:sp>
-        <p:nvSpPr>
-          <p:cNvPr id="188" name="Text 186"/>
-          <p:cNvSpPr/>
-          <p:nvPr/>
-        </p:nvSpPr>
-        <p:spPr>
-          <a:xfrm>
-            <a:off x="3342482" y="2788920"/>
-            <a:ext cx="548640" cy="223266"/>
-          </a:xfrm>
-          <a:prstGeom prst="rect">
-            <a:avLst/>
-          </a:prstGeom>
-          <a:noFill/>
-          <a:ln/>
-        </p:spPr>
-        <p:txBody>
-          <a:bodyPr wrap="square" lIns="0" tIns="0" rIns="0" bIns="0" rtlCol="0" anchor="ctr">
-            <a:normAutofit/>
-          </a:bodyPr>
-          <a:lstStyle/>
-          <a:p>
-            <a:pPr rtl="1" algn="r" indent="0" marL="0">
-              <a:buNone/>
-            </a:pPr>
-            <a:r>
-              <a:rPr lang="ar-SA" altLang="en-US" sz="750" b="1" dirty="0">
-                <a:solidFill>
-                  <a:srgbClr val="3D3935"/>
-                </a:solidFill>
-                <a:latin typeface="Arial" pitchFamily="34" charset="0"/>
-                <a:ea typeface="Arial" pitchFamily="34" charset="-122"/>
-                <a:cs typeface="Arial" pitchFamily="34" charset="-120"/>
-              </a:rPr>
-              <a:t>4 يوم</a:t>
-            </a:r>
-            <a:endParaRPr lang="ar-SA" sz="750" dirty="0"/>
-          </a:p>
-        </p:txBody>
-      </p:sp>
-      <p:sp>
-        <p:nvSpPr>
-          <p:cNvPr id="189" name="Shape 187"/>
-          <p:cNvSpPr/>
-          <p:nvPr/>
-        </p:nvSpPr>
-        <p:spPr>
-          <a:xfrm>
-            <a:off x="365760" y="3012186"/>
-            <a:ext cx="11460175" cy="223266"/>
-          </a:xfrm>
-          <a:prstGeom prst="rect">
-            <a:avLst/>
-          </a:prstGeom>
-          <a:solidFill>
-            <a:srgbClr val="F6F9FA"/>
-          </a:solidFill>
-          <a:ln w="6350">
-            <a:solidFill>
-              <a:srgbClr val="DFE6EA"/>
-            </a:solidFill>
-            <a:prstDash val="solid"/>
-          </a:ln>
-        </p:spPr>
-      </p:sp>
-      <p:sp>
-        <p:nvSpPr>
-          <p:cNvPr id="190" name="Shape 188"/>
-          <p:cNvSpPr/>
-          <p:nvPr/>
-        </p:nvSpPr>
-        <p:spPr>
-          <a:xfrm>
-            <a:off x="11441887" y="3046095"/>
+          <p:cNvPr id="172" name="Shape 170"/>
+          <p:cNvSpPr/>
+          <p:nvPr/>
+        </p:nvSpPr>
+        <p:spPr>
+          <a:xfrm>
+            <a:off x="11441887" y="2566035"/>
             <a:ext cx="329184" cy="155448"/>
           </a:xfrm>
           <a:prstGeom prst="roundRect">
@@ -13183,14 +12537,14 @@
       </p:sp>
       <p:sp>
         <p:nvSpPr>
-          <p:cNvPr id="191" name="Text 189"/>
-          <p:cNvSpPr/>
-          <p:nvPr/>
-        </p:nvSpPr>
-        <p:spPr>
-          <a:xfrm>
-            <a:off x="11414455" y="3012186"/>
-            <a:ext cx="384048" cy="223266"/>
+          <p:cNvPr id="173" name="Text 171"/>
+          <p:cNvSpPr/>
+          <p:nvPr/>
+        </p:nvSpPr>
+        <p:spPr>
+          <a:xfrm>
+            <a:off x="11414455" y="2509266"/>
+            <a:ext cx="384048" cy="268986"/>
           </a:xfrm>
           <a:prstGeom prst="rect">
             <a:avLst/>
@@ -13224,14 +12578,14 @@
       </p:sp>
       <p:sp>
         <p:nvSpPr>
-          <p:cNvPr id="192" name="Text 190"/>
-          <p:cNvSpPr/>
-          <p:nvPr/>
-        </p:nvSpPr>
-        <p:spPr>
-          <a:xfrm>
-            <a:off x="8762695" y="3012186"/>
-            <a:ext cx="2441448" cy="223266"/>
+          <p:cNvPr id="174" name="Text 172"/>
+          <p:cNvSpPr/>
+          <p:nvPr/>
+        </p:nvSpPr>
+        <p:spPr>
+          <a:xfrm>
+            <a:off x="8762695" y="2509266"/>
+            <a:ext cx="2441448" cy="268986"/>
           </a:xfrm>
           <a:prstGeom prst="rect">
             <a:avLst/>
@@ -13265,14 +12619,14 @@
       </p:sp>
       <p:sp>
         <p:nvSpPr>
-          <p:cNvPr id="193" name="Text 191"/>
-          <p:cNvSpPr/>
-          <p:nvPr/>
-        </p:nvSpPr>
-        <p:spPr>
-          <a:xfrm>
-            <a:off x="7967167" y="3012186"/>
-            <a:ext cx="777240" cy="223266"/>
+          <p:cNvPr id="175" name="Text 173"/>
+          <p:cNvSpPr/>
+          <p:nvPr/>
+        </p:nvSpPr>
+        <p:spPr>
+          <a:xfrm>
+            <a:off x="7967167" y="2509266"/>
+            <a:ext cx="777240" cy="268986"/>
           </a:xfrm>
           <a:prstGeom prst="rect">
             <a:avLst/>
@@ -13306,14 +12660,14 @@
       </p:sp>
       <p:sp>
         <p:nvSpPr>
-          <p:cNvPr id="194" name="Text 192"/>
-          <p:cNvSpPr/>
-          <p:nvPr/>
-        </p:nvSpPr>
-        <p:spPr>
-          <a:xfrm>
-            <a:off x="7464247" y="3012186"/>
-            <a:ext cx="502920" cy="223266"/>
+          <p:cNvPr id="176" name="Text 174"/>
+          <p:cNvSpPr/>
+          <p:nvPr/>
+        </p:nvSpPr>
+        <p:spPr>
+          <a:xfrm>
+            <a:off x="7464247" y="2509266"/>
+            <a:ext cx="502920" cy="268986"/>
           </a:xfrm>
           <a:prstGeom prst="rect">
             <a:avLst/>
@@ -13347,14 +12701,14 @@
       </p:sp>
       <p:sp>
         <p:nvSpPr>
-          <p:cNvPr id="195" name="Text 193"/>
-          <p:cNvSpPr/>
-          <p:nvPr/>
-        </p:nvSpPr>
-        <p:spPr>
-          <a:xfrm>
-            <a:off x="6805879" y="3012186"/>
-            <a:ext cx="658368" cy="223266"/>
+          <p:cNvPr id="177" name="Text 175"/>
+          <p:cNvSpPr/>
+          <p:nvPr/>
+        </p:nvSpPr>
+        <p:spPr>
+          <a:xfrm>
+            <a:off x="6805879" y="2509266"/>
+            <a:ext cx="658368" cy="268986"/>
           </a:xfrm>
           <a:prstGeom prst="rect">
             <a:avLst/>
@@ -13388,14 +12742,14 @@
       </p:sp>
       <p:sp>
         <p:nvSpPr>
-          <p:cNvPr id="196" name="Text 194"/>
-          <p:cNvSpPr/>
-          <p:nvPr/>
-        </p:nvSpPr>
-        <p:spPr>
-          <a:xfrm>
-            <a:off x="6147511" y="3012186"/>
-            <a:ext cx="658368" cy="223266"/>
+          <p:cNvPr id="178" name="Text 176"/>
+          <p:cNvSpPr/>
+          <p:nvPr/>
+        </p:nvSpPr>
+        <p:spPr>
+          <a:xfrm>
+            <a:off x="6147511" y="2509266"/>
+            <a:ext cx="658368" cy="268986"/>
           </a:xfrm>
           <a:prstGeom prst="rect">
             <a:avLst/>
@@ -13429,18 +12783,18 @@
       </p:sp>
       <p:sp>
         <p:nvSpPr>
-          <p:cNvPr id="197" name="Shape 195"/>
-          <p:cNvSpPr/>
-          <p:nvPr/>
-        </p:nvSpPr>
-        <p:spPr>
-          <a:xfrm>
-            <a:off x="4276945" y="3059072"/>
-            <a:ext cx="510155" cy="129494"/>
+          <p:cNvPr id="179" name="Shape 177"/>
+          <p:cNvSpPr/>
+          <p:nvPr/>
+        </p:nvSpPr>
+        <p:spPr>
+          <a:xfrm>
+            <a:off x="4276945" y="2565753"/>
+            <a:ext cx="510155" cy="156012"/>
           </a:xfrm>
           <a:prstGeom prst="roundRect">
             <a:avLst>
-              <a:gd name="adj" fmla="val 28245"/>
+              <a:gd name="adj" fmla="val 23444"/>
             </a:avLst>
           </a:prstGeom>
           <a:solidFill>
@@ -13463,14 +12817,14 @@
       </p:sp>
       <p:sp>
         <p:nvSpPr>
-          <p:cNvPr id="198" name="Text 196"/>
-          <p:cNvSpPr/>
-          <p:nvPr/>
-        </p:nvSpPr>
-        <p:spPr>
-          <a:xfrm>
-            <a:off x="4276945" y="3059072"/>
-            <a:ext cx="510155" cy="129494"/>
+          <p:cNvPr id="180" name="Text 178"/>
+          <p:cNvSpPr/>
+          <p:nvPr/>
+        </p:nvSpPr>
+        <p:spPr>
+          <a:xfrm>
+            <a:off x="4276945" y="2565753"/>
+            <a:ext cx="510155" cy="156012"/>
           </a:xfrm>
           <a:prstGeom prst="rect">
             <a:avLst/>
@@ -13504,14 +12858,14 @@
       </p:sp>
       <p:sp>
         <p:nvSpPr>
-          <p:cNvPr id="199" name="Shape 197"/>
-          <p:cNvSpPr/>
-          <p:nvPr/>
-        </p:nvSpPr>
-        <p:spPr>
-          <a:xfrm>
-            <a:off x="365760" y="3235452"/>
-            <a:ext cx="11460175" cy="223266"/>
+          <p:cNvPr id="181" name="Shape 179"/>
+          <p:cNvSpPr/>
+          <p:nvPr/>
+        </p:nvSpPr>
+        <p:spPr>
+          <a:xfrm>
+            <a:off x="365760" y="2778252"/>
+            <a:ext cx="11460175" cy="268986"/>
           </a:xfrm>
           <a:prstGeom prst="rect">
             <a:avLst/>
@@ -13529,13 +12883,13 @@
       </p:sp>
       <p:sp>
         <p:nvSpPr>
-          <p:cNvPr id="200" name="Shape 198"/>
-          <p:cNvSpPr/>
-          <p:nvPr/>
-        </p:nvSpPr>
-        <p:spPr>
-          <a:xfrm>
-            <a:off x="11441887" y="3269361"/>
+          <p:cNvPr id="182" name="Shape 180"/>
+          <p:cNvSpPr/>
+          <p:nvPr/>
+        </p:nvSpPr>
+        <p:spPr>
+          <a:xfrm>
+            <a:off x="11441887" y="2835021"/>
             <a:ext cx="329184" cy="155448"/>
           </a:xfrm>
           <a:prstGeom prst="roundRect">
@@ -13556,14 +12910,14 @@
       </p:sp>
       <p:sp>
         <p:nvSpPr>
-          <p:cNvPr id="201" name="Text 199"/>
-          <p:cNvSpPr/>
-          <p:nvPr/>
-        </p:nvSpPr>
-        <p:spPr>
-          <a:xfrm>
-            <a:off x="11414455" y="3235452"/>
-            <a:ext cx="384048" cy="223266"/>
+          <p:cNvPr id="183" name="Text 181"/>
+          <p:cNvSpPr/>
+          <p:nvPr/>
+        </p:nvSpPr>
+        <p:spPr>
+          <a:xfrm>
+            <a:off x="11414455" y="2778252"/>
+            <a:ext cx="384048" cy="268986"/>
           </a:xfrm>
           <a:prstGeom prst="rect">
             <a:avLst/>
@@ -13597,14 +12951,14 @@
       </p:sp>
       <p:sp>
         <p:nvSpPr>
-          <p:cNvPr id="202" name="Text 200"/>
-          <p:cNvSpPr/>
-          <p:nvPr/>
-        </p:nvSpPr>
-        <p:spPr>
-          <a:xfrm>
-            <a:off x="8762695" y="3235452"/>
-            <a:ext cx="2441448" cy="223266"/>
+          <p:cNvPr id="184" name="Text 182"/>
+          <p:cNvSpPr/>
+          <p:nvPr/>
+        </p:nvSpPr>
+        <p:spPr>
+          <a:xfrm>
+            <a:off x="8762695" y="2778252"/>
+            <a:ext cx="2441448" cy="268986"/>
           </a:xfrm>
           <a:prstGeom prst="rect">
             <a:avLst/>
@@ -13638,14 +12992,14 @@
       </p:sp>
       <p:sp>
         <p:nvSpPr>
-          <p:cNvPr id="203" name="Text 201"/>
-          <p:cNvSpPr/>
-          <p:nvPr/>
-        </p:nvSpPr>
-        <p:spPr>
-          <a:xfrm>
-            <a:off x="7967167" y="3235452"/>
-            <a:ext cx="777240" cy="223266"/>
+          <p:cNvPr id="185" name="Text 183"/>
+          <p:cNvSpPr/>
+          <p:nvPr/>
+        </p:nvSpPr>
+        <p:spPr>
+          <a:xfrm>
+            <a:off x="7967167" y="2778252"/>
+            <a:ext cx="777240" cy="268986"/>
           </a:xfrm>
           <a:prstGeom prst="rect">
             <a:avLst/>
@@ -13679,14 +13033,14 @@
       </p:sp>
       <p:sp>
         <p:nvSpPr>
-          <p:cNvPr id="204" name="Text 202"/>
-          <p:cNvSpPr/>
-          <p:nvPr/>
-        </p:nvSpPr>
-        <p:spPr>
-          <a:xfrm>
-            <a:off x="7464247" y="3235452"/>
-            <a:ext cx="502920" cy="223266"/>
+          <p:cNvPr id="186" name="Text 184"/>
+          <p:cNvSpPr/>
+          <p:nvPr/>
+        </p:nvSpPr>
+        <p:spPr>
+          <a:xfrm>
+            <a:off x="7464247" y="2778252"/>
+            <a:ext cx="502920" cy="268986"/>
           </a:xfrm>
           <a:prstGeom prst="rect">
             <a:avLst/>
@@ -13720,14 +13074,14 @@
       </p:sp>
       <p:sp>
         <p:nvSpPr>
-          <p:cNvPr id="205" name="Text 203"/>
-          <p:cNvSpPr/>
-          <p:nvPr/>
-        </p:nvSpPr>
-        <p:spPr>
-          <a:xfrm>
-            <a:off x="6805879" y="3235452"/>
-            <a:ext cx="658368" cy="223266"/>
+          <p:cNvPr id="187" name="Text 185"/>
+          <p:cNvSpPr/>
+          <p:nvPr/>
+        </p:nvSpPr>
+        <p:spPr>
+          <a:xfrm>
+            <a:off x="6805879" y="2778252"/>
+            <a:ext cx="658368" cy="268986"/>
           </a:xfrm>
           <a:prstGeom prst="rect">
             <a:avLst/>
@@ -13761,14 +13115,14 @@
       </p:sp>
       <p:sp>
         <p:nvSpPr>
-          <p:cNvPr id="206" name="Text 204"/>
-          <p:cNvSpPr/>
-          <p:nvPr/>
-        </p:nvSpPr>
-        <p:spPr>
-          <a:xfrm>
-            <a:off x="6147511" y="3235452"/>
-            <a:ext cx="658368" cy="223266"/>
+          <p:cNvPr id="188" name="Text 186"/>
+          <p:cNvSpPr/>
+          <p:nvPr/>
+        </p:nvSpPr>
+        <p:spPr>
+          <a:xfrm>
+            <a:off x="6147511" y="2778252"/>
+            <a:ext cx="658368" cy="268986"/>
           </a:xfrm>
           <a:prstGeom prst="rect">
             <a:avLst/>
@@ -13802,18 +13156,18 @@
       </p:sp>
       <p:sp>
         <p:nvSpPr>
-          <p:cNvPr id="207" name="Shape 205"/>
-          <p:cNvSpPr/>
-          <p:nvPr/>
-        </p:nvSpPr>
-        <p:spPr>
-          <a:xfrm>
-            <a:off x="4106893" y="3282338"/>
-            <a:ext cx="340103" cy="129494"/>
+          <p:cNvPr id="189" name="Shape 187"/>
+          <p:cNvSpPr/>
+          <p:nvPr/>
+        </p:nvSpPr>
+        <p:spPr>
+          <a:xfrm>
+            <a:off x="4106893" y="2834739"/>
+            <a:ext cx="340103" cy="156012"/>
           </a:xfrm>
           <a:prstGeom prst="roundRect">
             <a:avLst>
-              <a:gd name="adj" fmla="val 28245"/>
+              <a:gd name="adj" fmla="val 23444"/>
             </a:avLst>
           </a:prstGeom>
           <a:solidFill>
@@ -13836,14 +13190,14 @@
       </p:sp>
       <p:sp>
         <p:nvSpPr>
-          <p:cNvPr id="208" name="Text 206"/>
-          <p:cNvSpPr/>
-          <p:nvPr/>
-        </p:nvSpPr>
-        <p:spPr>
-          <a:xfrm>
-            <a:off x="4106893" y="3282338"/>
-            <a:ext cx="340103" cy="129494"/>
+          <p:cNvPr id="190" name="Text 188"/>
+          <p:cNvSpPr/>
+          <p:nvPr/>
+        </p:nvSpPr>
+        <p:spPr>
+          <a:xfrm>
+            <a:off x="4106893" y="2834739"/>
+            <a:ext cx="340103" cy="156012"/>
           </a:xfrm>
           <a:prstGeom prst="rect">
             <a:avLst/>
@@ -13877,14 +13231,14 @@
       </p:sp>
       <p:sp>
         <p:nvSpPr>
-          <p:cNvPr id="209" name="Shape 207"/>
-          <p:cNvSpPr/>
-          <p:nvPr/>
-        </p:nvSpPr>
-        <p:spPr>
-          <a:xfrm>
-            <a:off x="365760" y="3458718"/>
-            <a:ext cx="11460175" cy="223266"/>
+          <p:cNvPr id="191" name="Shape 189"/>
+          <p:cNvSpPr/>
+          <p:nvPr/>
+        </p:nvSpPr>
+        <p:spPr>
+          <a:xfrm>
+            <a:off x="365760" y="3047238"/>
+            <a:ext cx="11460175" cy="268986"/>
           </a:xfrm>
           <a:prstGeom prst="rect">
             <a:avLst/>
@@ -13902,13 +13256,13 @@
       </p:sp>
       <p:sp>
         <p:nvSpPr>
-          <p:cNvPr id="210" name="Shape 208"/>
-          <p:cNvSpPr/>
-          <p:nvPr/>
-        </p:nvSpPr>
-        <p:spPr>
-          <a:xfrm>
-            <a:off x="11441887" y="3492627"/>
+          <p:cNvPr id="192" name="Shape 190"/>
+          <p:cNvSpPr/>
+          <p:nvPr/>
+        </p:nvSpPr>
+        <p:spPr>
+          <a:xfrm>
+            <a:off x="11441887" y="3104007"/>
             <a:ext cx="329184" cy="155448"/>
           </a:xfrm>
           <a:prstGeom prst="roundRect">
@@ -13929,14 +13283,14 @@
       </p:sp>
       <p:sp>
         <p:nvSpPr>
-          <p:cNvPr id="211" name="Text 209"/>
-          <p:cNvSpPr/>
-          <p:nvPr/>
-        </p:nvSpPr>
-        <p:spPr>
-          <a:xfrm>
-            <a:off x="11414455" y="3458718"/>
-            <a:ext cx="384048" cy="223266"/>
+          <p:cNvPr id="193" name="Text 191"/>
+          <p:cNvSpPr/>
+          <p:nvPr/>
+        </p:nvSpPr>
+        <p:spPr>
+          <a:xfrm>
+            <a:off x="11414455" y="3047238"/>
+            <a:ext cx="384048" cy="268986"/>
           </a:xfrm>
           <a:prstGeom prst="rect">
             <a:avLst/>
@@ -13970,14 +13324,14 @@
       </p:sp>
       <p:sp>
         <p:nvSpPr>
-          <p:cNvPr id="212" name="Text 210"/>
-          <p:cNvSpPr/>
-          <p:nvPr/>
-        </p:nvSpPr>
-        <p:spPr>
-          <a:xfrm>
-            <a:off x="8762695" y="3458718"/>
-            <a:ext cx="2441448" cy="223266"/>
+          <p:cNvPr id="194" name="Text 192"/>
+          <p:cNvSpPr/>
+          <p:nvPr/>
+        </p:nvSpPr>
+        <p:spPr>
+          <a:xfrm>
+            <a:off x="8762695" y="3047238"/>
+            <a:ext cx="2441448" cy="268986"/>
           </a:xfrm>
           <a:prstGeom prst="rect">
             <a:avLst/>
@@ -14011,14 +13365,14 @@
       </p:sp>
       <p:sp>
         <p:nvSpPr>
-          <p:cNvPr id="213" name="Text 211"/>
-          <p:cNvSpPr/>
-          <p:nvPr/>
-        </p:nvSpPr>
-        <p:spPr>
-          <a:xfrm>
-            <a:off x="7967167" y="3458718"/>
-            <a:ext cx="777240" cy="223266"/>
+          <p:cNvPr id="195" name="Text 193"/>
+          <p:cNvSpPr/>
+          <p:nvPr/>
+        </p:nvSpPr>
+        <p:spPr>
+          <a:xfrm>
+            <a:off x="7967167" y="3047238"/>
+            <a:ext cx="777240" cy="268986"/>
           </a:xfrm>
           <a:prstGeom prst="rect">
             <a:avLst/>
@@ -14052,14 +13406,14 @@
       </p:sp>
       <p:sp>
         <p:nvSpPr>
-          <p:cNvPr id="214" name="Text 212"/>
-          <p:cNvSpPr/>
-          <p:nvPr/>
-        </p:nvSpPr>
-        <p:spPr>
-          <a:xfrm>
-            <a:off x="7464247" y="3458718"/>
-            <a:ext cx="502920" cy="223266"/>
+          <p:cNvPr id="196" name="Text 194"/>
+          <p:cNvSpPr/>
+          <p:nvPr/>
+        </p:nvSpPr>
+        <p:spPr>
+          <a:xfrm>
+            <a:off x="7464247" y="3047238"/>
+            <a:ext cx="502920" cy="268986"/>
           </a:xfrm>
           <a:prstGeom prst="rect">
             <a:avLst/>
@@ -14093,14 +13447,14 @@
       </p:sp>
       <p:sp>
         <p:nvSpPr>
-          <p:cNvPr id="215" name="Text 213"/>
-          <p:cNvSpPr/>
-          <p:nvPr/>
-        </p:nvSpPr>
-        <p:spPr>
-          <a:xfrm>
-            <a:off x="6805879" y="3458718"/>
-            <a:ext cx="658368" cy="223266"/>
+          <p:cNvPr id="197" name="Text 195"/>
+          <p:cNvSpPr/>
+          <p:nvPr/>
+        </p:nvSpPr>
+        <p:spPr>
+          <a:xfrm>
+            <a:off x="6805879" y="3047238"/>
+            <a:ext cx="658368" cy="268986"/>
           </a:xfrm>
           <a:prstGeom prst="rect">
             <a:avLst/>
@@ -14134,14 +13488,14 @@
       </p:sp>
       <p:sp>
         <p:nvSpPr>
-          <p:cNvPr id="216" name="Text 214"/>
-          <p:cNvSpPr/>
-          <p:nvPr/>
-        </p:nvSpPr>
-        <p:spPr>
-          <a:xfrm>
-            <a:off x="6147511" y="3458718"/>
-            <a:ext cx="658368" cy="223266"/>
+          <p:cNvPr id="198" name="Text 196"/>
+          <p:cNvSpPr/>
+          <p:nvPr/>
+        </p:nvSpPr>
+        <p:spPr>
+          <a:xfrm>
+            <a:off x="6147511" y="3047238"/>
+            <a:ext cx="658368" cy="268986"/>
           </a:xfrm>
           <a:prstGeom prst="rect">
             <a:avLst/>
@@ -14175,18 +13529,18 @@
       </p:sp>
       <p:sp>
         <p:nvSpPr>
-          <p:cNvPr id="217" name="Shape 215"/>
-          <p:cNvSpPr/>
-          <p:nvPr/>
-        </p:nvSpPr>
-        <p:spPr>
-          <a:xfrm>
-            <a:off x="3936842" y="3505604"/>
-            <a:ext cx="340103" cy="129494"/>
+          <p:cNvPr id="199" name="Shape 197"/>
+          <p:cNvSpPr/>
+          <p:nvPr/>
+        </p:nvSpPr>
+        <p:spPr>
+          <a:xfrm>
+            <a:off x="3936842" y="3103725"/>
+            <a:ext cx="340103" cy="156012"/>
           </a:xfrm>
           <a:prstGeom prst="roundRect">
             <a:avLst>
-              <a:gd name="adj" fmla="val 28245"/>
+              <a:gd name="adj" fmla="val 23444"/>
             </a:avLst>
           </a:prstGeom>
           <a:solidFill>
@@ -14209,14 +13563,14 @@
       </p:sp>
       <p:sp>
         <p:nvSpPr>
-          <p:cNvPr id="218" name="Text 216"/>
-          <p:cNvSpPr/>
-          <p:nvPr/>
-        </p:nvSpPr>
-        <p:spPr>
-          <a:xfrm>
-            <a:off x="3936842" y="3505604"/>
-            <a:ext cx="340103" cy="129494"/>
+          <p:cNvPr id="200" name="Text 198"/>
+          <p:cNvSpPr/>
+          <p:nvPr/>
+        </p:nvSpPr>
+        <p:spPr>
+          <a:xfrm>
+            <a:off x="3936842" y="3103725"/>
+            <a:ext cx="340103" cy="156012"/>
           </a:xfrm>
           <a:prstGeom prst="rect">
             <a:avLst/>
@@ -14250,14 +13604,14 @@
       </p:sp>
       <p:sp>
         <p:nvSpPr>
-          <p:cNvPr id="219" name="Shape 217"/>
-          <p:cNvSpPr/>
-          <p:nvPr/>
-        </p:nvSpPr>
-        <p:spPr>
-          <a:xfrm>
-            <a:off x="365760" y="3681984"/>
-            <a:ext cx="11460175" cy="223266"/>
+          <p:cNvPr id="201" name="Shape 199"/>
+          <p:cNvSpPr/>
+          <p:nvPr/>
+        </p:nvSpPr>
+        <p:spPr>
+          <a:xfrm>
+            <a:off x="365760" y="3316224"/>
+            <a:ext cx="11460175" cy="268986"/>
           </a:xfrm>
           <a:prstGeom prst="rect">
             <a:avLst/>
@@ -14275,13 +13629,13 @@
       </p:sp>
       <p:sp>
         <p:nvSpPr>
-          <p:cNvPr id="220" name="Shape 218"/>
-          <p:cNvSpPr/>
-          <p:nvPr/>
-        </p:nvSpPr>
-        <p:spPr>
-          <a:xfrm>
-            <a:off x="11441887" y="3715893"/>
+          <p:cNvPr id="202" name="Shape 200"/>
+          <p:cNvSpPr/>
+          <p:nvPr/>
+        </p:nvSpPr>
+        <p:spPr>
+          <a:xfrm>
+            <a:off x="11441887" y="3372993"/>
             <a:ext cx="329184" cy="155448"/>
           </a:xfrm>
           <a:prstGeom prst="roundRect">
@@ -14302,14 +13656,14 @@
       </p:sp>
       <p:sp>
         <p:nvSpPr>
-          <p:cNvPr id="221" name="Text 219"/>
-          <p:cNvSpPr/>
-          <p:nvPr/>
-        </p:nvSpPr>
-        <p:spPr>
-          <a:xfrm>
-            <a:off x="11414455" y="3681984"/>
-            <a:ext cx="384048" cy="223266"/>
+          <p:cNvPr id="203" name="Text 201"/>
+          <p:cNvSpPr/>
+          <p:nvPr/>
+        </p:nvSpPr>
+        <p:spPr>
+          <a:xfrm>
+            <a:off x="11414455" y="3316224"/>
+            <a:ext cx="384048" cy="268986"/>
           </a:xfrm>
           <a:prstGeom prst="rect">
             <a:avLst/>
@@ -14343,14 +13697,14 @@
       </p:sp>
       <p:sp>
         <p:nvSpPr>
-          <p:cNvPr id="222" name="Text 220"/>
-          <p:cNvSpPr/>
-          <p:nvPr/>
-        </p:nvSpPr>
-        <p:spPr>
-          <a:xfrm>
-            <a:off x="8762695" y="3681984"/>
-            <a:ext cx="2441448" cy="223266"/>
+          <p:cNvPr id="204" name="Text 202"/>
+          <p:cNvSpPr/>
+          <p:nvPr/>
+        </p:nvSpPr>
+        <p:spPr>
+          <a:xfrm>
+            <a:off x="8762695" y="3316224"/>
+            <a:ext cx="2441448" cy="268986"/>
           </a:xfrm>
           <a:prstGeom prst="rect">
             <a:avLst/>
@@ -14384,14 +13738,14 @@
       </p:sp>
       <p:sp>
         <p:nvSpPr>
-          <p:cNvPr id="223" name="Text 221"/>
-          <p:cNvSpPr/>
-          <p:nvPr/>
-        </p:nvSpPr>
-        <p:spPr>
-          <a:xfrm>
-            <a:off x="7967167" y="3681984"/>
-            <a:ext cx="777240" cy="223266"/>
+          <p:cNvPr id="205" name="Text 203"/>
+          <p:cNvSpPr/>
+          <p:nvPr/>
+        </p:nvSpPr>
+        <p:spPr>
+          <a:xfrm>
+            <a:off x="7967167" y="3316224"/>
+            <a:ext cx="777240" cy="268986"/>
           </a:xfrm>
           <a:prstGeom prst="rect">
             <a:avLst/>
@@ -14425,14 +13779,14 @@
       </p:sp>
       <p:sp>
         <p:nvSpPr>
-          <p:cNvPr id="224" name="Text 222"/>
-          <p:cNvSpPr/>
-          <p:nvPr/>
-        </p:nvSpPr>
-        <p:spPr>
-          <a:xfrm>
-            <a:off x="7464247" y="3681984"/>
-            <a:ext cx="502920" cy="223266"/>
+          <p:cNvPr id="206" name="Text 204"/>
+          <p:cNvSpPr/>
+          <p:nvPr/>
+        </p:nvSpPr>
+        <p:spPr>
+          <a:xfrm>
+            <a:off x="7464247" y="3316224"/>
+            <a:ext cx="502920" cy="268986"/>
           </a:xfrm>
           <a:prstGeom prst="rect">
             <a:avLst/>
@@ -14466,14 +13820,14 @@
       </p:sp>
       <p:sp>
         <p:nvSpPr>
-          <p:cNvPr id="225" name="Text 223"/>
-          <p:cNvSpPr/>
-          <p:nvPr/>
-        </p:nvSpPr>
-        <p:spPr>
-          <a:xfrm>
-            <a:off x="6805879" y="3681984"/>
-            <a:ext cx="658368" cy="223266"/>
+          <p:cNvPr id="207" name="Text 205"/>
+          <p:cNvSpPr/>
+          <p:nvPr/>
+        </p:nvSpPr>
+        <p:spPr>
+          <a:xfrm>
+            <a:off x="6805879" y="3316224"/>
+            <a:ext cx="658368" cy="268986"/>
           </a:xfrm>
           <a:prstGeom prst="rect">
             <a:avLst/>
@@ -14507,14 +13861,14 @@
       </p:sp>
       <p:sp>
         <p:nvSpPr>
-          <p:cNvPr id="226" name="Text 224"/>
-          <p:cNvSpPr/>
-          <p:nvPr/>
-        </p:nvSpPr>
-        <p:spPr>
-          <a:xfrm>
-            <a:off x="6147511" y="3681984"/>
-            <a:ext cx="658368" cy="223266"/>
+          <p:cNvPr id="208" name="Text 206"/>
+          <p:cNvSpPr/>
+          <p:nvPr/>
+        </p:nvSpPr>
+        <p:spPr>
+          <a:xfrm>
+            <a:off x="6147511" y="3316224"/>
+            <a:ext cx="658368" cy="268986"/>
           </a:xfrm>
           <a:prstGeom prst="rect">
             <a:avLst/>
@@ -14548,18 +13902,18 @@
       </p:sp>
       <p:sp>
         <p:nvSpPr>
-          <p:cNvPr id="227" name="Shape 225"/>
-          <p:cNvSpPr/>
-          <p:nvPr/>
-        </p:nvSpPr>
-        <p:spPr>
-          <a:xfrm>
-            <a:off x="3936842" y="3728870"/>
-            <a:ext cx="170052" cy="129494"/>
+          <p:cNvPr id="209" name="Shape 207"/>
+          <p:cNvSpPr/>
+          <p:nvPr/>
+        </p:nvSpPr>
+        <p:spPr>
+          <a:xfrm>
+            <a:off x="3936842" y="3372711"/>
+            <a:ext cx="170052" cy="156012"/>
           </a:xfrm>
           <a:prstGeom prst="roundRect">
             <a:avLst>
-              <a:gd name="adj" fmla="val 28245"/>
+              <a:gd name="adj" fmla="val 23444"/>
             </a:avLst>
           </a:prstGeom>
           <a:solidFill>
@@ -14582,14 +13936,14 @@
       </p:sp>
       <p:sp>
         <p:nvSpPr>
-          <p:cNvPr id="228" name="Shape 226"/>
-          <p:cNvSpPr/>
-          <p:nvPr/>
-        </p:nvSpPr>
-        <p:spPr>
-          <a:xfrm>
-            <a:off x="365760" y="3905250"/>
-            <a:ext cx="11460175" cy="223266"/>
+          <p:cNvPr id="210" name="Shape 208"/>
+          <p:cNvSpPr/>
+          <p:nvPr/>
+        </p:nvSpPr>
+        <p:spPr>
+          <a:xfrm>
+            <a:off x="365760" y="3585210"/>
+            <a:ext cx="11460175" cy="268986"/>
           </a:xfrm>
           <a:prstGeom prst="rect">
             <a:avLst/>
@@ -14607,13 +13961,13 @@
       </p:sp>
       <p:sp>
         <p:nvSpPr>
-          <p:cNvPr id="229" name="Shape 227"/>
-          <p:cNvSpPr/>
-          <p:nvPr/>
-        </p:nvSpPr>
-        <p:spPr>
-          <a:xfrm>
-            <a:off x="11441887" y="3939159"/>
+          <p:cNvPr id="211" name="Shape 209"/>
+          <p:cNvSpPr/>
+          <p:nvPr/>
+        </p:nvSpPr>
+        <p:spPr>
+          <a:xfrm>
+            <a:off x="11441887" y="3641979"/>
             <a:ext cx="329184" cy="155448"/>
           </a:xfrm>
           <a:prstGeom prst="roundRect">
@@ -14634,14 +13988,14 @@
       </p:sp>
       <p:sp>
         <p:nvSpPr>
-          <p:cNvPr id="230" name="Text 228"/>
-          <p:cNvSpPr/>
-          <p:nvPr/>
-        </p:nvSpPr>
-        <p:spPr>
-          <a:xfrm>
-            <a:off x="11414455" y="3905250"/>
-            <a:ext cx="384048" cy="223266"/>
+          <p:cNvPr id="212" name="Text 210"/>
+          <p:cNvSpPr/>
+          <p:nvPr/>
+        </p:nvSpPr>
+        <p:spPr>
+          <a:xfrm>
+            <a:off x="11414455" y="3585210"/>
+            <a:ext cx="384048" cy="268986"/>
           </a:xfrm>
           <a:prstGeom prst="rect">
             <a:avLst/>
@@ -14675,14 +14029,14 @@
       </p:sp>
       <p:sp>
         <p:nvSpPr>
-          <p:cNvPr id="231" name="Text 229"/>
-          <p:cNvSpPr/>
-          <p:nvPr/>
-        </p:nvSpPr>
-        <p:spPr>
-          <a:xfrm>
-            <a:off x="8762695" y="3905250"/>
-            <a:ext cx="2441448" cy="223266"/>
+          <p:cNvPr id="213" name="Text 211"/>
+          <p:cNvSpPr/>
+          <p:nvPr/>
+        </p:nvSpPr>
+        <p:spPr>
+          <a:xfrm>
+            <a:off x="8762695" y="3585210"/>
+            <a:ext cx="2441448" cy="268986"/>
           </a:xfrm>
           <a:prstGeom prst="rect">
             <a:avLst/>
@@ -14716,14 +14070,14 @@
       </p:sp>
       <p:sp>
         <p:nvSpPr>
-          <p:cNvPr id="232" name="Text 230"/>
-          <p:cNvSpPr/>
-          <p:nvPr/>
-        </p:nvSpPr>
-        <p:spPr>
-          <a:xfrm>
-            <a:off x="7967167" y="3905250"/>
-            <a:ext cx="777240" cy="223266"/>
+          <p:cNvPr id="214" name="Text 212"/>
+          <p:cNvSpPr/>
+          <p:nvPr/>
+        </p:nvSpPr>
+        <p:spPr>
+          <a:xfrm>
+            <a:off x="7967167" y="3585210"/>
+            <a:ext cx="777240" cy="268986"/>
           </a:xfrm>
           <a:prstGeom prst="rect">
             <a:avLst/>
@@ -14757,14 +14111,14 @@
       </p:sp>
       <p:sp>
         <p:nvSpPr>
-          <p:cNvPr id="233" name="Text 231"/>
-          <p:cNvSpPr/>
-          <p:nvPr/>
-        </p:nvSpPr>
-        <p:spPr>
-          <a:xfrm>
-            <a:off x="7464247" y="3905250"/>
-            <a:ext cx="502920" cy="223266"/>
+          <p:cNvPr id="215" name="Text 213"/>
+          <p:cNvSpPr/>
+          <p:nvPr/>
+        </p:nvSpPr>
+        <p:spPr>
+          <a:xfrm>
+            <a:off x="7464247" y="3585210"/>
+            <a:ext cx="502920" cy="268986"/>
           </a:xfrm>
           <a:prstGeom prst="rect">
             <a:avLst/>
@@ -14798,14 +14152,14 @@
       </p:sp>
       <p:sp>
         <p:nvSpPr>
-          <p:cNvPr id="234" name="Text 232"/>
-          <p:cNvSpPr/>
-          <p:nvPr/>
-        </p:nvSpPr>
-        <p:spPr>
-          <a:xfrm>
-            <a:off x="6805879" y="3905250"/>
-            <a:ext cx="658368" cy="223266"/>
+          <p:cNvPr id="216" name="Text 214"/>
+          <p:cNvSpPr/>
+          <p:nvPr/>
+        </p:nvSpPr>
+        <p:spPr>
+          <a:xfrm>
+            <a:off x="6805879" y="3585210"/>
+            <a:ext cx="658368" cy="268986"/>
           </a:xfrm>
           <a:prstGeom prst="rect">
             <a:avLst/>
@@ -14839,14 +14193,14 @@
       </p:sp>
       <p:sp>
         <p:nvSpPr>
-          <p:cNvPr id="235" name="Text 233"/>
-          <p:cNvSpPr/>
-          <p:nvPr/>
-        </p:nvSpPr>
-        <p:spPr>
-          <a:xfrm>
-            <a:off x="6147511" y="3905250"/>
-            <a:ext cx="658368" cy="223266"/>
+          <p:cNvPr id="217" name="Text 215"/>
+          <p:cNvSpPr/>
+          <p:nvPr/>
+        </p:nvSpPr>
+        <p:spPr>
+          <a:xfrm>
+            <a:off x="6147511" y="3585210"/>
+            <a:ext cx="658368" cy="268986"/>
           </a:xfrm>
           <a:prstGeom prst="rect">
             <a:avLst/>
@@ -14880,18 +14234,18 @@
       </p:sp>
       <p:sp>
         <p:nvSpPr>
-          <p:cNvPr id="236" name="Shape 234"/>
-          <p:cNvSpPr/>
-          <p:nvPr/>
-        </p:nvSpPr>
-        <p:spPr>
-          <a:xfrm>
-            <a:off x="3936842" y="3952136"/>
-            <a:ext cx="170052" cy="129494"/>
+          <p:cNvPr id="218" name="Shape 216"/>
+          <p:cNvSpPr/>
+          <p:nvPr/>
+        </p:nvSpPr>
+        <p:spPr>
+          <a:xfrm>
+            <a:off x="3936842" y="3641697"/>
+            <a:ext cx="170052" cy="156012"/>
           </a:xfrm>
           <a:prstGeom prst="roundRect">
             <a:avLst>
-              <a:gd name="adj" fmla="val 28245"/>
+              <a:gd name="adj" fmla="val 23444"/>
             </a:avLst>
           </a:prstGeom>
           <a:solidFill>
@@ -14914,14 +14268,14 @@
       </p:sp>
       <p:sp>
         <p:nvSpPr>
-          <p:cNvPr id="237" name="Shape 235"/>
-          <p:cNvSpPr/>
-          <p:nvPr/>
-        </p:nvSpPr>
-        <p:spPr>
-          <a:xfrm>
-            <a:off x="365760" y="4128516"/>
-            <a:ext cx="11460175" cy="223266"/>
+          <p:cNvPr id="219" name="Shape 217"/>
+          <p:cNvSpPr/>
+          <p:nvPr/>
+        </p:nvSpPr>
+        <p:spPr>
+          <a:xfrm>
+            <a:off x="365760" y="3854196"/>
+            <a:ext cx="11460175" cy="268986"/>
           </a:xfrm>
           <a:prstGeom prst="rect">
             <a:avLst/>
@@ -14939,13 +14293,13 @@
       </p:sp>
       <p:sp>
         <p:nvSpPr>
-          <p:cNvPr id="238" name="Shape 236"/>
-          <p:cNvSpPr/>
-          <p:nvPr/>
-        </p:nvSpPr>
-        <p:spPr>
-          <a:xfrm>
-            <a:off x="11515039" y="4121277"/>
+          <p:cNvPr id="220" name="Shape 218"/>
+          <p:cNvSpPr/>
+          <p:nvPr/>
+        </p:nvSpPr>
+        <p:spPr>
+          <a:xfrm>
+            <a:off x="11515039" y="3869817"/>
             <a:ext cx="237744" cy="237744"/>
           </a:xfrm>
           <a:prstGeom prst="ellipse">
@@ -14964,14 +14318,14 @@
       </p:sp>
       <p:sp>
         <p:nvSpPr>
-          <p:cNvPr id="239" name="Text 237"/>
-          <p:cNvSpPr/>
-          <p:nvPr/>
-        </p:nvSpPr>
-        <p:spPr>
-          <a:xfrm>
-            <a:off x="11441887" y="4128516"/>
-            <a:ext cx="384048" cy="223266"/>
+          <p:cNvPr id="221" name="Text 219"/>
+          <p:cNvSpPr/>
+          <p:nvPr/>
+        </p:nvSpPr>
+        <p:spPr>
+          <a:xfrm>
+            <a:off x="11441887" y="3854196"/>
+            <a:ext cx="384048" cy="268986"/>
           </a:xfrm>
           <a:prstGeom prst="rect">
             <a:avLst/>
@@ -15005,14 +14359,14 @@
       </p:sp>
       <p:sp>
         <p:nvSpPr>
-          <p:cNvPr id="240" name="Text 238"/>
-          <p:cNvSpPr/>
-          <p:nvPr/>
-        </p:nvSpPr>
-        <p:spPr>
-          <a:xfrm>
-            <a:off x="8762695" y="4128516"/>
-            <a:ext cx="2606040" cy="223266"/>
+          <p:cNvPr id="222" name="Text 220"/>
+          <p:cNvSpPr/>
+          <p:nvPr/>
+        </p:nvSpPr>
+        <p:spPr>
+          <a:xfrm>
+            <a:off x="8762695" y="3854196"/>
+            <a:ext cx="2606040" cy="268986"/>
           </a:xfrm>
           <a:prstGeom prst="rect">
             <a:avLst/>
@@ -15046,14 +14400,14 @@
       </p:sp>
       <p:sp>
         <p:nvSpPr>
-          <p:cNvPr id="241" name="Text 239"/>
-          <p:cNvSpPr/>
-          <p:nvPr/>
-        </p:nvSpPr>
-        <p:spPr>
-          <a:xfrm>
-            <a:off x="7967167" y="4128516"/>
-            <a:ext cx="777240" cy="223266"/>
+          <p:cNvPr id="223" name="Text 221"/>
+          <p:cNvSpPr/>
+          <p:nvPr/>
+        </p:nvSpPr>
+        <p:spPr>
+          <a:xfrm>
+            <a:off x="7967167" y="3854196"/>
+            <a:ext cx="777240" cy="268986"/>
           </a:xfrm>
           <a:prstGeom prst="rect">
             <a:avLst/>
@@ -15087,14 +14441,14 @@
       </p:sp>
       <p:sp>
         <p:nvSpPr>
-          <p:cNvPr id="242" name="Text 240"/>
-          <p:cNvSpPr/>
-          <p:nvPr/>
-        </p:nvSpPr>
-        <p:spPr>
-          <a:xfrm>
-            <a:off x="7464247" y="4128516"/>
-            <a:ext cx="502920" cy="223266"/>
+          <p:cNvPr id="224" name="Text 222"/>
+          <p:cNvSpPr/>
+          <p:nvPr/>
+        </p:nvSpPr>
+        <p:spPr>
+          <a:xfrm>
+            <a:off x="7464247" y="3854196"/>
+            <a:ext cx="502920" cy="268986"/>
           </a:xfrm>
           <a:prstGeom prst="rect">
             <a:avLst/>
@@ -15128,14 +14482,14 @@
       </p:sp>
       <p:sp>
         <p:nvSpPr>
-          <p:cNvPr id="243" name="Text 241"/>
-          <p:cNvSpPr/>
-          <p:nvPr/>
-        </p:nvSpPr>
-        <p:spPr>
-          <a:xfrm>
-            <a:off x="6805879" y="4128516"/>
-            <a:ext cx="658368" cy="223266"/>
+          <p:cNvPr id="225" name="Text 223"/>
+          <p:cNvSpPr/>
+          <p:nvPr/>
+        </p:nvSpPr>
+        <p:spPr>
+          <a:xfrm>
+            <a:off x="6805879" y="3854196"/>
+            <a:ext cx="658368" cy="268986"/>
           </a:xfrm>
           <a:prstGeom prst="rect">
             <a:avLst/>
@@ -15169,14 +14523,14 @@
       </p:sp>
       <p:sp>
         <p:nvSpPr>
-          <p:cNvPr id="244" name="Text 242"/>
-          <p:cNvSpPr/>
-          <p:nvPr/>
-        </p:nvSpPr>
-        <p:spPr>
-          <a:xfrm>
-            <a:off x="6147511" y="4128516"/>
-            <a:ext cx="658368" cy="223266"/>
+          <p:cNvPr id="226" name="Text 224"/>
+          <p:cNvSpPr/>
+          <p:nvPr/>
+        </p:nvSpPr>
+        <p:spPr>
+          <a:xfrm>
+            <a:off x="6147511" y="3854196"/>
+            <a:ext cx="658368" cy="268986"/>
           </a:xfrm>
           <a:prstGeom prst="rect">
             <a:avLst/>
@@ -15210,18 +14564,18 @@
       </p:sp>
       <p:sp>
         <p:nvSpPr>
-          <p:cNvPr id="245" name="Shape 243"/>
-          <p:cNvSpPr/>
-          <p:nvPr/>
-        </p:nvSpPr>
-        <p:spPr>
-          <a:xfrm>
-            <a:off x="3766790" y="4175402"/>
-            <a:ext cx="170052" cy="129494"/>
+          <p:cNvPr id="227" name="Shape 225"/>
+          <p:cNvSpPr/>
+          <p:nvPr/>
+        </p:nvSpPr>
+        <p:spPr>
+          <a:xfrm>
+            <a:off x="3766790" y="3910683"/>
+            <a:ext cx="170052" cy="156012"/>
           </a:xfrm>
           <a:prstGeom prst="roundRect">
             <a:avLst>
-              <a:gd name="adj" fmla="val 28245"/>
+              <a:gd name="adj" fmla="val 23444"/>
             </a:avLst>
           </a:prstGeom>
           <a:solidFill>
@@ -15244,14 +14598,14 @@
       </p:sp>
       <p:sp>
         <p:nvSpPr>
-          <p:cNvPr id="246" name="Shape 244"/>
-          <p:cNvSpPr/>
-          <p:nvPr/>
-        </p:nvSpPr>
-        <p:spPr>
-          <a:xfrm>
-            <a:off x="365760" y="4351782"/>
-            <a:ext cx="11460175" cy="223266"/>
+          <p:cNvPr id="228" name="Shape 226"/>
+          <p:cNvSpPr/>
+          <p:nvPr/>
+        </p:nvSpPr>
+        <p:spPr>
+          <a:xfrm>
+            <a:off x="365760" y="4123182"/>
+            <a:ext cx="11460175" cy="268986"/>
           </a:xfrm>
           <a:prstGeom prst="rect">
             <a:avLst/>
@@ -15269,13 +14623,13 @@
       </p:sp>
       <p:sp>
         <p:nvSpPr>
-          <p:cNvPr id="247" name="Shape 245"/>
-          <p:cNvSpPr/>
-          <p:nvPr/>
-        </p:nvSpPr>
-        <p:spPr>
-          <a:xfrm>
-            <a:off x="11515039" y="4344543"/>
+          <p:cNvPr id="229" name="Shape 227"/>
+          <p:cNvSpPr/>
+          <p:nvPr/>
+        </p:nvSpPr>
+        <p:spPr>
+          <a:xfrm>
+            <a:off x="11515039" y="4138803"/>
             <a:ext cx="237744" cy="237744"/>
           </a:xfrm>
           <a:prstGeom prst="ellipse">
@@ -15294,14 +14648,14 @@
       </p:sp>
       <p:sp>
         <p:nvSpPr>
-          <p:cNvPr id="248" name="Text 246"/>
-          <p:cNvSpPr/>
-          <p:nvPr/>
-        </p:nvSpPr>
-        <p:spPr>
-          <a:xfrm>
-            <a:off x="11441887" y="4351782"/>
-            <a:ext cx="384048" cy="223266"/>
+          <p:cNvPr id="230" name="Text 228"/>
+          <p:cNvSpPr/>
+          <p:nvPr/>
+        </p:nvSpPr>
+        <p:spPr>
+          <a:xfrm>
+            <a:off x="11441887" y="4123182"/>
+            <a:ext cx="384048" cy="268986"/>
           </a:xfrm>
           <a:prstGeom prst="rect">
             <a:avLst/>
@@ -15335,14 +14689,14 @@
       </p:sp>
       <p:sp>
         <p:nvSpPr>
-          <p:cNvPr id="249" name="Text 247"/>
-          <p:cNvSpPr/>
-          <p:nvPr/>
-        </p:nvSpPr>
-        <p:spPr>
-          <a:xfrm>
-            <a:off x="8762695" y="4351782"/>
-            <a:ext cx="2606040" cy="223266"/>
+          <p:cNvPr id="231" name="Text 229"/>
+          <p:cNvSpPr/>
+          <p:nvPr/>
+        </p:nvSpPr>
+        <p:spPr>
+          <a:xfrm>
+            <a:off x="8762695" y="4123182"/>
+            <a:ext cx="2606040" cy="268986"/>
           </a:xfrm>
           <a:prstGeom prst="rect">
             <a:avLst/>
@@ -15376,14 +14730,14 @@
       </p:sp>
       <p:sp>
         <p:nvSpPr>
-          <p:cNvPr id="250" name="Text 248"/>
-          <p:cNvSpPr/>
-          <p:nvPr/>
-        </p:nvSpPr>
-        <p:spPr>
-          <a:xfrm>
-            <a:off x="7967167" y="4351782"/>
-            <a:ext cx="777240" cy="223266"/>
+          <p:cNvPr id="232" name="Text 230"/>
+          <p:cNvSpPr/>
+          <p:nvPr/>
+        </p:nvSpPr>
+        <p:spPr>
+          <a:xfrm>
+            <a:off x="7967167" y="4123182"/>
+            <a:ext cx="777240" cy="268986"/>
           </a:xfrm>
           <a:prstGeom prst="rect">
             <a:avLst/>
@@ -15417,14 +14771,14 @@
       </p:sp>
       <p:sp>
         <p:nvSpPr>
-          <p:cNvPr id="251" name="Text 249"/>
-          <p:cNvSpPr/>
-          <p:nvPr/>
-        </p:nvSpPr>
-        <p:spPr>
-          <a:xfrm>
-            <a:off x="7464247" y="4351782"/>
-            <a:ext cx="502920" cy="223266"/>
+          <p:cNvPr id="233" name="Text 231"/>
+          <p:cNvSpPr/>
+          <p:nvPr/>
+        </p:nvSpPr>
+        <p:spPr>
+          <a:xfrm>
+            <a:off x="7464247" y="4123182"/>
+            <a:ext cx="502920" cy="268986"/>
           </a:xfrm>
           <a:prstGeom prst="rect">
             <a:avLst/>
@@ -15458,14 +14812,14 @@
       </p:sp>
       <p:sp>
         <p:nvSpPr>
-          <p:cNvPr id="252" name="Text 250"/>
-          <p:cNvSpPr/>
-          <p:nvPr/>
-        </p:nvSpPr>
-        <p:spPr>
-          <a:xfrm>
-            <a:off x="6805879" y="4351782"/>
-            <a:ext cx="658368" cy="223266"/>
+          <p:cNvPr id="234" name="Text 232"/>
+          <p:cNvSpPr/>
+          <p:nvPr/>
+        </p:nvSpPr>
+        <p:spPr>
+          <a:xfrm>
+            <a:off x="6805879" y="4123182"/>
+            <a:ext cx="658368" cy="268986"/>
           </a:xfrm>
           <a:prstGeom prst="rect">
             <a:avLst/>
@@ -15499,14 +14853,14 @@
       </p:sp>
       <p:sp>
         <p:nvSpPr>
-          <p:cNvPr id="253" name="Text 251"/>
-          <p:cNvSpPr/>
-          <p:nvPr/>
-        </p:nvSpPr>
-        <p:spPr>
-          <a:xfrm>
-            <a:off x="6147511" y="4351782"/>
-            <a:ext cx="658368" cy="223266"/>
+          <p:cNvPr id="235" name="Text 233"/>
+          <p:cNvSpPr/>
+          <p:nvPr/>
+        </p:nvSpPr>
+        <p:spPr>
+          <a:xfrm>
+            <a:off x="6147511" y="4123182"/>
+            <a:ext cx="658368" cy="268986"/>
           </a:xfrm>
           <a:prstGeom prst="rect">
             <a:avLst/>
@@ -15540,18 +14894,18 @@
       </p:sp>
       <p:sp>
         <p:nvSpPr>
-          <p:cNvPr id="254" name="Shape 252"/>
-          <p:cNvSpPr/>
-          <p:nvPr/>
-        </p:nvSpPr>
-        <p:spPr>
-          <a:xfrm>
-            <a:off x="3596739" y="4398668"/>
-            <a:ext cx="340103" cy="129494"/>
+          <p:cNvPr id="236" name="Shape 234"/>
+          <p:cNvSpPr/>
+          <p:nvPr/>
+        </p:nvSpPr>
+        <p:spPr>
+          <a:xfrm>
+            <a:off x="3596739" y="4179669"/>
+            <a:ext cx="340103" cy="156012"/>
           </a:xfrm>
           <a:prstGeom prst="roundRect">
             <a:avLst>
-              <a:gd name="adj" fmla="val 28245"/>
+              <a:gd name="adj" fmla="val 23444"/>
             </a:avLst>
           </a:prstGeom>
           <a:solidFill>
@@ -15574,14 +14928,14 @@
       </p:sp>
       <p:sp>
         <p:nvSpPr>
-          <p:cNvPr id="255" name="Text 253"/>
-          <p:cNvSpPr/>
-          <p:nvPr/>
-        </p:nvSpPr>
-        <p:spPr>
-          <a:xfrm>
-            <a:off x="3596739" y="4398668"/>
-            <a:ext cx="340103" cy="129494"/>
+          <p:cNvPr id="237" name="Text 235"/>
+          <p:cNvSpPr/>
+          <p:nvPr/>
+        </p:nvSpPr>
+        <p:spPr>
+          <a:xfrm>
+            <a:off x="3596739" y="4179669"/>
+            <a:ext cx="340103" cy="156012"/>
           </a:xfrm>
           <a:prstGeom prst="rect">
             <a:avLst/>
@@ -15615,14 +14969,14 @@
       </p:sp>
       <p:sp>
         <p:nvSpPr>
-          <p:cNvPr id="256" name="Shape 254"/>
-          <p:cNvSpPr/>
-          <p:nvPr/>
-        </p:nvSpPr>
-        <p:spPr>
-          <a:xfrm>
-            <a:off x="365760" y="4575048"/>
-            <a:ext cx="11460175" cy="223266"/>
+          <p:cNvPr id="238" name="Shape 236"/>
+          <p:cNvSpPr/>
+          <p:nvPr/>
+        </p:nvSpPr>
+        <p:spPr>
+          <a:xfrm>
+            <a:off x="365760" y="4392168"/>
+            <a:ext cx="11460175" cy="268986"/>
           </a:xfrm>
           <a:prstGeom prst="rect">
             <a:avLst/>
@@ -15640,13 +14994,13 @@
       </p:sp>
       <p:sp>
         <p:nvSpPr>
-          <p:cNvPr id="257" name="Shape 255"/>
-          <p:cNvSpPr/>
-          <p:nvPr/>
-        </p:nvSpPr>
-        <p:spPr>
-          <a:xfrm>
-            <a:off x="11515039" y="4567809"/>
+          <p:cNvPr id="239" name="Shape 237"/>
+          <p:cNvSpPr/>
+          <p:nvPr/>
+        </p:nvSpPr>
+        <p:spPr>
+          <a:xfrm>
+            <a:off x="11515039" y="4407789"/>
             <a:ext cx="237744" cy="237744"/>
           </a:xfrm>
           <a:prstGeom prst="ellipse">
@@ -15665,14 +15019,14 @@
       </p:sp>
       <p:sp>
         <p:nvSpPr>
-          <p:cNvPr id="258" name="Text 256"/>
-          <p:cNvSpPr/>
-          <p:nvPr/>
-        </p:nvSpPr>
-        <p:spPr>
-          <a:xfrm>
-            <a:off x="11441887" y="4575048"/>
-            <a:ext cx="384048" cy="223266"/>
+          <p:cNvPr id="240" name="Text 238"/>
+          <p:cNvSpPr/>
+          <p:nvPr/>
+        </p:nvSpPr>
+        <p:spPr>
+          <a:xfrm>
+            <a:off x="11441887" y="4392168"/>
+            <a:ext cx="384048" cy="268986"/>
           </a:xfrm>
           <a:prstGeom prst="rect">
             <a:avLst/>
@@ -15706,14 +15060,14 @@
       </p:sp>
       <p:sp>
         <p:nvSpPr>
-          <p:cNvPr id="259" name="Text 257"/>
-          <p:cNvSpPr/>
-          <p:nvPr/>
-        </p:nvSpPr>
-        <p:spPr>
-          <a:xfrm>
-            <a:off x="8762695" y="4575048"/>
-            <a:ext cx="2606040" cy="223266"/>
+          <p:cNvPr id="241" name="Text 239"/>
+          <p:cNvSpPr/>
+          <p:nvPr/>
+        </p:nvSpPr>
+        <p:spPr>
+          <a:xfrm>
+            <a:off x="8762695" y="4392168"/>
+            <a:ext cx="2606040" cy="268986"/>
           </a:xfrm>
           <a:prstGeom prst="rect">
             <a:avLst/>
@@ -15747,14 +15101,14 @@
       </p:sp>
       <p:sp>
         <p:nvSpPr>
-          <p:cNvPr id="260" name="Text 258"/>
-          <p:cNvSpPr/>
-          <p:nvPr/>
-        </p:nvSpPr>
-        <p:spPr>
-          <a:xfrm>
-            <a:off x="7967167" y="4575048"/>
-            <a:ext cx="777240" cy="223266"/>
+          <p:cNvPr id="242" name="Text 240"/>
+          <p:cNvSpPr/>
+          <p:nvPr/>
+        </p:nvSpPr>
+        <p:spPr>
+          <a:xfrm>
+            <a:off x="7967167" y="4392168"/>
+            <a:ext cx="777240" cy="268986"/>
           </a:xfrm>
           <a:prstGeom prst="rect">
             <a:avLst/>
@@ -15788,14 +15142,14 @@
       </p:sp>
       <p:sp>
         <p:nvSpPr>
-          <p:cNvPr id="261" name="Text 259"/>
-          <p:cNvSpPr/>
-          <p:nvPr/>
-        </p:nvSpPr>
-        <p:spPr>
-          <a:xfrm>
-            <a:off x="7464247" y="4575048"/>
-            <a:ext cx="502920" cy="223266"/>
+          <p:cNvPr id="243" name="Text 241"/>
+          <p:cNvSpPr/>
+          <p:nvPr/>
+        </p:nvSpPr>
+        <p:spPr>
+          <a:xfrm>
+            <a:off x="7464247" y="4392168"/>
+            <a:ext cx="502920" cy="268986"/>
           </a:xfrm>
           <a:prstGeom prst="rect">
             <a:avLst/>
@@ -15829,14 +15183,14 @@
       </p:sp>
       <p:sp>
         <p:nvSpPr>
-          <p:cNvPr id="262" name="Text 260"/>
-          <p:cNvSpPr/>
-          <p:nvPr/>
-        </p:nvSpPr>
-        <p:spPr>
-          <a:xfrm>
-            <a:off x="6805879" y="4575048"/>
-            <a:ext cx="658368" cy="223266"/>
+          <p:cNvPr id="244" name="Text 242"/>
+          <p:cNvSpPr/>
+          <p:nvPr/>
+        </p:nvSpPr>
+        <p:spPr>
+          <a:xfrm>
+            <a:off x="6805879" y="4392168"/>
+            <a:ext cx="658368" cy="268986"/>
           </a:xfrm>
           <a:prstGeom prst="rect">
             <a:avLst/>
@@ -15870,14 +15224,14 @@
       </p:sp>
       <p:sp>
         <p:nvSpPr>
-          <p:cNvPr id="263" name="Text 261"/>
-          <p:cNvSpPr/>
-          <p:nvPr/>
-        </p:nvSpPr>
-        <p:spPr>
-          <a:xfrm>
-            <a:off x="6147511" y="4575048"/>
-            <a:ext cx="658368" cy="223266"/>
+          <p:cNvPr id="245" name="Text 243"/>
+          <p:cNvSpPr/>
+          <p:nvPr/>
+        </p:nvSpPr>
+        <p:spPr>
+          <a:xfrm>
+            <a:off x="6147511" y="4392168"/>
+            <a:ext cx="658368" cy="268986"/>
           </a:xfrm>
           <a:prstGeom prst="rect">
             <a:avLst/>
@@ -15911,18 +15265,18 @@
       </p:sp>
       <p:sp>
         <p:nvSpPr>
-          <p:cNvPr id="264" name="Shape 262"/>
-          <p:cNvSpPr/>
-          <p:nvPr/>
-        </p:nvSpPr>
-        <p:spPr>
-          <a:xfrm>
-            <a:off x="2576430" y="4621934"/>
-            <a:ext cx="1020309" cy="129494"/>
+          <p:cNvPr id="246" name="Shape 244"/>
+          <p:cNvSpPr/>
+          <p:nvPr/>
+        </p:nvSpPr>
+        <p:spPr>
+          <a:xfrm>
+            <a:off x="2576430" y="4448655"/>
+            <a:ext cx="1020309" cy="156012"/>
           </a:xfrm>
           <a:prstGeom prst="roundRect">
             <a:avLst>
-              <a:gd name="adj" fmla="val 28245"/>
+              <a:gd name="adj" fmla="val 23444"/>
             </a:avLst>
           </a:prstGeom>
           <a:solidFill>
@@ -15945,14 +15299,14 @@
       </p:sp>
       <p:sp>
         <p:nvSpPr>
-          <p:cNvPr id="265" name="Text 263"/>
-          <p:cNvSpPr/>
-          <p:nvPr/>
-        </p:nvSpPr>
-        <p:spPr>
-          <a:xfrm>
-            <a:off x="2576430" y="4621934"/>
-            <a:ext cx="1020309" cy="129494"/>
+          <p:cNvPr id="247" name="Text 245"/>
+          <p:cNvSpPr/>
+          <p:nvPr/>
+        </p:nvSpPr>
+        <p:spPr>
+          <a:xfrm>
+            <a:off x="2576430" y="4448655"/>
+            <a:ext cx="1020309" cy="156012"/>
           </a:xfrm>
           <a:prstGeom prst="rect">
             <a:avLst/>
@@ -15986,14 +15340,14 @@
       </p:sp>
       <p:sp>
         <p:nvSpPr>
-          <p:cNvPr id="266" name="Shape 264"/>
-          <p:cNvSpPr/>
-          <p:nvPr/>
-        </p:nvSpPr>
-        <p:spPr>
-          <a:xfrm>
-            <a:off x="365760" y="4798314"/>
-            <a:ext cx="11460175" cy="223266"/>
+          <p:cNvPr id="248" name="Shape 246"/>
+          <p:cNvSpPr/>
+          <p:nvPr/>
+        </p:nvSpPr>
+        <p:spPr>
+          <a:xfrm>
+            <a:off x="365760" y="4661154"/>
+            <a:ext cx="11460175" cy="268986"/>
           </a:xfrm>
           <a:prstGeom prst="rect">
             <a:avLst/>
@@ -16011,13 +15365,13 @@
       </p:sp>
       <p:sp>
         <p:nvSpPr>
-          <p:cNvPr id="267" name="Shape 265"/>
-          <p:cNvSpPr/>
-          <p:nvPr/>
-        </p:nvSpPr>
-        <p:spPr>
-          <a:xfrm>
-            <a:off x="11515039" y="4791075"/>
+          <p:cNvPr id="249" name="Shape 247"/>
+          <p:cNvSpPr/>
+          <p:nvPr/>
+        </p:nvSpPr>
+        <p:spPr>
+          <a:xfrm>
+            <a:off x="11515039" y="4676775"/>
             <a:ext cx="237744" cy="237744"/>
           </a:xfrm>
           <a:prstGeom prst="ellipse">
@@ -16036,14 +15390,14 @@
       </p:sp>
       <p:sp>
         <p:nvSpPr>
-          <p:cNvPr id="268" name="Text 266"/>
-          <p:cNvSpPr/>
-          <p:nvPr/>
-        </p:nvSpPr>
-        <p:spPr>
-          <a:xfrm>
-            <a:off x="11441887" y="4798314"/>
-            <a:ext cx="384048" cy="223266"/>
+          <p:cNvPr id="250" name="Text 248"/>
+          <p:cNvSpPr/>
+          <p:nvPr/>
+        </p:nvSpPr>
+        <p:spPr>
+          <a:xfrm>
+            <a:off x="11441887" y="4661154"/>
+            <a:ext cx="384048" cy="268986"/>
           </a:xfrm>
           <a:prstGeom prst="rect">
             <a:avLst/>
@@ -16077,14 +15431,14 @@
       </p:sp>
       <p:sp>
         <p:nvSpPr>
-          <p:cNvPr id="269" name="Text 267"/>
-          <p:cNvSpPr/>
-          <p:nvPr/>
-        </p:nvSpPr>
-        <p:spPr>
-          <a:xfrm>
-            <a:off x="8762695" y="4798314"/>
-            <a:ext cx="2606040" cy="223266"/>
+          <p:cNvPr id="251" name="Text 249"/>
+          <p:cNvSpPr/>
+          <p:nvPr/>
+        </p:nvSpPr>
+        <p:spPr>
+          <a:xfrm>
+            <a:off x="8762695" y="4661154"/>
+            <a:ext cx="2606040" cy="268986"/>
           </a:xfrm>
           <a:prstGeom prst="rect">
             <a:avLst/>
@@ -16118,14 +15472,14 @@
       </p:sp>
       <p:sp>
         <p:nvSpPr>
-          <p:cNvPr id="270" name="Text 268"/>
-          <p:cNvSpPr/>
-          <p:nvPr/>
-        </p:nvSpPr>
-        <p:spPr>
-          <a:xfrm>
-            <a:off x="7967167" y="4798314"/>
-            <a:ext cx="777240" cy="223266"/>
+          <p:cNvPr id="252" name="Text 250"/>
+          <p:cNvSpPr/>
+          <p:nvPr/>
+        </p:nvSpPr>
+        <p:spPr>
+          <a:xfrm>
+            <a:off x="7967167" y="4661154"/>
+            <a:ext cx="777240" cy="268986"/>
           </a:xfrm>
           <a:prstGeom prst="rect">
             <a:avLst/>
@@ -16159,14 +15513,14 @@
       </p:sp>
       <p:sp>
         <p:nvSpPr>
-          <p:cNvPr id="271" name="Text 269"/>
-          <p:cNvSpPr/>
-          <p:nvPr/>
-        </p:nvSpPr>
-        <p:spPr>
-          <a:xfrm>
-            <a:off x="7464247" y="4798314"/>
-            <a:ext cx="502920" cy="223266"/>
+          <p:cNvPr id="253" name="Text 251"/>
+          <p:cNvSpPr/>
+          <p:nvPr/>
+        </p:nvSpPr>
+        <p:spPr>
+          <a:xfrm>
+            <a:off x="7464247" y="4661154"/>
+            <a:ext cx="502920" cy="268986"/>
           </a:xfrm>
           <a:prstGeom prst="rect">
             <a:avLst/>
@@ -16200,14 +15554,14 @@
       </p:sp>
       <p:sp>
         <p:nvSpPr>
-          <p:cNvPr id="272" name="Text 270"/>
-          <p:cNvSpPr/>
-          <p:nvPr/>
-        </p:nvSpPr>
-        <p:spPr>
-          <a:xfrm>
-            <a:off x="6805879" y="4798314"/>
-            <a:ext cx="658368" cy="223266"/>
+          <p:cNvPr id="254" name="Text 252"/>
+          <p:cNvSpPr/>
+          <p:nvPr/>
+        </p:nvSpPr>
+        <p:spPr>
+          <a:xfrm>
+            <a:off x="6805879" y="4661154"/>
+            <a:ext cx="658368" cy="268986"/>
           </a:xfrm>
           <a:prstGeom prst="rect">
             <a:avLst/>
@@ -16241,14 +15595,14 @@
       </p:sp>
       <p:sp>
         <p:nvSpPr>
-          <p:cNvPr id="273" name="Text 271"/>
-          <p:cNvSpPr/>
-          <p:nvPr/>
-        </p:nvSpPr>
-        <p:spPr>
-          <a:xfrm>
-            <a:off x="6147511" y="4798314"/>
-            <a:ext cx="658368" cy="223266"/>
+          <p:cNvPr id="255" name="Text 253"/>
+          <p:cNvSpPr/>
+          <p:nvPr/>
+        </p:nvSpPr>
+        <p:spPr>
+          <a:xfrm>
+            <a:off x="6147511" y="4661154"/>
+            <a:ext cx="658368" cy="268986"/>
           </a:xfrm>
           <a:prstGeom prst="rect">
             <a:avLst/>
@@ -16282,18 +15636,18 @@
       </p:sp>
       <p:sp>
         <p:nvSpPr>
-          <p:cNvPr id="274" name="Shape 272"/>
-          <p:cNvSpPr/>
-          <p:nvPr/>
-        </p:nvSpPr>
-        <p:spPr>
-          <a:xfrm>
-            <a:off x="1896224" y="4845200"/>
-            <a:ext cx="680206" cy="129494"/>
+          <p:cNvPr id="256" name="Shape 254"/>
+          <p:cNvSpPr/>
+          <p:nvPr/>
+        </p:nvSpPr>
+        <p:spPr>
+          <a:xfrm>
+            <a:off x="1896224" y="4717641"/>
+            <a:ext cx="680206" cy="156012"/>
           </a:xfrm>
           <a:prstGeom prst="roundRect">
             <a:avLst>
-              <a:gd name="adj" fmla="val 28245"/>
+              <a:gd name="adj" fmla="val 23444"/>
             </a:avLst>
           </a:prstGeom>
           <a:solidFill>
@@ -16316,14 +15670,14 @@
       </p:sp>
       <p:sp>
         <p:nvSpPr>
-          <p:cNvPr id="275" name="Text 273"/>
-          <p:cNvSpPr/>
-          <p:nvPr/>
-        </p:nvSpPr>
-        <p:spPr>
-          <a:xfrm>
-            <a:off x="1896224" y="4845200"/>
-            <a:ext cx="680206" cy="129494"/>
+          <p:cNvPr id="257" name="Text 255"/>
+          <p:cNvSpPr/>
+          <p:nvPr/>
+        </p:nvSpPr>
+        <p:spPr>
+          <a:xfrm>
+            <a:off x="1896224" y="4717641"/>
+            <a:ext cx="680206" cy="156012"/>
           </a:xfrm>
           <a:prstGeom prst="rect">
             <a:avLst/>
@@ -16357,14 +15711,14 @@
       </p:sp>
       <p:sp>
         <p:nvSpPr>
-          <p:cNvPr id="276" name="Shape 274"/>
-          <p:cNvSpPr/>
-          <p:nvPr/>
-        </p:nvSpPr>
-        <p:spPr>
-          <a:xfrm>
-            <a:off x="365760" y="5021580"/>
-            <a:ext cx="11460175" cy="223266"/>
+          <p:cNvPr id="258" name="Shape 256"/>
+          <p:cNvSpPr/>
+          <p:nvPr/>
+        </p:nvSpPr>
+        <p:spPr>
+          <a:xfrm>
+            <a:off x="365760" y="4930140"/>
+            <a:ext cx="11460175" cy="268986"/>
           </a:xfrm>
           <a:prstGeom prst="rect">
             <a:avLst/>
@@ -16382,13 +15736,13 @@
       </p:sp>
       <p:sp>
         <p:nvSpPr>
-          <p:cNvPr id="277" name="Shape 275"/>
-          <p:cNvSpPr/>
-          <p:nvPr/>
-        </p:nvSpPr>
-        <p:spPr>
-          <a:xfrm>
-            <a:off x="11515039" y="5014341"/>
+          <p:cNvPr id="259" name="Shape 257"/>
+          <p:cNvSpPr/>
+          <p:nvPr/>
+        </p:nvSpPr>
+        <p:spPr>
+          <a:xfrm>
+            <a:off x="11515039" y="4945761"/>
             <a:ext cx="237744" cy="237744"/>
           </a:xfrm>
           <a:prstGeom prst="ellipse">
@@ -16407,14 +15761,14 @@
       </p:sp>
       <p:sp>
         <p:nvSpPr>
-          <p:cNvPr id="278" name="Text 276"/>
-          <p:cNvSpPr/>
-          <p:nvPr/>
-        </p:nvSpPr>
-        <p:spPr>
-          <a:xfrm>
-            <a:off x="11441887" y="5021580"/>
-            <a:ext cx="384048" cy="223266"/>
+          <p:cNvPr id="260" name="Text 258"/>
+          <p:cNvSpPr/>
+          <p:nvPr/>
+        </p:nvSpPr>
+        <p:spPr>
+          <a:xfrm>
+            <a:off x="11441887" y="4930140"/>
+            <a:ext cx="384048" cy="268986"/>
           </a:xfrm>
           <a:prstGeom prst="rect">
             <a:avLst/>
@@ -16448,14 +15802,14 @@
       </p:sp>
       <p:sp>
         <p:nvSpPr>
-          <p:cNvPr id="279" name="Text 277"/>
-          <p:cNvSpPr/>
-          <p:nvPr/>
-        </p:nvSpPr>
-        <p:spPr>
-          <a:xfrm>
-            <a:off x="8762695" y="5021580"/>
-            <a:ext cx="2606040" cy="223266"/>
+          <p:cNvPr id="261" name="Text 259"/>
+          <p:cNvSpPr/>
+          <p:nvPr/>
+        </p:nvSpPr>
+        <p:spPr>
+          <a:xfrm>
+            <a:off x="8762695" y="4930140"/>
+            <a:ext cx="2606040" cy="268986"/>
           </a:xfrm>
           <a:prstGeom prst="rect">
             <a:avLst/>
@@ -16489,14 +15843,14 @@
       </p:sp>
       <p:sp>
         <p:nvSpPr>
-          <p:cNvPr id="280" name="Text 278"/>
-          <p:cNvSpPr/>
-          <p:nvPr/>
-        </p:nvSpPr>
-        <p:spPr>
-          <a:xfrm>
-            <a:off x="7967167" y="5021580"/>
-            <a:ext cx="777240" cy="223266"/>
+          <p:cNvPr id="262" name="Text 260"/>
+          <p:cNvSpPr/>
+          <p:nvPr/>
+        </p:nvSpPr>
+        <p:spPr>
+          <a:xfrm>
+            <a:off x="7967167" y="4930140"/>
+            <a:ext cx="777240" cy="268986"/>
           </a:xfrm>
           <a:prstGeom prst="rect">
             <a:avLst/>
@@ -16530,14 +15884,14 @@
       </p:sp>
       <p:sp>
         <p:nvSpPr>
-          <p:cNvPr id="281" name="Text 279"/>
-          <p:cNvSpPr/>
-          <p:nvPr/>
-        </p:nvSpPr>
-        <p:spPr>
-          <a:xfrm>
-            <a:off x="7464247" y="5021580"/>
-            <a:ext cx="502920" cy="223266"/>
+          <p:cNvPr id="263" name="Text 261"/>
+          <p:cNvSpPr/>
+          <p:nvPr/>
+        </p:nvSpPr>
+        <p:spPr>
+          <a:xfrm>
+            <a:off x="7464247" y="4930140"/>
+            <a:ext cx="502920" cy="268986"/>
           </a:xfrm>
           <a:prstGeom prst="rect">
             <a:avLst/>
@@ -16571,14 +15925,14 @@
       </p:sp>
       <p:sp>
         <p:nvSpPr>
-          <p:cNvPr id="282" name="Text 280"/>
-          <p:cNvSpPr/>
-          <p:nvPr/>
-        </p:nvSpPr>
-        <p:spPr>
-          <a:xfrm>
-            <a:off x="6805879" y="5021580"/>
-            <a:ext cx="658368" cy="223266"/>
+          <p:cNvPr id="264" name="Text 262"/>
+          <p:cNvSpPr/>
+          <p:nvPr/>
+        </p:nvSpPr>
+        <p:spPr>
+          <a:xfrm>
+            <a:off x="6805879" y="4930140"/>
+            <a:ext cx="658368" cy="268986"/>
           </a:xfrm>
           <a:prstGeom prst="rect">
             <a:avLst/>
@@ -16612,14 +15966,14 @@
       </p:sp>
       <p:sp>
         <p:nvSpPr>
-          <p:cNvPr id="283" name="Text 281"/>
-          <p:cNvSpPr/>
-          <p:nvPr/>
-        </p:nvSpPr>
-        <p:spPr>
-          <a:xfrm>
-            <a:off x="6147511" y="5021580"/>
-            <a:ext cx="658368" cy="223266"/>
+          <p:cNvPr id="265" name="Text 263"/>
+          <p:cNvSpPr/>
+          <p:nvPr/>
+        </p:nvSpPr>
+        <p:spPr>
+          <a:xfrm>
+            <a:off x="6147511" y="4930140"/>
+            <a:ext cx="658368" cy="268986"/>
           </a:xfrm>
           <a:prstGeom prst="rect">
             <a:avLst/>
@@ -16653,18 +16007,18 @@
       </p:sp>
       <p:sp>
         <p:nvSpPr>
-          <p:cNvPr id="284" name="Shape 282"/>
-          <p:cNvSpPr/>
-          <p:nvPr/>
-        </p:nvSpPr>
-        <p:spPr>
-          <a:xfrm>
-            <a:off x="1386069" y="5068466"/>
-            <a:ext cx="1190361" cy="129494"/>
+          <p:cNvPr id="266" name="Shape 264"/>
+          <p:cNvSpPr/>
+          <p:nvPr/>
+        </p:nvSpPr>
+        <p:spPr>
+          <a:xfrm>
+            <a:off x="1386069" y="4986627"/>
+            <a:ext cx="1190361" cy="156012"/>
           </a:xfrm>
           <a:prstGeom prst="roundRect">
             <a:avLst>
-              <a:gd name="adj" fmla="val 28245"/>
+              <a:gd name="adj" fmla="val 23444"/>
             </a:avLst>
           </a:prstGeom>
           <a:solidFill>
@@ -16687,14 +16041,14 @@
       </p:sp>
       <p:sp>
         <p:nvSpPr>
-          <p:cNvPr id="285" name="Text 283"/>
-          <p:cNvSpPr/>
-          <p:nvPr/>
-        </p:nvSpPr>
-        <p:spPr>
-          <a:xfrm>
-            <a:off x="1386069" y="5068466"/>
-            <a:ext cx="1190361" cy="129494"/>
+          <p:cNvPr id="267" name="Text 265"/>
+          <p:cNvSpPr/>
+          <p:nvPr/>
+        </p:nvSpPr>
+        <p:spPr>
+          <a:xfrm>
+            <a:off x="1386069" y="4986627"/>
+            <a:ext cx="1190361" cy="156012"/>
           </a:xfrm>
           <a:prstGeom prst="rect">
             <a:avLst/>
@@ -16728,14 +16082,14 @@
       </p:sp>
       <p:sp>
         <p:nvSpPr>
-          <p:cNvPr id="286" name="Shape 284"/>
-          <p:cNvSpPr/>
-          <p:nvPr/>
-        </p:nvSpPr>
-        <p:spPr>
-          <a:xfrm>
-            <a:off x="365760" y="5244846"/>
-            <a:ext cx="11460175" cy="223266"/>
+          <p:cNvPr id="268" name="Shape 266"/>
+          <p:cNvSpPr/>
+          <p:nvPr/>
+        </p:nvSpPr>
+        <p:spPr>
+          <a:xfrm>
+            <a:off x="365760" y="5199126"/>
+            <a:ext cx="11460175" cy="268986"/>
           </a:xfrm>
           <a:prstGeom prst="rect">
             <a:avLst/>
@@ -16753,13 +16107,13 @@
       </p:sp>
       <p:sp>
         <p:nvSpPr>
-          <p:cNvPr id="287" name="Shape 285"/>
-          <p:cNvSpPr/>
-          <p:nvPr/>
-        </p:nvSpPr>
-        <p:spPr>
-          <a:xfrm>
-            <a:off x="11515039" y="5237607"/>
+          <p:cNvPr id="269" name="Shape 267"/>
+          <p:cNvSpPr/>
+          <p:nvPr/>
+        </p:nvSpPr>
+        <p:spPr>
+          <a:xfrm>
+            <a:off x="11515039" y="5214747"/>
             <a:ext cx="237744" cy="237744"/>
           </a:xfrm>
           <a:prstGeom prst="ellipse">
@@ -16778,14 +16132,14 @@
       </p:sp>
       <p:sp>
         <p:nvSpPr>
-          <p:cNvPr id="288" name="Text 286"/>
-          <p:cNvSpPr/>
-          <p:nvPr/>
-        </p:nvSpPr>
-        <p:spPr>
-          <a:xfrm>
-            <a:off x="11441887" y="5244846"/>
-            <a:ext cx="384048" cy="223266"/>
+          <p:cNvPr id="270" name="Text 268"/>
+          <p:cNvSpPr/>
+          <p:nvPr/>
+        </p:nvSpPr>
+        <p:spPr>
+          <a:xfrm>
+            <a:off x="11441887" y="5199126"/>
+            <a:ext cx="384048" cy="268986"/>
           </a:xfrm>
           <a:prstGeom prst="rect">
             <a:avLst/>
@@ -16819,14 +16173,14 @@
       </p:sp>
       <p:sp>
         <p:nvSpPr>
-          <p:cNvPr id="289" name="Text 287"/>
-          <p:cNvSpPr/>
-          <p:nvPr/>
-        </p:nvSpPr>
-        <p:spPr>
-          <a:xfrm>
-            <a:off x="8762695" y="5244846"/>
-            <a:ext cx="2606040" cy="223266"/>
+          <p:cNvPr id="271" name="Text 269"/>
+          <p:cNvSpPr/>
+          <p:nvPr/>
+        </p:nvSpPr>
+        <p:spPr>
+          <a:xfrm>
+            <a:off x="8762695" y="5199126"/>
+            <a:ext cx="2606040" cy="268986"/>
           </a:xfrm>
           <a:prstGeom prst="rect">
             <a:avLst/>
@@ -16860,14 +16214,14 @@
       </p:sp>
       <p:sp>
         <p:nvSpPr>
-          <p:cNvPr id="290" name="Text 288"/>
-          <p:cNvSpPr/>
-          <p:nvPr/>
-        </p:nvSpPr>
-        <p:spPr>
-          <a:xfrm>
-            <a:off x="7967167" y="5244846"/>
-            <a:ext cx="777240" cy="223266"/>
+          <p:cNvPr id="272" name="Text 270"/>
+          <p:cNvSpPr/>
+          <p:nvPr/>
+        </p:nvSpPr>
+        <p:spPr>
+          <a:xfrm>
+            <a:off x="7967167" y="5199126"/>
+            <a:ext cx="777240" cy="268986"/>
           </a:xfrm>
           <a:prstGeom prst="rect">
             <a:avLst/>
@@ -16901,14 +16255,14 @@
       </p:sp>
       <p:sp>
         <p:nvSpPr>
-          <p:cNvPr id="291" name="Text 289"/>
-          <p:cNvSpPr/>
-          <p:nvPr/>
-        </p:nvSpPr>
-        <p:spPr>
-          <a:xfrm>
-            <a:off x="7464247" y="5244846"/>
-            <a:ext cx="502920" cy="223266"/>
+          <p:cNvPr id="273" name="Text 271"/>
+          <p:cNvSpPr/>
+          <p:nvPr/>
+        </p:nvSpPr>
+        <p:spPr>
+          <a:xfrm>
+            <a:off x="7464247" y="5199126"/>
+            <a:ext cx="502920" cy="268986"/>
           </a:xfrm>
           <a:prstGeom prst="rect">
             <a:avLst/>
@@ -16942,14 +16296,14 @@
       </p:sp>
       <p:sp>
         <p:nvSpPr>
-          <p:cNvPr id="292" name="Text 290"/>
-          <p:cNvSpPr/>
-          <p:nvPr/>
-        </p:nvSpPr>
-        <p:spPr>
-          <a:xfrm>
-            <a:off x="6805879" y="5244846"/>
-            <a:ext cx="658368" cy="223266"/>
+          <p:cNvPr id="274" name="Text 272"/>
+          <p:cNvSpPr/>
+          <p:nvPr/>
+        </p:nvSpPr>
+        <p:spPr>
+          <a:xfrm>
+            <a:off x="6805879" y="5199126"/>
+            <a:ext cx="658368" cy="268986"/>
           </a:xfrm>
           <a:prstGeom prst="rect">
             <a:avLst/>
@@ -16983,14 +16337,14 @@
       </p:sp>
       <p:sp>
         <p:nvSpPr>
-          <p:cNvPr id="293" name="Text 291"/>
-          <p:cNvSpPr/>
-          <p:nvPr/>
-        </p:nvSpPr>
-        <p:spPr>
-          <a:xfrm>
-            <a:off x="6147511" y="5244846"/>
-            <a:ext cx="658368" cy="223266"/>
+          <p:cNvPr id="275" name="Text 273"/>
+          <p:cNvSpPr/>
+          <p:nvPr/>
+        </p:nvSpPr>
+        <p:spPr>
+          <a:xfrm>
+            <a:off x="6147511" y="5199126"/>
+            <a:ext cx="658368" cy="268986"/>
           </a:xfrm>
           <a:prstGeom prst="rect">
             <a:avLst/>
@@ -17024,18 +16378,18 @@
       </p:sp>
       <p:sp>
         <p:nvSpPr>
-          <p:cNvPr id="294" name="Shape 292"/>
-          <p:cNvSpPr/>
-          <p:nvPr/>
-        </p:nvSpPr>
-        <p:spPr>
-          <a:xfrm>
-            <a:off x="705863" y="5291732"/>
-            <a:ext cx="680206" cy="129494"/>
+          <p:cNvPr id="276" name="Shape 274"/>
+          <p:cNvSpPr/>
+          <p:nvPr/>
+        </p:nvSpPr>
+        <p:spPr>
+          <a:xfrm>
+            <a:off x="705863" y="5255613"/>
+            <a:ext cx="680206" cy="156012"/>
           </a:xfrm>
           <a:prstGeom prst="roundRect">
             <a:avLst>
-              <a:gd name="adj" fmla="val 28245"/>
+              <a:gd name="adj" fmla="val 23444"/>
             </a:avLst>
           </a:prstGeom>
           <a:solidFill>
@@ -17058,14 +16412,14 @@
       </p:sp>
       <p:sp>
         <p:nvSpPr>
-          <p:cNvPr id="295" name="Text 293"/>
-          <p:cNvSpPr/>
-          <p:nvPr/>
-        </p:nvSpPr>
-        <p:spPr>
-          <a:xfrm>
-            <a:off x="705863" y="5291732"/>
-            <a:ext cx="680206" cy="129494"/>
+          <p:cNvPr id="277" name="Text 275"/>
+          <p:cNvSpPr/>
+          <p:nvPr/>
+        </p:nvSpPr>
+        <p:spPr>
+          <a:xfrm>
+            <a:off x="705863" y="5255613"/>
+            <a:ext cx="680206" cy="156012"/>
           </a:xfrm>
           <a:prstGeom prst="rect">
             <a:avLst/>
@@ -17099,14 +16453,435 @@
       </p:sp>
       <p:sp>
         <p:nvSpPr>
+          <p:cNvPr id="278" name="Shape 276"/>
+          <p:cNvSpPr/>
+          <p:nvPr/>
+        </p:nvSpPr>
+        <p:spPr>
+          <a:xfrm>
+            <a:off x="4732235" y="2721765"/>
+            <a:ext cx="0" cy="190980"/>
+          </a:xfrm>
+          <a:prstGeom prst="line">
+            <a:avLst/>
+          </a:prstGeom>
+          <a:noFill/>
+          <a:ln w="13970">
+            <a:solidFill>
+              <a:srgbClr val="2D3338"/>
+            </a:solidFill>
+            <a:prstDash val="solid"/>
+          </a:ln>
+        </p:spPr>
+      </p:sp>
+      <p:sp>
+        <p:nvSpPr>
+          <p:cNvPr id="279" name="Shape 277"/>
+          <p:cNvSpPr/>
+          <p:nvPr/>
+        </p:nvSpPr>
+        <p:spPr>
+          <a:xfrm flipH="1">
+            <a:off x="4456140" y="2912745"/>
+            <a:ext cx="276095" cy="0"/>
+          </a:xfrm>
+          <a:prstGeom prst="line">
+            <a:avLst/>
+          </a:prstGeom>
+          <a:noFill/>
+          <a:ln w="13970">
+            <a:solidFill>
+              <a:srgbClr val="2D3338"/>
+            </a:solidFill>
+            <a:prstDash val="solid"/>
+            <a:tailEnd type="triangle"/>
+          </a:ln>
+        </p:spPr>
+      </p:sp>
+      <p:sp>
+        <p:nvSpPr>
+          <p:cNvPr id="280" name="Shape 278"/>
+          <p:cNvSpPr/>
+          <p:nvPr/>
+        </p:nvSpPr>
+        <p:spPr>
+          <a:xfrm>
+            <a:off x="4392132" y="2990751"/>
+            <a:ext cx="0" cy="190980"/>
+          </a:xfrm>
+          <a:prstGeom prst="line">
+            <a:avLst/>
+          </a:prstGeom>
+          <a:noFill/>
+          <a:ln w="13970">
+            <a:solidFill>
+              <a:srgbClr val="2D3338"/>
+            </a:solidFill>
+            <a:prstDash val="solid"/>
+          </a:ln>
+        </p:spPr>
+      </p:sp>
+      <p:sp>
+        <p:nvSpPr>
+          <p:cNvPr id="281" name="Shape 279"/>
+          <p:cNvSpPr/>
+          <p:nvPr/>
+        </p:nvSpPr>
+        <p:spPr>
+          <a:xfrm flipH="1">
+            <a:off x="4286089" y="3181731"/>
+            <a:ext cx="106044" cy="0"/>
+          </a:xfrm>
+          <a:prstGeom prst="line">
+            <a:avLst/>
+          </a:prstGeom>
+          <a:noFill/>
+          <a:ln w="13970">
+            <a:solidFill>
+              <a:srgbClr val="2D3338"/>
+            </a:solidFill>
+            <a:prstDash val="solid"/>
+            <a:tailEnd type="triangle"/>
+          </a:ln>
+        </p:spPr>
+      </p:sp>
+      <p:sp>
+        <p:nvSpPr>
+          <p:cNvPr id="282" name="Shape 280"/>
+          <p:cNvSpPr/>
+          <p:nvPr/>
+        </p:nvSpPr>
+        <p:spPr>
+          <a:xfrm>
+            <a:off x="4222081" y="3259737"/>
+            <a:ext cx="0" cy="190980"/>
+          </a:xfrm>
+          <a:prstGeom prst="line">
+            <a:avLst/>
+          </a:prstGeom>
+          <a:noFill/>
+          <a:ln w="13970">
+            <a:solidFill>
+              <a:srgbClr val="2D3338"/>
+            </a:solidFill>
+            <a:prstDash val="solid"/>
+          </a:ln>
+        </p:spPr>
+      </p:sp>
+      <p:sp>
+        <p:nvSpPr>
+          <p:cNvPr id="283" name="Shape 281"/>
+          <p:cNvSpPr/>
+          <p:nvPr/>
+        </p:nvSpPr>
+        <p:spPr>
+          <a:xfrm flipH="1">
+            <a:off x="4116037" y="3450717"/>
+            <a:ext cx="106044" cy="0"/>
+          </a:xfrm>
+          <a:prstGeom prst="line">
+            <a:avLst/>
+          </a:prstGeom>
+          <a:noFill/>
+          <a:ln w="13970">
+            <a:solidFill>
+              <a:srgbClr val="2D3338"/>
+            </a:solidFill>
+            <a:prstDash val="solid"/>
+            <a:tailEnd type="triangle"/>
+          </a:ln>
+        </p:spPr>
+      </p:sp>
+      <p:sp>
+        <p:nvSpPr>
+          <p:cNvPr id="284" name="Shape 282"/>
+          <p:cNvSpPr/>
+          <p:nvPr/>
+        </p:nvSpPr>
+        <p:spPr>
+          <a:xfrm>
+            <a:off x="4052029" y="3528723"/>
+            <a:ext cx="0" cy="190980"/>
+          </a:xfrm>
+          <a:prstGeom prst="line">
+            <a:avLst/>
+          </a:prstGeom>
+          <a:noFill/>
+          <a:ln w="13970">
+            <a:solidFill>
+              <a:srgbClr val="2D3338"/>
+            </a:solidFill>
+            <a:prstDash val="solid"/>
+          </a:ln>
+        </p:spPr>
+      </p:sp>
+      <p:sp>
+        <p:nvSpPr>
+          <p:cNvPr id="285" name="Shape 283"/>
+          <p:cNvSpPr/>
+          <p:nvPr/>
+        </p:nvSpPr>
+        <p:spPr>
+          <a:xfrm flipH="1">
+            <a:off x="4052029" y="3719703"/>
+            <a:ext cx="64008" cy="0"/>
+          </a:xfrm>
+          <a:prstGeom prst="line">
+            <a:avLst/>
+          </a:prstGeom>
+          <a:noFill/>
+          <a:ln w="13970">
+            <a:solidFill>
+              <a:srgbClr val="2D3338"/>
+            </a:solidFill>
+            <a:prstDash val="solid"/>
+            <a:tailEnd type="triangle"/>
+          </a:ln>
+        </p:spPr>
+      </p:sp>
+      <p:sp>
+        <p:nvSpPr>
+          <p:cNvPr id="286" name="Shape 284"/>
+          <p:cNvSpPr/>
+          <p:nvPr/>
+        </p:nvSpPr>
+        <p:spPr>
+          <a:xfrm>
+            <a:off x="4732235" y="2452779"/>
+            <a:ext cx="0" cy="1535910"/>
+          </a:xfrm>
+          <a:prstGeom prst="line">
+            <a:avLst/>
+          </a:prstGeom>
+          <a:noFill/>
+          <a:ln w="13970">
+            <a:solidFill>
+              <a:srgbClr val="2D3338"/>
+            </a:solidFill>
+            <a:prstDash val="solid"/>
+          </a:ln>
+        </p:spPr>
+      </p:sp>
+      <p:sp>
+        <p:nvSpPr>
+          <p:cNvPr id="287" name="Shape 285"/>
+          <p:cNvSpPr/>
+          <p:nvPr/>
+        </p:nvSpPr>
+        <p:spPr>
+          <a:xfrm flipH="1">
+            <a:off x="3945986" y="3988689"/>
+            <a:ext cx="786250" cy="0"/>
+          </a:xfrm>
+          <a:prstGeom prst="line">
+            <a:avLst/>
+          </a:prstGeom>
+          <a:noFill/>
+          <a:ln w="13970">
+            <a:solidFill>
+              <a:srgbClr val="2D3338"/>
+            </a:solidFill>
+            <a:prstDash val="solid"/>
+            <a:tailEnd type="triangle"/>
+          </a:ln>
+        </p:spPr>
+      </p:sp>
+      <p:sp>
+        <p:nvSpPr>
+          <p:cNvPr id="288" name="Shape 286"/>
+          <p:cNvSpPr/>
+          <p:nvPr/>
+        </p:nvSpPr>
+        <p:spPr>
+          <a:xfrm>
+            <a:off x="3936842" y="2374773"/>
+            <a:ext cx="45720" cy="0"/>
+          </a:xfrm>
+          <a:prstGeom prst="line">
+            <a:avLst/>
+          </a:prstGeom>
+          <a:noFill/>
+          <a:ln w="13970">
+            <a:solidFill>
+              <a:srgbClr val="2D3338"/>
+            </a:solidFill>
+            <a:prstDash val="solid"/>
+          </a:ln>
+        </p:spPr>
+      </p:sp>
+      <p:sp>
+        <p:nvSpPr>
+          <p:cNvPr id="289" name="Shape 287"/>
+          <p:cNvSpPr/>
+          <p:nvPr/>
+        </p:nvSpPr>
+        <p:spPr>
+          <a:xfrm>
+            <a:off x="3982562" y="2374773"/>
+            <a:ext cx="0" cy="1882902"/>
+          </a:xfrm>
+          <a:prstGeom prst="line">
+            <a:avLst/>
+          </a:prstGeom>
+          <a:noFill/>
+          <a:ln w="13970">
+            <a:solidFill>
+              <a:srgbClr val="2D3338"/>
+            </a:solidFill>
+            <a:prstDash val="solid"/>
+          </a:ln>
+        </p:spPr>
+      </p:sp>
+      <p:sp>
+        <p:nvSpPr>
+          <p:cNvPr id="290" name="Shape 288"/>
+          <p:cNvSpPr/>
+          <p:nvPr/>
+        </p:nvSpPr>
+        <p:spPr>
+          <a:xfrm flipH="1">
+            <a:off x="3945986" y="4257675"/>
+            <a:ext cx="36576" cy="0"/>
+          </a:xfrm>
+          <a:prstGeom prst="line">
+            <a:avLst/>
+          </a:prstGeom>
+          <a:noFill/>
+          <a:ln w="13970">
+            <a:solidFill>
+              <a:srgbClr val="2D3338"/>
+            </a:solidFill>
+            <a:prstDash val="solid"/>
+            <a:tailEnd type="triangle"/>
+          </a:ln>
+        </p:spPr>
+      </p:sp>
+      <p:sp>
+        <p:nvSpPr>
+          <p:cNvPr id="291" name="Shape 289"/>
+          <p:cNvSpPr/>
+          <p:nvPr/>
+        </p:nvSpPr>
+        <p:spPr>
+          <a:xfrm>
+            <a:off x="3596739" y="4257675"/>
+            <a:ext cx="45720" cy="0"/>
+          </a:xfrm>
+          <a:prstGeom prst="line">
+            <a:avLst/>
+          </a:prstGeom>
+          <a:noFill/>
+          <a:ln w="13970">
+            <a:solidFill>
+              <a:srgbClr val="2D3338"/>
+            </a:solidFill>
+            <a:prstDash val="solid"/>
+          </a:ln>
+        </p:spPr>
+      </p:sp>
+      <p:sp>
+        <p:nvSpPr>
+          <p:cNvPr id="292" name="Shape 290"/>
+          <p:cNvSpPr/>
+          <p:nvPr/>
+        </p:nvSpPr>
+        <p:spPr>
+          <a:xfrm>
+            <a:off x="3642459" y="4257675"/>
+            <a:ext cx="0" cy="268986"/>
+          </a:xfrm>
+          <a:prstGeom prst="line">
+            <a:avLst/>
+          </a:prstGeom>
+          <a:noFill/>
+          <a:ln w="13970">
+            <a:solidFill>
+              <a:srgbClr val="2D3338"/>
+            </a:solidFill>
+            <a:prstDash val="solid"/>
+          </a:ln>
+        </p:spPr>
+      </p:sp>
+      <p:sp>
+        <p:nvSpPr>
+          <p:cNvPr id="293" name="Shape 291"/>
+          <p:cNvSpPr/>
+          <p:nvPr/>
+        </p:nvSpPr>
+        <p:spPr>
+          <a:xfrm flipH="1">
+            <a:off x="3605883" y="4526661"/>
+            <a:ext cx="36576" cy="0"/>
+          </a:xfrm>
+          <a:prstGeom prst="line">
+            <a:avLst/>
+          </a:prstGeom>
+          <a:noFill/>
+          <a:ln w="13970">
+            <a:solidFill>
+              <a:srgbClr val="2D3338"/>
+            </a:solidFill>
+            <a:prstDash val="solid"/>
+            <a:tailEnd type="triangle"/>
+          </a:ln>
+        </p:spPr>
+      </p:sp>
+      <p:sp>
+        <p:nvSpPr>
+          <p:cNvPr id="294" name="Shape 292"/>
+          <p:cNvSpPr/>
+          <p:nvPr/>
+        </p:nvSpPr>
+        <p:spPr>
+          <a:xfrm>
+            <a:off x="2576430" y="4526661"/>
+            <a:ext cx="45720" cy="0"/>
+          </a:xfrm>
+          <a:prstGeom prst="line">
+            <a:avLst/>
+          </a:prstGeom>
+          <a:noFill/>
+          <a:ln w="13970">
+            <a:solidFill>
+              <a:srgbClr val="2D3338"/>
+            </a:solidFill>
+            <a:prstDash val="solid"/>
+          </a:ln>
+        </p:spPr>
+      </p:sp>
+      <p:sp>
+        <p:nvSpPr>
+          <p:cNvPr id="295" name="Shape 293"/>
+          <p:cNvSpPr/>
+          <p:nvPr/>
+        </p:nvSpPr>
+        <p:spPr>
+          <a:xfrm>
+            <a:off x="2622150" y="4526661"/>
+            <a:ext cx="0" cy="268986"/>
+          </a:xfrm>
+          <a:prstGeom prst="line">
+            <a:avLst/>
+          </a:prstGeom>
+          <a:noFill/>
+          <a:ln w="13970">
+            <a:solidFill>
+              <a:srgbClr val="2D3338"/>
+            </a:solidFill>
+            <a:prstDash val="solid"/>
+          </a:ln>
+        </p:spPr>
+      </p:sp>
+      <p:sp>
+        <p:nvSpPr>
           <p:cNvPr id="296" name="Shape 294"/>
           <p:cNvSpPr/>
           <p:nvPr/>
         </p:nvSpPr>
         <p:spPr>
-          <a:xfrm>
-            <a:off x="4732235" y="3188566"/>
-            <a:ext cx="0" cy="158519"/>
+          <a:xfrm flipH="1">
+            <a:off x="2585574" y="4795647"/>
+            <a:ext cx="36576" cy="0"/>
           </a:xfrm>
           <a:prstGeom prst="line">
             <a:avLst/>
@@ -17117,6 +16892,7 @@
               <a:srgbClr val="2D3338"/>
             </a:solidFill>
             <a:prstDash val="solid"/>
+            <a:tailEnd type="triangle"/>
           </a:ln>
         </p:spPr>
       </p:sp>
@@ -17127,9 +16903,55 @@
           <p:nvPr/>
         </p:nvSpPr>
         <p:spPr>
+          <a:xfrm>
+            <a:off x="2576430" y="4526661"/>
+            <a:ext cx="45720" cy="0"/>
+          </a:xfrm>
+          <a:prstGeom prst="line">
+            <a:avLst/>
+          </a:prstGeom>
+          <a:noFill/>
+          <a:ln w="13970">
+            <a:solidFill>
+              <a:srgbClr val="2D3338"/>
+            </a:solidFill>
+            <a:prstDash val="solid"/>
+          </a:ln>
+        </p:spPr>
+      </p:sp>
+      <p:sp>
+        <p:nvSpPr>
+          <p:cNvPr id="298" name="Shape 296"/>
+          <p:cNvSpPr/>
+          <p:nvPr/>
+        </p:nvSpPr>
+        <p:spPr>
+          <a:xfrm>
+            <a:off x="2622150" y="4526661"/>
+            <a:ext cx="0" cy="537972"/>
+          </a:xfrm>
+          <a:prstGeom prst="line">
+            <a:avLst/>
+          </a:prstGeom>
+          <a:noFill/>
+          <a:ln w="13970">
+            <a:solidFill>
+              <a:srgbClr val="2D3338"/>
+            </a:solidFill>
+            <a:prstDash val="solid"/>
+          </a:ln>
+        </p:spPr>
+      </p:sp>
+      <p:sp>
+        <p:nvSpPr>
+          <p:cNvPr id="299" name="Shape 297"/>
+          <p:cNvSpPr/>
+          <p:nvPr/>
+        </p:nvSpPr>
+        <p:spPr>
           <a:xfrm flipH="1">
-            <a:off x="4456140" y="3347085"/>
-            <a:ext cx="276095" cy="0"/>
+            <a:off x="2585574" y="5064633"/>
+            <a:ext cx="36576" cy="0"/>
           </a:xfrm>
           <a:prstGeom prst="line">
             <a:avLst/>
@@ -17146,14 +16968,14 @@
       </p:sp>
       <p:sp>
         <p:nvSpPr>
-          <p:cNvPr id="298" name="Shape 296"/>
-          <p:cNvSpPr/>
-          <p:nvPr/>
-        </p:nvSpPr>
-        <p:spPr>
-          <a:xfrm>
-            <a:off x="4392132" y="3411832"/>
-            <a:ext cx="0" cy="158519"/>
+          <p:cNvPr id="300" name="Shape 298"/>
+          <p:cNvSpPr/>
+          <p:nvPr/>
+        </p:nvSpPr>
+        <p:spPr>
+          <a:xfrm>
+            <a:off x="1386069" y="5064633"/>
+            <a:ext cx="45720" cy="0"/>
           </a:xfrm>
           <a:prstGeom prst="line">
             <a:avLst/>
@@ -17169,14 +16991,37 @@
       </p:sp>
       <p:sp>
         <p:nvSpPr>
-          <p:cNvPr id="299" name="Shape 297"/>
+          <p:cNvPr id="301" name="Shape 299"/>
+          <p:cNvSpPr/>
+          <p:nvPr/>
+        </p:nvSpPr>
+        <p:spPr>
+          <a:xfrm>
+            <a:off x="1431789" y="5064633"/>
+            <a:ext cx="0" cy="268986"/>
+          </a:xfrm>
+          <a:prstGeom prst="line">
+            <a:avLst/>
+          </a:prstGeom>
+          <a:noFill/>
+          <a:ln w="13970">
+            <a:solidFill>
+              <a:srgbClr val="2D3338"/>
+            </a:solidFill>
+            <a:prstDash val="solid"/>
+          </a:ln>
+        </p:spPr>
+      </p:sp>
+      <p:sp>
+        <p:nvSpPr>
+          <p:cNvPr id="302" name="Shape 300"/>
           <p:cNvSpPr/>
           <p:nvPr/>
         </p:nvSpPr>
         <p:spPr>
           <a:xfrm flipH="1">
-            <a:off x="4286089" y="3570351"/>
-            <a:ext cx="106044" cy="0"/>
+            <a:off x="1395213" y="5333619"/>
+            <a:ext cx="36576" cy="0"/>
           </a:xfrm>
           <a:prstGeom prst="line">
             <a:avLst/>
@@ -17193,498 +17038,7 @@
       </p:sp>
       <p:sp>
         <p:nvSpPr>
-          <p:cNvPr id="300" name="Shape 298"/>
-          <p:cNvSpPr/>
-          <p:nvPr/>
-        </p:nvSpPr>
-        <p:spPr>
-          <a:xfrm>
-            <a:off x="4222081" y="3635098"/>
-            <a:ext cx="0" cy="158519"/>
-          </a:xfrm>
-          <a:prstGeom prst="line">
-            <a:avLst/>
-          </a:prstGeom>
-          <a:noFill/>
-          <a:ln w="13970">
-            <a:solidFill>
-              <a:srgbClr val="2D3338"/>
-            </a:solidFill>
-            <a:prstDash val="solid"/>
-          </a:ln>
-        </p:spPr>
-      </p:sp>
-      <p:sp>
-        <p:nvSpPr>
-          <p:cNvPr id="301" name="Shape 299"/>
-          <p:cNvSpPr/>
-          <p:nvPr/>
-        </p:nvSpPr>
-        <p:spPr>
-          <a:xfrm flipH="1">
-            <a:off x="4116037" y="3793617"/>
-            <a:ext cx="106044" cy="0"/>
-          </a:xfrm>
-          <a:prstGeom prst="line">
-            <a:avLst/>
-          </a:prstGeom>
-          <a:noFill/>
-          <a:ln w="13970">
-            <a:solidFill>
-              <a:srgbClr val="2D3338"/>
-            </a:solidFill>
-            <a:prstDash val="solid"/>
-            <a:tailEnd type="triangle"/>
-          </a:ln>
-        </p:spPr>
-      </p:sp>
-      <p:sp>
-        <p:nvSpPr>
-          <p:cNvPr id="302" name="Shape 300"/>
-          <p:cNvSpPr/>
-          <p:nvPr/>
-        </p:nvSpPr>
-        <p:spPr>
-          <a:xfrm>
-            <a:off x="4052029" y="3858364"/>
-            <a:ext cx="0" cy="158519"/>
-          </a:xfrm>
-          <a:prstGeom prst="line">
-            <a:avLst/>
-          </a:prstGeom>
-          <a:noFill/>
-          <a:ln w="13970">
-            <a:solidFill>
-              <a:srgbClr val="2D3338"/>
-            </a:solidFill>
-            <a:prstDash val="solid"/>
-          </a:ln>
-        </p:spPr>
-      </p:sp>
-      <p:sp>
-        <p:nvSpPr>
           <p:cNvPr id="303" name="Shape 301"/>
-          <p:cNvSpPr/>
-          <p:nvPr/>
-        </p:nvSpPr>
-        <p:spPr>
-          <a:xfrm flipH="1">
-            <a:off x="4052029" y="4016883"/>
-            <a:ext cx="64008" cy="0"/>
-          </a:xfrm>
-          <a:prstGeom prst="line">
-            <a:avLst/>
-          </a:prstGeom>
-          <a:noFill/>
-          <a:ln w="13970">
-            <a:solidFill>
-              <a:srgbClr val="2D3338"/>
-            </a:solidFill>
-            <a:prstDash val="solid"/>
-            <a:tailEnd type="triangle"/>
-          </a:ln>
-        </p:spPr>
-      </p:sp>
-      <p:sp>
-        <p:nvSpPr>
-          <p:cNvPr id="304" name="Shape 302"/>
-          <p:cNvSpPr/>
-          <p:nvPr/>
-        </p:nvSpPr>
-        <p:spPr>
-          <a:xfrm>
-            <a:off x="4732235" y="2965300"/>
-            <a:ext cx="0" cy="1274849"/>
-          </a:xfrm>
-          <a:prstGeom prst="line">
-            <a:avLst/>
-          </a:prstGeom>
-          <a:noFill/>
-          <a:ln w="13970">
-            <a:solidFill>
-              <a:srgbClr val="2D3338"/>
-            </a:solidFill>
-            <a:prstDash val="solid"/>
-          </a:ln>
-        </p:spPr>
-      </p:sp>
-      <p:sp>
-        <p:nvSpPr>
-          <p:cNvPr id="305" name="Shape 303"/>
-          <p:cNvSpPr/>
-          <p:nvPr/>
-        </p:nvSpPr>
-        <p:spPr>
-          <a:xfrm flipH="1">
-            <a:off x="3945986" y="4240149"/>
-            <a:ext cx="786250" cy="0"/>
-          </a:xfrm>
-          <a:prstGeom prst="line">
-            <a:avLst/>
-          </a:prstGeom>
-          <a:noFill/>
-          <a:ln w="13970">
-            <a:solidFill>
-              <a:srgbClr val="2D3338"/>
-            </a:solidFill>
-            <a:prstDash val="solid"/>
-            <a:tailEnd type="triangle"/>
-          </a:ln>
-        </p:spPr>
-      </p:sp>
-      <p:sp>
-        <p:nvSpPr>
-          <p:cNvPr id="306" name="Shape 304"/>
-          <p:cNvSpPr/>
-          <p:nvPr/>
-        </p:nvSpPr>
-        <p:spPr>
-          <a:xfrm>
-            <a:off x="3936842" y="2900553"/>
-            <a:ext cx="45720" cy="0"/>
-          </a:xfrm>
-          <a:prstGeom prst="line">
-            <a:avLst/>
-          </a:prstGeom>
-          <a:noFill/>
-          <a:ln w="13970">
-            <a:solidFill>
-              <a:srgbClr val="2D3338"/>
-            </a:solidFill>
-            <a:prstDash val="solid"/>
-          </a:ln>
-        </p:spPr>
-      </p:sp>
-      <p:sp>
-        <p:nvSpPr>
-          <p:cNvPr id="307" name="Shape 305"/>
-          <p:cNvSpPr/>
-          <p:nvPr/>
-        </p:nvSpPr>
-        <p:spPr>
-          <a:xfrm>
-            <a:off x="3982562" y="2900553"/>
-            <a:ext cx="0" cy="1562862"/>
-          </a:xfrm>
-          <a:prstGeom prst="line">
-            <a:avLst/>
-          </a:prstGeom>
-          <a:noFill/>
-          <a:ln w="13970">
-            <a:solidFill>
-              <a:srgbClr val="2D3338"/>
-            </a:solidFill>
-            <a:prstDash val="solid"/>
-          </a:ln>
-        </p:spPr>
-      </p:sp>
-      <p:sp>
-        <p:nvSpPr>
-          <p:cNvPr id="308" name="Shape 306"/>
-          <p:cNvSpPr/>
-          <p:nvPr/>
-        </p:nvSpPr>
-        <p:spPr>
-          <a:xfrm flipH="1">
-            <a:off x="3945986" y="4463415"/>
-            <a:ext cx="36576" cy="0"/>
-          </a:xfrm>
-          <a:prstGeom prst="line">
-            <a:avLst/>
-          </a:prstGeom>
-          <a:noFill/>
-          <a:ln w="13970">
-            <a:solidFill>
-              <a:srgbClr val="2D3338"/>
-            </a:solidFill>
-            <a:prstDash val="solid"/>
-            <a:tailEnd type="triangle"/>
-          </a:ln>
-        </p:spPr>
-      </p:sp>
-      <p:sp>
-        <p:nvSpPr>
-          <p:cNvPr id="309" name="Shape 307"/>
-          <p:cNvSpPr/>
-          <p:nvPr/>
-        </p:nvSpPr>
-        <p:spPr>
-          <a:xfrm>
-            <a:off x="3596739" y="4463415"/>
-            <a:ext cx="45720" cy="0"/>
-          </a:xfrm>
-          <a:prstGeom prst="line">
-            <a:avLst/>
-          </a:prstGeom>
-          <a:noFill/>
-          <a:ln w="13970">
-            <a:solidFill>
-              <a:srgbClr val="2D3338"/>
-            </a:solidFill>
-            <a:prstDash val="solid"/>
-          </a:ln>
-        </p:spPr>
-      </p:sp>
-      <p:sp>
-        <p:nvSpPr>
-          <p:cNvPr id="310" name="Shape 308"/>
-          <p:cNvSpPr/>
-          <p:nvPr/>
-        </p:nvSpPr>
-        <p:spPr>
-          <a:xfrm>
-            <a:off x="3642459" y="4463415"/>
-            <a:ext cx="0" cy="223266"/>
-          </a:xfrm>
-          <a:prstGeom prst="line">
-            <a:avLst/>
-          </a:prstGeom>
-          <a:noFill/>
-          <a:ln w="13970">
-            <a:solidFill>
-              <a:srgbClr val="2D3338"/>
-            </a:solidFill>
-            <a:prstDash val="solid"/>
-          </a:ln>
-        </p:spPr>
-      </p:sp>
-      <p:sp>
-        <p:nvSpPr>
-          <p:cNvPr id="311" name="Shape 309"/>
-          <p:cNvSpPr/>
-          <p:nvPr/>
-        </p:nvSpPr>
-        <p:spPr>
-          <a:xfrm flipH="1">
-            <a:off x="3605883" y="4686681"/>
-            <a:ext cx="36576" cy="0"/>
-          </a:xfrm>
-          <a:prstGeom prst="line">
-            <a:avLst/>
-          </a:prstGeom>
-          <a:noFill/>
-          <a:ln w="13970">
-            <a:solidFill>
-              <a:srgbClr val="2D3338"/>
-            </a:solidFill>
-            <a:prstDash val="solid"/>
-            <a:tailEnd type="triangle"/>
-          </a:ln>
-        </p:spPr>
-      </p:sp>
-      <p:sp>
-        <p:nvSpPr>
-          <p:cNvPr id="312" name="Shape 310"/>
-          <p:cNvSpPr/>
-          <p:nvPr/>
-        </p:nvSpPr>
-        <p:spPr>
-          <a:xfrm>
-            <a:off x="2576430" y="4686681"/>
-            <a:ext cx="45720" cy="0"/>
-          </a:xfrm>
-          <a:prstGeom prst="line">
-            <a:avLst/>
-          </a:prstGeom>
-          <a:noFill/>
-          <a:ln w="13970">
-            <a:solidFill>
-              <a:srgbClr val="2D3338"/>
-            </a:solidFill>
-            <a:prstDash val="solid"/>
-          </a:ln>
-        </p:spPr>
-      </p:sp>
-      <p:sp>
-        <p:nvSpPr>
-          <p:cNvPr id="313" name="Shape 311"/>
-          <p:cNvSpPr/>
-          <p:nvPr/>
-        </p:nvSpPr>
-        <p:spPr>
-          <a:xfrm>
-            <a:off x="2622150" y="4686681"/>
-            <a:ext cx="0" cy="223266"/>
-          </a:xfrm>
-          <a:prstGeom prst="line">
-            <a:avLst/>
-          </a:prstGeom>
-          <a:noFill/>
-          <a:ln w="13970">
-            <a:solidFill>
-              <a:srgbClr val="2D3338"/>
-            </a:solidFill>
-            <a:prstDash val="solid"/>
-          </a:ln>
-        </p:spPr>
-      </p:sp>
-      <p:sp>
-        <p:nvSpPr>
-          <p:cNvPr id="314" name="Shape 312"/>
-          <p:cNvSpPr/>
-          <p:nvPr/>
-        </p:nvSpPr>
-        <p:spPr>
-          <a:xfrm flipH="1">
-            <a:off x="2585574" y="4909947"/>
-            <a:ext cx="36576" cy="0"/>
-          </a:xfrm>
-          <a:prstGeom prst="line">
-            <a:avLst/>
-          </a:prstGeom>
-          <a:noFill/>
-          <a:ln w="13970">
-            <a:solidFill>
-              <a:srgbClr val="2D3338"/>
-            </a:solidFill>
-            <a:prstDash val="solid"/>
-            <a:tailEnd type="triangle"/>
-          </a:ln>
-        </p:spPr>
-      </p:sp>
-      <p:sp>
-        <p:nvSpPr>
-          <p:cNvPr id="315" name="Shape 313"/>
-          <p:cNvSpPr/>
-          <p:nvPr/>
-        </p:nvSpPr>
-        <p:spPr>
-          <a:xfrm>
-            <a:off x="2576430" y="4686681"/>
-            <a:ext cx="45720" cy="0"/>
-          </a:xfrm>
-          <a:prstGeom prst="line">
-            <a:avLst/>
-          </a:prstGeom>
-          <a:noFill/>
-          <a:ln w="13970">
-            <a:solidFill>
-              <a:srgbClr val="2D3338"/>
-            </a:solidFill>
-            <a:prstDash val="solid"/>
-          </a:ln>
-        </p:spPr>
-      </p:sp>
-      <p:sp>
-        <p:nvSpPr>
-          <p:cNvPr id="316" name="Shape 314"/>
-          <p:cNvSpPr/>
-          <p:nvPr/>
-        </p:nvSpPr>
-        <p:spPr>
-          <a:xfrm>
-            <a:off x="2622150" y="4686681"/>
-            <a:ext cx="0" cy="446532"/>
-          </a:xfrm>
-          <a:prstGeom prst="line">
-            <a:avLst/>
-          </a:prstGeom>
-          <a:noFill/>
-          <a:ln w="13970">
-            <a:solidFill>
-              <a:srgbClr val="2D3338"/>
-            </a:solidFill>
-            <a:prstDash val="solid"/>
-          </a:ln>
-        </p:spPr>
-      </p:sp>
-      <p:sp>
-        <p:nvSpPr>
-          <p:cNvPr id="317" name="Shape 315"/>
-          <p:cNvSpPr/>
-          <p:nvPr/>
-        </p:nvSpPr>
-        <p:spPr>
-          <a:xfrm flipH="1">
-            <a:off x="2585574" y="5133213"/>
-            <a:ext cx="36576" cy="0"/>
-          </a:xfrm>
-          <a:prstGeom prst="line">
-            <a:avLst/>
-          </a:prstGeom>
-          <a:noFill/>
-          <a:ln w="13970">
-            <a:solidFill>
-              <a:srgbClr val="2D3338"/>
-            </a:solidFill>
-            <a:prstDash val="solid"/>
-            <a:tailEnd type="triangle"/>
-          </a:ln>
-        </p:spPr>
-      </p:sp>
-      <p:sp>
-        <p:nvSpPr>
-          <p:cNvPr id="318" name="Shape 316"/>
-          <p:cNvSpPr/>
-          <p:nvPr/>
-        </p:nvSpPr>
-        <p:spPr>
-          <a:xfrm>
-            <a:off x="1386069" y="5133213"/>
-            <a:ext cx="45720" cy="0"/>
-          </a:xfrm>
-          <a:prstGeom prst="line">
-            <a:avLst/>
-          </a:prstGeom>
-          <a:noFill/>
-          <a:ln w="13970">
-            <a:solidFill>
-              <a:srgbClr val="2D3338"/>
-            </a:solidFill>
-            <a:prstDash val="solid"/>
-          </a:ln>
-        </p:spPr>
-      </p:sp>
-      <p:sp>
-        <p:nvSpPr>
-          <p:cNvPr id="319" name="Shape 317"/>
-          <p:cNvSpPr/>
-          <p:nvPr/>
-        </p:nvSpPr>
-        <p:spPr>
-          <a:xfrm>
-            <a:off x="1431789" y="5133213"/>
-            <a:ext cx="0" cy="223266"/>
-          </a:xfrm>
-          <a:prstGeom prst="line">
-            <a:avLst/>
-          </a:prstGeom>
-          <a:noFill/>
-          <a:ln w="13970">
-            <a:solidFill>
-              <a:srgbClr val="2D3338"/>
-            </a:solidFill>
-            <a:prstDash val="solid"/>
-          </a:ln>
-        </p:spPr>
-      </p:sp>
-      <p:sp>
-        <p:nvSpPr>
-          <p:cNvPr id="320" name="Shape 318"/>
-          <p:cNvSpPr/>
-          <p:nvPr/>
-        </p:nvSpPr>
-        <p:spPr>
-          <a:xfrm flipH="1">
-            <a:off x="1395213" y="5356479"/>
-            <a:ext cx="36576" cy="0"/>
-          </a:xfrm>
-          <a:prstGeom prst="line">
-            <a:avLst/>
-          </a:prstGeom>
-          <a:noFill/>
-          <a:ln w="13970">
-            <a:solidFill>
-              <a:srgbClr val="2D3338"/>
-            </a:solidFill>
-            <a:prstDash val="solid"/>
-            <a:tailEnd type="triangle"/>
-          </a:ln>
-        </p:spPr>
-      </p:sp>
-      <p:sp>
-        <p:nvSpPr>
-          <p:cNvPr id="321" name="Shape 319"/>
           <p:cNvSpPr/>
           <p:nvPr/>
         </p:nvSpPr>
@@ -17707,7 +17061,7 @@
       </p:sp>
       <p:sp>
         <p:nvSpPr>
-          <p:cNvPr id="322" name="Shape 320"/>
+          <p:cNvPr id="304" name="Shape 302"/>
           <p:cNvSpPr/>
           <p:nvPr/>
         </p:nvSpPr>
@@ -17734,7 +17088,7 @@
       </p:sp>
       <p:sp>
         <p:nvSpPr>
-          <p:cNvPr id="323" name="Text 321"/>
+          <p:cNvPr id="305" name="Text 303"/>
           <p:cNvSpPr/>
           <p:nvPr/>
         </p:nvSpPr>
@@ -17775,7 +17129,7 @@
       </p:sp>
       <p:sp>
         <p:nvSpPr>
-          <p:cNvPr id="324" name="Shape 322"/>
+          <p:cNvPr id="306" name="Shape 304"/>
           <p:cNvSpPr/>
           <p:nvPr/>
         </p:nvSpPr>
@@ -17802,7 +17156,7 @@
       </p:sp>
       <p:sp>
         <p:nvSpPr>
-          <p:cNvPr id="325" name="Shape 323"/>
+          <p:cNvPr id="307" name="Shape 305"/>
           <p:cNvSpPr/>
           <p:nvPr/>
         </p:nvSpPr>
@@ -17836,7 +17190,7 @@
       </p:sp>
       <p:sp>
         <p:nvSpPr>
-          <p:cNvPr id="326" name="Shape 324"/>
+          <p:cNvPr id="308" name="Shape 306"/>
           <p:cNvSpPr/>
           <p:nvPr/>
         </p:nvSpPr>
@@ -17861,7 +17215,7 @@
       </p:sp>
       <p:sp>
         <p:nvSpPr>
-          <p:cNvPr id="327" name="Text 325"/>
+          <p:cNvPr id="309" name="Text 307"/>
           <p:cNvSpPr/>
           <p:nvPr/>
         </p:nvSpPr>
@@ -17902,7 +17256,7 @@
       </p:sp>
       <p:sp>
         <p:nvSpPr>
-          <p:cNvPr id="328" name="Text 326"/>
+          <p:cNvPr id="310" name="Text 308"/>
           <p:cNvSpPr/>
           <p:nvPr/>
         </p:nvSpPr>
@@ -17943,7 +17297,7 @@
       </p:sp>
       <p:sp>
         <p:nvSpPr>
-          <p:cNvPr id="329" name="Text 327"/>
+          <p:cNvPr id="311" name="Text 309"/>
           <p:cNvSpPr/>
           <p:nvPr/>
         </p:nvSpPr>
@@ -17984,7 +17338,7 @@
       </p:sp>
       <p:sp>
         <p:nvSpPr>
-          <p:cNvPr id="330" name="Shape 328"/>
+          <p:cNvPr id="312" name="Shape 310"/>
           <p:cNvSpPr/>
           <p:nvPr/>
         </p:nvSpPr>
@@ -18018,7 +17372,7 @@
       </p:sp>
       <p:sp>
         <p:nvSpPr>
-          <p:cNvPr id="331" name="Shape 329"/>
+          <p:cNvPr id="313" name="Shape 311"/>
           <p:cNvSpPr/>
           <p:nvPr/>
         </p:nvSpPr>
@@ -18043,7 +17397,7 @@
       </p:sp>
       <p:sp>
         <p:nvSpPr>
-          <p:cNvPr id="332" name="Text 330"/>
+          <p:cNvPr id="314" name="Text 312"/>
           <p:cNvSpPr/>
           <p:nvPr/>
         </p:nvSpPr>
@@ -18084,7 +17438,7 @@
       </p:sp>
       <p:sp>
         <p:nvSpPr>
-          <p:cNvPr id="333" name="Text 331"/>
+          <p:cNvPr id="315" name="Text 313"/>
           <p:cNvSpPr/>
           <p:nvPr/>
         </p:nvSpPr>
@@ -18125,7 +17479,7 @@
       </p:sp>
       <p:sp>
         <p:nvSpPr>
-          <p:cNvPr id="334" name="Text 332"/>
+          <p:cNvPr id="316" name="Text 314"/>
           <p:cNvSpPr/>
           <p:nvPr/>
         </p:nvSpPr>
@@ -18166,7 +17520,7 @@
       </p:sp>
       <p:sp>
         <p:nvSpPr>
-          <p:cNvPr id="335" name="Shape 333"/>
+          <p:cNvPr id="317" name="Shape 315"/>
           <p:cNvSpPr/>
           <p:nvPr/>
         </p:nvSpPr>
@@ -18200,7 +17554,7 @@
       </p:sp>
       <p:sp>
         <p:nvSpPr>
-          <p:cNvPr id="336" name="Shape 334"/>
+          <p:cNvPr id="318" name="Shape 316"/>
           <p:cNvSpPr/>
           <p:nvPr/>
         </p:nvSpPr>
@@ -18225,7 +17579,7 @@
       </p:sp>
       <p:sp>
         <p:nvSpPr>
-          <p:cNvPr id="337" name="Text 335"/>
+          <p:cNvPr id="319" name="Text 317"/>
           <p:cNvSpPr/>
           <p:nvPr/>
         </p:nvSpPr>
@@ -18266,7 +17620,7 @@
       </p:sp>
       <p:sp>
         <p:nvSpPr>
-          <p:cNvPr id="338" name="Text 336"/>
+          <p:cNvPr id="320" name="Text 318"/>
           <p:cNvSpPr/>
           <p:nvPr/>
         </p:nvSpPr>
@@ -18307,7 +17661,7 @@
       </p:sp>
       <p:sp>
         <p:nvSpPr>
-          <p:cNvPr id="339" name="Text 337"/>
+          <p:cNvPr id="321" name="Text 319"/>
           <p:cNvSpPr/>
           <p:nvPr/>
         </p:nvSpPr>
@@ -18348,7 +17702,7 @@
       </p:sp>
       <p:sp>
         <p:nvSpPr>
-          <p:cNvPr id="340" name="Shape 338"/>
+          <p:cNvPr id="322" name="Shape 320"/>
           <p:cNvSpPr/>
           <p:nvPr/>
         </p:nvSpPr>
@@ -18382,7 +17736,7 @@
       </p:sp>
       <p:sp>
         <p:nvSpPr>
-          <p:cNvPr id="341" name="Shape 339"/>
+          <p:cNvPr id="323" name="Shape 321"/>
           <p:cNvSpPr/>
           <p:nvPr/>
         </p:nvSpPr>
@@ -18407,7 +17761,7 @@
       </p:sp>
       <p:sp>
         <p:nvSpPr>
-          <p:cNvPr id="342" name="Text 340"/>
+          <p:cNvPr id="324" name="Text 322"/>
           <p:cNvSpPr/>
           <p:nvPr/>
         </p:nvSpPr>
@@ -18448,7 +17802,7 @@
       </p:sp>
       <p:sp>
         <p:nvSpPr>
-          <p:cNvPr id="343" name="Text 341"/>
+          <p:cNvPr id="325" name="Text 323"/>
           <p:cNvSpPr/>
           <p:nvPr/>
         </p:nvSpPr>
@@ -18489,7 +17843,7 @@
       </p:sp>
       <p:sp>
         <p:nvSpPr>
-          <p:cNvPr id="344" name="Text 342"/>
+          <p:cNvPr id="326" name="Text 324"/>
           <p:cNvSpPr/>
           <p:nvPr/>
         </p:nvSpPr>
@@ -18530,7 +17884,7 @@
       </p:sp>
       <p:sp>
         <p:nvSpPr>
-          <p:cNvPr id="345" name="Shape 343"/>
+          <p:cNvPr id="327" name="Shape 325"/>
           <p:cNvSpPr/>
           <p:nvPr/>
         </p:nvSpPr>
@@ -18564,7 +17918,7 @@
       </p:sp>
       <p:sp>
         <p:nvSpPr>
-          <p:cNvPr id="346" name="Shape 344"/>
+          <p:cNvPr id="328" name="Shape 326"/>
           <p:cNvSpPr/>
           <p:nvPr/>
         </p:nvSpPr>
@@ -18589,7 +17943,7 @@
       </p:sp>
       <p:sp>
         <p:nvSpPr>
-          <p:cNvPr id="347" name="Text 345"/>
+          <p:cNvPr id="329" name="Text 327"/>
           <p:cNvSpPr/>
           <p:nvPr/>
         </p:nvSpPr>
@@ -18630,7 +17984,7 @@
       </p:sp>
       <p:sp>
         <p:nvSpPr>
-          <p:cNvPr id="348" name="Text 346"/>
+          <p:cNvPr id="330" name="Text 328"/>
           <p:cNvSpPr/>
           <p:nvPr/>
         </p:nvSpPr>
@@ -18671,7 +18025,7 @@
       </p:sp>
       <p:sp>
         <p:nvSpPr>
-          <p:cNvPr id="349" name="Text 347"/>
+          <p:cNvPr id="331" name="Text 329"/>
           <p:cNvSpPr/>
           <p:nvPr/>
         </p:nvSpPr>

--- a/ufwl-timeline/UFWL_Presentation_AR.pptx
+++ b/ufwl-timeline/UFWL_Presentation_AR.pptx
@@ -6631,7 +6631,7 @@
                 <a:ea typeface="Arial" pitchFamily="34" charset="-122"/>
                 <a:cs typeface="Arial" pitchFamily="34" charset="-120"/>
               </a:rPr>
-              <a:t>الأعمال المتبقية – برنامج أعمال الدعم والحفرة</a:t>
+              <a:t>خطة التخفيف – جدول الشورينج والخرسانة والردم</a:t>
             </a:r>
             <a:endParaRPr lang="ar-SA" sz="2400" dirty="0"/>
           </a:p>
@@ -8180,7 +8180,7 @@
         <p:spPr>
           <a:xfrm>
             <a:off x="5637357" y="1965960"/>
-            <a:ext cx="170052" cy="3502152"/>
+            <a:ext cx="170052" cy="2194560"/>
           </a:xfrm>
           <a:prstGeom prst="rect">
             <a:avLst/>
@@ -8316,7 +8316,7 @@
         <p:spPr>
           <a:xfrm>
             <a:off x="5637357" y="1965960"/>
-            <a:ext cx="0" cy="3502152"/>
+            <a:ext cx="0" cy="2194560"/>
           </a:xfrm>
           <a:prstGeom prst="line">
             <a:avLst/>
@@ -8981,7 +8981,7 @@
         <p:spPr>
           <a:xfrm>
             <a:off x="4446996" y="1965960"/>
-            <a:ext cx="170052" cy="3502152"/>
+            <a:ext cx="170052" cy="2194560"/>
           </a:xfrm>
           <a:prstGeom prst="rect">
             <a:avLst/>
@@ -9117,7 +9117,7 @@
         <p:spPr>
           <a:xfrm>
             <a:off x="4446996" y="1965960"/>
-            <a:ext cx="0" cy="3502152"/>
+            <a:ext cx="0" cy="2194560"/>
           </a:xfrm>
           <a:prstGeom prst="line">
             <a:avLst/>
@@ -9782,7 +9782,7 @@
         <p:spPr>
           <a:xfrm>
             <a:off x="3256636" y="1965960"/>
-            <a:ext cx="170052" cy="3502152"/>
+            <a:ext cx="170052" cy="2194560"/>
           </a:xfrm>
           <a:prstGeom prst="rect">
             <a:avLst/>
@@ -9918,7 +9918,7 @@
         <p:spPr>
           <a:xfrm>
             <a:off x="3256636" y="1965960"/>
-            <a:ext cx="0" cy="3502152"/>
+            <a:ext cx="0" cy="2194560"/>
           </a:xfrm>
           <a:prstGeom prst="line">
             <a:avLst/>
@@ -10583,7 +10583,7 @@
         <p:spPr>
           <a:xfrm>
             <a:off x="2066275" y="1965960"/>
-            <a:ext cx="170052" cy="3502152"/>
+            <a:ext cx="170052" cy="2194560"/>
           </a:xfrm>
           <a:prstGeom prst="rect">
             <a:avLst/>
@@ -10719,7 +10719,7 @@
         <p:spPr>
           <a:xfrm>
             <a:off x="2066275" y="1965960"/>
-            <a:ext cx="0" cy="3502152"/>
+            <a:ext cx="0" cy="2194560"/>
           </a:xfrm>
           <a:prstGeom prst="line">
             <a:avLst/>
@@ -11384,7 +11384,7 @@
         <p:spPr>
           <a:xfrm>
             <a:off x="875915" y="1965960"/>
-            <a:ext cx="170052" cy="3502152"/>
+            <a:ext cx="170052" cy="2194560"/>
           </a:xfrm>
           <a:prstGeom prst="rect">
             <a:avLst/>
@@ -11520,7 +11520,7 @@
         <p:spPr>
           <a:xfrm>
             <a:off x="875915" y="1965960"/>
-            <a:ext cx="0" cy="3502152"/>
+            <a:ext cx="0" cy="2194560"/>
           </a:xfrm>
           <a:prstGeom prst="line">
             <a:avLst/>
@@ -12080,7 +12080,7 @@
         <p:spPr>
           <a:xfrm>
             <a:off x="365760" y="2240280"/>
-            <a:ext cx="11460175" cy="268986"/>
+            <a:ext cx="11460175" cy="640080"/>
           </a:xfrm>
           <a:prstGeom prst="rect">
             <a:avLst/>
@@ -12104,7 +12104,7 @@
         </p:nvSpPr>
         <p:spPr>
           <a:xfrm>
-            <a:off x="11515039" y="2255901"/>
+            <a:off x="11515039" y="2441448"/>
             <a:ext cx="237744" cy="237744"/>
           </a:xfrm>
           <a:prstGeom prst="ellipse">
@@ -12130,7 +12130,7 @@
         <p:spPr>
           <a:xfrm>
             <a:off x="11441887" y="2240280"/>
-            <a:ext cx="384048" cy="268986"/>
+            <a:ext cx="384048" cy="640080"/>
           </a:xfrm>
           <a:prstGeom prst="rect">
             <a:avLst/>
@@ -12171,7 +12171,7 @@
         <p:spPr>
           <a:xfrm>
             <a:off x="8762695" y="2240280"/>
-            <a:ext cx="2606040" cy="268986"/>
+            <a:ext cx="2606040" cy="640080"/>
           </a:xfrm>
           <a:prstGeom prst="rect">
             <a:avLst/>
@@ -12189,7 +12189,7 @@
               <a:buNone/>
             </a:pPr>
             <a:r>
-              <a:rPr lang="ar-SA" altLang="en-US" sz="750" b="1" dirty="0">
+              <a:rPr lang="ar-SA" altLang="en-US" sz="900" b="1" dirty="0">
                 <a:solidFill>
                   <a:srgbClr val="222222"/>
                 </a:solidFill>
@@ -12199,7 +12199,7 @@
               </a:rPr>
               <a:t>تركيب نظام الدعم (Shoring)</a:t>
             </a:r>
-            <a:endParaRPr lang="ar-SA" sz="750" dirty="0"/>
+            <a:endParaRPr lang="ar-SA" sz="900" dirty="0"/>
           </a:p>
         </p:txBody>
       </p:sp>
@@ -12212,7 +12212,7 @@
         <p:spPr>
           <a:xfrm>
             <a:off x="7967167" y="2240280"/>
-            <a:ext cx="777240" cy="268986"/>
+            <a:ext cx="777240" cy="640080"/>
           </a:xfrm>
           <a:prstGeom prst="rect">
             <a:avLst/>
@@ -12230,7 +12230,7 @@
               <a:buNone/>
             </a:pPr>
             <a:r>
-              <a:rPr lang="ar-SA" altLang="en-US" sz="700" dirty="0">
+              <a:rPr lang="ar-SA" altLang="en-US" sz="850" dirty="0">
                 <a:solidFill>
                   <a:srgbClr val="444444"/>
                 </a:solidFill>
@@ -12240,7 +12240,7 @@
               </a:rPr>
               <a:t>—</a:t>
             </a:r>
-            <a:endParaRPr lang="ar-SA" sz="700" dirty="0"/>
+            <a:endParaRPr lang="ar-SA" sz="850" dirty="0"/>
           </a:p>
         </p:txBody>
       </p:sp>
@@ -12253,7 +12253,7 @@
         <p:spPr>
           <a:xfrm>
             <a:off x="7464247" y="2240280"/>
-            <a:ext cx="502920" cy="268986"/>
+            <a:ext cx="502920" cy="640080"/>
           </a:xfrm>
           <a:prstGeom prst="rect">
             <a:avLst/>
@@ -12271,7 +12271,7 @@
               <a:buNone/>
             </a:pPr>
             <a:r>
-              <a:rPr lang="ar-SA" altLang="en-US" sz="900" b="1" dirty="0">
+              <a:rPr lang="ar-SA" altLang="en-US" sz="1050" b="1" dirty="0">
                 <a:solidFill>
                   <a:srgbClr val="222222"/>
                 </a:solidFill>
@@ -12281,7 +12281,7 @@
               </a:rPr>
               <a:t>4</a:t>
             </a:r>
-            <a:endParaRPr lang="ar-SA" sz="900" dirty="0"/>
+            <a:endParaRPr lang="ar-SA" sz="1050" dirty="0"/>
           </a:p>
         </p:txBody>
       </p:sp>
@@ -12294,7 +12294,7 @@
         <p:spPr>
           <a:xfrm>
             <a:off x="6805879" y="2240280"/>
-            <a:ext cx="658368" cy="268986"/>
+            <a:ext cx="658368" cy="640080"/>
           </a:xfrm>
           <a:prstGeom prst="rect">
             <a:avLst/>
@@ -12312,7 +12312,7 @@
               <a:buNone/>
             </a:pPr>
             <a:r>
-              <a:rPr lang="ar-SA" altLang="en-US" sz="700" b="1" dirty="0">
+              <a:rPr lang="ar-SA" altLang="en-US" sz="850" b="1" dirty="0">
                 <a:solidFill>
                   <a:srgbClr val="222222"/>
                 </a:solidFill>
@@ -12322,7 +12322,7 @@
               </a:rPr>
               <a:t>22 أكتوبر</a:t>
             </a:r>
-            <a:endParaRPr lang="ar-SA" sz="700" dirty="0"/>
+            <a:endParaRPr lang="ar-SA" sz="850" dirty="0"/>
           </a:p>
         </p:txBody>
       </p:sp>
@@ -12335,7 +12335,7 @@
         <p:spPr>
           <a:xfrm>
             <a:off x="6147511" y="2240280"/>
-            <a:ext cx="658368" cy="268986"/>
+            <a:ext cx="658368" cy="640080"/>
           </a:xfrm>
           <a:prstGeom prst="rect">
             <a:avLst/>
@@ -12353,7 +12353,7 @@
               <a:buNone/>
             </a:pPr>
             <a:r>
-              <a:rPr lang="ar-SA" altLang="en-US" sz="700" b="1" dirty="0">
+              <a:rPr lang="ar-SA" altLang="en-US" sz="850" b="1" dirty="0">
                 <a:solidFill>
                   <a:srgbClr val="222222"/>
                 </a:solidFill>
@@ -12363,7 +12363,7 @@
               </a:rPr>
               <a:t>26 أكتوبر</a:t>
             </a:r>
-            <a:endParaRPr lang="ar-SA" sz="700" dirty="0"/>
+            <a:endParaRPr lang="ar-SA" sz="850" dirty="0"/>
           </a:p>
         </p:txBody>
       </p:sp>
@@ -12375,430 +12375,16 @@
         </p:nvSpPr>
         <p:spPr>
           <a:xfrm>
-            <a:off x="3936842" y="2315337"/>
-            <a:ext cx="850258" cy="64008"/>
-          </a:xfrm>
-          <a:prstGeom prst="rect">
-            <a:avLst/>
-          </a:prstGeom>
-          <a:solidFill>
-            <a:srgbClr val="C8503F"/>
-          </a:solidFill>
-          <a:ln w="12700">
-            <a:solidFill>
-              <a:srgbClr val="C8503F"/>
-            </a:solidFill>
-            <a:prstDash val="solid"/>
-          </a:ln>
-        </p:spPr>
-      </p:sp>
-      <p:sp>
-        <p:nvSpPr>
-          <p:cNvPr id="168" name="Shape 166"/>
-          <p:cNvSpPr/>
-          <p:nvPr/>
-        </p:nvSpPr>
-        <p:spPr>
-          <a:xfrm flipV="1">
-            <a:off x="4723091" y="2379345"/>
-            <a:ext cx="64008" cy="54864"/>
-          </a:xfrm>
-          <a:prstGeom prst="triangle">
-            <a:avLst/>
-          </a:prstGeom>
-          <a:solidFill>
-            <a:srgbClr val="C8503F"/>
-          </a:solidFill>
-          <a:ln w="12700">
-            <a:solidFill>
-              <a:srgbClr val="C8503F"/>
-            </a:solidFill>
-            <a:prstDash val="solid"/>
-          </a:ln>
-        </p:spPr>
-      </p:sp>
-      <p:sp>
-        <p:nvSpPr>
-          <p:cNvPr id="169" name="Shape 167"/>
-          <p:cNvSpPr/>
-          <p:nvPr/>
-        </p:nvSpPr>
-        <p:spPr>
-          <a:xfrm flipV="1">
-            <a:off x="3936842" y="2379345"/>
-            <a:ext cx="64008" cy="54864"/>
-          </a:xfrm>
-          <a:prstGeom prst="triangle">
-            <a:avLst/>
-          </a:prstGeom>
-          <a:solidFill>
-            <a:srgbClr val="C8503F"/>
-          </a:solidFill>
-          <a:ln w="12700">
-            <a:solidFill>
-              <a:srgbClr val="C8503F"/>
-            </a:solidFill>
-            <a:prstDash val="solid"/>
-          </a:ln>
-        </p:spPr>
-      </p:sp>
-      <p:sp>
-        <p:nvSpPr>
-          <p:cNvPr id="170" name="Text 168"/>
-          <p:cNvSpPr/>
-          <p:nvPr/>
-        </p:nvSpPr>
-        <p:spPr>
-          <a:xfrm>
-            <a:off x="3342482" y="2240280"/>
-            <a:ext cx="548640" cy="268986"/>
-          </a:xfrm>
-          <a:prstGeom prst="rect">
-            <a:avLst/>
-          </a:prstGeom>
-          <a:noFill/>
-          <a:ln/>
-        </p:spPr>
-        <p:txBody>
-          <a:bodyPr wrap="square" lIns="0" tIns="0" rIns="0" bIns="0" rtlCol="0" anchor="ctr">
-            <a:normAutofit/>
-          </a:bodyPr>
-          <a:lstStyle/>
-          <a:p>
-            <a:pPr rtl="1" algn="r" indent="0" marL="0">
-              <a:buNone/>
-            </a:pPr>
-            <a:r>
-              <a:rPr lang="ar-SA" altLang="en-US" sz="750" b="1" dirty="0">
-                <a:solidFill>
-                  <a:srgbClr val="3D3935"/>
-                </a:solidFill>
-                <a:latin typeface="Arial" pitchFamily="34" charset="0"/>
-                <a:ea typeface="Arial" pitchFamily="34" charset="-122"/>
-                <a:cs typeface="Arial" pitchFamily="34" charset="-120"/>
-              </a:rPr>
-              <a:t>4 يوم</a:t>
-            </a:r>
-            <a:endParaRPr lang="ar-SA" sz="750" dirty="0"/>
-          </a:p>
-        </p:txBody>
-      </p:sp>
-      <p:sp>
-        <p:nvSpPr>
-          <p:cNvPr id="171" name="Shape 169"/>
-          <p:cNvSpPr/>
-          <p:nvPr/>
-        </p:nvSpPr>
-        <p:spPr>
-          <a:xfrm>
-            <a:off x="365760" y="2509266"/>
-            <a:ext cx="11460175" cy="268986"/>
-          </a:xfrm>
-          <a:prstGeom prst="rect">
-            <a:avLst/>
-          </a:prstGeom>
-          <a:solidFill>
-            <a:srgbClr val="F6F9FA"/>
-          </a:solidFill>
-          <a:ln w="6350">
-            <a:solidFill>
-              <a:srgbClr val="DFE6EA"/>
-            </a:solidFill>
-            <a:prstDash val="solid"/>
-          </a:ln>
-        </p:spPr>
-      </p:sp>
-      <p:sp>
-        <p:nvSpPr>
-          <p:cNvPr id="172" name="Shape 170"/>
-          <p:cNvSpPr/>
-          <p:nvPr/>
-        </p:nvSpPr>
-        <p:spPr>
-          <a:xfrm>
-            <a:off x="11441887" y="2566035"/>
-            <a:ext cx="329184" cy="155448"/>
+            <a:off x="3936842" y="2404872"/>
+            <a:ext cx="850258" cy="310896"/>
           </a:xfrm>
           <a:prstGeom prst="roundRect">
             <a:avLst>
-              <a:gd name="adj" fmla="val 50000"/>
+              <a:gd name="adj" fmla="val 11765"/>
             </a:avLst>
           </a:prstGeom>
           <a:solidFill>
-            <a:srgbClr val="D9695A"/>
-          </a:solidFill>
-          <a:ln w="19050">
-            <a:solidFill>
-              <a:srgbClr val="222222"/>
-            </a:solidFill>
-            <a:prstDash val="solid"/>
-          </a:ln>
-        </p:spPr>
-      </p:sp>
-      <p:sp>
-        <p:nvSpPr>
-          <p:cNvPr id="173" name="Text 171"/>
-          <p:cNvSpPr/>
-          <p:nvPr/>
-        </p:nvSpPr>
-        <p:spPr>
-          <a:xfrm>
-            <a:off x="11414455" y="2509266"/>
-            <a:ext cx="384048" cy="268986"/>
-          </a:xfrm>
-          <a:prstGeom prst="rect">
-            <a:avLst/>
-          </a:prstGeom>
-          <a:noFill/>
-          <a:ln/>
-        </p:spPr>
-        <p:txBody>
-          <a:bodyPr wrap="square" lIns="0" tIns="0" rIns="0" bIns="0" rtlCol="0" anchor="ctr">
-            <a:normAutofit/>
-          </a:bodyPr>
-          <a:lstStyle/>
-          <a:p>
-            <a:pPr rtl="1" algn="ctr" indent="0" marL="0">
-              <a:buNone/>
-            </a:pPr>
-            <a:r>
-              <a:rPr lang="ar-SA" altLang="en-US" sz="650" b="1" dirty="0">
-                <a:solidFill>
-                  <a:srgbClr val="FFFFFF"/>
-                </a:solidFill>
-                <a:latin typeface="Arial" pitchFamily="34" charset="0"/>
-                <a:ea typeface="Arial" pitchFamily="34" charset="-122"/>
-                <a:cs typeface="Arial" pitchFamily="34" charset="-120"/>
-              </a:rPr>
-              <a:t>A.1</a:t>
-            </a:r>
-            <a:endParaRPr lang="ar-SA" sz="650" dirty="0"/>
-          </a:p>
-        </p:txBody>
-      </p:sp>
-      <p:sp>
-        <p:nvSpPr>
-          <p:cNvPr id="174" name="Text 172"/>
-          <p:cNvSpPr/>
-          <p:nvPr/>
-        </p:nvSpPr>
-        <p:spPr>
-          <a:xfrm>
-            <a:off x="8762695" y="2509266"/>
-            <a:ext cx="2441448" cy="268986"/>
-          </a:xfrm>
-          <a:prstGeom prst="rect">
-            <a:avLst/>
-          </a:prstGeom>
-          <a:noFill/>
-          <a:ln/>
-        </p:spPr>
-        <p:txBody>
-          <a:bodyPr wrap="square" lIns="0" tIns="0" rIns="0" bIns="0" rtlCol="0" anchor="ctr">
-            <a:normAutofit/>
-          </a:bodyPr>
-          <a:lstStyle/>
-          <a:p>
-            <a:pPr rtl="1" algn="r" indent="0" marL="0">
-              <a:buNone/>
-            </a:pPr>
-            <a:r>
-              <a:rPr lang="ar-SA" altLang="en-US" sz="700" dirty="0">
-                <a:solidFill>
-                  <a:srgbClr val="222222"/>
-                </a:solidFill>
-                <a:latin typeface="Arial" pitchFamily="34" charset="0"/>
-                <a:ea typeface="Arial" pitchFamily="34" charset="-122"/>
-                <a:cs typeface="Arial" pitchFamily="34" charset="-120"/>
-              </a:rPr>
-              <a:t>الحفر لأعمدة H-Beam</a:t>
-            </a:r>
-            <a:endParaRPr lang="ar-SA" sz="700" dirty="0"/>
-          </a:p>
-        </p:txBody>
-      </p:sp>
-      <p:sp>
-        <p:nvSpPr>
-          <p:cNvPr id="175" name="Text 173"/>
-          <p:cNvSpPr/>
-          <p:nvPr/>
-        </p:nvSpPr>
-        <p:spPr>
-          <a:xfrm>
-            <a:off x="7967167" y="2509266"/>
-            <a:ext cx="777240" cy="268986"/>
-          </a:xfrm>
-          <a:prstGeom prst="rect">
-            <a:avLst/>
-          </a:prstGeom>
-          <a:noFill/>
-          <a:ln/>
-        </p:spPr>
-        <p:txBody>
-          <a:bodyPr wrap="square" lIns="0" tIns="0" rIns="0" bIns="0" rtlCol="0" anchor="ctr">
-            <a:normAutofit/>
-          </a:bodyPr>
-          <a:lstStyle/>
-          <a:p>
-            <a:pPr rtl="1" algn="ctr" indent="0" marL="0">
-              <a:buNone/>
-            </a:pPr>
-            <a:r>
-              <a:rPr lang="ar-SA" altLang="en-US" sz="700" dirty="0">
-                <a:solidFill>
-                  <a:srgbClr val="444444"/>
-                </a:solidFill>
-                <a:latin typeface="Arial" pitchFamily="34" charset="0"/>
-                <a:ea typeface="Arial" pitchFamily="34" charset="-122"/>
-                <a:cs typeface="Arial" pitchFamily="34" charset="-120"/>
-              </a:rPr>
-              <a:t>—</a:t>
-            </a:r>
-            <a:endParaRPr lang="ar-SA" sz="700" dirty="0"/>
-          </a:p>
-        </p:txBody>
-      </p:sp>
-      <p:sp>
-        <p:nvSpPr>
-          <p:cNvPr id="176" name="Text 174"/>
-          <p:cNvSpPr/>
-          <p:nvPr/>
-        </p:nvSpPr>
-        <p:spPr>
-          <a:xfrm>
-            <a:off x="7464247" y="2509266"/>
-            <a:ext cx="502920" cy="268986"/>
-          </a:xfrm>
-          <a:prstGeom prst="rect">
-            <a:avLst/>
-          </a:prstGeom>
-          <a:noFill/>
-          <a:ln/>
-        </p:spPr>
-        <p:txBody>
-          <a:bodyPr wrap="square" lIns="0" tIns="0" rIns="0" bIns="0" rtlCol="0" anchor="ctr">
-            <a:normAutofit/>
-          </a:bodyPr>
-          <a:lstStyle/>
-          <a:p>
-            <a:pPr rtl="1" algn="ctr" indent="0" marL="0">
-              <a:buNone/>
-            </a:pPr>
-            <a:r>
-              <a:rPr lang="ar-SA" altLang="en-US" sz="900" b="1" dirty="0">
-                <a:solidFill>
-                  <a:srgbClr val="222222"/>
-                </a:solidFill>
-                <a:latin typeface="Arial" pitchFamily="34" charset="0"/>
-                <a:ea typeface="Arial" pitchFamily="34" charset="-122"/>
-                <a:cs typeface="Arial" pitchFamily="34" charset="-120"/>
-              </a:rPr>
-              <a:t>2</a:t>
-            </a:r>
-            <a:endParaRPr lang="ar-SA" sz="900" dirty="0"/>
-          </a:p>
-        </p:txBody>
-      </p:sp>
-      <p:sp>
-        <p:nvSpPr>
-          <p:cNvPr id="177" name="Text 175"/>
-          <p:cNvSpPr/>
-          <p:nvPr/>
-        </p:nvSpPr>
-        <p:spPr>
-          <a:xfrm>
-            <a:off x="6805879" y="2509266"/>
-            <a:ext cx="658368" cy="268986"/>
-          </a:xfrm>
-          <a:prstGeom prst="rect">
-            <a:avLst/>
-          </a:prstGeom>
-          <a:noFill/>
-          <a:ln/>
-        </p:spPr>
-        <p:txBody>
-          <a:bodyPr wrap="square" lIns="0" tIns="0" rIns="0" bIns="0" rtlCol="0" anchor="ctr">
-            <a:normAutofit/>
-          </a:bodyPr>
-          <a:lstStyle/>
-          <a:p>
-            <a:pPr rtl="1" algn="ctr" indent="0" marL="0">
-              <a:buNone/>
-            </a:pPr>
-            <a:r>
-              <a:rPr lang="ar-SA" altLang="en-US" sz="700" b="1" dirty="0">
-                <a:solidFill>
-                  <a:srgbClr val="222222"/>
-                </a:solidFill>
-                <a:latin typeface="Arial" pitchFamily="34" charset="0"/>
-                <a:ea typeface="Arial" pitchFamily="34" charset="-122"/>
-                <a:cs typeface="Arial" pitchFamily="34" charset="-120"/>
-              </a:rPr>
-              <a:t>22 أكتوبر</a:t>
-            </a:r>
-            <a:endParaRPr lang="ar-SA" sz="700" dirty="0"/>
-          </a:p>
-        </p:txBody>
-      </p:sp>
-      <p:sp>
-        <p:nvSpPr>
-          <p:cNvPr id="178" name="Text 176"/>
-          <p:cNvSpPr/>
-          <p:nvPr/>
-        </p:nvSpPr>
-        <p:spPr>
-          <a:xfrm>
-            <a:off x="6147511" y="2509266"/>
-            <a:ext cx="658368" cy="268986"/>
-          </a:xfrm>
-          <a:prstGeom prst="rect">
-            <a:avLst/>
-          </a:prstGeom>
-          <a:noFill/>
-          <a:ln/>
-        </p:spPr>
-        <p:txBody>
-          <a:bodyPr wrap="square" lIns="0" tIns="0" rIns="0" bIns="0" rtlCol="0" anchor="ctr">
-            <a:normAutofit/>
-          </a:bodyPr>
-          <a:lstStyle/>
-          <a:p>
-            <a:pPr rtl="1" algn="ctr" indent="0" marL="0">
-              <a:buNone/>
-            </a:pPr>
-            <a:r>
-              <a:rPr lang="ar-SA" altLang="en-US" sz="700" b="1" dirty="0">
-                <a:solidFill>
-                  <a:srgbClr val="222222"/>
-                </a:solidFill>
-                <a:latin typeface="Arial" pitchFamily="34" charset="0"/>
-                <a:ea typeface="Arial" pitchFamily="34" charset="-122"/>
-                <a:cs typeface="Arial" pitchFamily="34" charset="-120"/>
-              </a:rPr>
-              <a:t>24 أكتوبر</a:t>
-            </a:r>
-            <a:endParaRPr lang="ar-SA" sz="700" dirty="0"/>
-          </a:p>
-        </p:txBody>
-      </p:sp>
-      <p:sp>
-        <p:nvSpPr>
-          <p:cNvPr id="179" name="Shape 177"/>
-          <p:cNvSpPr/>
-          <p:nvPr/>
-        </p:nvSpPr>
-        <p:spPr>
-          <a:xfrm>
-            <a:off x="4276945" y="2565753"/>
-            <a:ext cx="510155" cy="156012"/>
-          </a:xfrm>
-          <a:prstGeom prst="roundRect">
-            <a:avLst>
-              <a:gd name="adj" fmla="val 23444"/>
-            </a:avLst>
-          </a:prstGeom>
-          <a:solidFill>
-            <a:srgbClr val="D9695A"/>
+            <a:srgbClr val="C8503F"/>
           </a:solidFill>
           <a:ln w="19050">
             <a:solidFill>
@@ -12817,14 +12403,14 @@
       </p:sp>
       <p:sp>
         <p:nvSpPr>
-          <p:cNvPr id="180" name="Text 178"/>
-          <p:cNvSpPr/>
-          <p:nvPr/>
-        </p:nvSpPr>
-        <p:spPr>
-          <a:xfrm>
-            <a:off x="4276945" y="2565753"/>
-            <a:ext cx="510155" cy="156012"/>
+          <p:cNvPr id="168" name="Text 166"/>
+          <p:cNvSpPr/>
+          <p:nvPr/>
+        </p:nvSpPr>
+        <p:spPr>
+          <a:xfrm>
+            <a:off x="3936842" y="2404872"/>
+            <a:ext cx="850258" cy="310896"/>
           </a:xfrm>
           <a:prstGeom prst="rect">
             <a:avLst/>
@@ -12850,7 +12436,7 @@
                 <a:ea typeface="Arial" pitchFamily="34" charset="-122"/>
                 <a:cs typeface="Arial" pitchFamily="34" charset="-120"/>
               </a:rPr>
-              <a:t>2 يوم</a:t>
+              <a:t>4 يوم</a:t>
             </a:r>
             <a:endParaRPr lang="ar-SA" sz="700" dirty="0"/>
           </a:p>
@@ -12858,20 +12444,20 @@
       </p:sp>
       <p:sp>
         <p:nvSpPr>
-          <p:cNvPr id="181" name="Shape 179"/>
-          <p:cNvSpPr/>
-          <p:nvPr/>
-        </p:nvSpPr>
-        <p:spPr>
-          <a:xfrm>
-            <a:off x="365760" y="2778252"/>
-            <a:ext cx="11460175" cy="268986"/>
-          </a:xfrm>
-          <a:prstGeom prst="rect">
-            <a:avLst/>
-          </a:prstGeom>
-          <a:solidFill>
-            <a:srgbClr val="FFFFFF"/>
+          <p:cNvPr id="169" name="Shape 167"/>
+          <p:cNvSpPr/>
+          <p:nvPr/>
+        </p:nvSpPr>
+        <p:spPr>
+          <a:xfrm>
+            <a:off x="365760" y="2880360"/>
+            <a:ext cx="11460175" cy="640080"/>
+          </a:xfrm>
+          <a:prstGeom prst="rect">
+            <a:avLst/>
+          </a:prstGeom>
+          <a:solidFill>
+            <a:srgbClr val="F6F9FA"/>
           </a:solidFill>
           <a:ln w="6350">
             <a:solidFill>
@@ -12883,295 +12469,293 @@
       </p:sp>
       <p:sp>
         <p:nvSpPr>
-          <p:cNvPr id="182" name="Shape 180"/>
-          <p:cNvSpPr/>
-          <p:nvPr/>
-        </p:nvSpPr>
-        <p:spPr>
-          <a:xfrm>
-            <a:off x="11441887" y="2835021"/>
-            <a:ext cx="329184" cy="155448"/>
+          <p:cNvPr id="170" name="Shape 168"/>
+          <p:cNvSpPr/>
+          <p:nvPr/>
+        </p:nvSpPr>
+        <p:spPr>
+          <a:xfrm>
+            <a:off x="11515039" y="3081528"/>
+            <a:ext cx="237744" cy="237744"/>
+          </a:xfrm>
+          <a:prstGeom prst="ellipse">
+            <a:avLst/>
+          </a:prstGeom>
+          <a:solidFill>
+            <a:srgbClr val="2E9E6B"/>
+          </a:solidFill>
+          <a:ln w="19050">
+            <a:solidFill>
+              <a:srgbClr val="222222"/>
+            </a:solidFill>
+            <a:prstDash val="solid"/>
+          </a:ln>
+        </p:spPr>
+      </p:sp>
+      <p:sp>
+        <p:nvSpPr>
+          <p:cNvPr id="171" name="Text 169"/>
+          <p:cNvSpPr/>
+          <p:nvPr/>
+        </p:nvSpPr>
+        <p:spPr>
+          <a:xfrm>
+            <a:off x="11441887" y="2880360"/>
+            <a:ext cx="384048" cy="640080"/>
+          </a:xfrm>
+          <a:prstGeom prst="rect">
+            <a:avLst/>
+          </a:prstGeom>
+          <a:noFill/>
+          <a:ln/>
+        </p:spPr>
+        <p:txBody>
+          <a:bodyPr wrap="square" lIns="0" tIns="0" rIns="0" bIns="0" rtlCol="0" anchor="ctr">
+            <a:normAutofit/>
+          </a:bodyPr>
+          <a:lstStyle/>
+          <a:p>
+            <a:pPr rtl="1" algn="ctr" indent="0" marL="0">
+              <a:buNone/>
+            </a:pPr>
+            <a:r>
+              <a:rPr lang="ar-SA" altLang="en-US" sz="850" b="1" dirty="0">
+                <a:solidFill>
+                  <a:srgbClr val="FFFFFF"/>
+                </a:solidFill>
+                <a:latin typeface="Arial" pitchFamily="34" charset="0"/>
+                <a:ea typeface="Arial" pitchFamily="34" charset="-122"/>
+                <a:cs typeface="Arial" pitchFamily="34" charset="-120"/>
+              </a:rPr>
+              <a:t>F</a:t>
+            </a:r>
+            <a:endParaRPr lang="ar-SA" sz="850" dirty="0"/>
+          </a:p>
+        </p:txBody>
+      </p:sp>
+      <p:sp>
+        <p:nvSpPr>
+          <p:cNvPr id="172" name="Text 170"/>
+          <p:cNvSpPr/>
+          <p:nvPr/>
+        </p:nvSpPr>
+        <p:spPr>
+          <a:xfrm>
+            <a:off x="8762695" y="2880360"/>
+            <a:ext cx="2606040" cy="640080"/>
+          </a:xfrm>
+          <a:prstGeom prst="rect">
+            <a:avLst/>
+          </a:prstGeom>
+          <a:noFill/>
+          <a:ln/>
+        </p:spPr>
+        <p:txBody>
+          <a:bodyPr wrap="square" lIns="0" tIns="0" rIns="0" bIns="0" rtlCol="0" anchor="ctr">
+            <a:normAutofit/>
+          </a:bodyPr>
+          <a:lstStyle/>
+          <a:p>
+            <a:pPr rtl="1" algn="r" indent="0" marL="0">
+              <a:buNone/>
+            </a:pPr>
+            <a:r>
+              <a:rPr lang="ar-SA" altLang="en-US" sz="900" b="1" dirty="0">
+                <a:solidFill>
+                  <a:srgbClr val="222222"/>
+                </a:solidFill>
+                <a:latin typeface="Arial" pitchFamily="34" charset="0"/>
+                <a:ea typeface="Arial" pitchFamily="34" charset="-122"/>
+                <a:cs typeface="Arial" pitchFamily="34" charset="-120"/>
+              </a:rPr>
+              <a:t>أساسات المبنى – حفر ودمك / اختبار وحديد تسليح وخرسانة</a:t>
+            </a:r>
+            <a:endParaRPr lang="ar-SA" sz="900" dirty="0"/>
+          </a:p>
+        </p:txBody>
+      </p:sp>
+      <p:sp>
+        <p:nvSpPr>
+          <p:cNvPr id="173" name="Text 171"/>
+          <p:cNvSpPr/>
+          <p:nvPr/>
+        </p:nvSpPr>
+        <p:spPr>
+          <a:xfrm>
+            <a:off x="7967167" y="2880360"/>
+            <a:ext cx="777240" cy="640080"/>
+          </a:xfrm>
+          <a:prstGeom prst="rect">
+            <a:avLst/>
+          </a:prstGeom>
+          <a:noFill/>
+          <a:ln/>
+        </p:spPr>
+        <p:txBody>
+          <a:bodyPr wrap="square" lIns="0" tIns="0" rIns="0" bIns="0" rtlCol="0" anchor="ctr">
+            <a:normAutofit/>
+          </a:bodyPr>
+          <a:lstStyle/>
+          <a:p>
+            <a:pPr rtl="1" algn="ctr" indent="0" marL="0">
+              <a:buNone/>
+            </a:pPr>
+            <a:r>
+              <a:rPr lang="ar-SA" altLang="en-US" sz="850" dirty="0">
+                <a:solidFill>
+                  <a:srgbClr val="444444"/>
+                </a:solidFill>
+                <a:latin typeface="Arial" pitchFamily="34" charset="0"/>
+                <a:ea typeface="Arial" pitchFamily="34" charset="-122"/>
+                <a:cs typeface="Arial" pitchFamily="34" charset="-120"/>
+              </a:rPr>
+              <a:t>A · FS</a:t>
+            </a:r>
+            <a:endParaRPr lang="ar-SA" sz="850" dirty="0"/>
+          </a:p>
+        </p:txBody>
+      </p:sp>
+      <p:sp>
+        <p:nvSpPr>
+          <p:cNvPr id="174" name="Text 172"/>
+          <p:cNvSpPr/>
+          <p:nvPr/>
+        </p:nvSpPr>
+        <p:spPr>
+          <a:xfrm>
+            <a:off x="7464247" y="2880360"/>
+            <a:ext cx="502920" cy="640080"/>
+          </a:xfrm>
+          <a:prstGeom prst="rect">
+            <a:avLst/>
+          </a:prstGeom>
+          <a:noFill/>
+          <a:ln/>
+        </p:spPr>
+        <p:txBody>
+          <a:bodyPr wrap="square" lIns="0" tIns="0" rIns="0" bIns="0" rtlCol="0" anchor="ctr">
+            <a:normAutofit/>
+          </a:bodyPr>
+          <a:lstStyle/>
+          <a:p>
+            <a:pPr rtl="1" algn="ctr" indent="0" marL="0">
+              <a:buNone/>
+            </a:pPr>
+            <a:r>
+              <a:rPr lang="ar-SA" altLang="en-US" sz="1050" b="1" dirty="0">
+                <a:solidFill>
+                  <a:srgbClr val="222222"/>
+                </a:solidFill>
+                <a:latin typeface="Arial" pitchFamily="34" charset="0"/>
+                <a:ea typeface="Arial" pitchFamily="34" charset="-122"/>
+                <a:cs typeface="Arial" pitchFamily="34" charset="-120"/>
+              </a:rPr>
+              <a:t>14</a:t>
+            </a:r>
+            <a:endParaRPr lang="ar-SA" sz="1050" dirty="0"/>
+          </a:p>
+        </p:txBody>
+      </p:sp>
+      <p:sp>
+        <p:nvSpPr>
+          <p:cNvPr id="175" name="Text 173"/>
+          <p:cNvSpPr/>
+          <p:nvPr/>
+        </p:nvSpPr>
+        <p:spPr>
+          <a:xfrm>
+            <a:off x="6805879" y="2880360"/>
+            <a:ext cx="658368" cy="640080"/>
+          </a:xfrm>
+          <a:prstGeom prst="rect">
+            <a:avLst/>
+          </a:prstGeom>
+          <a:noFill/>
+          <a:ln/>
+        </p:spPr>
+        <p:txBody>
+          <a:bodyPr wrap="square" lIns="0" tIns="0" rIns="0" bIns="0" rtlCol="0" anchor="ctr">
+            <a:normAutofit/>
+          </a:bodyPr>
+          <a:lstStyle/>
+          <a:p>
+            <a:pPr rtl="1" algn="ctr" indent="0" marL="0">
+              <a:buNone/>
+            </a:pPr>
+            <a:r>
+              <a:rPr lang="ar-SA" altLang="en-US" sz="850" b="1" dirty="0">
+                <a:solidFill>
+                  <a:srgbClr val="222222"/>
+                </a:solidFill>
+                <a:latin typeface="Arial" pitchFamily="34" charset="0"/>
+                <a:ea typeface="Arial" pitchFamily="34" charset="-122"/>
+                <a:cs typeface="Arial" pitchFamily="34" charset="-120"/>
+              </a:rPr>
+              <a:t>27 أكتوبر</a:t>
+            </a:r>
+            <a:endParaRPr lang="ar-SA" sz="850" dirty="0"/>
+          </a:p>
+        </p:txBody>
+      </p:sp>
+      <p:sp>
+        <p:nvSpPr>
+          <p:cNvPr id="176" name="Text 174"/>
+          <p:cNvSpPr/>
+          <p:nvPr/>
+        </p:nvSpPr>
+        <p:spPr>
+          <a:xfrm>
+            <a:off x="6147511" y="2880360"/>
+            <a:ext cx="658368" cy="640080"/>
+          </a:xfrm>
+          <a:prstGeom prst="rect">
+            <a:avLst/>
+          </a:prstGeom>
+          <a:noFill/>
+          <a:ln/>
+        </p:spPr>
+        <p:txBody>
+          <a:bodyPr wrap="square" lIns="0" tIns="0" rIns="0" bIns="0" rtlCol="0" anchor="ctr">
+            <a:normAutofit/>
+          </a:bodyPr>
+          <a:lstStyle/>
+          <a:p>
+            <a:pPr rtl="1" algn="ctr" indent="0" marL="0">
+              <a:buNone/>
+            </a:pPr>
+            <a:r>
+              <a:rPr lang="ar-SA" altLang="en-US" sz="850" b="1" dirty="0">
+                <a:solidFill>
+                  <a:srgbClr val="222222"/>
+                </a:solidFill>
+                <a:latin typeface="Arial" pitchFamily="34" charset="0"/>
+                <a:ea typeface="Arial" pitchFamily="34" charset="-122"/>
+                <a:cs typeface="Arial" pitchFamily="34" charset="-120"/>
+              </a:rPr>
+              <a:t>11 نوفمبر</a:t>
+            </a:r>
+            <a:endParaRPr lang="ar-SA" sz="850" dirty="0"/>
+          </a:p>
+        </p:txBody>
+      </p:sp>
+      <p:sp>
+        <p:nvSpPr>
+          <p:cNvPr id="177" name="Shape 175"/>
+          <p:cNvSpPr/>
+          <p:nvPr/>
+        </p:nvSpPr>
+        <p:spPr>
+          <a:xfrm>
+            <a:off x="1216018" y="3044952"/>
+            <a:ext cx="2720824" cy="310896"/>
           </a:xfrm>
           <a:prstGeom prst="roundRect">
             <a:avLst>
-              <a:gd name="adj" fmla="val 50000"/>
+              <a:gd name="adj" fmla="val 11765"/>
             </a:avLst>
           </a:prstGeom>
           <a:solidFill>
-            <a:srgbClr val="D9695A"/>
-          </a:solidFill>
-          <a:ln w="19050">
-            <a:solidFill>
-              <a:srgbClr val="222222"/>
-            </a:solidFill>
-            <a:prstDash val="solid"/>
-          </a:ln>
-        </p:spPr>
-      </p:sp>
-      <p:sp>
-        <p:nvSpPr>
-          <p:cNvPr id="183" name="Text 181"/>
-          <p:cNvSpPr/>
-          <p:nvPr/>
-        </p:nvSpPr>
-        <p:spPr>
-          <a:xfrm>
-            <a:off x="11414455" y="2778252"/>
-            <a:ext cx="384048" cy="268986"/>
-          </a:xfrm>
-          <a:prstGeom prst="rect">
-            <a:avLst/>
-          </a:prstGeom>
-          <a:noFill/>
-          <a:ln/>
-        </p:spPr>
-        <p:txBody>
-          <a:bodyPr wrap="square" lIns="0" tIns="0" rIns="0" bIns="0" rtlCol="0" anchor="ctr">
-            <a:normAutofit/>
-          </a:bodyPr>
-          <a:lstStyle/>
-          <a:p>
-            <a:pPr rtl="1" algn="ctr" indent="0" marL="0">
-              <a:buNone/>
-            </a:pPr>
-            <a:r>
-              <a:rPr lang="ar-SA" altLang="en-US" sz="650" b="1" dirty="0">
-                <a:solidFill>
-                  <a:srgbClr val="FFFFFF"/>
-                </a:solidFill>
-                <a:latin typeface="Arial" pitchFamily="34" charset="0"/>
-                <a:ea typeface="Arial" pitchFamily="34" charset="-122"/>
-                <a:cs typeface="Arial" pitchFamily="34" charset="-120"/>
-              </a:rPr>
-              <a:t>A.2</a:t>
-            </a:r>
-            <a:endParaRPr lang="ar-SA" sz="650" dirty="0"/>
-          </a:p>
-        </p:txBody>
-      </p:sp>
-      <p:sp>
-        <p:nvSpPr>
-          <p:cNvPr id="184" name="Text 182"/>
-          <p:cNvSpPr/>
-          <p:nvPr/>
-        </p:nvSpPr>
-        <p:spPr>
-          <a:xfrm>
-            <a:off x="8762695" y="2778252"/>
-            <a:ext cx="2441448" cy="268986"/>
-          </a:xfrm>
-          <a:prstGeom prst="rect">
-            <a:avLst/>
-          </a:prstGeom>
-          <a:noFill/>
-          <a:ln/>
-        </p:spPr>
-        <p:txBody>
-          <a:bodyPr wrap="square" lIns="0" tIns="0" rIns="0" bIns="0" rtlCol="0" anchor="ctr">
-            <a:normAutofit/>
-          </a:bodyPr>
-          <a:lstStyle/>
-          <a:p>
-            <a:pPr rtl="1" algn="r" indent="0" marL="0">
-              <a:buNone/>
-            </a:pPr>
-            <a:r>
-              <a:rPr lang="ar-SA" altLang="en-US" sz="700" dirty="0">
-                <a:solidFill>
-                  <a:srgbClr val="222222"/>
-                </a:solidFill>
-                <a:latin typeface="Arial" pitchFamily="34" charset="0"/>
-                <a:ea typeface="Arial" pitchFamily="34" charset="-122"/>
-                <a:cs typeface="Arial" pitchFamily="34" charset="-120"/>
-              </a:rPr>
-              <a:t>تركيب أعمدة H-Beam</a:t>
-            </a:r>
-            <a:endParaRPr lang="ar-SA" sz="700" dirty="0"/>
-          </a:p>
-        </p:txBody>
-      </p:sp>
-      <p:sp>
-        <p:nvSpPr>
-          <p:cNvPr id="185" name="Text 183"/>
-          <p:cNvSpPr/>
-          <p:nvPr/>
-        </p:nvSpPr>
-        <p:spPr>
-          <a:xfrm>
-            <a:off x="7967167" y="2778252"/>
-            <a:ext cx="777240" cy="268986"/>
-          </a:xfrm>
-          <a:prstGeom prst="rect">
-            <a:avLst/>
-          </a:prstGeom>
-          <a:noFill/>
-          <a:ln/>
-        </p:spPr>
-        <p:txBody>
-          <a:bodyPr wrap="square" lIns="0" tIns="0" rIns="0" bIns="0" rtlCol="0" anchor="ctr">
-            <a:normAutofit/>
-          </a:bodyPr>
-          <a:lstStyle/>
-          <a:p>
-            <a:pPr rtl="1" algn="ctr" indent="0" marL="0">
-              <a:buNone/>
-            </a:pPr>
-            <a:r>
-              <a:rPr lang="ar-SA" altLang="en-US" sz="700" dirty="0">
-                <a:solidFill>
-                  <a:srgbClr val="444444"/>
-                </a:solidFill>
-                <a:latin typeface="Arial" pitchFamily="34" charset="0"/>
-                <a:ea typeface="Arial" pitchFamily="34" charset="-122"/>
-                <a:cs typeface="Arial" pitchFamily="34" charset="-120"/>
-              </a:rPr>
-              <a:t>A1 · SS +1</a:t>
-            </a:r>
-            <a:endParaRPr lang="ar-SA" sz="700" dirty="0"/>
-          </a:p>
-        </p:txBody>
-      </p:sp>
-      <p:sp>
-        <p:nvSpPr>
-          <p:cNvPr id="186" name="Text 184"/>
-          <p:cNvSpPr/>
-          <p:nvPr/>
-        </p:nvSpPr>
-        <p:spPr>
-          <a:xfrm>
-            <a:off x="7464247" y="2778252"/>
-            <a:ext cx="502920" cy="268986"/>
-          </a:xfrm>
-          <a:prstGeom prst="rect">
-            <a:avLst/>
-          </a:prstGeom>
-          <a:noFill/>
-          <a:ln/>
-        </p:spPr>
-        <p:txBody>
-          <a:bodyPr wrap="square" lIns="0" tIns="0" rIns="0" bIns="0" rtlCol="0" anchor="ctr">
-            <a:normAutofit/>
-          </a:bodyPr>
-          <a:lstStyle/>
-          <a:p>
-            <a:pPr rtl="1" algn="ctr" indent="0" marL="0">
-              <a:buNone/>
-            </a:pPr>
-            <a:r>
-              <a:rPr lang="ar-SA" altLang="en-US" sz="900" b="1" dirty="0">
-                <a:solidFill>
-                  <a:srgbClr val="222222"/>
-                </a:solidFill>
-                <a:latin typeface="Arial" pitchFamily="34" charset="0"/>
-                <a:ea typeface="Arial" pitchFamily="34" charset="-122"/>
-                <a:cs typeface="Arial" pitchFamily="34" charset="-120"/>
-              </a:rPr>
-              <a:t>2</a:t>
-            </a:r>
-            <a:endParaRPr lang="ar-SA" sz="900" dirty="0"/>
-          </a:p>
-        </p:txBody>
-      </p:sp>
-      <p:sp>
-        <p:nvSpPr>
-          <p:cNvPr id="187" name="Text 185"/>
-          <p:cNvSpPr/>
-          <p:nvPr/>
-        </p:nvSpPr>
-        <p:spPr>
-          <a:xfrm>
-            <a:off x="6805879" y="2778252"/>
-            <a:ext cx="658368" cy="268986"/>
-          </a:xfrm>
-          <a:prstGeom prst="rect">
-            <a:avLst/>
-          </a:prstGeom>
-          <a:noFill/>
-          <a:ln/>
-        </p:spPr>
-        <p:txBody>
-          <a:bodyPr wrap="square" lIns="0" tIns="0" rIns="0" bIns="0" rtlCol="0" anchor="ctr">
-            <a:normAutofit/>
-          </a:bodyPr>
-          <a:lstStyle/>
-          <a:p>
-            <a:pPr rtl="1" algn="ctr" indent="0" marL="0">
-              <a:buNone/>
-            </a:pPr>
-            <a:r>
-              <a:rPr lang="ar-SA" altLang="en-US" sz="700" b="1" dirty="0">
-                <a:solidFill>
-                  <a:srgbClr val="222222"/>
-                </a:solidFill>
-                <a:latin typeface="Arial" pitchFamily="34" charset="0"/>
-                <a:ea typeface="Arial" pitchFamily="34" charset="-122"/>
-                <a:cs typeface="Arial" pitchFamily="34" charset="-120"/>
-              </a:rPr>
-              <a:t>24 أكتوبر</a:t>
-            </a:r>
-            <a:endParaRPr lang="ar-SA" sz="700" dirty="0"/>
-          </a:p>
-        </p:txBody>
-      </p:sp>
-      <p:sp>
-        <p:nvSpPr>
-          <p:cNvPr id="188" name="Text 186"/>
-          <p:cNvSpPr/>
-          <p:nvPr/>
-        </p:nvSpPr>
-        <p:spPr>
-          <a:xfrm>
-            <a:off x="6147511" y="2778252"/>
-            <a:ext cx="658368" cy="268986"/>
-          </a:xfrm>
-          <a:prstGeom prst="rect">
-            <a:avLst/>
-          </a:prstGeom>
-          <a:noFill/>
-          <a:ln/>
-        </p:spPr>
-        <p:txBody>
-          <a:bodyPr wrap="square" lIns="0" tIns="0" rIns="0" bIns="0" rtlCol="0" anchor="ctr">
-            <a:normAutofit/>
-          </a:bodyPr>
-          <a:lstStyle/>
-          <a:p>
-            <a:pPr rtl="1" algn="ctr" indent="0" marL="0">
-              <a:buNone/>
-            </a:pPr>
-            <a:r>
-              <a:rPr lang="ar-SA" altLang="en-US" sz="700" b="1" dirty="0">
-                <a:solidFill>
-                  <a:srgbClr val="222222"/>
-                </a:solidFill>
-                <a:latin typeface="Arial" pitchFamily="34" charset="0"/>
-                <a:ea typeface="Arial" pitchFamily="34" charset="-122"/>
-                <a:cs typeface="Arial" pitchFamily="34" charset="-120"/>
-              </a:rPr>
-              <a:t>25 أكتوبر</a:t>
-            </a:r>
-            <a:endParaRPr lang="ar-SA" sz="700" dirty="0"/>
-          </a:p>
-        </p:txBody>
-      </p:sp>
-      <p:sp>
-        <p:nvSpPr>
-          <p:cNvPr id="189" name="Shape 187"/>
-          <p:cNvSpPr/>
-          <p:nvPr/>
-        </p:nvSpPr>
-        <p:spPr>
-          <a:xfrm>
-            <a:off x="4106893" y="2834739"/>
-            <a:ext cx="340103" cy="156012"/>
-          </a:xfrm>
-          <a:prstGeom prst="roundRect">
-            <a:avLst>
-              <a:gd name="adj" fmla="val 23444"/>
-            </a:avLst>
-          </a:prstGeom>
-          <a:solidFill>
-            <a:srgbClr val="D9695A"/>
+            <a:srgbClr val="2E9E6B"/>
           </a:solidFill>
           <a:ln w="19050">
             <a:solidFill>
@@ -13190,14 +12774,14 @@
       </p:sp>
       <p:sp>
         <p:nvSpPr>
-          <p:cNvPr id="190" name="Text 188"/>
-          <p:cNvSpPr/>
-          <p:nvPr/>
-        </p:nvSpPr>
-        <p:spPr>
-          <a:xfrm>
-            <a:off x="4106893" y="2834739"/>
-            <a:ext cx="340103" cy="156012"/>
+          <p:cNvPr id="178" name="Text 176"/>
+          <p:cNvSpPr/>
+          <p:nvPr/>
+        </p:nvSpPr>
+        <p:spPr>
+          <a:xfrm>
+            <a:off x="1216018" y="3044952"/>
+            <a:ext cx="2720824" cy="310896"/>
           </a:xfrm>
           <a:prstGeom prst="rect">
             <a:avLst/>
@@ -13223,7 +12807,7 @@
                 <a:ea typeface="Arial" pitchFamily="34" charset="-122"/>
                 <a:cs typeface="Arial" pitchFamily="34" charset="-120"/>
               </a:rPr>
-              <a:t>2 يوم</a:t>
+              <a:t>14 يوم</a:t>
             </a:r>
             <a:endParaRPr lang="ar-SA" sz="700" dirty="0"/>
           </a:p>
@@ -13231,20 +12815,20 @@
       </p:sp>
       <p:sp>
         <p:nvSpPr>
-          <p:cNvPr id="191" name="Shape 189"/>
-          <p:cNvSpPr/>
-          <p:nvPr/>
-        </p:nvSpPr>
-        <p:spPr>
-          <a:xfrm>
-            <a:off x="365760" y="3047238"/>
-            <a:ext cx="11460175" cy="268986"/>
-          </a:xfrm>
-          <a:prstGeom prst="rect">
-            <a:avLst/>
-          </a:prstGeom>
-          <a:solidFill>
-            <a:srgbClr val="F6F9FA"/>
+          <p:cNvPr id="179" name="Shape 177"/>
+          <p:cNvSpPr/>
+          <p:nvPr/>
+        </p:nvSpPr>
+        <p:spPr>
+          <a:xfrm>
+            <a:off x="365760" y="3520440"/>
+            <a:ext cx="11460175" cy="640080"/>
+          </a:xfrm>
+          <a:prstGeom prst="rect">
+            <a:avLst/>
+          </a:prstGeom>
+          <a:solidFill>
+            <a:srgbClr val="FFFFFF"/>
           </a:solidFill>
           <a:ln w="6350">
             <a:solidFill>
@@ -13256,295 +12840,293 @@
       </p:sp>
       <p:sp>
         <p:nvSpPr>
-          <p:cNvPr id="192" name="Shape 190"/>
-          <p:cNvSpPr/>
-          <p:nvPr/>
-        </p:nvSpPr>
-        <p:spPr>
-          <a:xfrm>
-            <a:off x="11441887" y="3104007"/>
-            <a:ext cx="329184" cy="155448"/>
+          <p:cNvPr id="180" name="Shape 178"/>
+          <p:cNvSpPr/>
+          <p:nvPr/>
+        </p:nvSpPr>
+        <p:spPr>
+          <a:xfrm>
+            <a:off x="11515039" y="3721608"/>
+            <a:ext cx="237744" cy="237744"/>
+          </a:xfrm>
+          <a:prstGeom prst="ellipse">
+            <a:avLst/>
+          </a:prstGeom>
+          <a:solidFill>
+            <a:srgbClr val="D68A00"/>
+          </a:solidFill>
+          <a:ln w="19050">
+            <a:solidFill>
+              <a:srgbClr val="222222"/>
+            </a:solidFill>
+            <a:prstDash val="solid"/>
+          </a:ln>
+        </p:spPr>
+      </p:sp>
+      <p:sp>
+        <p:nvSpPr>
+          <p:cNvPr id="181" name="Text 179"/>
+          <p:cNvSpPr/>
+          <p:nvPr/>
+        </p:nvSpPr>
+        <p:spPr>
+          <a:xfrm>
+            <a:off x="11441887" y="3520440"/>
+            <a:ext cx="384048" cy="640080"/>
+          </a:xfrm>
+          <a:prstGeom prst="rect">
+            <a:avLst/>
+          </a:prstGeom>
+          <a:noFill/>
+          <a:ln/>
+        </p:spPr>
+        <p:txBody>
+          <a:bodyPr wrap="square" lIns="0" tIns="0" rIns="0" bIns="0" rtlCol="0" anchor="ctr">
+            <a:normAutofit/>
+          </a:bodyPr>
+          <a:lstStyle/>
+          <a:p>
+            <a:pPr rtl="1" algn="ctr" indent="0" marL="0">
+              <a:buNone/>
+            </a:pPr>
+            <a:r>
+              <a:rPr lang="ar-SA" altLang="en-US" sz="850" b="1" dirty="0">
+                <a:solidFill>
+                  <a:srgbClr val="FFFFFF"/>
+                </a:solidFill>
+                <a:latin typeface="Arial" pitchFamily="34" charset="0"/>
+                <a:ea typeface="Arial" pitchFamily="34" charset="-122"/>
+                <a:cs typeface="Arial" pitchFamily="34" charset="-120"/>
+              </a:rPr>
+              <a:t>G</a:t>
+            </a:r>
+            <a:endParaRPr lang="ar-SA" sz="850" dirty="0"/>
+          </a:p>
+        </p:txBody>
+      </p:sp>
+      <p:sp>
+        <p:nvSpPr>
+          <p:cNvPr id="182" name="Text 180"/>
+          <p:cNvSpPr/>
+          <p:nvPr/>
+        </p:nvSpPr>
+        <p:spPr>
+          <a:xfrm>
+            <a:off x="8762695" y="3520440"/>
+            <a:ext cx="2606040" cy="640080"/>
+          </a:xfrm>
+          <a:prstGeom prst="rect">
+            <a:avLst/>
+          </a:prstGeom>
+          <a:noFill/>
+          <a:ln/>
+        </p:spPr>
+        <p:txBody>
+          <a:bodyPr wrap="square" lIns="0" tIns="0" rIns="0" bIns="0" rtlCol="0" anchor="ctr">
+            <a:normAutofit/>
+          </a:bodyPr>
+          <a:lstStyle/>
+          <a:p>
+            <a:pPr rtl="1" algn="r" indent="0" marL="0">
+              <a:buNone/>
+            </a:pPr>
+            <a:r>
+              <a:rPr lang="ar-SA" altLang="en-US" sz="900" b="1" dirty="0">
+                <a:solidFill>
+                  <a:srgbClr val="222222"/>
+                </a:solidFill>
+                <a:latin typeface="Arial" pitchFamily="34" charset="0"/>
+                <a:ea typeface="Arial" pitchFamily="34" charset="-122"/>
+                <a:cs typeface="Arial" pitchFamily="34" charset="-120"/>
+              </a:rPr>
+              <a:t>أعمال الردم للمبنى</a:t>
+            </a:r>
+            <a:endParaRPr lang="ar-SA" sz="900" dirty="0"/>
+          </a:p>
+        </p:txBody>
+      </p:sp>
+      <p:sp>
+        <p:nvSpPr>
+          <p:cNvPr id="183" name="Text 181"/>
+          <p:cNvSpPr/>
+          <p:nvPr/>
+        </p:nvSpPr>
+        <p:spPr>
+          <a:xfrm>
+            <a:off x="7967167" y="3520440"/>
+            <a:ext cx="777240" cy="640080"/>
+          </a:xfrm>
+          <a:prstGeom prst="rect">
+            <a:avLst/>
+          </a:prstGeom>
+          <a:noFill/>
+          <a:ln/>
+        </p:spPr>
+        <p:txBody>
+          <a:bodyPr wrap="square" lIns="0" tIns="0" rIns="0" bIns="0" rtlCol="0" anchor="ctr">
+            <a:normAutofit/>
+          </a:bodyPr>
+          <a:lstStyle/>
+          <a:p>
+            <a:pPr rtl="1" algn="ctr" indent="0" marL="0">
+              <a:buNone/>
+            </a:pPr>
+            <a:r>
+              <a:rPr lang="ar-SA" altLang="en-US" sz="850" dirty="0">
+                <a:solidFill>
+                  <a:srgbClr val="444444"/>
+                </a:solidFill>
+                <a:latin typeface="Arial" pitchFamily="34" charset="0"/>
+                <a:ea typeface="Arial" pitchFamily="34" charset="-122"/>
+                <a:cs typeface="Arial" pitchFamily="34" charset="-120"/>
+              </a:rPr>
+              <a:t>F · FS</a:t>
+            </a:r>
+            <a:endParaRPr lang="ar-SA" sz="850" dirty="0"/>
+          </a:p>
+        </p:txBody>
+      </p:sp>
+      <p:sp>
+        <p:nvSpPr>
+          <p:cNvPr id="184" name="Text 182"/>
+          <p:cNvSpPr/>
+          <p:nvPr/>
+        </p:nvSpPr>
+        <p:spPr>
+          <a:xfrm>
+            <a:off x="7464247" y="3520440"/>
+            <a:ext cx="502920" cy="640080"/>
+          </a:xfrm>
+          <a:prstGeom prst="rect">
+            <a:avLst/>
+          </a:prstGeom>
+          <a:noFill/>
+          <a:ln/>
+        </p:spPr>
+        <p:txBody>
+          <a:bodyPr wrap="square" lIns="0" tIns="0" rIns="0" bIns="0" rtlCol="0" anchor="ctr">
+            <a:normAutofit/>
+          </a:bodyPr>
+          <a:lstStyle/>
+          <a:p>
+            <a:pPr rtl="1" algn="ctr" indent="0" marL="0">
+              <a:buNone/>
+            </a:pPr>
+            <a:r>
+              <a:rPr lang="ar-SA" altLang="en-US" sz="1050" b="1" dirty="0">
+                <a:solidFill>
+                  <a:srgbClr val="222222"/>
+                </a:solidFill>
+                <a:latin typeface="Arial" pitchFamily="34" charset="0"/>
+                <a:ea typeface="Arial" pitchFamily="34" charset="-122"/>
+                <a:cs typeface="Arial" pitchFamily="34" charset="-120"/>
+              </a:rPr>
+              <a:t>2</a:t>
+            </a:r>
+            <a:endParaRPr lang="ar-SA" sz="1050" dirty="0"/>
+          </a:p>
+        </p:txBody>
+      </p:sp>
+      <p:sp>
+        <p:nvSpPr>
+          <p:cNvPr id="185" name="Text 183"/>
+          <p:cNvSpPr/>
+          <p:nvPr/>
+        </p:nvSpPr>
+        <p:spPr>
+          <a:xfrm>
+            <a:off x="6805879" y="3520440"/>
+            <a:ext cx="658368" cy="640080"/>
+          </a:xfrm>
+          <a:prstGeom prst="rect">
+            <a:avLst/>
+          </a:prstGeom>
+          <a:noFill/>
+          <a:ln/>
+        </p:spPr>
+        <p:txBody>
+          <a:bodyPr wrap="square" lIns="0" tIns="0" rIns="0" bIns="0" rtlCol="0" anchor="ctr">
+            <a:normAutofit/>
+          </a:bodyPr>
+          <a:lstStyle/>
+          <a:p>
+            <a:pPr rtl="1" algn="ctr" indent="0" marL="0">
+              <a:buNone/>
+            </a:pPr>
+            <a:r>
+              <a:rPr lang="ar-SA" altLang="en-US" sz="850" b="1" dirty="0">
+                <a:solidFill>
+                  <a:srgbClr val="222222"/>
+                </a:solidFill>
+                <a:latin typeface="Arial" pitchFamily="34" charset="0"/>
+                <a:ea typeface="Arial" pitchFamily="34" charset="-122"/>
+                <a:cs typeface="Arial" pitchFamily="34" charset="-120"/>
+              </a:rPr>
+              <a:t>12 نوفمبر</a:t>
+            </a:r>
+            <a:endParaRPr lang="ar-SA" sz="850" dirty="0"/>
+          </a:p>
+        </p:txBody>
+      </p:sp>
+      <p:sp>
+        <p:nvSpPr>
+          <p:cNvPr id="186" name="Text 184"/>
+          <p:cNvSpPr/>
+          <p:nvPr/>
+        </p:nvSpPr>
+        <p:spPr>
+          <a:xfrm>
+            <a:off x="6147511" y="3520440"/>
+            <a:ext cx="658368" cy="640080"/>
+          </a:xfrm>
+          <a:prstGeom prst="rect">
+            <a:avLst/>
+          </a:prstGeom>
+          <a:noFill/>
+          <a:ln/>
+        </p:spPr>
+        <p:txBody>
+          <a:bodyPr wrap="square" lIns="0" tIns="0" rIns="0" bIns="0" rtlCol="0" anchor="ctr">
+            <a:normAutofit/>
+          </a:bodyPr>
+          <a:lstStyle/>
+          <a:p>
+            <a:pPr rtl="1" algn="ctr" indent="0" marL="0">
+              <a:buNone/>
+            </a:pPr>
+            <a:r>
+              <a:rPr lang="ar-SA" altLang="en-US" sz="850" b="1" dirty="0">
+                <a:solidFill>
+                  <a:srgbClr val="222222"/>
+                </a:solidFill>
+                <a:latin typeface="Arial" pitchFamily="34" charset="0"/>
+                <a:ea typeface="Arial" pitchFamily="34" charset="-122"/>
+                <a:cs typeface="Arial" pitchFamily="34" charset="-120"/>
+              </a:rPr>
+              <a:t>14 نوفمبر</a:t>
+            </a:r>
+            <a:endParaRPr lang="ar-SA" sz="850" dirty="0"/>
+          </a:p>
+        </p:txBody>
+      </p:sp>
+      <p:sp>
+        <p:nvSpPr>
+          <p:cNvPr id="187" name="Shape 185"/>
+          <p:cNvSpPr/>
+          <p:nvPr/>
+        </p:nvSpPr>
+        <p:spPr>
+          <a:xfrm>
+            <a:off x="705863" y="3685032"/>
+            <a:ext cx="510155" cy="310896"/>
           </a:xfrm>
           <a:prstGeom prst="roundRect">
             <a:avLst>
-              <a:gd name="adj" fmla="val 50000"/>
+              <a:gd name="adj" fmla="val 11765"/>
             </a:avLst>
           </a:prstGeom>
           <a:solidFill>
-            <a:srgbClr val="D9695A"/>
-          </a:solidFill>
-          <a:ln w="19050">
-            <a:solidFill>
-              <a:srgbClr val="222222"/>
-            </a:solidFill>
-            <a:prstDash val="solid"/>
-          </a:ln>
-        </p:spPr>
-      </p:sp>
-      <p:sp>
-        <p:nvSpPr>
-          <p:cNvPr id="193" name="Text 191"/>
-          <p:cNvSpPr/>
-          <p:nvPr/>
-        </p:nvSpPr>
-        <p:spPr>
-          <a:xfrm>
-            <a:off x="11414455" y="3047238"/>
-            <a:ext cx="384048" cy="268986"/>
-          </a:xfrm>
-          <a:prstGeom prst="rect">
-            <a:avLst/>
-          </a:prstGeom>
-          <a:noFill/>
-          <a:ln/>
-        </p:spPr>
-        <p:txBody>
-          <a:bodyPr wrap="square" lIns="0" tIns="0" rIns="0" bIns="0" rtlCol="0" anchor="ctr">
-            <a:normAutofit/>
-          </a:bodyPr>
-          <a:lstStyle/>
-          <a:p>
-            <a:pPr rtl="1" algn="ctr" indent="0" marL="0">
-              <a:buNone/>
-            </a:pPr>
-            <a:r>
-              <a:rPr lang="ar-SA" altLang="en-US" sz="650" b="1" dirty="0">
-                <a:solidFill>
-                  <a:srgbClr val="FFFFFF"/>
-                </a:solidFill>
-                <a:latin typeface="Arial" pitchFamily="34" charset="0"/>
-                <a:ea typeface="Arial" pitchFamily="34" charset="-122"/>
-                <a:cs typeface="Arial" pitchFamily="34" charset="-120"/>
-              </a:rPr>
-              <a:t>A.3</a:t>
-            </a:r>
-            <a:endParaRPr lang="ar-SA" sz="650" dirty="0"/>
-          </a:p>
-        </p:txBody>
-      </p:sp>
-      <p:sp>
-        <p:nvSpPr>
-          <p:cNvPr id="194" name="Text 192"/>
-          <p:cNvSpPr/>
-          <p:nvPr/>
-        </p:nvSpPr>
-        <p:spPr>
-          <a:xfrm>
-            <a:off x="8762695" y="3047238"/>
-            <a:ext cx="2441448" cy="268986"/>
-          </a:xfrm>
-          <a:prstGeom prst="rect">
-            <a:avLst/>
-          </a:prstGeom>
-          <a:noFill/>
-          <a:ln/>
-        </p:spPr>
-        <p:txBody>
-          <a:bodyPr wrap="square" lIns="0" tIns="0" rIns="0" bIns="0" rtlCol="0" anchor="ctr">
-            <a:normAutofit/>
-          </a:bodyPr>
-          <a:lstStyle/>
-          <a:p>
-            <a:pPr rtl="1" algn="r" indent="0" marL="0">
-              <a:buNone/>
-            </a:pPr>
-            <a:r>
-              <a:rPr lang="ar-SA" altLang="en-US" sz="700" dirty="0">
-                <a:solidFill>
-                  <a:srgbClr val="222222"/>
-                </a:solidFill>
-                <a:latin typeface="Arial" pitchFamily="34" charset="0"/>
-                <a:ea typeface="Arial" pitchFamily="34" charset="-122"/>
-                <a:cs typeface="Arial" pitchFamily="34" charset="-120"/>
-              </a:rPr>
-              <a:t>أعمال الخرسانة لأعمدة H-Beam</a:t>
-            </a:r>
-            <a:endParaRPr lang="ar-SA" sz="700" dirty="0"/>
-          </a:p>
-        </p:txBody>
-      </p:sp>
-      <p:sp>
-        <p:nvSpPr>
-          <p:cNvPr id="195" name="Text 193"/>
-          <p:cNvSpPr/>
-          <p:nvPr/>
-        </p:nvSpPr>
-        <p:spPr>
-          <a:xfrm>
-            <a:off x="7967167" y="3047238"/>
-            <a:ext cx="777240" cy="268986"/>
-          </a:xfrm>
-          <a:prstGeom prst="rect">
-            <a:avLst/>
-          </a:prstGeom>
-          <a:noFill/>
-          <a:ln/>
-        </p:spPr>
-        <p:txBody>
-          <a:bodyPr wrap="square" lIns="0" tIns="0" rIns="0" bIns="0" rtlCol="0" anchor="ctr">
-            <a:normAutofit/>
-          </a:bodyPr>
-          <a:lstStyle/>
-          <a:p>
-            <a:pPr rtl="1" algn="ctr" indent="0" marL="0">
-              <a:buNone/>
-            </a:pPr>
-            <a:r>
-              <a:rPr lang="ar-SA" altLang="en-US" sz="700" dirty="0">
-                <a:solidFill>
-                  <a:srgbClr val="444444"/>
-                </a:solidFill>
-                <a:latin typeface="Arial" pitchFamily="34" charset="0"/>
-                <a:ea typeface="Arial" pitchFamily="34" charset="-122"/>
-                <a:cs typeface="Arial" pitchFamily="34" charset="-120"/>
-              </a:rPr>
-              <a:t>A2 · SS +1</a:t>
-            </a:r>
-            <a:endParaRPr lang="ar-SA" sz="700" dirty="0"/>
-          </a:p>
-        </p:txBody>
-      </p:sp>
-      <p:sp>
-        <p:nvSpPr>
-          <p:cNvPr id="196" name="Text 194"/>
-          <p:cNvSpPr/>
-          <p:nvPr/>
-        </p:nvSpPr>
-        <p:spPr>
-          <a:xfrm>
-            <a:off x="7464247" y="3047238"/>
-            <a:ext cx="502920" cy="268986"/>
-          </a:xfrm>
-          <a:prstGeom prst="rect">
-            <a:avLst/>
-          </a:prstGeom>
-          <a:noFill/>
-          <a:ln/>
-        </p:spPr>
-        <p:txBody>
-          <a:bodyPr wrap="square" lIns="0" tIns="0" rIns="0" bIns="0" rtlCol="0" anchor="ctr">
-            <a:normAutofit/>
-          </a:bodyPr>
-          <a:lstStyle/>
-          <a:p>
-            <a:pPr rtl="1" algn="ctr" indent="0" marL="0">
-              <a:buNone/>
-            </a:pPr>
-            <a:r>
-              <a:rPr lang="ar-SA" altLang="en-US" sz="900" b="1" dirty="0">
-                <a:solidFill>
-                  <a:srgbClr val="222222"/>
-                </a:solidFill>
-                <a:latin typeface="Arial" pitchFamily="34" charset="0"/>
-                <a:ea typeface="Arial" pitchFamily="34" charset="-122"/>
-                <a:cs typeface="Arial" pitchFamily="34" charset="-120"/>
-              </a:rPr>
-              <a:t>2</a:t>
-            </a:r>
-            <a:endParaRPr lang="ar-SA" sz="900" dirty="0"/>
-          </a:p>
-        </p:txBody>
-      </p:sp>
-      <p:sp>
-        <p:nvSpPr>
-          <p:cNvPr id="197" name="Text 195"/>
-          <p:cNvSpPr/>
-          <p:nvPr/>
-        </p:nvSpPr>
-        <p:spPr>
-          <a:xfrm>
-            <a:off x="6805879" y="3047238"/>
-            <a:ext cx="658368" cy="268986"/>
-          </a:xfrm>
-          <a:prstGeom prst="rect">
-            <a:avLst/>
-          </a:prstGeom>
-          <a:noFill/>
-          <a:ln/>
-        </p:spPr>
-        <p:txBody>
-          <a:bodyPr wrap="square" lIns="0" tIns="0" rIns="0" bIns="0" rtlCol="0" anchor="ctr">
-            <a:normAutofit/>
-          </a:bodyPr>
-          <a:lstStyle/>
-          <a:p>
-            <a:pPr rtl="1" algn="ctr" indent="0" marL="0">
-              <a:buNone/>
-            </a:pPr>
-            <a:r>
-              <a:rPr lang="ar-SA" altLang="en-US" sz="700" b="1" dirty="0">
-                <a:solidFill>
-                  <a:srgbClr val="222222"/>
-                </a:solidFill>
-                <a:latin typeface="Arial" pitchFamily="34" charset="0"/>
-                <a:ea typeface="Arial" pitchFamily="34" charset="-122"/>
-                <a:cs typeface="Arial" pitchFamily="34" charset="-120"/>
-              </a:rPr>
-              <a:t>25 أكتوبر</a:t>
-            </a:r>
-            <a:endParaRPr lang="ar-SA" sz="700" dirty="0"/>
-          </a:p>
-        </p:txBody>
-      </p:sp>
-      <p:sp>
-        <p:nvSpPr>
-          <p:cNvPr id="198" name="Text 196"/>
-          <p:cNvSpPr/>
-          <p:nvPr/>
-        </p:nvSpPr>
-        <p:spPr>
-          <a:xfrm>
-            <a:off x="6147511" y="3047238"/>
-            <a:ext cx="658368" cy="268986"/>
-          </a:xfrm>
-          <a:prstGeom prst="rect">
-            <a:avLst/>
-          </a:prstGeom>
-          <a:noFill/>
-          <a:ln/>
-        </p:spPr>
-        <p:txBody>
-          <a:bodyPr wrap="square" lIns="0" tIns="0" rIns="0" bIns="0" rtlCol="0" anchor="ctr">
-            <a:normAutofit/>
-          </a:bodyPr>
-          <a:lstStyle/>
-          <a:p>
-            <a:pPr rtl="1" algn="ctr" indent="0" marL="0">
-              <a:buNone/>
-            </a:pPr>
-            <a:r>
-              <a:rPr lang="ar-SA" altLang="en-US" sz="700" b="1" dirty="0">
-                <a:solidFill>
-                  <a:srgbClr val="222222"/>
-                </a:solidFill>
-                <a:latin typeface="Arial" pitchFamily="34" charset="0"/>
-                <a:ea typeface="Arial" pitchFamily="34" charset="-122"/>
-                <a:cs typeface="Arial" pitchFamily="34" charset="-120"/>
-              </a:rPr>
-              <a:t>26 أكتوبر</a:t>
-            </a:r>
-            <a:endParaRPr lang="ar-SA" sz="700" dirty="0"/>
-          </a:p>
-        </p:txBody>
-      </p:sp>
-      <p:sp>
-        <p:nvSpPr>
-          <p:cNvPr id="199" name="Shape 197"/>
-          <p:cNvSpPr/>
-          <p:nvPr/>
-        </p:nvSpPr>
-        <p:spPr>
-          <a:xfrm>
-            <a:off x="3936842" y="3103725"/>
-            <a:ext cx="340103" cy="156012"/>
-          </a:xfrm>
-          <a:prstGeom prst="roundRect">
-            <a:avLst>
-              <a:gd name="adj" fmla="val 23444"/>
-            </a:avLst>
-          </a:prstGeom>
-          <a:solidFill>
-            <a:srgbClr val="D9695A"/>
+            <a:srgbClr val="D68A00"/>
           </a:solidFill>
           <a:ln w="19050">
             <a:solidFill>
@@ -13563,14 +13145,14 @@
       </p:sp>
       <p:sp>
         <p:nvSpPr>
-          <p:cNvPr id="200" name="Text 198"/>
-          <p:cNvSpPr/>
-          <p:nvPr/>
-        </p:nvSpPr>
-        <p:spPr>
-          <a:xfrm>
-            <a:off x="3936842" y="3103725"/>
-            <a:ext cx="340103" cy="156012"/>
+          <p:cNvPr id="188" name="Text 186"/>
+          <p:cNvSpPr/>
+          <p:nvPr/>
+        </p:nvSpPr>
+        <p:spPr>
+          <a:xfrm>
+            <a:off x="705863" y="3685032"/>
+            <a:ext cx="510155" cy="310896"/>
           </a:xfrm>
           <a:prstGeom prst="rect">
             <a:avLst/>
@@ -13604,2863 +13186,14 @@
       </p:sp>
       <p:sp>
         <p:nvSpPr>
-          <p:cNvPr id="201" name="Shape 199"/>
-          <p:cNvSpPr/>
-          <p:nvPr/>
-        </p:nvSpPr>
-        <p:spPr>
-          <a:xfrm>
-            <a:off x="365760" y="3316224"/>
-            <a:ext cx="11460175" cy="268986"/>
-          </a:xfrm>
-          <a:prstGeom prst="rect">
-            <a:avLst/>
-          </a:prstGeom>
-          <a:solidFill>
-            <a:srgbClr val="FFFFFF"/>
-          </a:solidFill>
-          <a:ln w="6350">
-            <a:solidFill>
-              <a:srgbClr val="DFE6EA"/>
-            </a:solidFill>
-            <a:prstDash val="solid"/>
-          </a:ln>
-        </p:spPr>
-      </p:sp>
-      <p:sp>
-        <p:nvSpPr>
-          <p:cNvPr id="202" name="Shape 200"/>
-          <p:cNvSpPr/>
-          <p:nvPr/>
-        </p:nvSpPr>
-        <p:spPr>
-          <a:xfrm>
-            <a:off x="11441887" y="3372993"/>
-            <a:ext cx="329184" cy="155448"/>
-          </a:xfrm>
-          <a:prstGeom prst="roundRect">
-            <a:avLst>
-              <a:gd name="adj" fmla="val 50000"/>
-            </a:avLst>
-          </a:prstGeom>
-          <a:solidFill>
-            <a:srgbClr val="D9695A"/>
-          </a:solidFill>
-          <a:ln w="19050">
-            <a:solidFill>
-              <a:srgbClr val="222222"/>
-            </a:solidFill>
-            <a:prstDash val="solid"/>
-          </a:ln>
-        </p:spPr>
-      </p:sp>
-      <p:sp>
-        <p:nvSpPr>
-          <p:cNvPr id="203" name="Text 201"/>
-          <p:cNvSpPr/>
-          <p:nvPr/>
-        </p:nvSpPr>
-        <p:spPr>
-          <a:xfrm>
-            <a:off x="11414455" y="3316224"/>
-            <a:ext cx="384048" cy="268986"/>
-          </a:xfrm>
-          <a:prstGeom prst="rect">
-            <a:avLst/>
-          </a:prstGeom>
-          <a:noFill/>
-          <a:ln/>
-        </p:spPr>
-        <p:txBody>
-          <a:bodyPr wrap="square" lIns="0" tIns="0" rIns="0" bIns="0" rtlCol="0" anchor="ctr">
-            <a:normAutofit/>
-          </a:bodyPr>
-          <a:lstStyle/>
-          <a:p>
-            <a:pPr rtl="1" algn="ctr" indent="0" marL="0">
-              <a:buNone/>
-            </a:pPr>
-            <a:r>
-              <a:rPr lang="ar-SA" altLang="en-US" sz="650" b="1" dirty="0">
-                <a:solidFill>
-                  <a:srgbClr val="FFFFFF"/>
-                </a:solidFill>
-                <a:latin typeface="Arial" pitchFamily="34" charset="0"/>
-                <a:ea typeface="Arial" pitchFamily="34" charset="-122"/>
-                <a:cs typeface="Arial" pitchFamily="34" charset="-120"/>
-              </a:rPr>
-              <a:t>A.4</a:t>
-            </a:r>
-            <a:endParaRPr lang="ar-SA" sz="650" dirty="0"/>
-          </a:p>
-        </p:txBody>
-      </p:sp>
-      <p:sp>
-        <p:nvSpPr>
-          <p:cNvPr id="204" name="Text 202"/>
-          <p:cNvSpPr/>
-          <p:nvPr/>
-        </p:nvSpPr>
-        <p:spPr>
-          <a:xfrm>
-            <a:off x="8762695" y="3316224"/>
-            <a:ext cx="2441448" cy="268986"/>
-          </a:xfrm>
-          <a:prstGeom prst="rect">
-            <a:avLst/>
-          </a:prstGeom>
-          <a:noFill/>
-          <a:ln/>
-        </p:spPr>
-        <p:txBody>
-          <a:bodyPr wrap="square" lIns="0" tIns="0" rIns="0" bIns="0" rtlCol="0" anchor="ctr">
-            <a:normAutofit/>
-          </a:bodyPr>
-          <a:lstStyle/>
-          <a:p>
-            <a:pPr rtl="1" algn="r" indent="0" marL="0">
-              <a:buNone/>
-            </a:pPr>
-            <a:r>
-              <a:rPr lang="ar-SA" altLang="en-US" sz="700" dirty="0">
-                <a:solidFill>
-                  <a:srgbClr val="222222"/>
-                </a:solidFill>
-                <a:latin typeface="Arial" pitchFamily="34" charset="0"/>
-                <a:ea typeface="Arial" pitchFamily="34" charset="-122"/>
-                <a:cs typeface="Arial" pitchFamily="34" charset="-120"/>
-              </a:rPr>
-              <a:t>التدعيم (Bracing) لنظام الدعم</a:t>
-            </a:r>
-            <a:endParaRPr lang="ar-SA" sz="700" dirty="0"/>
-          </a:p>
-        </p:txBody>
-      </p:sp>
-      <p:sp>
-        <p:nvSpPr>
-          <p:cNvPr id="205" name="Text 203"/>
-          <p:cNvSpPr/>
-          <p:nvPr/>
-        </p:nvSpPr>
-        <p:spPr>
-          <a:xfrm>
-            <a:off x="7967167" y="3316224"/>
-            <a:ext cx="777240" cy="268986"/>
-          </a:xfrm>
-          <a:prstGeom prst="rect">
-            <a:avLst/>
-          </a:prstGeom>
-          <a:noFill/>
-          <a:ln/>
-        </p:spPr>
-        <p:txBody>
-          <a:bodyPr wrap="square" lIns="0" tIns="0" rIns="0" bIns="0" rtlCol="0" anchor="ctr">
-            <a:normAutofit/>
-          </a:bodyPr>
-          <a:lstStyle/>
-          <a:p>
-            <a:pPr rtl="1" algn="ctr" indent="0" marL="0">
-              <a:buNone/>
-            </a:pPr>
-            <a:r>
-              <a:rPr lang="ar-SA" altLang="en-US" sz="700" dirty="0">
-                <a:solidFill>
-                  <a:srgbClr val="444444"/>
-                </a:solidFill>
-                <a:latin typeface="Arial" pitchFamily="34" charset="0"/>
-                <a:ea typeface="Arial" pitchFamily="34" charset="-122"/>
-                <a:cs typeface="Arial" pitchFamily="34" charset="-120"/>
-              </a:rPr>
-              <a:t>A3 · SS +1</a:t>
-            </a:r>
-            <a:endParaRPr lang="ar-SA" sz="700" dirty="0"/>
-          </a:p>
-        </p:txBody>
-      </p:sp>
-      <p:sp>
-        <p:nvSpPr>
-          <p:cNvPr id="206" name="Text 204"/>
-          <p:cNvSpPr/>
-          <p:nvPr/>
-        </p:nvSpPr>
-        <p:spPr>
-          <a:xfrm>
-            <a:off x="7464247" y="3316224"/>
-            <a:ext cx="502920" cy="268986"/>
-          </a:xfrm>
-          <a:prstGeom prst="rect">
-            <a:avLst/>
-          </a:prstGeom>
-          <a:noFill/>
-          <a:ln/>
-        </p:spPr>
-        <p:txBody>
-          <a:bodyPr wrap="square" lIns="0" tIns="0" rIns="0" bIns="0" rtlCol="0" anchor="ctr">
-            <a:normAutofit/>
-          </a:bodyPr>
-          <a:lstStyle/>
-          <a:p>
-            <a:pPr rtl="1" algn="ctr" indent="0" marL="0">
-              <a:buNone/>
-            </a:pPr>
-            <a:r>
-              <a:rPr lang="ar-SA" altLang="en-US" sz="900" b="1" dirty="0">
-                <a:solidFill>
-                  <a:srgbClr val="222222"/>
-                </a:solidFill>
-                <a:latin typeface="Arial" pitchFamily="34" charset="0"/>
-                <a:ea typeface="Arial" pitchFamily="34" charset="-122"/>
-                <a:cs typeface="Arial" pitchFamily="34" charset="-120"/>
-              </a:rPr>
-              <a:t>1</a:t>
-            </a:r>
-            <a:endParaRPr lang="ar-SA" sz="900" dirty="0"/>
-          </a:p>
-        </p:txBody>
-      </p:sp>
-      <p:sp>
-        <p:nvSpPr>
-          <p:cNvPr id="207" name="Text 205"/>
-          <p:cNvSpPr/>
-          <p:nvPr/>
-        </p:nvSpPr>
-        <p:spPr>
-          <a:xfrm>
-            <a:off x="6805879" y="3316224"/>
-            <a:ext cx="658368" cy="268986"/>
-          </a:xfrm>
-          <a:prstGeom prst="rect">
-            <a:avLst/>
-          </a:prstGeom>
-          <a:noFill/>
-          <a:ln/>
-        </p:spPr>
-        <p:txBody>
-          <a:bodyPr wrap="square" lIns="0" tIns="0" rIns="0" bIns="0" rtlCol="0" anchor="ctr">
-            <a:normAutofit/>
-          </a:bodyPr>
-          <a:lstStyle/>
-          <a:p>
-            <a:pPr rtl="1" algn="ctr" indent="0" marL="0">
-              <a:buNone/>
-            </a:pPr>
-            <a:r>
-              <a:rPr lang="ar-SA" altLang="en-US" sz="700" b="1" dirty="0">
-                <a:solidFill>
-                  <a:srgbClr val="222222"/>
-                </a:solidFill>
-                <a:latin typeface="Arial" pitchFamily="34" charset="0"/>
-                <a:ea typeface="Arial" pitchFamily="34" charset="-122"/>
-                <a:cs typeface="Arial" pitchFamily="34" charset="-120"/>
-              </a:rPr>
-              <a:t>26 أكتوبر</a:t>
-            </a:r>
-            <a:endParaRPr lang="ar-SA" sz="700" dirty="0"/>
-          </a:p>
-        </p:txBody>
-      </p:sp>
-      <p:sp>
-        <p:nvSpPr>
-          <p:cNvPr id="208" name="Text 206"/>
-          <p:cNvSpPr/>
-          <p:nvPr/>
-        </p:nvSpPr>
-        <p:spPr>
-          <a:xfrm>
-            <a:off x="6147511" y="3316224"/>
-            <a:ext cx="658368" cy="268986"/>
-          </a:xfrm>
-          <a:prstGeom prst="rect">
-            <a:avLst/>
-          </a:prstGeom>
-          <a:noFill/>
-          <a:ln/>
-        </p:spPr>
-        <p:txBody>
-          <a:bodyPr wrap="square" lIns="0" tIns="0" rIns="0" bIns="0" rtlCol="0" anchor="ctr">
-            <a:normAutofit/>
-          </a:bodyPr>
-          <a:lstStyle/>
-          <a:p>
-            <a:pPr rtl="1" algn="ctr" indent="0" marL="0">
-              <a:buNone/>
-            </a:pPr>
-            <a:r>
-              <a:rPr lang="ar-SA" altLang="en-US" sz="700" b="1" dirty="0">
-                <a:solidFill>
-                  <a:srgbClr val="222222"/>
-                </a:solidFill>
-                <a:latin typeface="Arial" pitchFamily="34" charset="0"/>
-                <a:ea typeface="Arial" pitchFamily="34" charset="-122"/>
-                <a:cs typeface="Arial" pitchFamily="34" charset="-120"/>
-              </a:rPr>
-              <a:t>26 أكتوبر</a:t>
-            </a:r>
-            <a:endParaRPr lang="ar-SA" sz="700" dirty="0"/>
-          </a:p>
-        </p:txBody>
-      </p:sp>
-      <p:sp>
-        <p:nvSpPr>
-          <p:cNvPr id="209" name="Shape 207"/>
-          <p:cNvSpPr/>
-          <p:nvPr/>
-        </p:nvSpPr>
-        <p:spPr>
-          <a:xfrm>
-            <a:off x="3936842" y="3372711"/>
-            <a:ext cx="170052" cy="156012"/>
-          </a:xfrm>
-          <a:prstGeom prst="roundRect">
-            <a:avLst>
-              <a:gd name="adj" fmla="val 23444"/>
-            </a:avLst>
-          </a:prstGeom>
-          <a:solidFill>
-            <a:srgbClr val="D9695A"/>
-          </a:solidFill>
-          <a:ln w="19050">
-            <a:solidFill>
-              <a:srgbClr val="222222"/>
-            </a:solidFill>
-            <a:prstDash val="solid"/>
-          </a:ln>
-          <a:effectLst>
-            <a:outerShdw sx="100000" sy="100000" kx="0" ky="0" algn="bl" rotWithShape="0" blurRad="38100" dist="12700" dir="5400000">
-              <a:srgbClr val="000000">
-                <a:alpha val="20000"/>
-              </a:srgbClr>
-            </a:outerShdw>
-          </a:effectLst>
-        </p:spPr>
-      </p:sp>
-      <p:sp>
-        <p:nvSpPr>
-          <p:cNvPr id="210" name="Shape 208"/>
-          <p:cNvSpPr/>
-          <p:nvPr/>
-        </p:nvSpPr>
-        <p:spPr>
-          <a:xfrm>
-            <a:off x="365760" y="3585210"/>
-            <a:ext cx="11460175" cy="268986"/>
-          </a:xfrm>
-          <a:prstGeom prst="rect">
-            <a:avLst/>
-          </a:prstGeom>
-          <a:solidFill>
-            <a:srgbClr val="F6F9FA"/>
-          </a:solidFill>
-          <a:ln w="6350">
-            <a:solidFill>
-              <a:srgbClr val="DFE6EA"/>
-            </a:solidFill>
-            <a:prstDash val="solid"/>
-          </a:ln>
-        </p:spPr>
-      </p:sp>
-      <p:sp>
-        <p:nvSpPr>
-          <p:cNvPr id="211" name="Shape 209"/>
-          <p:cNvSpPr/>
-          <p:nvPr/>
-        </p:nvSpPr>
-        <p:spPr>
-          <a:xfrm>
-            <a:off x="11441887" y="3641979"/>
-            <a:ext cx="329184" cy="155448"/>
-          </a:xfrm>
-          <a:prstGeom prst="roundRect">
-            <a:avLst>
-              <a:gd name="adj" fmla="val 50000"/>
-            </a:avLst>
-          </a:prstGeom>
-          <a:solidFill>
-            <a:srgbClr val="D9695A"/>
-          </a:solidFill>
-          <a:ln w="19050">
-            <a:solidFill>
-              <a:srgbClr val="222222"/>
-            </a:solidFill>
-            <a:prstDash val="solid"/>
-          </a:ln>
-        </p:spPr>
-      </p:sp>
-      <p:sp>
-        <p:nvSpPr>
-          <p:cNvPr id="212" name="Text 210"/>
-          <p:cNvSpPr/>
-          <p:nvPr/>
-        </p:nvSpPr>
-        <p:spPr>
-          <a:xfrm>
-            <a:off x="11414455" y="3585210"/>
-            <a:ext cx="384048" cy="268986"/>
-          </a:xfrm>
-          <a:prstGeom prst="rect">
-            <a:avLst/>
-          </a:prstGeom>
-          <a:noFill/>
-          <a:ln/>
-        </p:spPr>
-        <p:txBody>
-          <a:bodyPr wrap="square" lIns="0" tIns="0" rIns="0" bIns="0" rtlCol="0" anchor="ctr">
-            <a:normAutofit/>
-          </a:bodyPr>
-          <a:lstStyle/>
-          <a:p>
-            <a:pPr rtl="1" algn="ctr" indent="0" marL="0">
-              <a:buNone/>
-            </a:pPr>
-            <a:r>
-              <a:rPr lang="ar-SA" altLang="en-US" sz="650" b="1" dirty="0">
-                <a:solidFill>
-                  <a:srgbClr val="FFFFFF"/>
-                </a:solidFill>
-                <a:latin typeface="Arial" pitchFamily="34" charset="0"/>
-                <a:ea typeface="Arial" pitchFamily="34" charset="-122"/>
-                <a:cs typeface="Arial" pitchFamily="34" charset="-120"/>
-              </a:rPr>
-              <a:t>A.5</a:t>
-            </a:r>
-            <a:endParaRPr lang="ar-SA" sz="650" dirty="0"/>
-          </a:p>
-        </p:txBody>
-      </p:sp>
-      <p:sp>
-        <p:nvSpPr>
-          <p:cNvPr id="213" name="Text 211"/>
-          <p:cNvSpPr/>
-          <p:nvPr/>
-        </p:nvSpPr>
-        <p:spPr>
-          <a:xfrm>
-            <a:off x="8762695" y="3585210"/>
-            <a:ext cx="2441448" cy="268986"/>
-          </a:xfrm>
-          <a:prstGeom prst="rect">
-            <a:avLst/>
-          </a:prstGeom>
-          <a:noFill/>
-          <a:ln/>
-        </p:spPr>
-        <p:txBody>
-          <a:bodyPr wrap="square" lIns="0" tIns="0" rIns="0" bIns="0" rtlCol="0" anchor="ctr">
-            <a:normAutofit/>
-          </a:bodyPr>
-          <a:lstStyle/>
-          <a:p>
-            <a:pPr rtl="1" algn="r" indent="0" marL="0">
-              <a:buNone/>
-            </a:pPr>
-            <a:r>
-              <a:rPr lang="ar-SA" altLang="en-US" sz="700" dirty="0">
-                <a:solidFill>
-                  <a:srgbClr val="222222"/>
-                </a:solidFill>
-                <a:latin typeface="Arial" pitchFamily="34" charset="0"/>
-                <a:ea typeface="Arial" pitchFamily="34" charset="-122"/>
-                <a:cs typeface="Arial" pitchFamily="34" charset="-120"/>
-              </a:rPr>
-              <a:t>تركيب / إدخال الألواح المضلعة (Corrugated sheets)</a:t>
-            </a:r>
-            <a:endParaRPr lang="ar-SA" sz="700" dirty="0"/>
-          </a:p>
-        </p:txBody>
-      </p:sp>
-      <p:sp>
-        <p:nvSpPr>
-          <p:cNvPr id="214" name="Text 212"/>
-          <p:cNvSpPr/>
-          <p:nvPr/>
-        </p:nvSpPr>
-        <p:spPr>
-          <a:xfrm>
-            <a:off x="7967167" y="3585210"/>
-            <a:ext cx="777240" cy="268986"/>
-          </a:xfrm>
-          <a:prstGeom prst="rect">
-            <a:avLst/>
-          </a:prstGeom>
-          <a:noFill/>
-          <a:ln/>
-        </p:spPr>
-        <p:txBody>
-          <a:bodyPr wrap="square" lIns="0" tIns="0" rIns="0" bIns="0" rtlCol="0" anchor="ctr">
-            <a:normAutofit/>
-          </a:bodyPr>
-          <a:lstStyle/>
-          <a:p>
-            <a:pPr rtl="1" algn="ctr" indent="0" marL="0">
-              <a:buNone/>
-            </a:pPr>
-            <a:r>
-              <a:rPr lang="ar-SA" altLang="en-US" sz="700" dirty="0">
-                <a:solidFill>
-                  <a:srgbClr val="444444"/>
-                </a:solidFill>
-                <a:latin typeface="Arial" pitchFamily="34" charset="0"/>
-                <a:ea typeface="Arial" pitchFamily="34" charset="-122"/>
-                <a:cs typeface="Arial" pitchFamily="34" charset="-120"/>
-              </a:rPr>
-              <a:t>A4 · SS +0</a:t>
-            </a:r>
-            <a:endParaRPr lang="ar-SA" sz="700" dirty="0"/>
-          </a:p>
-        </p:txBody>
-      </p:sp>
-      <p:sp>
-        <p:nvSpPr>
-          <p:cNvPr id="215" name="Text 213"/>
-          <p:cNvSpPr/>
-          <p:nvPr/>
-        </p:nvSpPr>
-        <p:spPr>
-          <a:xfrm>
-            <a:off x="7464247" y="3585210"/>
-            <a:ext cx="502920" cy="268986"/>
-          </a:xfrm>
-          <a:prstGeom prst="rect">
-            <a:avLst/>
-          </a:prstGeom>
-          <a:noFill/>
-          <a:ln/>
-        </p:spPr>
-        <p:txBody>
-          <a:bodyPr wrap="square" lIns="0" tIns="0" rIns="0" bIns="0" rtlCol="0" anchor="ctr">
-            <a:normAutofit/>
-          </a:bodyPr>
-          <a:lstStyle/>
-          <a:p>
-            <a:pPr rtl="1" algn="ctr" indent="0" marL="0">
-              <a:buNone/>
-            </a:pPr>
-            <a:r>
-              <a:rPr lang="ar-SA" altLang="en-US" sz="900" b="1" dirty="0">
-                <a:solidFill>
-                  <a:srgbClr val="222222"/>
-                </a:solidFill>
-                <a:latin typeface="Arial" pitchFamily="34" charset="0"/>
-                <a:ea typeface="Arial" pitchFamily="34" charset="-122"/>
-                <a:cs typeface="Arial" pitchFamily="34" charset="-120"/>
-              </a:rPr>
-              <a:t>1</a:t>
-            </a:r>
-            <a:endParaRPr lang="ar-SA" sz="900" dirty="0"/>
-          </a:p>
-        </p:txBody>
-      </p:sp>
-      <p:sp>
-        <p:nvSpPr>
-          <p:cNvPr id="216" name="Text 214"/>
-          <p:cNvSpPr/>
-          <p:nvPr/>
-        </p:nvSpPr>
-        <p:spPr>
-          <a:xfrm>
-            <a:off x="6805879" y="3585210"/>
-            <a:ext cx="658368" cy="268986"/>
-          </a:xfrm>
-          <a:prstGeom prst="rect">
-            <a:avLst/>
-          </a:prstGeom>
-          <a:noFill/>
-          <a:ln/>
-        </p:spPr>
-        <p:txBody>
-          <a:bodyPr wrap="square" lIns="0" tIns="0" rIns="0" bIns="0" rtlCol="0" anchor="ctr">
-            <a:normAutofit/>
-          </a:bodyPr>
-          <a:lstStyle/>
-          <a:p>
-            <a:pPr rtl="1" algn="ctr" indent="0" marL="0">
-              <a:buNone/>
-            </a:pPr>
-            <a:r>
-              <a:rPr lang="ar-SA" altLang="en-US" sz="700" b="1" dirty="0">
-                <a:solidFill>
-                  <a:srgbClr val="222222"/>
-                </a:solidFill>
-                <a:latin typeface="Arial" pitchFamily="34" charset="0"/>
-                <a:ea typeface="Arial" pitchFamily="34" charset="-122"/>
-                <a:cs typeface="Arial" pitchFamily="34" charset="-120"/>
-              </a:rPr>
-              <a:t>26 أكتوبر</a:t>
-            </a:r>
-            <a:endParaRPr lang="ar-SA" sz="700" dirty="0"/>
-          </a:p>
-        </p:txBody>
-      </p:sp>
-      <p:sp>
-        <p:nvSpPr>
-          <p:cNvPr id="217" name="Text 215"/>
-          <p:cNvSpPr/>
-          <p:nvPr/>
-        </p:nvSpPr>
-        <p:spPr>
-          <a:xfrm>
-            <a:off x="6147511" y="3585210"/>
-            <a:ext cx="658368" cy="268986"/>
-          </a:xfrm>
-          <a:prstGeom prst="rect">
-            <a:avLst/>
-          </a:prstGeom>
-          <a:noFill/>
-          <a:ln/>
-        </p:spPr>
-        <p:txBody>
-          <a:bodyPr wrap="square" lIns="0" tIns="0" rIns="0" bIns="0" rtlCol="0" anchor="ctr">
-            <a:normAutofit/>
-          </a:bodyPr>
-          <a:lstStyle/>
-          <a:p>
-            <a:pPr rtl="1" algn="ctr" indent="0" marL="0">
-              <a:buNone/>
-            </a:pPr>
-            <a:r>
-              <a:rPr lang="ar-SA" altLang="en-US" sz="700" b="1" dirty="0">
-                <a:solidFill>
-                  <a:srgbClr val="222222"/>
-                </a:solidFill>
-                <a:latin typeface="Arial" pitchFamily="34" charset="0"/>
-                <a:ea typeface="Arial" pitchFamily="34" charset="-122"/>
-                <a:cs typeface="Arial" pitchFamily="34" charset="-120"/>
-              </a:rPr>
-              <a:t>26 أكتوبر</a:t>
-            </a:r>
-            <a:endParaRPr lang="ar-SA" sz="700" dirty="0"/>
-          </a:p>
-        </p:txBody>
-      </p:sp>
-      <p:sp>
-        <p:nvSpPr>
-          <p:cNvPr id="218" name="Shape 216"/>
-          <p:cNvSpPr/>
-          <p:nvPr/>
-        </p:nvSpPr>
-        <p:spPr>
-          <a:xfrm>
-            <a:off x="3936842" y="3641697"/>
-            <a:ext cx="170052" cy="156012"/>
-          </a:xfrm>
-          <a:prstGeom prst="roundRect">
-            <a:avLst>
-              <a:gd name="adj" fmla="val 23444"/>
-            </a:avLst>
-          </a:prstGeom>
-          <a:solidFill>
-            <a:srgbClr val="D9695A"/>
-          </a:solidFill>
-          <a:ln w="19050">
-            <a:solidFill>
-              <a:srgbClr val="222222"/>
-            </a:solidFill>
-            <a:prstDash val="solid"/>
-          </a:ln>
-          <a:effectLst>
-            <a:outerShdw sx="100000" sy="100000" kx="0" ky="0" algn="bl" rotWithShape="0" blurRad="38100" dist="12700" dir="5400000">
-              <a:srgbClr val="000000">
-                <a:alpha val="20000"/>
-              </a:srgbClr>
-            </a:outerShdw>
-          </a:effectLst>
-        </p:spPr>
-      </p:sp>
-      <p:sp>
-        <p:nvSpPr>
-          <p:cNvPr id="219" name="Shape 217"/>
-          <p:cNvSpPr/>
-          <p:nvPr/>
-        </p:nvSpPr>
-        <p:spPr>
-          <a:xfrm>
-            <a:off x="365760" y="3854196"/>
-            <a:ext cx="11460175" cy="268986"/>
-          </a:xfrm>
-          <a:prstGeom prst="rect">
-            <a:avLst/>
-          </a:prstGeom>
-          <a:solidFill>
-            <a:srgbClr val="FFFFFF"/>
-          </a:solidFill>
-          <a:ln w="6350">
-            <a:solidFill>
-              <a:srgbClr val="DFE6EA"/>
-            </a:solidFill>
-            <a:prstDash val="solid"/>
-          </a:ln>
-        </p:spPr>
-      </p:sp>
-      <p:sp>
-        <p:nvSpPr>
-          <p:cNvPr id="220" name="Shape 218"/>
-          <p:cNvSpPr/>
-          <p:nvPr/>
-        </p:nvSpPr>
-        <p:spPr>
-          <a:xfrm>
-            <a:off x="11515039" y="3869817"/>
-            <a:ext cx="237744" cy="237744"/>
-          </a:xfrm>
-          <a:prstGeom prst="ellipse">
-            <a:avLst/>
-          </a:prstGeom>
-          <a:solidFill>
-            <a:srgbClr val="00778B"/>
-          </a:solidFill>
-          <a:ln w="6350">
-            <a:solidFill>
-              <a:srgbClr val="00778B"/>
-            </a:solidFill>
-            <a:prstDash val="solid"/>
-          </a:ln>
-        </p:spPr>
-      </p:sp>
-      <p:sp>
-        <p:nvSpPr>
-          <p:cNvPr id="221" name="Text 219"/>
-          <p:cNvSpPr/>
-          <p:nvPr/>
-        </p:nvSpPr>
-        <p:spPr>
-          <a:xfrm>
-            <a:off x="11441887" y="3854196"/>
-            <a:ext cx="384048" cy="268986"/>
-          </a:xfrm>
-          <a:prstGeom prst="rect">
-            <a:avLst/>
-          </a:prstGeom>
-          <a:noFill/>
-          <a:ln/>
-        </p:spPr>
-        <p:txBody>
-          <a:bodyPr wrap="square" lIns="0" tIns="0" rIns="0" bIns="0" rtlCol="0" anchor="ctr">
-            <a:normAutofit/>
-          </a:bodyPr>
-          <a:lstStyle/>
-          <a:p>
-            <a:pPr rtl="1" algn="ctr" indent="0" marL="0">
-              <a:buNone/>
-            </a:pPr>
-            <a:r>
-              <a:rPr lang="ar-SA" altLang="en-US" sz="850" b="1" dirty="0">
-                <a:solidFill>
-                  <a:srgbClr val="FFFFFF"/>
-                </a:solidFill>
-                <a:latin typeface="Arial" pitchFamily="34" charset="0"/>
-                <a:ea typeface="Arial" pitchFamily="34" charset="-122"/>
-                <a:cs typeface="Arial" pitchFamily="34" charset="-120"/>
-              </a:rPr>
-              <a:t>B</a:t>
-            </a:r>
-            <a:endParaRPr lang="ar-SA" sz="850" dirty="0"/>
-          </a:p>
-        </p:txBody>
-      </p:sp>
-      <p:sp>
-        <p:nvSpPr>
-          <p:cNvPr id="222" name="Text 220"/>
-          <p:cNvSpPr/>
-          <p:nvPr/>
-        </p:nvSpPr>
-        <p:spPr>
-          <a:xfrm>
-            <a:off x="8762695" y="3854196"/>
-            <a:ext cx="2606040" cy="268986"/>
-          </a:xfrm>
-          <a:prstGeom prst="rect">
-            <a:avLst/>
-          </a:prstGeom>
-          <a:noFill/>
-          <a:ln/>
-        </p:spPr>
-        <p:txBody>
-          <a:bodyPr wrap="square" lIns="0" tIns="0" rIns="0" bIns="0" rtlCol="0" anchor="ctr">
-            <a:normAutofit/>
-          </a:bodyPr>
-          <a:lstStyle/>
-          <a:p>
-            <a:pPr rtl="1" algn="r" indent="0" marL="0">
-              <a:buNone/>
-            </a:pPr>
-            <a:r>
-              <a:rPr lang="ar-SA" altLang="en-US" sz="750" b="1" dirty="0">
-                <a:solidFill>
-                  <a:srgbClr val="222222"/>
-                </a:solidFill>
-                <a:latin typeface="Arial" pitchFamily="34" charset="0"/>
-                <a:ea typeface="Arial" pitchFamily="34" charset="-122"/>
-                <a:cs typeface="Arial" pitchFamily="34" charset="-120"/>
-              </a:rPr>
-              <a:t>الخرسانة العادية (Lean concrete)</a:t>
-            </a:r>
-            <a:endParaRPr lang="ar-SA" sz="750" dirty="0"/>
-          </a:p>
-        </p:txBody>
-      </p:sp>
-      <p:sp>
-        <p:nvSpPr>
-          <p:cNvPr id="223" name="Text 221"/>
-          <p:cNvSpPr/>
-          <p:nvPr/>
-        </p:nvSpPr>
-        <p:spPr>
-          <a:xfrm>
-            <a:off x="7967167" y="3854196"/>
-            <a:ext cx="777240" cy="268986"/>
-          </a:xfrm>
-          <a:prstGeom prst="rect">
-            <a:avLst/>
-          </a:prstGeom>
-          <a:noFill/>
-          <a:ln/>
-        </p:spPr>
-        <p:txBody>
-          <a:bodyPr wrap="square" lIns="0" tIns="0" rIns="0" bIns="0" rtlCol="0" anchor="ctr">
-            <a:normAutofit/>
-          </a:bodyPr>
-          <a:lstStyle/>
-          <a:p>
-            <a:pPr rtl="1" algn="ctr" indent="0" marL="0">
-              <a:buNone/>
-            </a:pPr>
-            <a:r>
-              <a:rPr lang="ar-SA" altLang="en-US" sz="700" dirty="0">
-                <a:solidFill>
-                  <a:srgbClr val="444444"/>
-                </a:solidFill>
-                <a:latin typeface="Arial" pitchFamily="34" charset="0"/>
-                <a:ea typeface="Arial" pitchFamily="34" charset="-122"/>
-                <a:cs typeface="Arial" pitchFamily="34" charset="-120"/>
-              </a:rPr>
-              <a:t>A · SS +4</a:t>
-            </a:r>
-            <a:endParaRPr lang="ar-SA" sz="700" dirty="0"/>
-          </a:p>
-        </p:txBody>
-      </p:sp>
-      <p:sp>
-        <p:nvSpPr>
-          <p:cNvPr id="224" name="Text 222"/>
-          <p:cNvSpPr/>
-          <p:nvPr/>
-        </p:nvSpPr>
-        <p:spPr>
-          <a:xfrm>
-            <a:off x="7464247" y="3854196"/>
-            <a:ext cx="502920" cy="268986"/>
-          </a:xfrm>
-          <a:prstGeom prst="rect">
-            <a:avLst/>
-          </a:prstGeom>
-          <a:noFill/>
-          <a:ln/>
-        </p:spPr>
-        <p:txBody>
-          <a:bodyPr wrap="square" lIns="0" tIns="0" rIns="0" bIns="0" rtlCol="0" anchor="ctr">
-            <a:normAutofit/>
-          </a:bodyPr>
-          <a:lstStyle/>
-          <a:p>
-            <a:pPr rtl="1" algn="ctr" indent="0" marL="0">
-              <a:buNone/>
-            </a:pPr>
-            <a:r>
-              <a:rPr lang="ar-SA" altLang="en-US" sz="900" b="1" dirty="0">
-                <a:solidFill>
-                  <a:srgbClr val="222222"/>
-                </a:solidFill>
-                <a:latin typeface="Arial" pitchFamily="34" charset="0"/>
-                <a:ea typeface="Arial" pitchFamily="34" charset="-122"/>
-                <a:cs typeface="Arial" pitchFamily="34" charset="-120"/>
-              </a:rPr>
-              <a:t>1</a:t>
-            </a:r>
-            <a:endParaRPr lang="ar-SA" sz="900" dirty="0"/>
-          </a:p>
-        </p:txBody>
-      </p:sp>
-      <p:sp>
-        <p:nvSpPr>
-          <p:cNvPr id="225" name="Text 223"/>
-          <p:cNvSpPr/>
-          <p:nvPr/>
-        </p:nvSpPr>
-        <p:spPr>
-          <a:xfrm>
-            <a:off x="6805879" y="3854196"/>
-            <a:ext cx="658368" cy="268986"/>
-          </a:xfrm>
-          <a:prstGeom prst="rect">
-            <a:avLst/>
-          </a:prstGeom>
-          <a:noFill/>
-          <a:ln/>
-        </p:spPr>
-        <p:txBody>
-          <a:bodyPr wrap="square" lIns="0" tIns="0" rIns="0" bIns="0" rtlCol="0" anchor="ctr">
-            <a:normAutofit/>
-          </a:bodyPr>
-          <a:lstStyle/>
-          <a:p>
-            <a:pPr rtl="1" algn="ctr" indent="0" marL="0">
-              <a:buNone/>
-            </a:pPr>
-            <a:r>
-              <a:rPr lang="ar-SA" altLang="en-US" sz="700" b="1" dirty="0">
-                <a:solidFill>
-                  <a:srgbClr val="222222"/>
-                </a:solidFill>
-                <a:latin typeface="Arial" pitchFamily="34" charset="0"/>
-                <a:ea typeface="Arial" pitchFamily="34" charset="-122"/>
-                <a:cs typeface="Arial" pitchFamily="34" charset="-120"/>
-              </a:rPr>
-              <a:t>27 أكتوبر</a:t>
-            </a:r>
-            <a:endParaRPr lang="ar-SA" sz="700" dirty="0"/>
-          </a:p>
-        </p:txBody>
-      </p:sp>
-      <p:sp>
-        <p:nvSpPr>
-          <p:cNvPr id="226" name="Text 224"/>
-          <p:cNvSpPr/>
-          <p:nvPr/>
-        </p:nvSpPr>
-        <p:spPr>
-          <a:xfrm>
-            <a:off x="6147511" y="3854196"/>
-            <a:ext cx="658368" cy="268986"/>
-          </a:xfrm>
-          <a:prstGeom prst="rect">
-            <a:avLst/>
-          </a:prstGeom>
-          <a:noFill/>
-          <a:ln/>
-        </p:spPr>
-        <p:txBody>
-          <a:bodyPr wrap="square" lIns="0" tIns="0" rIns="0" bIns="0" rtlCol="0" anchor="ctr">
-            <a:normAutofit/>
-          </a:bodyPr>
-          <a:lstStyle/>
-          <a:p>
-            <a:pPr rtl="1" algn="ctr" indent="0" marL="0">
-              <a:buNone/>
-            </a:pPr>
-            <a:r>
-              <a:rPr lang="ar-SA" altLang="en-US" sz="700" b="1" dirty="0">
-                <a:solidFill>
-                  <a:srgbClr val="222222"/>
-                </a:solidFill>
-                <a:latin typeface="Arial" pitchFamily="34" charset="0"/>
-                <a:ea typeface="Arial" pitchFamily="34" charset="-122"/>
-                <a:cs typeface="Arial" pitchFamily="34" charset="-120"/>
-              </a:rPr>
-              <a:t>27 أكتوبر</a:t>
-            </a:r>
-            <a:endParaRPr lang="ar-SA" sz="700" dirty="0"/>
-          </a:p>
-        </p:txBody>
-      </p:sp>
-      <p:sp>
-        <p:nvSpPr>
-          <p:cNvPr id="227" name="Shape 225"/>
-          <p:cNvSpPr/>
-          <p:nvPr/>
-        </p:nvSpPr>
-        <p:spPr>
-          <a:xfrm>
-            <a:off x="3766790" y="3910683"/>
-            <a:ext cx="170052" cy="156012"/>
-          </a:xfrm>
-          <a:prstGeom prst="roundRect">
-            <a:avLst>
-              <a:gd name="adj" fmla="val 23444"/>
-            </a:avLst>
-          </a:prstGeom>
-          <a:solidFill>
-            <a:srgbClr val="00778B"/>
-          </a:solidFill>
-          <a:ln w="6350">
-            <a:solidFill>
-              <a:srgbClr val="00778B"/>
-            </a:solidFill>
-            <a:prstDash val="solid"/>
-          </a:ln>
-          <a:effectLst>
-            <a:outerShdw sx="100000" sy="100000" kx="0" ky="0" algn="bl" rotWithShape="0" blurRad="38100" dist="12700" dir="5400000">
-              <a:srgbClr val="000000">
-                <a:alpha val="20000"/>
-              </a:srgbClr>
-            </a:outerShdw>
-          </a:effectLst>
-        </p:spPr>
-      </p:sp>
-      <p:sp>
-        <p:nvSpPr>
-          <p:cNvPr id="228" name="Shape 226"/>
-          <p:cNvSpPr/>
-          <p:nvPr/>
-        </p:nvSpPr>
-        <p:spPr>
-          <a:xfrm>
-            <a:off x="365760" y="4123182"/>
-            <a:ext cx="11460175" cy="268986"/>
-          </a:xfrm>
-          <a:prstGeom prst="rect">
-            <a:avLst/>
-          </a:prstGeom>
-          <a:solidFill>
-            <a:srgbClr val="F6F9FA"/>
-          </a:solidFill>
-          <a:ln w="6350">
-            <a:solidFill>
-              <a:srgbClr val="DFE6EA"/>
-            </a:solidFill>
-            <a:prstDash val="solid"/>
-          </a:ln>
-        </p:spPr>
-      </p:sp>
-      <p:sp>
-        <p:nvSpPr>
-          <p:cNvPr id="229" name="Shape 227"/>
-          <p:cNvSpPr/>
-          <p:nvPr/>
-        </p:nvSpPr>
-        <p:spPr>
-          <a:xfrm>
-            <a:off x="11515039" y="4138803"/>
-            <a:ext cx="237744" cy="237744"/>
-          </a:xfrm>
-          <a:prstGeom prst="ellipse">
-            <a:avLst/>
-          </a:prstGeom>
-          <a:solidFill>
-            <a:srgbClr val="00778B"/>
-          </a:solidFill>
-          <a:ln w="19050">
-            <a:solidFill>
-              <a:srgbClr val="222222"/>
-            </a:solidFill>
-            <a:prstDash val="solid"/>
-          </a:ln>
-        </p:spPr>
-      </p:sp>
-      <p:sp>
-        <p:nvSpPr>
-          <p:cNvPr id="230" name="Text 228"/>
-          <p:cNvSpPr/>
-          <p:nvPr/>
-        </p:nvSpPr>
-        <p:spPr>
-          <a:xfrm>
-            <a:off x="11441887" y="4123182"/>
-            <a:ext cx="384048" cy="268986"/>
-          </a:xfrm>
-          <a:prstGeom prst="rect">
-            <a:avLst/>
-          </a:prstGeom>
-          <a:noFill/>
-          <a:ln/>
-        </p:spPr>
-        <p:txBody>
-          <a:bodyPr wrap="square" lIns="0" tIns="0" rIns="0" bIns="0" rtlCol="0" anchor="ctr">
-            <a:normAutofit/>
-          </a:bodyPr>
-          <a:lstStyle/>
-          <a:p>
-            <a:pPr rtl="1" algn="ctr" indent="0" marL="0">
-              <a:buNone/>
-            </a:pPr>
-            <a:r>
-              <a:rPr lang="ar-SA" altLang="en-US" sz="850" b="1" dirty="0">
-                <a:solidFill>
-                  <a:srgbClr val="FFFFFF"/>
-                </a:solidFill>
-                <a:latin typeface="Arial" pitchFamily="34" charset="0"/>
-                <a:ea typeface="Arial" pitchFamily="34" charset="-122"/>
-                <a:cs typeface="Arial" pitchFamily="34" charset="-120"/>
-              </a:rPr>
-              <a:t>C</a:t>
-            </a:r>
-            <a:endParaRPr lang="ar-SA" sz="850" dirty="0"/>
-          </a:p>
-        </p:txBody>
-      </p:sp>
-      <p:sp>
-        <p:nvSpPr>
-          <p:cNvPr id="231" name="Text 229"/>
-          <p:cNvSpPr/>
-          <p:nvPr/>
-        </p:nvSpPr>
-        <p:spPr>
-          <a:xfrm>
-            <a:off x="8762695" y="4123182"/>
-            <a:ext cx="2606040" cy="268986"/>
-          </a:xfrm>
-          <a:prstGeom prst="rect">
-            <a:avLst/>
-          </a:prstGeom>
-          <a:noFill/>
-          <a:ln/>
-        </p:spPr>
-        <p:txBody>
-          <a:bodyPr wrap="square" lIns="0" tIns="0" rIns="0" bIns="0" rtlCol="0" anchor="ctr">
-            <a:normAutofit/>
-          </a:bodyPr>
-          <a:lstStyle/>
-          <a:p>
-            <a:pPr rtl="1" algn="r" indent="0" marL="0">
-              <a:buNone/>
-            </a:pPr>
-            <a:r>
-              <a:rPr lang="ar-SA" altLang="en-US" sz="750" b="1" dirty="0">
-                <a:solidFill>
-                  <a:srgbClr val="222222"/>
-                </a:solidFill>
-                <a:latin typeface="Arial" pitchFamily="34" charset="0"/>
-                <a:ea typeface="Arial" pitchFamily="34" charset="-122"/>
-                <a:cs typeface="Arial" pitchFamily="34" charset="-120"/>
-              </a:rPr>
-              <a:t>خندق الحفرة – حديد التسليح والشدات والخرسانة</a:t>
-            </a:r>
-            <a:endParaRPr lang="ar-SA" sz="750" dirty="0"/>
-          </a:p>
-        </p:txBody>
-      </p:sp>
-      <p:sp>
-        <p:nvSpPr>
-          <p:cNvPr id="232" name="Text 230"/>
-          <p:cNvSpPr/>
-          <p:nvPr/>
-        </p:nvSpPr>
-        <p:spPr>
-          <a:xfrm>
-            <a:off x="7967167" y="4123182"/>
-            <a:ext cx="777240" cy="268986"/>
-          </a:xfrm>
-          <a:prstGeom prst="rect">
-            <a:avLst/>
-          </a:prstGeom>
-          <a:noFill/>
-          <a:ln/>
-        </p:spPr>
-        <p:txBody>
-          <a:bodyPr wrap="square" lIns="0" tIns="0" rIns="0" bIns="0" rtlCol="0" anchor="ctr">
-            <a:normAutofit/>
-          </a:bodyPr>
-          <a:lstStyle/>
-          <a:p>
-            <a:pPr rtl="1" algn="ctr" indent="0" marL="0">
-              <a:buNone/>
-            </a:pPr>
-            <a:r>
-              <a:rPr lang="ar-SA" altLang="en-US" sz="700" dirty="0">
-                <a:solidFill>
-                  <a:srgbClr val="444444"/>
-                </a:solidFill>
-                <a:latin typeface="Arial" pitchFamily="34" charset="0"/>
-                <a:ea typeface="Arial" pitchFamily="34" charset="-122"/>
-                <a:cs typeface="Arial" pitchFamily="34" charset="-120"/>
-              </a:rPr>
-              <a:t>A · FS</a:t>
-            </a:r>
-            <a:endParaRPr lang="ar-SA" sz="700" dirty="0"/>
-          </a:p>
-        </p:txBody>
-      </p:sp>
-      <p:sp>
-        <p:nvSpPr>
-          <p:cNvPr id="233" name="Text 231"/>
-          <p:cNvSpPr/>
-          <p:nvPr/>
-        </p:nvSpPr>
-        <p:spPr>
-          <a:xfrm>
-            <a:off x="7464247" y="4123182"/>
-            <a:ext cx="502920" cy="268986"/>
-          </a:xfrm>
-          <a:prstGeom prst="rect">
-            <a:avLst/>
-          </a:prstGeom>
-          <a:noFill/>
-          <a:ln/>
-        </p:spPr>
-        <p:txBody>
-          <a:bodyPr wrap="square" lIns="0" tIns="0" rIns="0" bIns="0" rtlCol="0" anchor="ctr">
-            <a:normAutofit/>
-          </a:bodyPr>
-          <a:lstStyle/>
-          <a:p>
-            <a:pPr rtl="1" algn="ctr" indent="0" marL="0">
-              <a:buNone/>
-            </a:pPr>
-            <a:r>
-              <a:rPr lang="ar-SA" altLang="en-US" sz="900" b="1" dirty="0">
-                <a:solidFill>
-                  <a:srgbClr val="222222"/>
-                </a:solidFill>
-                <a:latin typeface="Arial" pitchFamily="34" charset="0"/>
-                <a:ea typeface="Arial" pitchFamily="34" charset="-122"/>
-                <a:cs typeface="Arial" pitchFamily="34" charset="-120"/>
-              </a:rPr>
-              <a:t>2</a:t>
-            </a:r>
-            <a:endParaRPr lang="ar-SA" sz="900" dirty="0"/>
-          </a:p>
-        </p:txBody>
-      </p:sp>
-      <p:sp>
-        <p:nvSpPr>
-          <p:cNvPr id="234" name="Text 232"/>
-          <p:cNvSpPr/>
-          <p:nvPr/>
-        </p:nvSpPr>
-        <p:spPr>
-          <a:xfrm>
-            <a:off x="6805879" y="4123182"/>
-            <a:ext cx="658368" cy="268986"/>
-          </a:xfrm>
-          <a:prstGeom prst="rect">
-            <a:avLst/>
-          </a:prstGeom>
-          <a:noFill/>
-          <a:ln/>
-        </p:spPr>
-        <p:txBody>
-          <a:bodyPr wrap="square" lIns="0" tIns="0" rIns="0" bIns="0" rtlCol="0" anchor="ctr">
-            <a:normAutofit/>
-          </a:bodyPr>
-          <a:lstStyle/>
-          <a:p>
-            <a:pPr rtl="1" algn="ctr" indent="0" marL="0">
-              <a:buNone/>
-            </a:pPr>
-            <a:r>
-              <a:rPr lang="ar-SA" altLang="en-US" sz="700" b="1" dirty="0">
-                <a:solidFill>
-                  <a:srgbClr val="222222"/>
-                </a:solidFill>
-                <a:latin typeface="Arial" pitchFamily="34" charset="0"/>
-                <a:ea typeface="Arial" pitchFamily="34" charset="-122"/>
-                <a:cs typeface="Arial" pitchFamily="34" charset="-120"/>
-              </a:rPr>
-              <a:t>27 أكتوبر</a:t>
-            </a:r>
-            <a:endParaRPr lang="ar-SA" sz="700" dirty="0"/>
-          </a:p>
-        </p:txBody>
-      </p:sp>
-      <p:sp>
-        <p:nvSpPr>
-          <p:cNvPr id="235" name="Text 233"/>
-          <p:cNvSpPr/>
-          <p:nvPr/>
-        </p:nvSpPr>
-        <p:spPr>
-          <a:xfrm>
-            <a:off x="6147511" y="4123182"/>
-            <a:ext cx="658368" cy="268986"/>
-          </a:xfrm>
-          <a:prstGeom prst="rect">
-            <a:avLst/>
-          </a:prstGeom>
-          <a:noFill/>
-          <a:ln/>
-        </p:spPr>
-        <p:txBody>
-          <a:bodyPr wrap="square" lIns="0" tIns="0" rIns="0" bIns="0" rtlCol="0" anchor="ctr">
-            <a:normAutofit/>
-          </a:bodyPr>
-          <a:lstStyle/>
-          <a:p>
-            <a:pPr rtl="1" algn="ctr" indent="0" marL="0">
-              <a:buNone/>
-            </a:pPr>
-            <a:r>
-              <a:rPr lang="ar-SA" altLang="en-US" sz="700" b="1" dirty="0">
-                <a:solidFill>
-                  <a:srgbClr val="222222"/>
-                </a:solidFill>
-                <a:latin typeface="Arial" pitchFamily="34" charset="0"/>
-                <a:ea typeface="Arial" pitchFamily="34" charset="-122"/>
-                <a:cs typeface="Arial" pitchFamily="34" charset="-120"/>
-              </a:rPr>
-              <a:t>28 أكتوبر</a:t>
-            </a:r>
-            <a:endParaRPr lang="ar-SA" sz="700" dirty="0"/>
-          </a:p>
-        </p:txBody>
-      </p:sp>
-      <p:sp>
-        <p:nvSpPr>
-          <p:cNvPr id="236" name="Shape 234"/>
-          <p:cNvSpPr/>
-          <p:nvPr/>
-        </p:nvSpPr>
-        <p:spPr>
-          <a:xfrm>
-            <a:off x="3596739" y="4179669"/>
-            <a:ext cx="340103" cy="156012"/>
-          </a:xfrm>
-          <a:prstGeom prst="roundRect">
-            <a:avLst>
-              <a:gd name="adj" fmla="val 23444"/>
-            </a:avLst>
-          </a:prstGeom>
-          <a:solidFill>
-            <a:srgbClr val="00778B"/>
-          </a:solidFill>
-          <a:ln w="19050">
-            <a:solidFill>
-              <a:srgbClr val="222222"/>
-            </a:solidFill>
-            <a:prstDash val="solid"/>
-          </a:ln>
-          <a:effectLst>
-            <a:outerShdw sx="100000" sy="100000" kx="0" ky="0" algn="bl" rotWithShape="0" blurRad="38100" dist="12700" dir="5400000">
-              <a:srgbClr val="000000">
-                <a:alpha val="20000"/>
-              </a:srgbClr>
-            </a:outerShdw>
-          </a:effectLst>
-        </p:spPr>
-      </p:sp>
-      <p:sp>
-        <p:nvSpPr>
-          <p:cNvPr id="237" name="Text 235"/>
-          <p:cNvSpPr/>
-          <p:nvPr/>
-        </p:nvSpPr>
-        <p:spPr>
-          <a:xfrm>
-            <a:off x="3596739" y="4179669"/>
-            <a:ext cx="340103" cy="156012"/>
-          </a:xfrm>
-          <a:prstGeom prst="rect">
-            <a:avLst/>
-          </a:prstGeom>
-          <a:noFill/>
-          <a:ln/>
-        </p:spPr>
-        <p:txBody>
-          <a:bodyPr wrap="square" lIns="0" tIns="0" rIns="0" bIns="0" rtlCol="0" anchor="ctr">
-            <a:normAutofit/>
-          </a:bodyPr>
-          <a:lstStyle/>
-          <a:p>
-            <a:pPr rtl="1" algn="ctr" indent="0" marL="0">
-              <a:buNone/>
-            </a:pPr>
-            <a:r>
-              <a:rPr lang="ar-SA" altLang="en-US" sz="700" b="1" dirty="0">
-                <a:solidFill>
-                  <a:srgbClr val="FFFFFF"/>
-                </a:solidFill>
-                <a:latin typeface="Arial" pitchFamily="34" charset="0"/>
-                <a:ea typeface="Arial" pitchFamily="34" charset="-122"/>
-                <a:cs typeface="Arial" pitchFamily="34" charset="-120"/>
-              </a:rPr>
-              <a:t>2 يوم</a:t>
-            </a:r>
-            <a:endParaRPr lang="ar-SA" sz="700" dirty="0"/>
-          </a:p>
-        </p:txBody>
-      </p:sp>
-      <p:sp>
-        <p:nvSpPr>
-          <p:cNvPr id="238" name="Shape 236"/>
-          <p:cNvSpPr/>
-          <p:nvPr/>
-        </p:nvSpPr>
-        <p:spPr>
-          <a:xfrm>
-            <a:off x="365760" y="4392168"/>
-            <a:ext cx="11460175" cy="268986"/>
-          </a:xfrm>
-          <a:prstGeom prst="rect">
-            <a:avLst/>
-          </a:prstGeom>
-          <a:solidFill>
-            <a:srgbClr val="FFFFFF"/>
-          </a:solidFill>
-          <a:ln w="6350">
-            <a:solidFill>
-              <a:srgbClr val="DFE6EA"/>
-            </a:solidFill>
-            <a:prstDash val="solid"/>
-          </a:ln>
-        </p:spPr>
-      </p:sp>
-      <p:sp>
-        <p:nvSpPr>
-          <p:cNvPr id="239" name="Shape 237"/>
-          <p:cNvSpPr/>
-          <p:nvPr/>
-        </p:nvSpPr>
-        <p:spPr>
-          <a:xfrm>
-            <a:off x="11515039" y="4407789"/>
-            <a:ext cx="237744" cy="237744"/>
-          </a:xfrm>
-          <a:prstGeom prst="ellipse">
-            <a:avLst/>
-          </a:prstGeom>
-          <a:solidFill>
-            <a:srgbClr val="00778B"/>
-          </a:solidFill>
-          <a:ln w="19050">
-            <a:solidFill>
-              <a:srgbClr val="222222"/>
-            </a:solidFill>
-            <a:prstDash val="solid"/>
-          </a:ln>
-        </p:spPr>
-      </p:sp>
-      <p:sp>
-        <p:nvSpPr>
-          <p:cNvPr id="240" name="Text 238"/>
-          <p:cNvSpPr/>
-          <p:nvPr/>
-        </p:nvSpPr>
-        <p:spPr>
-          <a:xfrm>
-            <a:off x="11441887" y="4392168"/>
-            <a:ext cx="384048" cy="268986"/>
-          </a:xfrm>
-          <a:prstGeom prst="rect">
-            <a:avLst/>
-          </a:prstGeom>
-          <a:noFill/>
-          <a:ln/>
-        </p:spPr>
-        <p:txBody>
-          <a:bodyPr wrap="square" lIns="0" tIns="0" rIns="0" bIns="0" rtlCol="0" anchor="ctr">
-            <a:normAutofit/>
-          </a:bodyPr>
-          <a:lstStyle/>
-          <a:p>
-            <a:pPr rtl="1" algn="ctr" indent="0" marL="0">
-              <a:buNone/>
-            </a:pPr>
-            <a:r>
-              <a:rPr lang="ar-SA" altLang="en-US" sz="850" b="1" dirty="0">
-                <a:solidFill>
-                  <a:srgbClr val="FFFFFF"/>
-                </a:solidFill>
-                <a:latin typeface="Arial" pitchFamily="34" charset="0"/>
-                <a:ea typeface="Arial" pitchFamily="34" charset="-122"/>
-                <a:cs typeface="Arial" pitchFamily="34" charset="-120"/>
-              </a:rPr>
-              <a:t>D</a:t>
-            </a:r>
-            <a:endParaRPr lang="ar-SA" sz="850" dirty="0"/>
-          </a:p>
-        </p:txBody>
-      </p:sp>
-      <p:sp>
-        <p:nvSpPr>
-          <p:cNvPr id="241" name="Text 239"/>
-          <p:cNvSpPr/>
-          <p:nvPr/>
-        </p:nvSpPr>
-        <p:spPr>
-          <a:xfrm>
-            <a:off x="8762695" y="4392168"/>
-            <a:ext cx="2606040" cy="268986"/>
-          </a:xfrm>
-          <a:prstGeom prst="rect">
-            <a:avLst/>
-          </a:prstGeom>
-          <a:noFill/>
-          <a:ln/>
-        </p:spPr>
-        <p:txBody>
-          <a:bodyPr wrap="square" lIns="0" tIns="0" rIns="0" bIns="0" rtlCol="0" anchor="ctr">
-            <a:normAutofit/>
-          </a:bodyPr>
-          <a:lstStyle/>
-          <a:p>
-            <a:pPr rtl="1" algn="r" indent="0" marL="0">
-              <a:buNone/>
-            </a:pPr>
-            <a:r>
-              <a:rPr lang="ar-SA" altLang="en-US" sz="750" b="1" dirty="0">
-                <a:solidFill>
-                  <a:srgbClr val="222222"/>
-                </a:solidFill>
-                <a:latin typeface="Arial" pitchFamily="34" charset="0"/>
-                <a:ea typeface="Arial" pitchFamily="34" charset="-122"/>
-                <a:cs typeface="Arial" pitchFamily="34" charset="-120"/>
-              </a:rPr>
-              <a:t>بلاطة / لبشة الحفرة – حديد التسليح والشدات والخرسانة</a:t>
-            </a:r>
-            <a:endParaRPr lang="ar-SA" sz="750" dirty="0"/>
-          </a:p>
-        </p:txBody>
-      </p:sp>
-      <p:sp>
-        <p:nvSpPr>
-          <p:cNvPr id="242" name="Text 240"/>
-          <p:cNvSpPr/>
-          <p:nvPr/>
-        </p:nvSpPr>
-        <p:spPr>
-          <a:xfrm>
-            <a:off x="7967167" y="4392168"/>
-            <a:ext cx="777240" cy="268986"/>
-          </a:xfrm>
-          <a:prstGeom prst="rect">
-            <a:avLst/>
-          </a:prstGeom>
-          <a:noFill/>
-          <a:ln/>
-        </p:spPr>
-        <p:txBody>
-          <a:bodyPr wrap="square" lIns="0" tIns="0" rIns="0" bIns="0" rtlCol="0" anchor="ctr">
-            <a:normAutofit/>
-          </a:bodyPr>
-          <a:lstStyle/>
-          <a:p>
-            <a:pPr rtl="1" algn="ctr" indent="0" marL="0">
-              <a:buNone/>
-            </a:pPr>
-            <a:r>
-              <a:rPr lang="ar-SA" altLang="en-US" sz="700" dirty="0">
-                <a:solidFill>
-                  <a:srgbClr val="444444"/>
-                </a:solidFill>
-                <a:latin typeface="Arial" pitchFamily="34" charset="0"/>
-                <a:ea typeface="Arial" pitchFamily="34" charset="-122"/>
-                <a:cs typeface="Arial" pitchFamily="34" charset="-120"/>
-              </a:rPr>
-              <a:t>C · FS</a:t>
-            </a:r>
-            <a:endParaRPr lang="ar-SA" sz="700" dirty="0"/>
-          </a:p>
-        </p:txBody>
-      </p:sp>
-      <p:sp>
-        <p:nvSpPr>
-          <p:cNvPr id="243" name="Text 241"/>
-          <p:cNvSpPr/>
-          <p:nvPr/>
-        </p:nvSpPr>
-        <p:spPr>
-          <a:xfrm>
-            <a:off x="7464247" y="4392168"/>
-            <a:ext cx="502920" cy="268986"/>
-          </a:xfrm>
-          <a:prstGeom prst="rect">
-            <a:avLst/>
-          </a:prstGeom>
-          <a:noFill/>
-          <a:ln/>
-        </p:spPr>
-        <p:txBody>
-          <a:bodyPr wrap="square" lIns="0" tIns="0" rIns="0" bIns="0" rtlCol="0" anchor="ctr">
-            <a:normAutofit/>
-          </a:bodyPr>
-          <a:lstStyle/>
-          <a:p>
-            <a:pPr rtl="1" algn="ctr" indent="0" marL="0">
-              <a:buNone/>
-            </a:pPr>
-            <a:r>
-              <a:rPr lang="ar-SA" altLang="en-US" sz="900" b="1" dirty="0">
-                <a:solidFill>
-                  <a:srgbClr val="222222"/>
-                </a:solidFill>
-                <a:latin typeface="Arial" pitchFamily="34" charset="0"/>
-                <a:ea typeface="Arial" pitchFamily="34" charset="-122"/>
-                <a:cs typeface="Arial" pitchFamily="34" charset="-120"/>
-              </a:rPr>
-              <a:t>5</a:t>
-            </a:r>
-            <a:endParaRPr lang="ar-SA" sz="900" dirty="0"/>
-          </a:p>
-        </p:txBody>
-      </p:sp>
-      <p:sp>
-        <p:nvSpPr>
-          <p:cNvPr id="244" name="Text 242"/>
-          <p:cNvSpPr/>
-          <p:nvPr/>
-        </p:nvSpPr>
-        <p:spPr>
-          <a:xfrm>
-            <a:off x="6805879" y="4392168"/>
-            <a:ext cx="658368" cy="268986"/>
-          </a:xfrm>
-          <a:prstGeom prst="rect">
-            <a:avLst/>
-          </a:prstGeom>
-          <a:noFill/>
-          <a:ln/>
-        </p:spPr>
-        <p:txBody>
-          <a:bodyPr wrap="square" lIns="0" tIns="0" rIns="0" bIns="0" rtlCol="0" anchor="ctr">
-            <a:normAutofit/>
-          </a:bodyPr>
-          <a:lstStyle/>
-          <a:p>
-            <a:pPr rtl="1" algn="ctr" indent="0" marL="0">
-              <a:buNone/>
-            </a:pPr>
-            <a:r>
-              <a:rPr lang="ar-SA" altLang="en-US" sz="700" b="1" dirty="0">
-                <a:solidFill>
-                  <a:srgbClr val="222222"/>
-                </a:solidFill>
-                <a:latin typeface="Arial" pitchFamily="34" charset="0"/>
-                <a:ea typeface="Arial" pitchFamily="34" charset="-122"/>
-                <a:cs typeface="Arial" pitchFamily="34" charset="-120"/>
-              </a:rPr>
-              <a:t>29 أكتوبر</a:t>
-            </a:r>
-            <a:endParaRPr lang="ar-SA" sz="700" dirty="0"/>
-          </a:p>
-        </p:txBody>
-      </p:sp>
-      <p:sp>
-        <p:nvSpPr>
-          <p:cNvPr id="245" name="Text 243"/>
-          <p:cNvSpPr/>
-          <p:nvPr/>
-        </p:nvSpPr>
-        <p:spPr>
-          <a:xfrm>
-            <a:off x="6147511" y="4392168"/>
-            <a:ext cx="658368" cy="268986"/>
-          </a:xfrm>
-          <a:prstGeom prst="rect">
-            <a:avLst/>
-          </a:prstGeom>
-          <a:noFill/>
-          <a:ln/>
-        </p:spPr>
-        <p:txBody>
-          <a:bodyPr wrap="square" lIns="0" tIns="0" rIns="0" bIns="0" rtlCol="0" anchor="ctr">
-            <a:normAutofit/>
-          </a:bodyPr>
-          <a:lstStyle/>
-          <a:p>
-            <a:pPr rtl="1" algn="ctr" indent="0" marL="0">
-              <a:buNone/>
-            </a:pPr>
-            <a:r>
-              <a:rPr lang="ar-SA" altLang="en-US" sz="700" b="1" dirty="0">
-                <a:solidFill>
-                  <a:srgbClr val="222222"/>
-                </a:solidFill>
-                <a:latin typeface="Arial" pitchFamily="34" charset="0"/>
-                <a:ea typeface="Arial" pitchFamily="34" charset="-122"/>
-                <a:cs typeface="Arial" pitchFamily="34" charset="-120"/>
-              </a:rPr>
-              <a:t>3 نوفمبر</a:t>
-            </a:r>
-            <a:endParaRPr lang="ar-SA" sz="700" dirty="0"/>
-          </a:p>
-        </p:txBody>
-      </p:sp>
-      <p:sp>
-        <p:nvSpPr>
-          <p:cNvPr id="246" name="Shape 244"/>
-          <p:cNvSpPr/>
-          <p:nvPr/>
-        </p:nvSpPr>
-        <p:spPr>
-          <a:xfrm>
-            <a:off x="2576430" y="4448655"/>
-            <a:ext cx="1020309" cy="156012"/>
-          </a:xfrm>
-          <a:prstGeom prst="roundRect">
-            <a:avLst>
-              <a:gd name="adj" fmla="val 23444"/>
-            </a:avLst>
-          </a:prstGeom>
-          <a:solidFill>
-            <a:srgbClr val="00778B"/>
-          </a:solidFill>
-          <a:ln w="19050">
-            <a:solidFill>
-              <a:srgbClr val="222222"/>
-            </a:solidFill>
-            <a:prstDash val="solid"/>
-          </a:ln>
-          <a:effectLst>
-            <a:outerShdw sx="100000" sy="100000" kx="0" ky="0" algn="bl" rotWithShape="0" blurRad="38100" dist="12700" dir="5400000">
-              <a:srgbClr val="000000">
-                <a:alpha val="20000"/>
-              </a:srgbClr>
-            </a:outerShdw>
-          </a:effectLst>
-        </p:spPr>
-      </p:sp>
-      <p:sp>
-        <p:nvSpPr>
-          <p:cNvPr id="247" name="Text 245"/>
-          <p:cNvSpPr/>
-          <p:nvPr/>
-        </p:nvSpPr>
-        <p:spPr>
-          <a:xfrm>
-            <a:off x="2576430" y="4448655"/>
-            <a:ext cx="1020309" cy="156012"/>
-          </a:xfrm>
-          <a:prstGeom prst="rect">
-            <a:avLst/>
-          </a:prstGeom>
-          <a:noFill/>
-          <a:ln/>
-        </p:spPr>
-        <p:txBody>
-          <a:bodyPr wrap="square" lIns="0" tIns="0" rIns="0" bIns="0" rtlCol="0" anchor="ctr">
-            <a:normAutofit/>
-          </a:bodyPr>
-          <a:lstStyle/>
-          <a:p>
-            <a:pPr rtl="1" algn="ctr" indent="0" marL="0">
-              <a:buNone/>
-            </a:pPr>
-            <a:r>
-              <a:rPr lang="ar-SA" altLang="en-US" sz="700" b="1" dirty="0">
-                <a:solidFill>
-                  <a:srgbClr val="FFFFFF"/>
-                </a:solidFill>
-                <a:latin typeface="Arial" pitchFamily="34" charset="0"/>
-                <a:ea typeface="Arial" pitchFamily="34" charset="-122"/>
-                <a:cs typeface="Arial" pitchFamily="34" charset="-120"/>
-              </a:rPr>
-              <a:t>5 يوم</a:t>
-            </a:r>
-            <a:endParaRPr lang="ar-SA" sz="700" dirty="0"/>
-          </a:p>
-        </p:txBody>
-      </p:sp>
-      <p:sp>
-        <p:nvSpPr>
-          <p:cNvPr id="248" name="Shape 246"/>
-          <p:cNvSpPr/>
-          <p:nvPr/>
-        </p:nvSpPr>
-        <p:spPr>
-          <a:xfrm>
-            <a:off x="365760" y="4661154"/>
-            <a:ext cx="11460175" cy="268986"/>
-          </a:xfrm>
-          <a:prstGeom prst="rect">
-            <a:avLst/>
-          </a:prstGeom>
-          <a:solidFill>
-            <a:srgbClr val="F6F9FA"/>
-          </a:solidFill>
-          <a:ln w="6350">
-            <a:solidFill>
-              <a:srgbClr val="DFE6EA"/>
-            </a:solidFill>
-            <a:prstDash val="solid"/>
-          </a:ln>
-        </p:spPr>
-      </p:sp>
-      <p:sp>
-        <p:nvSpPr>
-          <p:cNvPr id="249" name="Shape 247"/>
-          <p:cNvSpPr/>
-          <p:nvPr/>
-        </p:nvSpPr>
-        <p:spPr>
-          <a:xfrm>
-            <a:off x="11515039" y="4676775"/>
-            <a:ext cx="237744" cy="237744"/>
-          </a:xfrm>
-          <a:prstGeom prst="ellipse">
-            <a:avLst/>
-          </a:prstGeom>
-          <a:solidFill>
-            <a:srgbClr val="00778B"/>
-          </a:solidFill>
-          <a:ln w="6350">
-            <a:solidFill>
-              <a:srgbClr val="00778B"/>
-            </a:solidFill>
-            <a:prstDash val="solid"/>
-          </a:ln>
-        </p:spPr>
-      </p:sp>
-      <p:sp>
-        <p:nvSpPr>
-          <p:cNvPr id="250" name="Text 248"/>
-          <p:cNvSpPr/>
-          <p:nvPr/>
-        </p:nvSpPr>
-        <p:spPr>
-          <a:xfrm>
-            <a:off x="11441887" y="4661154"/>
-            <a:ext cx="384048" cy="268986"/>
-          </a:xfrm>
-          <a:prstGeom prst="rect">
-            <a:avLst/>
-          </a:prstGeom>
-          <a:noFill/>
-          <a:ln/>
-        </p:spPr>
-        <p:txBody>
-          <a:bodyPr wrap="square" lIns="0" tIns="0" rIns="0" bIns="0" rtlCol="0" anchor="ctr">
-            <a:normAutofit/>
-          </a:bodyPr>
-          <a:lstStyle/>
-          <a:p>
-            <a:pPr rtl="1" algn="ctr" indent="0" marL="0">
-              <a:buNone/>
-            </a:pPr>
-            <a:r>
-              <a:rPr lang="ar-SA" altLang="en-US" sz="850" b="1" dirty="0">
-                <a:solidFill>
-                  <a:srgbClr val="FFFFFF"/>
-                </a:solidFill>
-                <a:latin typeface="Arial" pitchFamily="34" charset="0"/>
-                <a:ea typeface="Arial" pitchFamily="34" charset="-122"/>
-                <a:cs typeface="Arial" pitchFamily="34" charset="-120"/>
-              </a:rPr>
-              <a:t>E</a:t>
-            </a:r>
-            <a:endParaRPr lang="ar-SA" sz="850" dirty="0"/>
-          </a:p>
-        </p:txBody>
-      </p:sp>
-      <p:sp>
-        <p:nvSpPr>
-          <p:cNvPr id="251" name="Text 249"/>
-          <p:cNvSpPr/>
-          <p:nvPr/>
-        </p:nvSpPr>
-        <p:spPr>
-          <a:xfrm>
-            <a:off x="8762695" y="4661154"/>
-            <a:ext cx="2606040" cy="268986"/>
-          </a:xfrm>
-          <a:prstGeom prst="rect">
-            <a:avLst/>
-          </a:prstGeom>
-          <a:noFill/>
-          <a:ln/>
-        </p:spPr>
-        <p:txBody>
-          <a:bodyPr wrap="square" lIns="0" tIns="0" rIns="0" bIns="0" rtlCol="0" anchor="ctr">
-            <a:normAutofit/>
-          </a:bodyPr>
-          <a:lstStyle/>
-          <a:p>
-            <a:pPr rtl="1" algn="r" indent="0" marL="0">
-              <a:buNone/>
-            </a:pPr>
-            <a:r>
-              <a:rPr lang="ar-SA" altLang="en-US" sz="750" b="1" dirty="0">
-                <a:solidFill>
-                  <a:srgbClr val="222222"/>
-                </a:solidFill>
-                <a:latin typeface="Arial" pitchFamily="34" charset="0"/>
-                <a:ea typeface="Arial" pitchFamily="34" charset="-122"/>
-                <a:cs typeface="Arial" pitchFamily="34" charset="-120"/>
-              </a:rPr>
-              <a:t>جدار الحفرة – حديد التسليح والشدات والخرسانة</a:t>
-            </a:r>
-            <a:endParaRPr lang="ar-SA" sz="750" dirty="0"/>
-          </a:p>
-        </p:txBody>
-      </p:sp>
-      <p:sp>
-        <p:nvSpPr>
-          <p:cNvPr id="252" name="Text 250"/>
-          <p:cNvSpPr/>
-          <p:nvPr/>
-        </p:nvSpPr>
-        <p:spPr>
-          <a:xfrm>
-            <a:off x="7967167" y="4661154"/>
-            <a:ext cx="777240" cy="268986"/>
-          </a:xfrm>
-          <a:prstGeom prst="rect">
-            <a:avLst/>
-          </a:prstGeom>
-          <a:noFill/>
-          <a:ln/>
-        </p:spPr>
-        <p:txBody>
-          <a:bodyPr wrap="square" lIns="0" tIns="0" rIns="0" bIns="0" rtlCol="0" anchor="ctr">
-            <a:normAutofit/>
-          </a:bodyPr>
-          <a:lstStyle/>
-          <a:p>
-            <a:pPr rtl="1" algn="ctr" indent="0" marL="0">
-              <a:buNone/>
-            </a:pPr>
-            <a:r>
-              <a:rPr lang="ar-SA" altLang="en-US" sz="700" dirty="0">
-                <a:solidFill>
-                  <a:srgbClr val="444444"/>
-                </a:solidFill>
-                <a:latin typeface="Arial" pitchFamily="34" charset="0"/>
-                <a:ea typeface="Arial" pitchFamily="34" charset="-122"/>
-                <a:cs typeface="Arial" pitchFamily="34" charset="-120"/>
-              </a:rPr>
-              <a:t>D · FS</a:t>
-            </a:r>
-            <a:endParaRPr lang="ar-SA" sz="700" dirty="0"/>
-          </a:p>
-        </p:txBody>
-      </p:sp>
-      <p:sp>
-        <p:nvSpPr>
-          <p:cNvPr id="253" name="Text 251"/>
-          <p:cNvSpPr/>
-          <p:nvPr/>
-        </p:nvSpPr>
-        <p:spPr>
-          <a:xfrm>
-            <a:off x="7464247" y="4661154"/>
-            <a:ext cx="502920" cy="268986"/>
-          </a:xfrm>
-          <a:prstGeom prst="rect">
-            <a:avLst/>
-          </a:prstGeom>
-          <a:noFill/>
-          <a:ln/>
-        </p:spPr>
-        <p:txBody>
-          <a:bodyPr wrap="square" lIns="0" tIns="0" rIns="0" bIns="0" rtlCol="0" anchor="ctr">
-            <a:normAutofit/>
-          </a:bodyPr>
-          <a:lstStyle/>
-          <a:p>
-            <a:pPr rtl="1" algn="ctr" indent="0" marL="0">
-              <a:buNone/>
-            </a:pPr>
-            <a:r>
-              <a:rPr lang="ar-SA" altLang="en-US" sz="900" b="1" dirty="0">
-                <a:solidFill>
-                  <a:srgbClr val="222222"/>
-                </a:solidFill>
-                <a:latin typeface="Arial" pitchFamily="34" charset="0"/>
-                <a:ea typeface="Arial" pitchFamily="34" charset="-122"/>
-                <a:cs typeface="Arial" pitchFamily="34" charset="-120"/>
-              </a:rPr>
-              <a:t>3</a:t>
-            </a:r>
-            <a:endParaRPr lang="ar-SA" sz="900" dirty="0"/>
-          </a:p>
-        </p:txBody>
-      </p:sp>
-      <p:sp>
-        <p:nvSpPr>
-          <p:cNvPr id="254" name="Text 252"/>
-          <p:cNvSpPr/>
-          <p:nvPr/>
-        </p:nvSpPr>
-        <p:spPr>
-          <a:xfrm>
-            <a:off x="6805879" y="4661154"/>
-            <a:ext cx="658368" cy="268986"/>
-          </a:xfrm>
-          <a:prstGeom prst="rect">
-            <a:avLst/>
-          </a:prstGeom>
-          <a:noFill/>
-          <a:ln/>
-        </p:spPr>
-        <p:txBody>
-          <a:bodyPr wrap="square" lIns="0" tIns="0" rIns="0" bIns="0" rtlCol="0" anchor="ctr">
-            <a:normAutofit/>
-          </a:bodyPr>
-          <a:lstStyle/>
-          <a:p>
-            <a:pPr rtl="1" algn="ctr" indent="0" marL="0">
-              <a:buNone/>
-            </a:pPr>
-            <a:r>
-              <a:rPr lang="ar-SA" altLang="en-US" sz="700" b="1" dirty="0">
-                <a:solidFill>
-                  <a:srgbClr val="222222"/>
-                </a:solidFill>
-                <a:latin typeface="Arial" pitchFamily="34" charset="0"/>
-                <a:ea typeface="Arial" pitchFamily="34" charset="-122"/>
-                <a:cs typeface="Arial" pitchFamily="34" charset="-120"/>
-              </a:rPr>
-              <a:t>4 نوفمبر</a:t>
-            </a:r>
-            <a:endParaRPr lang="ar-SA" sz="700" dirty="0"/>
-          </a:p>
-        </p:txBody>
-      </p:sp>
-      <p:sp>
-        <p:nvSpPr>
-          <p:cNvPr id="255" name="Text 253"/>
-          <p:cNvSpPr/>
-          <p:nvPr/>
-        </p:nvSpPr>
-        <p:spPr>
-          <a:xfrm>
-            <a:off x="6147511" y="4661154"/>
-            <a:ext cx="658368" cy="268986"/>
-          </a:xfrm>
-          <a:prstGeom prst="rect">
-            <a:avLst/>
-          </a:prstGeom>
-          <a:noFill/>
-          <a:ln/>
-        </p:spPr>
-        <p:txBody>
-          <a:bodyPr wrap="square" lIns="0" tIns="0" rIns="0" bIns="0" rtlCol="0" anchor="ctr">
-            <a:normAutofit/>
-          </a:bodyPr>
-          <a:lstStyle/>
-          <a:p>
-            <a:pPr rtl="1" algn="ctr" indent="0" marL="0">
-              <a:buNone/>
-            </a:pPr>
-            <a:r>
-              <a:rPr lang="ar-SA" altLang="en-US" sz="700" b="1" dirty="0">
-                <a:solidFill>
-                  <a:srgbClr val="222222"/>
-                </a:solidFill>
-                <a:latin typeface="Arial" pitchFamily="34" charset="0"/>
-                <a:ea typeface="Arial" pitchFamily="34" charset="-122"/>
-                <a:cs typeface="Arial" pitchFamily="34" charset="-120"/>
-              </a:rPr>
-              <a:t>7 نوفمبر</a:t>
-            </a:r>
-            <a:endParaRPr lang="ar-SA" sz="700" dirty="0"/>
-          </a:p>
-        </p:txBody>
-      </p:sp>
-      <p:sp>
-        <p:nvSpPr>
-          <p:cNvPr id="256" name="Shape 254"/>
-          <p:cNvSpPr/>
-          <p:nvPr/>
-        </p:nvSpPr>
-        <p:spPr>
-          <a:xfrm>
-            <a:off x="1896224" y="4717641"/>
-            <a:ext cx="680206" cy="156012"/>
-          </a:xfrm>
-          <a:prstGeom prst="roundRect">
-            <a:avLst>
-              <a:gd name="adj" fmla="val 23444"/>
-            </a:avLst>
-          </a:prstGeom>
-          <a:solidFill>
-            <a:srgbClr val="00778B"/>
-          </a:solidFill>
-          <a:ln w="6350">
-            <a:solidFill>
-              <a:srgbClr val="00778B"/>
-            </a:solidFill>
-            <a:prstDash val="solid"/>
-          </a:ln>
-          <a:effectLst>
-            <a:outerShdw sx="100000" sy="100000" kx="0" ky="0" algn="bl" rotWithShape="0" blurRad="38100" dist="12700" dir="5400000">
-              <a:srgbClr val="000000">
-                <a:alpha val="20000"/>
-              </a:srgbClr>
-            </a:outerShdw>
-          </a:effectLst>
-        </p:spPr>
-      </p:sp>
-      <p:sp>
-        <p:nvSpPr>
-          <p:cNvPr id="257" name="Text 255"/>
-          <p:cNvSpPr/>
-          <p:nvPr/>
-        </p:nvSpPr>
-        <p:spPr>
-          <a:xfrm>
-            <a:off x="1896224" y="4717641"/>
-            <a:ext cx="680206" cy="156012"/>
-          </a:xfrm>
-          <a:prstGeom prst="rect">
-            <a:avLst/>
-          </a:prstGeom>
-          <a:noFill/>
-          <a:ln/>
-        </p:spPr>
-        <p:txBody>
-          <a:bodyPr wrap="square" lIns="0" tIns="0" rIns="0" bIns="0" rtlCol="0" anchor="ctr">
-            <a:normAutofit/>
-          </a:bodyPr>
-          <a:lstStyle/>
-          <a:p>
-            <a:pPr rtl="1" algn="ctr" indent="0" marL="0">
-              <a:buNone/>
-            </a:pPr>
-            <a:r>
-              <a:rPr lang="ar-SA" altLang="en-US" sz="700" b="1" dirty="0">
-                <a:solidFill>
-                  <a:srgbClr val="FFFFFF"/>
-                </a:solidFill>
-                <a:latin typeface="Arial" pitchFamily="34" charset="0"/>
-                <a:ea typeface="Arial" pitchFamily="34" charset="-122"/>
-                <a:cs typeface="Arial" pitchFamily="34" charset="-120"/>
-              </a:rPr>
-              <a:t>3 يوم</a:t>
-            </a:r>
-            <a:endParaRPr lang="ar-SA" sz="700" dirty="0"/>
-          </a:p>
-        </p:txBody>
-      </p:sp>
-      <p:sp>
-        <p:nvSpPr>
-          <p:cNvPr id="258" name="Shape 256"/>
-          <p:cNvSpPr/>
-          <p:nvPr/>
-        </p:nvSpPr>
-        <p:spPr>
-          <a:xfrm>
-            <a:off x="365760" y="4930140"/>
-            <a:ext cx="11460175" cy="268986"/>
-          </a:xfrm>
-          <a:prstGeom prst="rect">
-            <a:avLst/>
-          </a:prstGeom>
-          <a:solidFill>
-            <a:srgbClr val="FFFFFF"/>
-          </a:solidFill>
-          <a:ln w="6350">
-            <a:solidFill>
-              <a:srgbClr val="DFE6EA"/>
-            </a:solidFill>
-            <a:prstDash val="solid"/>
-          </a:ln>
-        </p:spPr>
-      </p:sp>
-      <p:sp>
-        <p:nvSpPr>
-          <p:cNvPr id="259" name="Shape 257"/>
-          <p:cNvSpPr/>
-          <p:nvPr/>
-        </p:nvSpPr>
-        <p:spPr>
-          <a:xfrm>
-            <a:off x="11515039" y="4945761"/>
-            <a:ext cx="237744" cy="237744"/>
-          </a:xfrm>
-          <a:prstGeom prst="ellipse">
-            <a:avLst/>
-          </a:prstGeom>
-          <a:solidFill>
-            <a:srgbClr val="2E9E6B"/>
-          </a:solidFill>
-          <a:ln w="19050">
-            <a:solidFill>
-              <a:srgbClr val="222222"/>
-            </a:solidFill>
-            <a:prstDash val="solid"/>
-          </a:ln>
-        </p:spPr>
-      </p:sp>
-      <p:sp>
-        <p:nvSpPr>
-          <p:cNvPr id="260" name="Text 258"/>
-          <p:cNvSpPr/>
-          <p:nvPr/>
-        </p:nvSpPr>
-        <p:spPr>
-          <a:xfrm>
-            <a:off x="11441887" y="4930140"/>
-            <a:ext cx="384048" cy="268986"/>
-          </a:xfrm>
-          <a:prstGeom prst="rect">
-            <a:avLst/>
-          </a:prstGeom>
-          <a:noFill/>
-          <a:ln/>
-        </p:spPr>
-        <p:txBody>
-          <a:bodyPr wrap="square" lIns="0" tIns="0" rIns="0" bIns="0" rtlCol="0" anchor="ctr">
-            <a:normAutofit/>
-          </a:bodyPr>
-          <a:lstStyle/>
-          <a:p>
-            <a:pPr rtl="1" algn="ctr" indent="0" marL="0">
-              <a:buNone/>
-            </a:pPr>
-            <a:r>
-              <a:rPr lang="ar-SA" altLang="en-US" sz="850" b="1" dirty="0">
-                <a:solidFill>
-                  <a:srgbClr val="FFFFFF"/>
-                </a:solidFill>
-                <a:latin typeface="Arial" pitchFamily="34" charset="0"/>
-                <a:ea typeface="Arial" pitchFamily="34" charset="-122"/>
-                <a:cs typeface="Arial" pitchFamily="34" charset="-120"/>
-              </a:rPr>
-              <a:t>F</a:t>
-            </a:r>
-            <a:endParaRPr lang="ar-SA" sz="850" dirty="0"/>
-          </a:p>
-        </p:txBody>
-      </p:sp>
-      <p:sp>
-        <p:nvSpPr>
-          <p:cNvPr id="261" name="Text 259"/>
-          <p:cNvSpPr/>
-          <p:nvPr/>
-        </p:nvSpPr>
-        <p:spPr>
-          <a:xfrm>
-            <a:off x="8762695" y="4930140"/>
-            <a:ext cx="2606040" cy="268986"/>
-          </a:xfrm>
-          <a:prstGeom prst="rect">
-            <a:avLst/>
-          </a:prstGeom>
-          <a:noFill/>
-          <a:ln/>
-        </p:spPr>
-        <p:txBody>
-          <a:bodyPr wrap="square" lIns="0" tIns="0" rIns="0" bIns="0" rtlCol="0" anchor="ctr">
-            <a:normAutofit/>
-          </a:bodyPr>
-          <a:lstStyle/>
-          <a:p>
-            <a:pPr rtl="1" algn="r" indent="0" marL="0">
-              <a:buNone/>
-            </a:pPr>
-            <a:r>
-              <a:rPr lang="ar-SA" altLang="en-US" sz="750" b="1" dirty="0">
-                <a:solidFill>
-                  <a:srgbClr val="222222"/>
-                </a:solidFill>
-                <a:latin typeface="Arial" pitchFamily="34" charset="0"/>
-                <a:ea typeface="Arial" pitchFamily="34" charset="-122"/>
-                <a:cs typeface="Arial" pitchFamily="34" charset="-120"/>
-              </a:rPr>
-              <a:t>أساسات المبنى – حفر ودمك / اختبار وحديد تسليح وخرسانة</a:t>
-            </a:r>
-            <a:endParaRPr lang="ar-SA" sz="750" dirty="0"/>
-          </a:p>
-        </p:txBody>
-      </p:sp>
-      <p:sp>
-        <p:nvSpPr>
-          <p:cNvPr id="262" name="Text 260"/>
-          <p:cNvSpPr/>
-          <p:nvPr/>
-        </p:nvSpPr>
-        <p:spPr>
-          <a:xfrm>
-            <a:off x="7967167" y="4930140"/>
-            <a:ext cx="777240" cy="268986"/>
-          </a:xfrm>
-          <a:prstGeom prst="rect">
-            <a:avLst/>
-          </a:prstGeom>
-          <a:noFill/>
-          <a:ln/>
-        </p:spPr>
-        <p:txBody>
-          <a:bodyPr wrap="square" lIns="0" tIns="0" rIns="0" bIns="0" rtlCol="0" anchor="ctr">
-            <a:normAutofit/>
-          </a:bodyPr>
-          <a:lstStyle/>
-          <a:p>
-            <a:pPr rtl="1" algn="ctr" indent="0" marL="0">
-              <a:buNone/>
-            </a:pPr>
-            <a:r>
-              <a:rPr lang="ar-SA" altLang="en-US" sz="700" dirty="0">
-                <a:solidFill>
-                  <a:srgbClr val="444444"/>
-                </a:solidFill>
-                <a:latin typeface="Arial" pitchFamily="34" charset="0"/>
-                <a:ea typeface="Arial" pitchFamily="34" charset="-122"/>
-                <a:cs typeface="Arial" pitchFamily="34" charset="-120"/>
-              </a:rPr>
-              <a:t>D · FS</a:t>
-            </a:r>
-            <a:endParaRPr lang="ar-SA" sz="700" dirty="0"/>
-          </a:p>
-        </p:txBody>
-      </p:sp>
-      <p:sp>
-        <p:nvSpPr>
-          <p:cNvPr id="263" name="Text 261"/>
-          <p:cNvSpPr/>
-          <p:nvPr/>
-        </p:nvSpPr>
-        <p:spPr>
-          <a:xfrm>
-            <a:off x="7464247" y="4930140"/>
-            <a:ext cx="502920" cy="268986"/>
-          </a:xfrm>
-          <a:prstGeom prst="rect">
-            <a:avLst/>
-          </a:prstGeom>
-          <a:noFill/>
-          <a:ln/>
-        </p:spPr>
-        <p:txBody>
-          <a:bodyPr wrap="square" lIns="0" tIns="0" rIns="0" bIns="0" rtlCol="0" anchor="ctr">
-            <a:normAutofit/>
-          </a:bodyPr>
-          <a:lstStyle/>
-          <a:p>
-            <a:pPr rtl="1" algn="ctr" indent="0" marL="0">
-              <a:buNone/>
-            </a:pPr>
-            <a:r>
-              <a:rPr lang="ar-SA" altLang="en-US" sz="900" b="1" dirty="0">
-                <a:solidFill>
-                  <a:srgbClr val="222222"/>
-                </a:solidFill>
-                <a:latin typeface="Arial" pitchFamily="34" charset="0"/>
-                <a:ea typeface="Arial" pitchFamily="34" charset="-122"/>
-                <a:cs typeface="Arial" pitchFamily="34" charset="-120"/>
-              </a:rPr>
-              <a:t>6</a:t>
-            </a:r>
-            <a:endParaRPr lang="ar-SA" sz="900" dirty="0"/>
-          </a:p>
-        </p:txBody>
-      </p:sp>
-      <p:sp>
-        <p:nvSpPr>
-          <p:cNvPr id="264" name="Text 262"/>
-          <p:cNvSpPr/>
-          <p:nvPr/>
-        </p:nvSpPr>
-        <p:spPr>
-          <a:xfrm>
-            <a:off x="6805879" y="4930140"/>
-            <a:ext cx="658368" cy="268986"/>
-          </a:xfrm>
-          <a:prstGeom prst="rect">
-            <a:avLst/>
-          </a:prstGeom>
-          <a:noFill/>
-          <a:ln/>
-        </p:spPr>
-        <p:txBody>
-          <a:bodyPr wrap="square" lIns="0" tIns="0" rIns="0" bIns="0" rtlCol="0" anchor="ctr">
-            <a:normAutofit/>
-          </a:bodyPr>
-          <a:lstStyle/>
-          <a:p>
-            <a:pPr rtl="1" algn="ctr" indent="0" marL="0">
-              <a:buNone/>
-            </a:pPr>
-            <a:r>
-              <a:rPr lang="ar-SA" altLang="en-US" sz="700" b="1" dirty="0">
-                <a:solidFill>
-                  <a:srgbClr val="222222"/>
-                </a:solidFill>
-                <a:latin typeface="Arial" pitchFamily="34" charset="0"/>
-                <a:ea typeface="Arial" pitchFamily="34" charset="-122"/>
-                <a:cs typeface="Arial" pitchFamily="34" charset="-120"/>
-              </a:rPr>
-              <a:t>4 نوفمبر</a:t>
-            </a:r>
-            <a:endParaRPr lang="ar-SA" sz="700" dirty="0"/>
-          </a:p>
-        </p:txBody>
-      </p:sp>
-      <p:sp>
-        <p:nvSpPr>
-          <p:cNvPr id="265" name="Text 263"/>
-          <p:cNvSpPr/>
-          <p:nvPr/>
-        </p:nvSpPr>
-        <p:spPr>
-          <a:xfrm>
-            <a:off x="6147511" y="4930140"/>
-            <a:ext cx="658368" cy="268986"/>
-          </a:xfrm>
-          <a:prstGeom prst="rect">
-            <a:avLst/>
-          </a:prstGeom>
-          <a:noFill/>
-          <a:ln/>
-        </p:spPr>
-        <p:txBody>
-          <a:bodyPr wrap="square" lIns="0" tIns="0" rIns="0" bIns="0" rtlCol="0" anchor="ctr">
-            <a:normAutofit/>
-          </a:bodyPr>
-          <a:lstStyle/>
-          <a:p>
-            <a:pPr rtl="1" algn="ctr" indent="0" marL="0">
-              <a:buNone/>
-            </a:pPr>
-            <a:r>
-              <a:rPr lang="ar-SA" altLang="en-US" sz="700" b="1" dirty="0">
-                <a:solidFill>
-                  <a:srgbClr val="222222"/>
-                </a:solidFill>
-                <a:latin typeface="Arial" pitchFamily="34" charset="0"/>
-                <a:ea typeface="Arial" pitchFamily="34" charset="-122"/>
-                <a:cs typeface="Arial" pitchFamily="34" charset="-120"/>
-              </a:rPr>
-              <a:t>10 نوفمبر</a:t>
-            </a:r>
-            <a:endParaRPr lang="ar-SA" sz="700" dirty="0"/>
-          </a:p>
-        </p:txBody>
-      </p:sp>
-      <p:sp>
-        <p:nvSpPr>
-          <p:cNvPr id="266" name="Shape 264"/>
-          <p:cNvSpPr/>
-          <p:nvPr/>
-        </p:nvSpPr>
-        <p:spPr>
-          <a:xfrm>
-            <a:off x="1386069" y="4986627"/>
-            <a:ext cx="1190361" cy="156012"/>
-          </a:xfrm>
-          <a:prstGeom prst="roundRect">
-            <a:avLst>
-              <a:gd name="adj" fmla="val 23444"/>
-            </a:avLst>
-          </a:prstGeom>
-          <a:solidFill>
-            <a:srgbClr val="2E9E6B"/>
-          </a:solidFill>
-          <a:ln w="19050">
-            <a:solidFill>
-              <a:srgbClr val="222222"/>
-            </a:solidFill>
-            <a:prstDash val="solid"/>
-          </a:ln>
-          <a:effectLst>
-            <a:outerShdw sx="100000" sy="100000" kx="0" ky="0" algn="bl" rotWithShape="0" blurRad="38100" dist="12700" dir="5400000">
-              <a:srgbClr val="000000">
-                <a:alpha val="20000"/>
-              </a:srgbClr>
-            </a:outerShdw>
-          </a:effectLst>
-        </p:spPr>
-      </p:sp>
-      <p:sp>
-        <p:nvSpPr>
-          <p:cNvPr id="267" name="Text 265"/>
-          <p:cNvSpPr/>
-          <p:nvPr/>
-        </p:nvSpPr>
-        <p:spPr>
-          <a:xfrm>
-            <a:off x="1386069" y="4986627"/>
-            <a:ext cx="1190361" cy="156012"/>
-          </a:xfrm>
-          <a:prstGeom prst="rect">
-            <a:avLst/>
-          </a:prstGeom>
-          <a:noFill/>
-          <a:ln/>
-        </p:spPr>
-        <p:txBody>
-          <a:bodyPr wrap="square" lIns="0" tIns="0" rIns="0" bIns="0" rtlCol="0" anchor="ctr">
-            <a:normAutofit/>
-          </a:bodyPr>
-          <a:lstStyle/>
-          <a:p>
-            <a:pPr rtl="1" algn="ctr" indent="0" marL="0">
-              <a:buNone/>
-            </a:pPr>
-            <a:r>
-              <a:rPr lang="ar-SA" altLang="en-US" sz="700" b="1" dirty="0">
-                <a:solidFill>
-                  <a:srgbClr val="FFFFFF"/>
-                </a:solidFill>
-                <a:latin typeface="Arial" pitchFamily="34" charset="0"/>
-                <a:ea typeface="Arial" pitchFamily="34" charset="-122"/>
-                <a:cs typeface="Arial" pitchFamily="34" charset="-120"/>
-              </a:rPr>
-              <a:t>6 يوم</a:t>
-            </a:r>
-            <a:endParaRPr lang="ar-SA" sz="700" dirty="0"/>
-          </a:p>
-        </p:txBody>
-      </p:sp>
-      <p:sp>
-        <p:nvSpPr>
-          <p:cNvPr id="268" name="Shape 266"/>
-          <p:cNvSpPr/>
-          <p:nvPr/>
-        </p:nvSpPr>
-        <p:spPr>
-          <a:xfrm>
-            <a:off x="365760" y="5199126"/>
-            <a:ext cx="11460175" cy="268986"/>
-          </a:xfrm>
-          <a:prstGeom prst="rect">
-            <a:avLst/>
-          </a:prstGeom>
-          <a:solidFill>
-            <a:srgbClr val="F6F9FA"/>
-          </a:solidFill>
-          <a:ln w="6350">
-            <a:solidFill>
-              <a:srgbClr val="DFE6EA"/>
-            </a:solidFill>
-            <a:prstDash val="solid"/>
-          </a:ln>
-        </p:spPr>
-      </p:sp>
-      <p:sp>
-        <p:nvSpPr>
-          <p:cNvPr id="269" name="Shape 267"/>
-          <p:cNvSpPr/>
-          <p:nvPr/>
-        </p:nvSpPr>
-        <p:spPr>
-          <a:xfrm>
-            <a:off x="11515039" y="5214747"/>
-            <a:ext cx="237744" cy="237744"/>
-          </a:xfrm>
-          <a:prstGeom prst="ellipse">
-            <a:avLst/>
-          </a:prstGeom>
-          <a:solidFill>
-            <a:srgbClr val="D68A00"/>
-          </a:solidFill>
-          <a:ln w="19050">
-            <a:solidFill>
-              <a:srgbClr val="222222"/>
-            </a:solidFill>
-            <a:prstDash val="solid"/>
-          </a:ln>
-        </p:spPr>
-      </p:sp>
-      <p:sp>
-        <p:nvSpPr>
-          <p:cNvPr id="270" name="Text 268"/>
-          <p:cNvSpPr/>
-          <p:nvPr/>
-        </p:nvSpPr>
-        <p:spPr>
-          <a:xfrm>
-            <a:off x="11441887" y="5199126"/>
-            <a:ext cx="384048" cy="268986"/>
-          </a:xfrm>
-          <a:prstGeom prst="rect">
-            <a:avLst/>
-          </a:prstGeom>
-          <a:noFill/>
-          <a:ln/>
-        </p:spPr>
-        <p:txBody>
-          <a:bodyPr wrap="square" lIns="0" tIns="0" rIns="0" bIns="0" rtlCol="0" anchor="ctr">
-            <a:normAutofit/>
-          </a:bodyPr>
-          <a:lstStyle/>
-          <a:p>
-            <a:pPr rtl="1" algn="ctr" indent="0" marL="0">
-              <a:buNone/>
-            </a:pPr>
-            <a:r>
-              <a:rPr lang="ar-SA" altLang="en-US" sz="850" b="1" dirty="0">
-                <a:solidFill>
-                  <a:srgbClr val="FFFFFF"/>
-                </a:solidFill>
-                <a:latin typeface="Arial" pitchFamily="34" charset="0"/>
-                <a:ea typeface="Arial" pitchFamily="34" charset="-122"/>
-                <a:cs typeface="Arial" pitchFamily="34" charset="-120"/>
-              </a:rPr>
-              <a:t>G</a:t>
-            </a:r>
-            <a:endParaRPr lang="ar-SA" sz="850" dirty="0"/>
-          </a:p>
-        </p:txBody>
-      </p:sp>
-      <p:sp>
-        <p:nvSpPr>
-          <p:cNvPr id="271" name="Text 269"/>
-          <p:cNvSpPr/>
-          <p:nvPr/>
-        </p:nvSpPr>
-        <p:spPr>
-          <a:xfrm>
-            <a:off x="8762695" y="5199126"/>
-            <a:ext cx="2606040" cy="268986"/>
-          </a:xfrm>
-          <a:prstGeom prst="rect">
-            <a:avLst/>
-          </a:prstGeom>
-          <a:noFill/>
-          <a:ln/>
-        </p:spPr>
-        <p:txBody>
-          <a:bodyPr wrap="square" lIns="0" tIns="0" rIns="0" bIns="0" rtlCol="0" anchor="ctr">
-            <a:normAutofit/>
-          </a:bodyPr>
-          <a:lstStyle/>
-          <a:p>
-            <a:pPr rtl="1" algn="r" indent="0" marL="0">
-              <a:buNone/>
-            </a:pPr>
-            <a:r>
-              <a:rPr lang="ar-SA" altLang="en-US" sz="750" b="1" dirty="0">
-                <a:solidFill>
-                  <a:srgbClr val="222222"/>
-                </a:solidFill>
-                <a:latin typeface="Arial" pitchFamily="34" charset="0"/>
-                <a:ea typeface="Arial" pitchFamily="34" charset="-122"/>
-                <a:cs typeface="Arial" pitchFamily="34" charset="-120"/>
-              </a:rPr>
-              <a:t>أعمال الردم للمبنى</a:t>
-            </a:r>
-            <a:endParaRPr lang="ar-SA" sz="750" dirty="0"/>
-          </a:p>
-        </p:txBody>
-      </p:sp>
-      <p:sp>
-        <p:nvSpPr>
-          <p:cNvPr id="272" name="Text 270"/>
-          <p:cNvSpPr/>
-          <p:nvPr/>
-        </p:nvSpPr>
-        <p:spPr>
-          <a:xfrm>
-            <a:off x="7967167" y="5199126"/>
-            <a:ext cx="777240" cy="268986"/>
-          </a:xfrm>
-          <a:prstGeom prst="rect">
-            <a:avLst/>
-          </a:prstGeom>
-          <a:noFill/>
-          <a:ln/>
-        </p:spPr>
-        <p:txBody>
-          <a:bodyPr wrap="square" lIns="0" tIns="0" rIns="0" bIns="0" rtlCol="0" anchor="ctr">
-            <a:normAutofit/>
-          </a:bodyPr>
-          <a:lstStyle/>
-          <a:p>
-            <a:pPr rtl="1" algn="ctr" indent="0" marL="0">
-              <a:buNone/>
-            </a:pPr>
-            <a:r>
-              <a:rPr lang="ar-SA" altLang="en-US" sz="700" dirty="0">
-                <a:solidFill>
-                  <a:srgbClr val="444444"/>
-                </a:solidFill>
-                <a:latin typeface="Arial" pitchFamily="34" charset="0"/>
-                <a:ea typeface="Arial" pitchFamily="34" charset="-122"/>
-                <a:cs typeface="Arial" pitchFamily="34" charset="-120"/>
-              </a:rPr>
-              <a:t>F · FS</a:t>
-            </a:r>
-            <a:endParaRPr lang="ar-SA" sz="700" dirty="0"/>
-          </a:p>
-        </p:txBody>
-      </p:sp>
-      <p:sp>
-        <p:nvSpPr>
-          <p:cNvPr id="273" name="Text 271"/>
-          <p:cNvSpPr/>
-          <p:nvPr/>
-        </p:nvSpPr>
-        <p:spPr>
-          <a:xfrm>
-            <a:off x="7464247" y="5199126"/>
-            <a:ext cx="502920" cy="268986"/>
-          </a:xfrm>
-          <a:prstGeom prst="rect">
-            <a:avLst/>
-          </a:prstGeom>
-          <a:noFill/>
-          <a:ln/>
-        </p:spPr>
-        <p:txBody>
-          <a:bodyPr wrap="square" lIns="0" tIns="0" rIns="0" bIns="0" rtlCol="0" anchor="ctr">
-            <a:normAutofit/>
-          </a:bodyPr>
-          <a:lstStyle/>
-          <a:p>
-            <a:pPr rtl="1" algn="ctr" indent="0" marL="0">
-              <a:buNone/>
-            </a:pPr>
-            <a:r>
-              <a:rPr lang="ar-SA" altLang="en-US" sz="900" b="1" dirty="0">
-                <a:solidFill>
-                  <a:srgbClr val="222222"/>
-                </a:solidFill>
-                <a:latin typeface="Arial" pitchFamily="34" charset="0"/>
-                <a:ea typeface="Arial" pitchFamily="34" charset="-122"/>
-                <a:cs typeface="Arial" pitchFamily="34" charset="-120"/>
-              </a:rPr>
-              <a:t>3</a:t>
-            </a:r>
-            <a:endParaRPr lang="ar-SA" sz="900" dirty="0"/>
-          </a:p>
-        </p:txBody>
-      </p:sp>
-      <p:sp>
-        <p:nvSpPr>
-          <p:cNvPr id="274" name="Text 272"/>
-          <p:cNvSpPr/>
-          <p:nvPr/>
-        </p:nvSpPr>
-        <p:spPr>
-          <a:xfrm>
-            <a:off x="6805879" y="5199126"/>
-            <a:ext cx="658368" cy="268986"/>
-          </a:xfrm>
-          <a:prstGeom prst="rect">
-            <a:avLst/>
-          </a:prstGeom>
-          <a:noFill/>
-          <a:ln/>
-        </p:spPr>
-        <p:txBody>
-          <a:bodyPr wrap="square" lIns="0" tIns="0" rIns="0" bIns="0" rtlCol="0" anchor="ctr">
-            <a:normAutofit/>
-          </a:bodyPr>
-          <a:lstStyle/>
-          <a:p>
-            <a:pPr rtl="1" algn="ctr" indent="0" marL="0">
-              <a:buNone/>
-            </a:pPr>
-            <a:r>
-              <a:rPr lang="ar-SA" altLang="en-US" sz="700" b="1" dirty="0">
-                <a:solidFill>
-                  <a:srgbClr val="222222"/>
-                </a:solidFill>
-                <a:latin typeface="Arial" pitchFamily="34" charset="0"/>
-                <a:ea typeface="Arial" pitchFamily="34" charset="-122"/>
-                <a:cs typeface="Arial" pitchFamily="34" charset="-120"/>
-              </a:rPr>
-              <a:t>11 نوفمبر</a:t>
-            </a:r>
-            <a:endParaRPr lang="ar-SA" sz="700" dirty="0"/>
-          </a:p>
-        </p:txBody>
-      </p:sp>
-      <p:sp>
-        <p:nvSpPr>
-          <p:cNvPr id="275" name="Text 273"/>
-          <p:cNvSpPr/>
-          <p:nvPr/>
-        </p:nvSpPr>
-        <p:spPr>
-          <a:xfrm>
-            <a:off x="6147511" y="5199126"/>
-            <a:ext cx="658368" cy="268986"/>
-          </a:xfrm>
-          <a:prstGeom prst="rect">
-            <a:avLst/>
-          </a:prstGeom>
-          <a:noFill/>
-          <a:ln/>
-        </p:spPr>
-        <p:txBody>
-          <a:bodyPr wrap="square" lIns="0" tIns="0" rIns="0" bIns="0" rtlCol="0" anchor="ctr">
-            <a:normAutofit/>
-          </a:bodyPr>
-          <a:lstStyle/>
-          <a:p>
-            <a:pPr rtl="1" algn="ctr" indent="0" marL="0">
-              <a:buNone/>
-            </a:pPr>
-            <a:r>
-              <a:rPr lang="ar-SA" altLang="en-US" sz="700" b="1" dirty="0">
-                <a:solidFill>
-                  <a:srgbClr val="222222"/>
-                </a:solidFill>
-                <a:latin typeface="Arial" pitchFamily="34" charset="0"/>
-                <a:ea typeface="Arial" pitchFamily="34" charset="-122"/>
-                <a:cs typeface="Arial" pitchFamily="34" charset="-120"/>
-              </a:rPr>
-              <a:t>14 نوفمبر</a:t>
-            </a:r>
-            <a:endParaRPr lang="ar-SA" sz="700" dirty="0"/>
-          </a:p>
-        </p:txBody>
-      </p:sp>
-      <p:sp>
-        <p:nvSpPr>
-          <p:cNvPr id="276" name="Shape 274"/>
-          <p:cNvSpPr/>
-          <p:nvPr/>
-        </p:nvSpPr>
-        <p:spPr>
-          <a:xfrm>
-            <a:off x="705863" y="5255613"/>
-            <a:ext cx="680206" cy="156012"/>
-          </a:xfrm>
-          <a:prstGeom prst="roundRect">
-            <a:avLst>
-              <a:gd name="adj" fmla="val 23444"/>
-            </a:avLst>
-          </a:prstGeom>
-          <a:solidFill>
-            <a:srgbClr val="D68A00"/>
-          </a:solidFill>
-          <a:ln w="19050">
-            <a:solidFill>
-              <a:srgbClr val="222222"/>
-            </a:solidFill>
-            <a:prstDash val="solid"/>
-          </a:ln>
-          <a:effectLst>
-            <a:outerShdw sx="100000" sy="100000" kx="0" ky="0" algn="bl" rotWithShape="0" blurRad="38100" dist="12700" dir="5400000">
-              <a:srgbClr val="000000">
-                <a:alpha val="20000"/>
-              </a:srgbClr>
-            </a:outerShdw>
-          </a:effectLst>
-        </p:spPr>
-      </p:sp>
-      <p:sp>
-        <p:nvSpPr>
-          <p:cNvPr id="277" name="Text 275"/>
-          <p:cNvSpPr/>
-          <p:nvPr/>
-        </p:nvSpPr>
-        <p:spPr>
-          <a:xfrm>
-            <a:off x="705863" y="5255613"/>
-            <a:ext cx="680206" cy="156012"/>
-          </a:xfrm>
-          <a:prstGeom prst="rect">
-            <a:avLst/>
-          </a:prstGeom>
-          <a:noFill/>
-          <a:ln/>
-        </p:spPr>
-        <p:txBody>
-          <a:bodyPr wrap="square" lIns="0" tIns="0" rIns="0" bIns="0" rtlCol="0" anchor="ctr">
-            <a:normAutofit/>
-          </a:bodyPr>
-          <a:lstStyle/>
-          <a:p>
-            <a:pPr rtl="1" algn="ctr" indent="0" marL="0">
-              <a:buNone/>
-            </a:pPr>
-            <a:r>
-              <a:rPr lang="ar-SA" altLang="en-US" sz="700" b="1" dirty="0">
-                <a:solidFill>
-                  <a:srgbClr val="FFFFFF"/>
-                </a:solidFill>
-                <a:latin typeface="Arial" pitchFamily="34" charset="0"/>
-                <a:ea typeface="Arial" pitchFamily="34" charset="-122"/>
-                <a:cs typeface="Arial" pitchFamily="34" charset="-120"/>
-              </a:rPr>
-              <a:t>3 يوم</a:t>
-            </a:r>
-            <a:endParaRPr lang="ar-SA" sz="700" dirty="0"/>
-          </a:p>
-        </p:txBody>
-      </p:sp>
-      <p:sp>
-        <p:nvSpPr>
-          <p:cNvPr id="278" name="Shape 276"/>
-          <p:cNvSpPr/>
-          <p:nvPr/>
-        </p:nvSpPr>
-        <p:spPr>
-          <a:xfrm>
-            <a:off x="4732235" y="2721765"/>
-            <a:ext cx="0" cy="190980"/>
+          <p:cNvPr id="189" name="Shape 187"/>
+          <p:cNvSpPr/>
+          <p:nvPr/>
+        </p:nvSpPr>
+        <p:spPr>
+          <a:xfrm>
+            <a:off x="3936842" y="2560320"/>
+            <a:ext cx="45720" cy="0"/>
           </a:xfrm>
           <a:prstGeom prst="line">
             <a:avLst/>
@@ -16476,14 +13209,37 @@
       </p:sp>
       <p:sp>
         <p:nvSpPr>
-          <p:cNvPr id="279" name="Shape 277"/>
+          <p:cNvPr id="190" name="Shape 188"/>
+          <p:cNvSpPr/>
+          <p:nvPr/>
+        </p:nvSpPr>
+        <p:spPr>
+          <a:xfrm>
+            <a:off x="3982562" y="2560320"/>
+            <a:ext cx="0" cy="640080"/>
+          </a:xfrm>
+          <a:prstGeom prst="line">
+            <a:avLst/>
+          </a:prstGeom>
+          <a:noFill/>
+          <a:ln w="13970">
+            <a:solidFill>
+              <a:srgbClr val="2D3338"/>
+            </a:solidFill>
+            <a:prstDash val="solid"/>
+          </a:ln>
+        </p:spPr>
+      </p:sp>
+      <p:sp>
+        <p:nvSpPr>
+          <p:cNvPr id="191" name="Shape 189"/>
           <p:cNvSpPr/>
           <p:nvPr/>
         </p:nvSpPr>
         <p:spPr>
           <a:xfrm flipH="1">
-            <a:off x="4456140" y="2912745"/>
-            <a:ext cx="276095" cy="0"/>
+            <a:off x="3945986" y="3200400"/>
+            <a:ext cx="36576" cy="0"/>
           </a:xfrm>
           <a:prstGeom prst="line">
             <a:avLst/>
@@ -16500,14 +13256,14 @@
       </p:sp>
       <p:sp>
         <p:nvSpPr>
-          <p:cNvPr id="280" name="Shape 278"/>
-          <p:cNvSpPr/>
-          <p:nvPr/>
-        </p:nvSpPr>
-        <p:spPr>
-          <a:xfrm>
-            <a:off x="4392132" y="2990751"/>
-            <a:ext cx="0" cy="190980"/>
+          <p:cNvPr id="192" name="Shape 190"/>
+          <p:cNvSpPr/>
+          <p:nvPr/>
+        </p:nvSpPr>
+        <p:spPr>
+          <a:xfrm>
+            <a:off x="1216018" y="3200400"/>
+            <a:ext cx="45720" cy="0"/>
           </a:xfrm>
           <a:prstGeom prst="line">
             <a:avLst/>
@@ -16523,14 +13279,37 @@
       </p:sp>
       <p:sp>
         <p:nvSpPr>
-          <p:cNvPr id="281" name="Shape 279"/>
+          <p:cNvPr id="193" name="Shape 191"/>
+          <p:cNvSpPr/>
+          <p:nvPr/>
+        </p:nvSpPr>
+        <p:spPr>
+          <a:xfrm>
+            <a:off x="1261738" y="3200400"/>
+            <a:ext cx="0" cy="640080"/>
+          </a:xfrm>
+          <a:prstGeom prst="line">
+            <a:avLst/>
+          </a:prstGeom>
+          <a:noFill/>
+          <a:ln w="13970">
+            <a:solidFill>
+              <a:srgbClr val="2D3338"/>
+            </a:solidFill>
+            <a:prstDash val="solid"/>
+          </a:ln>
+        </p:spPr>
+      </p:sp>
+      <p:sp>
+        <p:nvSpPr>
+          <p:cNvPr id="194" name="Shape 192"/>
           <p:cNvSpPr/>
           <p:nvPr/>
         </p:nvSpPr>
         <p:spPr>
           <a:xfrm flipH="1">
-            <a:off x="4286089" y="3181731"/>
-            <a:ext cx="106044" cy="0"/>
+            <a:off x="1225162" y="3840480"/>
+            <a:ext cx="36576" cy="0"/>
           </a:xfrm>
           <a:prstGeom prst="line">
             <a:avLst/>
@@ -16547,510 +13326,19 @@
       </p:sp>
       <p:sp>
         <p:nvSpPr>
-          <p:cNvPr id="282" name="Shape 280"/>
-          <p:cNvSpPr/>
-          <p:nvPr/>
-        </p:nvSpPr>
-        <p:spPr>
-          <a:xfrm>
-            <a:off x="4222081" y="3259737"/>
-            <a:ext cx="0" cy="190980"/>
+          <p:cNvPr id="195" name="Shape 193"/>
+          <p:cNvSpPr/>
+          <p:nvPr/>
+        </p:nvSpPr>
+        <p:spPr>
+          <a:xfrm>
+            <a:off x="4872125" y="1947672"/>
+            <a:ext cx="0" cy="2212848"/>
           </a:xfrm>
           <a:prstGeom prst="line">
             <a:avLst/>
           </a:prstGeom>
           <a:noFill/>
-          <a:ln w="13970">
-            <a:solidFill>
-              <a:srgbClr val="2D3338"/>
-            </a:solidFill>
-            <a:prstDash val="solid"/>
-          </a:ln>
-        </p:spPr>
-      </p:sp>
-      <p:sp>
-        <p:nvSpPr>
-          <p:cNvPr id="283" name="Shape 281"/>
-          <p:cNvSpPr/>
-          <p:nvPr/>
-        </p:nvSpPr>
-        <p:spPr>
-          <a:xfrm flipH="1">
-            <a:off x="4116037" y="3450717"/>
-            <a:ext cx="106044" cy="0"/>
-          </a:xfrm>
-          <a:prstGeom prst="line">
-            <a:avLst/>
-          </a:prstGeom>
-          <a:noFill/>
-          <a:ln w="13970">
-            <a:solidFill>
-              <a:srgbClr val="2D3338"/>
-            </a:solidFill>
-            <a:prstDash val="solid"/>
-            <a:tailEnd type="triangle"/>
-          </a:ln>
-        </p:spPr>
-      </p:sp>
-      <p:sp>
-        <p:nvSpPr>
-          <p:cNvPr id="284" name="Shape 282"/>
-          <p:cNvSpPr/>
-          <p:nvPr/>
-        </p:nvSpPr>
-        <p:spPr>
-          <a:xfrm>
-            <a:off x="4052029" y="3528723"/>
-            <a:ext cx="0" cy="190980"/>
-          </a:xfrm>
-          <a:prstGeom prst="line">
-            <a:avLst/>
-          </a:prstGeom>
-          <a:noFill/>
-          <a:ln w="13970">
-            <a:solidFill>
-              <a:srgbClr val="2D3338"/>
-            </a:solidFill>
-            <a:prstDash val="solid"/>
-          </a:ln>
-        </p:spPr>
-      </p:sp>
-      <p:sp>
-        <p:nvSpPr>
-          <p:cNvPr id="285" name="Shape 283"/>
-          <p:cNvSpPr/>
-          <p:nvPr/>
-        </p:nvSpPr>
-        <p:spPr>
-          <a:xfrm flipH="1">
-            <a:off x="4052029" y="3719703"/>
-            <a:ext cx="64008" cy="0"/>
-          </a:xfrm>
-          <a:prstGeom prst="line">
-            <a:avLst/>
-          </a:prstGeom>
-          <a:noFill/>
-          <a:ln w="13970">
-            <a:solidFill>
-              <a:srgbClr val="2D3338"/>
-            </a:solidFill>
-            <a:prstDash val="solid"/>
-            <a:tailEnd type="triangle"/>
-          </a:ln>
-        </p:spPr>
-      </p:sp>
-      <p:sp>
-        <p:nvSpPr>
-          <p:cNvPr id="286" name="Shape 284"/>
-          <p:cNvSpPr/>
-          <p:nvPr/>
-        </p:nvSpPr>
-        <p:spPr>
-          <a:xfrm>
-            <a:off x="4732235" y="2452779"/>
-            <a:ext cx="0" cy="1535910"/>
-          </a:xfrm>
-          <a:prstGeom prst="line">
-            <a:avLst/>
-          </a:prstGeom>
-          <a:noFill/>
-          <a:ln w="13970">
-            <a:solidFill>
-              <a:srgbClr val="2D3338"/>
-            </a:solidFill>
-            <a:prstDash val="solid"/>
-          </a:ln>
-        </p:spPr>
-      </p:sp>
-      <p:sp>
-        <p:nvSpPr>
-          <p:cNvPr id="287" name="Shape 285"/>
-          <p:cNvSpPr/>
-          <p:nvPr/>
-        </p:nvSpPr>
-        <p:spPr>
-          <a:xfrm flipH="1">
-            <a:off x="3945986" y="3988689"/>
-            <a:ext cx="786250" cy="0"/>
-          </a:xfrm>
-          <a:prstGeom prst="line">
-            <a:avLst/>
-          </a:prstGeom>
-          <a:noFill/>
-          <a:ln w="13970">
-            <a:solidFill>
-              <a:srgbClr val="2D3338"/>
-            </a:solidFill>
-            <a:prstDash val="solid"/>
-            <a:tailEnd type="triangle"/>
-          </a:ln>
-        </p:spPr>
-      </p:sp>
-      <p:sp>
-        <p:nvSpPr>
-          <p:cNvPr id="288" name="Shape 286"/>
-          <p:cNvSpPr/>
-          <p:nvPr/>
-        </p:nvSpPr>
-        <p:spPr>
-          <a:xfrm>
-            <a:off x="3936842" y="2374773"/>
-            <a:ext cx="45720" cy="0"/>
-          </a:xfrm>
-          <a:prstGeom prst="line">
-            <a:avLst/>
-          </a:prstGeom>
-          <a:noFill/>
-          <a:ln w="13970">
-            <a:solidFill>
-              <a:srgbClr val="2D3338"/>
-            </a:solidFill>
-            <a:prstDash val="solid"/>
-          </a:ln>
-        </p:spPr>
-      </p:sp>
-      <p:sp>
-        <p:nvSpPr>
-          <p:cNvPr id="289" name="Shape 287"/>
-          <p:cNvSpPr/>
-          <p:nvPr/>
-        </p:nvSpPr>
-        <p:spPr>
-          <a:xfrm>
-            <a:off x="3982562" y="2374773"/>
-            <a:ext cx="0" cy="1882902"/>
-          </a:xfrm>
-          <a:prstGeom prst="line">
-            <a:avLst/>
-          </a:prstGeom>
-          <a:noFill/>
-          <a:ln w="13970">
-            <a:solidFill>
-              <a:srgbClr val="2D3338"/>
-            </a:solidFill>
-            <a:prstDash val="solid"/>
-          </a:ln>
-        </p:spPr>
-      </p:sp>
-      <p:sp>
-        <p:nvSpPr>
-          <p:cNvPr id="290" name="Shape 288"/>
-          <p:cNvSpPr/>
-          <p:nvPr/>
-        </p:nvSpPr>
-        <p:spPr>
-          <a:xfrm flipH="1">
-            <a:off x="3945986" y="4257675"/>
-            <a:ext cx="36576" cy="0"/>
-          </a:xfrm>
-          <a:prstGeom prst="line">
-            <a:avLst/>
-          </a:prstGeom>
-          <a:noFill/>
-          <a:ln w="13970">
-            <a:solidFill>
-              <a:srgbClr val="2D3338"/>
-            </a:solidFill>
-            <a:prstDash val="solid"/>
-            <a:tailEnd type="triangle"/>
-          </a:ln>
-        </p:spPr>
-      </p:sp>
-      <p:sp>
-        <p:nvSpPr>
-          <p:cNvPr id="291" name="Shape 289"/>
-          <p:cNvSpPr/>
-          <p:nvPr/>
-        </p:nvSpPr>
-        <p:spPr>
-          <a:xfrm>
-            <a:off x="3596739" y="4257675"/>
-            <a:ext cx="45720" cy="0"/>
-          </a:xfrm>
-          <a:prstGeom prst="line">
-            <a:avLst/>
-          </a:prstGeom>
-          <a:noFill/>
-          <a:ln w="13970">
-            <a:solidFill>
-              <a:srgbClr val="2D3338"/>
-            </a:solidFill>
-            <a:prstDash val="solid"/>
-          </a:ln>
-        </p:spPr>
-      </p:sp>
-      <p:sp>
-        <p:nvSpPr>
-          <p:cNvPr id="292" name="Shape 290"/>
-          <p:cNvSpPr/>
-          <p:nvPr/>
-        </p:nvSpPr>
-        <p:spPr>
-          <a:xfrm>
-            <a:off x="3642459" y="4257675"/>
-            <a:ext cx="0" cy="268986"/>
-          </a:xfrm>
-          <a:prstGeom prst="line">
-            <a:avLst/>
-          </a:prstGeom>
-          <a:noFill/>
-          <a:ln w="13970">
-            <a:solidFill>
-              <a:srgbClr val="2D3338"/>
-            </a:solidFill>
-            <a:prstDash val="solid"/>
-          </a:ln>
-        </p:spPr>
-      </p:sp>
-      <p:sp>
-        <p:nvSpPr>
-          <p:cNvPr id="293" name="Shape 291"/>
-          <p:cNvSpPr/>
-          <p:nvPr/>
-        </p:nvSpPr>
-        <p:spPr>
-          <a:xfrm flipH="1">
-            <a:off x="3605883" y="4526661"/>
-            <a:ext cx="36576" cy="0"/>
-          </a:xfrm>
-          <a:prstGeom prst="line">
-            <a:avLst/>
-          </a:prstGeom>
-          <a:noFill/>
-          <a:ln w="13970">
-            <a:solidFill>
-              <a:srgbClr val="2D3338"/>
-            </a:solidFill>
-            <a:prstDash val="solid"/>
-            <a:tailEnd type="triangle"/>
-          </a:ln>
-        </p:spPr>
-      </p:sp>
-      <p:sp>
-        <p:nvSpPr>
-          <p:cNvPr id="294" name="Shape 292"/>
-          <p:cNvSpPr/>
-          <p:nvPr/>
-        </p:nvSpPr>
-        <p:spPr>
-          <a:xfrm>
-            <a:off x="2576430" y="4526661"/>
-            <a:ext cx="45720" cy="0"/>
-          </a:xfrm>
-          <a:prstGeom prst="line">
-            <a:avLst/>
-          </a:prstGeom>
-          <a:noFill/>
-          <a:ln w="13970">
-            <a:solidFill>
-              <a:srgbClr val="2D3338"/>
-            </a:solidFill>
-            <a:prstDash val="solid"/>
-          </a:ln>
-        </p:spPr>
-      </p:sp>
-      <p:sp>
-        <p:nvSpPr>
-          <p:cNvPr id="295" name="Shape 293"/>
-          <p:cNvSpPr/>
-          <p:nvPr/>
-        </p:nvSpPr>
-        <p:spPr>
-          <a:xfrm>
-            <a:off x="2622150" y="4526661"/>
-            <a:ext cx="0" cy="268986"/>
-          </a:xfrm>
-          <a:prstGeom prst="line">
-            <a:avLst/>
-          </a:prstGeom>
-          <a:noFill/>
-          <a:ln w="13970">
-            <a:solidFill>
-              <a:srgbClr val="2D3338"/>
-            </a:solidFill>
-            <a:prstDash val="solid"/>
-          </a:ln>
-        </p:spPr>
-      </p:sp>
-      <p:sp>
-        <p:nvSpPr>
-          <p:cNvPr id="296" name="Shape 294"/>
-          <p:cNvSpPr/>
-          <p:nvPr/>
-        </p:nvSpPr>
-        <p:spPr>
-          <a:xfrm flipH="1">
-            <a:off x="2585574" y="4795647"/>
-            <a:ext cx="36576" cy="0"/>
-          </a:xfrm>
-          <a:prstGeom prst="line">
-            <a:avLst/>
-          </a:prstGeom>
-          <a:noFill/>
-          <a:ln w="13970">
-            <a:solidFill>
-              <a:srgbClr val="2D3338"/>
-            </a:solidFill>
-            <a:prstDash val="solid"/>
-            <a:tailEnd type="triangle"/>
-          </a:ln>
-        </p:spPr>
-      </p:sp>
-      <p:sp>
-        <p:nvSpPr>
-          <p:cNvPr id="297" name="Shape 295"/>
-          <p:cNvSpPr/>
-          <p:nvPr/>
-        </p:nvSpPr>
-        <p:spPr>
-          <a:xfrm>
-            <a:off x="2576430" y="4526661"/>
-            <a:ext cx="45720" cy="0"/>
-          </a:xfrm>
-          <a:prstGeom prst="line">
-            <a:avLst/>
-          </a:prstGeom>
-          <a:noFill/>
-          <a:ln w="13970">
-            <a:solidFill>
-              <a:srgbClr val="2D3338"/>
-            </a:solidFill>
-            <a:prstDash val="solid"/>
-          </a:ln>
-        </p:spPr>
-      </p:sp>
-      <p:sp>
-        <p:nvSpPr>
-          <p:cNvPr id="298" name="Shape 296"/>
-          <p:cNvSpPr/>
-          <p:nvPr/>
-        </p:nvSpPr>
-        <p:spPr>
-          <a:xfrm>
-            <a:off x="2622150" y="4526661"/>
-            <a:ext cx="0" cy="537972"/>
-          </a:xfrm>
-          <a:prstGeom prst="line">
-            <a:avLst/>
-          </a:prstGeom>
-          <a:noFill/>
-          <a:ln w="13970">
-            <a:solidFill>
-              <a:srgbClr val="2D3338"/>
-            </a:solidFill>
-            <a:prstDash val="solid"/>
-          </a:ln>
-        </p:spPr>
-      </p:sp>
-      <p:sp>
-        <p:nvSpPr>
-          <p:cNvPr id="299" name="Shape 297"/>
-          <p:cNvSpPr/>
-          <p:nvPr/>
-        </p:nvSpPr>
-        <p:spPr>
-          <a:xfrm flipH="1">
-            <a:off x="2585574" y="5064633"/>
-            <a:ext cx="36576" cy="0"/>
-          </a:xfrm>
-          <a:prstGeom prst="line">
-            <a:avLst/>
-          </a:prstGeom>
-          <a:noFill/>
-          <a:ln w="13970">
-            <a:solidFill>
-              <a:srgbClr val="2D3338"/>
-            </a:solidFill>
-            <a:prstDash val="solid"/>
-            <a:tailEnd type="triangle"/>
-          </a:ln>
-        </p:spPr>
-      </p:sp>
-      <p:sp>
-        <p:nvSpPr>
-          <p:cNvPr id="300" name="Shape 298"/>
-          <p:cNvSpPr/>
-          <p:nvPr/>
-        </p:nvSpPr>
-        <p:spPr>
-          <a:xfrm>
-            <a:off x="1386069" y="5064633"/>
-            <a:ext cx="45720" cy="0"/>
-          </a:xfrm>
-          <a:prstGeom prst="line">
-            <a:avLst/>
-          </a:prstGeom>
-          <a:noFill/>
-          <a:ln w="13970">
-            <a:solidFill>
-              <a:srgbClr val="2D3338"/>
-            </a:solidFill>
-            <a:prstDash val="solid"/>
-          </a:ln>
-        </p:spPr>
-      </p:sp>
-      <p:sp>
-        <p:nvSpPr>
-          <p:cNvPr id="301" name="Shape 299"/>
-          <p:cNvSpPr/>
-          <p:nvPr/>
-        </p:nvSpPr>
-        <p:spPr>
-          <a:xfrm>
-            <a:off x="1431789" y="5064633"/>
-            <a:ext cx="0" cy="268986"/>
-          </a:xfrm>
-          <a:prstGeom prst="line">
-            <a:avLst/>
-          </a:prstGeom>
-          <a:noFill/>
-          <a:ln w="13970">
-            <a:solidFill>
-              <a:srgbClr val="2D3338"/>
-            </a:solidFill>
-            <a:prstDash val="solid"/>
-          </a:ln>
-        </p:spPr>
-      </p:sp>
-      <p:sp>
-        <p:nvSpPr>
-          <p:cNvPr id="302" name="Shape 300"/>
-          <p:cNvSpPr/>
-          <p:nvPr/>
-        </p:nvSpPr>
-        <p:spPr>
-          <a:xfrm flipH="1">
-            <a:off x="1395213" y="5333619"/>
-            <a:ext cx="36576" cy="0"/>
-          </a:xfrm>
-          <a:prstGeom prst="line">
-            <a:avLst/>
-          </a:prstGeom>
-          <a:noFill/>
-          <a:ln w="13970">
-            <a:solidFill>
-              <a:srgbClr val="2D3338"/>
-            </a:solidFill>
-            <a:prstDash val="solid"/>
-            <a:tailEnd type="triangle"/>
-          </a:ln>
-        </p:spPr>
-      </p:sp>
-      <p:sp>
-        <p:nvSpPr>
-          <p:cNvPr id="303" name="Shape 301"/>
-          <p:cNvSpPr/>
-          <p:nvPr/>
-        </p:nvSpPr>
-        <p:spPr>
-          <a:xfrm>
-            <a:off x="4872125" y="1947672"/>
-            <a:ext cx="0" cy="3520440"/>
-          </a:xfrm>
-          <a:prstGeom prst="line">
-            <a:avLst/>
-          </a:prstGeom>
-          <a:noFill/>
           <a:ln w="22225">
             <a:solidFill>
               <a:srgbClr val="C8503F"/>
@@ -17061,7 +13349,7 @@
       </p:sp>
       <p:sp>
         <p:nvSpPr>
-          <p:cNvPr id="304" name="Shape 302"/>
+          <p:cNvPr id="196" name="Shape 194"/>
           <p:cNvSpPr/>
           <p:nvPr/>
         </p:nvSpPr>
@@ -17088,7 +13376,7 @@
       </p:sp>
       <p:sp>
         <p:nvSpPr>
-          <p:cNvPr id="305" name="Text 303"/>
+          <p:cNvPr id="197" name="Text 195"/>
           <p:cNvSpPr/>
           <p:nvPr/>
         </p:nvSpPr>
@@ -17129,14 +13417,14 @@
       </p:sp>
       <p:sp>
         <p:nvSpPr>
-          <p:cNvPr id="306" name="Shape 304"/>
+          <p:cNvPr id="198" name="Shape 196"/>
           <p:cNvSpPr/>
           <p:nvPr/>
         </p:nvSpPr>
         <p:spPr>
           <a:xfrm>
             <a:off x="365760" y="1325880"/>
-            <a:ext cx="11460175" cy="4142232"/>
+            <a:ext cx="11460175" cy="2834640"/>
           </a:xfrm>
           <a:prstGeom prst="rect">
             <a:avLst/>
@@ -17156,14 +13444,14 @@
       </p:sp>
       <p:sp>
         <p:nvSpPr>
-          <p:cNvPr id="307" name="Shape 305"/>
-          <p:cNvSpPr/>
-          <p:nvPr/>
-        </p:nvSpPr>
-        <p:spPr>
-          <a:xfrm>
-            <a:off x="9621683" y="5577840"/>
-            <a:ext cx="2204253" cy="822960"/>
+          <p:cNvPr id="199" name="Shape 197"/>
+          <p:cNvSpPr/>
+          <p:nvPr/>
+        </p:nvSpPr>
+        <p:spPr>
+          <a:xfrm>
+            <a:off x="9043187" y="5486400"/>
+            <a:ext cx="2782748" cy="822960"/>
           </a:xfrm>
           <a:prstGeom prst="roundRect">
             <a:avLst>
@@ -17190,14 +13478,14 @@
       </p:sp>
       <p:sp>
         <p:nvSpPr>
-          <p:cNvPr id="308" name="Shape 306"/>
-          <p:cNvSpPr/>
-          <p:nvPr/>
-        </p:nvSpPr>
-        <p:spPr>
-          <a:xfrm>
-            <a:off x="9676547" y="5577840"/>
-            <a:ext cx="2094525" cy="54864"/>
+          <p:cNvPr id="200" name="Shape 198"/>
+          <p:cNvSpPr/>
+          <p:nvPr/>
+        </p:nvSpPr>
+        <p:spPr>
+          <a:xfrm>
+            <a:off x="9098051" y="5486400"/>
+            <a:ext cx="2673020" cy="54864"/>
           </a:xfrm>
           <a:prstGeom prst="rect">
             <a:avLst/>
@@ -17215,14 +13503,14 @@
       </p:sp>
       <p:sp>
         <p:nvSpPr>
-          <p:cNvPr id="309" name="Text 307"/>
-          <p:cNvSpPr/>
-          <p:nvPr/>
-        </p:nvSpPr>
-        <p:spPr>
-          <a:xfrm>
-            <a:off x="9731411" y="5669280"/>
-            <a:ext cx="1984797" cy="201168"/>
+          <p:cNvPr id="201" name="Text 199"/>
+          <p:cNvSpPr/>
+          <p:nvPr/>
+        </p:nvSpPr>
+        <p:spPr>
+          <a:xfrm>
+            <a:off x="9152915" y="5577840"/>
+            <a:ext cx="2563292" cy="201168"/>
           </a:xfrm>
           <a:prstGeom prst="rect">
             <a:avLst/>
@@ -17256,14 +13544,14 @@
       </p:sp>
       <p:sp>
         <p:nvSpPr>
-          <p:cNvPr id="310" name="Text 308"/>
-          <p:cNvSpPr/>
-          <p:nvPr/>
-        </p:nvSpPr>
-        <p:spPr>
-          <a:xfrm>
-            <a:off x="9731411" y="5870448"/>
-            <a:ext cx="1984797" cy="292608"/>
+          <p:cNvPr id="202" name="Text 200"/>
+          <p:cNvSpPr/>
+          <p:nvPr/>
+        </p:nvSpPr>
+        <p:spPr>
+          <a:xfrm>
+            <a:off x="9152915" y="5779008"/>
+            <a:ext cx="2563292" cy="292608"/>
           </a:xfrm>
           <a:prstGeom prst="rect">
             <a:avLst/>
@@ -17297,14 +13585,14 @@
       </p:sp>
       <p:sp>
         <p:nvSpPr>
-          <p:cNvPr id="311" name="Text 309"/>
-          <p:cNvSpPr/>
-          <p:nvPr/>
-        </p:nvSpPr>
-        <p:spPr>
-          <a:xfrm>
-            <a:off x="9731411" y="6163056"/>
-            <a:ext cx="1984797" cy="182880"/>
+          <p:cNvPr id="203" name="Text 201"/>
+          <p:cNvSpPr/>
+          <p:nvPr/>
+        </p:nvSpPr>
+        <p:spPr>
+          <a:xfrm>
+            <a:off x="9152915" y="6071616"/>
+            <a:ext cx="2563292" cy="182880"/>
           </a:xfrm>
           <a:prstGeom prst="rect">
             <a:avLst/>
@@ -17338,14 +13626,14 @@
       </p:sp>
       <p:sp>
         <p:nvSpPr>
-          <p:cNvPr id="312" name="Shape 310"/>
-          <p:cNvSpPr/>
-          <p:nvPr/>
-        </p:nvSpPr>
-        <p:spPr>
-          <a:xfrm>
-            <a:off x="7307702" y="5577840"/>
-            <a:ext cx="2204253" cy="822960"/>
+          <p:cNvPr id="204" name="Shape 202"/>
+          <p:cNvSpPr/>
+          <p:nvPr/>
+        </p:nvSpPr>
+        <p:spPr>
+          <a:xfrm>
+            <a:off x="6150712" y="5486400"/>
+            <a:ext cx="2782748" cy="822960"/>
           </a:xfrm>
           <a:prstGeom prst="roundRect">
             <a:avLst>
@@ -17372,14 +13660,14 @@
       </p:sp>
       <p:sp>
         <p:nvSpPr>
-          <p:cNvPr id="313" name="Shape 311"/>
-          <p:cNvSpPr/>
-          <p:nvPr/>
-        </p:nvSpPr>
-        <p:spPr>
-          <a:xfrm>
-            <a:off x="7362566" y="5577840"/>
-            <a:ext cx="2094525" cy="54864"/>
+          <p:cNvPr id="205" name="Shape 203"/>
+          <p:cNvSpPr/>
+          <p:nvPr/>
+        </p:nvSpPr>
+        <p:spPr>
+          <a:xfrm>
+            <a:off x="6205576" y="5486400"/>
+            <a:ext cx="2673020" cy="54864"/>
           </a:xfrm>
           <a:prstGeom prst="rect">
             <a:avLst/>
@@ -17397,14 +13685,14 @@
       </p:sp>
       <p:sp>
         <p:nvSpPr>
-          <p:cNvPr id="314" name="Text 312"/>
-          <p:cNvSpPr/>
-          <p:nvPr/>
-        </p:nvSpPr>
-        <p:spPr>
-          <a:xfrm>
-            <a:off x="7417430" y="5669280"/>
-            <a:ext cx="1984797" cy="201168"/>
+          <p:cNvPr id="206" name="Text 204"/>
+          <p:cNvSpPr/>
+          <p:nvPr/>
+        </p:nvSpPr>
+        <p:spPr>
+          <a:xfrm>
+            <a:off x="6260440" y="5577840"/>
+            <a:ext cx="2563292" cy="201168"/>
           </a:xfrm>
           <a:prstGeom prst="rect">
             <a:avLst/>
@@ -17438,14 +13726,14 @@
       </p:sp>
       <p:sp>
         <p:nvSpPr>
-          <p:cNvPr id="315" name="Text 313"/>
-          <p:cNvSpPr/>
-          <p:nvPr/>
-        </p:nvSpPr>
-        <p:spPr>
-          <a:xfrm>
-            <a:off x="7417430" y="5870448"/>
-            <a:ext cx="1984797" cy="292608"/>
+          <p:cNvPr id="207" name="Text 205"/>
+          <p:cNvSpPr/>
+          <p:nvPr/>
+        </p:nvSpPr>
+        <p:spPr>
+          <a:xfrm>
+            <a:off x="6260440" y="5779008"/>
+            <a:ext cx="2563292" cy="292608"/>
           </a:xfrm>
           <a:prstGeom prst="rect">
             <a:avLst/>
@@ -17479,14 +13767,14 @@
       </p:sp>
       <p:sp>
         <p:nvSpPr>
-          <p:cNvPr id="316" name="Text 314"/>
-          <p:cNvSpPr/>
-          <p:nvPr/>
-        </p:nvSpPr>
-        <p:spPr>
-          <a:xfrm>
-            <a:off x="7417430" y="6163056"/>
-            <a:ext cx="1984797" cy="182880"/>
+          <p:cNvPr id="208" name="Text 206"/>
+          <p:cNvSpPr/>
+          <p:nvPr/>
+        </p:nvSpPr>
+        <p:spPr>
+          <a:xfrm>
+            <a:off x="6260440" y="6071616"/>
+            <a:ext cx="2563292" cy="182880"/>
           </a:xfrm>
           <a:prstGeom prst="rect">
             <a:avLst/>
@@ -17520,14 +13808,14 @@
       </p:sp>
       <p:sp>
         <p:nvSpPr>
-          <p:cNvPr id="317" name="Shape 315"/>
-          <p:cNvSpPr/>
-          <p:nvPr/>
-        </p:nvSpPr>
-        <p:spPr>
-          <a:xfrm>
-            <a:off x="4993721" y="5577840"/>
-            <a:ext cx="2204253" cy="822960"/>
+          <p:cNvPr id="209" name="Shape 207"/>
+          <p:cNvSpPr/>
+          <p:nvPr/>
+        </p:nvSpPr>
+        <p:spPr>
+          <a:xfrm>
+            <a:off x="3258236" y="5486400"/>
+            <a:ext cx="2782748" cy="822960"/>
           </a:xfrm>
           <a:prstGeom prst="roundRect">
             <a:avLst>
@@ -17554,14 +13842,14 @@
       </p:sp>
       <p:sp>
         <p:nvSpPr>
-          <p:cNvPr id="318" name="Shape 316"/>
-          <p:cNvSpPr/>
-          <p:nvPr/>
-        </p:nvSpPr>
-        <p:spPr>
-          <a:xfrm>
-            <a:off x="5048585" y="5577840"/>
-            <a:ext cx="2094525" cy="54864"/>
+          <p:cNvPr id="210" name="Shape 208"/>
+          <p:cNvSpPr/>
+          <p:nvPr/>
+        </p:nvSpPr>
+        <p:spPr>
+          <a:xfrm>
+            <a:off x="3313100" y="5486400"/>
+            <a:ext cx="2673020" cy="54864"/>
           </a:xfrm>
           <a:prstGeom prst="rect">
             <a:avLst/>
@@ -17579,14 +13867,14 @@
       </p:sp>
       <p:sp>
         <p:nvSpPr>
-          <p:cNvPr id="319" name="Text 317"/>
-          <p:cNvSpPr/>
-          <p:nvPr/>
-        </p:nvSpPr>
-        <p:spPr>
-          <a:xfrm>
-            <a:off x="5103449" y="5669280"/>
-            <a:ext cx="1984797" cy="201168"/>
+          <p:cNvPr id="211" name="Text 209"/>
+          <p:cNvSpPr/>
+          <p:nvPr/>
+        </p:nvSpPr>
+        <p:spPr>
+          <a:xfrm>
+            <a:off x="3367964" y="5577840"/>
+            <a:ext cx="2563292" cy="201168"/>
           </a:xfrm>
           <a:prstGeom prst="rect">
             <a:avLst/>
@@ -17612,7 +13900,7 @@
                 <a:ea typeface="Arial" pitchFamily="34" charset="-122"/>
                 <a:cs typeface="Arial" pitchFamily="34" charset="-120"/>
               </a:rPr>
-              <a:t>اكتمال أعمال الحفرة (جدار الحفرة)</a:t>
+              <a:t>اكتمال أساسات المبنى</a:t>
             </a:r>
             <a:endParaRPr lang="ar-SA" sz="850" dirty="0"/>
           </a:p>
@@ -17620,14 +13908,14 @@
       </p:sp>
       <p:sp>
         <p:nvSpPr>
-          <p:cNvPr id="320" name="Text 318"/>
-          <p:cNvSpPr/>
-          <p:nvPr/>
-        </p:nvSpPr>
-        <p:spPr>
-          <a:xfrm>
-            <a:off x="5103449" y="5870448"/>
-            <a:ext cx="1984797" cy="292608"/>
+          <p:cNvPr id="212" name="Text 210"/>
+          <p:cNvSpPr/>
+          <p:nvPr/>
+        </p:nvSpPr>
+        <p:spPr>
+          <a:xfrm>
+            <a:off x="3367964" y="5779008"/>
+            <a:ext cx="2563292" cy="292608"/>
           </a:xfrm>
           <a:prstGeom prst="rect">
             <a:avLst/>
@@ -17653,7 +13941,7 @@
                 <a:ea typeface="Arial" pitchFamily="34" charset="-122"/>
                 <a:cs typeface="Arial" pitchFamily="34" charset="-120"/>
               </a:rPr>
-              <a:t>سبت 7 نوفمبر 2026</a:t>
+              <a:t>أربعاء 11 نوفمبر 2026</a:t>
             </a:r>
             <a:endParaRPr lang="ar-SA" sz="1300" dirty="0"/>
           </a:p>
@@ -17661,14 +13949,14 @@
       </p:sp>
       <p:sp>
         <p:nvSpPr>
-          <p:cNvPr id="321" name="Text 319"/>
-          <p:cNvSpPr/>
-          <p:nvPr/>
-        </p:nvSpPr>
-        <p:spPr>
-          <a:xfrm>
-            <a:off x="5103449" y="6163056"/>
-            <a:ext cx="1984797" cy="182880"/>
+          <p:cNvPr id="213" name="Text 211"/>
+          <p:cNvSpPr/>
+          <p:nvPr/>
+        </p:nvSpPr>
+        <p:spPr>
+          <a:xfrm>
+            <a:off x="3367964" y="6071616"/>
+            <a:ext cx="2563292" cy="182880"/>
           </a:xfrm>
           <a:prstGeom prst="rect">
             <a:avLst/>
@@ -17694,7 +13982,7 @@
                 <a:ea typeface="Arial" pitchFamily="34" charset="-122"/>
                 <a:cs typeface="Arial" pitchFamily="34" charset="-120"/>
               </a:rPr>
-              <a:t>يوم العمل 14 / 20</a:t>
+              <a:t>يوم العمل 18 / 20</a:t>
             </a:r>
             <a:endParaRPr lang="ar-SA" sz="750" dirty="0"/>
           </a:p>
@@ -17702,14 +13990,14 @@
       </p:sp>
       <p:sp>
         <p:nvSpPr>
-          <p:cNvPr id="322" name="Shape 320"/>
-          <p:cNvSpPr/>
-          <p:nvPr/>
-        </p:nvSpPr>
-        <p:spPr>
-          <a:xfrm>
-            <a:off x="2679741" y="5577840"/>
-            <a:ext cx="2204253" cy="822960"/>
+          <p:cNvPr id="214" name="Shape 212"/>
+          <p:cNvSpPr/>
+          <p:nvPr/>
+        </p:nvSpPr>
+        <p:spPr>
+          <a:xfrm>
+            <a:off x="365760" y="5486400"/>
+            <a:ext cx="2782748" cy="822960"/>
           </a:xfrm>
           <a:prstGeom prst="roundRect">
             <a:avLst>
@@ -17717,7 +14005,7 @@
             </a:avLst>
           </a:prstGeom>
           <a:solidFill>
-            <a:srgbClr val="FFFFFF"/>
+            <a:srgbClr val="3D3935"/>
           </a:solidFill>
           <a:ln w="9525">
             <a:solidFill>
@@ -17736,14 +14024,14 @@
       </p:sp>
       <p:sp>
         <p:nvSpPr>
-          <p:cNvPr id="323" name="Shape 321"/>
-          <p:cNvSpPr/>
-          <p:nvPr/>
-        </p:nvSpPr>
-        <p:spPr>
-          <a:xfrm>
-            <a:off x="2734605" y="5577840"/>
-            <a:ext cx="2094525" cy="54864"/>
+          <p:cNvPr id="215" name="Shape 213"/>
+          <p:cNvSpPr/>
+          <p:nvPr/>
+        </p:nvSpPr>
+        <p:spPr>
+          <a:xfrm>
+            <a:off x="420624" y="5486400"/>
+            <a:ext cx="2673020" cy="54864"/>
           </a:xfrm>
           <a:prstGeom prst="rect">
             <a:avLst/>
@@ -17761,14 +14049,14 @@
       </p:sp>
       <p:sp>
         <p:nvSpPr>
-          <p:cNvPr id="324" name="Text 322"/>
-          <p:cNvSpPr/>
-          <p:nvPr/>
-        </p:nvSpPr>
-        <p:spPr>
-          <a:xfrm>
-            <a:off x="2789469" y="5669280"/>
-            <a:ext cx="1984797" cy="201168"/>
+          <p:cNvPr id="216" name="Text 214"/>
+          <p:cNvSpPr/>
+          <p:nvPr/>
+        </p:nvSpPr>
+        <p:spPr>
+          <a:xfrm>
+            <a:off x="475488" y="5577840"/>
+            <a:ext cx="2563292" cy="201168"/>
           </a:xfrm>
           <a:prstGeom prst="rect">
             <a:avLst/>
@@ -17788,13 +14076,13 @@
             <a:r>
               <a:rPr lang="ar-SA" altLang="en-US" sz="850" b="1" dirty="0">
                 <a:solidFill>
-                  <a:srgbClr val="66707A"/>
-                </a:solidFill>
-                <a:latin typeface="Arial" pitchFamily="34" charset="0"/>
-                <a:ea typeface="Arial" pitchFamily="34" charset="-122"/>
-                <a:cs typeface="Arial" pitchFamily="34" charset="-120"/>
-              </a:rPr>
-              <a:t>اكتمال أساسات المبنى</a:t>
+                  <a:srgbClr val="CFD8DC"/>
+                </a:solidFill>
+                <a:latin typeface="Arial" pitchFamily="34" charset="0"/>
+                <a:ea typeface="Arial" pitchFamily="34" charset="-122"/>
+                <a:cs typeface="Arial" pitchFamily="34" charset="-120"/>
+              </a:rPr>
+              <a:t>الإنجاز الكلي</a:t>
             </a:r>
             <a:endParaRPr lang="ar-SA" sz="850" dirty="0"/>
           </a:p>
@@ -17802,14 +14090,14 @@
       </p:sp>
       <p:sp>
         <p:nvSpPr>
-          <p:cNvPr id="325" name="Text 323"/>
-          <p:cNvSpPr/>
-          <p:nvPr/>
-        </p:nvSpPr>
-        <p:spPr>
-          <a:xfrm>
-            <a:off x="2789469" y="5870448"/>
-            <a:ext cx="1984797" cy="292608"/>
+          <p:cNvPr id="217" name="Text 215"/>
+          <p:cNvSpPr/>
+          <p:nvPr/>
+        </p:nvSpPr>
+        <p:spPr>
+          <a:xfrm>
+            <a:off x="475488" y="5779008"/>
+            <a:ext cx="2563292" cy="292608"/>
           </a:xfrm>
           <a:prstGeom prst="rect">
             <a:avLst/>
@@ -17829,13 +14117,13 @@
             <a:r>
               <a:rPr lang="ar-SA" altLang="en-US" sz="1300" b="1" dirty="0">
                 <a:solidFill>
-                  <a:srgbClr val="3D3935"/>
-                </a:solidFill>
-                <a:latin typeface="Arial" pitchFamily="34" charset="0"/>
-                <a:ea typeface="Arial" pitchFamily="34" charset="-122"/>
-                <a:cs typeface="Arial" pitchFamily="34" charset="-120"/>
-              </a:rPr>
-              <a:t>ثلاثاء 10 نوفمبر 2026</a:t>
+                  <a:srgbClr val="FFFFFF"/>
+                </a:solidFill>
+                <a:latin typeface="Arial" pitchFamily="34" charset="0"/>
+                <a:ea typeface="Arial" pitchFamily="34" charset="-122"/>
+                <a:cs typeface="Arial" pitchFamily="34" charset="-120"/>
+              </a:rPr>
+              <a:t>سبت 14 نوفمبر 2026</a:t>
             </a:r>
             <a:endParaRPr lang="ar-SA" sz="1300" dirty="0"/>
           </a:p>
@@ -17843,196 +14131,14 @@
       </p:sp>
       <p:sp>
         <p:nvSpPr>
-          <p:cNvPr id="326" name="Text 324"/>
-          <p:cNvSpPr/>
-          <p:nvPr/>
-        </p:nvSpPr>
-        <p:spPr>
-          <a:xfrm>
-            <a:off x="2789469" y="6163056"/>
-            <a:ext cx="1984797" cy="182880"/>
-          </a:xfrm>
-          <a:prstGeom prst="rect">
-            <a:avLst/>
-          </a:prstGeom>
-          <a:noFill/>
-          <a:ln/>
-        </p:spPr>
-        <p:txBody>
-          <a:bodyPr wrap="square" lIns="0" tIns="0" rIns="0" bIns="0" rtlCol="0" anchor="ctr">
-            <a:normAutofit/>
-          </a:bodyPr>
-          <a:lstStyle/>
-          <a:p>
-            <a:pPr rtl="1" algn="r" indent="0" marL="0">
-              <a:buNone/>
-            </a:pPr>
-            <a:r>
-              <a:rPr lang="ar-SA" altLang="en-US" sz="750" b="1" dirty="0">
-                <a:solidFill>
-                  <a:srgbClr val="66707A"/>
-                </a:solidFill>
-                <a:latin typeface="Arial" pitchFamily="34" charset="0"/>
-                <a:ea typeface="Arial" pitchFamily="34" charset="-122"/>
-                <a:cs typeface="Arial" pitchFamily="34" charset="-120"/>
-              </a:rPr>
-              <a:t>يوم العمل 17 / 20</a:t>
-            </a:r>
-            <a:endParaRPr lang="ar-SA" sz="750" dirty="0"/>
-          </a:p>
-        </p:txBody>
-      </p:sp>
-      <p:sp>
-        <p:nvSpPr>
-          <p:cNvPr id="327" name="Shape 325"/>
-          <p:cNvSpPr/>
-          <p:nvPr/>
-        </p:nvSpPr>
-        <p:spPr>
-          <a:xfrm>
-            <a:off x="365760" y="5577840"/>
-            <a:ext cx="2204253" cy="822960"/>
-          </a:xfrm>
-          <a:prstGeom prst="roundRect">
-            <a:avLst>
-              <a:gd name="adj" fmla="val 7778"/>
-            </a:avLst>
-          </a:prstGeom>
-          <a:solidFill>
-            <a:srgbClr val="3D3935"/>
-          </a:solidFill>
-          <a:ln w="9525">
-            <a:solidFill>
-              <a:srgbClr val="DFE6EA"/>
-            </a:solidFill>
-            <a:prstDash val="solid"/>
-          </a:ln>
-          <a:effectLst>
-            <a:outerShdw sx="100000" sy="100000" kx="0" ky="0" algn="bl" rotWithShape="0" blurRad="63500" dist="25400" dir="5400000">
-              <a:srgbClr val="000000">
-                <a:alpha val="12000"/>
-              </a:srgbClr>
-            </a:outerShdw>
-          </a:effectLst>
-        </p:spPr>
-      </p:sp>
-      <p:sp>
-        <p:nvSpPr>
-          <p:cNvPr id="328" name="Shape 326"/>
-          <p:cNvSpPr/>
-          <p:nvPr/>
-        </p:nvSpPr>
-        <p:spPr>
-          <a:xfrm>
-            <a:off x="420624" y="5577840"/>
-            <a:ext cx="2094525" cy="54864"/>
-          </a:xfrm>
-          <a:prstGeom prst="rect">
-            <a:avLst/>
-          </a:prstGeom>
-          <a:solidFill>
-            <a:srgbClr val="D68A00"/>
-          </a:solidFill>
-          <a:ln w="12700">
-            <a:solidFill>
-              <a:srgbClr val="D68A00"/>
-            </a:solidFill>
-            <a:prstDash val="solid"/>
-          </a:ln>
-        </p:spPr>
-      </p:sp>
-      <p:sp>
-        <p:nvSpPr>
-          <p:cNvPr id="329" name="Text 327"/>
-          <p:cNvSpPr/>
-          <p:nvPr/>
-        </p:nvSpPr>
-        <p:spPr>
-          <a:xfrm>
-            <a:off x="475488" y="5669280"/>
-            <a:ext cx="1984797" cy="201168"/>
-          </a:xfrm>
-          <a:prstGeom prst="rect">
-            <a:avLst/>
-          </a:prstGeom>
-          <a:noFill/>
-          <a:ln/>
-        </p:spPr>
-        <p:txBody>
-          <a:bodyPr wrap="square" lIns="0" tIns="0" rIns="0" bIns="0" rtlCol="0" anchor="ctr">
-            <a:normAutofit/>
-          </a:bodyPr>
-          <a:lstStyle/>
-          <a:p>
-            <a:pPr rtl="1" algn="r" indent="0" marL="0">
-              <a:buNone/>
-            </a:pPr>
-            <a:r>
-              <a:rPr lang="ar-SA" altLang="en-US" sz="850" b="1" dirty="0">
-                <a:solidFill>
-                  <a:srgbClr val="CFD8DC"/>
-                </a:solidFill>
-                <a:latin typeface="Arial" pitchFamily="34" charset="0"/>
-                <a:ea typeface="Arial" pitchFamily="34" charset="-122"/>
-                <a:cs typeface="Arial" pitchFamily="34" charset="-120"/>
-              </a:rPr>
-              <a:t>الإنجاز الكلي</a:t>
-            </a:r>
-            <a:endParaRPr lang="ar-SA" sz="850" dirty="0"/>
-          </a:p>
-        </p:txBody>
-      </p:sp>
-      <p:sp>
-        <p:nvSpPr>
-          <p:cNvPr id="330" name="Text 328"/>
-          <p:cNvSpPr/>
-          <p:nvPr/>
-        </p:nvSpPr>
-        <p:spPr>
-          <a:xfrm>
-            <a:off x="475488" y="5870448"/>
-            <a:ext cx="1984797" cy="292608"/>
-          </a:xfrm>
-          <a:prstGeom prst="rect">
-            <a:avLst/>
-          </a:prstGeom>
-          <a:noFill/>
-          <a:ln/>
-        </p:spPr>
-        <p:txBody>
-          <a:bodyPr wrap="square" lIns="0" tIns="0" rIns="0" bIns="0" rtlCol="0" anchor="ctr">
-            <a:normAutofit/>
-          </a:bodyPr>
-          <a:lstStyle/>
-          <a:p>
-            <a:pPr rtl="1" algn="r" indent="0" marL="0">
-              <a:buNone/>
-            </a:pPr>
-            <a:r>
-              <a:rPr lang="ar-SA" altLang="en-US" sz="1300" b="1" dirty="0">
-                <a:solidFill>
-                  <a:srgbClr val="FFFFFF"/>
-                </a:solidFill>
-                <a:latin typeface="Arial" pitchFamily="34" charset="0"/>
-                <a:ea typeface="Arial" pitchFamily="34" charset="-122"/>
-                <a:cs typeface="Arial" pitchFamily="34" charset="-120"/>
-              </a:rPr>
-              <a:t>سبت 14 نوفمبر 2026</a:t>
-            </a:r>
-            <a:endParaRPr lang="ar-SA" sz="1300" dirty="0"/>
-          </a:p>
-        </p:txBody>
-      </p:sp>
-      <p:sp>
-        <p:nvSpPr>
-          <p:cNvPr id="331" name="Text 329"/>
-          <p:cNvSpPr/>
-          <p:nvPr/>
-        </p:nvSpPr>
-        <p:spPr>
-          <a:xfrm>
-            <a:off x="475488" y="6163056"/>
-            <a:ext cx="1984797" cy="182880"/>
+          <p:cNvPr id="218" name="Text 216"/>
+          <p:cNvSpPr/>
+          <p:nvPr/>
+        </p:nvSpPr>
+        <p:spPr>
+          <a:xfrm>
+            <a:off x="475488" y="6071616"/>
+            <a:ext cx="2563292" cy="182880"/>
           </a:xfrm>
           <a:prstGeom prst="rect">
             <a:avLst/>

--- a/ufwl-timeline/UFWL_Presentation_AR.pptx
+++ b/ufwl-timeline/UFWL_Presentation_AR.pptx
@@ -7330,8 +7330,8 @@
         </p:nvSpPr>
         <p:spPr>
           <a:xfrm>
-            <a:off x="3086584" y="1325880"/>
-            <a:ext cx="3060927" cy="182880"/>
+            <a:off x="2678460" y="1325880"/>
+            <a:ext cx="3469051" cy="182880"/>
           </a:xfrm>
           <a:prstGeom prst="rect">
             <a:avLst/>
@@ -7355,8 +7355,8 @@
         </p:nvSpPr>
         <p:spPr>
           <a:xfrm>
-            <a:off x="3086584" y="1325880"/>
-            <a:ext cx="3060927" cy="182880"/>
+            <a:off x="2678460" y="1325880"/>
+            <a:ext cx="3469051" cy="182880"/>
           </a:xfrm>
           <a:prstGeom prst="rect">
             <a:avLst/>
@@ -7397,7 +7397,7 @@
         <p:spPr>
           <a:xfrm>
             <a:off x="365760" y="1325880"/>
-            <a:ext cx="2720824" cy="182880"/>
+            <a:ext cx="2312700" cy="182880"/>
           </a:xfrm>
           <a:prstGeom prst="rect">
             <a:avLst/>
@@ -7422,7 +7422,7 @@
         <p:spPr>
           <a:xfrm>
             <a:off x="365760" y="1325880"/>
-            <a:ext cx="2720824" cy="182880"/>
+            <a:ext cx="2312700" cy="182880"/>
           </a:xfrm>
           <a:prstGeom prst="rect">
             <a:avLst/>
@@ -7462,8 +7462,8 @@
         </p:nvSpPr>
         <p:spPr>
           <a:xfrm>
-            <a:off x="5637357" y="1508760"/>
-            <a:ext cx="510155" cy="155448"/>
+            <a:off x="5569336" y="1508760"/>
+            <a:ext cx="578175" cy="155448"/>
           </a:xfrm>
           <a:prstGeom prst="rect">
             <a:avLst/>
@@ -7487,8 +7487,8 @@
         </p:nvSpPr>
         <p:spPr>
           <a:xfrm>
-            <a:off x="5637357" y="1508760"/>
-            <a:ext cx="510155" cy="155448"/>
+            <a:off x="5569336" y="1508760"/>
+            <a:ext cx="578175" cy="155448"/>
           </a:xfrm>
           <a:prstGeom prst="rect">
             <a:avLst/>
@@ -7528,8 +7528,8 @@
         </p:nvSpPr>
         <p:spPr>
           <a:xfrm>
-            <a:off x="4446996" y="1508760"/>
-            <a:ext cx="1190361" cy="155448"/>
+            <a:off x="4220261" y="1508760"/>
+            <a:ext cx="1349075" cy="155448"/>
           </a:xfrm>
           <a:prstGeom prst="rect">
             <a:avLst/>
@@ -7553,8 +7553,8 @@
         </p:nvSpPr>
         <p:spPr>
           <a:xfrm>
-            <a:off x="4446996" y="1508760"/>
-            <a:ext cx="1190361" cy="155448"/>
+            <a:off x="4220261" y="1508760"/>
+            <a:ext cx="1349075" cy="155448"/>
           </a:xfrm>
           <a:prstGeom prst="rect">
             <a:avLst/>
@@ -7594,8 +7594,8 @@
         </p:nvSpPr>
         <p:spPr>
           <a:xfrm>
-            <a:off x="3256636" y="1508760"/>
-            <a:ext cx="1190361" cy="155448"/>
+            <a:off x="2871186" y="1508760"/>
+            <a:ext cx="1349075" cy="155448"/>
           </a:xfrm>
           <a:prstGeom prst="rect">
             <a:avLst/>
@@ -7619,8 +7619,8 @@
         </p:nvSpPr>
         <p:spPr>
           <a:xfrm>
-            <a:off x="3256636" y="1508760"/>
-            <a:ext cx="1190361" cy="155448"/>
+            <a:off x="2871186" y="1508760"/>
+            <a:ext cx="1349075" cy="155448"/>
           </a:xfrm>
           <a:prstGeom prst="rect">
             <a:avLst/>
@@ -7660,8 +7660,8 @@
         </p:nvSpPr>
         <p:spPr>
           <a:xfrm>
-            <a:off x="2066275" y="1508760"/>
-            <a:ext cx="1190361" cy="155448"/>
+            <a:off x="1522110" y="1508760"/>
+            <a:ext cx="1349075" cy="155448"/>
           </a:xfrm>
           <a:prstGeom prst="rect">
             <a:avLst/>
@@ -7685,8 +7685,8 @@
         </p:nvSpPr>
         <p:spPr>
           <a:xfrm>
-            <a:off x="2066275" y="1508760"/>
-            <a:ext cx="1190361" cy="155448"/>
+            <a:off x="1522110" y="1508760"/>
+            <a:ext cx="1349075" cy="155448"/>
           </a:xfrm>
           <a:prstGeom prst="rect">
             <a:avLst/>
@@ -7726,8 +7726,8 @@
         </p:nvSpPr>
         <p:spPr>
           <a:xfrm>
-            <a:off x="875915" y="1508760"/>
-            <a:ext cx="1190361" cy="155448"/>
+            <a:off x="365760" y="1508760"/>
+            <a:ext cx="1156350" cy="155448"/>
           </a:xfrm>
           <a:prstGeom prst="rect">
             <a:avLst/>
@@ -7751,8 +7751,8 @@
         </p:nvSpPr>
         <p:spPr>
           <a:xfrm>
-            <a:off x="875915" y="1508760"/>
-            <a:ext cx="1190361" cy="155448"/>
+            <a:off x="365760" y="1508760"/>
+            <a:ext cx="1156350" cy="155448"/>
           </a:xfrm>
           <a:prstGeom prst="rect">
             <a:avLst/>
@@ -7792,16 +7792,16 @@
         </p:nvSpPr>
         <p:spPr>
           <a:xfrm>
-            <a:off x="365760" y="1508760"/>
-            <a:ext cx="510155" cy="155448"/>
-          </a:xfrm>
-          <a:prstGeom prst="rect">
-            <a:avLst/>
-          </a:prstGeom>
-          <a:solidFill>
-            <a:srgbClr val="E4F0F3"/>
-          </a:solidFill>
-          <a:ln w="12700">
+            <a:off x="5954786" y="1664208"/>
+            <a:ext cx="192725" cy="301752"/>
+          </a:xfrm>
+          <a:prstGeom prst="rect">
+            <a:avLst/>
+          </a:prstGeom>
+          <a:solidFill>
+            <a:srgbClr val="F4F7F8"/>
+          </a:solidFill>
+          <a:ln w="6350">
             <a:solidFill>
               <a:srgbClr val="FFFFFF"/>
             </a:solidFill>
@@ -7817,8 +7817,8 @@
         </p:nvSpPr>
         <p:spPr>
           <a:xfrm>
-            <a:off x="365760" y="1508760"/>
-            <a:ext cx="510155" cy="155448"/>
+            <a:off x="5954786" y="1664208"/>
+            <a:ext cx="192725" cy="137160"/>
           </a:xfrm>
           <a:prstGeom prst="rect">
             <a:avLst/>
@@ -7836,30 +7836,71 @@
               <a:buNone/>
             </a:pPr>
             <a:r>
-              <a:rPr lang="ar-SA" altLang="en-US" sz="650" b="1" dirty="0">
-                <a:solidFill>
-                  <a:srgbClr val="34505A"/>
-                </a:solidFill>
-                <a:latin typeface="Arial" pitchFamily="34" charset="0"/>
-                <a:ea typeface="Arial" pitchFamily="34" charset="-122"/>
-                <a:cs typeface="Arial" pitchFamily="34" charset="-120"/>
-              </a:rPr>
-              <a:t>أسبوع 6</a:t>
-            </a:r>
-            <a:endParaRPr lang="ar-SA" sz="650" dirty="0"/>
-          </a:p>
-        </p:txBody>
-      </p:sp>
-      <p:sp>
-        <p:nvSpPr>
-          <p:cNvPr id="38" name="Shape 36"/>
-          <p:cNvSpPr/>
-          <p:nvPr/>
-        </p:nvSpPr>
-        <p:spPr>
-          <a:xfrm>
-            <a:off x="5977460" y="1664208"/>
-            <a:ext cx="170052" cy="301752"/>
+              <a:rPr lang="ar-SA" altLang="en-US" sz="500" b="1" dirty="0">
+                <a:solidFill>
+                  <a:srgbClr val="5A6A73"/>
+                </a:solidFill>
+                <a:latin typeface="Arial" pitchFamily="34" charset="0"/>
+                <a:ea typeface="Arial" pitchFamily="34" charset="-122"/>
+                <a:cs typeface="Arial" pitchFamily="34" charset="-120"/>
+              </a:rPr>
+              <a:t>ر</a:t>
+            </a:r>
+            <a:endParaRPr lang="ar-SA" sz="500" dirty="0"/>
+          </a:p>
+        </p:txBody>
+      </p:sp>
+      <p:sp>
+        <p:nvSpPr>
+          <p:cNvPr id="38" name="Text 36"/>
+          <p:cNvSpPr/>
+          <p:nvPr/>
+        </p:nvSpPr>
+        <p:spPr>
+          <a:xfrm>
+            <a:off x="5954786" y="1801368"/>
+            <a:ext cx="192725" cy="164592"/>
+          </a:xfrm>
+          <a:prstGeom prst="rect">
+            <a:avLst/>
+          </a:prstGeom>
+          <a:noFill/>
+          <a:ln/>
+        </p:spPr>
+        <p:txBody>
+          <a:bodyPr wrap="square" lIns="0" tIns="0" rIns="0" bIns="0" rtlCol="0" anchor="ctr">
+            <a:normAutofit/>
+          </a:bodyPr>
+          <a:lstStyle/>
+          <a:p>
+            <a:pPr rtl="1" algn="ctr" indent="0" marL="0">
+              <a:buNone/>
+            </a:pPr>
+            <a:r>
+              <a:rPr lang="ar-SA" altLang="en-US" sz="550" b="1" dirty="0">
+                <a:solidFill>
+                  <a:srgbClr val="222222"/>
+                </a:solidFill>
+                <a:latin typeface="Arial" pitchFamily="34" charset="0"/>
+                <a:ea typeface="Arial" pitchFamily="34" charset="-122"/>
+                <a:cs typeface="Arial" pitchFamily="34" charset="-120"/>
+              </a:rPr>
+              <a:t>14</a:t>
+            </a:r>
+            <a:endParaRPr lang="ar-SA" sz="550" dirty="0"/>
+          </a:p>
+        </p:txBody>
+      </p:sp>
+      <p:sp>
+        <p:nvSpPr>
+          <p:cNvPr id="39" name="Shape 37"/>
+          <p:cNvSpPr/>
+          <p:nvPr/>
+        </p:nvSpPr>
+        <p:spPr>
+          <a:xfrm>
+            <a:off x="5762061" y="1664208"/>
+            <a:ext cx="192725" cy="301752"/>
           </a:xfrm>
           <a:prstGeom prst="rect">
             <a:avLst/>
@@ -7877,14 +7918,14 @@
       </p:sp>
       <p:sp>
         <p:nvSpPr>
-          <p:cNvPr id="39" name="Text 37"/>
-          <p:cNvSpPr/>
-          <p:nvPr/>
-        </p:nvSpPr>
-        <p:spPr>
-          <a:xfrm>
-            <a:off x="5977460" y="1664208"/>
-            <a:ext cx="170052" cy="137160"/>
+          <p:cNvPr id="40" name="Text 38"/>
+          <p:cNvSpPr/>
+          <p:nvPr/>
+        </p:nvSpPr>
+        <p:spPr>
+          <a:xfrm>
+            <a:off x="5762061" y="1664208"/>
+            <a:ext cx="192725" cy="137160"/>
           </a:xfrm>
           <a:prstGeom prst="rect">
             <a:avLst/>
@@ -7910,6 +7951,671 @@
                 <a:ea typeface="Arial" pitchFamily="34" charset="-122"/>
                 <a:cs typeface="Arial" pitchFamily="34" charset="-120"/>
               </a:rPr>
+              <a:t>خ</a:t>
+            </a:r>
+            <a:endParaRPr lang="ar-SA" sz="500" dirty="0"/>
+          </a:p>
+        </p:txBody>
+      </p:sp>
+      <p:sp>
+        <p:nvSpPr>
+          <p:cNvPr id="41" name="Text 39"/>
+          <p:cNvSpPr/>
+          <p:nvPr/>
+        </p:nvSpPr>
+        <p:spPr>
+          <a:xfrm>
+            <a:off x="5762061" y="1801368"/>
+            <a:ext cx="192725" cy="164592"/>
+          </a:xfrm>
+          <a:prstGeom prst="rect">
+            <a:avLst/>
+          </a:prstGeom>
+          <a:noFill/>
+          <a:ln/>
+        </p:spPr>
+        <p:txBody>
+          <a:bodyPr wrap="square" lIns="0" tIns="0" rIns="0" bIns="0" rtlCol="0" anchor="ctr">
+            <a:normAutofit/>
+          </a:bodyPr>
+          <a:lstStyle/>
+          <a:p>
+            <a:pPr rtl="1" algn="ctr" indent="0" marL="0">
+              <a:buNone/>
+            </a:pPr>
+            <a:r>
+              <a:rPr lang="ar-SA" altLang="en-US" sz="550" b="1" dirty="0">
+                <a:solidFill>
+                  <a:srgbClr val="222222"/>
+                </a:solidFill>
+                <a:latin typeface="Arial" pitchFamily="34" charset="0"/>
+                <a:ea typeface="Arial" pitchFamily="34" charset="-122"/>
+                <a:cs typeface="Arial" pitchFamily="34" charset="-120"/>
+              </a:rPr>
+              <a:t>15</a:t>
+            </a:r>
+            <a:endParaRPr lang="ar-SA" sz="550" dirty="0"/>
+          </a:p>
+        </p:txBody>
+      </p:sp>
+      <p:sp>
+        <p:nvSpPr>
+          <p:cNvPr id="42" name="Shape 40"/>
+          <p:cNvSpPr/>
+          <p:nvPr/>
+        </p:nvSpPr>
+        <p:spPr>
+          <a:xfrm>
+            <a:off x="5569336" y="1664208"/>
+            <a:ext cx="192725" cy="301752"/>
+          </a:xfrm>
+          <a:prstGeom prst="rect">
+            <a:avLst/>
+          </a:prstGeom>
+          <a:solidFill>
+            <a:srgbClr val="F4F7F8"/>
+          </a:solidFill>
+          <a:ln w="6350">
+            <a:solidFill>
+              <a:srgbClr val="FFFFFF"/>
+            </a:solidFill>
+            <a:prstDash val="solid"/>
+          </a:ln>
+        </p:spPr>
+      </p:sp>
+      <p:sp>
+        <p:nvSpPr>
+          <p:cNvPr id="43" name="Text 41"/>
+          <p:cNvSpPr/>
+          <p:nvPr/>
+        </p:nvSpPr>
+        <p:spPr>
+          <a:xfrm>
+            <a:off x="5569336" y="1664208"/>
+            <a:ext cx="192725" cy="137160"/>
+          </a:xfrm>
+          <a:prstGeom prst="rect">
+            <a:avLst/>
+          </a:prstGeom>
+          <a:noFill/>
+          <a:ln/>
+        </p:spPr>
+        <p:txBody>
+          <a:bodyPr wrap="square" lIns="0" tIns="0" rIns="0" bIns="0" rtlCol="0" anchor="ctr">
+            <a:normAutofit/>
+          </a:bodyPr>
+          <a:lstStyle/>
+          <a:p>
+            <a:pPr rtl="1" algn="ctr" indent="0" marL="0">
+              <a:buNone/>
+            </a:pPr>
+            <a:r>
+              <a:rPr lang="ar-SA" altLang="en-US" sz="500" b="1" dirty="0">
+                <a:solidFill>
+                  <a:srgbClr val="5A6A73"/>
+                </a:solidFill>
+                <a:latin typeface="Arial" pitchFamily="34" charset="0"/>
+                <a:ea typeface="Arial" pitchFamily="34" charset="-122"/>
+                <a:cs typeface="Arial" pitchFamily="34" charset="-120"/>
+              </a:rPr>
+              <a:t>ج</a:t>
+            </a:r>
+            <a:endParaRPr lang="ar-SA" sz="500" dirty="0"/>
+          </a:p>
+        </p:txBody>
+      </p:sp>
+      <p:sp>
+        <p:nvSpPr>
+          <p:cNvPr id="44" name="Text 42"/>
+          <p:cNvSpPr/>
+          <p:nvPr/>
+        </p:nvSpPr>
+        <p:spPr>
+          <a:xfrm>
+            <a:off x="5569336" y="1801368"/>
+            <a:ext cx="192725" cy="164592"/>
+          </a:xfrm>
+          <a:prstGeom prst="rect">
+            <a:avLst/>
+          </a:prstGeom>
+          <a:noFill/>
+          <a:ln/>
+        </p:spPr>
+        <p:txBody>
+          <a:bodyPr wrap="square" lIns="0" tIns="0" rIns="0" bIns="0" rtlCol="0" anchor="ctr">
+            <a:normAutofit/>
+          </a:bodyPr>
+          <a:lstStyle/>
+          <a:p>
+            <a:pPr rtl="1" algn="ctr" indent="0" marL="0">
+              <a:buNone/>
+            </a:pPr>
+            <a:r>
+              <a:rPr lang="ar-SA" altLang="en-US" sz="550" b="1" dirty="0">
+                <a:solidFill>
+                  <a:srgbClr val="222222"/>
+                </a:solidFill>
+                <a:latin typeface="Arial" pitchFamily="34" charset="0"/>
+                <a:ea typeface="Arial" pitchFamily="34" charset="-122"/>
+                <a:cs typeface="Arial" pitchFamily="34" charset="-120"/>
+              </a:rPr>
+              <a:t>16</a:t>
+            </a:r>
+            <a:endParaRPr lang="ar-SA" sz="550" dirty="0"/>
+          </a:p>
+        </p:txBody>
+      </p:sp>
+      <p:sp>
+        <p:nvSpPr>
+          <p:cNvPr id="45" name="Shape 43"/>
+          <p:cNvSpPr/>
+          <p:nvPr/>
+        </p:nvSpPr>
+        <p:spPr>
+          <a:xfrm>
+            <a:off x="5376611" y="1664208"/>
+            <a:ext cx="192725" cy="301752"/>
+          </a:xfrm>
+          <a:prstGeom prst="rect">
+            <a:avLst/>
+          </a:prstGeom>
+          <a:solidFill>
+            <a:srgbClr val="F4F7F8"/>
+          </a:solidFill>
+          <a:ln w="6350">
+            <a:solidFill>
+              <a:srgbClr val="FFFFFF"/>
+            </a:solidFill>
+            <a:prstDash val="solid"/>
+          </a:ln>
+        </p:spPr>
+      </p:sp>
+      <p:sp>
+        <p:nvSpPr>
+          <p:cNvPr id="46" name="Text 44"/>
+          <p:cNvSpPr/>
+          <p:nvPr/>
+        </p:nvSpPr>
+        <p:spPr>
+          <a:xfrm>
+            <a:off x="5376611" y="1664208"/>
+            <a:ext cx="192725" cy="137160"/>
+          </a:xfrm>
+          <a:prstGeom prst="rect">
+            <a:avLst/>
+          </a:prstGeom>
+          <a:noFill/>
+          <a:ln/>
+        </p:spPr>
+        <p:txBody>
+          <a:bodyPr wrap="square" lIns="0" tIns="0" rIns="0" bIns="0" rtlCol="0" anchor="ctr">
+            <a:normAutofit/>
+          </a:bodyPr>
+          <a:lstStyle/>
+          <a:p>
+            <a:pPr rtl="1" algn="ctr" indent="0" marL="0">
+              <a:buNone/>
+            </a:pPr>
+            <a:r>
+              <a:rPr lang="ar-SA" altLang="en-US" sz="500" b="1" dirty="0">
+                <a:solidFill>
+                  <a:srgbClr val="5A6A73"/>
+                </a:solidFill>
+                <a:latin typeface="Arial" pitchFamily="34" charset="0"/>
+                <a:ea typeface="Arial" pitchFamily="34" charset="-122"/>
+                <a:cs typeface="Arial" pitchFamily="34" charset="-120"/>
+              </a:rPr>
+              <a:t>س</a:t>
+            </a:r>
+            <a:endParaRPr lang="ar-SA" sz="500" dirty="0"/>
+          </a:p>
+        </p:txBody>
+      </p:sp>
+      <p:sp>
+        <p:nvSpPr>
+          <p:cNvPr id="47" name="Text 45"/>
+          <p:cNvSpPr/>
+          <p:nvPr/>
+        </p:nvSpPr>
+        <p:spPr>
+          <a:xfrm>
+            <a:off x="5376611" y="1801368"/>
+            <a:ext cx="192725" cy="164592"/>
+          </a:xfrm>
+          <a:prstGeom prst="rect">
+            <a:avLst/>
+          </a:prstGeom>
+          <a:noFill/>
+          <a:ln/>
+        </p:spPr>
+        <p:txBody>
+          <a:bodyPr wrap="square" lIns="0" tIns="0" rIns="0" bIns="0" rtlCol="0" anchor="ctr">
+            <a:normAutofit/>
+          </a:bodyPr>
+          <a:lstStyle/>
+          <a:p>
+            <a:pPr rtl="1" algn="ctr" indent="0" marL="0">
+              <a:buNone/>
+            </a:pPr>
+            <a:r>
+              <a:rPr lang="ar-SA" altLang="en-US" sz="550" b="1" dirty="0">
+                <a:solidFill>
+                  <a:srgbClr val="222222"/>
+                </a:solidFill>
+                <a:latin typeface="Arial" pitchFamily="34" charset="0"/>
+                <a:ea typeface="Arial" pitchFamily="34" charset="-122"/>
+                <a:cs typeface="Arial" pitchFamily="34" charset="-120"/>
+              </a:rPr>
+              <a:t>17</a:t>
+            </a:r>
+            <a:endParaRPr lang="ar-SA" sz="550" dirty="0"/>
+          </a:p>
+        </p:txBody>
+      </p:sp>
+      <p:sp>
+        <p:nvSpPr>
+          <p:cNvPr id="48" name="Shape 46"/>
+          <p:cNvSpPr/>
+          <p:nvPr/>
+        </p:nvSpPr>
+        <p:spPr>
+          <a:xfrm>
+            <a:off x="5569336" y="1965960"/>
+            <a:ext cx="0" cy="2194560"/>
+          </a:xfrm>
+          <a:prstGeom prst="line">
+            <a:avLst/>
+          </a:prstGeom>
+          <a:noFill/>
+          <a:ln w="6350">
+            <a:solidFill>
+              <a:srgbClr val="9DB2BB"/>
+            </a:solidFill>
+            <a:prstDash val="solid"/>
+          </a:ln>
+        </p:spPr>
+      </p:sp>
+      <p:sp>
+        <p:nvSpPr>
+          <p:cNvPr id="49" name="Shape 47"/>
+          <p:cNvSpPr/>
+          <p:nvPr/>
+        </p:nvSpPr>
+        <p:spPr>
+          <a:xfrm>
+            <a:off x="5183886" y="1664208"/>
+            <a:ext cx="192725" cy="301752"/>
+          </a:xfrm>
+          <a:prstGeom prst="rect">
+            <a:avLst/>
+          </a:prstGeom>
+          <a:solidFill>
+            <a:srgbClr val="F4F7F8"/>
+          </a:solidFill>
+          <a:ln w="6350">
+            <a:solidFill>
+              <a:srgbClr val="FFFFFF"/>
+            </a:solidFill>
+            <a:prstDash val="solid"/>
+          </a:ln>
+        </p:spPr>
+      </p:sp>
+      <p:sp>
+        <p:nvSpPr>
+          <p:cNvPr id="50" name="Text 48"/>
+          <p:cNvSpPr/>
+          <p:nvPr/>
+        </p:nvSpPr>
+        <p:spPr>
+          <a:xfrm>
+            <a:off x="5183886" y="1664208"/>
+            <a:ext cx="192725" cy="137160"/>
+          </a:xfrm>
+          <a:prstGeom prst="rect">
+            <a:avLst/>
+          </a:prstGeom>
+          <a:noFill/>
+          <a:ln/>
+        </p:spPr>
+        <p:txBody>
+          <a:bodyPr wrap="square" lIns="0" tIns="0" rIns="0" bIns="0" rtlCol="0" anchor="ctr">
+            <a:normAutofit/>
+          </a:bodyPr>
+          <a:lstStyle/>
+          <a:p>
+            <a:pPr rtl="1" algn="ctr" indent="0" marL="0">
+              <a:buNone/>
+            </a:pPr>
+            <a:r>
+              <a:rPr lang="ar-SA" altLang="en-US" sz="500" b="1" dirty="0">
+                <a:solidFill>
+                  <a:srgbClr val="5A6A73"/>
+                </a:solidFill>
+                <a:latin typeface="Arial" pitchFamily="34" charset="0"/>
+                <a:ea typeface="Arial" pitchFamily="34" charset="-122"/>
+                <a:cs typeface="Arial" pitchFamily="34" charset="-120"/>
+              </a:rPr>
+              <a:t>ح</a:t>
+            </a:r>
+            <a:endParaRPr lang="ar-SA" sz="500" dirty="0"/>
+          </a:p>
+        </p:txBody>
+      </p:sp>
+      <p:sp>
+        <p:nvSpPr>
+          <p:cNvPr id="51" name="Text 49"/>
+          <p:cNvSpPr/>
+          <p:nvPr/>
+        </p:nvSpPr>
+        <p:spPr>
+          <a:xfrm>
+            <a:off x="5183886" y="1801368"/>
+            <a:ext cx="192725" cy="164592"/>
+          </a:xfrm>
+          <a:prstGeom prst="rect">
+            <a:avLst/>
+          </a:prstGeom>
+          <a:noFill/>
+          <a:ln/>
+        </p:spPr>
+        <p:txBody>
+          <a:bodyPr wrap="square" lIns="0" tIns="0" rIns="0" bIns="0" rtlCol="0" anchor="ctr">
+            <a:normAutofit/>
+          </a:bodyPr>
+          <a:lstStyle/>
+          <a:p>
+            <a:pPr rtl="1" algn="ctr" indent="0" marL="0">
+              <a:buNone/>
+            </a:pPr>
+            <a:r>
+              <a:rPr lang="ar-SA" altLang="en-US" sz="550" b="1" dirty="0">
+                <a:solidFill>
+                  <a:srgbClr val="222222"/>
+                </a:solidFill>
+                <a:latin typeface="Arial" pitchFamily="34" charset="0"/>
+                <a:ea typeface="Arial" pitchFamily="34" charset="-122"/>
+                <a:cs typeface="Arial" pitchFamily="34" charset="-120"/>
+              </a:rPr>
+              <a:t>18</a:t>
+            </a:r>
+            <a:endParaRPr lang="ar-SA" sz="550" dirty="0"/>
+          </a:p>
+        </p:txBody>
+      </p:sp>
+      <p:sp>
+        <p:nvSpPr>
+          <p:cNvPr id="52" name="Shape 50"/>
+          <p:cNvSpPr/>
+          <p:nvPr/>
+        </p:nvSpPr>
+        <p:spPr>
+          <a:xfrm>
+            <a:off x="4991161" y="1664208"/>
+            <a:ext cx="192725" cy="301752"/>
+          </a:xfrm>
+          <a:prstGeom prst="rect">
+            <a:avLst/>
+          </a:prstGeom>
+          <a:solidFill>
+            <a:srgbClr val="F4F7F8"/>
+          </a:solidFill>
+          <a:ln w="6350">
+            <a:solidFill>
+              <a:srgbClr val="FFFFFF"/>
+            </a:solidFill>
+            <a:prstDash val="solid"/>
+          </a:ln>
+        </p:spPr>
+      </p:sp>
+      <p:sp>
+        <p:nvSpPr>
+          <p:cNvPr id="53" name="Text 51"/>
+          <p:cNvSpPr/>
+          <p:nvPr/>
+        </p:nvSpPr>
+        <p:spPr>
+          <a:xfrm>
+            <a:off x="4991161" y="1664208"/>
+            <a:ext cx="192725" cy="137160"/>
+          </a:xfrm>
+          <a:prstGeom prst="rect">
+            <a:avLst/>
+          </a:prstGeom>
+          <a:noFill/>
+          <a:ln/>
+        </p:spPr>
+        <p:txBody>
+          <a:bodyPr wrap="square" lIns="0" tIns="0" rIns="0" bIns="0" rtlCol="0" anchor="ctr">
+            <a:normAutofit/>
+          </a:bodyPr>
+          <a:lstStyle/>
+          <a:p>
+            <a:pPr rtl="1" algn="ctr" indent="0" marL="0">
+              <a:buNone/>
+            </a:pPr>
+            <a:r>
+              <a:rPr lang="ar-SA" altLang="en-US" sz="500" b="1" dirty="0">
+                <a:solidFill>
+                  <a:srgbClr val="5A6A73"/>
+                </a:solidFill>
+                <a:latin typeface="Arial" pitchFamily="34" charset="0"/>
+                <a:ea typeface="Arial" pitchFamily="34" charset="-122"/>
+                <a:cs typeface="Arial" pitchFamily="34" charset="-120"/>
+              </a:rPr>
+              <a:t>ن</a:t>
+            </a:r>
+            <a:endParaRPr lang="ar-SA" sz="500" dirty="0"/>
+          </a:p>
+        </p:txBody>
+      </p:sp>
+      <p:sp>
+        <p:nvSpPr>
+          <p:cNvPr id="54" name="Text 52"/>
+          <p:cNvSpPr/>
+          <p:nvPr/>
+        </p:nvSpPr>
+        <p:spPr>
+          <a:xfrm>
+            <a:off x="4991161" y="1801368"/>
+            <a:ext cx="192725" cy="164592"/>
+          </a:xfrm>
+          <a:prstGeom prst="rect">
+            <a:avLst/>
+          </a:prstGeom>
+          <a:noFill/>
+          <a:ln/>
+        </p:spPr>
+        <p:txBody>
+          <a:bodyPr wrap="square" lIns="0" tIns="0" rIns="0" bIns="0" rtlCol="0" anchor="ctr">
+            <a:normAutofit/>
+          </a:bodyPr>
+          <a:lstStyle/>
+          <a:p>
+            <a:pPr rtl="1" algn="ctr" indent="0" marL="0">
+              <a:buNone/>
+            </a:pPr>
+            <a:r>
+              <a:rPr lang="ar-SA" altLang="en-US" sz="550" b="1" dirty="0">
+                <a:solidFill>
+                  <a:srgbClr val="222222"/>
+                </a:solidFill>
+                <a:latin typeface="Arial" pitchFamily="34" charset="0"/>
+                <a:ea typeface="Arial" pitchFamily="34" charset="-122"/>
+                <a:cs typeface="Arial" pitchFamily="34" charset="-120"/>
+              </a:rPr>
+              <a:t>19</a:t>
+            </a:r>
+            <a:endParaRPr lang="ar-SA" sz="550" dirty="0"/>
+          </a:p>
+        </p:txBody>
+      </p:sp>
+      <p:sp>
+        <p:nvSpPr>
+          <p:cNvPr id="55" name="Shape 53"/>
+          <p:cNvSpPr/>
+          <p:nvPr/>
+        </p:nvSpPr>
+        <p:spPr>
+          <a:xfrm>
+            <a:off x="4798436" y="1664208"/>
+            <a:ext cx="192725" cy="301752"/>
+          </a:xfrm>
+          <a:prstGeom prst="rect">
+            <a:avLst/>
+          </a:prstGeom>
+          <a:solidFill>
+            <a:srgbClr val="F4F7F8"/>
+          </a:solidFill>
+          <a:ln w="6350">
+            <a:solidFill>
+              <a:srgbClr val="FFFFFF"/>
+            </a:solidFill>
+            <a:prstDash val="solid"/>
+          </a:ln>
+        </p:spPr>
+      </p:sp>
+      <p:sp>
+        <p:nvSpPr>
+          <p:cNvPr id="56" name="Text 54"/>
+          <p:cNvSpPr/>
+          <p:nvPr/>
+        </p:nvSpPr>
+        <p:spPr>
+          <a:xfrm>
+            <a:off x="4798436" y="1664208"/>
+            <a:ext cx="192725" cy="137160"/>
+          </a:xfrm>
+          <a:prstGeom prst="rect">
+            <a:avLst/>
+          </a:prstGeom>
+          <a:noFill/>
+          <a:ln/>
+        </p:spPr>
+        <p:txBody>
+          <a:bodyPr wrap="square" lIns="0" tIns="0" rIns="0" bIns="0" rtlCol="0" anchor="ctr">
+            <a:normAutofit/>
+          </a:bodyPr>
+          <a:lstStyle/>
+          <a:p>
+            <a:pPr rtl="1" algn="ctr" indent="0" marL="0">
+              <a:buNone/>
+            </a:pPr>
+            <a:r>
+              <a:rPr lang="ar-SA" altLang="en-US" sz="500" b="1" dirty="0">
+                <a:solidFill>
+                  <a:srgbClr val="5A6A73"/>
+                </a:solidFill>
+                <a:latin typeface="Arial" pitchFamily="34" charset="0"/>
+                <a:ea typeface="Arial" pitchFamily="34" charset="-122"/>
+                <a:cs typeface="Arial" pitchFamily="34" charset="-120"/>
+              </a:rPr>
+              <a:t>ث</a:t>
+            </a:r>
+            <a:endParaRPr lang="ar-SA" sz="500" dirty="0"/>
+          </a:p>
+        </p:txBody>
+      </p:sp>
+      <p:sp>
+        <p:nvSpPr>
+          <p:cNvPr id="57" name="Text 55"/>
+          <p:cNvSpPr/>
+          <p:nvPr/>
+        </p:nvSpPr>
+        <p:spPr>
+          <a:xfrm>
+            <a:off x="4798436" y="1801368"/>
+            <a:ext cx="192725" cy="164592"/>
+          </a:xfrm>
+          <a:prstGeom prst="rect">
+            <a:avLst/>
+          </a:prstGeom>
+          <a:noFill/>
+          <a:ln/>
+        </p:spPr>
+        <p:txBody>
+          <a:bodyPr wrap="square" lIns="0" tIns="0" rIns="0" bIns="0" rtlCol="0" anchor="ctr">
+            <a:normAutofit/>
+          </a:bodyPr>
+          <a:lstStyle/>
+          <a:p>
+            <a:pPr rtl="1" algn="ctr" indent="0" marL="0">
+              <a:buNone/>
+            </a:pPr>
+            <a:r>
+              <a:rPr lang="ar-SA" altLang="en-US" sz="550" b="1" dirty="0">
+                <a:solidFill>
+                  <a:srgbClr val="222222"/>
+                </a:solidFill>
+                <a:latin typeface="Arial" pitchFamily="34" charset="0"/>
+                <a:ea typeface="Arial" pitchFamily="34" charset="-122"/>
+                <a:cs typeface="Arial" pitchFamily="34" charset="-120"/>
+              </a:rPr>
+              <a:t>20</a:t>
+            </a:r>
+            <a:endParaRPr lang="ar-SA" sz="550" dirty="0"/>
+          </a:p>
+        </p:txBody>
+      </p:sp>
+      <p:sp>
+        <p:nvSpPr>
+          <p:cNvPr id="58" name="Shape 56"/>
+          <p:cNvSpPr/>
+          <p:nvPr/>
+        </p:nvSpPr>
+        <p:spPr>
+          <a:xfrm>
+            <a:off x="4605711" y="1664208"/>
+            <a:ext cx="192725" cy="301752"/>
+          </a:xfrm>
+          <a:prstGeom prst="rect">
+            <a:avLst/>
+          </a:prstGeom>
+          <a:solidFill>
+            <a:srgbClr val="F4F7F8"/>
+          </a:solidFill>
+          <a:ln w="6350">
+            <a:solidFill>
+              <a:srgbClr val="FFFFFF"/>
+            </a:solidFill>
+            <a:prstDash val="solid"/>
+          </a:ln>
+        </p:spPr>
+      </p:sp>
+      <p:sp>
+        <p:nvSpPr>
+          <p:cNvPr id="59" name="Text 57"/>
+          <p:cNvSpPr/>
+          <p:nvPr/>
+        </p:nvSpPr>
+        <p:spPr>
+          <a:xfrm>
+            <a:off x="4605711" y="1664208"/>
+            <a:ext cx="192725" cy="137160"/>
+          </a:xfrm>
+          <a:prstGeom prst="rect">
+            <a:avLst/>
+          </a:prstGeom>
+          <a:noFill/>
+          <a:ln/>
+        </p:spPr>
+        <p:txBody>
+          <a:bodyPr wrap="square" lIns="0" tIns="0" rIns="0" bIns="0" rtlCol="0" anchor="ctr">
+            <a:normAutofit/>
+          </a:bodyPr>
+          <a:lstStyle/>
+          <a:p>
+            <a:pPr rtl="1" algn="ctr" indent="0" marL="0">
+              <a:buNone/>
+            </a:pPr>
+            <a:r>
+              <a:rPr lang="ar-SA" altLang="en-US" sz="500" b="1" dirty="0">
+                <a:solidFill>
+                  <a:srgbClr val="5A6A73"/>
+                </a:solidFill>
+                <a:latin typeface="Arial" pitchFamily="34" charset="0"/>
+                <a:ea typeface="Arial" pitchFamily="34" charset="-122"/>
+                <a:cs typeface="Arial" pitchFamily="34" charset="-120"/>
+              </a:rPr>
               <a:t>ر</a:t>
             </a:r>
             <a:endParaRPr lang="ar-SA" sz="500" dirty="0"/>
@@ -7918,14 +8624,14 @@
       </p:sp>
       <p:sp>
         <p:nvSpPr>
-          <p:cNvPr id="40" name="Text 38"/>
-          <p:cNvSpPr/>
-          <p:nvPr/>
-        </p:nvSpPr>
-        <p:spPr>
-          <a:xfrm>
-            <a:off x="5977460" y="1801368"/>
-            <a:ext cx="170052" cy="164592"/>
+          <p:cNvPr id="60" name="Text 58"/>
+          <p:cNvSpPr/>
+          <p:nvPr/>
+        </p:nvSpPr>
+        <p:spPr>
+          <a:xfrm>
+            <a:off x="4605711" y="1801368"/>
+            <a:ext cx="192725" cy="164592"/>
           </a:xfrm>
           <a:prstGeom prst="rect">
             <a:avLst/>
@@ -7951,7 +8657,7 @@
                 <a:ea typeface="Arial" pitchFamily="34" charset="-122"/>
                 <a:cs typeface="Arial" pitchFamily="34" charset="-120"/>
               </a:rPr>
-              <a:t>14</a:t>
+              <a:t>21</a:t>
             </a:r>
             <a:endParaRPr lang="ar-SA" sz="550" dirty="0"/>
           </a:p>
@@ -7959,14 +8665,14 @@
       </p:sp>
       <p:sp>
         <p:nvSpPr>
-          <p:cNvPr id="41" name="Shape 39"/>
-          <p:cNvSpPr/>
-          <p:nvPr/>
-        </p:nvSpPr>
-        <p:spPr>
-          <a:xfrm>
-            <a:off x="5807408" y="1664208"/>
-            <a:ext cx="170052" cy="301752"/>
+          <p:cNvPr id="61" name="Shape 59"/>
+          <p:cNvSpPr/>
+          <p:nvPr/>
+        </p:nvSpPr>
+        <p:spPr>
+          <a:xfrm>
+            <a:off x="4412986" y="1664208"/>
+            <a:ext cx="192725" cy="301752"/>
           </a:xfrm>
           <a:prstGeom prst="rect">
             <a:avLst/>
@@ -7984,14 +8690,14 @@
       </p:sp>
       <p:sp>
         <p:nvSpPr>
-          <p:cNvPr id="42" name="Text 40"/>
-          <p:cNvSpPr/>
-          <p:nvPr/>
-        </p:nvSpPr>
-        <p:spPr>
-          <a:xfrm>
-            <a:off x="5807408" y="1664208"/>
-            <a:ext cx="170052" cy="137160"/>
+          <p:cNvPr id="62" name="Text 60"/>
+          <p:cNvSpPr/>
+          <p:nvPr/>
+        </p:nvSpPr>
+        <p:spPr>
+          <a:xfrm>
+            <a:off x="4412986" y="1664208"/>
+            <a:ext cx="192725" cy="137160"/>
           </a:xfrm>
           <a:prstGeom prst="rect">
             <a:avLst/>
@@ -8025,14 +8731,14 @@
       </p:sp>
       <p:sp>
         <p:nvSpPr>
-          <p:cNvPr id="43" name="Text 41"/>
-          <p:cNvSpPr/>
-          <p:nvPr/>
-        </p:nvSpPr>
-        <p:spPr>
-          <a:xfrm>
-            <a:off x="5807408" y="1801368"/>
-            <a:ext cx="170052" cy="164592"/>
+          <p:cNvPr id="63" name="Text 61"/>
+          <p:cNvSpPr/>
+          <p:nvPr/>
+        </p:nvSpPr>
+        <p:spPr>
+          <a:xfrm>
+            <a:off x="4412986" y="1801368"/>
+            <a:ext cx="192725" cy="164592"/>
           </a:xfrm>
           <a:prstGeom prst="rect">
             <a:avLst/>
@@ -8058,7 +8764,7 @@
                 <a:ea typeface="Arial" pitchFamily="34" charset="-122"/>
                 <a:cs typeface="Arial" pitchFamily="34" charset="-120"/>
               </a:rPr>
-              <a:t>15</a:t>
+              <a:t>22</a:t>
             </a:r>
             <a:endParaRPr lang="ar-SA" sz="550" dirty="0"/>
           </a:p>
@@ -8066,20 +8772,20 @@
       </p:sp>
       <p:sp>
         <p:nvSpPr>
-          <p:cNvPr id="44" name="Shape 42"/>
-          <p:cNvSpPr/>
-          <p:nvPr/>
-        </p:nvSpPr>
-        <p:spPr>
-          <a:xfrm>
-            <a:off x="5637357" y="1664208"/>
-            <a:ext cx="170052" cy="301752"/>
-          </a:xfrm>
-          <a:prstGeom prst="rect">
-            <a:avLst/>
-          </a:prstGeom>
-          <a:solidFill>
-            <a:srgbClr val="DBE3E6"/>
+          <p:cNvPr id="64" name="Shape 62"/>
+          <p:cNvSpPr/>
+          <p:nvPr/>
+        </p:nvSpPr>
+        <p:spPr>
+          <a:xfrm>
+            <a:off x="4220261" y="1664208"/>
+            <a:ext cx="192725" cy="301752"/>
+          </a:xfrm>
+          <a:prstGeom prst="rect">
+            <a:avLst/>
+          </a:prstGeom>
+          <a:solidFill>
+            <a:srgbClr val="F4F7F8"/>
           </a:solidFill>
           <a:ln w="6350">
             <a:solidFill>
@@ -8091,14 +8797,14 @@
       </p:sp>
       <p:sp>
         <p:nvSpPr>
-          <p:cNvPr id="45" name="Text 43"/>
-          <p:cNvSpPr/>
-          <p:nvPr/>
-        </p:nvSpPr>
-        <p:spPr>
-          <a:xfrm>
-            <a:off x="5637357" y="1664208"/>
-            <a:ext cx="170052" cy="137160"/>
+          <p:cNvPr id="65" name="Text 63"/>
+          <p:cNvSpPr/>
+          <p:nvPr/>
+        </p:nvSpPr>
+        <p:spPr>
+          <a:xfrm>
+            <a:off x="4220261" y="1664208"/>
+            <a:ext cx="192725" cy="137160"/>
           </a:xfrm>
           <a:prstGeom prst="rect">
             <a:avLst/>
@@ -8118,7 +8824,7 @@
             <a:r>
               <a:rPr lang="ar-SA" altLang="en-US" sz="500" b="1" dirty="0">
                 <a:solidFill>
-                  <a:srgbClr val="8A959C"/>
+                  <a:srgbClr val="5A6A73"/>
                 </a:solidFill>
                 <a:latin typeface="Arial" pitchFamily="34" charset="0"/>
                 <a:ea typeface="Arial" pitchFamily="34" charset="-122"/>
@@ -8132,14 +8838,14 @@
       </p:sp>
       <p:sp>
         <p:nvSpPr>
-          <p:cNvPr id="46" name="Text 44"/>
-          <p:cNvSpPr/>
-          <p:nvPr/>
-        </p:nvSpPr>
-        <p:spPr>
-          <a:xfrm>
-            <a:off x="5637357" y="1801368"/>
-            <a:ext cx="170052" cy="164592"/>
+          <p:cNvPr id="66" name="Text 64"/>
+          <p:cNvSpPr/>
+          <p:nvPr/>
+        </p:nvSpPr>
+        <p:spPr>
+          <a:xfrm>
+            <a:off x="4220261" y="1801368"/>
+            <a:ext cx="192725" cy="164592"/>
           </a:xfrm>
           <a:prstGeom prst="rect">
             <a:avLst/>
@@ -8159,13 +8865,13 @@
             <a:r>
               <a:rPr lang="ar-SA" altLang="en-US" sz="550" b="1" dirty="0">
                 <a:solidFill>
-                  <a:srgbClr val="8A959C"/>
-                </a:solidFill>
-                <a:latin typeface="Arial" pitchFamily="34" charset="0"/>
-                <a:ea typeface="Arial" pitchFamily="34" charset="-122"/>
-                <a:cs typeface="Arial" pitchFamily="34" charset="-120"/>
-              </a:rPr>
-              <a:t>16</a:t>
+                  <a:srgbClr val="222222"/>
+                </a:solidFill>
+                <a:latin typeface="Arial" pitchFamily="34" charset="0"/>
+                <a:ea typeface="Arial" pitchFamily="34" charset="-122"/>
+                <a:cs typeface="Arial" pitchFamily="34" charset="-120"/>
+              </a:rPr>
+              <a:t>23</a:t>
             </a:r>
             <a:endParaRPr lang="ar-SA" sz="550" dirty="0"/>
           </a:p>
@@ -8173,43 +8879,14 @@
       </p:sp>
       <p:sp>
         <p:nvSpPr>
-          <p:cNvPr id="47" name="Shape 45"/>
-          <p:cNvSpPr/>
-          <p:nvPr/>
-        </p:nvSpPr>
-        <p:spPr>
-          <a:xfrm>
-            <a:off x="5637357" y="1965960"/>
-            <a:ext cx="170052" cy="2194560"/>
-          </a:xfrm>
-          <a:prstGeom prst="rect">
-            <a:avLst/>
-          </a:prstGeom>
-          <a:solidFill>
-            <a:srgbClr val="000000">
-              <a:alpha val="6000"/>
-            </a:srgbClr>
-          </a:solidFill>
-          <a:ln w="12700">
-            <a:solidFill>
-              <a:srgbClr val="000000">
-                <a:alpha val="0"/>
-              </a:srgbClr>
-            </a:solidFill>
-            <a:prstDash val="solid"/>
-          </a:ln>
-        </p:spPr>
-      </p:sp>
-      <p:sp>
-        <p:nvSpPr>
-          <p:cNvPr id="48" name="Shape 46"/>
-          <p:cNvSpPr/>
-          <p:nvPr/>
-        </p:nvSpPr>
-        <p:spPr>
-          <a:xfrm>
-            <a:off x="5467305" y="1664208"/>
-            <a:ext cx="170052" cy="301752"/>
+          <p:cNvPr id="67" name="Shape 65"/>
+          <p:cNvSpPr/>
+          <p:nvPr/>
+        </p:nvSpPr>
+        <p:spPr>
+          <a:xfrm>
+            <a:off x="4027536" y="1664208"/>
+            <a:ext cx="192725" cy="301752"/>
           </a:xfrm>
           <a:prstGeom prst="rect">
             <a:avLst/>
@@ -8227,14 +8904,14 @@
       </p:sp>
       <p:sp>
         <p:nvSpPr>
-          <p:cNvPr id="49" name="Text 47"/>
-          <p:cNvSpPr/>
-          <p:nvPr/>
-        </p:nvSpPr>
-        <p:spPr>
-          <a:xfrm>
-            <a:off x="5467305" y="1664208"/>
-            <a:ext cx="170052" cy="137160"/>
+          <p:cNvPr id="68" name="Text 66"/>
+          <p:cNvSpPr/>
+          <p:nvPr/>
+        </p:nvSpPr>
+        <p:spPr>
+          <a:xfrm>
+            <a:off x="4027536" y="1664208"/>
+            <a:ext cx="192725" cy="137160"/>
           </a:xfrm>
           <a:prstGeom prst="rect">
             <a:avLst/>
@@ -8268,14 +8945,14 @@
       </p:sp>
       <p:sp>
         <p:nvSpPr>
-          <p:cNvPr id="50" name="Text 48"/>
-          <p:cNvSpPr/>
-          <p:nvPr/>
-        </p:nvSpPr>
-        <p:spPr>
-          <a:xfrm>
-            <a:off x="5467305" y="1801368"/>
-            <a:ext cx="170052" cy="164592"/>
+          <p:cNvPr id="69" name="Text 67"/>
+          <p:cNvSpPr/>
+          <p:nvPr/>
+        </p:nvSpPr>
+        <p:spPr>
+          <a:xfrm>
+            <a:off x="4027536" y="1801368"/>
+            <a:ext cx="192725" cy="164592"/>
           </a:xfrm>
           <a:prstGeom prst="rect">
             <a:avLst/>
@@ -8301,7 +8978,7 @@
                 <a:ea typeface="Arial" pitchFamily="34" charset="-122"/>
                 <a:cs typeface="Arial" pitchFamily="34" charset="-120"/>
               </a:rPr>
-              <a:t>17</a:t>
+              <a:t>24</a:t>
             </a:r>
             <a:endParaRPr lang="ar-SA" sz="550" dirty="0"/>
           </a:p>
@@ -8309,13 +8986,13 @@
       </p:sp>
       <p:sp>
         <p:nvSpPr>
-          <p:cNvPr id="51" name="Shape 49"/>
-          <p:cNvSpPr/>
-          <p:nvPr/>
-        </p:nvSpPr>
-        <p:spPr>
-          <a:xfrm>
-            <a:off x="5637357" y="1965960"/>
+          <p:cNvPr id="70" name="Shape 68"/>
+          <p:cNvSpPr/>
+          <p:nvPr/>
+        </p:nvSpPr>
+        <p:spPr>
+          <a:xfrm>
+            <a:off x="4220261" y="1965960"/>
             <a:ext cx="0" cy="2194560"/>
           </a:xfrm>
           <a:prstGeom prst="line">
@@ -8332,14 +9009,14 @@
       </p:sp>
       <p:sp>
         <p:nvSpPr>
-          <p:cNvPr id="52" name="Shape 50"/>
-          <p:cNvSpPr/>
-          <p:nvPr/>
-        </p:nvSpPr>
-        <p:spPr>
-          <a:xfrm>
-            <a:off x="5297254" y="1664208"/>
-            <a:ext cx="170052" cy="301752"/>
+          <p:cNvPr id="71" name="Shape 69"/>
+          <p:cNvSpPr/>
+          <p:nvPr/>
+        </p:nvSpPr>
+        <p:spPr>
+          <a:xfrm>
+            <a:off x="3834811" y="1664208"/>
+            <a:ext cx="192725" cy="301752"/>
           </a:xfrm>
           <a:prstGeom prst="rect">
             <a:avLst/>
@@ -8357,14 +9034,14 @@
       </p:sp>
       <p:sp>
         <p:nvSpPr>
-          <p:cNvPr id="53" name="Text 51"/>
-          <p:cNvSpPr/>
-          <p:nvPr/>
-        </p:nvSpPr>
-        <p:spPr>
-          <a:xfrm>
-            <a:off x="5297254" y="1664208"/>
-            <a:ext cx="170052" cy="137160"/>
+          <p:cNvPr id="72" name="Text 70"/>
+          <p:cNvSpPr/>
+          <p:nvPr/>
+        </p:nvSpPr>
+        <p:spPr>
+          <a:xfrm>
+            <a:off x="3834811" y="1664208"/>
+            <a:ext cx="192725" cy="137160"/>
           </a:xfrm>
           <a:prstGeom prst="rect">
             <a:avLst/>
@@ -8398,14 +9075,14 @@
       </p:sp>
       <p:sp>
         <p:nvSpPr>
-          <p:cNvPr id="54" name="Text 52"/>
-          <p:cNvSpPr/>
-          <p:nvPr/>
-        </p:nvSpPr>
-        <p:spPr>
-          <a:xfrm>
-            <a:off x="5297254" y="1801368"/>
-            <a:ext cx="170052" cy="164592"/>
+          <p:cNvPr id="73" name="Text 71"/>
+          <p:cNvSpPr/>
+          <p:nvPr/>
+        </p:nvSpPr>
+        <p:spPr>
+          <a:xfrm>
+            <a:off x="3834811" y="1801368"/>
+            <a:ext cx="192725" cy="164592"/>
           </a:xfrm>
           <a:prstGeom prst="rect">
             <a:avLst/>
@@ -8431,7 +9108,7 @@
                 <a:ea typeface="Arial" pitchFamily="34" charset="-122"/>
                 <a:cs typeface="Arial" pitchFamily="34" charset="-120"/>
               </a:rPr>
-              <a:t>18</a:t>
+              <a:t>25</a:t>
             </a:r>
             <a:endParaRPr lang="ar-SA" sz="550" dirty="0"/>
           </a:p>
@@ -8439,14 +9116,14 @@
       </p:sp>
       <p:sp>
         <p:nvSpPr>
-          <p:cNvPr id="55" name="Shape 53"/>
-          <p:cNvSpPr/>
-          <p:nvPr/>
-        </p:nvSpPr>
-        <p:spPr>
-          <a:xfrm>
-            <a:off x="5127202" y="1664208"/>
-            <a:ext cx="170052" cy="301752"/>
+          <p:cNvPr id="74" name="Shape 72"/>
+          <p:cNvSpPr/>
+          <p:nvPr/>
+        </p:nvSpPr>
+        <p:spPr>
+          <a:xfrm>
+            <a:off x="3642086" y="1664208"/>
+            <a:ext cx="192725" cy="301752"/>
           </a:xfrm>
           <a:prstGeom prst="rect">
             <a:avLst/>
@@ -8464,14 +9141,14 @@
       </p:sp>
       <p:sp>
         <p:nvSpPr>
-          <p:cNvPr id="56" name="Text 54"/>
-          <p:cNvSpPr/>
-          <p:nvPr/>
-        </p:nvSpPr>
-        <p:spPr>
-          <a:xfrm>
-            <a:off x="5127202" y="1664208"/>
-            <a:ext cx="170052" cy="137160"/>
+          <p:cNvPr id="75" name="Text 73"/>
+          <p:cNvSpPr/>
+          <p:nvPr/>
+        </p:nvSpPr>
+        <p:spPr>
+          <a:xfrm>
+            <a:off x="3642086" y="1664208"/>
+            <a:ext cx="192725" cy="137160"/>
           </a:xfrm>
           <a:prstGeom prst="rect">
             <a:avLst/>
@@ -8505,14 +9182,14 @@
       </p:sp>
       <p:sp>
         <p:nvSpPr>
-          <p:cNvPr id="57" name="Text 55"/>
-          <p:cNvSpPr/>
-          <p:nvPr/>
-        </p:nvSpPr>
-        <p:spPr>
-          <a:xfrm>
-            <a:off x="5127202" y="1801368"/>
-            <a:ext cx="170052" cy="164592"/>
+          <p:cNvPr id="76" name="Text 74"/>
+          <p:cNvSpPr/>
+          <p:nvPr/>
+        </p:nvSpPr>
+        <p:spPr>
+          <a:xfrm>
+            <a:off x="3642086" y="1801368"/>
+            <a:ext cx="192725" cy="164592"/>
           </a:xfrm>
           <a:prstGeom prst="rect">
             <a:avLst/>
@@ -8538,7 +9215,7 @@
                 <a:ea typeface="Arial" pitchFamily="34" charset="-122"/>
                 <a:cs typeface="Arial" pitchFamily="34" charset="-120"/>
               </a:rPr>
-              <a:t>19</a:t>
+              <a:t>26</a:t>
             </a:r>
             <a:endParaRPr lang="ar-SA" sz="550" dirty="0"/>
           </a:p>
@@ -8546,14 +9223,14 @@
       </p:sp>
       <p:sp>
         <p:nvSpPr>
-          <p:cNvPr id="58" name="Shape 56"/>
-          <p:cNvSpPr/>
-          <p:nvPr/>
-        </p:nvSpPr>
-        <p:spPr>
-          <a:xfrm>
-            <a:off x="4957151" y="1664208"/>
-            <a:ext cx="170052" cy="301752"/>
+          <p:cNvPr id="77" name="Shape 75"/>
+          <p:cNvSpPr/>
+          <p:nvPr/>
+        </p:nvSpPr>
+        <p:spPr>
+          <a:xfrm>
+            <a:off x="3449361" y="1664208"/>
+            <a:ext cx="192725" cy="301752"/>
           </a:xfrm>
           <a:prstGeom prst="rect">
             <a:avLst/>
@@ -8571,14 +9248,14 @@
       </p:sp>
       <p:sp>
         <p:nvSpPr>
-          <p:cNvPr id="59" name="Text 57"/>
-          <p:cNvSpPr/>
-          <p:nvPr/>
-        </p:nvSpPr>
-        <p:spPr>
-          <a:xfrm>
-            <a:off x="4957151" y="1664208"/>
-            <a:ext cx="170052" cy="137160"/>
+          <p:cNvPr id="78" name="Text 76"/>
+          <p:cNvSpPr/>
+          <p:nvPr/>
+        </p:nvSpPr>
+        <p:spPr>
+          <a:xfrm>
+            <a:off x="3449361" y="1664208"/>
+            <a:ext cx="192725" cy="137160"/>
           </a:xfrm>
           <a:prstGeom prst="rect">
             <a:avLst/>
@@ -8612,14 +9289,14 @@
       </p:sp>
       <p:sp>
         <p:nvSpPr>
-          <p:cNvPr id="60" name="Text 58"/>
-          <p:cNvSpPr/>
-          <p:nvPr/>
-        </p:nvSpPr>
-        <p:spPr>
-          <a:xfrm>
-            <a:off x="4957151" y="1801368"/>
-            <a:ext cx="170052" cy="164592"/>
+          <p:cNvPr id="79" name="Text 77"/>
+          <p:cNvSpPr/>
+          <p:nvPr/>
+        </p:nvSpPr>
+        <p:spPr>
+          <a:xfrm>
+            <a:off x="3449361" y="1801368"/>
+            <a:ext cx="192725" cy="164592"/>
           </a:xfrm>
           <a:prstGeom prst="rect">
             <a:avLst/>
@@ -8645,7 +9322,7 @@
                 <a:ea typeface="Arial" pitchFamily="34" charset="-122"/>
                 <a:cs typeface="Arial" pitchFamily="34" charset="-120"/>
               </a:rPr>
-              <a:t>20</a:t>
+              <a:t>27</a:t>
             </a:r>
             <a:endParaRPr lang="ar-SA" sz="550" dirty="0"/>
           </a:p>
@@ -8653,14 +9330,14 @@
       </p:sp>
       <p:sp>
         <p:nvSpPr>
-          <p:cNvPr id="61" name="Shape 59"/>
-          <p:cNvSpPr/>
-          <p:nvPr/>
-        </p:nvSpPr>
-        <p:spPr>
-          <a:xfrm>
-            <a:off x="4787099" y="1664208"/>
-            <a:ext cx="170052" cy="301752"/>
+          <p:cNvPr id="80" name="Shape 78"/>
+          <p:cNvSpPr/>
+          <p:nvPr/>
+        </p:nvSpPr>
+        <p:spPr>
+          <a:xfrm>
+            <a:off x="3256636" y="1664208"/>
+            <a:ext cx="192725" cy="301752"/>
           </a:xfrm>
           <a:prstGeom prst="rect">
             <a:avLst/>
@@ -8678,14 +9355,14 @@
       </p:sp>
       <p:sp>
         <p:nvSpPr>
-          <p:cNvPr id="62" name="Text 60"/>
-          <p:cNvSpPr/>
-          <p:nvPr/>
-        </p:nvSpPr>
-        <p:spPr>
-          <a:xfrm>
-            <a:off x="4787099" y="1664208"/>
-            <a:ext cx="170052" cy="137160"/>
+          <p:cNvPr id="81" name="Text 79"/>
+          <p:cNvSpPr/>
+          <p:nvPr/>
+        </p:nvSpPr>
+        <p:spPr>
+          <a:xfrm>
+            <a:off x="3256636" y="1664208"/>
+            <a:ext cx="192725" cy="137160"/>
           </a:xfrm>
           <a:prstGeom prst="rect">
             <a:avLst/>
@@ -8719,14 +9396,14 @@
       </p:sp>
       <p:sp>
         <p:nvSpPr>
-          <p:cNvPr id="63" name="Text 61"/>
-          <p:cNvSpPr/>
-          <p:nvPr/>
-        </p:nvSpPr>
-        <p:spPr>
-          <a:xfrm>
-            <a:off x="4787099" y="1801368"/>
-            <a:ext cx="170052" cy="164592"/>
+          <p:cNvPr id="82" name="Text 80"/>
+          <p:cNvSpPr/>
+          <p:nvPr/>
+        </p:nvSpPr>
+        <p:spPr>
+          <a:xfrm>
+            <a:off x="3256636" y="1801368"/>
+            <a:ext cx="192725" cy="164592"/>
           </a:xfrm>
           <a:prstGeom prst="rect">
             <a:avLst/>
@@ -8752,7 +9429,7 @@
                 <a:ea typeface="Arial" pitchFamily="34" charset="-122"/>
                 <a:cs typeface="Arial" pitchFamily="34" charset="-120"/>
               </a:rPr>
-              <a:t>21</a:t>
+              <a:t>28</a:t>
             </a:r>
             <a:endParaRPr lang="ar-SA" sz="550" dirty="0"/>
           </a:p>
@@ -8760,14 +9437,14 @@
       </p:sp>
       <p:sp>
         <p:nvSpPr>
-          <p:cNvPr id="64" name="Shape 62"/>
-          <p:cNvSpPr/>
-          <p:nvPr/>
-        </p:nvSpPr>
-        <p:spPr>
-          <a:xfrm>
-            <a:off x="4617048" y="1664208"/>
-            <a:ext cx="170052" cy="301752"/>
+          <p:cNvPr id="83" name="Shape 81"/>
+          <p:cNvSpPr/>
+          <p:nvPr/>
+        </p:nvSpPr>
+        <p:spPr>
+          <a:xfrm>
+            <a:off x="3063911" y="1664208"/>
+            <a:ext cx="192725" cy="301752"/>
           </a:xfrm>
           <a:prstGeom prst="rect">
             <a:avLst/>
@@ -8785,14 +9462,14 @@
       </p:sp>
       <p:sp>
         <p:nvSpPr>
-          <p:cNvPr id="65" name="Text 63"/>
-          <p:cNvSpPr/>
-          <p:nvPr/>
-        </p:nvSpPr>
-        <p:spPr>
-          <a:xfrm>
-            <a:off x="4617048" y="1664208"/>
-            <a:ext cx="170052" cy="137160"/>
+          <p:cNvPr id="84" name="Text 82"/>
+          <p:cNvSpPr/>
+          <p:nvPr/>
+        </p:nvSpPr>
+        <p:spPr>
+          <a:xfrm>
+            <a:off x="3063911" y="1664208"/>
+            <a:ext cx="192725" cy="137160"/>
           </a:xfrm>
           <a:prstGeom prst="rect">
             <a:avLst/>
@@ -8826,14 +9503,14 @@
       </p:sp>
       <p:sp>
         <p:nvSpPr>
-          <p:cNvPr id="66" name="Text 64"/>
-          <p:cNvSpPr/>
-          <p:nvPr/>
-        </p:nvSpPr>
-        <p:spPr>
-          <a:xfrm>
-            <a:off x="4617048" y="1801368"/>
-            <a:ext cx="170052" cy="164592"/>
+          <p:cNvPr id="85" name="Text 83"/>
+          <p:cNvSpPr/>
+          <p:nvPr/>
+        </p:nvSpPr>
+        <p:spPr>
+          <a:xfrm>
+            <a:off x="3063911" y="1801368"/>
+            <a:ext cx="192725" cy="164592"/>
           </a:xfrm>
           <a:prstGeom prst="rect">
             <a:avLst/>
@@ -8859,7 +9536,7 @@
                 <a:ea typeface="Arial" pitchFamily="34" charset="-122"/>
                 <a:cs typeface="Arial" pitchFamily="34" charset="-120"/>
               </a:rPr>
-              <a:t>22</a:t>
+              <a:t>29</a:t>
             </a:r>
             <a:endParaRPr lang="ar-SA" sz="550" dirty="0"/>
           </a:p>
@@ -8867,20 +9544,20 @@
       </p:sp>
       <p:sp>
         <p:nvSpPr>
-          <p:cNvPr id="67" name="Shape 65"/>
-          <p:cNvSpPr/>
-          <p:nvPr/>
-        </p:nvSpPr>
-        <p:spPr>
-          <a:xfrm>
-            <a:off x="4446996" y="1664208"/>
-            <a:ext cx="170052" cy="301752"/>
-          </a:xfrm>
-          <a:prstGeom prst="rect">
-            <a:avLst/>
-          </a:prstGeom>
-          <a:solidFill>
-            <a:srgbClr val="DBE3E6"/>
+          <p:cNvPr id="86" name="Shape 84"/>
+          <p:cNvSpPr/>
+          <p:nvPr/>
+        </p:nvSpPr>
+        <p:spPr>
+          <a:xfrm>
+            <a:off x="2871186" y="1664208"/>
+            <a:ext cx="192725" cy="301752"/>
+          </a:xfrm>
+          <a:prstGeom prst="rect">
+            <a:avLst/>
+          </a:prstGeom>
+          <a:solidFill>
+            <a:srgbClr val="F4F7F8"/>
           </a:solidFill>
           <a:ln w="6350">
             <a:solidFill>
@@ -8892,14 +9569,14 @@
       </p:sp>
       <p:sp>
         <p:nvSpPr>
-          <p:cNvPr id="68" name="Text 66"/>
-          <p:cNvSpPr/>
-          <p:nvPr/>
-        </p:nvSpPr>
-        <p:spPr>
-          <a:xfrm>
-            <a:off x="4446996" y="1664208"/>
-            <a:ext cx="170052" cy="137160"/>
+          <p:cNvPr id="87" name="Text 85"/>
+          <p:cNvSpPr/>
+          <p:nvPr/>
+        </p:nvSpPr>
+        <p:spPr>
+          <a:xfrm>
+            <a:off x="2871186" y="1664208"/>
+            <a:ext cx="192725" cy="137160"/>
           </a:xfrm>
           <a:prstGeom prst="rect">
             <a:avLst/>
@@ -8919,7 +9596,7 @@
             <a:r>
               <a:rPr lang="ar-SA" altLang="en-US" sz="500" b="1" dirty="0">
                 <a:solidFill>
-                  <a:srgbClr val="8A959C"/>
+                  <a:srgbClr val="5A6A73"/>
                 </a:solidFill>
                 <a:latin typeface="Arial" pitchFamily="34" charset="0"/>
                 <a:ea typeface="Arial" pitchFamily="34" charset="-122"/>
@@ -8933,14 +9610,14 @@
       </p:sp>
       <p:sp>
         <p:nvSpPr>
-          <p:cNvPr id="69" name="Text 67"/>
-          <p:cNvSpPr/>
-          <p:nvPr/>
-        </p:nvSpPr>
-        <p:spPr>
-          <a:xfrm>
-            <a:off x="4446996" y="1801368"/>
-            <a:ext cx="170052" cy="164592"/>
+          <p:cNvPr id="88" name="Text 86"/>
+          <p:cNvSpPr/>
+          <p:nvPr/>
+        </p:nvSpPr>
+        <p:spPr>
+          <a:xfrm>
+            <a:off x="2871186" y="1801368"/>
+            <a:ext cx="192725" cy="164592"/>
           </a:xfrm>
           <a:prstGeom prst="rect">
             <a:avLst/>
@@ -8960,13 +9637,13 @@
             <a:r>
               <a:rPr lang="ar-SA" altLang="en-US" sz="550" b="1" dirty="0">
                 <a:solidFill>
-                  <a:srgbClr val="8A959C"/>
-                </a:solidFill>
-                <a:latin typeface="Arial" pitchFamily="34" charset="0"/>
-                <a:ea typeface="Arial" pitchFamily="34" charset="-122"/>
-                <a:cs typeface="Arial" pitchFamily="34" charset="-120"/>
-              </a:rPr>
-              <a:t>23</a:t>
+                  <a:srgbClr val="222222"/>
+                </a:solidFill>
+                <a:latin typeface="Arial" pitchFamily="34" charset="0"/>
+                <a:ea typeface="Arial" pitchFamily="34" charset="-122"/>
+                <a:cs typeface="Arial" pitchFamily="34" charset="-120"/>
+              </a:rPr>
+              <a:t>30</a:t>
             </a:r>
             <a:endParaRPr lang="ar-SA" sz="550" dirty="0"/>
           </a:p>
@@ -8974,43 +9651,14 @@
       </p:sp>
       <p:sp>
         <p:nvSpPr>
-          <p:cNvPr id="70" name="Shape 68"/>
-          <p:cNvSpPr/>
-          <p:nvPr/>
-        </p:nvSpPr>
-        <p:spPr>
-          <a:xfrm>
-            <a:off x="4446996" y="1965960"/>
-            <a:ext cx="170052" cy="2194560"/>
-          </a:xfrm>
-          <a:prstGeom prst="rect">
-            <a:avLst/>
-          </a:prstGeom>
-          <a:solidFill>
-            <a:srgbClr val="000000">
-              <a:alpha val="6000"/>
-            </a:srgbClr>
-          </a:solidFill>
-          <a:ln w="12700">
-            <a:solidFill>
-              <a:srgbClr val="000000">
-                <a:alpha val="0"/>
-              </a:srgbClr>
-            </a:solidFill>
-            <a:prstDash val="solid"/>
-          </a:ln>
-        </p:spPr>
-      </p:sp>
-      <p:sp>
-        <p:nvSpPr>
-          <p:cNvPr id="71" name="Shape 69"/>
-          <p:cNvSpPr/>
-          <p:nvPr/>
-        </p:nvSpPr>
-        <p:spPr>
-          <a:xfrm>
-            <a:off x="4276945" y="1664208"/>
-            <a:ext cx="170052" cy="301752"/>
+          <p:cNvPr id="89" name="Shape 87"/>
+          <p:cNvSpPr/>
+          <p:nvPr/>
+        </p:nvSpPr>
+        <p:spPr>
+          <a:xfrm>
+            <a:off x="2678460" y="1664208"/>
+            <a:ext cx="192725" cy="301752"/>
           </a:xfrm>
           <a:prstGeom prst="rect">
             <a:avLst/>
@@ -9028,14 +9676,14 @@
       </p:sp>
       <p:sp>
         <p:nvSpPr>
-          <p:cNvPr id="72" name="Text 70"/>
-          <p:cNvSpPr/>
-          <p:nvPr/>
-        </p:nvSpPr>
-        <p:spPr>
-          <a:xfrm>
-            <a:off x="4276945" y="1664208"/>
-            <a:ext cx="170052" cy="137160"/>
+          <p:cNvPr id="90" name="Text 88"/>
+          <p:cNvSpPr/>
+          <p:nvPr/>
+        </p:nvSpPr>
+        <p:spPr>
+          <a:xfrm>
+            <a:off x="2678460" y="1664208"/>
+            <a:ext cx="192725" cy="137160"/>
           </a:xfrm>
           <a:prstGeom prst="rect">
             <a:avLst/>
@@ -9069,14 +9717,14 @@
       </p:sp>
       <p:sp>
         <p:nvSpPr>
-          <p:cNvPr id="73" name="Text 71"/>
-          <p:cNvSpPr/>
-          <p:nvPr/>
-        </p:nvSpPr>
-        <p:spPr>
-          <a:xfrm>
-            <a:off x="4276945" y="1801368"/>
-            <a:ext cx="170052" cy="164592"/>
+          <p:cNvPr id="91" name="Text 89"/>
+          <p:cNvSpPr/>
+          <p:nvPr/>
+        </p:nvSpPr>
+        <p:spPr>
+          <a:xfrm>
+            <a:off x="2678460" y="1801368"/>
+            <a:ext cx="192725" cy="164592"/>
           </a:xfrm>
           <a:prstGeom prst="rect">
             <a:avLst/>
@@ -9102,7 +9750,7 @@
                 <a:ea typeface="Arial" pitchFamily="34" charset="-122"/>
                 <a:cs typeface="Arial" pitchFamily="34" charset="-120"/>
               </a:rPr>
-              <a:t>24</a:t>
+              <a:t>31</a:t>
             </a:r>
             <a:endParaRPr lang="ar-SA" sz="550" dirty="0"/>
           </a:p>
@@ -9110,13 +9758,13 @@
       </p:sp>
       <p:sp>
         <p:nvSpPr>
-          <p:cNvPr id="74" name="Shape 72"/>
-          <p:cNvSpPr/>
-          <p:nvPr/>
-        </p:nvSpPr>
-        <p:spPr>
-          <a:xfrm>
-            <a:off x="4446996" y="1965960"/>
+          <p:cNvPr id="92" name="Shape 90"/>
+          <p:cNvSpPr/>
+          <p:nvPr/>
+        </p:nvSpPr>
+        <p:spPr>
+          <a:xfrm>
+            <a:off x="2871186" y="1965960"/>
             <a:ext cx="0" cy="2194560"/>
           </a:xfrm>
           <a:prstGeom prst="line">
@@ -9133,14 +9781,14 @@
       </p:sp>
       <p:sp>
         <p:nvSpPr>
-          <p:cNvPr id="75" name="Shape 73"/>
-          <p:cNvSpPr/>
-          <p:nvPr/>
-        </p:nvSpPr>
-        <p:spPr>
-          <a:xfrm>
-            <a:off x="4106893" y="1664208"/>
-            <a:ext cx="170052" cy="301752"/>
+          <p:cNvPr id="93" name="Shape 91"/>
+          <p:cNvSpPr/>
+          <p:nvPr/>
+        </p:nvSpPr>
+        <p:spPr>
+          <a:xfrm>
+            <a:off x="2485735" y="1664208"/>
+            <a:ext cx="192725" cy="301752"/>
           </a:xfrm>
           <a:prstGeom prst="rect">
             <a:avLst/>
@@ -9158,14 +9806,14 @@
       </p:sp>
       <p:sp>
         <p:nvSpPr>
-          <p:cNvPr id="76" name="Text 74"/>
-          <p:cNvSpPr/>
-          <p:nvPr/>
-        </p:nvSpPr>
-        <p:spPr>
-          <a:xfrm>
-            <a:off x="4106893" y="1664208"/>
-            <a:ext cx="170052" cy="137160"/>
+          <p:cNvPr id="94" name="Text 92"/>
+          <p:cNvSpPr/>
+          <p:nvPr/>
+        </p:nvSpPr>
+        <p:spPr>
+          <a:xfrm>
+            <a:off x="2485735" y="1664208"/>
+            <a:ext cx="192725" cy="137160"/>
           </a:xfrm>
           <a:prstGeom prst="rect">
             <a:avLst/>
@@ -9199,14 +9847,14 @@
       </p:sp>
       <p:sp>
         <p:nvSpPr>
-          <p:cNvPr id="77" name="Text 75"/>
-          <p:cNvSpPr/>
-          <p:nvPr/>
-        </p:nvSpPr>
-        <p:spPr>
-          <a:xfrm>
-            <a:off x="4106893" y="1801368"/>
-            <a:ext cx="170052" cy="164592"/>
+          <p:cNvPr id="95" name="Text 93"/>
+          <p:cNvSpPr/>
+          <p:nvPr/>
+        </p:nvSpPr>
+        <p:spPr>
+          <a:xfrm>
+            <a:off x="2485735" y="1801368"/>
+            <a:ext cx="192725" cy="164592"/>
           </a:xfrm>
           <a:prstGeom prst="rect">
             <a:avLst/>
@@ -9232,7 +9880,7 @@
                 <a:ea typeface="Arial" pitchFamily="34" charset="-122"/>
                 <a:cs typeface="Arial" pitchFamily="34" charset="-120"/>
               </a:rPr>
-              <a:t>25</a:t>
+              <a:t>1</a:t>
             </a:r>
             <a:endParaRPr lang="ar-SA" sz="550" dirty="0"/>
           </a:p>
@@ -9240,14 +9888,14 @@
       </p:sp>
       <p:sp>
         <p:nvSpPr>
-          <p:cNvPr id="78" name="Shape 76"/>
-          <p:cNvSpPr/>
-          <p:nvPr/>
-        </p:nvSpPr>
-        <p:spPr>
-          <a:xfrm>
-            <a:off x="3936842" y="1664208"/>
-            <a:ext cx="170052" cy="301752"/>
+          <p:cNvPr id="96" name="Shape 94"/>
+          <p:cNvSpPr/>
+          <p:nvPr/>
+        </p:nvSpPr>
+        <p:spPr>
+          <a:xfrm>
+            <a:off x="2293010" y="1664208"/>
+            <a:ext cx="192725" cy="301752"/>
           </a:xfrm>
           <a:prstGeom prst="rect">
             <a:avLst/>
@@ -9265,14 +9913,14 @@
       </p:sp>
       <p:sp>
         <p:nvSpPr>
-          <p:cNvPr id="79" name="Text 77"/>
-          <p:cNvSpPr/>
-          <p:nvPr/>
-        </p:nvSpPr>
-        <p:spPr>
-          <a:xfrm>
-            <a:off x="3936842" y="1664208"/>
-            <a:ext cx="170052" cy="137160"/>
+          <p:cNvPr id="97" name="Text 95"/>
+          <p:cNvSpPr/>
+          <p:nvPr/>
+        </p:nvSpPr>
+        <p:spPr>
+          <a:xfrm>
+            <a:off x="2293010" y="1664208"/>
+            <a:ext cx="192725" cy="137160"/>
           </a:xfrm>
           <a:prstGeom prst="rect">
             <a:avLst/>
@@ -9306,14 +9954,14 @@
       </p:sp>
       <p:sp>
         <p:nvSpPr>
-          <p:cNvPr id="80" name="Text 78"/>
-          <p:cNvSpPr/>
-          <p:nvPr/>
-        </p:nvSpPr>
-        <p:spPr>
-          <a:xfrm>
-            <a:off x="3936842" y="1801368"/>
-            <a:ext cx="170052" cy="164592"/>
+          <p:cNvPr id="98" name="Text 96"/>
+          <p:cNvSpPr/>
+          <p:nvPr/>
+        </p:nvSpPr>
+        <p:spPr>
+          <a:xfrm>
+            <a:off x="2293010" y="1801368"/>
+            <a:ext cx="192725" cy="164592"/>
           </a:xfrm>
           <a:prstGeom prst="rect">
             <a:avLst/>
@@ -9339,7 +9987,7 @@
                 <a:ea typeface="Arial" pitchFamily="34" charset="-122"/>
                 <a:cs typeface="Arial" pitchFamily="34" charset="-120"/>
               </a:rPr>
-              <a:t>26</a:t>
+              <a:t>2</a:t>
             </a:r>
             <a:endParaRPr lang="ar-SA" sz="550" dirty="0"/>
           </a:p>
@@ -9347,14 +9995,14 @@
       </p:sp>
       <p:sp>
         <p:nvSpPr>
-          <p:cNvPr id="81" name="Shape 79"/>
-          <p:cNvSpPr/>
-          <p:nvPr/>
-        </p:nvSpPr>
-        <p:spPr>
-          <a:xfrm>
-            <a:off x="3766790" y="1664208"/>
-            <a:ext cx="170052" cy="301752"/>
+          <p:cNvPr id="99" name="Shape 97"/>
+          <p:cNvSpPr/>
+          <p:nvPr/>
+        </p:nvSpPr>
+        <p:spPr>
+          <a:xfrm>
+            <a:off x="2100285" y="1664208"/>
+            <a:ext cx="192725" cy="301752"/>
           </a:xfrm>
           <a:prstGeom prst="rect">
             <a:avLst/>
@@ -9372,14 +10020,14 @@
       </p:sp>
       <p:sp>
         <p:nvSpPr>
-          <p:cNvPr id="82" name="Text 80"/>
-          <p:cNvSpPr/>
-          <p:nvPr/>
-        </p:nvSpPr>
-        <p:spPr>
-          <a:xfrm>
-            <a:off x="3766790" y="1664208"/>
-            <a:ext cx="170052" cy="137160"/>
+          <p:cNvPr id="100" name="Text 98"/>
+          <p:cNvSpPr/>
+          <p:nvPr/>
+        </p:nvSpPr>
+        <p:spPr>
+          <a:xfrm>
+            <a:off x="2100285" y="1664208"/>
+            <a:ext cx="192725" cy="137160"/>
           </a:xfrm>
           <a:prstGeom prst="rect">
             <a:avLst/>
@@ -9413,14 +10061,14 @@
       </p:sp>
       <p:sp>
         <p:nvSpPr>
-          <p:cNvPr id="83" name="Text 81"/>
-          <p:cNvSpPr/>
-          <p:nvPr/>
-        </p:nvSpPr>
-        <p:spPr>
-          <a:xfrm>
-            <a:off x="3766790" y="1801368"/>
-            <a:ext cx="170052" cy="164592"/>
+          <p:cNvPr id="101" name="Text 99"/>
+          <p:cNvSpPr/>
+          <p:nvPr/>
+        </p:nvSpPr>
+        <p:spPr>
+          <a:xfrm>
+            <a:off x="2100285" y="1801368"/>
+            <a:ext cx="192725" cy="164592"/>
           </a:xfrm>
           <a:prstGeom prst="rect">
             <a:avLst/>
@@ -9446,7 +10094,7 @@
                 <a:ea typeface="Arial" pitchFamily="34" charset="-122"/>
                 <a:cs typeface="Arial" pitchFamily="34" charset="-120"/>
               </a:rPr>
-              <a:t>27</a:t>
+              <a:t>3</a:t>
             </a:r>
             <a:endParaRPr lang="ar-SA" sz="550" dirty="0"/>
           </a:p>
@@ -9454,14 +10102,14 @@
       </p:sp>
       <p:sp>
         <p:nvSpPr>
-          <p:cNvPr id="84" name="Shape 82"/>
-          <p:cNvSpPr/>
-          <p:nvPr/>
-        </p:nvSpPr>
-        <p:spPr>
-          <a:xfrm>
-            <a:off x="3596739" y="1664208"/>
-            <a:ext cx="170052" cy="301752"/>
+          <p:cNvPr id="102" name="Shape 100"/>
+          <p:cNvSpPr/>
+          <p:nvPr/>
+        </p:nvSpPr>
+        <p:spPr>
+          <a:xfrm>
+            <a:off x="1907560" y="1664208"/>
+            <a:ext cx="192725" cy="301752"/>
           </a:xfrm>
           <a:prstGeom prst="rect">
             <a:avLst/>
@@ -9479,14 +10127,14 @@
       </p:sp>
       <p:sp>
         <p:nvSpPr>
-          <p:cNvPr id="85" name="Text 83"/>
-          <p:cNvSpPr/>
-          <p:nvPr/>
-        </p:nvSpPr>
-        <p:spPr>
-          <a:xfrm>
-            <a:off x="3596739" y="1664208"/>
-            <a:ext cx="170052" cy="137160"/>
+          <p:cNvPr id="103" name="Text 101"/>
+          <p:cNvSpPr/>
+          <p:nvPr/>
+        </p:nvSpPr>
+        <p:spPr>
+          <a:xfrm>
+            <a:off x="1907560" y="1664208"/>
+            <a:ext cx="192725" cy="137160"/>
           </a:xfrm>
           <a:prstGeom prst="rect">
             <a:avLst/>
@@ -9520,14 +10168,14 @@
       </p:sp>
       <p:sp>
         <p:nvSpPr>
-          <p:cNvPr id="86" name="Text 84"/>
-          <p:cNvSpPr/>
-          <p:nvPr/>
-        </p:nvSpPr>
-        <p:spPr>
-          <a:xfrm>
-            <a:off x="3596739" y="1801368"/>
-            <a:ext cx="170052" cy="164592"/>
+          <p:cNvPr id="104" name="Text 102"/>
+          <p:cNvSpPr/>
+          <p:nvPr/>
+        </p:nvSpPr>
+        <p:spPr>
+          <a:xfrm>
+            <a:off x="1907560" y="1801368"/>
+            <a:ext cx="192725" cy="164592"/>
           </a:xfrm>
           <a:prstGeom prst="rect">
             <a:avLst/>
@@ -9553,7 +10201,7 @@
                 <a:ea typeface="Arial" pitchFamily="34" charset="-122"/>
                 <a:cs typeface="Arial" pitchFamily="34" charset="-120"/>
               </a:rPr>
-              <a:t>28</a:t>
+              <a:t>4</a:t>
             </a:r>
             <a:endParaRPr lang="ar-SA" sz="550" dirty="0"/>
           </a:p>
@@ -9561,14 +10209,14 @@
       </p:sp>
       <p:sp>
         <p:nvSpPr>
-          <p:cNvPr id="87" name="Shape 85"/>
-          <p:cNvSpPr/>
-          <p:nvPr/>
-        </p:nvSpPr>
-        <p:spPr>
-          <a:xfrm>
-            <a:off x="3426687" y="1664208"/>
-            <a:ext cx="170052" cy="301752"/>
+          <p:cNvPr id="105" name="Shape 103"/>
+          <p:cNvSpPr/>
+          <p:nvPr/>
+        </p:nvSpPr>
+        <p:spPr>
+          <a:xfrm>
+            <a:off x="1714835" y="1664208"/>
+            <a:ext cx="192725" cy="301752"/>
           </a:xfrm>
           <a:prstGeom prst="rect">
             <a:avLst/>
@@ -9586,14 +10234,14 @@
       </p:sp>
       <p:sp>
         <p:nvSpPr>
-          <p:cNvPr id="88" name="Text 86"/>
-          <p:cNvSpPr/>
-          <p:nvPr/>
-        </p:nvSpPr>
-        <p:spPr>
-          <a:xfrm>
-            <a:off x="3426687" y="1664208"/>
-            <a:ext cx="170052" cy="137160"/>
+          <p:cNvPr id="106" name="Text 104"/>
+          <p:cNvSpPr/>
+          <p:nvPr/>
+        </p:nvSpPr>
+        <p:spPr>
+          <a:xfrm>
+            <a:off x="1714835" y="1664208"/>
+            <a:ext cx="192725" cy="137160"/>
           </a:xfrm>
           <a:prstGeom prst="rect">
             <a:avLst/>
@@ -9627,14 +10275,14 @@
       </p:sp>
       <p:sp>
         <p:nvSpPr>
-          <p:cNvPr id="89" name="Text 87"/>
-          <p:cNvSpPr/>
-          <p:nvPr/>
-        </p:nvSpPr>
-        <p:spPr>
-          <a:xfrm>
-            <a:off x="3426687" y="1801368"/>
-            <a:ext cx="170052" cy="164592"/>
+          <p:cNvPr id="107" name="Text 105"/>
+          <p:cNvSpPr/>
+          <p:nvPr/>
+        </p:nvSpPr>
+        <p:spPr>
+          <a:xfrm>
+            <a:off x="1714835" y="1801368"/>
+            <a:ext cx="192725" cy="164592"/>
           </a:xfrm>
           <a:prstGeom prst="rect">
             <a:avLst/>
@@ -9660,7 +10308,7 @@
                 <a:ea typeface="Arial" pitchFamily="34" charset="-122"/>
                 <a:cs typeface="Arial" pitchFamily="34" charset="-120"/>
               </a:rPr>
-              <a:t>29</a:t>
+              <a:t>5</a:t>
             </a:r>
             <a:endParaRPr lang="ar-SA" sz="550" dirty="0"/>
           </a:p>
@@ -9668,20 +10316,20 @@
       </p:sp>
       <p:sp>
         <p:nvSpPr>
-          <p:cNvPr id="90" name="Shape 88"/>
-          <p:cNvSpPr/>
-          <p:nvPr/>
-        </p:nvSpPr>
-        <p:spPr>
-          <a:xfrm>
-            <a:off x="3256636" y="1664208"/>
-            <a:ext cx="170052" cy="301752"/>
-          </a:xfrm>
-          <a:prstGeom prst="rect">
-            <a:avLst/>
-          </a:prstGeom>
-          <a:solidFill>
-            <a:srgbClr val="DBE3E6"/>
+          <p:cNvPr id="108" name="Shape 106"/>
+          <p:cNvSpPr/>
+          <p:nvPr/>
+        </p:nvSpPr>
+        <p:spPr>
+          <a:xfrm>
+            <a:off x="1522110" y="1664208"/>
+            <a:ext cx="192725" cy="301752"/>
+          </a:xfrm>
+          <a:prstGeom prst="rect">
+            <a:avLst/>
+          </a:prstGeom>
+          <a:solidFill>
+            <a:srgbClr val="F4F7F8"/>
           </a:solidFill>
           <a:ln w="6350">
             <a:solidFill>
@@ -9693,14 +10341,14 @@
       </p:sp>
       <p:sp>
         <p:nvSpPr>
-          <p:cNvPr id="91" name="Text 89"/>
-          <p:cNvSpPr/>
-          <p:nvPr/>
-        </p:nvSpPr>
-        <p:spPr>
-          <a:xfrm>
-            <a:off x="3256636" y="1664208"/>
-            <a:ext cx="170052" cy="137160"/>
+          <p:cNvPr id="109" name="Text 107"/>
+          <p:cNvSpPr/>
+          <p:nvPr/>
+        </p:nvSpPr>
+        <p:spPr>
+          <a:xfrm>
+            <a:off x="1522110" y="1664208"/>
+            <a:ext cx="192725" cy="137160"/>
           </a:xfrm>
           <a:prstGeom prst="rect">
             <a:avLst/>
@@ -9720,7 +10368,7 @@
             <a:r>
               <a:rPr lang="ar-SA" altLang="en-US" sz="500" b="1" dirty="0">
                 <a:solidFill>
-                  <a:srgbClr val="8A959C"/>
+                  <a:srgbClr val="5A6A73"/>
                 </a:solidFill>
                 <a:latin typeface="Arial" pitchFamily="34" charset="0"/>
                 <a:ea typeface="Arial" pitchFamily="34" charset="-122"/>
@@ -9734,14 +10382,14 @@
       </p:sp>
       <p:sp>
         <p:nvSpPr>
-          <p:cNvPr id="92" name="Text 90"/>
-          <p:cNvSpPr/>
-          <p:nvPr/>
-        </p:nvSpPr>
-        <p:spPr>
-          <a:xfrm>
-            <a:off x="3256636" y="1801368"/>
-            <a:ext cx="170052" cy="164592"/>
+          <p:cNvPr id="110" name="Text 108"/>
+          <p:cNvSpPr/>
+          <p:nvPr/>
+        </p:nvSpPr>
+        <p:spPr>
+          <a:xfrm>
+            <a:off x="1522110" y="1801368"/>
+            <a:ext cx="192725" cy="164592"/>
           </a:xfrm>
           <a:prstGeom prst="rect">
             <a:avLst/>
@@ -9761,13 +10409,13 @@
             <a:r>
               <a:rPr lang="ar-SA" altLang="en-US" sz="550" b="1" dirty="0">
                 <a:solidFill>
-                  <a:srgbClr val="8A959C"/>
-                </a:solidFill>
-                <a:latin typeface="Arial" pitchFamily="34" charset="0"/>
-                <a:ea typeface="Arial" pitchFamily="34" charset="-122"/>
-                <a:cs typeface="Arial" pitchFamily="34" charset="-120"/>
-              </a:rPr>
-              <a:t>30</a:t>
+                  <a:srgbClr val="222222"/>
+                </a:solidFill>
+                <a:latin typeface="Arial" pitchFamily="34" charset="0"/>
+                <a:ea typeface="Arial" pitchFamily="34" charset="-122"/>
+                <a:cs typeface="Arial" pitchFamily="34" charset="-120"/>
+              </a:rPr>
+              <a:t>6</a:t>
             </a:r>
             <a:endParaRPr lang="ar-SA" sz="550" dirty="0"/>
           </a:p>
@@ -9775,43 +10423,14 @@
       </p:sp>
       <p:sp>
         <p:nvSpPr>
-          <p:cNvPr id="93" name="Shape 91"/>
-          <p:cNvSpPr/>
-          <p:nvPr/>
-        </p:nvSpPr>
-        <p:spPr>
-          <a:xfrm>
-            <a:off x="3256636" y="1965960"/>
-            <a:ext cx="170052" cy="2194560"/>
-          </a:xfrm>
-          <a:prstGeom prst="rect">
-            <a:avLst/>
-          </a:prstGeom>
-          <a:solidFill>
-            <a:srgbClr val="000000">
-              <a:alpha val="6000"/>
-            </a:srgbClr>
-          </a:solidFill>
-          <a:ln w="12700">
-            <a:solidFill>
-              <a:srgbClr val="000000">
-                <a:alpha val="0"/>
-              </a:srgbClr>
-            </a:solidFill>
-            <a:prstDash val="solid"/>
-          </a:ln>
-        </p:spPr>
-      </p:sp>
-      <p:sp>
-        <p:nvSpPr>
-          <p:cNvPr id="94" name="Shape 92"/>
-          <p:cNvSpPr/>
-          <p:nvPr/>
-        </p:nvSpPr>
-        <p:spPr>
-          <a:xfrm>
-            <a:off x="3086584" y="1664208"/>
-            <a:ext cx="170052" cy="301752"/>
+          <p:cNvPr id="111" name="Shape 109"/>
+          <p:cNvSpPr/>
+          <p:nvPr/>
+        </p:nvSpPr>
+        <p:spPr>
+          <a:xfrm>
+            <a:off x="1329385" y="1664208"/>
+            <a:ext cx="192725" cy="301752"/>
           </a:xfrm>
           <a:prstGeom prst="rect">
             <a:avLst/>
@@ -9829,14 +10448,14 @@
       </p:sp>
       <p:sp>
         <p:nvSpPr>
-          <p:cNvPr id="95" name="Text 93"/>
-          <p:cNvSpPr/>
-          <p:nvPr/>
-        </p:nvSpPr>
-        <p:spPr>
-          <a:xfrm>
-            <a:off x="3086584" y="1664208"/>
-            <a:ext cx="170052" cy="137160"/>
+          <p:cNvPr id="112" name="Text 110"/>
+          <p:cNvSpPr/>
+          <p:nvPr/>
+        </p:nvSpPr>
+        <p:spPr>
+          <a:xfrm>
+            <a:off x="1329385" y="1664208"/>
+            <a:ext cx="192725" cy="137160"/>
           </a:xfrm>
           <a:prstGeom prst="rect">
             <a:avLst/>
@@ -9870,14 +10489,14 @@
       </p:sp>
       <p:sp>
         <p:nvSpPr>
-          <p:cNvPr id="96" name="Text 94"/>
-          <p:cNvSpPr/>
-          <p:nvPr/>
-        </p:nvSpPr>
-        <p:spPr>
-          <a:xfrm>
-            <a:off x="3086584" y="1801368"/>
-            <a:ext cx="170052" cy="164592"/>
+          <p:cNvPr id="113" name="Text 111"/>
+          <p:cNvSpPr/>
+          <p:nvPr/>
+        </p:nvSpPr>
+        <p:spPr>
+          <a:xfrm>
+            <a:off x="1329385" y="1801368"/>
+            <a:ext cx="192725" cy="164592"/>
           </a:xfrm>
           <a:prstGeom prst="rect">
             <a:avLst/>
@@ -9903,7 +10522,7 @@
                 <a:ea typeface="Arial" pitchFamily="34" charset="-122"/>
                 <a:cs typeface="Arial" pitchFamily="34" charset="-120"/>
               </a:rPr>
-              <a:t>31</a:t>
+              <a:t>7</a:t>
             </a:r>
             <a:endParaRPr lang="ar-SA" sz="550" dirty="0"/>
           </a:p>
@@ -9911,13 +10530,13 @@
       </p:sp>
       <p:sp>
         <p:nvSpPr>
-          <p:cNvPr id="97" name="Shape 95"/>
-          <p:cNvSpPr/>
-          <p:nvPr/>
-        </p:nvSpPr>
-        <p:spPr>
-          <a:xfrm>
-            <a:off x="3256636" y="1965960"/>
+          <p:cNvPr id="114" name="Shape 112"/>
+          <p:cNvSpPr/>
+          <p:nvPr/>
+        </p:nvSpPr>
+        <p:spPr>
+          <a:xfrm>
+            <a:off x="1522110" y="1965960"/>
             <a:ext cx="0" cy="2194560"/>
           </a:xfrm>
           <a:prstGeom prst="line">
@@ -9934,14 +10553,14 @@
       </p:sp>
       <p:sp>
         <p:nvSpPr>
-          <p:cNvPr id="98" name="Shape 96"/>
-          <p:cNvSpPr/>
-          <p:nvPr/>
-        </p:nvSpPr>
-        <p:spPr>
-          <a:xfrm>
-            <a:off x="2916533" y="1664208"/>
-            <a:ext cx="170052" cy="301752"/>
+          <p:cNvPr id="115" name="Shape 113"/>
+          <p:cNvSpPr/>
+          <p:nvPr/>
+        </p:nvSpPr>
+        <p:spPr>
+          <a:xfrm>
+            <a:off x="1136660" y="1664208"/>
+            <a:ext cx="192725" cy="301752"/>
           </a:xfrm>
           <a:prstGeom prst="rect">
             <a:avLst/>
@@ -9959,14 +10578,14 @@
       </p:sp>
       <p:sp>
         <p:nvSpPr>
-          <p:cNvPr id="99" name="Text 97"/>
-          <p:cNvSpPr/>
-          <p:nvPr/>
-        </p:nvSpPr>
-        <p:spPr>
-          <a:xfrm>
-            <a:off x="2916533" y="1664208"/>
-            <a:ext cx="170052" cy="137160"/>
+          <p:cNvPr id="116" name="Text 114"/>
+          <p:cNvSpPr/>
+          <p:nvPr/>
+        </p:nvSpPr>
+        <p:spPr>
+          <a:xfrm>
+            <a:off x="1136660" y="1664208"/>
+            <a:ext cx="192725" cy="137160"/>
           </a:xfrm>
           <a:prstGeom prst="rect">
             <a:avLst/>
@@ -10000,14 +10619,14 @@
       </p:sp>
       <p:sp>
         <p:nvSpPr>
-          <p:cNvPr id="100" name="Text 98"/>
-          <p:cNvSpPr/>
-          <p:nvPr/>
-        </p:nvSpPr>
-        <p:spPr>
-          <a:xfrm>
-            <a:off x="2916533" y="1801368"/>
-            <a:ext cx="170052" cy="164592"/>
+          <p:cNvPr id="117" name="Text 115"/>
+          <p:cNvSpPr/>
+          <p:nvPr/>
+        </p:nvSpPr>
+        <p:spPr>
+          <a:xfrm>
+            <a:off x="1136660" y="1801368"/>
+            <a:ext cx="192725" cy="164592"/>
           </a:xfrm>
           <a:prstGeom prst="rect">
             <a:avLst/>
@@ -10033,7 +10652,7 @@
                 <a:ea typeface="Arial" pitchFamily="34" charset="-122"/>
                 <a:cs typeface="Arial" pitchFamily="34" charset="-120"/>
               </a:rPr>
-              <a:t>1</a:t>
+              <a:t>8</a:t>
             </a:r>
             <a:endParaRPr lang="ar-SA" sz="550" dirty="0"/>
           </a:p>
@@ -10041,14 +10660,14 @@
       </p:sp>
       <p:sp>
         <p:nvSpPr>
-          <p:cNvPr id="101" name="Shape 99"/>
-          <p:cNvSpPr/>
-          <p:nvPr/>
-        </p:nvSpPr>
-        <p:spPr>
-          <a:xfrm>
-            <a:off x="2746481" y="1664208"/>
-            <a:ext cx="170052" cy="301752"/>
+          <p:cNvPr id="118" name="Shape 116"/>
+          <p:cNvSpPr/>
+          <p:nvPr/>
+        </p:nvSpPr>
+        <p:spPr>
+          <a:xfrm>
+            <a:off x="943935" y="1664208"/>
+            <a:ext cx="192725" cy="301752"/>
           </a:xfrm>
           <a:prstGeom prst="rect">
             <a:avLst/>
@@ -10066,14 +10685,14 @@
       </p:sp>
       <p:sp>
         <p:nvSpPr>
-          <p:cNvPr id="102" name="Text 100"/>
-          <p:cNvSpPr/>
-          <p:nvPr/>
-        </p:nvSpPr>
-        <p:spPr>
-          <a:xfrm>
-            <a:off x="2746481" y="1664208"/>
-            <a:ext cx="170052" cy="137160"/>
+          <p:cNvPr id="119" name="Text 117"/>
+          <p:cNvSpPr/>
+          <p:nvPr/>
+        </p:nvSpPr>
+        <p:spPr>
+          <a:xfrm>
+            <a:off x="943935" y="1664208"/>
+            <a:ext cx="192725" cy="137160"/>
           </a:xfrm>
           <a:prstGeom prst="rect">
             <a:avLst/>
@@ -10107,14 +10726,14 @@
       </p:sp>
       <p:sp>
         <p:nvSpPr>
-          <p:cNvPr id="103" name="Text 101"/>
-          <p:cNvSpPr/>
-          <p:nvPr/>
-        </p:nvSpPr>
-        <p:spPr>
-          <a:xfrm>
-            <a:off x="2746481" y="1801368"/>
-            <a:ext cx="170052" cy="164592"/>
+          <p:cNvPr id="120" name="Text 118"/>
+          <p:cNvSpPr/>
+          <p:nvPr/>
+        </p:nvSpPr>
+        <p:spPr>
+          <a:xfrm>
+            <a:off x="943935" y="1801368"/>
+            <a:ext cx="192725" cy="164592"/>
           </a:xfrm>
           <a:prstGeom prst="rect">
             <a:avLst/>
@@ -10140,7 +10759,7 @@
                 <a:ea typeface="Arial" pitchFamily="34" charset="-122"/>
                 <a:cs typeface="Arial" pitchFamily="34" charset="-120"/>
               </a:rPr>
-              <a:t>2</a:t>
+              <a:t>9</a:t>
             </a:r>
             <a:endParaRPr lang="ar-SA" sz="550" dirty="0"/>
           </a:p>
@@ -10148,14 +10767,14 @@
       </p:sp>
       <p:sp>
         <p:nvSpPr>
-          <p:cNvPr id="104" name="Shape 102"/>
-          <p:cNvSpPr/>
-          <p:nvPr/>
-        </p:nvSpPr>
-        <p:spPr>
-          <a:xfrm>
-            <a:off x="2576430" y="1664208"/>
-            <a:ext cx="170052" cy="301752"/>
+          <p:cNvPr id="121" name="Shape 119"/>
+          <p:cNvSpPr/>
+          <p:nvPr/>
+        </p:nvSpPr>
+        <p:spPr>
+          <a:xfrm>
+            <a:off x="751210" y="1664208"/>
+            <a:ext cx="192725" cy="301752"/>
           </a:xfrm>
           <a:prstGeom prst="rect">
             <a:avLst/>
@@ -10173,14 +10792,14 @@
       </p:sp>
       <p:sp>
         <p:nvSpPr>
-          <p:cNvPr id="105" name="Text 103"/>
-          <p:cNvSpPr/>
-          <p:nvPr/>
-        </p:nvSpPr>
-        <p:spPr>
-          <a:xfrm>
-            <a:off x="2576430" y="1664208"/>
-            <a:ext cx="170052" cy="137160"/>
+          <p:cNvPr id="122" name="Text 120"/>
+          <p:cNvSpPr/>
+          <p:nvPr/>
+        </p:nvSpPr>
+        <p:spPr>
+          <a:xfrm>
+            <a:off x="751210" y="1664208"/>
+            <a:ext cx="192725" cy="137160"/>
           </a:xfrm>
           <a:prstGeom prst="rect">
             <a:avLst/>
@@ -10214,14 +10833,14 @@
       </p:sp>
       <p:sp>
         <p:nvSpPr>
-          <p:cNvPr id="106" name="Text 104"/>
-          <p:cNvSpPr/>
-          <p:nvPr/>
-        </p:nvSpPr>
-        <p:spPr>
-          <a:xfrm>
-            <a:off x="2576430" y="1801368"/>
-            <a:ext cx="170052" cy="164592"/>
+          <p:cNvPr id="123" name="Text 121"/>
+          <p:cNvSpPr/>
+          <p:nvPr/>
+        </p:nvSpPr>
+        <p:spPr>
+          <a:xfrm>
+            <a:off x="751210" y="1801368"/>
+            <a:ext cx="192725" cy="164592"/>
           </a:xfrm>
           <a:prstGeom prst="rect">
             <a:avLst/>
@@ -10247,7 +10866,7 @@
                 <a:ea typeface="Arial" pitchFamily="34" charset="-122"/>
                 <a:cs typeface="Arial" pitchFamily="34" charset="-120"/>
               </a:rPr>
-              <a:t>3</a:t>
+              <a:t>10</a:t>
             </a:r>
             <a:endParaRPr lang="ar-SA" sz="550" dirty="0"/>
           </a:p>
@@ -10255,14 +10874,14 @@
       </p:sp>
       <p:sp>
         <p:nvSpPr>
-          <p:cNvPr id="107" name="Shape 105"/>
-          <p:cNvSpPr/>
-          <p:nvPr/>
-        </p:nvSpPr>
-        <p:spPr>
-          <a:xfrm>
-            <a:off x="2406378" y="1664208"/>
-            <a:ext cx="170052" cy="301752"/>
+          <p:cNvPr id="124" name="Shape 122"/>
+          <p:cNvSpPr/>
+          <p:nvPr/>
+        </p:nvSpPr>
+        <p:spPr>
+          <a:xfrm>
+            <a:off x="558485" y="1664208"/>
+            <a:ext cx="192725" cy="301752"/>
           </a:xfrm>
           <a:prstGeom prst="rect">
             <a:avLst/>
@@ -10280,14 +10899,14 @@
       </p:sp>
       <p:sp>
         <p:nvSpPr>
-          <p:cNvPr id="108" name="Text 106"/>
-          <p:cNvSpPr/>
-          <p:nvPr/>
-        </p:nvSpPr>
-        <p:spPr>
-          <a:xfrm>
-            <a:off x="2406378" y="1664208"/>
-            <a:ext cx="170052" cy="137160"/>
+          <p:cNvPr id="125" name="Text 123"/>
+          <p:cNvSpPr/>
+          <p:nvPr/>
+        </p:nvSpPr>
+        <p:spPr>
+          <a:xfrm>
+            <a:off x="558485" y="1664208"/>
+            <a:ext cx="192725" cy="137160"/>
           </a:xfrm>
           <a:prstGeom prst="rect">
             <a:avLst/>
@@ -10321,14 +10940,14 @@
       </p:sp>
       <p:sp>
         <p:nvSpPr>
-          <p:cNvPr id="109" name="Text 107"/>
-          <p:cNvSpPr/>
-          <p:nvPr/>
-        </p:nvSpPr>
-        <p:spPr>
-          <a:xfrm>
-            <a:off x="2406378" y="1801368"/>
-            <a:ext cx="170052" cy="164592"/>
+          <p:cNvPr id="126" name="Text 124"/>
+          <p:cNvSpPr/>
+          <p:nvPr/>
+        </p:nvSpPr>
+        <p:spPr>
+          <a:xfrm>
+            <a:off x="558485" y="1801368"/>
+            <a:ext cx="192725" cy="164592"/>
           </a:xfrm>
           <a:prstGeom prst="rect">
             <a:avLst/>
@@ -10354,7 +10973,7 @@
                 <a:ea typeface="Arial" pitchFamily="34" charset="-122"/>
                 <a:cs typeface="Arial" pitchFamily="34" charset="-120"/>
               </a:rPr>
-              <a:t>4</a:t>
+              <a:t>11</a:t>
             </a:r>
             <a:endParaRPr lang="ar-SA" sz="550" dirty="0"/>
           </a:p>
@@ -10362,14 +10981,14 @@
       </p:sp>
       <p:sp>
         <p:nvSpPr>
-          <p:cNvPr id="110" name="Shape 108"/>
-          <p:cNvSpPr/>
-          <p:nvPr/>
-        </p:nvSpPr>
-        <p:spPr>
-          <a:xfrm>
-            <a:off x="2236327" y="1664208"/>
-            <a:ext cx="170052" cy="301752"/>
+          <p:cNvPr id="127" name="Shape 125"/>
+          <p:cNvSpPr/>
+          <p:nvPr/>
+        </p:nvSpPr>
+        <p:spPr>
+          <a:xfrm>
+            <a:off x="365760" y="1664208"/>
+            <a:ext cx="192725" cy="301752"/>
           </a:xfrm>
           <a:prstGeom prst="rect">
             <a:avLst/>
@@ -10387,14 +11006,14 @@
       </p:sp>
       <p:sp>
         <p:nvSpPr>
-          <p:cNvPr id="111" name="Text 109"/>
-          <p:cNvSpPr/>
-          <p:nvPr/>
-        </p:nvSpPr>
-        <p:spPr>
-          <a:xfrm>
-            <a:off x="2236327" y="1664208"/>
-            <a:ext cx="170052" cy="137160"/>
+          <p:cNvPr id="128" name="Text 126"/>
+          <p:cNvSpPr/>
+          <p:nvPr/>
+        </p:nvSpPr>
+        <p:spPr>
+          <a:xfrm>
+            <a:off x="365760" y="1664208"/>
+            <a:ext cx="192725" cy="137160"/>
           </a:xfrm>
           <a:prstGeom prst="rect">
             <a:avLst/>
@@ -10428,14 +11047,14 @@
       </p:sp>
       <p:sp>
         <p:nvSpPr>
-          <p:cNvPr id="112" name="Text 110"/>
-          <p:cNvSpPr/>
-          <p:nvPr/>
-        </p:nvSpPr>
-        <p:spPr>
-          <a:xfrm>
-            <a:off x="2236327" y="1801368"/>
-            <a:ext cx="170052" cy="164592"/>
+          <p:cNvPr id="129" name="Text 127"/>
+          <p:cNvSpPr/>
+          <p:nvPr/>
+        </p:nvSpPr>
+        <p:spPr>
+          <a:xfrm>
+            <a:off x="365760" y="1801368"/>
+            <a:ext cx="192725" cy="164592"/>
           </a:xfrm>
           <a:prstGeom prst="rect">
             <a:avLst/>
@@ -10461,7 +11080,7 @@
                 <a:ea typeface="Arial" pitchFamily="34" charset="-122"/>
                 <a:cs typeface="Arial" pitchFamily="34" charset="-120"/>
               </a:rPr>
-              <a:t>5</a:t>
+              <a:t>12</a:t>
             </a:r>
             <a:endParaRPr lang="ar-SA" sz="550" dirty="0"/>
           </a:p>
@@ -10469,1288 +11088,7 @@
       </p:sp>
       <p:sp>
         <p:nvSpPr>
-          <p:cNvPr id="113" name="Shape 111"/>
-          <p:cNvSpPr/>
-          <p:nvPr/>
-        </p:nvSpPr>
-        <p:spPr>
-          <a:xfrm>
-            <a:off x="2066275" y="1664208"/>
-            <a:ext cx="170052" cy="301752"/>
-          </a:xfrm>
-          <a:prstGeom prst="rect">
-            <a:avLst/>
-          </a:prstGeom>
-          <a:solidFill>
-            <a:srgbClr val="DBE3E6"/>
-          </a:solidFill>
-          <a:ln w="6350">
-            <a:solidFill>
-              <a:srgbClr val="FFFFFF"/>
-            </a:solidFill>
-            <a:prstDash val="solid"/>
-          </a:ln>
-        </p:spPr>
-      </p:sp>
-      <p:sp>
-        <p:nvSpPr>
-          <p:cNvPr id="114" name="Text 112"/>
-          <p:cNvSpPr/>
-          <p:nvPr/>
-        </p:nvSpPr>
-        <p:spPr>
-          <a:xfrm>
-            <a:off x="2066275" y="1664208"/>
-            <a:ext cx="170052" cy="137160"/>
-          </a:xfrm>
-          <a:prstGeom prst="rect">
-            <a:avLst/>
-          </a:prstGeom>
-          <a:noFill/>
-          <a:ln/>
-        </p:spPr>
-        <p:txBody>
-          <a:bodyPr wrap="square" lIns="0" tIns="0" rIns="0" bIns="0" rtlCol="0" anchor="ctr">
-            <a:normAutofit/>
-          </a:bodyPr>
-          <a:lstStyle/>
-          <a:p>
-            <a:pPr rtl="1" algn="ctr" indent="0" marL="0">
-              <a:buNone/>
-            </a:pPr>
-            <a:r>
-              <a:rPr lang="ar-SA" altLang="en-US" sz="500" b="1" dirty="0">
-                <a:solidFill>
-                  <a:srgbClr val="8A959C"/>
-                </a:solidFill>
-                <a:latin typeface="Arial" pitchFamily="34" charset="0"/>
-                <a:ea typeface="Arial" pitchFamily="34" charset="-122"/>
-                <a:cs typeface="Arial" pitchFamily="34" charset="-120"/>
-              </a:rPr>
-              <a:t>ج</a:t>
-            </a:r>
-            <a:endParaRPr lang="ar-SA" sz="500" dirty="0"/>
-          </a:p>
-        </p:txBody>
-      </p:sp>
-      <p:sp>
-        <p:nvSpPr>
-          <p:cNvPr id="115" name="Text 113"/>
-          <p:cNvSpPr/>
-          <p:nvPr/>
-        </p:nvSpPr>
-        <p:spPr>
-          <a:xfrm>
-            <a:off x="2066275" y="1801368"/>
-            <a:ext cx="170052" cy="164592"/>
-          </a:xfrm>
-          <a:prstGeom prst="rect">
-            <a:avLst/>
-          </a:prstGeom>
-          <a:noFill/>
-          <a:ln/>
-        </p:spPr>
-        <p:txBody>
-          <a:bodyPr wrap="square" lIns="0" tIns="0" rIns="0" bIns="0" rtlCol="0" anchor="ctr">
-            <a:normAutofit/>
-          </a:bodyPr>
-          <a:lstStyle/>
-          <a:p>
-            <a:pPr rtl="1" algn="ctr" indent="0" marL="0">
-              <a:buNone/>
-            </a:pPr>
-            <a:r>
-              <a:rPr lang="ar-SA" altLang="en-US" sz="550" b="1" dirty="0">
-                <a:solidFill>
-                  <a:srgbClr val="8A959C"/>
-                </a:solidFill>
-                <a:latin typeface="Arial" pitchFamily="34" charset="0"/>
-                <a:ea typeface="Arial" pitchFamily="34" charset="-122"/>
-                <a:cs typeface="Arial" pitchFamily="34" charset="-120"/>
-              </a:rPr>
-              <a:t>6</a:t>
-            </a:r>
-            <a:endParaRPr lang="ar-SA" sz="550" dirty="0"/>
-          </a:p>
-        </p:txBody>
-      </p:sp>
-      <p:sp>
-        <p:nvSpPr>
-          <p:cNvPr id="116" name="Shape 114"/>
-          <p:cNvSpPr/>
-          <p:nvPr/>
-        </p:nvSpPr>
-        <p:spPr>
-          <a:xfrm>
-            <a:off x="2066275" y="1965960"/>
-            <a:ext cx="170052" cy="2194560"/>
-          </a:xfrm>
-          <a:prstGeom prst="rect">
-            <a:avLst/>
-          </a:prstGeom>
-          <a:solidFill>
-            <a:srgbClr val="000000">
-              <a:alpha val="6000"/>
-            </a:srgbClr>
-          </a:solidFill>
-          <a:ln w="12700">
-            <a:solidFill>
-              <a:srgbClr val="000000">
-                <a:alpha val="0"/>
-              </a:srgbClr>
-            </a:solidFill>
-            <a:prstDash val="solid"/>
-          </a:ln>
-        </p:spPr>
-      </p:sp>
-      <p:sp>
-        <p:nvSpPr>
-          <p:cNvPr id="117" name="Shape 115"/>
-          <p:cNvSpPr/>
-          <p:nvPr/>
-        </p:nvSpPr>
-        <p:spPr>
-          <a:xfrm>
-            <a:off x="1896224" y="1664208"/>
-            <a:ext cx="170052" cy="301752"/>
-          </a:xfrm>
-          <a:prstGeom prst="rect">
-            <a:avLst/>
-          </a:prstGeom>
-          <a:solidFill>
-            <a:srgbClr val="F4F7F8"/>
-          </a:solidFill>
-          <a:ln w="6350">
-            <a:solidFill>
-              <a:srgbClr val="FFFFFF"/>
-            </a:solidFill>
-            <a:prstDash val="solid"/>
-          </a:ln>
-        </p:spPr>
-      </p:sp>
-      <p:sp>
-        <p:nvSpPr>
-          <p:cNvPr id="118" name="Text 116"/>
-          <p:cNvSpPr/>
-          <p:nvPr/>
-        </p:nvSpPr>
-        <p:spPr>
-          <a:xfrm>
-            <a:off x="1896224" y="1664208"/>
-            <a:ext cx="170052" cy="137160"/>
-          </a:xfrm>
-          <a:prstGeom prst="rect">
-            <a:avLst/>
-          </a:prstGeom>
-          <a:noFill/>
-          <a:ln/>
-        </p:spPr>
-        <p:txBody>
-          <a:bodyPr wrap="square" lIns="0" tIns="0" rIns="0" bIns="0" rtlCol="0" anchor="ctr">
-            <a:normAutofit/>
-          </a:bodyPr>
-          <a:lstStyle/>
-          <a:p>
-            <a:pPr rtl="1" algn="ctr" indent="0" marL="0">
-              <a:buNone/>
-            </a:pPr>
-            <a:r>
-              <a:rPr lang="ar-SA" altLang="en-US" sz="500" b="1" dirty="0">
-                <a:solidFill>
-                  <a:srgbClr val="5A6A73"/>
-                </a:solidFill>
-                <a:latin typeface="Arial" pitchFamily="34" charset="0"/>
-                <a:ea typeface="Arial" pitchFamily="34" charset="-122"/>
-                <a:cs typeface="Arial" pitchFamily="34" charset="-120"/>
-              </a:rPr>
-              <a:t>س</a:t>
-            </a:r>
-            <a:endParaRPr lang="ar-SA" sz="500" dirty="0"/>
-          </a:p>
-        </p:txBody>
-      </p:sp>
-      <p:sp>
-        <p:nvSpPr>
-          <p:cNvPr id="119" name="Text 117"/>
-          <p:cNvSpPr/>
-          <p:nvPr/>
-        </p:nvSpPr>
-        <p:spPr>
-          <a:xfrm>
-            <a:off x="1896224" y="1801368"/>
-            <a:ext cx="170052" cy="164592"/>
-          </a:xfrm>
-          <a:prstGeom prst="rect">
-            <a:avLst/>
-          </a:prstGeom>
-          <a:noFill/>
-          <a:ln/>
-        </p:spPr>
-        <p:txBody>
-          <a:bodyPr wrap="square" lIns="0" tIns="0" rIns="0" bIns="0" rtlCol="0" anchor="ctr">
-            <a:normAutofit/>
-          </a:bodyPr>
-          <a:lstStyle/>
-          <a:p>
-            <a:pPr rtl="1" algn="ctr" indent="0" marL="0">
-              <a:buNone/>
-            </a:pPr>
-            <a:r>
-              <a:rPr lang="ar-SA" altLang="en-US" sz="550" b="1" dirty="0">
-                <a:solidFill>
-                  <a:srgbClr val="222222"/>
-                </a:solidFill>
-                <a:latin typeface="Arial" pitchFamily="34" charset="0"/>
-                <a:ea typeface="Arial" pitchFamily="34" charset="-122"/>
-                <a:cs typeface="Arial" pitchFamily="34" charset="-120"/>
-              </a:rPr>
-              <a:t>7</a:t>
-            </a:r>
-            <a:endParaRPr lang="ar-SA" sz="550" dirty="0"/>
-          </a:p>
-        </p:txBody>
-      </p:sp>
-      <p:sp>
-        <p:nvSpPr>
-          <p:cNvPr id="120" name="Shape 118"/>
-          <p:cNvSpPr/>
-          <p:nvPr/>
-        </p:nvSpPr>
-        <p:spPr>
-          <a:xfrm>
-            <a:off x="2066275" y="1965960"/>
-            <a:ext cx="0" cy="2194560"/>
-          </a:xfrm>
-          <a:prstGeom prst="line">
-            <a:avLst/>
-          </a:prstGeom>
-          <a:noFill/>
-          <a:ln w="6350">
-            <a:solidFill>
-              <a:srgbClr val="9DB2BB"/>
-            </a:solidFill>
-            <a:prstDash val="solid"/>
-          </a:ln>
-        </p:spPr>
-      </p:sp>
-      <p:sp>
-        <p:nvSpPr>
-          <p:cNvPr id="121" name="Shape 119"/>
-          <p:cNvSpPr/>
-          <p:nvPr/>
-        </p:nvSpPr>
-        <p:spPr>
-          <a:xfrm>
-            <a:off x="1726172" y="1664208"/>
-            <a:ext cx="170052" cy="301752"/>
-          </a:xfrm>
-          <a:prstGeom prst="rect">
-            <a:avLst/>
-          </a:prstGeom>
-          <a:solidFill>
-            <a:srgbClr val="F4F7F8"/>
-          </a:solidFill>
-          <a:ln w="6350">
-            <a:solidFill>
-              <a:srgbClr val="FFFFFF"/>
-            </a:solidFill>
-            <a:prstDash val="solid"/>
-          </a:ln>
-        </p:spPr>
-      </p:sp>
-      <p:sp>
-        <p:nvSpPr>
-          <p:cNvPr id="122" name="Text 120"/>
-          <p:cNvSpPr/>
-          <p:nvPr/>
-        </p:nvSpPr>
-        <p:spPr>
-          <a:xfrm>
-            <a:off x="1726172" y="1664208"/>
-            <a:ext cx="170052" cy="137160"/>
-          </a:xfrm>
-          <a:prstGeom prst="rect">
-            <a:avLst/>
-          </a:prstGeom>
-          <a:noFill/>
-          <a:ln/>
-        </p:spPr>
-        <p:txBody>
-          <a:bodyPr wrap="square" lIns="0" tIns="0" rIns="0" bIns="0" rtlCol="0" anchor="ctr">
-            <a:normAutofit/>
-          </a:bodyPr>
-          <a:lstStyle/>
-          <a:p>
-            <a:pPr rtl="1" algn="ctr" indent="0" marL="0">
-              <a:buNone/>
-            </a:pPr>
-            <a:r>
-              <a:rPr lang="ar-SA" altLang="en-US" sz="500" b="1" dirty="0">
-                <a:solidFill>
-                  <a:srgbClr val="5A6A73"/>
-                </a:solidFill>
-                <a:latin typeface="Arial" pitchFamily="34" charset="0"/>
-                <a:ea typeface="Arial" pitchFamily="34" charset="-122"/>
-                <a:cs typeface="Arial" pitchFamily="34" charset="-120"/>
-              </a:rPr>
-              <a:t>ح</a:t>
-            </a:r>
-            <a:endParaRPr lang="ar-SA" sz="500" dirty="0"/>
-          </a:p>
-        </p:txBody>
-      </p:sp>
-      <p:sp>
-        <p:nvSpPr>
-          <p:cNvPr id="123" name="Text 121"/>
-          <p:cNvSpPr/>
-          <p:nvPr/>
-        </p:nvSpPr>
-        <p:spPr>
-          <a:xfrm>
-            <a:off x="1726172" y="1801368"/>
-            <a:ext cx="170052" cy="164592"/>
-          </a:xfrm>
-          <a:prstGeom prst="rect">
-            <a:avLst/>
-          </a:prstGeom>
-          <a:noFill/>
-          <a:ln/>
-        </p:spPr>
-        <p:txBody>
-          <a:bodyPr wrap="square" lIns="0" tIns="0" rIns="0" bIns="0" rtlCol="0" anchor="ctr">
-            <a:normAutofit/>
-          </a:bodyPr>
-          <a:lstStyle/>
-          <a:p>
-            <a:pPr rtl="1" algn="ctr" indent="0" marL="0">
-              <a:buNone/>
-            </a:pPr>
-            <a:r>
-              <a:rPr lang="ar-SA" altLang="en-US" sz="550" b="1" dirty="0">
-                <a:solidFill>
-                  <a:srgbClr val="222222"/>
-                </a:solidFill>
-                <a:latin typeface="Arial" pitchFamily="34" charset="0"/>
-                <a:ea typeface="Arial" pitchFamily="34" charset="-122"/>
-                <a:cs typeface="Arial" pitchFamily="34" charset="-120"/>
-              </a:rPr>
-              <a:t>8</a:t>
-            </a:r>
-            <a:endParaRPr lang="ar-SA" sz="550" dirty="0"/>
-          </a:p>
-        </p:txBody>
-      </p:sp>
-      <p:sp>
-        <p:nvSpPr>
-          <p:cNvPr id="124" name="Shape 122"/>
-          <p:cNvSpPr/>
-          <p:nvPr/>
-        </p:nvSpPr>
-        <p:spPr>
-          <a:xfrm>
-            <a:off x="1556121" y="1664208"/>
-            <a:ext cx="170052" cy="301752"/>
-          </a:xfrm>
-          <a:prstGeom prst="rect">
-            <a:avLst/>
-          </a:prstGeom>
-          <a:solidFill>
-            <a:srgbClr val="F4F7F8"/>
-          </a:solidFill>
-          <a:ln w="6350">
-            <a:solidFill>
-              <a:srgbClr val="FFFFFF"/>
-            </a:solidFill>
-            <a:prstDash val="solid"/>
-          </a:ln>
-        </p:spPr>
-      </p:sp>
-      <p:sp>
-        <p:nvSpPr>
-          <p:cNvPr id="125" name="Text 123"/>
-          <p:cNvSpPr/>
-          <p:nvPr/>
-        </p:nvSpPr>
-        <p:spPr>
-          <a:xfrm>
-            <a:off x="1556121" y="1664208"/>
-            <a:ext cx="170052" cy="137160"/>
-          </a:xfrm>
-          <a:prstGeom prst="rect">
-            <a:avLst/>
-          </a:prstGeom>
-          <a:noFill/>
-          <a:ln/>
-        </p:spPr>
-        <p:txBody>
-          <a:bodyPr wrap="square" lIns="0" tIns="0" rIns="0" bIns="0" rtlCol="0" anchor="ctr">
-            <a:normAutofit/>
-          </a:bodyPr>
-          <a:lstStyle/>
-          <a:p>
-            <a:pPr rtl="1" algn="ctr" indent="0" marL="0">
-              <a:buNone/>
-            </a:pPr>
-            <a:r>
-              <a:rPr lang="ar-SA" altLang="en-US" sz="500" b="1" dirty="0">
-                <a:solidFill>
-                  <a:srgbClr val="5A6A73"/>
-                </a:solidFill>
-                <a:latin typeface="Arial" pitchFamily="34" charset="0"/>
-                <a:ea typeface="Arial" pitchFamily="34" charset="-122"/>
-                <a:cs typeface="Arial" pitchFamily="34" charset="-120"/>
-              </a:rPr>
-              <a:t>ن</a:t>
-            </a:r>
-            <a:endParaRPr lang="ar-SA" sz="500" dirty="0"/>
-          </a:p>
-        </p:txBody>
-      </p:sp>
-      <p:sp>
-        <p:nvSpPr>
-          <p:cNvPr id="126" name="Text 124"/>
-          <p:cNvSpPr/>
-          <p:nvPr/>
-        </p:nvSpPr>
-        <p:spPr>
-          <a:xfrm>
-            <a:off x="1556121" y="1801368"/>
-            <a:ext cx="170052" cy="164592"/>
-          </a:xfrm>
-          <a:prstGeom prst="rect">
-            <a:avLst/>
-          </a:prstGeom>
-          <a:noFill/>
-          <a:ln/>
-        </p:spPr>
-        <p:txBody>
-          <a:bodyPr wrap="square" lIns="0" tIns="0" rIns="0" bIns="0" rtlCol="0" anchor="ctr">
-            <a:normAutofit/>
-          </a:bodyPr>
-          <a:lstStyle/>
-          <a:p>
-            <a:pPr rtl="1" algn="ctr" indent="0" marL="0">
-              <a:buNone/>
-            </a:pPr>
-            <a:r>
-              <a:rPr lang="ar-SA" altLang="en-US" sz="550" b="1" dirty="0">
-                <a:solidFill>
-                  <a:srgbClr val="222222"/>
-                </a:solidFill>
-                <a:latin typeface="Arial" pitchFamily="34" charset="0"/>
-                <a:ea typeface="Arial" pitchFamily="34" charset="-122"/>
-                <a:cs typeface="Arial" pitchFamily="34" charset="-120"/>
-              </a:rPr>
-              <a:t>9</a:t>
-            </a:r>
-            <a:endParaRPr lang="ar-SA" sz="550" dirty="0"/>
-          </a:p>
-        </p:txBody>
-      </p:sp>
-      <p:sp>
-        <p:nvSpPr>
-          <p:cNvPr id="127" name="Shape 125"/>
-          <p:cNvSpPr/>
-          <p:nvPr/>
-        </p:nvSpPr>
-        <p:spPr>
-          <a:xfrm>
-            <a:off x="1386069" y="1664208"/>
-            <a:ext cx="170052" cy="301752"/>
-          </a:xfrm>
-          <a:prstGeom prst="rect">
-            <a:avLst/>
-          </a:prstGeom>
-          <a:solidFill>
-            <a:srgbClr val="F4F7F8"/>
-          </a:solidFill>
-          <a:ln w="6350">
-            <a:solidFill>
-              <a:srgbClr val="FFFFFF"/>
-            </a:solidFill>
-            <a:prstDash val="solid"/>
-          </a:ln>
-        </p:spPr>
-      </p:sp>
-      <p:sp>
-        <p:nvSpPr>
-          <p:cNvPr id="128" name="Text 126"/>
-          <p:cNvSpPr/>
-          <p:nvPr/>
-        </p:nvSpPr>
-        <p:spPr>
-          <a:xfrm>
-            <a:off x="1386069" y="1664208"/>
-            <a:ext cx="170052" cy="137160"/>
-          </a:xfrm>
-          <a:prstGeom prst="rect">
-            <a:avLst/>
-          </a:prstGeom>
-          <a:noFill/>
-          <a:ln/>
-        </p:spPr>
-        <p:txBody>
-          <a:bodyPr wrap="square" lIns="0" tIns="0" rIns="0" bIns="0" rtlCol="0" anchor="ctr">
-            <a:normAutofit/>
-          </a:bodyPr>
-          <a:lstStyle/>
-          <a:p>
-            <a:pPr rtl="1" algn="ctr" indent="0" marL="0">
-              <a:buNone/>
-            </a:pPr>
-            <a:r>
-              <a:rPr lang="ar-SA" altLang="en-US" sz="500" b="1" dirty="0">
-                <a:solidFill>
-                  <a:srgbClr val="5A6A73"/>
-                </a:solidFill>
-                <a:latin typeface="Arial" pitchFamily="34" charset="0"/>
-                <a:ea typeface="Arial" pitchFamily="34" charset="-122"/>
-                <a:cs typeface="Arial" pitchFamily="34" charset="-120"/>
-              </a:rPr>
-              <a:t>ث</a:t>
-            </a:r>
-            <a:endParaRPr lang="ar-SA" sz="500" dirty="0"/>
-          </a:p>
-        </p:txBody>
-      </p:sp>
-      <p:sp>
-        <p:nvSpPr>
-          <p:cNvPr id="129" name="Text 127"/>
-          <p:cNvSpPr/>
-          <p:nvPr/>
-        </p:nvSpPr>
-        <p:spPr>
-          <a:xfrm>
-            <a:off x="1386069" y="1801368"/>
-            <a:ext cx="170052" cy="164592"/>
-          </a:xfrm>
-          <a:prstGeom prst="rect">
-            <a:avLst/>
-          </a:prstGeom>
-          <a:noFill/>
-          <a:ln/>
-        </p:spPr>
-        <p:txBody>
-          <a:bodyPr wrap="square" lIns="0" tIns="0" rIns="0" bIns="0" rtlCol="0" anchor="ctr">
-            <a:normAutofit/>
-          </a:bodyPr>
-          <a:lstStyle/>
-          <a:p>
-            <a:pPr rtl="1" algn="ctr" indent="0" marL="0">
-              <a:buNone/>
-            </a:pPr>
-            <a:r>
-              <a:rPr lang="ar-SA" altLang="en-US" sz="550" b="1" dirty="0">
-                <a:solidFill>
-                  <a:srgbClr val="222222"/>
-                </a:solidFill>
-                <a:latin typeface="Arial" pitchFamily="34" charset="0"/>
-                <a:ea typeface="Arial" pitchFamily="34" charset="-122"/>
-                <a:cs typeface="Arial" pitchFamily="34" charset="-120"/>
-              </a:rPr>
-              <a:t>10</a:t>
-            </a:r>
-            <a:endParaRPr lang="ar-SA" sz="550" dirty="0"/>
-          </a:p>
-        </p:txBody>
-      </p:sp>
-      <p:sp>
-        <p:nvSpPr>
           <p:cNvPr id="130" name="Shape 128"/>
-          <p:cNvSpPr/>
-          <p:nvPr/>
-        </p:nvSpPr>
-        <p:spPr>
-          <a:xfrm>
-            <a:off x="1216018" y="1664208"/>
-            <a:ext cx="170052" cy="301752"/>
-          </a:xfrm>
-          <a:prstGeom prst="rect">
-            <a:avLst/>
-          </a:prstGeom>
-          <a:solidFill>
-            <a:srgbClr val="F4F7F8"/>
-          </a:solidFill>
-          <a:ln w="6350">
-            <a:solidFill>
-              <a:srgbClr val="FFFFFF"/>
-            </a:solidFill>
-            <a:prstDash val="solid"/>
-          </a:ln>
-        </p:spPr>
-      </p:sp>
-      <p:sp>
-        <p:nvSpPr>
-          <p:cNvPr id="131" name="Text 129"/>
-          <p:cNvSpPr/>
-          <p:nvPr/>
-        </p:nvSpPr>
-        <p:spPr>
-          <a:xfrm>
-            <a:off x="1216018" y="1664208"/>
-            <a:ext cx="170052" cy="137160"/>
-          </a:xfrm>
-          <a:prstGeom prst="rect">
-            <a:avLst/>
-          </a:prstGeom>
-          <a:noFill/>
-          <a:ln/>
-        </p:spPr>
-        <p:txBody>
-          <a:bodyPr wrap="square" lIns="0" tIns="0" rIns="0" bIns="0" rtlCol="0" anchor="ctr">
-            <a:normAutofit/>
-          </a:bodyPr>
-          <a:lstStyle/>
-          <a:p>
-            <a:pPr rtl="1" algn="ctr" indent="0" marL="0">
-              <a:buNone/>
-            </a:pPr>
-            <a:r>
-              <a:rPr lang="ar-SA" altLang="en-US" sz="500" b="1" dirty="0">
-                <a:solidFill>
-                  <a:srgbClr val="5A6A73"/>
-                </a:solidFill>
-                <a:latin typeface="Arial" pitchFamily="34" charset="0"/>
-                <a:ea typeface="Arial" pitchFamily="34" charset="-122"/>
-                <a:cs typeface="Arial" pitchFamily="34" charset="-120"/>
-              </a:rPr>
-              <a:t>ر</a:t>
-            </a:r>
-            <a:endParaRPr lang="ar-SA" sz="500" dirty="0"/>
-          </a:p>
-        </p:txBody>
-      </p:sp>
-      <p:sp>
-        <p:nvSpPr>
-          <p:cNvPr id="132" name="Text 130"/>
-          <p:cNvSpPr/>
-          <p:nvPr/>
-        </p:nvSpPr>
-        <p:spPr>
-          <a:xfrm>
-            <a:off x="1216018" y="1801368"/>
-            <a:ext cx="170052" cy="164592"/>
-          </a:xfrm>
-          <a:prstGeom prst="rect">
-            <a:avLst/>
-          </a:prstGeom>
-          <a:noFill/>
-          <a:ln/>
-        </p:spPr>
-        <p:txBody>
-          <a:bodyPr wrap="square" lIns="0" tIns="0" rIns="0" bIns="0" rtlCol="0" anchor="ctr">
-            <a:normAutofit/>
-          </a:bodyPr>
-          <a:lstStyle/>
-          <a:p>
-            <a:pPr rtl="1" algn="ctr" indent="0" marL="0">
-              <a:buNone/>
-            </a:pPr>
-            <a:r>
-              <a:rPr lang="ar-SA" altLang="en-US" sz="550" b="1" dirty="0">
-                <a:solidFill>
-                  <a:srgbClr val="222222"/>
-                </a:solidFill>
-                <a:latin typeface="Arial" pitchFamily="34" charset="0"/>
-                <a:ea typeface="Arial" pitchFamily="34" charset="-122"/>
-                <a:cs typeface="Arial" pitchFamily="34" charset="-120"/>
-              </a:rPr>
-              <a:t>11</a:t>
-            </a:r>
-            <a:endParaRPr lang="ar-SA" sz="550" dirty="0"/>
-          </a:p>
-        </p:txBody>
-      </p:sp>
-      <p:sp>
-        <p:nvSpPr>
-          <p:cNvPr id="133" name="Shape 131"/>
-          <p:cNvSpPr/>
-          <p:nvPr/>
-        </p:nvSpPr>
-        <p:spPr>
-          <a:xfrm>
-            <a:off x="1045966" y="1664208"/>
-            <a:ext cx="170052" cy="301752"/>
-          </a:xfrm>
-          <a:prstGeom prst="rect">
-            <a:avLst/>
-          </a:prstGeom>
-          <a:solidFill>
-            <a:srgbClr val="F4F7F8"/>
-          </a:solidFill>
-          <a:ln w="6350">
-            <a:solidFill>
-              <a:srgbClr val="FFFFFF"/>
-            </a:solidFill>
-            <a:prstDash val="solid"/>
-          </a:ln>
-        </p:spPr>
-      </p:sp>
-      <p:sp>
-        <p:nvSpPr>
-          <p:cNvPr id="134" name="Text 132"/>
-          <p:cNvSpPr/>
-          <p:nvPr/>
-        </p:nvSpPr>
-        <p:spPr>
-          <a:xfrm>
-            <a:off x="1045966" y="1664208"/>
-            <a:ext cx="170052" cy="137160"/>
-          </a:xfrm>
-          <a:prstGeom prst="rect">
-            <a:avLst/>
-          </a:prstGeom>
-          <a:noFill/>
-          <a:ln/>
-        </p:spPr>
-        <p:txBody>
-          <a:bodyPr wrap="square" lIns="0" tIns="0" rIns="0" bIns="0" rtlCol="0" anchor="ctr">
-            <a:normAutofit/>
-          </a:bodyPr>
-          <a:lstStyle/>
-          <a:p>
-            <a:pPr rtl="1" algn="ctr" indent="0" marL="0">
-              <a:buNone/>
-            </a:pPr>
-            <a:r>
-              <a:rPr lang="ar-SA" altLang="en-US" sz="500" b="1" dirty="0">
-                <a:solidFill>
-                  <a:srgbClr val="5A6A73"/>
-                </a:solidFill>
-                <a:latin typeface="Arial" pitchFamily="34" charset="0"/>
-                <a:ea typeface="Arial" pitchFamily="34" charset="-122"/>
-                <a:cs typeface="Arial" pitchFamily="34" charset="-120"/>
-              </a:rPr>
-              <a:t>خ</a:t>
-            </a:r>
-            <a:endParaRPr lang="ar-SA" sz="500" dirty="0"/>
-          </a:p>
-        </p:txBody>
-      </p:sp>
-      <p:sp>
-        <p:nvSpPr>
-          <p:cNvPr id="135" name="Text 133"/>
-          <p:cNvSpPr/>
-          <p:nvPr/>
-        </p:nvSpPr>
-        <p:spPr>
-          <a:xfrm>
-            <a:off x="1045966" y="1801368"/>
-            <a:ext cx="170052" cy="164592"/>
-          </a:xfrm>
-          <a:prstGeom prst="rect">
-            <a:avLst/>
-          </a:prstGeom>
-          <a:noFill/>
-          <a:ln/>
-        </p:spPr>
-        <p:txBody>
-          <a:bodyPr wrap="square" lIns="0" tIns="0" rIns="0" bIns="0" rtlCol="0" anchor="ctr">
-            <a:normAutofit/>
-          </a:bodyPr>
-          <a:lstStyle/>
-          <a:p>
-            <a:pPr rtl="1" algn="ctr" indent="0" marL="0">
-              <a:buNone/>
-            </a:pPr>
-            <a:r>
-              <a:rPr lang="ar-SA" altLang="en-US" sz="550" b="1" dirty="0">
-                <a:solidFill>
-                  <a:srgbClr val="222222"/>
-                </a:solidFill>
-                <a:latin typeface="Arial" pitchFamily="34" charset="0"/>
-                <a:ea typeface="Arial" pitchFamily="34" charset="-122"/>
-                <a:cs typeface="Arial" pitchFamily="34" charset="-120"/>
-              </a:rPr>
-              <a:t>12</a:t>
-            </a:r>
-            <a:endParaRPr lang="ar-SA" sz="550" dirty="0"/>
-          </a:p>
-        </p:txBody>
-      </p:sp>
-      <p:sp>
-        <p:nvSpPr>
-          <p:cNvPr id="136" name="Shape 134"/>
-          <p:cNvSpPr/>
-          <p:nvPr/>
-        </p:nvSpPr>
-        <p:spPr>
-          <a:xfrm>
-            <a:off x="875915" y="1664208"/>
-            <a:ext cx="170052" cy="301752"/>
-          </a:xfrm>
-          <a:prstGeom prst="rect">
-            <a:avLst/>
-          </a:prstGeom>
-          <a:solidFill>
-            <a:srgbClr val="DBE3E6"/>
-          </a:solidFill>
-          <a:ln w="6350">
-            <a:solidFill>
-              <a:srgbClr val="FFFFFF"/>
-            </a:solidFill>
-            <a:prstDash val="solid"/>
-          </a:ln>
-        </p:spPr>
-      </p:sp>
-      <p:sp>
-        <p:nvSpPr>
-          <p:cNvPr id="137" name="Text 135"/>
-          <p:cNvSpPr/>
-          <p:nvPr/>
-        </p:nvSpPr>
-        <p:spPr>
-          <a:xfrm>
-            <a:off x="875915" y="1664208"/>
-            <a:ext cx="170052" cy="137160"/>
-          </a:xfrm>
-          <a:prstGeom prst="rect">
-            <a:avLst/>
-          </a:prstGeom>
-          <a:noFill/>
-          <a:ln/>
-        </p:spPr>
-        <p:txBody>
-          <a:bodyPr wrap="square" lIns="0" tIns="0" rIns="0" bIns="0" rtlCol="0" anchor="ctr">
-            <a:normAutofit/>
-          </a:bodyPr>
-          <a:lstStyle/>
-          <a:p>
-            <a:pPr rtl="1" algn="ctr" indent="0" marL="0">
-              <a:buNone/>
-            </a:pPr>
-            <a:r>
-              <a:rPr lang="ar-SA" altLang="en-US" sz="500" b="1" dirty="0">
-                <a:solidFill>
-                  <a:srgbClr val="8A959C"/>
-                </a:solidFill>
-                <a:latin typeface="Arial" pitchFamily="34" charset="0"/>
-                <a:ea typeface="Arial" pitchFamily="34" charset="-122"/>
-                <a:cs typeface="Arial" pitchFamily="34" charset="-120"/>
-              </a:rPr>
-              <a:t>ج</a:t>
-            </a:r>
-            <a:endParaRPr lang="ar-SA" sz="500" dirty="0"/>
-          </a:p>
-        </p:txBody>
-      </p:sp>
-      <p:sp>
-        <p:nvSpPr>
-          <p:cNvPr id="138" name="Text 136"/>
-          <p:cNvSpPr/>
-          <p:nvPr/>
-        </p:nvSpPr>
-        <p:spPr>
-          <a:xfrm>
-            <a:off x="875915" y="1801368"/>
-            <a:ext cx="170052" cy="164592"/>
-          </a:xfrm>
-          <a:prstGeom prst="rect">
-            <a:avLst/>
-          </a:prstGeom>
-          <a:noFill/>
-          <a:ln/>
-        </p:spPr>
-        <p:txBody>
-          <a:bodyPr wrap="square" lIns="0" tIns="0" rIns="0" bIns="0" rtlCol="0" anchor="ctr">
-            <a:normAutofit/>
-          </a:bodyPr>
-          <a:lstStyle/>
-          <a:p>
-            <a:pPr rtl="1" algn="ctr" indent="0" marL="0">
-              <a:buNone/>
-            </a:pPr>
-            <a:r>
-              <a:rPr lang="ar-SA" altLang="en-US" sz="550" b="1" dirty="0">
-                <a:solidFill>
-                  <a:srgbClr val="8A959C"/>
-                </a:solidFill>
-                <a:latin typeface="Arial" pitchFamily="34" charset="0"/>
-                <a:ea typeface="Arial" pitchFamily="34" charset="-122"/>
-                <a:cs typeface="Arial" pitchFamily="34" charset="-120"/>
-              </a:rPr>
-              <a:t>13</a:t>
-            </a:r>
-            <a:endParaRPr lang="ar-SA" sz="550" dirty="0"/>
-          </a:p>
-        </p:txBody>
-      </p:sp>
-      <p:sp>
-        <p:nvSpPr>
-          <p:cNvPr id="139" name="Shape 137"/>
-          <p:cNvSpPr/>
-          <p:nvPr/>
-        </p:nvSpPr>
-        <p:spPr>
-          <a:xfrm>
-            <a:off x="875915" y="1965960"/>
-            <a:ext cx="170052" cy="2194560"/>
-          </a:xfrm>
-          <a:prstGeom prst="rect">
-            <a:avLst/>
-          </a:prstGeom>
-          <a:solidFill>
-            <a:srgbClr val="000000">
-              <a:alpha val="6000"/>
-            </a:srgbClr>
-          </a:solidFill>
-          <a:ln w="12700">
-            <a:solidFill>
-              <a:srgbClr val="000000">
-                <a:alpha val="0"/>
-              </a:srgbClr>
-            </a:solidFill>
-            <a:prstDash val="solid"/>
-          </a:ln>
-        </p:spPr>
-      </p:sp>
-      <p:sp>
-        <p:nvSpPr>
-          <p:cNvPr id="140" name="Shape 138"/>
-          <p:cNvSpPr/>
-          <p:nvPr/>
-        </p:nvSpPr>
-        <p:spPr>
-          <a:xfrm>
-            <a:off x="705863" y="1664208"/>
-            <a:ext cx="170052" cy="301752"/>
-          </a:xfrm>
-          <a:prstGeom prst="rect">
-            <a:avLst/>
-          </a:prstGeom>
-          <a:solidFill>
-            <a:srgbClr val="F4F7F8"/>
-          </a:solidFill>
-          <a:ln w="6350">
-            <a:solidFill>
-              <a:srgbClr val="FFFFFF"/>
-            </a:solidFill>
-            <a:prstDash val="solid"/>
-          </a:ln>
-        </p:spPr>
-      </p:sp>
-      <p:sp>
-        <p:nvSpPr>
-          <p:cNvPr id="141" name="Text 139"/>
-          <p:cNvSpPr/>
-          <p:nvPr/>
-        </p:nvSpPr>
-        <p:spPr>
-          <a:xfrm>
-            <a:off x="705863" y="1664208"/>
-            <a:ext cx="170052" cy="137160"/>
-          </a:xfrm>
-          <a:prstGeom prst="rect">
-            <a:avLst/>
-          </a:prstGeom>
-          <a:noFill/>
-          <a:ln/>
-        </p:spPr>
-        <p:txBody>
-          <a:bodyPr wrap="square" lIns="0" tIns="0" rIns="0" bIns="0" rtlCol="0" anchor="ctr">
-            <a:normAutofit/>
-          </a:bodyPr>
-          <a:lstStyle/>
-          <a:p>
-            <a:pPr rtl="1" algn="ctr" indent="0" marL="0">
-              <a:buNone/>
-            </a:pPr>
-            <a:r>
-              <a:rPr lang="ar-SA" altLang="en-US" sz="500" b="1" dirty="0">
-                <a:solidFill>
-                  <a:srgbClr val="5A6A73"/>
-                </a:solidFill>
-                <a:latin typeface="Arial" pitchFamily="34" charset="0"/>
-                <a:ea typeface="Arial" pitchFamily="34" charset="-122"/>
-                <a:cs typeface="Arial" pitchFamily="34" charset="-120"/>
-              </a:rPr>
-              <a:t>س</a:t>
-            </a:r>
-            <a:endParaRPr lang="ar-SA" sz="500" dirty="0"/>
-          </a:p>
-        </p:txBody>
-      </p:sp>
-      <p:sp>
-        <p:nvSpPr>
-          <p:cNvPr id="142" name="Text 140"/>
-          <p:cNvSpPr/>
-          <p:nvPr/>
-        </p:nvSpPr>
-        <p:spPr>
-          <a:xfrm>
-            <a:off x="705863" y="1801368"/>
-            <a:ext cx="170052" cy="164592"/>
-          </a:xfrm>
-          <a:prstGeom prst="rect">
-            <a:avLst/>
-          </a:prstGeom>
-          <a:noFill/>
-          <a:ln/>
-        </p:spPr>
-        <p:txBody>
-          <a:bodyPr wrap="square" lIns="0" tIns="0" rIns="0" bIns="0" rtlCol="0" anchor="ctr">
-            <a:normAutofit/>
-          </a:bodyPr>
-          <a:lstStyle/>
-          <a:p>
-            <a:pPr rtl="1" algn="ctr" indent="0" marL="0">
-              <a:buNone/>
-            </a:pPr>
-            <a:r>
-              <a:rPr lang="ar-SA" altLang="en-US" sz="550" b="1" dirty="0">
-                <a:solidFill>
-                  <a:srgbClr val="222222"/>
-                </a:solidFill>
-                <a:latin typeface="Arial" pitchFamily="34" charset="0"/>
-                <a:ea typeface="Arial" pitchFamily="34" charset="-122"/>
-                <a:cs typeface="Arial" pitchFamily="34" charset="-120"/>
-              </a:rPr>
-              <a:t>14</a:t>
-            </a:r>
-            <a:endParaRPr lang="ar-SA" sz="550" dirty="0"/>
-          </a:p>
-        </p:txBody>
-      </p:sp>
-      <p:sp>
-        <p:nvSpPr>
-          <p:cNvPr id="143" name="Shape 141"/>
-          <p:cNvSpPr/>
-          <p:nvPr/>
-        </p:nvSpPr>
-        <p:spPr>
-          <a:xfrm>
-            <a:off x="875915" y="1965960"/>
-            <a:ext cx="0" cy="2194560"/>
-          </a:xfrm>
-          <a:prstGeom prst="line">
-            <a:avLst/>
-          </a:prstGeom>
-          <a:noFill/>
-          <a:ln w="6350">
-            <a:solidFill>
-              <a:srgbClr val="9DB2BB"/>
-            </a:solidFill>
-            <a:prstDash val="solid"/>
-          </a:ln>
-        </p:spPr>
-      </p:sp>
-      <p:sp>
-        <p:nvSpPr>
-          <p:cNvPr id="144" name="Shape 142"/>
-          <p:cNvSpPr/>
-          <p:nvPr/>
-        </p:nvSpPr>
-        <p:spPr>
-          <a:xfrm>
-            <a:off x="535812" y="1664208"/>
-            <a:ext cx="170052" cy="301752"/>
-          </a:xfrm>
-          <a:prstGeom prst="rect">
-            <a:avLst/>
-          </a:prstGeom>
-          <a:solidFill>
-            <a:srgbClr val="F4F7F8"/>
-          </a:solidFill>
-          <a:ln w="6350">
-            <a:solidFill>
-              <a:srgbClr val="FFFFFF"/>
-            </a:solidFill>
-            <a:prstDash val="solid"/>
-          </a:ln>
-        </p:spPr>
-      </p:sp>
-      <p:sp>
-        <p:nvSpPr>
-          <p:cNvPr id="145" name="Text 143"/>
-          <p:cNvSpPr/>
-          <p:nvPr/>
-        </p:nvSpPr>
-        <p:spPr>
-          <a:xfrm>
-            <a:off x="535812" y="1664208"/>
-            <a:ext cx="170052" cy="137160"/>
-          </a:xfrm>
-          <a:prstGeom prst="rect">
-            <a:avLst/>
-          </a:prstGeom>
-          <a:noFill/>
-          <a:ln/>
-        </p:spPr>
-        <p:txBody>
-          <a:bodyPr wrap="square" lIns="0" tIns="0" rIns="0" bIns="0" rtlCol="0" anchor="ctr">
-            <a:normAutofit/>
-          </a:bodyPr>
-          <a:lstStyle/>
-          <a:p>
-            <a:pPr rtl="1" algn="ctr" indent="0" marL="0">
-              <a:buNone/>
-            </a:pPr>
-            <a:r>
-              <a:rPr lang="ar-SA" altLang="en-US" sz="500" b="1" dirty="0">
-                <a:solidFill>
-                  <a:srgbClr val="5A6A73"/>
-                </a:solidFill>
-                <a:latin typeface="Arial" pitchFamily="34" charset="0"/>
-                <a:ea typeface="Arial" pitchFamily="34" charset="-122"/>
-                <a:cs typeface="Arial" pitchFamily="34" charset="-120"/>
-              </a:rPr>
-              <a:t>ح</a:t>
-            </a:r>
-            <a:endParaRPr lang="ar-SA" sz="500" dirty="0"/>
-          </a:p>
-        </p:txBody>
-      </p:sp>
-      <p:sp>
-        <p:nvSpPr>
-          <p:cNvPr id="146" name="Text 144"/>
-          <p:cNvSpPr/>
-          <p:nvPr/>
-        </p:nvSpPr>
-        <p:spPr>
-          <a:xfrm>
-            <a:off x="535812" y="1801368"/>
-            <a:ext cx="170052" cy="164592"/>
-          </a:xfrm>
-          <a:prstGeom prst="rect">
-            <a:avLst/>
-          </a:prstGeom>
-          <a:noFill/>
-          <a:ln/>
-        </p:spPr>
-        <p:txBody>
-          <a:bodyPr wrap="square" lIns="0" tIns="0" rIns="0" bIns="0" rtlCol="0" anchor="ctr">
-            <a:normAutofit/>
-          </a:bodyPr>
-          <a:lstStyle/>
-          <a:p>
-            <a:pPr rtl="1" algn="ctr" indent="0" marL="0">
-              <a:buNone/>
-            </a:pPr>
-            <a:r>
-              <a:rPr lang="ar-SA" altLang="en-US" sz="550" b="1" dirty="0">
-                <a:solidFill>
-                  <a:srgbClr val="222222"/>
-                </a:solidFill>
-                <a:latin typeface="Arial" pitchFamily="34" charset="0"/>
-                <a:ea typeface="Arial" pitchFamily="34" charset="-122"/>
-                <a:cs typeface="Arial" pitchFamily="34" charset="-120"/>
-              </a:rPr>
-              <a:t>15</a:t>
-            </a:r>
-            <a:endParaRPr lang="ar-SA" sz="550" dirty="0"/>
-          </a:p>
-        </p:txBody>
-      </p:sp>
-      <p:sp>
-        <p:nvSpPr>
-          <p:cNvPr id="147" name="Shape 145"/>
-          <p:cNvSpPr/>
-          <p:nvPr/>
-        </p:nvSpPr>
-        <p:spPr>
-          <a:xfrm>
-            <a:off x="365760" y="1664208"/>
-            <a:ext cx="170052" cy="301752"/>
-          </a:xfrm>
-          <a:prstGeom prst="rect">
-            <a:avLst/>
-          </a:prstGeom>
-          <a:solidFill>
-            <a:srgbClr val="F4F7F8"/>
-          </a:solidFill>
-          <a:ln w="6350">
-            <a:solidFill>
-              <a:srgbClr val="FFFFFF"/>
-            </a:solidFill>
-            <a:prstDash val="solid"/>
-          </a:ln>
-        </p:spPr>
-      </p:sp>
-      <p:sp>
-        <p:nvSpPr>
-          <p:cNvPr id="148" name="Text 146"/>
-          <p:cNvSpPr/>
-          <p:nvPr/>
-        </p:nvSpPr>
-        <p:spPr>
-          <a:xfrm>
-            <a:off x="365760" y="1664208"/>
-            <a:ext cx="170052" cy="137160"/>
-          </a:xfrm>
-          <a:prstGeom prst="rect">
-            <a:avLst/>
-          </a:prstGeom>
-          <a:noFill/>
-          <a:ln/>
-        </p:spPr>
-        <p:txBody>
-          <a:bodyPr wrap="square" lIns="0" tIns="0" rIns="0" bIns="0" rtlCol="0" anchor="ctr">
-            <a:normAutofit/>
-          </a:bodyPr>
-          <a:lstStyle/>
-          <a:p>
-            <a:pPr rtl="1" algn="ctr" indent="0" marL="0">
-              <a:buNone/>
-            </a:pPr>
-            <a:r>
-              <a:rPr lang="ar-SA" altLang="en-US" sz="500" b="1" dirty="0">
-                <a:solidFill>
-                  <a:srgbClr val="5A6A73"/>
-                </a:solidFill>
-                <a:latin typeface="Arial" pitchFamily="34" charset="0"/>
-                <a:ea typeface="Arial" pitchFamily="34" charset="-122"/>
-                <a:cs typeface="Arial" pitchFamily="34" charset="-120"/>
-              </a:rPr>
-              <a:t>ن</a:t>
-            </a:r>
-            <a:endParaRPr lang="ar-SA" sz="500" dirty="0"/>
-          </a:p>
-        </p:txBody>
-      </p:sp>
-      <p:sp>
-        <p:nvSpPr>
-          <p:cNvPr id="149" name="Text 147"/>
-          <p:cNvSpPr/>
-          <p:nvPr/>
-        </p:nvSpPr>
-        <p:spPr>
-          <a:xfrm>
-            <a:off x="365760" y="1801368"/>
-            <a:ext cx="170052" cy="164592"/>
-          </a:xfrm>
-          <a:prstGeom prst="rect">
-            <a:avLst/>
-          </a:prstGeom>
-          <a:noFill/>
-          <a:ln/>
-        </p:spPr>
-        <p:txBody>
-          <a:bodyPr wrap="square" lIns="0" tIns="0" rIns="0" bIns="0" rtlCol="0" anchor="ctr">
-            <a:normAutofit/>
-          </a:bodyPr>
-          <a:lstStyle/>
-          <a:p>
-            <a:pPr rtl="1" algn="ctr" indent="0" marL="0">
-              <a:buNone/>
-            </a:pPr>
-            <a:r>
-              <a:rPr lang="ar-SA" altLang="en-US" sz="550" b="1" dirty="0">
-                <a:solidFill>
-                  <a:srgbClr val="222222"/>
-                </a:solidFill>
-                <a:latin typeface="Arial" pitchFamily="34" charset="0"/>
-                <a:ea typeface="Arial" pitchFamily="34" charset="-122"/>
-                <a:cs typeface="Arial" pitchFamily="34" charset="-120"/>
-              </a:rPr>
-              <a:t>16</a:t>
-            </a:r>
-            <a:endParaRPr lang="ar-SA" sz="550" dirty="0"/>
-          </a:p>
-        </p:txBody>
-      </p:sp>
-      <p:sp>
-        <p:nvSpPr>
-          <p:cNvPr id="150" name="Shape 148"/>
           <p:cNvSpPr/>
           <p:nvPr/>
         </p:nvSpPr>
@@ -11775,7 +11113,7 @@
       </p:sp>
       <p:sp>
         <p:nvSpPr>
-          <p:cNvPr id="151" name="Shape 149"/>
+          <p:cNvPr id="131" name="Shape 129"/>
           <p:cNvSpPr/>
           <p:nvPr/>
         </p:nvSpPr>
@@ -11800,7 +11138,7 @@
       </p:sp>
       <p:sp>
         <p:nvSpPr>
-          <p:cNvPr id="152" name="Text 150"/>
+          <p:cNvPr id="132" name="Text 130"/>
           <p:cNvSpPr/>
           <p:nvPr/>
         </p:nvSpPr>
@@ -11841,7 +11179,7 @@
       </p:sp>
       <p:sp>
         <p:nvSpPr>
-          <p:cNvPr id="153" name="Text 151"/>
+          <p:cNvPr id="133" name="Text 131"/>
           <p:cNvSpPr/>
           <p:nvPr/>
         </p:nvSpPr>
@@ -11882,7 +11220,7 @@
       </p:sp>
       <p:sp>
         <p:nvSpPr>
-          <p:cNvPr id="154" name="Text 152"/>
+          <p:cNvPr id="134" name="Text 132"/>
           <p:cNvSpPr/>
           <p:nvPr/>
         </p:nvSpPr>
@@ -11923,7 +11261,7 @@
       </p:sp>
       <p:sp>
         <p:nvSpPr>
-          <p:cNvPr id="155" name="Text 153"/>
+          <p:cNvPr id="135" name="Text 133"/>
           <p:cNvSpPr/>
           <p:nvPr/>
         </p:nvSpPr>
@@ -11964,7 +11302,7 @@
       </p:sp>
       <p:sp>
         <p:nvSpPr>
-          <p:cNvPr id="156" name="Text 154"/>
+          <p:cNvPr id="136" name="Text 134"/>
           <p:cNvSpPr/>
           <p:nvPr/>
         </p:nvSpPr>
@@ -11997,7 +11335,7 @@
                 <a:ea typeface="Arial" pitchFamily="34" charset="-122"/>
                 <a:cs typeface="Arial" pitchFamily="34" charset="-120"/>
               </a:rPr>
-              <a:t>14 نوفمبر</a:t>
+              <a:t>10 نوفمبر</a:t>
             </a:r>
             <a:endParaRPr lang="ar-SA" sz="850" dirty="0"/>
           </a:p>
@@ -12005,14 +11343,14 @@
       </p:sp>
       <p:sp>
         <p:nvSpPr>
-          <p:cNvPr id="157" name="Shape 155"/>
-          <p:cNvSpPr/>
-          <p:nvPr/>
-        </p:nvSpPr>
-        <p:spPr>
-          <a:xfrm>
-            <a:off x="705863" y="2011680"/>
-            <a:ext cx="4081236" cy="182880"/>
+          <p:cNvPr id="137" name="Shape 135"/>
+          <p:cNvSpPr/>
+          <p:nvPr/>
+        </p:nvSpPr>
+        <p:spPr>
+          <a:xfrm>
+            <a:off x="751210" y="2011680"/>
+            <a:ext cx="3854501" cy="182880"/>
           </a:xfrm>
           <a:prstGeom prst="roundRect">
             <a:avLst>
@@ -12032,14 +11370,14 @@
       </p:sp>
       <p:sp>
         <p:nvSpPr>
-          <p:cNvPr id="158" name="Text 156"/>
-          <p:cNvSpPr/>
-          <p:nvPr/>
-        </p:nvSpPr>
-        <p:spPr>
-          <a:xfrm>
-            <a:off x="705863" y="2011680"/>
-            <a:ext cx="4081236" cy="182880"/>
+          <p:cNvPr id="138" name="Text 136"/>
+          <p:cNvSpPr/>
+          <p:nvPr/>
+        </p:nvSpPr>
+        <p:spPr>
+          <a:xfrm>
+            <a:off x="751210" y="2011680"/>
+            <a:ext cx="3854501" cy="182880"/>
           </a:xfrm>
           <a:prstGeom prst="rect">
             <a:avLst/>
@@ -12065,7 +11403,7 @@
                 <a:ea typeface="Arial" pitchFamily="34" charset="-122"/>
                 <a:cs typeface="Arial" pitchFamily="34" charset="-120"/>
               </a:rPr>
-              <a:t>20 يوم عمل · 22 أكتوبر → 14 نوفمبر</a:t>
+              <a:t>20 يوم عمل · 22 أكتوبر → 10 نوفمبر</a:t>
             </a:r>
             <a:endParaRPr lang="ar-SA" sz="850" dirty="0"/>
           </a:p>
@@ -12073,7 +11411,7 @@
       </p:sp>
       <p:sp>
         <p:nvSpPr>
-          <p:cNvPr id="159" name="Shape 157"/>
+          <p:cNvPr id="139" name="Shape 137"/>
           <p:cNvSpPr/>
           <p:nvPr/>
         </p:nvSpPr>
@@ -12098,7 +11436,7 @@
       </p:sp>
       <p:sp>
         <p:nvSpPr>
-          <p:cNvPr id="160" name="Shape 158"/>
+          <p:cNvPr id="140" name="Shape 138"/>
           <p:cNvSpPr/>
           <p:nvPr/>
         </p:nvSpPr>
@@ -12123,7 +11461,7 @@
       </p:sp>
       <p:sp>
         <p:nvSpPr>
-          <p:cNvPr id="161" name="Text 159"/>
+          <p:cNvPr id="141" name="Text 139"/>
           <p:cNvSpPr/>
           <p:nvPr/>
         </p:nvSpPr>
@@ -12164,7 +11502,7 @@
       </p:sp>
       <p:sp>
         <p:nvSpPr>
-          <p:cNvPr id="162" name="Text 160"/>
+          <p:cNvPr id="142" name="Text 140"/>
           <p:cNvSpPr/>
           <p:nvPr/>
         </p:nvSpPr>
@@ -12205,7 +11543,7 @@
       </p:sp>
       <p:sp>
         <p:nvSpPr>
-          <p:cNvPr id="163" name="Text 161"/>
+          <p:cNvPr id="143" name="Text 141"/>
           <p:cNvSpPr/>
           <p:nvPr/>
         </p:nvSpPr>
@@ -12246,7 +11584,7 @@
       </p:sp>
       <p:sp>
         <p:nvSpPr>
-          <p:cNvPr id="164" name="Text 162"/>
+          <p:cNvPr id="144" name="Text 142"/>
           <p:cNvSpPr/>
           <p:nvPr/>
         </p:nvSpPr>
@@ -12287,7 +11625,7 @@
       </p:sp>
       <p:sp>
         <p:nvSpPr>
-          <p:cNvPr id="165" name="Text 163"/>
+          <p:cNvPr id="145" name="Text 143"/>
           <p:cNvSpPr/>
           <p:nvPr/>
         </p:nvSpPr>
@@ -12328,7 +11666,7 @@
       </p:sp>
       <p:sp>
         <p:nvSpPr>
-          <p:cNvPr id="166" name="Text 164"/>
+          <p:cNvPr id="146" name="Text 144"/>
           <p:cNvSpPr/>
           <p:nvPr/>
         </p:nvSpPr>
@@ -12361,7 +11699,7 @@
                 <a:ea typeface="Arial" pitchFamily="34" charset="-122"/>
                 <a:cs typeface="Arial" pitchFamily="34" charset="-120"/>
               </a:rPr>
-              <a:t>26 أكتوبر</a:t>
+              <a:t>25 أكتوبر</a:t>
             </a:r>
             <a:endParaRPr lang="ar-SA" sz="850" dirty="0"/>
           </a:p>
@@ -12369,14 +11707,14 @@
       </p:sp>
       <p:sp>
         <p:nvSpPr>
-          <p:cNvPr id="167" name="Shape 165"/>
-          <p:cNvSpPr/>
-          <p:nvPr/>
-        </p:nvSpPr>
-        <p:spPr>
-          <a:xfrm>
-            <a:off x="3936842" y="2404872"/>
-            <a:ext cx="850258" cy="310896"/>
+          <p:cNvPr id="147" name="Shape 145"/>
+          <p:cNvSpPr/>
+          <p:nvPr/>
+        </p:nvSpPr>
+        <p:spPr>
+          <a:xfrm>
+            <a:off x="3834811" y="2404872"/>
+            <a:ext cx="770900" cy="310896"/>
           </a:xfrm>
           <a:prstGeom prst="roundRect">
             <a:avLst>
@@ -12403,14 +11741,14 @@
       </p:sp>
       <p:sp>
         <p:nvSpPr>
-          <p:cNvPr id="168" name="Text 166"/>
-          <p:cNvSpPr/>
-          <p:nvPr/>
-        </p:nvSpPr>
-        <p:spPr>
-          <a:xfrm>
-            <a:off x="3936842" y="2404872"/>
-            <a:ext cx="850258" cy="310896"/>
+          <p:cNvPr id="148" name="Text 146"/>
+          <p:cNvSpPr/>
+          <p:nvPr/>
+        </p:nvSpPr>
+        <p:spPr>
+          <a:xfrm>
+            <a:off x="3834811" y="2404872"/>
+            <a:ext cx="770900" cy="310896"/>
           </a:xfrm>
           <a:prstGeom prst="rect">
             <a:avLst/>
@@ -12444,7 +11782,7 @@
       </p:sp>
       <p:sp>
         <p:nvSpPr>
-          <p:cNvPr id="169" name="Shape 167"/>
+          <p:cNvPr id="149" name="Shape 147"/>
           <p:cNvSpPr/>
           <p:nvPr/>
         </p:nvSpPr>
@@ -12469,7 +11807,7 @@
       </p:sp>
       <p:sp>
         <p:nvSpPr>
-          <p:cNvPr id="170" name="Shape 168"/>
+          <p:cNvPr id="150" name="Shape 148"/>
           <p:cNvSpPr/>
           <p:nvPr/>
         </p:nvSpPr>
@@ -12494,7 +11832,7 @@
       </p:sp>
       <p:sp>
         <p:nvSpPr>
-          <p:cNvPr id="171" name="Text 169"/>
+          <p:cNvPr id="151" name="Text 149"/>
           <p:cNvSpPr/>
           <p:nvPr/>
         </p:nvSpPr>
@@ -12535,7 +11873,7 @@
       </p:sp>
       <p:sp>
         <p:nvSpPr>
-          <p:cNvPr id="172" name="Text 170"/>
+          <p:cNvPr id="152" name="Text 150"/>
           <p:cNvSpPr/>
           <p:nvPr/>
         </p:nvSpPr>
@@ -12576,7 +11914,7 @@
       </p:sp>
       <p:sp>
         <p:nvSpPr>
-          <p:cNvPr id="173" name="Text 171"/>
+          <p:cNvPr id="153" name="Text 151"/>
           <p:cNvSpPr/>
           <p:nvPr/>
         </p:nvSpPr>
@@ -12617,7 +11955,7 @@
       </p:sp>
       <p:sp>
         <p:nvSpPr>
-          <p:cNvPr id="174" name="Text 172"/>
+          <p:cNvPr id="154" name="Text 152"/>
           <p:cNvSpPr/>
           <p:nvPr/>
         </p:nvSpPr>
@@ -12658,7 +11996,7 @@
       </p:sp>
       <p:sp>
         <p:nvSpPr>
-          <p:cNvPr id="175" name="Text 173"/>
+          <p:cNvPr id="155" name="Text 153"/>
           <p:cNvSpPr/>
           <p:nvPr/>
         </p:nvSpPr>
@@ -12691,7 +12029,7 @@
                 <a:ea typeface="Arial" pitchFamily="34" charset="-122"/>
                 <a:cs typeface="Arial" pitchFamily="34" charset="-120"/>
               </a:rPr>
-              <a:t>27 أكتوبر</a:t>
+              <a:t>26 أكتوبر</a:t>
             </a:r>
             <a:endParaRPr lang="ar-SA" sz="850" dirty="0"/>
           </a:p>
@@ -12699,7 +12037,7 @@
       </p:sp>
       <p:sp>
         <p:nvSpPr>
-          <p:cNvPr id="176" name="Text 174"/>
+          <p:cNvPr id="156" name="Text 154"/>
           <p:cNvSpPr/>
           <p:nvPr/>
         </p:nvSpPr>
@@ -12732,7 +12070,7 @@
                 <a:ea typeface="Arial" pitchFamily="34" charset="-122"/>
                 <a:cs typeface="Arial" pitchFamily="34" charset="-120"/>
               </a:rPr>
-              <a:t>11 نوفمبر</a:t>
+              <a:t>8 نوفمبر</a:t>
             </a:r>
             <a:endParaRPr lang="ar-SA" sz="850" dirty="0"/>
           </a:p>
@@ -12740,14 +12078,14 @@
       </p:sp>
       <p:sp>
         <p:nvSpPr>
-          <p:cNvPr id="177" name="Shape 175"/>
-          <p:cNvSpPr/>
-          <p:nvPr/>
-        </p:nvSpPr>
-        <p:spPr>
-          <a:xfrm>
-            <a:off x="1216018" y="3044952"/>
-            <a:ext cx="2720824" cy="310896"/>
+          <p:cNvPr id="157" name="Shape 155"/>
+          <p:cNvSpPr/>
+          <p:nvPr/>
+        </p:nvSpPr>
+        <p:spPr>
+          <a:xfrm>
+            <a:off x="1136660" y="3044952"/>
+            <a:ext cx="2698151" cy="310896"/>
           </a:xfrm>
           <a:prstGeom prst="roundRect">
             <a:avLst>
@@ -12774,14 +12112,14 @@
       </p:sp>
       <p:sp>
         <p:nvSpPr>
-          <p:cNvPr id="178" name="Text 176"/>
-          <p:cNvSpPr/>
-          <p:nvPr/>
-        </p:nvSpPr>
-        <p:spPr>
-          <a:xfrm>
-            <a:off x="1216018" y="3044952"/>
-            <a:ext cx="2720824" cy="310896"/>
+          <p:cNvPr id="158" name="Text 156"/>
+          <p:cNvSpPr/>
+          <p:nvPr/>
+        </p:nvSpPr>
+        <p:spPr>
+          <a:xfrm>
+            <a:off x="1136660" y="3044952"/>
+            <a:ext cx="2698151" cy="310896"/>
           </a:xfrm>
           <a:prstGeom prst="rect">
             <a:avLst/>
@@ -12815,7 +12153,7 @@
       </p:sp>
       <p:sp>
         <p:nvSpPr>
-          <p:cNvPr id="179" name="Shape 177"/>
+          <p:cNvPr id="159" name="Shape 157"/>
           <p:cNvSpPr/>
           <p:nvPr/>
         </p:nvSpPr>
@@ -12840,7 +12178,7 @@
       </p:sp>
       <p:sp>
         <p:nvSpPr>
-          <p:cNvPr id="180" name="Shape 178"/>
+          <p:cNvPr id="160" name="Shape 158"/>
           <p:cNvSpPr/>
           <p:nvPr/>
         </p:nvSpPr>
@@ -12865,7 +12203,7 @@
       </p:sp>
       <p:sp>
         <p:nvSpPr>
-          <p:cNvPr id="181" name="Text 179"/>
+          <p:cNvPr id="161" name="Text 159"/>
           <p:cNvSpPr/>
           <p:nvPr/>
         </p:nvSpPr>
@@ -12906,7 +12244,7 @@
       </p:sp>
       <p:sp>
         <p:nvSpPr>
-          <p:cNvPr id="182" name="Text 180"/>
+          <p:cNvPr id="162" name="Text 160"/>
           <p:cNvSpPr/>
           <p:nvPr/>
         </p:nvSpPr>
@@ -12947,7 +12285,7 @@
       </p:sp>
       <p:sp>
         <p:nvSpPr>
-          <p:cNvPr id="183" name="Text 181"/>
+          <p:cNvPr id="163" name="Text 161"/>
           <p:cNvSpPr/>
           <p:nvPr/>
         </p:nvSpPr>
@@ -12988,7 +12326,7 @@
       </p:sp>
       <p:sp>
         <p:nvSpPr>
-          <p:cNvPr id="184" name="Text 182"/>
+          <p:cNvPr id="164" name="Text 162"/>
           <p:cNvSpPr/>
           <p:nvPr/>
         </p:nvSpPr>
@@ -13029,7 +12367,7 @@
       </p:sp>
       <p:sp>
         <p:nvSpPr>
-          <p:cNvPr id="185" name="Text 183"/>
+          <p:cNvPr id="165" name="Text 163"/>
           <p:cNvSpPr/>
           <p:nvPr/>
         </p:nvSpPr>
@@ -13062,7 +12400,7 @@
                 <a:ea typeface="Arial" pitchFamily="34" charset="-122"/>
                 <a:cs typeface="Arial" pitchFamily="34" charset="-120"/>
               </a:rPr>
-              <a:t>12 نوفمبر</a:t>
+              <a:t>9 نوفمبر</a:t>
             </a:r>
             <a:endParaRPr lang="ar-SA" sz="850" dirty="0"/>
           </a:p>
@@ -13070,7 +12408,7 @@
       </p:sp>
       <p:sp>
         <p:nvSpPr>
-          <p:cNvPr id="186" name="Text 184"/>
+          <p:cNvPr id="166" name="Text 164"/>
           <p:cNvSpPr/>
           <p:nvPr/>
         </p:nvSpPr>
@@ -13103,7 +12441,7 @@
                 <a:ea typeface="Arial" pitchFamily="34" charset="-122"/>
                 <a:cs typeface="Arial" pitchFamily="34" charset="-120"/>
               </a:rPr>
-              <a:t>14 نوفمبر</a:t>
+              <a:t>10 نوفمبر</a:t>
             </a:r>
             <a:endParaRPr lang="ar-SA" sz="850" dirty="0"/>
           </a:p>
@@ -13111,14 +12449,14 @@
       </p:sp>
       <p:sp>
         <p:nvSpPr>
-          <p:cNvPr id="187" name="Shape 185"/>
-          <p:cNvSpPr/>
-          <p:nvPr/>
-        </p:nvSpPr>
-        <p:spPr>
-          <a:xfrm>
-            <a:off x="705863" y="3685032"/>
-            <a:ext cx="510155" cy="310896"/>
+          <p:cNvPr id="167" name="Shape 165"/>
+          <p:cNvSpPr/>
+          <p:nvPr/>
+        </p:nvSpPr>
+        <p:spPr>
+          <a:xfrm>
+            <a:off x="751210" y="3685032"/>
+            <a:ext cx="385450" cy="310896"/>
           </a:xfrm>
           <a:prstGeom prst="roundRect">
             <a:avLst>
@@ -13145,14 +12483,14 @@
       </p:sp>
       <p:sp>
         <p:nvSpPr>
-          <p:cNvPr id="188" name="Text 186"/>
-          <p:cNvSpPr/>
-          <p:nvPr/>
-        </p:nvSpPr>
-        <p:spPr>
-          <a:xfrm>
-            <a:off x="705863" y="3685032"/>
-            <a:ext cx="510155" cy="310896"/>
+          <p:cNvPr id="168" name="Text 166"/>
+          <p:cNvSpPr/>
+          <p:nvPr/>
+        </p:nvSpPr>
+        <p:spPr>
+          <a:xfrm>
+            <a:off x="751210" y="3685032"/>
+            <a:ext cx="385450" cy="310896"/>
           </a:xfrm>
           <a:prstGeom prst="rect">
             <a:avLst/>
@@ -13186,13 +12524,13 @@
       </p:sp>
       <p:sp>
         <p:nvSpPr>
-          <p:cNvPr id="189" name="Shape 187"/>
-          <p:cNvSpPr/>
-          <p:nvPr/>
-        </p:nvSpPr>
-        <p:spPr>
-          <a:xfrm>
-            <a:off x="3936842" y="2560320"/>
+          <p:cNvPr id="169" name="Shape 167"/>
+          <p:cNvSpPr/>
+          <p:nvPr/>
+        </p:nvSpPr>
+        <p:spPr>
+          <a:xfrm>
+            <a:off x="3834811" y="2560320"/>
             <a:ext cx="45720" cy="0"/>
           </a:xfrm>
           <a:prstGeom prst="line">
@@ -13209,13 +12547,13 @@
       </p:sp>
       <p:sp>
         <p:nvSpPr>
-          <p:cNvPr id="190" name="Shape 188"/>
-          <p:cNvSpPr/>
-          <p:nvPr/>
-        </p:nvSpPr>
-        <p:spPr>
-          <a:xfrm>
-            <a:off x="3982562" y="2560320"/>
+          <p:cNvPr id="170" name="Shape 168"/>
+          <p:cNvSpPr/>
+          <p:nvPr/>
+        </p:nvSpPr>
+        <p:spPr>
+          <a:xfrm>
+            <a:off x="3880531" y="2560320"/>
             <a:ext cx="0" cy="640080"/>
           </a:xfrm>
           <a:prstGeom prst="line">
@@ -13232,13 +12570,13 @@
       </p:sp>
       <p:sp>
         <p:nvSpPr>
-          <p:cNvPr id="191" name="Shape 189"/>
+          <p:cNvPr id="171" name="Shape 169"/>
           <p:cNvSpPr/>
           <p:nvPr/>
         </p:nvSpPr>
         <p:spPr>
           <a:xfrm flipH="1">
-            <a:off x="3945986" y="3200400"/>
+            <a:off x="3843955" y="3200400"/>
             <a:ext cx="36576" cy="0"/>
           </a:xfrm>
           <a:prstGeom prst="line">
@@ -13256,13 +12594,13 @@
       </p:sp>
       <p:sp>
         <p:nvSpPr>
-          <p:cNvPr id="192" name="Shape 190"/>
-          <p:cNvSpPr/>
-          <p:nvPr/>
-        </p:nvSpPr>
-        <p:spPr>
-          <a:xfrm>
-            <a:off x="1216018" y="3200400"/>
+          <p:cNvPr id="172" name="Shape 170"/>
+          <p:cNvSpPr/>
+          <p:nvPr/>
+        </p:nvSpPr>
+        <p:spPr>
+          <a:xfrm>
+            <a:off x="1136660" y="3200400"/>
             <a:ext cx="45720" cy="0"/>
           </a:xfrm>
           <a:prstGeom prst="line">
@@ -13279,13 +12617,13 @@
       </p:sp>
       <p:sp>
         <p:nvSpPr>
-          <p:cNvPr id="193" name="Shape 191"/>
-          <p:cNvSpPr/>
-          <p:nvPr/>
-        </p:nvSpPr>
-        <p:spPr>
-          <a:xfrm>
-            <a:off x="1261738" y="3200400"/>
+          <p:cNvPr id="173" name="Shape 171"/>
+          <p:cNvSpPr/>
+          <p:nvPr/>
+        </p:nvSpPr>
+        <p:spPr>
+          <a:xfrm>
+            <a:off x="1182380" y="3200400"/>
             <a:ext cx="0" cy="640080"/>
           </a:xfrm>
           <a:prstGeom prst="line">
@@ -13302,13 +12640,13 @@
       </p:sp>
       <p:sp>
         <p:nvSpPr>
-          <p:cNvPr id="194" name="Shape 192"/>
+          <p:cNvPr id="174" name="Shape 172"/>
           <p:cNvSpPr/>
           <p:nvPr/>
         </p:nvSpPr>
         <p:spPr>
           <a:xfrm flipH="1">
-            <a:off x="1225162" y="3840480"/>
+            <a:off x="1145804" y="3840480"/>
             <a:ext cx="36576" cy="0"/>
           </a:xfrm>
           <a:prstGeom prst="line">
@@ -13326,13 +12664,13 @@
       </p:sp>
       <p:sp>
         <p:nvSpPr>
-          <p:cNvPr id="195" name="Shape 193"/>
-          <p:cNvSpPr/>
-          <p:nvPr/>
-        </p:nvSpPr>
-        <p:spPr>
-          <a:xfrm>
-            <a:off x="4872125" y="1947672"/>
+          <p:cNvPr id="175" name="Shape 173"/>
+          <p:cNvSpPr/>
+          <p:nvPr/>
+        </p:nvSpPr>
+        <p:spPr>
+          <a:xfrm>
+            <a:off x="4702073" y="1947672"/>
             <a:ext cx="0" cy="2212848"/>
           </a:xfrm>
           <a:prstGeom prst="line">
@@ -13349,13 +12687,13 @@
       </p:sp>
       <p:sp>
         <p:nvSpPr>
-          <p:cNvPr id="196" name="Shape 194"/>
-          <p:cNvSpPr/>
-          <p:nvPr/>
-        </p:nvSpPr>
-        <p:spPr>
-          <a:xfrm>
-            <a:off x="4899557" y="2020824"/>
+          <p:cNvPr id="176" name="Shape 174"/>
+          <p:cNvSpPr/>
+          <p:nvPr/>
+        </p:nvSpPr>
+        <p:spPr>
+          <a:xfrm>
+            <a:off x="4729505" y="2020824"/>
             <a:ext cx="841248" cy="155448"/>
           </a:xfrm>
           <a:prstGeom prst="roundRect">
@@ -13376,13 +12714,13 @@
       </p:sp>
       <p:sp>
         <p:nvSpPr>
-          <p:cNvPr id="197" name="Text 195"/>
-          <p:cNvSpPr/>
-          <p:nvPr/>
-        </p:nvSpPr>
-        <p:spPr>
-          <a:xfrm>
-            <a:off x="4899557" y="2020824"/>
+          <p:cNvPr id="177" name="Text 175"/>
+          <p:cNvSpPr/>
+          <p:nvPr/>
+        </p:nvSpPr>
+        <p:spPr>
+          <a:xfrm>
+            <a:off x="4729505" y="2020824"/>
             <a:ext cx="841248" cy="155448"/>
           </a:xfrm>
           <a:prstGeom prst="rect">
@@ -13417,7 +12755,7 @@
       </p:sp>
       <p:sp>
         <p:nvSpPr>
-          <p:cNvPr id="198" name="Shape 196"/>
+          <p:cNvPr id="178" name="Shape 176"/>
           <p:cNvSpPr/>
           <p:nvPr/>
         </p:nvSpPr>
@@ -13444,7 +12782,7 @@
       </p:sp>
       <p:sp>
         <p:nvSpPr>
-          <p:cNvPr id="199" name="Shape 197"/>
+          <p:cNvPr id="179" name="Shape 177"/>
           <p:cNvSpPr/>
           <p:nvPr/>
         </p:nvSpPr>
@@ -13478,7 +12816,7 @@
       </p:sp>
       <p:sp>
         <p:nvSpPr>
-          <p:cNvPr id="200" name="Shape 198"/>
+          <p:cNvPr id="180" name="Shape 178"/>
           <p:cNvSpPr/>
           <p:nvPr/>
         </p:nvSpPr>
@@ -13503,7 +12841,7 @@
       </p:sp>
       <p:sp>
         <p:nvSpPr>
-          <p:cNvPr id="201" name="Text 199"/>
+          <p:cNvPr id="181" name="Text 179"/>
           <p:cNvSpPr/>
           <p:nvPr/>
         </p:nvSpPr>
@@ -13544,7 +12882,7 @@
       </p:sp>
       <p:sp>
         <p:nvSpPr>
-          <p:cNvPr id="202" name="Text 200"/>
+          <p:cNvPr id="182" name="Text 180"/>
           <p:cNvSpPr/>
           <p:nvPr/>
         </p:nvSpPr>
@@ -13585,7 +12923,7 @@
       </p:sp>
       <p:sp>
         <p:nvSpPr>
-          <p:cNvPr id="203" name="Text 201"/>
+          <p:cNvPr id="183" name="Text 181"/>
           <p:cNvSpPr/>
           <p:nvPr/>
         </p:nvSpPr>
@@ -13626,7 +12964,7 @@
       </p:sp>
       <p:sp>
         <p:nvSpPr>
-          <p:cNvPr id="204" name="Shape 202"/>
+          <p:cNvPr id="184" name="Shape 182"/>
           <p:cNvSpPr/>
           <p:nvPr/>
         </p:nvSpPr>
@@ -13660,7 +12998,7 @@
       </p:sp>
       <p:sp>
         <p:nvSpPr>
-          <p:cNvPr id="205" name="Shape 203"/>
+          <p:cNvPr id="185" name="Shape 183"/>
           <p:cNvSpPr/>
           <p:nvPr/>
         </p:nvSpPr>
@@ -13685,7 +13023,7 @@
       </p:sp>
       <p:sp>
         <p:nvSpPr>
-          <p:cNvPr id="206" name="Text 204"/>
+          <p:cNvPr id="186" name="Text 184"/>
           <p:cNvSpPr/>
           <p:nvPr/>
         </p:nvSpPr>
@@ -13726,7 +13064,7 @@
       </p:sp>
       <p:sp>
         <p:nvSpPr>
-          <p:cNvPr id="207" name="Text 205"/>
+          <p:cNvPr id="187" name="Text 185"/>
           <p:cNvSpPr/>
           <p:nvPr/>
         </p:nvSpPr>
@@ -13759,7 +13097,7 @@
                 <a:ea typeface="Arial" pitchFamily="34" charset="-122"/>
                 <a:cs typeface="Arial" pitchFamily="34" charset="-120"/>
               </a:rPr>
-              <a:t>اثنين 26 أكتوبر 2026</a:t>
+              <a:t>أحد 25 أكتوبر 2026</a:t>
             </a:r>
             <a:endParaRPr lang="ar-SA" sz="1300" dirty="0"/>
           </a:p>
@@ -13767,7 +13105,7 @@
       </p:sp>
       <p:sp>
         <p:nvSpPr>
-          <p:cNvPr id="208" name="Text 206"/>
+          <p:cNvPr id="188" name="Text 186"/>
           <p:cNvSpPr/>
           <p:nvPr/>
         </p:nvSpPr>
@@ -13808,7 +13146,7 @@
       </p:sp>
       <p:sp>
         <p:nvSpPr>
-          <p:cNvPr id="209" name="Shape 207"/>
+          <p:cNvPr id="189" name="Shape 187"/>
           <p:cNvSpPr/>
           <p:nvPr/>
         </p:nvSpPr>
@@ -13842,7 +13180,7 @@
       </p:sp>
       <p:sp>
         <p:nvSpPr>
-          <p:cNvPr id="210" name="Shape 208"/>
+          <p:cNvPr id="190" name="Shape 188"/>
           <p:cNvSpPr/>
           <p:nvPr/>
         </p:nvSpPr>
@@ -13867,7 +13205,7 @@
       </p:sp>
       <p:sp>
         <p:nvSpPr>
-          <p:cNvPr id="211" name="Text 209"/>
+          <p:cNvPr id="191" name="Text 189"/>
           <p:cNvSpPr/>
           <p:nvPr/>
         </p:nvSpPr>
@@ -13908,7 +13246,7 @@
       </p:sp>
       <p:sp>
         <p:nvSpPr>
-          <p:cNvPr id="212" name="Text 210"/>
+          <p:cNvPr id="192" name="Text 190"/>
           <p:cNvSpPr/>
           <p:nvPr/>
         </p:nvSpPr>
@@ -13941,7 +13279,7 @@
                 <a:ea typeface="Arial" pitchFamily="34" charset="-122"/>
                 <a:cs typeface="Arial" pitchFamily="34" charset="-120"/>
               </a:rPr>
-              <a:t>أربعاء 11 نوفمبر 2026</a:t>
+              <a:t>أحد 8 نوفمبر 2026</a:t>
             </a:r>
             <a:endParaRPr lang="ar-SA" sz="1300" dirty="0"/>
           </a:p>
@@ -13949,7 +13287,7 @@
       </p:sp>
       <p:sp>
         <p:nvSpPr>
-          <p:cNvPr id="213" name="Text 211"/>
+          <p:cNvPr id="193" name="Text 191"/>
           <p:cNvSpPr/>
           <p:nvPr/>
         </p:nvSpPr>
@@ -13990,7 +13328,7 @@
       </p:sp>
       <p:sp>
         <p:nvSpPr>
-          <p:cNvPr id="214" name="Shape 212"/>
+          <p:cNvPr id="194" name="Shape 192"/>
           <p:cNvSpPr/>
           <p:nvPr/>
         </p:nvSpPr>
@@ -14024,7 +13362,7 @@
       </p:sp>
       <p:sp>
         <p:nvSpPr>
-          <p:cNvPr id="215" name="Shape 213"/>
+          <p:cNvPr id="195" name="Shape 193"/>
           <p:cNvSpPr/>
           <p:nvPr/>
         </p:nvSpPr>
@@ -14049,7 +13387,7 @@
       </p:sp>
       <p:sp>
         <p:nvSpPr>
-          <p:cNvPr id="216" name="Text 214"/>
+          <p:cNvPr id="196" name="Text 194"/>
           <p:cNvSpPr/>
           <p:nvPr/>
         </p:nvSpPr>
@@ -14090,7 +13428,7 @@
       </p:sp>
       <p:sp>
         <p:nvSpPr>
-          <p:cNvPr id="217" name="Text 215"/>
+          <p:cNvPr id="197" name="Text 195"/>
           <p:cNvSpPr/>
           <p:nvPr/>
         </p:nvSpPr>
@@ -14123,7 +13461,7 @@
                 <a:ea typeface="Arial" pitchFamily="34" charset="-122"/>
                 <a:cs typeface="Arial" pitchFamily="34" charset="-120"/>
               </a:rPr>
-              <a:t>سبت 14 نوفمبر 2026</a:t>
+              <a:t>ثلاثاء 10 نوفمبر 2026</a:t>
             </a:r>
             <a:endParaRPr lang="ar-SA" sz="1300" dirty="0"/>
           </a:p>
@@ -14131,7 +13469,7 @@
       </p:sp>
       <p:sp>
         <p:nvSpPr>
-          <p:cNvPr id="218" name="Text 216"/>
+          <p:cNvPr id="198" name="Text 196"/>
           <p:cNvSpPr/>
           <p:nvPr/>
         </p:nvSpPr>
